--- a/pptx/data_statistics.pptx
+++ b/pptx/data_statistics.pptx
@@ -6,6 +6,7 @@
   </p:sldMasterIdLst>
   <p:sldIdLst>
     <p:sldId id="256" r:id="rId2"/>
+    <p:sldId id="257" r:id="rId3"/>
   </p:sldIdLst>
   <p:sldSz cx="23760113" cy="18000663"/>
   <p:notesSz cx="6858000" cy="9144000"/>
@@ -104,6 +105,11 @@
       </a:defRPr>
     </a:lvl9pPr>
   </p:defaultTextStyle>
+  <p:extLst>
+    <p:ext uri="{EFAFB233-063F-42B5-8137-9DF3F51BA10A}">
+      <p15:sldGuideLst xmlns:p15="http://schemas.microsoft.com/office/powerpoint/2012/main"/>
+    </p:ext>
+  </p:extLst>
 </p:presentation>
 </file>
 
@@ -3720,6 +3726,42 @@
 </p:sld>
 </file>
 
+<file path=ppt/slides/slide2.xml><?xml version="1.0" encoding="utf-8"?>
+<p:sld xmlns:a="http://schemas.openxmlformats.org/drawingml/2006/main" xmlns:r="http://schemas.openxmlformats.org/officeDocument/2006/relationships" xmlns:p="http://schemas.openxmlformats.org/presentationml/2006/main">
+  <p:cSld>
+    <p:spTree>
+      <p:nvGrpSpPr>
+        <p:cNvPr id="1" name="">
+          <a:extLst>
+            <a:ext uri="{FF2B5EF4-FFF2-40B4-BE49-F238E27FC236}">
+              <a16:creationId xmlns:a16="http://schemas.microsoft.com/office/drawing/2014/main" id="{537EEC1B-512A-3C49-6BE6-95706A233DEA}"/>
+            </a:ext>
+          </a:extLst>
+        </p:cNvPr>
+        <p:cNvGrpSpPr/>
+        <p:nvPr/>
+      </p:nvGrpSpPr>
+      <p:grpSpPr>
+        <a:xfrm>
+          <a:off x="0" y="0"/>
+          <a:ext cx="0" cy="0"/>
+          <a:chOff x="0" y="0"/>
+          <a:chExt cx="0" cy="0"/>
+        </a:xfrm>
+      </p:grpSpPr>
+    </p:spTree>
+    <p:extLst>
+      <p:ext uri="{BB962C8B-B14F-4D97-AF65-F5344CB8AC3E}">
+        <p14:creationId xmlns:p14="http://schemas.microsoft.com/office/powerpoint/2010/main" val="48238024"/>
+      </p:ext>
+    </p:extLst>
+  </p:cSld>
+  <p:clrMapOvr>
+    <a:masterClrMapping/>
+  </p:clrMapOvr>
+</p:sld>
+</file>
+
 <file path=ppt/theme/theme1.xml><?xml version="1.0" encoding="utf-8"?>
 <a:theme xmlns:a="http://schemas.openxmlformats.org/drawingml/2006/main" name="Office 主题​​">
   <a:themeElements>

--- a/pptx/data_statistics.pptx
+++ b/pptx/data_statistics.pptx
@@ -4,6 +4,9 @@
   <p:sldMasterIdLst>
     <p:sldMasterId id="2147483660" r:id="rId1"/>
   </p:sldMasterIdLst>
+  <p:notesMasterIdLst>
+    <p:notesMasterId r:id="rId4"/>
+  </p:notesMasterIdLst>
   <p:sldIdLst>
     <p:sldId id="256" r:id="rId2"/>
     <p:sldId id="257" r:id="rId3"/>
@@ -111,6 +114,439 @@
     </p:ext>
   </p:extLst>
 </p:presentation>
+</file>
+
+<file path=ppt/notesMasters/notesMaster1.xml><?xml version="1.0" encoding="utf-8"?>
+<p:notesMaster xmlns:a="http://schemas.openxmlformats.org/drawingml/2006/main" xmlns:r="http://schemas.openxmlformats.org/officeDocument/2006/relationships" xmlns:p="http://schemas.openxmlformats.org/presentationml/2006/main">
+  <p:cSld>
+    <p:bg>
+      <p:bgRef idx="1001">
+        <a:schemeClr val="bg1"/>
+      </p:bgRef>
+    </p:bg>
+    <p:spTree>
+      <p:nvGrpSpPr>
+        <p:cNvPr id="1" name=""/>
+        <p:cNvGrpSpPr/>
+        <p:nvPr/>
+      </p:nvGrpSpPr>
+      <p:grpSpPr>
+        <a:xfrm>
+          <a:off x="0" y="0"/>
+          <a:ext cx="0" cy="0"/>
+          <a:chOff x="0" y="0"/>
+          <a:chExt cx="0" cy="0"/>
+        </a:xfrm>
+      </p:grpSpPr>
+      <p:sp>
+        <p:nvSpPr>
+          <p:cNvPr id="2" name="页眉占位符 1"/>
+          <p:cNvSpPr>
+            <a:spLocks noGrp="1"/>
+          </p:cNvSpPr>
+          <p:nvPr>
+            <p:ph type="hdr" sz="quarter"/>
+          </p:nvPr>
+        </p:nvSpPr>
+        <p:spPr>
+          <a:xfrm>
+            <a:off x="0" y="0"/>
+            <a:ext cx="2971800" cy="458788"/>
+          </a:xfrm>
+          <a:prstGeom prst="rect">
+            <a:avLst/>
+          </a:prstGeom>
+        </p:spPr>
+        <p:txBody>
+          <a:bodyPr vert="horz" lIns="91440" tIns="45720" rIns="91440" bIns="45720" rtlCol="0"/>
+          <a:lstStyle>
+            <a:lvl1pPr algn="l">
+              <a:defRPr sz="1200"/>
+            </a:lvl1pPr>
+          </a:lstStyle>
+          <a:p>
+            <a:endParaRPr kumimoji="1" lang="zh-CN" altLang="en-US"/>
+          </a:p>
+        </p:txBody>
+      </p:sp>
+      <p:sp>
+        <p:nvSpPr>
+          <p:cNvPr id="3" name="日期占位符 2"/>
+          <p:cNvSpPr>
+            <a:spLocks noGrp="1"/>
+          </p:cNvSpPr>
+          <p:nvPr>
+            <p:ph type="dt" idx="1"/>
+          </p:nvPr>
+        </p:nvSpPr>
+        <p:spPr>
+          <a:xfrm>
+            <a:off x="3884613" y="0"/>
+            <a:ext cx="2971800" cy="458788"/>
+          </a:xfrm>
+          <a:prstGeom prst="rect">
+            <a:avLst/>
+          </a:prstGeom>
+        </p:spPr>
+        <p:txBody>
+          <a:bodyPr vert="horz" lIns="91440" tIns="45720" rIns="91440" bIns="45720" rtlCol="0"/>
+          <a:lstStyle>
+            <a:lvl1pPr algn="r">
+              <a:defRPr sz="1200"/>
+            </a:lvl1pPr>
+          </a:lstStyle>
+          <a:p>
+            <a:fld id="{082B1127-B745-0849-B4DE-90186D8D1D7E}" type="datetimeFigureOut">
+              <a:rPr kumimoji="1" lang="zh-CN" altLang="en-US" smtClean="0"/>
+              <a:t>2026/6/19</a:t>
+            </a:fld>
+            <a:endParaRPr kumimoji="1" lang="zh-CN" altLang="en-US"/>
+          </a:p>
+        </p:txBody>
+      </p:sp>
+      <p:sp>
+        <p:nvSpPr>
+          <p:cNvPr id="4" name="幻灯片图像占位符 3"/>
+          <p:cNvSpPr>
+            <a:spLocks noGrp="1" noRot="1" noChangeAspect="1"/>
+          </p:cNvSpPr>
+          <p:nvPr>
+            <p:ph type="sldImg" idx="2"/>
+          </p:nvPr>
+        </p:nvSpPr>
+        <p:spPr>
+          <a:xfrm>
+            <a:off x="1392238" y="1143000"/>
+            <a:ext cx="4073525" cy="3086100"/>
+          </a:xfrm>
+          <a:prstGeom prst="rect">
+            <a:avLst/>
+          </a:prstGeom>
+          <a:noFill/>
+          <a:ln w="12700">
+            <a:solidFill>
+              <a:prstClr val="black"/>
+            </a:solidFill>
+          </a:ln>
+        </p:spPr>
+        <p:txBody>
+          <a:bodyPr vert="horz" lIns="91440" tIns="45720" rIns="91440" bIns="45720" rtlCol="0" anchor="ctr"/>
+          <a:lstStyle/>
+          <a:p>
+            <a:endParaRPr lang="zh-CN" altLang="en-US"/>
+          </a:p>
+        </p:txBody>
+      </p:sp>
+      <p:sp>
+        <p:nvSpPr>
+          <p:cNvPr id="5" name="备注占位符 4"/>
+          <p:cNvSpPr>
+            <a:spLocks noGrp="1"/>
+          </p:cNvSpPr>
+          <p:nvPr>
+            <p:ph type="body" sz="quarter" idx="3"/>
+          </p:nvPr>
+        </p:nvSpPr>
+        <p:spPr>
+          <a:xfrm>
+            <a:off x="685800" y="4400550"/>
+            <a:ext cx="5486400" cy="3600450"/>
+          </a:xfrm>
+          <a:prstGeom prst="rect">
+            <a:avLst/>
+          </a:prstGeom>
+        </p:spPr>
+        <p:txBody>
+          <a:bodyPr vert="horz" lIns="91440" tIns="45720" rIns="91440" bIns="45720" rtlCol="0"/>
+          <a:lstStyle/>
+          <a:p>
+            <a:pPr lvl="0"/>
+            <a:r>
+              <a:rPr kumimoji="1" lang="zh-CN" altLang="en-US"/>
+              <a:t>单击此处编辑母版文本样式</a:t>
+            </a:r>
+          </a:p>
+          <a:p>
+            <a:pPr lvl="1"/>
+            <a:r>
+              <a:rPr kumimoji="1" lang="zh-CN" altLang="en-US"/>
+              <a:t>二级</a:t>
+            </a:r>
+          </a:p>
+          <a:p>
+            <a:pPr lvl="2"/>
+            <a:r>
+              <a:rPr kumimoji="1" lang="zh-CN" altLang="en-US"/>
+              <a:t>三级</a:t>
+            </a:r>
+          </a:p>
+          <a:p>
+            <a:pPr lvl="3"/>
+            <a:r>
+              <a:rPr kumimoji="1" lang="zh-CN" altLang="en-US"/>
+              <a:t>四级</a:t>
+            </a:r>
+          </a:p>
+          <a:p>
+            <a:pPr lvl="4"/>
+            <a:r>
+              <a:rPr kumimoji="1" lang="zh-CN" altLang="en-US"/>
+              <a:t>五级</a:t>
+            </a:r>
+          </a:p>
+        </p:txBody>
+      </p:sp>
+      <p:sp>
+        <p:nvSpPr>
+          <p:cNvPr id="6" name="页脚占位符 5"/>
+          <p:cNvSpPr>
+            <a:spLocks noGrp="1"/>
+          </p:cNvSpPr>
+          <p:nvPr>
+            <p:ph type="ftr" sz="quarter" idx="4"/>
+          </p:nvPr>
+        </p:nvSpPr>
+        <p:spPr>
+          <a:xfrm>
+            <a:off x="0" y="8685213"/>
+            <a:ext cx="2971800" cy="458787"/>
+          </a:xfrm>
+          <a:prstGeom prst="rect">
+            <a:avLst/>
+          </a:prstGeom>
+        </p:spPr>
+        <p:txBody>
+          <a:bodyPr vert="horz" lIns="91440" tIns="45720" rIns="91440" bIns="45720" rtlCol="0" anchor="b"/>
+          <a:lstStyle>
+            <a:lvl1pPr algn="l">
+              <a:defRPr sz="1200"/>
+            </a:lvl1pPr>
+          </a:lstStyle>
+          <a:p>
+            <a:endParaRPr kumimoji="1" lang="zh-CN" altLang="en-US"/>
+          </a:p>
+        </p:txBody>
+      </p:sp>
+      <p:sp>
+        <p:nvSpPr>
+          <p:cNvPr id="7" name="灯片编号占位符 6"/>
+          <p:cNvSpPr>
+            <a:spLocks noGrp="1"/>
+          </p:cNvSpPr>
+          <p:nvPr>
+            <p:ph type="sldNum" sz="quarter" idx="5"/>
+          </p:nvPr>
+        </p:nvSpPr>
+        <p:spPr>
+          <a:xfrm>
+            <a:off x="3884613" y="8685213"/>
+            <a:ext cx="2971800" cy="458787"/>
+          </a:xfrm>
+          <a:prstGeom prst="rect">
+            <a:avLst/>
+          </a:prstGeom>
+        </p:spPr>
+        <p:txBody>
+          <a:bodyPr vert="horz" lIns="91440" tIns="45720" rIns="91440" bIns="45720" rtlCol="0" anchor="b"/>
+          <a:lstStyle>
+            <a:lvl1pPr algn="r">
+              <a:defRPr sz="1200"/>
+            </a:lvl1pPr>
+          </a:lstStyle>
+          <a:p>
+            <a:fld id="{3EB3BADC-B76F-7A4B-9A8D-CCDCA140DB71}" type="slidenum">
+              <a:rPr kumimoji="1" lang="zh-CN" altLang="en-US" smtClean="0"/>
+              <a:t>‹#›</a:t>
+            </a:fld>
+            <a:endParaRPr kumimoji="1" lang="zh-CN" altLang="en-US"/>
+          </a:p>
+        </p:txBody>
+      </p:sp>
+    </p:spTree>
+    <p:extLst>
+      <p:ext uri="{BB962C8B-B14F-4D97-AF65-F5344CB8AC3E}">
+        <p14:creationId xmlns:p14="http://schemas.microsoft.com/office/powerpoint/2010/main" val="2402623628"/>
+      </p:ext>
+    </p:extLst>
+  </p:cSld>
+  <p:clrMap bg1="lt1" tx1="dk1" bg2="lt2" tx2="dk2" accent1="accent1" accent2="accent2" accent3="accent3" accent4="accent4" accent5="accent5" accent6="accent6" hlink="hlink" folHlink="folHlink"/>
+  <p:notesStyle>
+    <a:lvl1pPr marL="0" algn="l" defTabSz="914400" rtl="0" eaLnBrk="1" latinLnBrk="0" hangingPunct="1">
+      <a:defRPr sz="1200" kern="1200">
+        <a:solidFill>
+          <a:schemeClr val="tx1"/>
+        </a:solidFill>
+        <a:latin typeface="+mn-lt"/>
+        <a:ea typeface="+mn-ea"/>
+        <a:cs typeface="+mn-cs"/>
+      </a:defRPr>
+    </a:lvl1pPr>
+    <a:lvl2pPr marL="457200" algn="l" defTabSz="914400" rtl="0" eaLnBrk="1" latinLnBrk="0" hangingPunct="1">
+      <a:defRPr sz="1200" kern="1200">
+        <a:solidFill>
+          <a:schemeClr val="tx1"/>
+        </a:solidFill>
+        <a:latin typeface="+mn-lt"/>
+        <a:ea typeface="+mn-ea"/>
+        <a:cs typeface="+mn-cs"/>
+      </a:defRPr>
+    </a:lvl2pPr>
+    <a:lvl3pPr marL="914400" algn="l" defTabSz="914400" rtl="0" eaLnBrk="1" latinLnBrk="0" hangingPunct="1">
+      <a:defRPr sz="1200" kern="1200">
+        <a:solidFill>
+          <a:schemeClr val="tx1"/>
+        </a:solidFill>
+        <a:latin typeface="+mn-lt"/>
+        <a:ea typeface="+mn-ea"/>
+        <a:cs typeface="+mn-cs"/>
+      </a:defRPr>
+    </a:lvl3pPr>
+    <a:lvl4pPr marL="1371600" algn="l" defTabSz="914400" rtl="0" eaLnBrk="1" latinLnBrk="0" hangingPunct="1">
+      <a:defRPr sz="1200" kern="1200">
+        <a:solidFill>
+          <a:schemeClr val="tx1"/>
+        </a:solidFill>
+        <a:latin typeface="+mn-lt"/>
+        <a:ea typeface="+mn-ea"/>
+        <a:cs typeface="+mn-cs"/>
+      </a:defRPr>
+    </a:lvl4pPr>
+    <a:lvl5pPr marL="1828800" algn="l" defTabSz="914400" rtl="0" eaLnBrk="1" latinLnBrk="0" hangingPunct="1">
+      <a:defRPr sz="1200" kern="1200">
+        <a:solidFill>
+          <a:schemeClr val="tx1"/>
+        </a:solidFill>
+        <a:latin typeface="+mn-lt"/>
+        <a:ea typeface="+mn-ea"/>
+        <a:cs typeface="+mn-cs"/>
+      </a:defRPr>
+    </a:lvl5pPr>
+    <a:lvl6pPr marL="2286000" algn="l" defTabSz="914400" rtl="0" eaLnBrk="1" latinLnBrk="0" hangingPunct="1">
+      <a:defRPr sz="1200" kern="1200">
+        <a:solidFill>
+          <a:schemeClr val="tx1"/>
+        </a:solidFill>
+        <a:latin typeface="+mn-lt"/>
+        <a:ea typeface="+mn-ea"/>
+        <a:cs typeface="+mn-cs"/>
+      </a:defRPr>
+    </a:lvl6pPr>
+    <a:lvl7pPr marL="2743200" algn="l" defTabSz="914400" rtl="0" eaLnBrk="1" latinLnBrk="0" hangingPunct="1">
+      <a:defRPr sz="1200" kern="1200">
+        <a:solidFill>
+          <a:schemeClr val="tx1"/>
+        </a:solidFill>
+        <a:latin typeface="+mn-lt"/>
+        <a:ea typeface="+mn-ea"/>
+        <a:cs typeface="+mn-cs"/>
+      </a:defRPr>
+    </a:lvl7pPr>
+    <a:lvl8pPr marL="3200400" algn="l" defTabSz="914400" rtl="0" eaLnBrk="1" latinLnBrk="0" hangingPunct="1">
+      <a:defRPr sz="1200" kern="1200">
+        <a:solidFill>
+          <a:schemeClr val="tx1"/>
+        </a:solidFill>
+        <a:latin typeface="+mn-lt"/>
+        <a:ea typeface="+mn-ea"/>
+        <a:cs typeface="+mn-cs"/>
+      </a:defRPr>
+    </a:lvl8pPr>
+    <a:lvl9pPr marL="3657600" algn="l" defTabSz="914400" rtl="0" eaLnBrk="1" latinLnBrk="0" hangingPunct="1">
+      <a:defRPr sz="1200" kern="1200">
+        <a:solidFill>
+          <a:schemeClr val="tx1"/>
+        </a:solidFill>
+        <a:latin typeface="+mn-lt"/>
+        <a:ea typeface="+mn-ea"/>
+        <a:cs typeface="+mn-cs"/>
+      </a:defRPr>
+    </a:lvl9pPr>
+  </p:notesStyle>
+</p:notesMaster>
+</file>
+
+<file path=ppt/notesSlides/notesSlide1.xml><?xml version="1.0" encoding="utf-8"?>
+<p:notes xmlns:a="http://schemas.openxmlformats.org/drawingml/2006/main" xmlns:r="http://schemas.openxmlformats.org/officeDocument/2006/relationships" xmlns:p="http://schemas.openxmlformats.org/presentationml/2006/main">
+  <p:cSld>
+    <p:spTree>
+      <p:nvGrpSpPr>
+        <p:cNvPr id="1" name=""/>
+        <p:cNvGrpSpPr/>
+        <p:nvPr/>
+      </p:nvGrpSpPr>
+      <p:grpSpPr>
+        <a:xfrm>
+          <a:off x="0" y="0"/>
+          <a:ext cx="0" cy="0"/>
+          <a:chOff x="0" y="0"/>
+          <a:chExt cx="0" cy="0"/>
+        </a:xfrm>
+      </p:grpSpPr>
+      <p:sp>
+        <p:nvSpPr>
+          <p:cNvPr id="2" name="幻灯片图像占位符 1"/>
+          <p:cNvSpPr>
+            <a:spLocks noGrp="1" noRot="1" noChangeAspect="1"/>
+          </p:cNvSpPr>
+          <p:nvPr>
+            <p:ph type="sldImg"/>
+          </p:nvPr>
+        </p:nvSpPr>
+        <p:spPr/>
+      </p:sp>
+      <p:sp>
+        <p:nvSpPr>
+          <p:cNvPr id="3" name="备注占位符 2"/>
+          <p:cNvSpPr>
+            <a:spLocks noGrp="1"/>
+          </p:cNvSpPr>
+          <p:nvPr>
+            <p:ph type="body" idx="1"/>
+          </p:nvPr>
+        </p:nvSpPr>
+        <p:spPr/>
+        <p:txBody>
+          <a:bodyPr/>
+          <a:lstStyle/>
+          <a:p>
+            <a:endParaRPr kumimoji="1" lang="zh-CN" altLang="en-US" dirty="0"/>
+          </a:p>
+        </p:txBody>
+      </p:sp>
+      <p:sp>
+        <p:nvSpPr>
+          <p:cNvPr id="4" name="灯片编号占位符 3"/>
+          <p:cNvSpPr>
+            <a:spLocks noGrp="1"/>
+          </p:cNvSpPr>
+          <p:nvPr>
+            <p:ph type="sldNum" sz="quarter" idx="5"/>
+          </p:nvPr>
+        </p:nvSpPr>
+        <p:spPr/>
+        <p:txBody>
+          <a:bodyPr/>
+          <a:lstStyle/>
+          <a:p>
+            <a:fld id="{3EB3BADC-B76F-7A4B-9A8D-CCDCA140DB71}" type="slidenum">
+              <a:rPr kumimoji="1" lang="zh-CN" altLang="en-US" smtClean="0"/>
+              <a:t>1</a:t>
+            </a:fld>
+            <a:endParaRPr kumimoji="1" lang="zh-CN" altLang="en-US"/>
+          </a:p>
+        </p:txBody>
+      </p:sp>
+    </p:spTree>
+    <p:extLst>
+      <p:ext uri="{BB962C8B-B14F-4D97-AF65-F5344CB8AC3E}">
+        <p14:creationId xmlns:p14="http://schemas.microsoft.com/office/powerpoint/2010/main" val="1117675449"/>
+      </p:ext>
+    </p:extLst>
+  </p:cSld>
+  <p:clrMapOvr>
+    <a:masterClrMapping/>
+  </p:clrMapOvr>
+</p:notes>
 </file>
 
 <file path=ppt/slideLayouts/slideLayout1.xml><?xml version="1.0" encoding="utf-8"?>
@@ -2974,12 +3410,247 @@
           <a:chExt cx="0" cy="0"/>
         </a:xfrm>
       </p:grpSpPr>
+      <p:sp>
+        <p:nvSpPr>
+          <p:cNvPr id="8" name="文本框 7">
+            <a:extLst>
+              <a:ext uri="{FF2B5EF4-FFF2-40B4-BE49-F238E27FC236}">
+                <a16:creationId xmlns:a16="http://schemas.microsoft.com/office/drawing/2014/main" id="{B577E2E6-BBA4-A26F-669C-8CD487B45D60}"/>
+              </a:ext>
+            </a:extLst>
+          </p:cNvPr>
+          <p:cNvSpPr txBox="1"/>
+          <p:nvPr/>
+        </p:nvSpPr>
+        <p:spPr>
+          <a:xfrm>
+            <a:off x="1792505" y="292094"/>
+            <a:ext cx="4320000" cy="400110"/>
+          </a:xfrm>
+          <a:prstGeom prst="rect">
+            <a:avLst/>
+          </a:prstGeom>
+          <a:noFill/>
+        </p:spPr>
+        <p:txBody>
+          <a:bodyPr wrap="square" rtlCol="0">
+            <a:spAutoFit/>
+          </a:bodyPr>
+          <a:lstStyle/>
+          <a:p>
+            <a:pPr algn="ctr"/>
+            <a:r>
+              <a:rPr kumimoji="1" lang="en-US" altLang="zh-CN" sz="2000" dirty="0">
+                <a:latin typeface="Arial" panose="020B0604020202020204" pitchFamily="34" charset="0"/>
+                <a:cs typeface="Arial" panose="020B0604020202020204" pitchFamily="34" charset="0"/>
+              </a:rPr>
+              <a:t>TN3K</a:t>
+            </a:r>
+            <a:r>
+              <a:rPr kumimoji="1" lang="zh-CN" altLang="en-US" sz="2000" dirty="0">
+                <a:latin typeface="Arial" panose="020B0604020202020204" pitchFamily="34" charset="0"/>
+                <a:cs typeface="Arial" panose="020B0604020202020204" pitchFamily="34" charset="0"/>
+              </a:rPr>
+              <a:t> </a:t>
+            </a:r>
+            <a:r>
+              <a:rPr kumimoji="1" lang="en-US" altLang="zh-CN" sz="2000" dirty="0">
+                <a:latin typeface="Arial" panose="020B0604020202020204" pitchFamily="34" charset="0"/>
+                <a:cs typeface="Arial" panose="020B0604020202020204" pitchFamily="34" charset="0"/>
+              </a:rPr>
+              <a:t>–</a:t>
+            </a:r>
+            <a:r>
+              <a:rPr kumimoji="1" lang="zh-CN" altLang="en-US" sz="2000" dirty="0">
+                <a:latin typeface="Arial" panose="020B0604020202020204" pitchFamily="34" charset="0"/>
+                <a:cs typeface="Arial" panose="020B0604020202020204" pitchFamily="34" charset="0"/>
+              </a:rPr>
+              <a:t> </a:t>
+            </a:r>
+            <a:r>
+              <a:rPr kumimoji="1" lang="en-US" altLang="zh-CN" sz="2000" dirty="0">
+                <a:latin typeface="Arial" panose="020B0604020202020204" pitchFamily="34" charset="0"/>
+                <a:cs typeface="Arial" panose="020B0604020202020204" pitchFamily="34" charset="0"/>
+              </a:rPr>
+              <a:t>Position</a:t>
+            </a:r>
+            <a:r>
+              <a:rPr kumimoji="1" lang="zh-CN" altLang="en-US" sz="2000" dirty="0">
+                <a:latin typeface="Arial" panose="020B0604020202020204" pitchFamily="34" charset="0"/>
+                <a:cs typeface="Arial" panose="020B0604020202020204" pitchFamily="34" charset="0"/>
+              </a:rPr>
+              <a:t> </a:t>
+            </a:r>
+            <a:r>
+              <a:rPr kumimoji="1" lang="en-US" altLang="zh-CN" sz="2000" dirty="0">
+                <a:latin typeface="Arial" panose="020B0604020202020204" pitchFamily="34" charset="0"/>
+                <a:cs typeface="Arial" panose="020B0604020202020204" pitchFamily="34" charset="0"/>
+              </a:rPr>
+              <a:t>(N=4633)</a:t>
+            </a:r>
+            <a:endParaRPr kumimoji="1" lang="zh-CN" altLang="en-US" sz="2000" dirty="0">
+              <a:latin typeface="Arial" panose="020B0604020202020204" pitchFamily="34" charset="0"/>
+              <a:cs typeface="Arial" panose="020B0604020202020204" pitchFamily="34" charset="0"/>
+            </a:endParaRPr>
+          </a:p>
+        </p:txBody>
+      </p:sp>
+      <p:sp>
+        <p:nvSpPr>
+          <p:cNvPr id="24" name="文本框 23">
+            <a:extLst>
+              <a:ext uri="{FF2B5EF4-FFF2-40B4-BE49-F238E27FC236}">
+                <a16:creationId xmlns:a16="http://schemas.microsoft.com/office/drawing/2014/main" id="{A5F79301-FA06-21D5-3799-0814545FAE9A}"/>
+              </a:ext>
+            </a:extLst>
+          </p:cNvPr>
+          <p:cNvSpPr txBox="1"/>
+          <p:nvPr/>
+        </p:nvSpPr>
+        <p:spPr>
+          <a:xfrm rot="16200000">
+            <a:off x="-474267" y="2351927"/>
+            <a:ext cx="4320000" cy="400110"/>
+          </a:xfrm>
+          <a:prstGeom prst="rect">
+            <a:avLst/>
+          </a:prstGeom>
+          <a:noFill/>
+        </p:spPr>
+        <p:txBody>
+          <a:bodyPr wrap="square" rtlCol="0">
+            <a:spAutoFit/>
+          </a:bodyPr>
+          <a:lstStyle/>
+          <a:p>
+            <a:pPr algn="ctr"/>
+            <a:r>
+              <a:rPr kumimoji="1" lang="en-US" altLang="zh-CN" sz="2000" dirty="0">
+                <a:latin typeface="Arial" panose="020B0604020202020204" pitchFamily="34" charset="0"/>
+                <a:cs typeface="Arial" panose="020B0604020202020204" pitchFamily="34" charset="0"/>
+              </a:rPr>
+              <a:t>Pos</a:t>
+            </a:r>
+            <a:r>
+              <a:rPr kumimoji="1" lang="zh-CN" altLang="en-US" sz="2000" dirty="0">
+                <a:latin typeface="Arial" panose="020B0604020202020204" pitchFamily="34" charset="0"/>
+                <a:cs typeface="Arial" panose="020B0604020202020204" pitchFamily="34" charset="0"/>
+              </a:rPr>
+              <a:t> </a:t>
+            </a:r>
+            <a:r>
+              <a:rPr kumimoji="1" lang="en-US" altLang="zh-CN" sz="2000" dirty="0">
+                <a:latin typeface="Arial" panose="020B0604020202020204" pitchFamily="34" charset="0"/>
+                <a:cs typeface="Arial" panose="020B0604020202020204" pitchFamily="34" charset="0"/>
+              </a:rPr>
+              <a:t>y</a:t>
+            </a:r>
+            <a:endParaRPr kumimoji="1" lang="zh-CN" altLang="en-US" sz="2000" dirty="0">
+              <a:latin typeface="Arial" panose="020B0604020202020204" pitchFamily="34" charset="0"/>
+              <a:cs typeface="Arial" panose="020B0604020202020204" pitchFamily="34" charset="0"/>
+            </a:endParaRPr>
+          </a:p>
+        </p:txBody>
+      </p:sp>
       <p:pic>
         <p:nvPicPr>
-          <p:cNvPr id="7" name="图形 6">
+          <p:cNvPr id="3" name="图形 2">
             <a:extLst>
               <a:ext uri="{FF2B5EF4-FFF2-40B4-BE49-F238E27FC236}">
-                <a16:creationId xmlns:a16="http://schemas.microsoft.com/office/drawing/2014/main" id="{5521E433-3B51-2704-F003-0DCFA45A51E7}"/>
+                <a16:creationId xmlns:a16="http://schemas.microsoft.com/office/drawing/2014/main" id="{87F963BA-29A9-E78F-06F1-86774CC9CD50}"/>
+              </a:ext>
+            </a:extLst>
+          </p:cNvPr>
+          <p:cNvPicPr>
+            <a:picLocks/>
+          </p:cNvPicPr>
+          <p:nvPr/>
+        </p:nvPicPr>
+        <p:blipFill>
+          <a:blip>
+            <a:extLst>
+              <a:ext uri="{96DAC541-7B7A-43D3-8B79-37D633B846F1}">
+                <asvg:svgBlip xmlns:asvg="http://schemas.microsoft.com/office/drawing/2016/SVG/main" r:embed="rId3"/>
+              </a:ext>
+            </a:extLst>
+          </a:blip>
+          <a:stretch>
+            <a:fillRect/>
+          </a:stretch>
+        </p:blipFill>
+        <p:spPr>
+          <a:xfrm>
+            <a:off x="1791072" y="591840"/>
+            <a:ext cx="4320000" cy="4320000"/>
+          </a:xfrm>
+          <a:prstGeom prst="rect">
+            <a:avLst/>
+          </a:prstGeom>
+        </p:spPr>
+      </p:pic>
+      <p:sp>
+        <p:nvSpPr>
+          <p:cNvPr id="4" name="文本框 3">
+            <a:extLst>
+              <a:ext uri="{FF2B5EF4-FFF2-40B4-BE49-F238E27FC236}">
+                <a16:creationId xmlns:a16="http://schemas.microsoft.com/office/drawing/2014/main" id="{8FCCFA40-631D-F27E-8DF1-51A598CF3691}"/>
+              </a:ext>
+            </a:extLst>
+          </p:cNvPr>
+          <p:cNvSpPr txBox="1"/>
+          <p:nvPr/>
+        </p:nvSpPr>
+        <p:spPr>
+          <a:xfrm>
+            <a:off x="1792504" y="4738727"/>
+            <a:ext cx="4320000" cy="400110"/>
+          </a:xfrm>
+          <a:prstGeom prst="rect">
+            <a:avLst/>
+          </a:prstGeom>
+          <a:noFill/>
+        </p:spPr>
+        <p:txBody>
+          <a:bodyPr wrap="square" rtlCol="0">
+            <a:spAutoFit/>
+          </a:bodyPr>
+          <a:lstStyle/>
+          <a:p>
+            <a:pPr algn="ctr"/>
+            <a:r>
+              <a:rPr kumimoji="1" lang="en-US" altLang="zh-CN" sz="2000" dirty="0">
+                <a:latin typeface="Arial" panose="020B0604020202020204" pitchFamily="34" charset="0"/>
+                <a:cs typeface="Arial" panose="020B0604020202020204" pitchFamily="34" charset="0"/>
+              </a:rPr>
+              <a:t>Pos</a:t>
+            </a:r>
+            <a:r>
+              <a:rPr kumimoji="1" lang="zh-CN" altLang="en-US" sz="2000" dirty="0">
+                <a:latin typeface="Arial" panose="020B0604020202020204" pitchFamily="34" charset="0"/>
+                <a:cs typeface="Arial" panose="020B0604020202020204" pitchFamily="34" charset="0"/>
+              </a:rPr>
+              <a:t> </a:t>
+            </a:r>
+            <a:r>
+              <a:rPr kumimoji="1" lang="en-US" altLang="zh-CN" sz="2000" dirty="0">
+                <a:latin typeface="Arial" panose="020B0604020202020204" pitchFamily="34" charset="0"/>
+                <a:cs typeface="Arial" panose="020B0604020202020204" pitchFamily="34" charset="0"/>
+              </a:rPr>
+              <a:t>x</a:t>
+            </a:r>
+            <a:endParaRPr kumimoji="1" lang="zh-CN" altLang="en-US" sz="2000" dirty="0">
+              <a:latin typeface="Arial" panose="020B0604020202020204" pitchFamily="34" charset="0"/>
+              <a:cs typeface="Arial" panose="020B0604020202020204" pitchFamily="34" charset="0"/>
+            </a:endParaRPr>
+          </a:p>
+        </p:txBody>
+      </p:sp>
+      <p:pic>
+        <p:nvPicPr>
+          <p:cNvPr id="15" name="图形 14">
+            <a:extLst>
+              <a:ext uri="{FF2B5EF4-FFF2-40B4-BE49-F238E27FC236}">
+                <a16:creationId xmlns:a16="http://schemas.microsoft.com/office/drawing/2014/main" id="{394C0F7B-F2FA-1A02-A034-E2077011D66A}"/>
               </a:ext>
             </a:extLst>
           </p:cNvPr>
@@ -2992,7 +3663,7 @@
           <a:blip>
             <a:extLst>
               <a:ext uri="{96DAC541-7B7A-43D3-8B79-37D633B846F1}">
-                <asvg:svgBlip xmlns:asvg="http://schemas.microsoft.com/office/drawing/2016/SVG/main" r:embed="rId2"/>
+                <asvg:svgBlip xmlns:asvg="http://schemas.microsoft.com/office/drawing/2016/SVG/main" r:embed="rId4"/>
               </a:ext>
             </a:extLst>
           </a:blip>
@@ -3002,8 +3673,8 @@
         </p:blipFill>
         <p:spPr>
           <a:xfrm>
-            <a:off x="2140772" y="1951849"/>
-            <a:ext cx="4320000" cy="4320000"/>
+            <a:off x="6418486" y="591527"/>
+            <a:ext cx="4796972" cy="4320000"/>
           </a:xfrm>
           <a:prstGeom prst="rect">
             <a:avLst/>
@@ -3012,10 +3683,10 @@
       </p:pic>
       <p:sp>
         <p:nvSpPr>
-          <p:cNvPr id="8" name="文本框 7">
+          <p:cNvPr id="25" name="文本框 24">
             <a:extLst>
               <a:ext uri="{FF2B5EF4-FFF2-40B4-BE49-F238E27FC236}">
-                <a16:creationId xmlns:a16="http://schemas.microsoft.com/office/drawing/2014/main" id="{B577E2E6-BBA4-A26F-669C-8CD487B45D60}"/>
+                <a16:creationId xmlns:a16="http://schemas.microsoft.com/office/drawing/2014/main" id="{65350404-AB82-9C6C-74FA-C2D28F2826F0}"/>
               </a:ext>
             </a:extLst>
           </p:cNvPr>
@@ -3024,8 +3695,8 @@
         </p:nvSpPr>
         <p:spPr>
           <a:xfrm>
-            <a:off x="2140772" y="1490184"/>
-            <a:ext cx="4320000" cy="461665"/>
+            <a:off x="6656972" y="4739040"/>
+            <a:ext cx="4320000" cy="400110"/>
           </a:xfrm>
           <a:prstGeom prst="rect">
             <a:avLst/>
@@ -3040,95 +3711,25 @@
           <a:p>
             <a:pPr algn="ctr"/>
             <a:r>
-              <a:rPr kumimoji="1" lang="en-US" altLang="zh-CN" sz="2400" dirty="0">
-                <a:latin typeface="Arial" panose="020B0604020202020204" pitchFamily="34" charset="0"/>
-                <a:cs typeface="Arial" panose="020B0604020202020204" pitchFamily="34" charset="0"/>
-              </a:rPr>
-              <a:t>PKTN</a:t>
-            </a:r>
-            <a:r>
-              <a:rPr kumimoji="1" lang="zh-CN" altLang="en-US" sz="2400" dirty="0">
+              <a:rPr kumimoji="1" lang="en-US" altLang="zh-CN" sz="2000" dirty="0">
+                <a:latin typeface="Arial" panose="020B0604020202020204" pitchFamily="34" charset="0"/>
+                <a:cs typeface="Arial" panose="020B0604020202020204" pitchFamily="34" charset="0"/>
+              </a:rPr>
+              <a:t>Relative</a:t>
+            </a:r>
+            <a:r>
+              <a:rPr kumimoji="1" lang="zh-CN" altLang="en-US" sz="2000" dirty="0">
                 <a:latin typeface="Arial" panose="020B0604020202020204" pitchFamily="34" charset="0"/>
                 <a:cs typeface="Arial" panose="020B0604020202020204" pitchFamily="34" charset="0"/>
               </a:rPr>
               <a:t> </a:t>
             </a:r>
             <a:r>
-              <a:rPr kumimoji="1" lang="en-US" altLang="zh-CN" sz="2400" dirty="0">
-                <a:latin typeface="Arial" panose="020B0604020202020204" pitchFamily="34" charset="0"/>
-                <a:cs typeface="Arial" panose="020B0604020202020204" pitchFamily="34" charset="0"/>
-              </a:rPr>
-              <a:t>–</a:t>
-            </a:r>
-            <a:r>
-              <a:rPr kumimoji="1" lang="zh-CN" altLang="en-US" sz="2400" dirty="0">
-                <a:latin typeface="Arial" panose="020B0604020202020204" pitchFamily="34" charset="0"/>
-                <a:cs typeface="Arial" panose="020B0604020202020204" pitchFamily="34" charset="0"/>
-              </a:rPr>
-              <a:t> </a:t>
-            </a:r>
-            <a:r>
-              <a:rPr kumimoji="1" lang="en-US" altLang="zh-CN" sz="2400" dirty="0">
-                <a:latin typeface="Arial" panose="020B0604020202020204" pitchFamily="34" charset="0"/>
-                <a:cs typeface="Arial" panose="020B0604020202020204" pitchFamily="34" charset="0"/>
-              </a:rPr>
-              <a:t>Position</a:t>
-            </a:r>
-            <a:r>
-              <a:rPr kumimoji="1" lang="zh-CN" altLang="en-US" sz="2400" dirty="0">
-                <a:latin typeface="Arial" panose="020B0604020202020204" pitchFamily="34" charset="0"/>
-                <a:cs typeface="Arial" panose="020B0604020202020204" pitchFamily="34" charset="0"/>
-              </a:rPr>
-              <a:t> </a:t>
-            </a:r>
-            <a:r>
-              <a:rPr kumimoji="1" lang="en-US" altLang="zh-CN" sz="2400" dirty="0">
-                <a:latin typeface="Arial" panose="020B0604020202020204" pitchFamily="34" charset="0"/>
-                <a:cs typeface="Arial" panose="020B0604020202020204" pitchFamily="34" charset="0"/>
-              </a:rPr>
-              <a:t>(N=703)</a:t>
-            </a:r>
-            <a:endParaRPr kumimoji="1" lang="zh-CN" altLang="en-US" sz="2400" dirty="0">
-              <a:latin typeface="Arial" panose="020B0604020202020204" pitchFamily="34" charset="0"/>
-              <a:cs typeface="Arial" panose="020B0604020202020204" pitchFamily="34" charset="0"/>
-            </a:endParaRPr>
-          </a:p>
-        </p:txBody>
-      </p:sp>
-      <p:sp>
-        <p:nvSpPr>
-          <p:cNvPr id="9" name="文本框 8">
-            <a:extLst>
-              <a:ext uri="{FF2B5EF4-FFF2-40B4-BE49-F238E27FC236}">
-                <a16:creationId xmlns:a16="http://schemas.microsoft.com/office/drawing/2014/main" id="{284DCAF6-1293-C7CA-7A11-BEB4B20B886D}"/>
-              </a:ext>
-            </a:extLst>
-          </p:cNvPr>
-          <p:cNvSpPr txBox="1"/>
-          <p:nvPr/>
-        </p:nvSpPr>
-        <p:spPr>
-          <a:xfrm>
-            <a:off x="1944010" y="6134983"/>
-            <a:ext cx="540000" cy="400110"/>
-          </a:xfrm>
-          <a:prstGeom prst="rect">
-            <a:avLst/>
-          </a:prstGeom>
-          <a:noFill/>
-        </p:spPr>
-        <p:txBody>
-          <a:bodyPr wrap="square" rtlCol="0">
-            <a:spAutoFit/>
-          </a:bodyPr>
-          <a:lstStyle/>
-          <a:p>
-            <a:r>
-              <a:rPr kumimoji="1" lang="en-US" altLang="zh-CN" sz="2000" dirty="0">
-                <a:latin typeface="Arial" panose="020B0604020202020204" pitchFamily="34" charset="0"/>
-                <a:cs typeface="Arial" panose="020B0604020202020204" pitchFamily="34" charset="0"/>
-              </a:rPr>
-              <a:t>0.0</a:t>
+              <a:rPr kumimoji="1" lang="en-US" altLang="zh-CN" sz="2000" dirty="0">
+                <a:latin typeface="Arial" panose="020B0604020202020204" pitchFamily="34" charset="0"/>
+                <a:cs typeface="Arial" panose="020B0604020202020204" pitchFamily="34" charset="0"/>
+              </a:rPr>
+              <a:t>size</a:t>
             </a:r>
             <a:endParaRPr kumimoji="1" lang="zh-CN" altLang="en-US" sz="2000" dirty="0">
               <a:latin typeface="Arial" panose="020B0604020202020204" pitchFamily="34" charset="0"/>
@@ -3139,10 +3740,10 @@
       </p:sp>
       <p:sp>
         <p:nvSpPr>
-          <p:cNvPr id="10" name="文本框 9">
+          <p:cNvPr id="26" name="文本框 25">
             <a:extLst>
               <a:ext uri="{FF2B5EF4-FFF2-40B4-BE49-F238E27FC236}">
-                <a16:creationId xmlns:a16="http://schemas.microsoft.com/office/drawing/2014/main" id="{4886D37A-3353-D71F-9A8E-906EE36B7303}"/>
+                <a16:creationId xmlns:a16="http://schemas.microsoft.com/office/drawing/2014/main" id="{C33D3CA7-B6AA-3A72-257C-3689ACD2B502}"/>
               </a:ext>
             </a:extLst>
           </p:cNvPr>
@@ -3151,8 +3752,8 @@
         </p:nvSpPr>
         <p:spPr>
           <a:xfrm>
-            <a:off x="2779944" y="6134984"/>
-            <a:ext cx="540000" cy="400110"/>
+            <a:off x="6658272" y="293040"/>
+            <a:ext cx="4320000" cy="400110"/>
           </a:xfrm>
           <a:prstGeom prst="rect">
             <a:avLst/>
@@ -3165,12 +3766,55 @@
           </a:bodyPr>
           <a:lstStyle/>
           <a:p>
-            <a:r>
-              <a:rPr kumimoji="1" lang="en-US" altLang="zh-CN" sz="2000" dirty="0">
-                <a:latin typeface="Arial" panose="020B0604020202020204" pitchFamily="34" charset="0"/>
-                <a:cs typeface="Arial" panose="020B0604020202020204" pitchFamily="34" charset="0"/>
-              </a:rPr>
-              <a:t>0.2</a:t>
+            <a:pPr algn="ctr"/>
+            <a:r>
+              <a:rPr kumimoji="1" lang="en-US" altLang="zh-CN" sz="2000" dirty="0">
+                <a:latin typeface="Arial" panose="020B0604020202020204" pitchFamily="34" charset="0"/>
+                <a:cs typeface="Arial" panose="020B0604020202020204" pitchFamily="34" charset="0"/>
+              </a:rPr>
+              <a:t>TN3K</a:t>
+            </a:r>
+            <a:r>
+              <a:rPr kumimoji="1" lang="zh-CN" altLang="en-US" sz="2000" dirty="0">
+                <a:latin typeface="Arial" panose="020B0604020202020204" pitchFamily="34" charset="0"/>
+                <a:cs typeface="Arial" panose="020B0604020202020204" pitchFamily="34" charset="0"/>
+              </a:rPr>
+              <a:t> </a:t>
+            </a:r>
+            <a:r>
+              <a:rPr kumimoji="1" lang="en-US" altLang="zh-CN" sz="2000" dirty="0">
+                <a:latin typeface="Arial" panose="020B0604020202020204" pitchFamily="34" charset="0"/>
+                <a:cs typeface="Arial" panose="020B0604020202020204" pitchFamily="34" charset="0"/>
+              </a:rPr>
+              <a:t>–</a:t>
+            </a:r>
+            <a:r>
+              <a:rPr kumimoji="1" lang="zh-CN" altLang="en-US" sz="2000" dirty="0">
+                <a:latin typeface="Arial" panose="020B0604020202020204" pitchFamily="34" charset="0"/>
+                <a:cs typeface="Arial" panose="020B0604020202020204" pitchFamily="34" charset="0"/>
+              </a:rPr>
+              <a:t> </a:t>
+            </a:r>
+            <a:r>
+              <a:rPr kumimoji="1" lang="en-US" altLang="zh-CN" sz="2000" dirty="0">
+                <a:latin typeface="Arial" panose="020B0604020202020204" pitchFamily="34" charset="0"/>
+                <a:cs typeface="Arial" panose="020B0604020202020204" pitchFamily="34" charset="0"/>
+              </a:rPr>
+              <a:t>Size</a:t>
+            </a:r>
+            <a:r>
+              <a:rPr kumimoji="1" lang="zh-CN" altLang="en-US" sz="2000" dirty="0">
+                <a:latin typeface="Arial" panose="020B0604020202020204" pitchFamily="34" charset="0"/>
+                <a:cs typeface="Arial" panose="020B0604020202020204" pitchFamily="34" charset="0"/>
+              </a:rPr>
+              <a:t> </a:t>
+            </a:r>
+            <a:r>
+              <a:rPr kumimoji="1" lang="en-US" altLang="zh-CN" sz="2000" dirty="0">
+                <a:latin typeface="Arial" panose="020B0604020202020204" pitchFamily="34" charset="0"/>
+                <a:cs typeface="Arial" panose="020B0604020202020204" pitchFamily="34" charset="0"/>
+              </a:rPr>
+              <a:t>(N=4633)</a:t>
             </a:r>
             <a:endParaRPr kumimoji="1" lang="zh-CN" altLang="en-US" sz="2000" dirty="0">
               <a:latin typeface="Arial" panose="020B0604020202020204" pitchFamily="34" charset="0"/>
@@ -3181,10 +3825,10 @@
       </p:sp>
       <p:sp>
         <p:nvSpPr>
-          <p:cNvPr id="11" name="文本框 10">
+          <p:cNvPr id="27" name="文本框 26">
             <a:extLst>
               <a:ext uri="{FF2B5EF4-FFF2-40B4-BE49-F238E27FC236}">
-                <a16:creationId xmlns:a16="http://schemas.microsoft.com/office/drawing/2014/main" id="{AB71508C-E61B-3981-7514-5DF71CE75773}"/>
+                <a16:creationId xmlns:a16="http://schemas.microsoft.com/office/drawing/2014/main" id="{06EAB93B-ACD9-9ACA-28E7-D5297E079B57}"/>
               </a:ext>
             </a:extLst>
           </p:cNvPr>
@@ -3192,9 +3836,9 @@
           <p:nvPr/>
         </p:nvSpPr>
         <p:spPr>
-          <a:xfrm>
-            <a:off x="3626975" y="6134984"/>
-            <a:ext cx="540000" cy="400110"/>
+          <a:xfrm rot="16200000">
+            <a:off x="4152559" y="2352240"/>
+            <a:ext cx="4320000" cy="400110"/>
           </a:xfrm>
           <a:prstGeom prst="rect">
             <a:avLst/>
@@ -3207,12 +3851,13 @@
           </a:bodyPr>
           <a:lstStyle/>
           <a:p>
-            <a:r>
-              <a:rPr kumimoji="1" lang="en-US" altLang="zh-CN" sz="2000" dirty="0">
-                <a:latin typeface="Arial" panose="020B0604020202020204" pitchFamily="34" charset="0"/>
-                <a:cs typeface="Arial" panose="020B0604020202020204" pitchFamily="34" charset="0"/>
-              </a:rPr>
-              <a:t>0.4</a:t>
+            <a:pPr algn="ctr"/>
+            <a:r>
+              <a:rPr kumimoji="1" lang="en-US" altLang="zh-CN" sz="2000" dirty="0">
+                <a:latin typeface="Arial" panose="020B0604020202020204" pitchFamily="34" charset="0"/>
+                <a:cs typeface="Arial" panose="020B0604020202020204" pitchFamily="34" charset="0"/>
+              </a:rPr>
+              <a:t>Density</a:t>
             </a:r>
             <a:endParaRPr kumimoji="1" lang="zh-CN" altLang="en-US" sz="2000" dirty="0">
               <a:latin typeface="Arial" panose="020B0604020202020204" pitchFamily="34" charset="0"/>
@@ -3221,12 +3866,84 @@
           </a:p>
         </p:txBody>
       </p:sp>
-      <p:sp>
-        <p:nvSpPr>
-          <p:cNvPr id="12" name="文本框 11">
+      <p:pic>
+        <p:nvPicPr>
+          <p:cNvPr id="29" name="图形 28">
             <a:extLst>
               <a:ext uri="{FF2B5EF4-FFF2-40B4-BE49-F238E27FC236}">
-                <a16:creationId xmlns:a16="http://schemas.microsoft.com/office/drawing/2014/main" id="{F5AC0272-6106-D953-9E30-7CCA0006B068}"/>
+                <a16:creationId xmlns:a16="http://schemas.microsoft.com/office/drawing/2014/main" id="{28FC69DE-1118-3BCF-B9E0-EC3CAD5F69F7}"/>
+              </a:ext>
+            </a:extLst>
+          </p:cNvPr>
+          <p:cNvPicPr>
+            <a:picLocks noChangeAspect="1"/>
+          </p:cNvPicPr>
+          <p:nvPr/>
+        </p:nvPicPr>
+        <p:blipFill>
+          <a:blip>
+            <a:extLst>
+              <a:ext uri="{96DAC541-7B7A-43D3-8B79-37D633B846F1}">
+                <asvg:svgBlip xmlns:asvg="http://schemas.microsoft.com/office/drawing/2016/SVG/main" r:embed="rId5"/>
+              </a:ext>
+            </a:extLst>
+          </a:blip>
+          <a:stretch>
+            <a:fillRect/>
+          </a:stretch>
+        </p:blipFill>
+        <p:spPr>
+          <a:xfrm>
+            <a:off x="16247685" y="591840"/>
+            <a:ext cx="4796972" cy="4320000"/>
+          </a:xfrm>
+          <a:prstGeom prst="rect">
+            <a:avLst/>
+          </a:prstGeom>
+        </p:spPr>
+      </p:pic>
+      <p:pic>
+        <p:nvPicPr>
+          <p:cNvPr id="31" name="图形 30">
+            <a:extLst>
+              <a:ext uri="{FF2B5EF4-FFF2-40B4-BE49-F238E27FC236}">
+                <a16:creationId xmlns:a16="http://schemas.microsoft.com/office/drawing/2014/main" id="{6F7C5664-B9D4-F5DD-5BAB-217A31A74D17}"/>
+              </a:ext>
+            </a:extLst>
+          </p:cNvPr>
+          <p:cNvPicPr>
+            <a:picLocks/>
+          </p:cNvPicPr>
+          <p:nvPr/>
+        </p:nvPicPr>
+        <p:blipFill>
+          <a:blip>
+            <a:extLst>
+              <a:ext uri="{96DAC541-7B7A-43D3-8B79-37D633B846F1}">
+                <asvg:svgBlip xmlns:asvg="http://schemas.microsoft.com/office/drawing/2016/SVG/main" r:embed="rId6"/>
+              </a:ext>
+            </a:extLst>
+          </a:blip>
+          <a:stretch>
+            <a:fillRect/>
+          </a:stretch>
+        </p:blipFill>
+        <p:spPr>
+          <a:xfrm>
+            <a:off x="11689200" y="591840"/>
+            <a:ext cx="4320000" cy="4320000"/>
+          </a:xfrm>
+          <a:prstGeom prst="rect">
+            <a:avLst/>
+          </a:prstGeom>
+        </p:spPr>
+      </p:pic>
+      <p:sp>
+        <p:nvSpPr>
+          <p:cNvPr id="32" name="文本框 31">
+            <a:extLst>
+              <a:ext uri="{FF2B5EF4-FFF2-40B4-BE49-F238E27FC236}">
+                <a16:creationId xmlns:a16="http://schemas.microsoft.com/office/drawing/2014/main" id="{C7E37F86-A5AA-6986-DD6F-BF81C4BBDA74}"/>
               </a:ext>
             </a:extLst>
           </p:cNvPr>
@@ -3235,8 +3952,8 @@
         </p:nvSpPr>
         <p:spPr>
           <a:xfrm>
-            <a:off x="4405493" y="6134986"/>
-            <a:ext cx="540000" cy="400110"/>
+            <a:off x="11927686" y="4739040"/>
+            <a:ext cx="4320000" cy="400110"/>
           </a:xfrm>
           <a:prstGeom prst="rect">
             <a:avLst/>
@@ -3249,12 +3966,27 @@
           </a:bodyPr>
           <a:lstStyle/>
           <a:p>
-            <a:r>
-              <a:rPr kumimoji="1" lang="en-US" altLang="zh-CN" sz="2000" dirty="0">
-                <a:latin typeface="Arial" panose="020B0604020202020204" pitchFamily="34" charset="0"/>
-                <a:cs typeface="Arial" panose="020B0604020202020204" pitchFamily="34" charset="0"/>
-              </a:rPr>
-              <a:t>0.6</a:t>
+            <a:pPr algn="ctr"/>
+            <a:r>
+              <a:rPr kumimoji="1" lang="en-US" altLang="zh-CN" sz="2000" dirty="0">
+                <a:latin typeface="Arial" panose="020B0604020202020204" pitchFamily="34" charset="0"/>
+                <a:cs typeface="Arial" panose="020B0604020202020204" pitchFamily="34" charset="0"/>
+              </a:rPr>
+              <a:t>Pos</a:t>
+            </a:r>
+            <a:r>
+              <a:rPr kumimoji="1" lang="zh-CN" altLang="en-US" sz="2000" dirty="0">
+                <a:latin typeface="Arial" panose="020B0604020202020204" pitchFamily="34" charset="0"/>
+                <a:cs typeface="Arial" panose="020B0604020202020204" pitchFamily="34" charset="0"/>
+              </a:rPr>
+              <a:t> </a:t>
+            </a:r>
+            <a:r>
+              <a:rPr kumimoji="1" lang="en-US" altLang="zh-CN" sz="2000" dirty="0">
+                <a:latin typeface="Arial" panose="020B0604020202020204" pitchFamily="34" charset="0"/>
+                <a:cs typeface="Arial" panose="020B0604020202020204" pitchFamily="34" charset="0"/>
+              </a:rPr>
+              <a:t>x</a:t>
             </a:r>
             <a:endParaRPr kumimoji="1" lang="zh-CN" altLang="en-US" sz="2000" dirty="0">
               <a:latin typeface="Arial" panose="020B0604020202020204" pitchFamily="34" charset="0"/>
@@ -3265,10 +3997,10 @@
       </p:sp>
       <p:sp>
         <p:nvSpPr>
-          <p:cNvPr id="13" name="文本框 12">
+          <p:cNvPr id="33" name="文本框 32">
             <a:extLst>
               <a:ext uri="{FF2B5EF4-FFF2-40B4-BE49-F238E27FC236}">
-                <a16:creationId xmlns:a16="http://schemas.microsoft.com/office/drawing/2014/main" id="{06C30550-83FB-0CF0-C0FF-AE41EA61A9D0}"/>
+                <a16:creationId xmlns:a16="http://schemas.microsoft.com/office/drawing/2014/main" id="{ED17A11F-6493-F2B3-F4B9-084DF90C1CDB}"/>
               </a:ext>
             </a:extLst>
           </p:cNvPr>
@@ -3277,8 +4009,8 @@
         </p:nvSpPr>
         <p:spPr>
           <a:xfrm>
-            <a:off x="5252524" y="6134985"/>
-            <a:ext cx="540000" cy="400110"/>
+            <a:off x="16792154" y="4739040"/>
+            <a:ext cx="4320000" cy="400110"/>
           </a:xfrm>
           <a:prstGeom prst="rect">
             <a:avLst/>
@@ -3291,12 +4023,27 @@
           </a:bodyPr>
           <a:lstStyle/>
           <a:p>
-            <a:r>
-              <a:rPr kumimoji="1" lang="en-US" altLang="zh-CN" sz="2000" dirty="0">
-                <a:latin typeface="Arial" panose="020B0604020202020204" pitchFamily="34" charset="0"/>
-                <a:cs typeface="Arial" panose="020B0604020202020204" pitchFamily="34" charset="0"/>
-              </a:rPr>
-              <a:t>0.8</a:t>
+            <a:pPr algn="ctr"/>
+            <a:r>
+              <a:rPr kumimoji="1" lang="en-US" altLang="zh-CN" sz="2000" dirty="0">
+                <a:latin typeface="Arial" panose="020B0604020202020204" pitchFamily="34" charset="0"/>
+                <a:cs typeface="Arial" panose="020B0604020202020204" pitchFamily="34" charset="0"/>
+              </a:rPr>
+              <a:t>Relative</a:t>
+            </a:r>
+            <a:r>
+              <a:rPr kumimoji="1" lang="zh-CN" altLang="en-US" sz="2000" dirty="0">
+                <a:latin typeface="Arial" panose="020B0604020202020204" pitchFamily="34" charset="0"/>
+                <a:cs typeface="Arial" panose="020B0604020202020204" pitchFamily="34" charset="0"/>
+              </a:rPr>
+              <a:t> </a:t>
+            </a:r>
+            <a:r>
+              <a:rPr kumimoji="1" lang="en-US" altLang="zh-CN" sz="2000" dirty="0">
+                <a:latin typeface="Arial" panose="020B0604020202020204" pitchFamily="34" charset="0"/>
+                <a:cs typeface="Arial" panose="020B0604020202020204" pitchFamily="34" charset="0"/>
+              </a:rPr>
+              <a:t>size</a:t>
             </a:r>
             <a:endParaRPr kumimoji="1" lang="zh-CN" altLang="en-US" sz="2000" dirty="0">
               <a:latin typeface="Arial" panose="020B0604020202020204" pitchFamily="34" charset="0"/>
@@ -3307,10 +4054,10 @@
       </p:sp>
       <p:sp>
         <p:nvSpPr>
-          <p:cNvPr id="14" name="文本框 13">
+          <p:cNvPr id="34" name="文本框 33">
             <a:extLst>
               <a:ext uri="{FF2B5EF4-FFF2-40B4-BE49-F238E27FC236}">
-                <a16:creationId xmlns:a16="http://schemas.microsoft.com/office/drawing/2014/main" id="{FEF7A849-30F0-B227-2529-E53D041DE2FC}"/>
+                <a16:creationId xmlns:a16="http://schemas.microsoft.com/office/drawing/2014/main" id="{FE1E10C3-D6AC-2329-849D-D47D2194AC46}"/>
               </a:ext>
             </a:extLst>
           </p:cNvPr>
@@ -3318,9 +4065,9 @@
           <p:nvPr/>
         </p:nvSpPr>
         <p:spPr>
-          <a:xfrm>
-            <a:off x="6088458" y="6134984"/>
-            <a:ext cx="540000" cy="400110"/>
+          <a:xfrm rot="16200000">
+            <a:off x="9405345" y="2352240"/>
+            <a:ext cx="4320000" cy="400110"/>
           </a:xfrm>
           <a:prstGeom prst="rect">
             <a:avLst/>
@@ -3333,12 +4080,27 @@
           </a:bodyPr>
           <a:lstStyle/>
           <a:p>
-            <a:r>
-              <a:rPr kumimoji="1" lang="en-US" altLang="zh-CN" sz="2000" dirty="0">
-                <a:latin typeface="Arial" panose="020B0604020202020204" pitchFamily="34" charset="0"/>
-                <a:cs typeface="Arial" panose="020B0604020202020204" pitchFamily="34" charset="0"/>
-              </a:rPr>
-              <a:t>1.0</a:t>
+            <a:pPr algn="ctr"/>
+            <a:r>
+              <a:rPr kumimoji="1" lang="en-US" altLang="zh-CN" sz="2000" dirty="0">
+                <a:latin typeface="Arial" panose="020B0604020202020204" pitchFamily="34" charset="0"/>
+                <a:cs typeface="Arial" panose="020B0604020202020204" pitchFamily="34" charset="0"/>
+              </a:rPr>
+              <a:t>Pos</a:t>
+            </a:r>
+            <a:r>
+              <a:rPr kumimoji="1" lang="zh-CN" altLang="en-US" sz="2000" dirty="0">
+                <a:latin typeface="Arial" panose="020B0604020202020204" pitchFamily="34" charset="0"/>
+                <a:cs typeface="Arial" panose="020B0604020202020204" pitchFamily="34" charset="0"/>
+              </a:rPr>
+              <a:t> </a:t>
+            </a:r>
+            <a:r>
+              <a:rPr kumimoji="1" lang="en-US" altLang="zh-CN" sz="2000" dirty="0">
+                <a:latin typeface="Arial" panose="020B0604020202020204" pitchFamily="34" charset="0"/>
+                <a:cs typeface="Arial" panose="020B0604020202020204" pitchFamily="34" charset="0"/>
+              </a:rPr>
+              <a:t>y</a:t>
             </a:r>
             <a:endParaRPr kumimoji="1" lang="zh-CN" altLang="en-US" sz="2000" dirty="0">
               <a:latin typeface="Arial" panose="020B0604020202020204" pitchFamily="34" charset="0"/>
@@ -3349,10 +4111,10 @@
       </p:sp>
       <p:sp>
         <p:nvSpPr>
-          <p:cNvPr id="17" name="文本框 16">
+          <p:cNvPr id="35" name="文本框 34">
             <a:extLst>
               <a:ext uri="{FF2B5EF4-FFF2-40B4-BE49-F238E27FC236}">
-                <a16:creationId xmlns:a16="http://schemas.microsoft.com/office/drawing/2014/main" id="{8540A52B-D363-98F4-716D-DD27E0AA0B60}"/>
+                <a16:creationId xmlns:a16="http://schemas.microsoft.com/office/drawing/2014/main" id="{404BE88D-4B96-1695-BCBE-2DDF7F322518}"/>
               </a:ext>
             </a:extLst>
           </p:cNvPr>
@@ -3360,9 +4122,9 @@
           <p:nvPr/>
         </p:nvSpPr>
         <p:spPr>
-          <a:xfrm>
-            <a:off x="1713600" y="5871600"/>
-            <a:ext cx="540000" cy="400110"/>
+          <a:xfrm rot="16200000">
+            <a:off x="14032171" y="2352240"/>
+            <a:ext cx="4320000" cy="400110"/>
           </a:xfrm>
           <a:prstGeom prst="rect">
             <a:avLst/>
@@ -3375,12 +4137,13 @@
           </a:bodyPr>
           <a:lstStyle/>
           <a:p>
-            <a:r>
-              <a:rPr kumimoji="1" lang="en-US" altLang="zh-CN" sz="2000" dirty="0">
-                <a:latin typeface="Arial" panose="020B0604020202020204" pitchFamily="34" charset="0"/>
-                <a:cs typeface="Arial" panose="020B0604020202020204" pitchFamily="34" charset="0"/>
-              </a:rPr>
-              <a:t>0.0</a:t>
+            <a:pPr algn="ctr"/>
+            <a:r>
+              <a:rPr kumimoji="1" lang="en-US" altLang="zh-CN" sz="2000" dirty="0">
+                <a:latin typeface="Arial" panose="020B0604020202020204" pitchFamily="34" charset="0"/>
+                <a:cs typeface="Arial" panose="020B0604020202020204" pitchFamily="34" charset="0"/>
+              </a:rPr>
+              <a:t>Density</a:t>
             </a:r>
             <a:endParaRPr kumimoji="1" lang="zh-CN" altLang="en-US" sz="2000" dirty="0">
               <a:latin typeface="Arial" panose="020B0604020202020204" pitchFamily="34" charset="0"/>
@@ -3391,10 +4154,10 @@
       </p:sp>
       <p:sp>
         <p:nvSpPr>
-          <p:cNvPr id="18" name="文本框 17">
+          <p:cNvPr id="36" name="文本框 35">
             <a:extLst>
               <a:ext uri="{FF2B5EF4-FFF2-40B4-BE49-F238E27FC236}">
-                <a16:creationId xmlns:a16="http://schemas.microsoft.com/office/drawing/2014/main" id="{EB244E8A-9A2C-2677-6CC6-75EB217A9BAB}"/>
+                <a16:creationId xmlns:a16="http://schemas.microsoft.com/office/drawing/2014/main" id="{2206714E-2A1A-1CE1-CD85-F81DA70ECEDF}"/>
               </a:ext>
             </a:extLst>
           </p:cNvPr>
@@ -3403,8 +4166,8 @@
         </p:nvSpPr>
         <p:spPr>
           <a:xfrm>
-            <a:off x="1713600" y="5139952"/>
-            <a:ext cx="540000" cy="400110"/>
+            <a:off x="11927685" y="293040"/>
+            <a:ext cx="4320000" cy="400110"/>
           </a:xfrm>
           <a:prstGeom prst="rect">
             <a:avLst/>
@@ -3417,12 +4180,55 @@
           </a:bodyPr>
           <a:lstStyle/>
           <a:p>
-            <a:r>
-              <a:rPr kumimoji="1" lang="en-US" altLang="zh-CN" sz="2000" dirty="0">
-                <a:latin typeface="Arial" panose="020B0604020202020204" pitchFamily="34" charset="0"/>
-                <a:cs typeface="Arial" panose="020B0604020202020204" pitchFamily="34" charset="0"/>
-              </a:rPr>
-              <a:t>0.2</a:t>
+            <a:pPr algn="ctr"/>
+            <a:r>
+              <a:rPr kumimoji="1" lang="en-US" altLang="zh-CN" sz="2000" dirty="0">
+                <a:latin typeface="Arial" panose="020B0604020202020204" pitchFamily="34" charset="0"/>
+                <a:cs typeface="Arial" panose="020B0604020202020204" pitchFamily="34" charset="0"/>
+              </a:rPr>
+              <a:t>TN3K</a:t>
+            </a:r>
+            <a:r>
+              <a:rPr kumimoji="1" lang="zh-CN" altLang="en-US" sz="2000" dirty="0">
+                <a:latin typeface="Arial" panose="020B0604020202020204" pitchFamily="34" charset="0"/>
+                <a:cs typeface="Arial" panose="020B0604020202020204" pitchFamily="34" charset="0"/>
+              </a:rPr>
+              <a:t> </a:t>
+            </a:r>
+            <a:r>
+              <a:rPr kumimoji="1" lang="en-US" altLang="zh-CN" sz="2000" dirty="0">
+                <a:latin typeface="Arial" panose="020B0604020202020204" pitchFamily="34" charset="0"/>
+                <a:cs typeface="Arial" panose="020B0604020202020204" pitchFamily="34" charset="0"/>
+              </a:rPr>
+              <a:t>–</a:t>
+            </a:r>
+            <a:r>
+              <a:rPr kumimoji="1" lang="zh-CN" altLang="en-US" sz="2000" dirty="0">
+                <a:latin typeface="Arial" panose="020B0604020202020204" pitchFamily="34" charset="0"/>
+                <a:cs typeface="Arial" panose="020B0604020202020204" pitchFamily="34" charset="0"/>
+              </a:rPr>
+              <a:t> </a:t>
+            </a:r>
+            <a:r>
+              <a:rPr kumimoji="1" lang="en-US" altLang="zh-CN" sz="2000" dirty="0">
+                <a:latin typeface="Arial" panose="020B0604020202020204" pitchFamily="34" charset="0"/>
+                <a:cs typeface="Arial" panose="020B0604020202020204" pitchFamily="34" charset="0"/>
+              </a:rPr>
+              <a:t>Position</a:t>
+            </a:r>
+            <a:r>
+              <a:rPr kumimoji="1" lang="zh-CN" altLang="en-US" sz="2000" dirty="0">
+                <a:latin typeface="Arial" panose="020B0604020202020204" pitchFamily="34" charset="0"/>
+                <a:cs typeface="Arial" panose="020B0604020202020204" pitchFamily="34" charset="0"/>
+              </a:rPr>
+              <a:t> </a:t>
+            </a:r>
+            <a:r>
+              <a:rPr kumimoji="1" lang="en-US" altLang="zh-CN" sz="2000" dirty="0">
+                <a:latin typeface="Arial" panose="020B0604020202020204" pitchFamily="34" charset="0"/>
+                <a:cs typeface="Arial" panose="020B0604020202020204" pitchFamily="34" charset="0"/>
+              </a:rPr>
+              <a:t>(N=4633)</a:t>
             </a:r>
             <a:endParaRPr kumimoji="1" lang="zh-CN" altLang="en-US" sz="2000" dirty="0">
               <a:latin typeface="Arial" panose="020B0604020202020204" pitchFamily="34" charset="0"/>
@@ -3433,10 +4239,10 @@
       </p:sp>
       <p:sp>
         <p:nvSpPr>
-          <p:cNvPr id="19" name="文本框 18">
+          <p:cNvPr id="37" name="文本框 36">
             <a:extLst>
               <a:ext uri="{FF2B5EF4-FFF2-40B4-BE49-F238E27FC236}">
-                <a16:creationId xmlns:a16="http://schemas.microsoft.com/office/drawing/2014/main" id="{69C980CB-9E2F-5DB8-E659-30378C3789EB}"/>
+                <a16:creationId xmlns:a16="http://schemas.microsoft.com/office/drawing/2014/main" id="{37AAC4B5-1E32-9F17-B1FD-C59FE675116B}"/>
               </a:ext>
             </a:extLst>
           </p:cNvPr>
@@ -3445,8 +4251,8 @@
         </p:nvSpPr>
         <p:spPr>
           <a:xfrm>
-            <a:off x="1713600" y="4308955"/>
-            <a:ext cx="540000" cy="400110"/>
+            <a:off x="16792152" y="293040"/>
+            <a:ext cx="4320000" cy="400110"/>
           </a:xfrm>
           <a:prstGeom prst="rect">
             <a:avLst/>
@@ -3459,12 +4265,55 @@
           </a:bodyPr>
           <a:lstStyle/>
           <a:p>
-            <a:r>
-              <a:rPr kumimoji="1" lang="en-US" altLang="zh-CN" sz="2000" dirty="0">
-                <a:latin typeface="Arial" panose="020B0604020202020204" pitchFamily="34" charset="0"/>
-                <a:cs typeface="Arial" panose="020B0604020202020204" pitchFamily="34" charset="0"/>
-              </a:rPr>
-              <a:t>0.4</a:t>
+            <a:pPr algn="ctr"/>
+            <a:r>
+              <a:rPr kumimoji="1" lang="en-US" altLang="zh-CN" sz="2000" dirty="0">
+                <a:latin typeface="Arial" panose="020B0604020202020204" pitchFamily="34" charset="0"/>
+                <a:cs typeface="Arial" panose="020B0604020202020204" pitchFamily="34" charset="0"/>
+              </a:rPr>
+              <a:t>TN3K</a:t>
+            </a:r>
+            <a:r>
+              <a:rPr kumimoji="1" lang="zh-CN" altLang="en-US" sz="2000" dirty="0">
+                <a:latin typeface="Arial" panose="020B0604020202020204" pitchFamily="34" charset="0"/>
+                <a:cs typeface="Arial" panose="020B0604020202020204" pitchFamily="34" charset="0"/>
+              </a:rPr>
+              <a:t> </a:t>
+            </a:r>
+            <a:r>
+              <a:rPr kumimoji="1" lang="en-US" altLang="zh-CN" sz="2000" dirty="0">
+                <a:latin typeface="Arial" panose="020B0604020202020204" pitchFamily="34" charset="0"/>
+                <a:cs typeface="Arial" panose="020B0604020202020204" pitchFamily="34" charset="0"/>
+              </a:rPr>
+              <a:t>–</a:t>
+            </a:r>
+            <a:r>
+              <a:rPr kumimoji="1" lang="zh-CN" altLang="en-US" sz="2000" dirty="0">
+                <a:latin typeface="Arial" panose="020B0604020202020204" pitchFamily="34" charset="0"/>
+                <a:cs typeface="Arial" panose="020B0604020202020204" pitchFamily="34" charset="0"/>
+              </a:rPr>
+              <a:t> </a:t>
+            </a:r>
+            <a:r>
+              <a:rPr kumimoji="1" lang="en-US" altLang="zh-CN" sz="2000" dirty="0">
+                <a:latin typeface="Arial" panose="020B0604020202020204" pitchFamily="34" charset="0"/>
+                <a:cs typeface="Arial" panose="020B0604020202020204" pitchFamily="34" charset="0"/>
+              </a:rPr>
+              <a:t>Size</a:t>
+            </a:r>
+            <a:r>
+              <a:rPr kumimoji="1" lang="zh-CN" altLang="en-US" sz="2000" dirty="0">
+                <a:latin typeface="Arial" panose="020B0604020202020204" pitchFamily="34" charset="0"/>
+                <a:cs typeface="Arial" panose="020B0604020202020204" pitchFamily="34" charset="0"/>
+              </a:rPr>
+              <a:t> </a:t>
+            </a:r>
+            <a:r>
+              <a:rPr kumimoji="1" lang="en-US" altLang="zh-CN" sz="2000" dirty="0">
+                <a:latin typeface="Arial" panose="020B0604020202020204" pitchFamily="34" charset="0"/>
+                <a:cs typeface="Arial" panose="020B0604020202020204" pitchFamily="34" charset="0"/>
+              </a:rPr>
+              <a:t>(N=4633)</a:t>
             </a:r>
             <a:endParaRPr kumimoji="1" lang="zh-CN" altLang="en-US" sz="2000" dirty="0">
               <a:latin typeface="Arial" panose="020B0604020202020204" pitchFamily="34" charset="0"/>
@@ -3475,10 +4324,10 @@
       </p:sp>
       <p:sp>
         <p:nvSpPr>
-          <p:cNvPr id="20" name="文本框 19">
+          <p:cNvPr id="38" name="文本框 37">
             <a:extLst>
               <a:ext uri="{FF2B5EF4-FFF2-40B4-BE49-F238E27FC236}">
-                <a16:creationId xmlns:a16="http://schemas.microsoft.com/office/drawing/2014/main" id="{FD0E251D-69B6-C453-A7C4-C8FF7B8CD00A}"/>
+                <a16:creationId xmlns:a16="http://schemas.microsoft.com/office/drawing/2014/main" id="{7A8FE8D2-D0E1-6817-C44B-C8DDEA1F7B93}"/>
               </a:ext>
             </a:extLst>
           </p:cNvPr>
@@ -3487,8 +4336,8 @@
         </p:nvSpPr>
         <p:spPr>
           <a:xfrm>
-            <a:off x="1713600" y="3462218"/>
-            <a:ext cx="540000" cy="400110"/>
+            <a:off x="1792503" y="5210014"/>
+            <a:ext cx="4320000" cy="400110"/>
           </a:xfrm>
           <a:prstGeom prst="rect">
             <a:avLst/>
@@ -3501,12 +4350,48 @@
           </a:bodyPr>
           <a:lstStyle/>
           <a:p>
-            <a:r>
-              <a:rPr kumimoji="1" lang="en-US" altLang="zh-CN" sz="2000" dirty="0">
-                <a:latin typeface="Arial" panose="020B0604020202020204" pitchFamily="34" charset="0"/>
-                <a:cs typeface="Arial" panose="020B0604020202020204" pitchFamily="34" charset="0"/>
-              </a:rPr>
-              <a:t>0.6</a:t>
+            <a:pPr algn="ctr"/>
+            <a:r>
+              <a:rPr kumimoji="1" lang="en-US" altLang="zh-CN" sz="2000" dirty="0" err="1">
+                <a:latin typeface="Arial" panose="020B0604020202020204" pitchFamily="34" charset="0"/>
+                <a:cs typeface="Arial" panose="020B0604020202020204" pitchFamily="34" charset="0"/>
+              </a:rPr>
+              <a:t>ThyroidXL</a:t>
+            </a:r>
+            <a:r>
+              <a:rPr kumimoji="1" lang="en-US" altLang="zh-CN" sz="2000" dirty="0">
+                <a:latin typeface="Arial" panose="020B0604020202020204" pitchFamily="34" charset="0"/>
+                <a:cs typeface="Arial" panose="020B0604020202020204" pitchFamily="34" charset="0"/>
+              </a:rPr>
+              <a:t>–</a:t>
+            </a:r>
+            <a:r>
+              <a:rPr kumimoji="1" lang="zh-CN" altLang="en-US" sz="2000" dirty="0">
+                <a:latin typeface="Arial" panose="020B0604020202020204" pitchFamily="34" charset="0"/>
+                <a:cs typeface="Arial" panose="020B0604020202020204" pitchFamily="34" charset="0"/>
+              </a:rPr>
+              <a:t> </a:t>
+            </a:r>
+            <a:r>
+              <a:rPr kumimoji="1" lang="en-US" altLang="zh-CN" sz="2000" dirty="0">
+                <a:latin typeface="Arial" panose="020B0604020202020204" pitchFamily="34" charset="0"/>
+                <a:cs typeface="Arial" panose="020B0604020202020204" pitchFamily="34" charset="0"/>
+              </a:rPr>
+              <a:t>Position</a:t>
+            </a:r>
+            <a:r>
+              <a:rPr kumimoji="1" lang="zh-CN" altLang="en-US" sz="2000" dirty="0">
+                <a:latin typeface="Arial" panose="020B0604020202020204" pitchFamily="34" charset="0"/>
+                <a:cs typeface="Arial" panose="020B0604020202020204" pitchFamily="34" charset="0"/>
+              </a:rPr>
+              <a:t> </a:t>
+            </a:r>
+            <a:r>
+              <a:rPr kumimoji="1" lang="en-US" altLang="zh-CN" sz="2000" dirty="0">
+                <a:latin typeface="Arial" panose="020B0604020202020204" pitchFamily="34" charset="0"/>
+                <a:cs typeface="Arial" panose="020B0604020202020204" pitchFamily="34" charset="0"/>
+              </a:rPr>
+              <a:t>(N=4633)</a:t>
             </a:r>
             <a:endParaRPr kumimoji="1" lang="zh-CN" altLang="en-US" sz="2000" dirty="0">
               <a:latin typeface="Arial" panose="020B0604020202020204" pitchFamily="34" charset="0"/>
@@ -3517,10 +4402,10 @@
       </p:sp>
       <p:sp>
         <p:nvSpPr>
-          <p:cNvPr id="21" name="文本框 20">
+          <p:cNvPr id="39" name="文本框 38">
             <a:extLst>
               <a:ext uri="{FF2B5EF4-FFF2-40B4-BE49-F238E27FC236}">
-                <a16:creationId xmlns:a16="http://schemas.microsoft.com/office/drawing/2014/main" id="{F188378D-6818-55B0-0CAA-E0ABAD3028EB}"/>
+                <a16:creationId xmlns:a16="http://schemas.microsoft.com/office/drawing/2014/main" id="{F858EA0E-0D76-BEBF-2622-01801FA274AF}"/>
               </a:ext>
             </a:extLst>
           </p:cNvPr>
@@ -3528,9 +4413,9 @@
           <p:nvPr/>
         </p:nvSpPr>
         <p:spPr>
-          <a:xfrm>
-            <a:off x="1713600" y="2659451"/>
-            <a:ext cx="540000" cy="400110"/>
+          <a:xfrm rot="16200000">
+            <a:off x="-474269" y="7269847"/>
+            <a:ext cx="4320000" cy="400110"/>
           </a:xfrm>
           <a:prstGeom prst="rect">
             <a:avLst/>
@@ -3543,12 +4428,27 @@
           </a:bodyPr>
           <a:lstStyle/>
           <a:p>
-            <a:r>
-              <a:rPr kumimoji="1" lang="en-US" altLang="zh-CN" sz="2000" dirty="0">
-                <a:latin typeface="Arial" panose="020B0604020202020204" pitchFamily="34" charset="0"/>
-                <a:cs typeface="Arial" panose="020B0604020202020204" pitchFamily="34" charset="0"/>
-              </a:rPr>
-              <a:t>0.8</a:t>
+            <a:pPr algn="ctr"/>
+            <a:r>
+              <a:rPr kumimoji="1" lang="en-US" altLang="zh-CN" sz="2000" dirty="0">
+                <a:latin typeface="Arial" panose="020B0604020202020204" pitchFamily="34" charset="0"/>
+                <a:cs typeface="Arial" panose="020B0604020202020204" pitchFamily="34" charset="0"/>
+              </a:rPr>
+              <a:t>Pos</a:t>
+            </a:r>
+            <a:r>
+              <a:rPr kumimoji="1" lang="zh-CN" altLang="en-US" sz="2000" dirty="0">
+                <a:latin typeface="Arial" panose="020B0604020202020204" pitchFamily="34" charset="0"/>
+                <a:cs typeface="Arial" panose="020B0604020202020204" pitchFamily="34" charset="0"/>
+              </a:rPr>
+              <a:t> </a:t>
+            </a:r>
+            <a:r>
+              <a:rPr kumimoji="1" lang="en-US" altLang="zh-CN" sz="2000" dirty="0">
+                <a:latin typeface="Arial" panose="020B0604020202020204" pitchFamily="34" charset="0"/>
+                <a:cs typeface="Arial" panose="020B0604020202020204" pitchFamily="34" charset="0"/>
+              </a:rPr>
+              <a:t>y</a:t>
             </a:r>
             <a:endParaRPr kumimoji="1" lang="zh-CN" altLang="en-US" sz="2000" dirty="0">
               <a:latin typeface="Arial" panose="020B0604020202020204" pitchFamily="34" charset="0"/>
@@ -3559,10 +4459,10 @@
       </p:sp>
       <p:sp>
         <p:nvSpPr>
-          <p:cNvPr id="22" name="文本框 21">
+          <p:cNvPr id="41" name="文本框 40">
             <a:extLst>
               <a:ext uri="{FF2B5EF4-FFF2-40B4-BE49-F238E27FC236}">
-                <a16:creationId xmlns:a16="http://schemas.microsoft.com/office/drawing/2014/main" id="{73BBE7F6-7384-4ECE-D52B-009CFBA666F9}"/>
+                <a16:creationId xmlns:a16="http://schemas.microsoft.com/office/drawing/2014/main" id="{AAE4E19F-E5E0-D0B0-A1C3-A22D62BF0AAB}"/>
               </a:ext>
             </a:extLst>
           </p:cNvPr>
@@ -3571,8 +4471,8 @@
         </p:nvSpPr>
         <p:spPr>
           <a:xfrm>
-            <a:off x="1713600" y="1864475"/>
-            <a:ext cx="540000" cy="400110"/>
+            <a:off x="1792502" y="9656647"/>
+            <a:ext cx="4320000" cy="400110"/>
           </a:xfrm>
           <a:prstGeom prst="rect">
             <a:avLst/>
@@ -3585,12 +4485,27 @@
           </a:bodyPr>
           <a:lstStyle/>
           <a:p>
-            <a:r>
-              <a:rPr kumimoji="1" lang="en-US" altLang="zh-CN" sz="2000" dirty="0">
-                <a:latin typeface="Arial" panose="020B0604020202020204" pitchFamily="34" charset="0"/>
-                <a:cs typeface="Arial" panose="020B0604020202020204" pitchFamily="34" charset="0"/>
-              </a:rPr>
-              <a:t>1.0</a:t>
+            <a:pPr algn="ctr"/>
+            <a:r>
+              <a:rPr kumimoji="1" lang="en-US" altLang="zh-CN" sz="2000" dirty="0">
+                <a:latin typeface="Arial" panose="020B0604020202020204" pitchFamily="34" charset="0"/>
+                <a:cs typeface="Arial" panose="020B0604020202020204" pitchFamily="34" charset="0"/>
+              </a:rPr>
+              <a:t>Pos</a:t>
+            </a:r>
+            <a:r>
+              <a:rPr kumimoji="1" lang="zh-CN" altLang="en-US" sz="2000" dirty="0">
+                <a:latin typeface="Arial" panose="020B0604020202020204" pitchFamily="34" charset="0"/>
+                <a:cs typeface="Arial" panose="020B0604020202020204" pitchFamily="34" charset="0"/>
+              </a:rPr>
+              <a:t> </a:t>
+            </a:r>
+            <a:r>
+              <a:rPr kumimoji="1" lang="en-US" altLang="zh-CN" sz="2000" dirty="0">
+                <a:latin typeface="Arial" panose="020B0604020202020204" pitchFamily="34" charset="0"/>
+                <a:cs typeface="Arial" panose="020B0604020202020204" pitchFamily="34" charset="0"/>
+              </a:rPr>
+              <a:t>x</a:t>
             </a:r>
             <a:endParaRPr kumimoji="1" lang="zh-CN" altLang="en-US" sz="2000" dirty="0">
               <a:latin typeface="Arial" panose="020B0604020202020204" pitchFamily="34" charset="0"/>
@@ -3601,10 +4516,10 @@
       </p:sp>
       <p:sp>
         <p:nvSpPr>
-          <p:cNvPr id="23" name="文本框 22">
+          <p:cNvPr id="43" name="文本框 42">
             <a:extLst>
               <a:ext uri="{FF2B5EF4-FFF2-40B4-BE49-F238E27FC236}">
-                <a16:creationId xmlns:a16="http://schemas.microsoft.com/office/drawing/2014/main" id="{FEF86F4C-7A30-4383-2F59-3D4E564CEE33}"/>
+                <a16:creationId xmlns:a16="http://schemas.microsoft.com/office/drawing/2014/main" id="{280EE2D3-ED69-4B75-9B74-FD7776BC2883}"/>
               </a:ext>
             </a:extLst>
           </p:cNvPr>
@@ -3613,7 +4528,7 @@
         </p:nvSpPr>
         <p:spPr>
           <a:xfrm>
-            <a:off x="2140772" y="6345244"/>
+            <a:off x="6656970" y="9656960"/>
             <a:ext cx="4320000" cy="400110"/>
           </a:xfrm>
           <a:prstGeom prst="rect">
@@ -3633,7 +4548,7 @@
                 <a:latin typeface="Arial" panose="020B0604020202020204" pitchFamily="34" charset="0"/>
                 <a:cs typeface="Arial" panose="020B0604020202020204" pitchFamily="34" charset="0"/>
               </a:rPr>
-              <a:t>pos</a:t>
+              <a:t>Relative</a:t>
             </a:r>
             <a:r>
               <a:rPr kumimoji="1" lang="zh-CN" altLang="en-US" sz="2000" dirty="0">
@@ -3647,7 +4562,7 @@
                 <a:latin typeface="Arial" panose="020B0604020202020204" pitchFamily="34" charset="0"/>
                 <a:cs typeface="Arial" panose="020B0604020202020204" pitchFamily="34" charset="0"/>
               </a:rPr>
-              <a:t>x</a:t>
+              <a:t>size</a:t>
             </a:r>
             <a:endParaRPr kumimoji="1" lang="zh-CN" altLang="en-US" sz="2000" dirty="0">
               <a:latin typeface="Arial" panose="020B0604020202020204" pitchFamily="34" charset="0"/>
@@ -3658,10 +4573,10 @@
       </p:sp>
       <p:sp>
         <p:nvSpPr>
-          <p:cNvPr id="24" name="文本框 23">
+          <p:cNvPr id="44" name="文本框 43">
             <a:extLst>
               <a:ext uri="{FF2B5EF4-FFF2-40B4-BE49-F238E27FC236}">
-                <a16:creationId xmlns:a16="http://schemas.microsoft.com/office/drawing/2014/main" id="{A5F79301-FA06-21D5-3799-0814545FAE9A}"/>
+                <a16:creationId xmlns:a16="http://schemas.microsoft.com/office/drawing/2014/main" id="{5BE37944-3F83-AC3C-5DFC-CB8F36C15C6E}"/>
               </a:ext>
             </a:extLst>
           </p:cNvPr>
@@ -3669,8 +4584,8 @@
           <p:nvPr/>
         </p:nvSpPr>
         <p:spPr>
-          <a:xfrm rot="16200000">
-            <a:off x="-592689" y="3911794"/>
+          <a:xfrm>
+            <a:off x="6658270" y="5210960"/>
             <a:ext cx="4320000" cy="400110"/>
           </a:xfrm>
           <a:prstGeom prst="rect">
@@ -3686,11 +4601,11 @@
           <a:p>
             <a:pPr algn="ctr"/>
             <a:r>
-              <a:rPr kumimoji="1" lang="en-US" altLang="zh-CN" sz="2000" dirty="0">
-                <a:latin typeface="Arial" panose="020B0604020202020204" pitchFamily="34" charset="0"/>
-                <a:cs typeface="Arial" panose="020B0604020202020204" pitchFamily="34" charset="0"/>
-              </a:rPr>
-              <a:t>pos</a:t>
+              <a:rPr kumimoji="1" lang="en-US" altLang="zh-CN" sz="2000" dirty="0" err="1">
+                <a:latin typeface="Arial" panose="020B0604020202020204" pitchFamily="34" charset="0"/>
+                <a:cs typeface="Arial" panose="020B0604020202020204" pitchFamily="34" charset="0"/>
+              </a:rPr>
+              <a:t>ThyroidXL</a:t>
             </a:r>
             <a:r>
               <a:rPr kumimoji="1" lang="zh-CN" altLang="en-US" sz="2000" dirty="0">
@@ -3704,7 +4619,35 @@
                 <a:latin typeface="Arial" panose="020B0604020202020204" pitchFamily="34" charset="0"/>
                 <a:cs typeface="Arial" panose="020B0604020202020204" pitchFamily="34" charset="0"/>
               </a:rPr>
-              <a:t>y</a:t>
+              <a:t>–</a:t>
+            </a:r>
+            <a:r>
+              <a:rPr kumimoji="1" lang="zh-CN" altLang="en-US" sz="2000" dirty="0">
+                <a:latin typeface="Arial" panose="020B0604020202020204" pitchFamily="34" charset="0"/>
+                <a:cs typeface="Arial" panose="020B0604020202020204" pitchFamily="34" charset="0"/>
+              </a:rPr>
+              <a:t> </a:t>
+            </a:r>
+            <a:r>
+              <a:rPr kumimoji="1" lang="en-US" altLang="zh-CN" sz="2000" dirty="0">
+                <a:latin typeface="Arial" panose="020B0604020202020204" pitchFamily="34" charset="0"/>
+                <a:cs typeface="Arial" panose="020B0604020202020204" pitchFamily="34" charset="0"/>
+              </a:rPr>
+              <a:t>Size</a:t>
+            </a:r>
+            <a:r>
+              <a:rPr kumimoji="1" lang="zh-CN" altLang="en-US" sz="2000" dirty="0">
+                <a:latin typeface="Arial" panose="020B0604020202020204" pitchFamily="34" charset="0"/>
+                <a:cs typeface="Arial" panose="020B0604020202020204" pitchFamily="34" charset="0"/>
+              </a:rPr>
+              <a:t> </a:t>
+            </a:r>
+            <a:r>
+              <a:rPr kumimoji="1" lang="en-US" altLang="zh-CN" sz="2000" dirty="0">
+                <a:latin typeface="Arial" panose="020B0604020202020204" pitchFamily="34" charset="0"/>
+                <a:cs typeface="Arial" panose="020B0604020202020204" pitchFamily="34" charset="0"/>
+              </a:rPr>
+              <a:t>(N=4633)</a:t>
             </a:r>
             <a:endParaRPr kumimoji="1" lang="zh-CN" altLang="en-US" sz="2000" dirty="0">
               <a:latin typeface="Arial" panose="020B0604020202020204" pitchFamily="34" charset="0"/>
@@ -3713,6 +4656,1489 @@
           </a:p>
         </p:txBody>
       </p:sp>
+      <p:sp>
+        <p:nvSpPr>
+          <p:cNvPr id="45" name="文本框 44">
+            <a:extLst>
+              <a:ext uri="{FF2B5EF4-FFF2-40B4-BE49-F238E27FC236}">
+                <a16:creationId xmlns:a16="http://schemas.microsoft.com/office/drawing/2014/main" id="{B300CFFF-215A-8116-9303-9F346DB2A244}"/>
+              </a:ext>
+            </a:extLst>
+          </p:cNvPr>
+          <p:cNvSpPr txBox="1"/>
+          <p:nvPr/>
+        </p:nvSpPr>
+        <p:spPr>
+          <a:xfrm rot="16200000">
+            <a:off x="4152557" y="7270160"/>
+            <a:ext cx="4320000" cy="400110"/>
+          </a:xfrm>
+          <a:prstGeom prst="rect">
+            <a:avLst/>
+          </a:prstGeom>
+          <a:noFill/>
+        </p:spPr>
+        <p:txBody>
+          <a:bodyPr wrap="square" rtlCol="0">
+            <a:spAutoFit/>
+          </a:bodyPr>
+          <a:lstStyle/>
+          <a:p>
+            <a:pPr algn="ctr"/>
+            <a:r>
+              <a:rPr kumimoji="1" lang="en-US" altLang="zh-CN" sz="2000" dirty="0">
+                <a:latin typeface="Arial" panose="020B0604020202020204" pitchFamily="34" charset="0"/>
+                <a:cs typeface="Arial" panose="020B0604020202020204" pitchFamily="34" charset="0"/>
+              </a:rPr>
+              <a:t>Density</a:t>
+            </a:r>
+            <a:endParaRPr kumimoji="1" lang="zh-CN" altLang="en-US" sz="2000" dirty="0">
+              <a:latin typeface="Arial" panose="020B0604020202020204" pitchFamily="34" charset="0"/>
+              <a:cs typeface="Arial" panose="020B0604020202020204" pitchFamily="34" charset="0"/>
+            </a:endParaRPr>
+          </a:p>
+        </p:txBody>
+      </p:sp>
+      <p:sp>
+        <p:nvSpPr>
+          <p:cNvPr id="48" name="文本框 47">
+            <a:extLst>
+              <a:ext uri="{FF2B5EF4-FFF2-40B4-BE49-F238E27FC236}">
+                <a16:creationId xmlns:a16="http://schemas.microsoft.com/office/drawing/2014/main" id="{958EE90C-5C82-6FB2-500D-8C0612318D6B}"/>
+              </a:ext>
+            </a:extLst>
+          </p:cNvPr>
+          <p:cNvSpPr txBox="1"/>
+          <p:nvPr/>
+        </p:nvSpPr>
+        <p:spPr>
+          <a:xfrm>
+            <a:off x="11927684" y="9656960"/>
+            <a:ext cx="4320000" cy="400110"/>
+          </a:xfrm>
+          <a:prstGeom prst="rect">
+            <a:avLst/>
+          </a:prstGeom>
+          <a:noFill/>
+        </p:spPr>
+        <p:txBody>
+          <a:bodyPr wrap="square" rtlCol="0">
+            <a:spAutoFit/>
+          </a:bodyPr>
+          <a:lstStyle/>
+          <a:p>
+            <a:pPr algn="ctr"/>
+            <a:r>
+              <a:rPr kumimoji="1" lang="en-US" altLang="zh-CN" sz="2000" dirty="0">
+                <a:latin typeface="Arial" panose="020B0604020202020204" pitchFamily="34" charset="0"/>
+                <a:cs typeface="Arial" panose="020B0604020202020204" pitchFamily="34" charset="0"/>
+              </a:rPr>
+              <a:t>Pos</a:t>
+            </a:r>
+            <a:r>
+              <a:rPr kumimoji="1" lang="zh-CN" altLang="en-US" sz="2000" dirty="0">
+                <a:latin typeface="Arial" panose="020B0604020202020204" pitchFamily="34" charset="0"/>
+                <a:cs typeface="Arial" panose="020B0604020202020204" pitchFamily="34" charset="0"/>
+              </a:rPr>
+              <a:t> </a:t>
+            </a:r>
+            <a:r>
+              <a:rPr kumimoji="1" lang="en-US" altLang="zh-CN" sz="2000" dirty="0">
+                <a:latin typeface="Arial" panose="020B0604020202020204" pitchFamily="34" charset="0"/>
+                <a:cs typeface="Arial" panose="020B0604020202020204" pitchFamily="34" charset="0"/>
+              </a:rPr>
+              <a:t>x</a:t>
+            </a:r>
+            <a:endParaRPr kumimoji="1" lang="zh-CN" altLang="en-US" sz="2000" dirty="0">
+              <a:latin typeface="Arial" panose="020B0604020202020204" pitchFamily="34" charset="0"/>
+              <a:cs typeface="Arial" panose="020B0604020202020204" pitchFamily="34" charset="0"/>
+            </a:endParaRPr>
+          </a:p>
+        </p:txBody>
+      </p:sp>
+      <p:sp>
+        <p:nvSpPr>
+          <p:cNvPr id="49" name="文本框 48">
+            <a:extLst>
+              <a:ext uri="{FF2B5EF4-FFF2-40B4-BE49-F238E27FC236}">
+                <a16:creationId xmlns:a16="http://schemas.microsoft.com/office/drawing/2014/main" id="{8FFEC03E-F606-B11D-FF3F-24FAF64A055C}"/>
+              </a:ext>
+            </a:extLst>
+          </p:cNvPr>
+          <p:cNvSpPr txBox="1"/>
+          <p:nvPr/>
+        </p:nvSpPr>
+        <p:spPr>
+          <a:xfrm>
+            <a:off x="16792152" y="9656960"/>
+            <a:ext cx="4320000" cy="400110"/>
+          </a:xfrm>
+          <a:prstGeom prst="rect">
+            <a:avLst/>
+          </a:prstGeom>
+          <a:noFill/>
+        </p:spPr>
+        <p:txBody>
+          <a:bodyPr wrap="square" rtlCol="0">
+            <a:spAutoFit/>
+          </a:bodyPr>
+          <a:lstStyle/>
+          <a:p>
+            <a:pPr algn="ctr"/>
+            <a:r>
+              <a:rPr kumimoji="1" lang="en-US" altLang="zh-CN" sz="2000" dirty="0">
+                <a:latin typeface="Arial" panose="020B0604020202020204" pitchFamily="34" charset="0"/>
+                <a:cs typeface="Arial" panose="020B0604020202020204" pitchFamily="34" charset="0"/>
+              </a:rPr>
+              <a:t>Relative</a:t>
+            </a:r>
+            <a:r>
+              <a:rPr kumimoji="1" lang="zh-CN" altLang="en-US" sz="2000" dirty="0">
+                <a:latin typeface="Arial" panose="020B0604020202020204" pitchFamily="34" charset="0"/>
+                <a:cs typeface="Arial" panose="020B0604020202020204" pitchFamily="34" charset="0"/>
+              </a:rPr>
+              <a:t> </a:t>
+            </a:r>
+            <a:r>
+              <a:rPr kumimoji="1" lang="en-US" altLang="zh-CN" sz="2000" dirty="0">
+                <a:latin typeface="Arial" panose="020B0604020202020204" pitchFamily="34" charset="0"/>
+                <a:cs typeface="Arial" panose="020B0604020202020204" pitchFamily="34" charset="0"/>
+              </a:rPr>
+              <a:t>size</a:t>
+            </a:r>
+            <a:endParaRPr kumimoji="1" lang="zh-CN" altLang="en-US" sz="2000" dirty="0">
+              <a:latin typeface="Arial" panose="020B0604020202020204" pitchFamily="34" charset="0"/>
+              <a:cs typeface="Arial" panose="020B0604020202020204" pitchFamily="34" charset="0"/>
+            </a:endParaRPr>
+          </a:p>
+        </p:txBody>
+      </p:sp>
+      <p:sp>
+        <p:nvSpPr>
+          <p:cNvPr id="50" name="文本框 49">
+            <a:extLst>
+              <a:ext uri="{FF2B5EF4-FFF2-40B4-BE49-F238E27FC236}">
+                <a16:creationId xmlns:a16="http://schemas.microsoft.com/office/drawing/2014/main" id="{6803135B-339C-C40D-4EBE-8DAA2BF8F991}"/>
+              </a:ext>
+            </a:extLst>
+          </p:cNvPr>
+          <p:cNvSpPr txBox="1"/>
+          <p:nvPr/>
+        </p:nvSpPr>
+        <p:spPr>
+          <a:xfrm rot="16200000">
+            <a:off x="9405343" y="7270160"/>
+            <a:ext cx="4320000" cy="400110"/>
+          </a:xfrm>
+          <a:prstGeom prst="rect">
+            <a:avLst/>
+          </a:prstGeom>
+          <a:noFill/>
+        </p:spPr>
+        <p:txBody>
+          <a:bodyPr wrap="square" rtlCol="0">
+            <a:spAutoFit/>
+          </a:bodyPr>
+          <a:lstStyle/>
+          <a:p>
+            <a:pPr algn="ctr"/>
+            <a:r>
+              <a:rPr kumimoji="1" lang="en-US" altLang="zh-CN" sz="2000" dirty="0">
+                <a:latin typeface="Arial" panose="020B0604020202020204" pitchFamily="34" charset="0"/>
+                <a:cs typeface="Arial" panose="020B0604020202020204" pitchFamily="34" charset="0"/>
+              </a:rPr>
+              <a:t>Pos</a:t>
+            </a:r>
+            <a:r>
+              <a:rPr kumimoji="1" lang="zh-CN" altLang="en-US" sz="2000" dirty="0">
+                <a:latin typeface="Arial" panose="020B0604020202020204" pitchFamily="34" charset="0"/>
+                <a:cs typeface="Arial" panose="020B0604020202020204" pitchFamily="34" charset="0"/>
+              </a:rPr>
+              <a:t> </a:t>
+            </a:r>
+            <a:r>
+              <a:rPr kumimoji="1" lang="en-US" altLang="zh-CN" sz="2000" dirty="0">
+                <a:latin typeface="Arial" panose="020B0604020202020204" pitchFamily="34" charset="0"/>
+                <a:cs typeface="Arial" panose="020B0604020202020204" pitchFamily="34" charset="0"/>
+              </a:rPr>
+              <a:t>y</a:t>
+            </a:r>
+            <a:endParaRPr kumimoji="1" lang="zh-CN" altLang="en-US" sz="2000" dirty="0">
+              <a:latin typeface="Arial" panose="020B0604020202020204" pitchFamily="34" charset="0"/>
+              <a:cs typeface="Arial" panose="020B0604020202020204" pitchFamily="34" charset="0"/>
+            </a:endParaRPr>
+          </a:p>
+        </p:txBody>
+      </p:sp>
+      <p:sp>
+        <p:nvSpPr>
+          <p:cNvPr id="51" name="文本框 50">
+            <a:extLst>
+              <a:ext uri="{FF2B5EF4-FFF2-40B4-BE49-F238E27FC236}">
+                <a16:creationId xmlns:a16="http://schemas.microsoft.com/office/drawing/2014/main" id="{38DBEA47-2D3F-5D7F-2AE3-6762FBAD2452}"/>
+              </a:ext>
+            </a:extLst>
+          </p:cNvPr>
+          <p:cNvSpPr txBox="1"/>
+          <p:nvPr/>
+        </p:nvSpPr>
+        <p:spPr>
+          <a:xfrm rot="16200000">
+            <a:off x="14032169" y="7270160"/>
+            <a:ext cx="4320000" cy="400110"/>
+          </a:xfrm>
+          <a:prstGeom prst="rect">
+            <a:avLst/>
+          </a:prstGeom>
+          <a:noFill/>
+        </p:spPr>
+        <p:txBody>
+          <a:bodyPr wrap="square" rtlCol="0">
+            <a:spAutoFit/>
+          </a:bodyPr>
+          <a:lstStyle/>
+          <a:p>
+            <a:pPr algn="ctr"/>
+            <a:r>
+              <a:rPr kumimoji="1" lang="en-US" altLang="zh-CN" sz="2000" dirty="0">
+                <a:latin typeface="Arial" panose="020B0604020202020204" pitchFamily="34" charset="0"/>
+                <a:cs typeface="Arial" panose="020B0604020202020204" pitchFamily="34" charset="0"/>
+              </a:rPr>
+              <a:t>Density</a:t>
+            </a:r>
+            <a:endParaRPr kumimoji="1" lang="zh-CN" altLang="en-US" sz="2000" dirty="0">
+              <a:latin typeface="Arial" panose="020B0604020202020204" pitchFamily="34" charset="0"/>
+              <a:cs typeface="Arial" panose="020B0604020202020204" pitchFamily="34" charset="0"/>
+            </a:endParaRPr>
+          </a:p>
+        </p:txBody>
+      </p:sp>
+      <p:sp>
+        <p:nvSpPr>
+          <p:cNvPr id="52" name="文本框 51">
+            <a:extLst>
+              <a:ext uri="{FF2B5EF4-FFF2-40B4-BE49-F238E27FC236}">
+                <a16:creationId xmlns:a16="http://schemas.microsoft.com/office/drawing/2014/main" id="{1811A470-BB0C-7C6A-463E-6ADE1832A91D}"/>
+              </a:ext>
+            </a:extLst>
+          </p:cNvPr>
+          <p:cNvSpPr txBox="1"/>
+          <p:nvPr/>
+        </p:nvSpPr>
+        <p:spPr>
+          <a:xfrm>
+            <a:off x="11927683" y="5210960"/>
+            <a:ext cx="4320000" cy="400110"/>
+          </a:xfrm>
+          <a:prstGeom prst="rect">
+            <a:avLst/>
+          </a:prstGeom>
+          <a:noFill/>
+        </p:spPr>
+        <p:txBody>
+          <a:bodyPr wrap="square" rtlCol="0">
+            <a:spAutoFit/>
+          </a:bodyPr>
+          <a:lstStyle/>
+          <a:p>
+            <a:pPr algn="ctr"/>
+            <a:r>
+              <a:rPr kumimoji="1" lang="en-US" altLang="zh-CN" sz="2000" dirty="0">
+                <a:latin typeface="Arial" panose="020B0604020202020204" pitchFamily="34" charset="0"/>
+                <a:cs typeface="Arial" panose="020B0604020202020204" pitchFamily="34" charset="0"/>
+              </a:rPr>
+              <a:t>PKTN</a:t>
+            </a:r>
+            <a:r>
+              <a:rPr kumimoji="1" lang="zh-CN" altLang="en-US" sz="2000" dirty="0">
+                <a:latin typeface="Arial" panose="020B0604020202020204" pitchFamily="34" charset="0"/>
+                <a:cs typeface="Arial" panose="020B0604020202020204" pitchFamily="34" charset="0"/>
+              </a:rPr>
+              <a:t> </a:t>
+            </a:r>
+            <a:r>
+              <a:rPr kumimoji="1" lang="en-US" altLang="zh-CN" sz="2000" dirty="0">
+                <a:latin typeface="Arial" panose="020B0604020202020204" pitchFamily="34" charset="0"/>
+                <a:cs typeface="Arial" panose="020B0604020202020204" pitchFamily="34" charset="0"/>
+              </a:rPr>
+              <a:t>–</a:t>
+            </a:r>
+            <a:r>
+              <a:rPr kumimoji="1" lang="zh-CN" altLang="en-US" sz="2000" dirty="0">
+                <a:latin typeface="Arial" panose="020B0604020202020204" pitchFamily="34" charset="0"/>
+                <a:cs typeface="Arial" panose="020B0604020202020204" pitchFamily="34" charset="0"/>
+              </a:rPr>
+              <a:t> </a:t>
+            </a:r>
+            <a:r>
+              <a:rPr kumimoji="1" lang="en-US" altLang="zh-CN" sz="2000" dirty="0">
+                <a:latin typeface="Arial" panose="020B0604020202020204" pitchFamily="34" charset="0"/>
+                <a:cs typeface="Arial" panose="020B0604020202020204" pitchFamily="34" charset="0"/>
+              </a:rPr>
+              <a:t>Position</a:t>
+            </a:r>
+            <a:r>
+              <a:rPr kumimoji="1" lang="zh-CN" altLang="en-US" sz="2000" dirty="0">
+                <a:latin typeface="Arial" panose="020B0604020202020204" pitchFamily="34" charset="0"/>
+                <a:cs typeface="Arial" panose="020B0604020202020204" pitchFamily="34" charset="0"/>
+              </a:rPr>
+              <a:t> </a:t>
+            </a:r>
+            <a:r>
+              <a:rPr kumimoji="1" lang="en-US" altLang="zh-CN" sz="2000" dirty="0">
+                <a:latin typeface="Arial" panose="020B0604020202020204" pitchFamily="34" charset="0"/>
+                <a:cs typeface="Arial" panose="020B0604020202020204" pitchFamily="34" charset="0"/>
+              </a:rPr>
+              <a:t>(N=4633)</a:t>
+            </a:r>
+            <a:endParaRPr kumimoji="1" lang="zh-CN" altLang="en-US" sz="2000" dirty="0">
+              <a:latin typeface="Arial" panose="020B0604020202020204" pitchFamily="34" charset="0"/>
+              <a:cs typeface="Arial" panose="020B0604020202020204" pitchFamily="34" charset="0"/>
+            </a:endParaRPr>
+          </a:p>
+        </p:txBody>
+      </p:sp>
+      <p:sp>
+        <p:nvSpPr>
+          <p:cNvPr id="53" name="文本框 52">
+            <a:extLst>
+              <a:ext uri="{FF2B5EF4-FFF2-40B4-BE49-F238E27FC236}">
+                <a16:creationId xmlns:a16="http://schemas.microsoft.com/office/drawing/2014/main" id="{246C74AA-55B3-502E-50BE-CD3B76DECFDC}"/>
+              </a:ext>
+            </a:extLst>
+          </p:cNvPr>
+          <p:cNvSpPr txBox="1"/>
+          <p:nvPr/>
+        </p:nvSpPr>
+        <p:spPr>
+          <a:xfrm>
+            <a:off x="16792150" y="5210960"/>
+            <a:ext cx="4320000" cy="400110"/>
+          </a:xfrm>
+          <a:prstGeom prst="rect">
+            <a:avLst/>
+          </a:prstGeom>
+          <a:noFill/>
+        </p:spPr>
+        <p:txBody>
+          <a:bodyPr wrap="square" rtlCol="0">
+            <a:spAutoFit/>
+          </a:bodyPr>
+          <a:lstStyle/>
+          <a:p>
+            <a:pPr algn="ctr"/>
+            <a:r>
+              <a:rPr kumimoji="1" lang="en-US" altLang="zh-CN" sz="2000" dirty="0">
+                <a:latin typeface="Arial" panose="020B0604020202020204" pitchFamily="34" charset="0"/>
+                <a:cs typeface="Arial" panose="020B0604020202020204" pitchFamily="34" charset="0"/>
+              </a:rPr>
+              <a:t>PKTN</a:t>
+            </a:r>
+            <a:r>
+              <a:rPr kumimoji="1" lang="zh-CN" altLang="en-US" sz="2000" dirty="0">
+                <a:latin typeface="Arial" panose="020B0604020202020204" pitchFamily="34" charset="0"/>
+                <a:cs typeface="Arial" panose="020B0604020202020204" pitchFamily="34" charset="0"/>
+              </a:rPr>
+              <a:t> </a:t>
+            </a:r>
+            <a:r>
+              <a:rPr kumimoji="1" lang="en-US" altLang="zh-CN" sz="2000" dirty="0">
+                <a:latin typeface="Arial" panose="020B0604020202020204" pitchFamily="34" charset="0"/>
+                <a:cs typeface="Arial" panose="020B0604020202020204" pitchFamily="34" charset="0"/>
+              </a:rPr>
+              <a:t>–</a:t>
+            </a:r>
+            <a:r>
+              <a:rPr kumimoji="1" lang="zh-CN" altLang="en-US" sz="2000" dirty="0">
+                <a:latin typeface="Arial" panose="020B0604020202020204" pitchFamily="34" charset="0"/>
+                <a:cs typeface="Arial" panose="020B0604020202020204" pitchFamily="34" charset="0"/>
+              </a:rPr>
+              <a:t> </a:t>
+            </a:r>
+            <a:r>
+              <a:rPr kumimoji="1" lang="en-US" altLang="zh-CN" sz="2000" dirty="0">
+                <a:latin typeface="Arial" panose="020B0604020202020204" pitchFamily="34" charset="0"/>
+                <a:cs typeface="Arial" panose="020B0604020202020204" pitchFamily="34" charset="0"/>
+              </a:rPr>
+              <a:t>Size</a:t>
+            </a:r>
+            <a:r>
+              <a:rPr kumimoji="1" lang="zh-CN" altLang="en-US" sz="2000" dirty="0">
+                <a:latin typeface="Arial" panose="020B0604020202020204" pitchFamily="34" charset="0"/>
+                <a:cs typeface="Arial" panose="020B0604020202020204" pitchFamily="34" charset="0"/>
+              </a:rPr>
+              <a:t> </a:t>
+            </a:r>
+            <a:r>
+              <a:rPr kumimoji="1" lang="en-US" altLang="zh-CN" sz="2000" dirty="0">
+                <a:latin typeface="Arial" panose="020B0604020202020204" pitchFamily="34" charset="0"/>
+                <a:cs typeface="Arial" panose="020B0604020202020204" pitchFamily="34" charset="0"/>
+              </a:rPr>
+              <a:t>(N=4633)</a:t>
+            </a:r>
+            <a:endParaRPr kumimoji="1" lang="zh-CN" altLang="en-US" sz="2000" dirty="0">
+              <a:latin typeface="Arial" panose="020B0604020202020204" pitchFamily="34" charset="0"/>
+              <a:cs typeface="Arial" panose="020B0604020202020204" pitchFamily="34" charset="0"/>
+            </a:endParaRPr>
+          </a:p>
+        </p:txBody>
+      </p:sp>
+      <p:sp>
+        <p:nvSpPr>
+          <p:cNvPr id="70" name="文本框 69">
+            <a:extLst>
+              <a:ext uri="{FF2B5EF4-FFF2-40B4-BE49-F238E27FC236}">
+                <a16:creationId xmlns:a16="http://schemas.microsoft.com/office/drawing/2014/main" id="{9CFCD99C-0E51-7097-8F14-0BB1F5583784}"/>
+              </a:ext>
+            </a:extLst>
+          </p:cNvPr>
+          <p:cNvSpPr txBox="1"/>
+          <p:nvPr/>
+        </p:nvSpPr>
+        <p:spPr>
+          <a:xfrm>
+            <a:off x="1792503" y="10227821"/>
+            <a:ext cx="4320000" cy="400110"/>
+          </a:xfrm>
+          <a:prstGeom prst="rect">
+            <a:avLst/>
+          </a:prstGeom>
+          <a:noFill/>
+        </p:spPr>
+        <p:txBody>
+          <a:bodyPr wrap="square" rtlCol="0">
+            <a:spAutoFit/>
+          </a:bodyPr>
+          <a:lstStyle/>
+          <a:p>
+            <a:pPr algn="ctr"/>
+            <a:r>
+              <a:rPr kumimoji="1" lang="en-US" altLang="zh-CN" sz="2000" dirty="0" err="1">
+                <a:latin typeface="Arial" panose="020B0604020202020204" pitchFamily="34" charset="0"/>
+                <a:cs typeface="Arial" panose="020B0604020202020204" pitchFamily="34" charset="0"/>
+              </a:rPr>
+              <a:t>FinalData</a:t>
+            </a:r>
+            <a:r>
+              <a:rPr kumimoji="1" lang="zh-CN" altLang="en-US" sz="2000" dirty="0">
+                <a:latin typeface="Arial" panose="020B0604020202020204" pitchFamily="34" charset="0"/>
+                <a:cs typeface="Arial" panose="020B0604020202020204" pitchFamily="34" charset="0"/>
+              </a:rPr>
+              <a:t> </a:t>
+            </a:r>
+            <a:r>
+              <a:rPr kumimoji="1" lang="en-US" altLang="zh-CN" sz="2000" dirty="0">
+                <a:latin typeface="Arial" panose="020B0604020202020204" pitchFamily="34" charset="0"/>
+                <a:cs typeface="Arial" panose="020B0604020202020204" pitchFamily="34" charset="0"/>
+              </a:rPr>
+              <a:t>–</a:t>
+            </a:r>
+            <a:r>
+              <a:rPr kumimoji="1" lang="zh-CN" altLang="en-US" sz="2000" dirty="0">
+                <a:latin typeface="Arial" panose="020B0604020202020204" pitchFamily="34" charset="0"/>
+                <a:cs typeface="Arial" panose="020B0604020202020204" pitchFamily="34" charset="0"/>
+              </a:rPr>
+              <a:t> </a:t>
+            </a:r>
+            <a:r>
+              <a:rPr kumimoji="1" lang="en-US" altLang="zh-CN" sz="2000" dirty="0">
+                <a:latin typeface="Arial" panose="020B0604020202020204" pitchFamily="34" charset="0"/>
+                <a:cs typeface="Arial" panose="020B0604020202020204" pitchFamily="34" charset="0"/>
+              </a:rPr>
+              <a:t>Position</a:t>
+            </a:r>
+            <a:r>
+              <a:rPr kumimoji="1" lang="zh-CN" altLang="en-US" sz="2000" dirty="0">
+                <a:latin typeface="Arial" panose="020B0604020202020204" pitchFamily="34" charset="0"/>
+                <a:cs typeface="Arial" panose="020B0604020202020204" pitchFamily="34" charset="0"/>
+              </a:rPr>
+              <a:t> </a:t>
+            </a:r>
+            <a:r>
+              <a:rPr kumimoji="1" lang="en-US" altLang="zh-CN" sz="2000" dirty="0">
+                <a:latin typeface="Arial" panose="020B0604020202020204" pitchFamily="34" charset="0"/>
+                <a:cs typeface="Arial" panose="020B0604020202020204" pitchFamily="34" charset="0"/>
+              </a:rPr>
+              <a:t>(N=4633)</a:t>
+            </a:r>
+            <a:endParaRPr kumimoji="1" lang="zh-CN" altLang="en-US" sz="2000" dirty="0">
+              <a:latin typeface="Arial" panose="020B0604020202020204" pitchFamily="34" charset="0"/>
+              <a:cs typeface="Arial" panose="020B0604020202020204" pitchFamily="34" charset="0"/>
+            </a:endParaRPr>
+          </a:p>
+        </p:txBody>
+      </p:sp>
+      <p:sp>
+        <p:nvSpPr>
+          <p:cNvPr id="71" name="文本框 70">
+            <a:extLst>
+              <a:ext uri="{FF2B5EF4-FFF2-40B4-BE49-F238E27FC236}">
+                <a16:creationId xmlns:a16="http://schemas.microsoft.com/office/drawing/2014/main" id="{2C0F7152-AD51-BE59-D412-082CA71EFAD1}"/>
+              </a:ext>
+            </a:extLst>
+          </p:cNvPr>
+          <p:cNvSpPr txBox="1"/>
+          <p:nvPr/>
+        </p:nvSpPr>
+        <p:spPr>
+          <a:xfrm rot="16200000">
+            <a:off x="-474269" y="12287654"/>
+            <a:ext cx="4320000" cy="400110"/>
+          </a:xfrm>
+          <a:prstGeom prst="rect">
+            <a:avLst/>
+          </a:prstGeom>
+          <a:noFill/>
+        </p:spPr>
+        <p:txBody>
+          <a:bodyPr wrap="square" rtlCol="0">
+            <a:spAutoFit/>
+          </a:bodyPr>
+          <a:lstStyle/>
+          <a:p>
+            <a:pPr algn="ctr"/>
+            <a:r>
+              <a:rPr kumimoji="1" lang="en-US" altLang="zh-CN" sz="2000" dirty="0">
+                <a:latin typeface="Arial" panose="020B0604020202020204" pitchFamily="34" charset="0"/>
+                <a:cs typeface="Arial" panose="020B0604020202020204" pitchFamily="34" charset="0"/>
+              </a:rPr>
+              <a:t>Pos</a:t>
+            </a:r>
+            <a:r>
+              <a:rPr kumimoji="1" lang="zh-CN" altLang="en-US" sz="2000" dirty="0">
+                <a:latin typeface="Arial" panose="020B0604020202020204" pitchFamily="34" charset="0"/>
+                <a:cs typeface="Arial" panose="020B0604020202020204" pitchFamily="34" charset="0"/>
+              </a:rPr>
+              <a:t> </a:t>
+            </a:r>
+            <a:r>
+              <a:rPr kumimoji="1" lang="en-US" altLang="zh-CN" sz="2000" dirty="0">
+                <a:latin typeface="Arial" panose="020B0604020202020204" pitchFamily="34" charset="0"/>
+                <a:cs typeface="Arial" panose="020B0604020202020204" pitchFamily="34" charset="0"/>
+              </a:rPr>
+              <a:t>y</a:t>
+            </a:r>
+            <a:endParaRPr kumimoji="1" lang="zh-CN" altLang="en-US" sz="2000" dirty="0">
+              <a:latin typeface="Arial" panose="020B0604020202020204" pitchFamily="34" charset="0"/>
+              <a:cs typeface="Arial" panose="020B0604020202020204" pitchFamily="34" charset="0"/>
+            </a:endParaRPr>
+          </a:p>
+        </p:txBody>
+      </p:sp>
+      <p:sp>
+        <p:nvSpPr>
+          <p:cNvPr id="73" name="文本框 72">
+            <a:extLst>
+              <a:ext uri="{FF2B5EF4-FFF2-40B4-BE49-F238E27FC236}">
+                <a16:creationId xmlns:a16="http://schemas.microsoft.com/office/drawing/2014/main" id="{A5D1F77C-DD22-AB2A-69D2-5B91C98F8F6E}"/>
+              </a:ext>
+            </a:extLst>
+          </p:cNvPr>
+          <p:cNvSpPr txBox="1"/>
+          <p:nvPr/>
+        </p:nvSpPr>
+        <p:spPr>
+          <a:xfrm>
+            <a:off x="1792502" y="14674454"/>
+            <a:ext cx="4320000" cy="400110"/>
+          </a:xfrm>
+          <a:prstGeom prst="rect">
+            <a:avLst/>
+          </a:prstGeom>
+          <a:noFill/>
+        </p:spPr>
+        <p:txBody>
+          <a:bodyPr wrap="square" rtlCol="0">
+            <a:spAutoFit/>
+          </a:bodyPr>
+          <a:lstStyle/>
+          <a:p>
+            <a:pPr algn="ctr"/>
+            <a:r>
+              <a:rPr kumimoji="1" lang="en-US" altLang="zh-CN" sz="2000" dirty="0">
+                <a:latin typeface="Arial" panose="020B0604020202020204" pitchFamily="34" charset="0"/>
+                <a:cs typeface="Arial" panose="020B0604020202020204" pitchFamily="34" charset="0"/>
+              </a:rPr>
+              <a:t>Pos</a:t>
+            </a:r>
+            <a:r>
+              <a:rPr kumimoji="1" lang="zh-CN" altLang="en-US" sz="2000" dirty="0">
+                <a:latin typeface="Arial" panose="020B0604020202020204" pitchFamily="34" charset="0"/>
+                <a:cs typeface="Arial" panose="020B0604020202020204" pitchFamily="34" charset="0"/>
+              </a:rPr>
+              <a:t> </a:t>
+            </a:r>
+            <a:r>
+              <a:rPr kumimoji="1" lang="en-US" altLang="zh-CN" sz="2000" dirty="0">
+                <a:latin typeface="Arial" panose="020B0604020202020204" pitchFamily="34" charset="0"/>
+                <a:cs typeface="Arial" panose="020B0604020202020204" pitchFamily="34" charset="0"/>
+              </a:rPr>
+              <a:t>x</a:t>
+            </a:r>
+            <a:endParaRPr kumimoji="1" lang="zh-CN" altLang="en-US" sz="2000" dirty="0">
+              <a:latin typeface="Arial" panose="020B0604020202020204" pitchFamily="34" charset="0"/>
+              <a:cs typeface="Arial" panose="020B0604020202020204" pitchFamily="34" charset="0"/>
+            </a:endParaRPr>
+          </a:p>
+        </p:txBody>
+      </p:sp>
+      <p:sp>
+        <p:nvSpPr>
+          <p:cNvPr id="75" name="文本框 74">
+            <a:extLst>
+              <a:ext uri="{FF2B5EF4-FFF2-40B4-BE49-F238E27FC236}">
+                <a16:creationId xmlns:a16="http://schemas.microsoft.com/office/drawing/2014/main" id="{432F5A1A-33B5-8D11-349B-4724ECED0FE1}"/>
+              </a:ext>
+            </a:extLst>
+          </p:cNvPr>
+          <p:cNvSpPr txBox="1"/>
+          <p:nvPr/>
+        </p:nvSpPr>
+        <p:spPr>
+          <a:xfrm>
+            <a:off x="6656970" y="14674767"/>
+            <a:ext cx="4320000" cy="400110"/>
+          </a:xfrm>
+          <a:prstGeom prst="rect">
+            <a:avLst/>
+          </a:prstGeom>
+          <a:noFill/>
+        </p:spPr>
+        <p:txBody>
+          <a:bodyPr wrap="square" rtlCol="0">
+            <a:spAutoFit/>
+          </a:bodyPr>
+          <a:lstStyle/>
+          <a:p>
+            <a:pPr algn="ctr"/>
+            <a:r>
+              <a:rPr kumimoji="1" lang="en-US" altLang="zh-CN" sz="2000" dirty="0">
+                <a:latin typeface="Arial" panose="020B0604020202020204" pitchFamily="34" charset="0"/>
+                <a:cs typeface="Arial" panose="020B0604020202020204" pitchFamily="34" charset="0"/>
+              </a:rPr>
+              <a:t>Relative</a:t>
+            </a:r>
+            <a:r>
+              <a:rPr kumimoji="1" lang="zh-CN" altLang="en-US" sz="2000" dirty="0">
+                <a:latin typeface="Arial" panose="020B0604020202020204" pitchFamily="34" charset="0"/>
+                <a:cs typeface="Arial" panose="020B0604020202020204" pitchFamily="34" charset="0"/>
+              </a:rPr>
+              <a:t> </a:t>
+            </a:r>
+            <a:r>
+              <a:rPr kumimoji="1" lang="en-US" altLang="zh-CN" sz="2000" dirty="0">
+                <a:latin typeface="Arial" panose="020B0604020202020204" pitchFamily="34" charset="0"/>
+                <a:cs typeface="Arial" panose="020B0604020202020204" pitchFamily="34" charset="0"/>
+              </a:rPr>
+              <a:t>size</a:t>
+            </a:r>
+            <a:endParaRPr kumimoji="1" lang="zh-CN" altLang="en-US" sz="2000" dirty="0">
+              <a:latin typeface="Arial" panose="020B0604020202020204" pitchFamily="34" charset="0"/>
+              <a:cs typeface="Arial" panose="020B0604020202020204" pitchFamily="34" charset="0"/>
+            </a:endParaRPr>
+          </a:p>
+        </p:txBody>
+      </p:sp>
+      <p:sp>
+        <p:nvSpPr>
+          <p:cNvPr id="76" name="文本框 75">
+            <a:extLst>
+              <a:ext uri="{FF2B5EF4-FFF2-40B4-BE49-F238E27FC236}">
+                <a16:creationId xmlns:a16="http://schemas.microsoft.com/office/drawing/2014/main" id="{499215DE-AB95-4E28-CADD-AC16E2AE3E90}"/>
+              </a:ext>
+            </a:extLst>
+          </p:cNvPr>
+          <p:cNvSpPr txBox="1"/>
+          <p:nvPr/>
+        </p:nvSpPr>
+        <p:spPr>
+          <a:xfrm>
+            <a:off x="6658270" y="10228767"/>
+            <a:ext cx="4320000" cy="400110"/>
+          </a:xfrm>
+          <a:prstGeom prst="rect">
+            <a:avLst/>
+          </a:prstGeom>
+          <a:noFill/>
+        </p:spPr>
+        <p:txBody>
+          <a:bodyPr wrap="square" rtlCol="0">
+            <a:spAutoFit/>
+          </a:bodyPr>
+          <a:lstStyle/>
+          <a:p>
+            <a:pPr algn="ctr"/>
+            <a:r>
+              <a:rPr kumimoji="1" lang="en-US" altLang="zh-CN" sz="2000" dirty="0" err="1">
+                <a:latin typeface="Arial" panose="020B0604020202020204" pitchFamily="34" charset="0"/>
+                <a:cs typeface="Arial" panose="020B0604020202020204" pitchFamily="34" charset="0"/>
+              </a:rPr>
+              <a:t>FinalData</a:t>
+            </a:r>
+            <a:r>
+              <a:rPr kumimoji="1" lang="zh-CN" altLang="en-US" sz="2000" dirty="0">
+                <a:latin typeface="Arial" panose="020B0604020202020204" pitchFamily="34" charset="0"/>
+                <a:cs typeface="Arial" panose="020B0604020202020204" pitchFamily="34" charset="0"/>
+              </a:rPr>
+              <a:t> </a:t>
+            </a:r>
+            <a:r>
+              <a:rPr kumimoji="1" lang="en-US" altLang="zh-CN" sz="2000" dirty="0">
+                <a:latin typeface="Arial" panose="020B0604020202020204" pitchFamily="34" charset="0"/>
+                <a:cs typeface="Arial" panose="020B0604020202020204" pitchFamily="34" charset="0"/>
+              </a:rPr>
+              <a:t>–</a:t>
+            </a:r>
+            <a:r>
+              <a:rPr kumimoji="1" lang="zh-CN" altLang="en-US" sz="2000" dirty="0">
+                <a:latin typeface="Arial" panose="020B0604020202020204" pitchFamily="34" charset="0"/>
+                <a:cs typeface="Arial" panose="020B0604020202020204" pitchFamily="34" charset="0"/>
+              </a:rPr>
+              <a:t> </a:t>
+            </a:r>
+            <a:r>
+              <a:rPr kumimoji="1" lang="en-US" altLang="zh-CN" sz="2000" dirty="0">
+                <a:latin typeface="Arial" panose="020B0604020202020204" pitchFamily="34" charset="0"/>
+                <a:cs typeface="Arial" panose="020B0604020202020204" pitchFamily="34" charset="0"/>
+              </a:rPr>
+              <a:t>Size</a:t>
+            </a:r>
+            <a:r>
+              <a:rPr kumimoji="1" lang="zh-CN" altLang="en-US" sz="2000" dirty="0">
+                <a:latin typeface="Arial" panose="020B0604020202020204" pitchFamily="34" charset="0"/>
+                <a:cs typeface="Arial" panose="020B0604020202020204" pitchFamily="34" charset="0"/>
+              </a:rPr>
+              <a:t> </a:t>
+            </a:r>
+            <a:r>
+              <a:rPr kumimoji="1" lang="en-US" altLang="zh-CN" sz="2000" dirty="0">
+                <a:latin typeface="Arial" panose="020B0604020202020204" pitchFamily="34" charset="0"/>
+                <a:cs typeface="Arial" panose="020B0604020202020204" pitchFamily="34" charset="0"/>
+              </a:rPr>
+              <a:t>(N=4633)</a:t>
+            </a:r>
+            <a:endParaRPr kumimoji="1" lang="zh-CN" altLang="en-US" sz="2000" dirty="0">
+              <a:latin typeface="Arial" panose="020B0604020202020204" pitchFamily="34" charset="0"/>
+              <a:cs typeface="Arial" panose="020B0604020202020204" pitchFamily="34" charset="0"/>
+            </a:endParaRPr>
+          </a:p>
+        </p:txBody>
+      </p:sp>
+      <p:sp>
+        <p:nvSpPr>
+          <p:cNvPr id="77" name="文本框 76">
+            <a:extLst>
+              <a:ext uri="{FF2B5EF4-FFF2-40B4-BE49-F238E27FC236}">
+                <a16:creationId xmlns:a16="http://schemas.microsoft.com/office/drawing/2014/main" id="{55C3C259-06A3-855F-573A-B23110A82C1D}"/>
+              </a:ext>
+            </a:extLst>
+          </p:cNvPr>
+          <p:cNvSpPr txBox="1"/>
+          <p:nvPr/>
+        </p:nvSpPr>
+        <p:spPr>
+          <a:xfrm rot="16200000">
+            <a:off x="4152557" y="12287967"/>
+            <a:ext cx="4320000" cy="400110"/>
+          </a:xfrm>
+          <a:prstGeom prst="rect">
+            <a:avLst/>
+          </a:prstGeom>
+          <a:noFill/>
+        </p:spPr>
+        <p:txBody>
+          <a:bodyPr wrap="square" rtlCol="0">
+            <a:spAutoFit/>
+          </a:bodyPr>
+          <a:lstStyle/>
+          <a:p>
+            <a:pPr algn="ctr"/>
+            <a:r>
+              <a:rPr kumimoji="1" lang="en-US" altLang="zh-CN" sz="2000" dirty="0">
+                <a:latin typeface="Arial" panose="020B0604020202020204" pitchFamily="34" charset="0"/>
+                <a:cs typeface="Arial" panose="020B0604020202020204" pitchFamily="34" charset="0"/>
+              </a:rPr>
+              <a:t>Density</a:t>
+            </a:r>
+            <a:endParaRPr kumimoji="1" lang="zh-CN" altLang="en-US" sz="2000" dirty="0">
+              <a:latin typeface="Arial" panose="020B0604020202020204" pitchFamily="34" charset="0"/>
+              <a:cs typeface="Arial" panose="020B0604020202020204" pitchFamily="34" charset="0"/>
+            </a:endParaRPr>
+          </a:p>
+        </p:txBody>
+      </p:sp>
+      <p:sp>
+        <p:nvSpPr>
+          <p:cNvPr id="80" name="文本框 79">
+            <a:extLst>
+              <a:ext uri="{FF2B5EF4-FFF2-40B4-BE49-F238E27FC236}">
+                <a16:creationId xmlns:a16="http://schemas.microsoft.com/office/drawing/2014/main" id="{BB8D2642-B529-0998-78B1-B2DE2CAE043E}"/>
+              </a:ext>
+            </a:extLst>
+          </p:cNvPr>
+          <p:cNvSpPr txBox="1"/>
+          <p:nvPr/>
+        </p:nvSpPr>
+        <p:spPr>
+          <a:xfrm>
+            <a:off x="11927684" y="14674767"/>
+            <a:ext cx="4320000" cy="400110"/>
+          </a:xfrm>
+          <a:prstGeom prst="rect">
+            <a:avLst/>
+          </a:prstGeom>
+          <a:noFill/>
+        </p:spPr>
+        <p:txBody>
+          <a:bodyPr wrap="square" rtlCol="0">
+            <a:spAutoFit/>
+          </a:bodyPr>
+          <a:lstStyle/>
+          <a:p>
+            <a:pPr algn="ctr"/>
+            <a:r>
+              <a:rPr kumimoji="1" lang="en-US" altLang="zh-CN" sz="2000" dirty="0">
+                <a:latin typeface="Arial" panose="020B0604020202020204" pitchFamily="34" charset="0"/>
+                <a:cs typeface="Arial" panose="020B0604020202020204" pitchFamily="34" charset="0"/>
+              </a:rPr>
+              <a:t>Pos</a:t>
+            </a:r>
+            <a:r>
+              <a:rPr kumimoji="1" lang="zh-CN" altLang="en-US" sz="2000" dirty="0">
+                <a:latin typeface="Arial" panose="020B0604020202020204" pitchFamily="34" charset="0"/>
+                <a:cs typeface="Arial" panose="020B0604020202020204" pitchFamily="34" charset="0"/>
+              </a:rPr>
+              <a:t> </a:t>
+            </a:r>
+            <a:r>
+              <a:rPr kumimoji="1" lang="en-US" altLang="zh-CN" sz="2000" dirty="0">
+                <a:latin typeface="Arial" panose="020B0604020202020204" pitchFamily="34" charset="0"/>
+                <a:cs typeface="Arial" panose="020B0604020202020204" pitchFamily="34" charset="0"/>
+              </a:rPr>
+              <a:t>x</a:t>
+            </a:r>
+            <a:endParaRPr kumimoji="1" lang="zh-CN" altLang="en-US" sz="2000" dirty="0">
+              <a:latin typeface="Arial" panose="020B0604020202020204" pitchFamily="34" charset="0"/>
+              <a:cs typeface="Arial" panose="020B0604020202020204" pitchFamily="34" charset="0"/>
+            </a:endParaRPr>
+          </a:p>
+        </p:txBody>
+      </p:sp>
+      <p:sp>
+        <p:nvSpPr>
+          <p:cNvPr id="81" name="文本框 80">
+            <a:extLst>
+              <a:ext uri="{FF2B5EF4-FFF2-40B4-BE49-F238E27FC236}">
+                <a16:creationId xmlns:a16="http://schemas.microsoft.com/office/drawing/2014/main" id="{5DF6079A-E140-643E-4817-F7177D939A48}"/>
+              </a:ext>
+            </a:extLst>
+          </p:cNvPr>
+          <p:cNvSpPr txBox="1"/>
+          <p:nvPr/>
+        </p:nvSpPr>
+        <p:spPr>
+          <a:xfrm>
+            <a:off x="16792152" y="14674767"/>
+            <a:ext cx="4320000" cy="400110"/>
+          </a:xfrm>
+          <a:prstGeom prst="rect">
+            <a:avLst/>
+          </a:prstGeom>
+          <a:noFill/>
+        </p:spPr>
+        <p:txBody>
+          <a:bodyPr wrap="square" rtlCol="0">
+            <a:spAutoFit/>
+          </a:bodyPr>
+          <a:lstStyle/>
+          <a:p>
+            <a:pPr algn="ctr"/>
+            <a:r>
+              <a:rPr kumimoji="1" lang="en-US" altLang="zh-CN" sz="2000" dirty="0">
+                <a:latin typeface="Arial" panose="020B0604020202020204" pitchFamily="34" charset="0"/>
+                <a:cs typeface="Arial" panose="020B0604020202020204" pitchFamily="34" charset="0"/>
+              </a:rPr>
+              <a:t>Relative</a:t>
+            </a:r>
+            <a:r>
+              <a:rPr kumimoji="1" lang="zh-CN" altLang="en-US" sz="2000" dirty="0">
+                <a:latin typeface="Arial" panose="020B0604020202020204" pitchFamily="34" charset="0"/>
+                <a:cs typeface="Arial" panose="020B0604020202020204" pitchFamily="34" charset="0"/>
+              </a:rPr>
+              <a:t> </a:t>
+            </a:r>
+            <a:r>
+              <a:rPr kumimoji="1" lang="en-US" altLang="zh-CN" sz="2000" dirty="0">
+                <a:latin typeface="Arial" panose="020B0604020202020204" pitchFamily="34" charset="0"/>
+                <a:cs typeface="Arial" panose="020B0604020202020204" pitchFamily="34" charset="0"/>
+              </a:rPr>
+              <a:t>size</a:t>
+            </a:r>
+            <a:endParaRPr kumimoji="1" lang="zh-CN" altLang="en-US" sz="2000" dirty="0">
+              <a:latin typeface="Arial" panose="020B0604020202020204" pitchFamily="34" charset="0"/>
+              <a:cs typeface="Arial" panose="020B0604020202020204" pitchFamily="34" charset="0"/>
+            </a:endParaRPr>
+          </a:p>
+        </p:txBody>
+      </p:sp>
+      <p:sp>
+        <p:nvSpPr>
+          <p:cNvPr id="82" name="文本框 81">
+            <a:extLst>
+              <a:ext uri="{FF2B5EF4-FFF2-40B4-BE49-F238E27FC236}">
+                <a16:creationId xmlns:a16="http://schemas.microsoft.com/office/drawing/2014/main" id="{28DB97C9-0124-4EF8-E7C6-3756FEF8C466}"/>
+              </a:ext>
+            </a:extLst>
+          </p:cNvPr>
+          <p:cNvSpPr txBox="1"/>
+          <p:nvPr/>
+        </p:nvSpPr>
+        <p:spPr>
+          <a:xfrm rot="16200000">
+            <a:off x="9405343" y="12287967"/>
+            <a:ext cx="4320000" cy="400110"/>
+          </a:xfrm>
+          <a:prstGeom prst="rect">
+            <a:avLst/>
+          </a:prstGeom>
+          <a:noFill/>
+        </p:spPr>
+        <p:txBody>
+          <a:bodyPr wrap="square" rtlCol="0">
+            <a:spAutoFit/>
+          </a:bodyPr>
+          <a:lstStyle/>
+          <a:p>
+            <a:pPr algn="ctr"/>
+            <a:r>
+              <a:rPr kumimoji="1" lang="en-US" altLang="zh-CN" sz="2000" dirty="0">
+                <a:latin typeface="Arial" panose="020B0604020202020204" pitchFamily="34" charset="0"/>
+                <a:cs typeface="Arial" panose="020B0604020202020204" pitchFamily="34" charset="0"/>
+              </a:rPr>
+              <a:t>Pos</a:t>
+            </a:r>
+            <a:r>
+              <a:rPr kumimoji="1" lang="zh-CN" altLang="en-US" sz="2000" dirty="0">
+                <a:latin typeface="Arial" panose="020B0604020202020204" pitchFamily="34" charset="0"/>
+                <a:cs typeface="Arial" panose="020B0604020202020204" pitchFamily="34" charset="0"/>
+              </a:rPr>
+              <a:t> </a:t>
+            </a:r>
+            <a:r>
+              <a:rPr kumimoji="1" lang="en-US" altLang="zh-CN" sz="2000" dirty="0">
+                <a:latin typeface="Arial" panose="020B0604020202020204" pitchFamily="34" charset="0"/>
+                <a:cs typeface="Arial" panose="020B0604020202020204" pitchFamily="34" charset="0"/>
+              </a:rPr>
+              <a:t>y</a:t>
+            </a:r>
+            <a:endParaRPr kumimoji="1" lang="zh-CN" altLang="en-US" sz="2000" dirty="0">
+              <a:latin typeface="Arial" panose="020B0604020202020204" pitchFamily="34" charset="0"/>
+              <a:cs typeface="Arial" panose="020B0604020202020204" pitchFamily="34" charset="0"/>
+            </a:endParaRPr>
+          </a:p>
+        </p:txBody>
+      </p:sp>
+      <p:sp>
+        <p:nvSpPr>
+          <p:cNvPr id="83" name="文本框 82">
+            <a:extLst>
+              <a:ext uri="{FF2B5EF4-FFF2-40B4-BE49-F238E27FC236}">
+                <a16:creationId xmlns:a16="http://schemas.microsoft.com/office/drawing/2014/main" id="{B50F4195-2619-4718-571A-9326C921A130}"/>
+              </a:ext>
+            </a:extLst>
+          </p:cNvPr>
+          <p:cNvSpPr txBox="1"/>
+          <p:nvPr/>
+        </p:nvSpPr>
+        <p:spPr>
+          <a:xfrm rot="16200000">
+            <a:off x="14032169" y="12287967"/>
+            <a:ext cx="4320000" cy="400110"/>
+          </a:xfrm>
+          <a:prstGeom prst="rect">
+            <a:avLst/>
+          </a:prstGeom>
+          <a:noFill/>
+        </p:spPr>
+        <p:txBody>
+          <a:bodyPr wrap="square" rtlCol="0">
+            <a:spAutoFit/>
+          </a:bodyPr>
+          <a:lstStyle/>
+          <a:p>
+            <a:pPr algn="ctr"/>
+            <a:r>
+              <a:rPr kumimoji="1" lang="en-US" altLang="zh-CN" sz="2000" dirty="0">
+                <a:latin typeface="Arial" panose="020B0604020202020204" pitchFamily="34" charset="0"/>
+                <a:cs typeface="Arial" panose="020B0604020202020204" pitchFamily="34" charset="0"/>
+              </a:rPr>
+              <a:t>Density</a:t>
+            </a:r>
+            <a:endParaRPr kumimoji="1" lang="zh-CN" altLang="en-US" sz="2000" dirty="0">
+              <a:latin typeface="Arial" panose="020B0604020202020204" pitchFamily="34" charset="0"/>
+              <a:cs typeface="Arial" panose="020B0604020202020204" pitchFamily="34" charset="0"/>
+            </a:endParaRPr>
+          </a:p>
+        </p:txBody>
+      </p:sp>
+      <p:sp>
+        <p:nvSpPr>
+          <p:cNvPr id="84" name="文本框 83">
+            <a:extLst>
+              <a:ext uri="{FF2B5EF4-FFF2-40B4-BE49-F238E27FC236}">
+                <a16:creationId xmlns:a16="http://schemas.microsoft.com/office/drawing/2014/main" id="{2EBA0AF1-5163-3477-B539-E6D5E1D2F903}"/>
+              </a:ext>
+            </a:extLst>
+          </p:cNvPr>
+          <p:cNvSpPr txBox="1"/>
+          <p:nvPr/>
+        </p:nvSpPr>
+        <p:spPr>
+          <a:xfrm>
+            <a:off x="11927683" y="10228767"/>
+            <a:ext cx="4320000" cy="400110"/>
+          </a:xfrm>
+          <a:prstGeom prst="rect">
+            <a:avLst/>
+          </a:prstGeom>
+          <a:noFill/>
+        </p:spPr>
+        <p:txBody>
+          <a:bodyPr wrap="square" rtlCol="0">
+            <a:spAutoFit/>
+          </a:bodyPr>
+          <a:lstStyle/>
+          <a:p>
+            <a:pPr algn="ctr"/>
+            <a:r>
+              <a:rPr kumimoji="1" lang="en-US" altLang="zh-CN" sz="2000" dirty="0" err="1">
+                <a:latin typeface="Arial" panose="020B0604020202020204" pitchFamily="34" charset="0"/>
+                <a:cs typeface="Arial" panose="020B0604020202020204" pitchFamily="34" charset="0"/>
+              </a:rPr>
+              <a:t>Augtrain</a:t>
+            </a:r>
+            <a:r>
+              <a:rPr kumimoji="1" lang="zh-CN" altLang="en-US" sz="2000" dirty="0">
+                <a:latin typeface="Arial" panose="020B0604020202020204" pitchFamily="34" charset="0"/>
+                <a:cs typeface="Arial" panose="020B0604020202020204" pitchFamily="34" charset="0"/>
+              </a:rPr>
+              <a:t> </a:t>
+            </a:r>
+            <a:r>
+              <a:rPr kumimoji="1" lang="en-US" altLang="zh-CN" sz="2000" dirty="0">
+                <a:latin typeface="Arial" panose="020B0604020202020204" pitchFamily="34" charset="0"/>
+                <a:cs typeface="Arial" panose="020B0604020202020204" pitchFamily="34" charset="0"/>
+              </a:rPr>
+              <a:t>–</a:t>
+            </a:r>
+            <a:r>
+              <a:rPr kumimoji="1" lang="zh-CN" altLang="en-US" sz="2000" dirty="0">
+                <a:latin typeface="Arial" panose="020B0604020202020204" pitchFamily="34" charset="0"/>
+                <a:cs typeface="Arial" panose="020B0604020202020204" pitchFamily="34" charset="0"/>
+              </a:rPr>
+              <a:t> </a:t>
+            </a:r>
+            <a:r>
+              <a:rPr kumimoji="1" lang="en-US" altLang="zh-CN" sz="2000" dirty="0">
+                <a:latin typeface="Arial" panose="020B0604020202020204" pitchFamily="34" charset="0"/>
+                <a:cs typeface="Arial" panose="020B0604020202020204" pitchFamily="34" charset="0"/>
+              </a:rPr>
+              <a:t>Position</a:t>
+            </a:r>
+            <a:r>
+              <a:rPr kumimoji="1" lang="zh-CN" altLang="en-US" sz="2000" dirty="0">
+                <a:latin typeface="Arial" panose="020B0604020202020204" pitchFamily="34" charset="0"/>
+                <a:cs typeface="Arial" panose="020B0604020202020204" pitchFamily="34" charset="0"/>
+              </a:rPr>
+              <a:t> </a:t>
+            </a:r>
+            <a:r>
+              <a:rPr kumimoji="1" lang="en-US" altLang="zh-CN" sz="2000" dirty="0">
+                <a:latin typeface="Arial" panose="020B0604020202020204" pitchFamily="34" charset="0"/>
+                <a:cs typeface="Arial" panose="020B0604020202020204" pitchFamily="34" charset="0"/>
+              </a:rPr>
+              <a:t>(N=4633)</a:t>
+            </a:r>
+            <a:endParaRPr kumimoji="1" lang="zh-CN" altLang="en-US" sz="2000" dirty="0">
+              <a:latin typeface="Arial" panose="020B0604020202020204" pitchFamily="34" charset="0"/>
+              <a:cs typeface="Arial" panose="020B0604020202020204" pitchFamily="34" charset="0"/>
+            </a:endParaRPr>
+          </a:p>
+        </p:txBody>
+      </p:sp>
+      <p:sp>
+        <p:nvSpPr>
+          <p:cNvPr id="85" name="文本框 84">
+            <a:extLst>
+              <a:ext uri="{FF2B5EF4-FFF2-40B4-BE49-F238E27FC236}">
+                <a16:creationId xmlns:a16="http://schemas.microsoft.com/office/drawing/2014/main" id="{C0F41947-9407-AF6A-9422-40D2542E8083}"/>
+              </a:ext>
+            </a:extLst>
+          </p:cNvPr>
+          <p:cNvSpPr txBox="1"/>
+          <p:nvPr/>
+        </p:nvSpPr>
+        <p:spPr>
+          <a:xfrm>
+            <a:off x="16792150" y="10228767"/>
+            <a:ext cx="4320000" cy="400110"/>
+          </a:xfrm>
+          <a:prstGeom prst="rect">
+            <a:avLst/>
+          </a:prstGeom>
+          <a:noFill/>
+        </p:spPr>
+        <p:txBody>
+          <a:bodyPr wrap="square" rtlCol="0">
+            <a:spAutoFit/>
+          </a:bodyPr>
+          <a:lstStyle/>
+          <a:p>
+            <a:pPr algn="ctr"/>
+            <a:r>
+              <a:rPr kumimoji="1" lang="en-US" altLang="zh-CN" sz="2000" dirty="0" err="1">
+                <a:latin typeface="Arial" panose="020B0604020202020204" pitchFamily="34" charset="0"/>
+                <a:cs typeface="Arial" panose="020B0604020202020204" pitchFamily="34" charset="0"/>
+              </a:rPr>
+              <a:t>Augtrain</a:t>
+            </a:r>
+            <a:r>
+              <a:rPr kumimoji="1" lang="zh-CN" altLang="en-US" sz="2000" dirty="0">
+                <a:latin typeface="Arial" panose="020B0604020202020204" pitchFamily="34" charset="0"/>
+                <a:cs typeface="Arial" panose="020B0604020202020204" pitchFamily="34" charset="0"/>
+              </a:rPr>
+              <a:t> </a:t>
+            </a:r>
+            <a:r>
+              <a:rPr kumimoji="1" lang="en-US" altLang="zh-CN" sz="2000" dirty="0">
+                <a:latin typeface="Arial" panose="020B0604020202020204" pitchFamily="34" charset="0"/>
+                <a:cs typeface="Arial" panose="020B0604020202020204" pitchFamily="34" charset="0"/>
+              </a:rPr>
+              <a:t>–</a:t>
+            </a:r>
+            <a:r>
+              <a:rPr kumimoji="1" lang="zh-CN" altLang="en-US" sz="2000" dirty="0">
+                <a:latin typeface="Arial" panose="020B0604020202020204" pitchFamily="34" charset="0"/>
+                <a:cs typeface="Arial" panose="020B0604020202020204" pitchFamily="34" charset="0"/>
+              </a:rPr>
+              <a:t> </a:t>
+            </a:r>
+            <a:r>
+              <a:rPr kumimoji="1" lang="en-US" altLang="zh-CN" sz="2000" dirty="0">
+                <a:latin typeface="Arial" panose="020B0604020202020204" pitchFamily="34" charset="0"/>
+                <a:cs typeface="Arial" panose="020B0604020202020204" pitchFamily="34" charset="0"/>
+              </a:rPr>
+              <a:t>Size</a:t>
+            </a:r>
+            <a:r>
+              <a:rPr kumimoji="1" lang="zh-CN" altLang="en-US" sz="2000" dirty="0">
+                <a:latin typeface="Arial" panose="020B0604020202020204" pitchFamily="34" charset="0"/>
+                <a:cs typeface="Arial" panose="020B0604020202020204" pitchFamily="34" charset="0"/>
+              </a:rPr>
+              <a:t> </a:t>
+            </a:r>
+            <a:r>
+              <a:rPr kumimoji="1" lang="en-US" altLang="zh-CN" sz="2000" dirty="0">
+                <a:latin typeface="Arial" panose="020B0604020202020204" pitchFamily="34" charset="0"/>
+                <a:cs typeface="Arial" panose="020B0604020202020204" pitchFamily="34" charset="0"/>
+              </a:rPr>
+              <a:t>(N=4633)</a:t>
+            </a:r>
+            <a:endParaRPr kumimoji="1" lang="zh-CN" altLang="en-US" sz="2000" dirty="0">
+              <a:latin typeface="Arial" panose="020B0604020202020204" pitchFamily="34" charset="0"/>
+              <a:cs typeface="Arial" panose="020B0604020202020204" pitchFamily="34" charset="0"/>
+            </a:endParaRPr>
+          </a:p>
+        </p:txBody>
+      </p:sp>
+      <p:pic>
+        <p:nvPicPr>
+          <p:cNvPr id="87" name="图形 86">
+            <a:extLst>
+              <a:ext uri="{FF2B5EF4-FFF2-40B4-BE49-F238E27FC236}">
+                <a16:creationId xmlns:a16="http://schemas.microsoft.com/office/drawing/2014/main" id="{2CC1C2FA-7907-6F52-4931-872980F7B35B}"/>
+              </a:ext>
+            </a:extLst>
+          </p:cNvPr>
+          <p:cNvPicPr>
+            <a:picLocks/>
+          </p:cNvPicPr>
+          <p:nvPr/>
+        </p:nvPicPr>
+        <p:blipFill>
+          <a:blip>
+            <a:extLst>
+              <a:ext uri="{96DAC541-7B7A-43D3-8B79-37D633B846F1}">
+                <asvg:svgBlip xmlns:asvg="http://schemas.microsoft.com/office/drawing/2016/SVG/main" r:embed="rId7"/>
+              </a:ext>
+            </a:extLst>
+          </a:blip>
+          <a:stretch>
+            <a:fillRect/>
+          </a:stretch>
+        </p:blipFill>
+        <p:spPr>
+          <a:xfrm>
+            <a:off x="1792800" y="5508000"/>
+            <a:ext cx="4320000" cy="4320000"/>
+          </a:xfrm>
+          <a:prstGeom prst="rect">
+            <a:avLst/>
+          </a:prstGeom>
+        </p:spPr>
+      </p:pic>
+      <p:pic>
+        <p:nvPicPr>
+          <p:cNvPr id="89" name="图形 88">
+            <a:extLst>
+              <a:ext uri="{FF2B5EF4-FFF2-40B4-BE49-F238E27FC236}">
+                <a16:creationId xmlns:a16="http://schemas.microsoft.com/office/drawing/2014/main" id="{945F590A-C05F-532C-BCC5-4A285F92C3EF}"/>
+              </a:ext>
+            </a:extLst>
+          </p:cNvPr>
+          <p:cNvPicPr>
+            <a:picLocks noChangeAspect="1"/>
+          </p:cNvPicPr>
+          <p:nvPr/>
+        </p:nvPicPr>
+        <p:blipFill>
+          <a:blip>
+            <a:extLst>
+              <a:ext uri="{96DAC541-7B7A-43D3-8B79-37D633B846F1}">
+                <asvg:svgBlip xmlns:asvg="http://schemas.microsoft.com/office/drawing/2016/SVG/main" r:embed="rId8"/>
+              </a:ext>
+            </a:extLst>
+          </a:blip>
+          <a:stretch>
+            <a:fillRect/>
+          </a:stretch>
+        </p:blipFill>
+        <p:spPr>
+          <a:xfrm>
+            <a:off x="6418800" y="5508000"/>
+            <a:ext cx="4637444" cy="4320000"/>
+          </a:xfrm>
+          <a:prstGeom prst="rect">
+            <a:avLst/>
+          </a:prstGeom>
+        </p:spPr>
+      </p:pic>
+      <p:pic>
+        <p:nvPicPr>
+          <p:cNvPr id="91" name="图形 90">
+            <a:extLst>
+              <a:ext uri="{FF2B5EF4-FFF2-40B4-BE49-F238E27FC236}">
+                <a16:creationId xmlns:a16="http://schemas.microsoft.com/office/drawing/2014/main" id="{2845996C-5DA1-168E-2C53-E3AB47FFD12B}"/>
+              </a:ext>
+            </a:extLst>
+          </p:cNvPr>
+          <p:cNvPicPr>
+            <a:picLocks noChangeAspect="1"/>
+          </p:cNvPicPr>
+          <p:nvPr/>
+        </p:nvPicPr>
+        <p:blipFill>
+          <a:blip>
+            <a:extLst>
+              <a:ext uri="{96DAC541-7B7A-43D3-8B79-37D633B846F1}">
+                <asvg:svgBlip xmlns:asvg="http://schemas.microsoft.com/office/drawing/2016/SVG/main" r:embed="rId9"/>
+              </a:ext>
+            </a:extLst>
+          </a:blip>
+          <a:stretch>
+            <a:fillRect/>
+          </a:stretch>
+        </p:blipFill>
+        <p:spPr>
+          <a:xfrm>
+            <a:off x="16248000" y="5508000"/>
+            <a:ext cx="4796972" cy="4320000"/>
+          </a:xfrm>
+          <a:prstGeom prst="rect">
+            <a:avLst/>
+          </a:prstGeom>
+        </p:spPr>
+      </p:pic>
+      <p:pic>
+        <p:nvPicPr>
+          <p:cNvPr id="93" name="图形 92">
+            <a:extLst>
+              <a:ext uri="{FF2B5EF4-FFF2-40B4-BE49-F238E27FC236}">
+                <a16:creationId xmlns:a16="http://schemas.microsoft.com/office/drawing/2014/main" id="{0E1870EC-7C40-51A2-1FC4-DFECFD877F72}"/>
+              </a:ext>
+            </a:extLst>
+          </p:cNvPr>
+          <p:cNvPicPr>
+            <a:picLocks/>
+          </p:cNvPicPr>
+          <p:nvPr/>
+        </p:nvPicPr>
+        <p:blipFill>
+          <a:blip>
+            <a:extLst>
+              <a:ext uri="{96DAC541-7B7A-43D3-8B79-37D633B846F1}">
+                <asvg:svgBlip xmlns:asvg="http://schemas.microsoft.com/office/drawing/2016/SVG/main" r:embed="rId10"/>
+              </a:ext>
+            </a:extLst>
+          </a:blip>
+          <a:stretch>
+            <a:fillRect/>
+          </a:stretch>
+        </p:blipFill>
+        <p:spPr>
+          <a:xfrm>
+            <a:off x="11690400" y="5508000"/>
+            <a:ext cx="4320000" cy="4320000"/>
+          </a:xfrm>
+          <a:prstGeom prst="rect">
+            <a:avLst/>
+          </a:prstGeom>
+        </p:spPr>
+      </p:pic>
+      <p:pic>
+        <p:nvPicPr>
+          <p:cNvPr id="95" name="图形 94">
+            <a:extLst>
+              <a:ext uri="{FF2B5EF4-FFF2-40B4-BE49-F238E27FC236}">
+                <a16:creationId xmlns:a16="http://schemas.microsoft.com/office/drawing/2014/main" id="{7C0A8AEE-DE8F-D914-518E-BA67F31B53D7}"/>
+              </a:ext>
+            </a:extLst>
+          </p:cNvPr>
+          <p:cNvPicPr>
+            <a:picLocks noChangeAspect="1"/>
+          </p:cNvPicPr>
+          <p:nvPr/>
+        </p:nvPicPr>
+        <p:blipFill>
+          <a:blip>
+            <a:extLst>
+              <a:ext uri="{96DAC541-7B7A-43D3-8B79-37D633B846F1}">
+                <asvg:svgBlip xmlns:asvg="http://schemas.microsoft.com/office/drawing/2016/SVG/main" r:embed="rId11"/>
+              </a:ext>
+            </a:extLst>
+          </a:blip>
+          <a:stretch>
+            <a:fillRect/>
+          </a:stretch>
+        </p:blipFill>
+        <p:spPr>
+          <a:xfrm>
+            <a:off x="6418800" y="10526400"/>
+            <a:ext cx="4796972" cy="4320000"/>
+          </a:xfrm>
+          <a:prstGeom prst="rect">
+            <a:avLst/>
+          </a:prstGeom>
+        </p:spPr>
+      </p:pic>
+      <p:pic>
+        <p:nvPicPr>
+          <p:cNvPr id="97" name="图形 96">
+            <a:extLst>
+              <a:ext uri="{FF2B5EF4-FFF2-40B4-BE49-F238E27FC236}">
+                <a16:creationId xmlns:a16="http://schemas.microsoft.com/office/drawing/2014/main" id="{FBA23BD5-E9D7-D795-9CFF-2E56F7FB0207}"/>
+              </a:ext>
+            </a:extLst>
+          </p:cNvPr>
+          <p:cNvPicPr>
+            <a:picLocks/>
+          </p:cNvPicPr>
+          <p:nvPr/>
+        </p:nvPicPr>
+        <p:blipFill>
+          <a:blip>
+            <a:extLst>
+              <a:ext uri="{96DAC541-7B7A-43D3-8B79-37D633B846F1}">
+                <asvg:svgBlip xmlns:asvg="http://schemas.microsoft.com/office/drawing/2016/SVG/main" r:embed="rId12"/>
+              </a:ext>
+            </a:extLst>
+          </a:blip>
+          <a:stretch>
+            <a:fillRect/>
+          </a:stretch>
+        </p:blipFill>
+        <p:spPr>
+          <a:xfrm>
+            <a:off x="1792800" y="10526400"/>
+            <a:ext cx="4320000" cy="4320000"/>
+          </a:xfrm>
+          <a:prstGeom prst="rect">
+            <a:avLst/>
+          </a:prstGeom>
+        </p:spPr>
+      </p:pic>
+      <p:pic>
+        <p:nvPicPr>
+          <p:cNvPr id="99" name="图形 98">
+            <a:extLst>
+              <a:ext uri="{FF2B5EF4-FFF2-40B4-BE49-F238E27FC236}">
+                <a16:creationId xmlns:a16="http://schemas.microsoft.com/office/drawing/2014/main" id="{0584D1E6-24A1-EEBA-39BB-E559833BF8C6}"/>
+              </a:ext>
+            </a:extLst>
+          </p:cNvPr>
+          <p:cNvPicPr>
+            <a:picLocks/>
+          </p:cNvPicPr>
+          <p:nvPr/>
+        </p:nvPicPr>
+        <p:blipFill>
+          <a:blip>
+            <a:extLst>
+              <a:ext uri="{96DAC541-7B7A-43D3-8B79-37D633B846F1}">
+                <asvg:svgBlip xmlns:asvg="http://schemas.microsoft.com/office/drawing/2016/SVG/main" r:embed="rId13"/>
+              </a:ext>
+            </a:extLst>
+          </a:blip>
+          <a:stretch>
+            <a:fillRect/>
+          </a:stretch>
+        </p:blipFill>
+        <p:spPr>
+          <a:xfrm>
+            <a:off x="11690400" y="10526400"/>
+            <a:ext cx="4320000" cy="4320000"/>
+          </a:xfrm>
+          <a:prstGeom prst="rect">
+            <a:avLst/>
+          </a:prstGeom>
+        </p:spPr>
+      </p:pic>
+      <p:pic>
+        <p:nvPicPr>
+          <p:cNvPr id="101" name="图形 100">
+            <a:extLst>
+              <a:ext uri="{FF2B5EF4-FFF2-40B4-BE49-F238E27FC236}">
+                <a16:creationId xmlns:a16="http://schemas.microsoft.com/office/drawing/2014/main" id="{EB458EE7-55F7-9AAA-FD4A-E9376DDAD0A5}"/>
+              </a:ext>
+            </a:extLst>
+          </p:cNvPr>
+          <p:cNvPicPr>
+            <a:picLocks noChangeAspect="1"/>
+          </p:cNvPicPr>
+          <p:nvPr/>
+        </p:nvPicPr>
+        <p:blipFill>
+          <a:blip>
+            <a:extLst>
+              <a:ext uri="{96DAC541-7B7A-43D3-8B79-37D633B846F1}">
+                <asvg:svgBlip xmlns:asvg="http://schemas.microsoft.com/office/drawing/2016/SVG/main" r:embed="rId14"/>
+              </a:ext>
+            </a:extLst>
+          </a:blip>
+          <a:stretch>
+            <a:fillRect/>
+          </a:stretch>
+        </p:blipFill>
+        <p:spPr>
+          <a:xfrm>
+            <a:off x="16248000" y="10526400"/>
+            <a:ext cx="4796972" cy="4320000"/>
+          </a:xfrm>
+          <a:prstGeom prst="rect">
+            <a:avLst/>
+          </a:prstGeom>
+        </p:spPr>
+      </p:pic>
     </p:spTree>
     <p:extLst>
       <p:ext uri="{BB962C8B-B14F-4D97-AF65-F5344CB8AC3E}">
@@ -3749,6 +6175,1143 @@
           <a:chExt cx="0" cy="0"/>
         </a:xfrm>
       </p:grpSpPr>
+      <p:pic>
+        <p:nvPicPr>
+          <p:cNvPr id="3" name="图形 2">
+            <a:extLst>
+              <a:ext uri="{FF2B5EF4-FFF2-40B4-BE49-F238E27FC236}">
+                <a16:creationId xmlns:a16="http://schemas.microsoft.com/office/drawing/2014/main" id="{8B9136CE-3AE7-EE1D-9076-136727E77F1D}"/>
+              </a:ext>
+            </a:extLst>
+          </p:cNvPr>
+          <p:cNvPicPr>
+            <a:picLocks noChangeAspect="1"/>
+          </p:cNvPicPr>
+          <p:nvPr/>
+        </p:nvPicPr>
+        <p:blipFill>
+          <a:blip>
+            <a:extLst>
+              <a:ext uri="{96DAC541-7B7A-43D3-8B79-37D633B846F1}">
+                <asvg:svgBlip xmlns:asvg="http://schemas.microsoft.com/office/drawing/2016/SVG/main" r:embed="rId2"/>
+              </a:ext>
+            </a:extLst>
+          </a:blip>
+          <a:stretch>
+            <a:fillRect/>
+          </a:stretch>
+        </p:blipFill>
+        <p:spPr>
+          <a:xfrm>
+            <a:off x="835789" y="1425388"/>
+            <a:ext cx="20894029" cy="12442509"/>
+          </a:xfrm>
+          <a:prstGeom prst="rect">
+            <a:avLst/>
+          </a:prstGeom>
+        </p:spPr>
+      </p:pic>
+      <p:sp>
+        <p:nvSpPr>
+          <p:cNvPr id="4" name="文本框 3">
+            <a:extLst>
+              <a:ext uri="{FF2B5EF4-FFF2-40B4-BE49-F238E27FC236}">
+                <a16:creationId xmlns:a16="http://schemas.microsoft.com/office/drawing/2014/main" id="{8D041265-FE57-345A-8DAC-86E142E5F82B}"/>
+              </a:ext>
+            </a:extLst>
+          </p:cNvPr>
+          <p:cNvSpPr txBox="1"/>
+          <p:nvPr/>
+        </p:nvSpPr>
+        <p:spPr>
+          <a:xfrm>
+            <a:off x="19547149" y="2261937"/>
+            <a:ext cx="2182669" cy="523220"/>
+          </a:xfrm>
+          <a:prstGeom prst="rect">
+            <a:avLst/>
+          </a:prstGeom>
+          <a:noFill/>
+        </p:spPr>
+        <p:txBody>
+          <a:bodyPr wrap="square" rtlCol="0">
+            <a:spAutoFit/>
+          </a:bodyPr>
+          <a:lstStyle/>
+          <a:p>
+            <a:r>
+              <a:rPr kumimoji="1" lang="en-US" altLang="zh-CN" sz="2800" dirty="0">
+                <a:latin typeface="Arial" panose="020B0604020202020204" pitchFamily="34" charset="0"/>
+                <a:cs typeface="Arial" panose="020B0604020202020204" pitchFamily="34" charset="0"/>
+              </a:rPr>
+              <a:t>Benign</a:t>
+            </a:r>
+            <a:endParaRPr kumimoji="1" lang="zh-CN" altLang="en-US" sz="2800" dirty="0">
+              <a:latin typeface="Arial" panose="020B0604020202020204" pitchFamily="34" charset="0"/>
+              <a:cs typeface="Arial" panose="020B0604020202020204" pitchFamily="34" charset="0"/>
+            </a:endParaRPr>
+          </a:p>
+        </p:txBody>
+      </p:sp>
+      <p:sp>
+        <p:nvSpPr>
+          <p:cNvPr id="5" name="文本框 4">
+            <a:extLst>
+              <a:ext uri="{FF2B5EF4-FFF2-40B4-BE49-F238E27FC236}">
+                <a16:creationId xmlns:a16="http://schemas.microsoft.com/office/drawing/2014/main" id="{5A2431F6-43FC-DEDB-47F4-F64B1BC98E0F}"/>
+              </a:ext>
+            </a:extLst>
+          </p:cNvPr>
+          <p:cNvSpPr txBox="1"/>
+          <p:nvPr/>
+        </p:nvSpPr>
+        <p:spPr>
+          <a:xfrm>
+            <a:off x="19547149" y="2774052"/>
+            <a:ext cx="2182669" cy="523220"/>
+          </a:xfrm>
+          <a:prstGeom prst="rect">
+            <a:avLst/>
+          </a:prstGeom>
+          <a:noFill/>
+        </p:spPr>
+        <p:txBody>
+          <a:bodyPr wrap="square" rtlCol="0">
+            <a:spAutoFit/>
+          </a:bodyPr>
+          <a:lstStyle/>
+          <a:p>
+            <a:r>
+              <a:rPr kumimoji="1" lang="en-US" altLang="zh-CN" sz="2800" dirty="0">
+                <a:latin typeface="Arial" panose="020B0604020202020204" pitchFamily="34" charset="0"/>
+                <a:cs typeface="Arial" panose="020B0604020202020204" pitchFamily="34" charset="0"/>
+              </a:rPr>
+              <a:t>Malignant</a:t>
+            </a:r>
+          </a:p>
+        </p:txBody>
+      </p:sp>
+      <p:sp>
+        <p:nvSpPr>
+          <p:cNvPr id="6" name="文本框 5">
+            <a:extLst>
+              <a:ext uri="{FF2B5EF4-FFF2-40B4-BE49-F238E27FC236}">
+                <a16:creationId xmlns:a16="http://schemas.microsoft.com/office/drawing/2014/main" id="{AB25CB93-C30F-2886-D2B4-D88935C186B3}"/>
+              </a:ext>
+            </a:extLst>
+          </p:cNvPr>
+          <p:cNvSpPr txBox="1"/>
+          <p:nvPr/>
+        </p:nvSpPr>
+        <p:spPr>
+          <a:xfrm>
+            <a:off x="19330736" y="5510462"/>
+            <a:ext cx="1283369" cy="523220"/>
+          </a:xfrm>
+          <a:prstGeom prst="rect">
+            <a:avLst/>
+          </a:prstGeom>
+          <a:noFill/>
+        </p:spPr>
+        <p:txBody>
+          <a:bodyPr wrap="square" rtlCol="0">
+            <a:spAutoFit/>
+          </a:bodyPr>
+          <a:lstStyle/>
+          <a:p>
+            <a:pPr algn="ctr"/>
+            <a:r>
+              <a:rPr kumimoji="1" lang="en-US" altLang="zh-CN" sz="2800" dirty="0">
+                <a:latin typeface="Arial" panose="020B0604020202020204" pitchFamily="34" charset="0"/>
+                <a:cs typeface="Arial" panose="020B0604020202020204" pitchFamily="34" charset="0"/>
+              </a:rPr>
+              <a:t>1,248</a:t>
+            </a:r>
+            <a:endParaRPr kumimoji="1" lang="zh-CN" altLang="en-US" sz="2800" dirty="0">
+              <a:latin typeface="Arial" panose="020B0604020202020204" pitchFamily="34" charset="0"/>
+              <a:cs typeface="Arial" panose="020B0604020202020204" pitchFamily="34" charset="0"/>
+            </a:endParaRPr>
+          </a:p>
+        </p:txBody>
+      </p:sp>
+      <p:sp>
+        <p:nvSpPr>
+          <p:cNvPr id="7" name="文本框 6">
+            <a:extLst>
+              <a:ext uri="{FF2B5EF4-FFF2-40B4-BE49-F238E27FC236}">
+                <a16:creationId xmlns:a16="http://schemas.microsoft.com/office/drawing/2014/main" id="{67F5E464-954C-25B9-F275-18F8855034CE}"/>
+              </a:ext>
+            </a:extLst>
+          </p:cNvPr>
+          <p:cNvSpPr txBox="1"/>
+          <p:nvPr/>
+        </p:nvSpPr>
+        <p:spPr>
+          <a:xfrm>
+            <a:off x="18047367" y="7433158"/>
+            <a:ext cx="1283369" cy="523220"/>
+          </a:xfrm>
+          <a:prstGeom prst="rect">
+            <a:avLst/>
+          </a:prstGeom>
+          <a:noFill/>
+        </p:spPr>
+        <p:txBody>
+          <a:bodyPr wrap="square" rtlCol="0">
+            <a:spAutoFit/>
+          </a:bodyPr>
+          <a:lstStyle/>
+          <a:p>
+            <a:pPr algn="ctr"/>
+            <a:r>
+              <a:rPr kumimoji="1" lang="en-US" altLang="zh-CN" sz="2800" dirty="0">
+                <a:latin typeface="Arial" panose="020B0604020202020204" pitchFamily="34" charset="0"/>
+                <a:cs typeface="Arial" panose="020B0604020202020204" pitchFamily="34" charset="0"/>
+              </a:rPr>
+              <a:t>426</a:t>
+            </a:r>
+            <a:endParaRPr kumimoji="1" lang="zh-CN" altLang="en-US" sz="2800" dirty="0">
+              <a:latin typeface="Arial" panose="020B0604020202020204" pitchFamily="34" charset="0"/>
+              <a:cs typeface="Arial" panose="020B0604020202020204" pitchFamily="34" charset="0"/>
+            </a:endParaRPr>
+          </a:p>
+        </p:txBody>
+      </p:sp>
+      <p:sp>
+        <p:nvSpPr>
+          <p:cNvPr id="8" name="文本框 7">
+            <a:extLst>
+              <a:ext uri="{FF2B5EF4-FFF2-40B4-BE49-F238E27FC236}">
+                <a16:creationId xmlns:a16="http://schemas.microsoft.com/office/drawing/2014/main" id="{FA73870F-007B-7359-6D35-ADAD735ABAD0}"/>
+              </a:ext>
+            </a:extLst>
+          </p:cNvPr>
+          <p:cNvSpPr txBox="1"/>
+          <p:nvPr/>
+        </p:nvSpPr>
+        <p:spPr>
+          <a:xfrm>
+            <a:off x="14285493" y="8020546"/>
+            <a:ext cx="1283369" cy="523220"/>
+          </a:xfrm>
+          <a:prstGeom prst="rect">
+            <a:avLst/>
+          </a:prstGeom>
+          <a:noFill/>
+        </p:spPr>
+        <p:txBody>
+          <a:bodyPr wrap="square" rtlCol="0">
+            <a:spAutoFit/>
+          </a:bodyPr>
+          <a:lstStyle/>
+          <a:p>
+            <a:pPr algn="ctr"/>
+            <a:r>
+              <a:rPr kumimoji="1" lang="en-US" altLang="zh-CN" sz="2800" dirty="0">
+                <a:latin typeface="Arial" panose="020B0604020202020204" pitchFamily="34" charset="0"/>
+                <a:cs typeface="Arial" panose="020B0604020202020204" pitchFamily="34" charset="0"/>
+              </a:rPr>
+              <a:t>304</a:t>
+            </a:r>
+            <a:endParaRPr kumimoji="1" lang="zh-CN" altLang="en-US" sz="2800" dirty="0">
+              <a:latin typeface="Arial" panose="020B0604020202020204" pitchFamily="34" charset="0"/>
+              <a:cs typeface="Arial" panose="020B0604020202020204" pitchFamily="34" charset="0"/>
+            </a:endParaRPr>
+          </a:p>
+        </p:txBody>
+      </p:sp>
+      <p:sp>
+        <p:nvSpPr>
+          <p:cNvPr id="9" name="文本框 8">
+            <a:extLst>
+              <a:ext uri="{FF2B5EF4-FFF2-40B4-BE49-F238E27FC236}">
+                <a16:creationId xmlns:a16="http://schemas.microsoft.com/office/drawing/2014/main" id="{69CADF6D-7F4E-8CA6-00FE-6B59CCF74C5D}"/>
+              </a:ext>
+            </a:extLst>
+          </p:cNvPr>
+          <p:cNvSpPr txBox="1"/>
+          <p:nvPr/>
+        </p:nvSpPr>
+        <p:spPr>
+          <a:xfrm>
+            <a:off x="15568862" y="11493661"/>
+            <a:ext cx="1283369" cy="523220"/>
+          </a:xfrm>
+          <a:prstGeom prst="rect">
+            <a:avLst/>
+          </a:prstGeom>
+          <a:noFill/>
+        </p:spPr>
+        <p:txBody>
+          <a:bodyPr wrap="square" rtlCol="0">
+            <a:spAutoFit/>
+          </a:bodyPr>
+          <a:lstStyle/>
+          <a:p>
+            <a:pPr algn="ctr"/>
+            <a:r>
+              <a:rPr kumimoji="1" lang="en-US" altLang="zh-CN" sz="2800" dirty="0">
+                <a:latin typeface="Arial" panose="020B0604020202020204" pitchFamily="34" charset="0"/>
+                <a:cs typeface="Arial" panose="020B0604020202020204" pitchFamily="34" charset="0"/>
+              </a:rPr>
+              <a:t>45</a:t>
+            </a:r>
+            <a:endParaRPr kumimoji="1" lang="zh-CN" altLang="en-US" sz="2800" dirty="0">
+              <a:latin typeface="Arial" panose="020B0604020202020204" pitchFamily="34" charset="0"/>
+              <a:cs typeface="Arial" panose="020B0604020202020204" pitchFamily="34" charset="0"/>
+            </a:endParaRPr>
+          </a:p>
+        </p:txBody>
+      </p:sp>
+      <p:sp>
+        <p:nvSpPr>
+          <p:cNvPr id="10" name="文本框 9">
+            <a:extLst>
+              <a:ext uri="{FF2B5EF4-FFF2-40B4-BE49-F238E27FC236}">
+                <a16:creationId xmlns:a16="http://schemas.microsoft.com/office/drawing/2014/main" id="{B8306A94-9DA8-DE6F-5B76-8875A0BBA69F}"/>
+              </a:ext>
+            </a:extLst>
+          </p:cNvPr>
+          <p:cNvSpPr txBox="1"/>
+          <p:nvPr/>
+        </p:nvSpPr>
+        <p:spPr>
+          <a:xfrm>
+            <a:off x="11880056" y="3609546"/>
+            <a:ext cx="1283369" cy="523220"/>
+          </a:xfrm>
+          <a:prstGeom prst="rect">
+            <a:avLst/>
+          </a:prstGeom>
+          <a:noFill/>
+        </p:spPr>
+        <p:txBody>
+          <a:bodyPr wrap="square" rtlCol="0">
+            <a:spAutoFit/>
+          </a:bodyPr>
+          <a:lstStyle/>
+          <a:p>
+            <a:pPr algn="ctr"/>
+            <a:r>
+              <a:rPr kumimoji="1" lang="en-US" altLang="zh-CN" sz="2800" dirty="0">
+                <a:latin typeface="Arial" panose="020B0604020202020204" pitchFamily="34" charset="0"/>
+                <a:cs typeface="Arial" panose="020B0604020202020204" pitchFamily="34" charset="0"/>
+              </a:rPr>
+              <a:t>3,459</a:t>
+            </a:r>
+            <a:endParaRPr kumimoji="1" lang="zh-CN" altLang="en-US" sz="2800" dirty="0">
+              <a:latin typeface="Arial" panose="020B0604020202020204" pitchFamily="34" charset="0"/>
+              <a:cs typeface="Arial" panose="020B0604020202020204" pitchFamily="34" charset="0"/>
+            </a:endParaRPr>
+          </a:p>
+        </p:txBody>
+      </p:sp>
+      <p:sp>
+        <p:nvSpPr>
+          <p:cNvPr id="11" name="文本框 10">
+            <a:extLst>
+              <a:ext uri="{FF2B5EF4-FFF2-40B4-BE49-F238E27FC236}">
+                <a16:creationId xmlns:a16="http://schemas.microsoft.com/office/drawing/2014/main" id="{398E29E6-1888-86C0-84DD-31F981D56D9E}"/>
+              </a:ext>
+            </a:extLst>
+          </p:cNvPr>
+          <p:cNvSpPr txBox="1"/>
+          <p:nvPr/>
+        </p:nvSpPr>
+        <p:spPr>
+          <a:xfrm>
+            <a:off x="10580645" y="2096579"/>
+            <a:ext cx="1283369" cy="523220"/>
+          </a:xfrm>
+          <a:prstGeom prst="rect">
+            <a:avLst/>
+          </a:prstGeom>
+          <a:noFill/>
+        </p:spPr>
+        <p:txBody>
+          <a:bodyPr wrap="square" rtlCol="0">
+            <a:spAutoFit/>
+          </a:bodyPr>
+          <a:lstStyle/>
+          <a:p>
+            <a:pPr algn="ctr"/>
+            <a:r>
+              <a:rPr kumimoji="1" lang="en-US" altLang="zh-CN" sz="2800" dirty="0">
+                <a:latin typeface="Arial" panose="020B0604020202020204" pitchFamily="34" charset="0"/>
+                <a:cs typeface="Arial" panose="020B0604020202020204" pitchFamily="34" charset="0"/>
+              </a:rPr>
+              <a:t>8,172</a:t>
+            </a:r>
+            <a:endParaRPr kumimoji="1" lang="zh-CN" altLang="en-US" sz="2800" dirty="0">
+              <a:latin typeface="Arial" panose="020B0604020202020204" pitchFamily="34" charset="0"/>
+              <a:cs typeface="Arial" panose="020B0604020202020204" pitchFamily="34" charset="0"/>
+            </a:endParaRPr>
+          </a:p>
+        </p:txBody>
+      </p:sp>
+      <p:sp>
+        <p:nvSpPr>
+          <p:cNvPr id="12" name="文本框 11">
+            <a:extLst>
+              <a:ext uri="{FF2B5EF4-FFF2-40B4-BE49-F238E27FC236}">
+                <a16:creationId xmlns:a16="http://schemas.microsoft.com/office/drawing/2014/main" id="{EA28A2D8-DE61-A549-7F07-3BBCAE1E6287}"/>
+              </a:ext>
+            </a:extLst>
+          </p:cNvPr>
+          <p:cNvSpPr txBox="1"/>
+          <p:nvPr/>
+        </p:nvSpPr>
+        <p:spPr>
+          <a:xfrm>
+            <a:off x="8166308" y="3756937"/>
+            <a:ext cx="1283369" cy="523220"/>
+          </a:xfrm>
+          <a:prstGeom prst="rect">
+            <a:avLst/>
+          </a:prstGeom>
+          <a:noFill/>
+        </p:spPr>
+        <p:txBody>
+          <a:bodyPr wrap="square" rtlCol="0">
+            <a:spAutoFit/>
+          </a:bodyPr>
+          <a:lstStyle/>
+          <a:p>
+            <a:pPr algn="ctr"/>
+            <a:r>
+              <a:rPr kumimoji="1" lang="en-US" altLang="zh-CN" sz="2800" dirty="0">
+                <a:latin typeface="Arial" panose="020B0604020202020204" pitchFamily="34" charset="0"/>
+                <a:cs typeface="Arial" panose="020B0604020202020204" pitchFamily="34" charset="0"/>
+              </a:rPr>
+              <a:t>3,199</a:t>
+            </a:r>
+            <a:endParaRPr kumimoji="1" lang="zh-CN" altLang="en-US" sz="2800" dirty="0">
+              <a:latin typeface="Arial" panose="020B0604020202020204" pitchFamily="34" charset="0"/>
+              <a:cs typeface="Arial" panose="020B0604020202020204" pitchFamily="34" charset="0"/>
+            </a:endParaRPr>
+          </a:p>
+        </p:txBody>
+      </p:sp>
+      <p:sp>
+        <p:nvSpPr>
+          <p:cNvPr id="13" name="文本框 12">
+            <a:extLst>
+              <a:ext uri="{FF2B5EF4-FFF2-40B4-BE49-F238E27FC236}">
+                <a16:creationId xmlns:a16="http://schemas.microsoft.com/office/drawing/2014/main" id="{3C752B0D-4EA5-388B-AAFF-C16776F89653}"/>
+              </a:ext>
+            </a:extLst>
+          </p:cNvPr>
+          <p:cNvSpPr txBox="1"/>
+          <p:nvPr/>
+        </p:nvSpPr>
+        <p:spPr>
+          <a:xfrm>
+            <a:off x="6850855" y="5401253"/>
+            <a:ext cx="1283369" cy="523220"/>
+          </a:xfrm>
+          <a:prstGeom prst="rect">
+            <a:avLst/>
+          </a:prstGeom>
+          <a:noFill/>
+        </p:spPr>
+        <p:txBody>
+          <a:bodyPr wrap="square" rtlCol="0">
+            <a:spAutoFit/>
+          </a:bodyPr>
+          <a:lstStyle/>
+          <a:p>
+            <a:pPr algn="ctr"/>
+            <a:r>
+              <a:rPr kumimoji="1" lang="en-US" altLang="zh-CN" sz="2800" dirty="0">
+                <a:latin typeface="Arial" panose="020B0604020202020204" pitchFamily="34" charset="0"/>
+                <a:cs typeface="Arial" panose="020B0604020202020204" pitchFamily="34" charset="0"/>
+              </a:rPr>
+              <a:t>1,301</a:t>
+            </a:r>
+            <a:endParaRPr kumimoji="1" lang="zh-CN" altLang="en-US" sz="2800" dirty="0">
+              <a:latin typeface="Arial" panose="020B0604020202020204" pitchFamily="34" charset="0"/>
+              <a:cs typeface="Arial" panose="020B0604020202020204" pitchFamily="34" charset="0"/>
+            </a:endParaRPr>
+          </a:p>
+        </p:txBody>
+      </p:sp>
+      <p:sp>
+        <p:nvSpPr>
+          <p:cNvPr id="14" name="文本框 13">
+            <a:extLst>
+              <a:ext uri="{FF2B5EF4-FFF2-40B4-BE49-F238E27FC236}">
+                <a16:creationId xmlns:a16="http://schemas.microsoft.com/office/drawing/2014/main" id="{A3B3015E-8144-0DB3-35C2-0C44B728DF23}"/>
+              </a:ext>
+            </a:extLst>
+          </p:cNvPr>
+          <p:cNvSpPr txBox="1"/>
+          <p:nvPr/>
+        </p:nvSpPr>
+        <p:spPr>
+          <a:xfrm>
+            <a:off x="4432869" y="4132766"/>
+            <a:ext cx="1283369" cy="523220"/>
+          </a:xfrm>
+          <a:prstGeom prst="rect">
+            <a:avLst/>
+          </a:prstGeom>
+          <a:noFill/>
+        </p:spPr>
+        <p:txBody>
+          <a:bodyPr wrap="square" rtlCol="0">
+            <a:spAutoFit/>
+          </a:bodyPr>
+          <a:lstStyle/>
+          <a:p>
+            <a:pPr algn="ctr"/>
+            <a:r>
+              <a:rPr kumimoji="1" lang="en-US" altLang="zh-CN" sz="2800" dirty="0">
+                <a:latin typeface="Arial" panose="020B0604020202020204" pitchFamily="34" charset="0"/>
+                <a:cs typeface="Arial" panose="020B0604020202020204" pitchFamily="34" charset="0"/>
+              </a:rPr>
+              <a:t>2,638</a:t>
+            </a:r>
+            <a:endParaRPr kumimoji="1" lang="zh-CN" altLang="en-US" sz="2800" dirty="0">
+              <a:latin typeface="Arial" panose="020B0604020202020204" pitchFamily="34" charset="0"/>
+              <a:cs typeface="Arial" panose="020B0604020202020204" pitchFamily="34" charset="0"/>
+            </a:endParaRPr>
+          </a:p>
+        </p:txBody>
+      </p:sp>
+      <p:sp>
+        <p:nvSpPr>
+          <p:cNvPr id="15" name="文本框 14">
+            <a:extLst>
+              <a:ext uri="{FF2B5EF4-FFF2-40B4-BE49-F238E27FC236}">
+                <a16:creationId xmlns:a16="http://schemas.microsoft.com/office/drawing/2014/main" id="{9FED0EFF-3566-CE1C-8349-C0A977C752DC}"/>
+              </a:ext>
+            </a:extLst>
+          </p:cNvPr>
+          <p:cNvSpPr txBox="1"/>
+          <p:nvPr/>
+        </p:nvSpPr>
+        <p:spPr>
+          <a:xfrm>
+            <a:off x="3133458" y="4081555"/>
+            <a:ext cx="1283369" cy="523220"/>
+          </a:xfrm>
+          <a:prstGeom prst="rect">
+            <a:avLst/>
+          </a:prstGeom>
+          <a:noFill/>
+        </p:spPr>
+        <p:txBody>
+          <a:bodyPr wrap="square" rtlCol="0">
+            <a:spAutoFit/>
+          </a:bodyPr>
+          <a:lstStyle/>
+          <a:p>
+            <a:pPr algn="ctr"/>
+            <a:r>
+              <a:rPr kumimoji="1" lang="en-US" altLang="zh-CN" sz="2800" dirty="0">
+                <a:latin typeface="Arial" panose="020B0604020202020204" pitchFamily="34" charset="0"/>
+                <a:cs typeface="Arial" panose="020B0604020202020204" pitchFamily="34" charset="0"/>
+              </a:rPr>
+              <a:t>2,709</a:t>
+            </a:r>
+            <a:endParaRPr kumimoji="1" lang="zh-CN" altLang="en-US" sz="2800" dirty="0">
+              <a:latin typeface="Arial" panose="020B0604020202020204" pitchFamily="34" charset="0"/>
+              <a:cs typeface="Arial" panose="020B0604020202020204" pitchFamily="34" charset="0"/>
+            </a:endParaRPr>
+          </a:p>
+        </p:txBody>
+      </p:sp>
+      <p:sp>
+        <p:nvSpPr>
+          <p:cNvPr id="16" name="文本框 15">
+            <a:extLst>
+              <a:ext uri="{FF2B5EF4-FFF2-40B4-BE49-F238E27FC236}">
+                <a16:creationId xmlns:a16="http://schemas.microsoft.com/office/drawing/2014/main" id="{94601E97-FB28-6D8B-E3EE-9D3B8A6CD04D}"/>
+              </a:ext>
+            </a:extLst>
+          </p:cNvPr>
+          <p:cNvSpPr txBox="1"/>
+          <p:nvPr/>
+        </p:nvSpPr>
+        <p:spPr>
+          <a:xfrm>
+            <a:off x="2209800" y="1392366"/>
+            <a:ext cx="19302663" cy="707886"/>
+          </a:xfrm>
+          <a:prstGeom prst="rect">
+            <a:avLst/>
+          </a:prstGeom>
+          <a:noFill/>
+        </p:spPr>
+        <p:txBody>
+          <a:bodyPr wrap="square" rtlCol="0">
+            <a:spAutoFit/>
+          </a:bodyPr>
+          <a:lstStyle/>
+          <a:p>
+            <a:pPr algn="ctr"/>
+            <a:r>
+              <a:rPr kumimoji="1" lang="en-US" altLang="zh-CN" sz="4000" dirty="0">
+                <a:latin typeface="Arial" panose="020B0604020202020204" pitchFamily="34" charset="0"/>
+                <a:cs typeface="Arial" panose="020B0604020202020204" pitchFamily="34" charset="0"/>
+              </a:rPr>
+              <a:t>Benign</a:t>
+            </a:r>
+            <a:r>
+              <a:rPr kumimoji="1" lang="zh-CN" altLang="en-US" sz="4000" dirty="0">
+                <a:latin typeface="Arial" panose="020B0604020202020204" pitchFamily="34" charset="0"/>
+                <a:cs typeface="Arial" panose="020B0604020202020204" pitchFamily="34" charset="0"/>
+              </a:rPr>
+              <a:t> </a:t>
+            </a:r>
+            <a:r>
+              <a:rPr kumimoji="1" lang="en-US" altLang="zh-CN" sz="4000" dirty="0">
+                <a:latin typeface="Arial" panose="020B0604020202020204" pitchFamily="34" charset="0"/>
+                <a:cs typeface="Arial" panose="020B0604020202020204" pitchFamily="34" charset="0"/>
+              </a:rPr>
+              <a:t>vs</a:t>
+            </a:r>
+            <a:r>
+              <a:rPr kumimoji="1" lang="zh-CN" altLang="en-US" sz="4000" dirty="0">
+                <a:latin typeface="Arial" panose="020B0604020202020204" pitchFamily="34" charset="0"/>
+                <a:cs typeface="Arial" panose="020B0604020202020204" pitchFamily="34" charset="0"/>
+              </a:rPr>
+              <a:t> </a:t>
+            </a:r>
+            <a:r>
+              <a:rPr kumimoji="1" lang="en-US" altLang="zh-CN" sz="4000" dirty="0">
+                <a:latin typeface="Arial" panose="020B0604020202020204" pitchFamily="34" charset="0"/>
+                <a:cs typeface="Arial" panose="020B0604020202020204" pitchFamily="34" charset="0"/>
+              </a:rPr>
+              <a:t>Malignant</a:t>
+            </a:r>
+            <a:r>
+              <a:rPr kumimoji="1" lang="zh-CN" altLang="en-US" sz="4000" dirty="0">
+                <a:latin typeface="Arial" panose="020B0604020202020204" pitchFamily="34" charset="0"/>
+                <a:cs typeface="Arial" panose="020B0604020202020204" pitchFamily="34" charset="0"/>
+              </a:rPr>
+              <a:t> </a:t>
+            </a:r>
+            <a:r>
+              <a:rPr kumimoji="1" lang="en-US" altLang="zh-CN" sz="4000" dirty="0">
+                <a:latin typeface="Arial" panose="020B0604020202020204" pitchFamily="34" charset="0"/>
+                <a:cs typeface="Arial" panose="020B0604020202020204" pitchFamily="34" charset="0"/>
+              </a:rPr>
+              <a:t>Case</a:t>
+            </a:r>
+            <a:r>
+              <a:rPr kumimoji="1" lang="zh-CN" altLang="en-US" sz="4000" dirty="0">
+                <a:latin typeface="Arial" panose="020B0604020202020204" pitchFamily="34" charset="0"/>
+                <a:cs typeface="Arial" panose="020B0604020202020204" pitchFamily="34" charset="0"/>
+              </a:rPr>
+              <a:t> </a:t>
+            </a:r>
+            <a:r>
+              <a:rPr kumimoji="1" lang="en-US" altLang="zh-CN" sz="4000" dirty="0">
+                <a:latin typeface="Arial" panose="020B0604020202020204" pitchFamily="34" charset="0"/>
+                <a:cs typeface="Arial" panose="020B0604020202020204" pitchFamily="34" charset="0"/>
+              </a:rPr>
+              <a:t>Counts</a:t>
+            </a:r>
+            <a:r>
+              <a:rPr kumimoji="1" lang="zh-CN" altLang="en-US" sz="4000" dirty="0">
+                <a:latin typeface="Arial" panose="020B0604020202020204" pitchFamily="34" charset="0"/>
+                <a:cs typeface="Arial" panose="020B0604020202020204" pitchFamily="34" charset="0"/>
+              </a:rPr>
+              <a:t> </a:t>
+            </a:r>
+            <a:r>
+              <a:rPr kumimoji="1" lang="en-US" altLang="zh-CN" sz="4000" dirty="0">
+                <a:latin typeface="Arial" panose="020B0604020202020204" pitchFamily="34" charset="0"/>
+                <a:cs typeface="Arial" panose="020B0604020202020204" pitchFamily="34" charset="0"/>
+              </a:rPr>
+              <a:t>by</a:t>
+            </a:r>
+            <a:r>
+              <a:rPr kumimoji="1" lang="zh-CN" altLang="en-US" sz="4000" dirty="0">
+                <a:latin typeface="Arial" panose="020B0604020202020204" pitchFamily="34" charset="0"/>
+                <a:cs typeface="Arial" panose="020B0604020202020204" pitchFamily="34" charset="0"/>
+              </a:rPr>
+              <a:t> </a:t>
+            </a:r>
+            <a:r>
+              <a:rPr kumimoji="1" lang="en-US" altLang="zh-CN" sz="4000" dirty="0">
+                <a:latin typeface="Arial" panose="020B0604020202020204" pitchFamily="34" charset="0"/>
+                <a:cs typeface="Arial" panose="020B0604020202020204" pitchFamily="34" charset="0"/>
+              </a:rPr>
+              <a:t>Dataset</a:t>
+            </a:r>
+            <a:endParaRPr kumimoji="1" lang="zh-CN" altLang="en-US" sz="4000" dirty="0">
+              <a:latin typeface="Arial" panose="020B0604020202020204" pitchFamily="34" charset="0"/>
+              <a:cs typeface="Arial" panose="020B0604020202020204" pitchFamily="34" charset="0"/>
+            </a:endParaRPr>
+          </a:p>
+        </p:txBody>
+      </p:sp>
+      <p:sp>
+        <p:nvSpPr>
+          <p:cNvPr id="17" name="文本框 16">
+            <a:extLst>
+              <a:ext uri="{FF2B5EF4-FFF2-40B4-BE49-F238E27FC236}">
+                <a16:creationId xmlns:a16="http://schemas.microsoft.com/office/drawing/2014/main" id="{39499533-88FC-5C85-D680-B02EB33BC3A3}"/>
+              </a:ext>
+            </a:extLst>
+          </p:cNvPr>
+          <p:cNvSpPr txBox="1"/>
+          <p:nvPr/>
+        </p:nvSpPr>
+        <p:spPr>
+          <a:xfrm>
+            <a:off x="3133458" y="12694868"/>
+            <a:ext cx="2582780" cy="584775"/>
+          </a:xfrm>
+          <a:prstGeom prst="rect">
+            <a:avLst/>
+          </a:prstGeom>
+          <a:noFill/>
+        </p:spPr>
+        <p:txBody>
+          <a:bodyPr wrap="square" rtlCol="0">
+            <a:spAutoFit/>
+          </a:bodyPr>
+          <a:lstStyle/>
+          <a:p>
+            <a:pPr algn="ctr"/>
+            <a:r>
+              <a:rPr kumimoji="1" lang="en-US" altLang="zh-CN" sz="3200" dirty="0">
+                <a:latin typeface="Arial" panose="020B0604020202020204" pitchFamily="34" charset="0"/>
+                <a:cs typeface="Arial" panose="020B0604020202020204" pitchFamily="34" charset="0"/>
+              </a:rPr>
+              <a:t>TN3K</a:t>
+            </a:r>
+          </a:p>
+        </p:txBody>
+      </p:sp>
+      <p:sp>
+        <p:nvSpPr>
+          <p:cNvPr id="18" name="文本框 17">
+            <a:extLst>
+              <a:ext uri="{FF2B5EF4-FFF2-40B4-BE49-F238E27FC236}">
+                <a16:creationId xmlns:a16="http://schemas.microsoft.com/office/drawing/2014/main" id="{9B3C24E0-C506-8217-B4A6-20CF194F3F42}"/>
+              </a:ext>
+            </a:extLst>
+          </p:cNvPr>
+          <p:cNvSpPr txBox="1"/>
+          <p:nvPr/>
+        </p:nvSpPr>
+        <p:spPr>
+          <a:xfrm>
+            <a:off x="6722517" y="12694868"/>
+            <a:ext cx="2582780" cy="584775"/>
+          </a:xfrm>
+          <a:prstGeom prst="rect">
+            <a:avLst/>
+          </a:prstGeom>
+          <a:noFill/>
+        </p:spPr>
+        <p:txBody>
+          <a:bodyPr wrap="square" rtlCol="0">
+            <a:spAutoFit/>
+          </a:bodyPr>
+          <a:lstStyle/>
+          <a:p>
+            <a:pPr algn="ctr"/>
+            <a:r>
+              <a:rPr kumimoji="1" lang="en-US" altLang="zh-CN" sz="3200" dirty="0">
+                <a:latin typeface="Arial" panose="020B0604020202020204" pitchFamily="34" charset="0"/>
+                <a:cs typeface="Arial" panose="020B0604020202020204" pitchFamily="34" charset="0"/>
+              </a:rPr>
+              <a:t>TN5K</a:t>
+            </a:r>
+          </a:p>
+        </p:txBody>
+      </p:sp>
+      <p:sp>
+        <p:nvSpPr>
+          <p:cNvPr id="19" name="文本框 18">
+            <a:extLst>
+              <a:ext uri="{FF2B5EF4-FFF2-40B4-BE49-F238E27FC236}">
+                <a16:creationId xmlns:a16="http://schemas.microsoft.com/office/drawing/2014/main" id="{6FDB633A-CB34-A19E-F3A4-205D02A18200}"/>
+              </a:ext>
+            </a:extLst>
+          </p:cNvPr>
+          <p:cNvSpPr txBox="1"/>
+          <p:nvPr/>
+        </p:nvSpPr>
+        <p:spPr>
+          <a:xfrm>
+            <a:off x="10569741" y="12694867"/>
+            <a:ext cx="2582780" cy="584775"/>
+          </a:xfrm>
+          <a:prstGeom prst="rect">
+            <a:avLst/>
+          </a:prstGeom>
+          <a:noFill/>
+        </p:spPr>
+        <p:txBody>
+          <a:bodyPr wrap="square" rtlCol="0">
+            <a:spAutoFit/>
+          </a:bodyPr>
+          <a:lstStyle/>
+          <a:p>
+            <a:pPr algn="ctr"/>
+            <a:r>
+              <a:rPr kumimoji="1" lang="en-US" altLang="zh-CN" sz="3200" dirty="0" err="1">
+                <a:latin typeface="Arial" panose="020B0604020202020204" pitchFamily="34" charset="0"/>
+                <a:cs typeface="Arial" panose="020B0604020202020204" pitchFamily="34" charset="0"/>
+              </a:rPr>
+              <a:t>ThyroidXL</a:t>
+            </a:r>
+            <a:endParaRPr kumimoji="1" lang="en-US" altLang="zh-CN" sz="3200" dirty="0">
+              <a:latin typeface="Arial" panose="020B0604020202020204" pitchFamily="34" charset="0"/>
+              <a:cs typeface="Arial" panose="020B0604020202020204" pitchFamily="34" charset="0"/>
+            </a:endParaRPr>
+          </a:p>
+        </p:txBody>
+      </p:sp>
+      <p:sp>
+        <p:nvSpPr>
+          <p:cNvPr id="20" name="文本框 19">
+            <a:extLst>
+              <a:ext uri="{FF2B5EF4-FFF2-40B4-BE49-F238E27FC236}">
+                <a16:creationId xmlns:a16="http://schemas.microsoft.com/office/drawing/2014/main" id="{338AB95F-692F-4411-C0ED-3C5214B804FD}"/>
+              </a:ext>
+            </a:extLst>
+          </p:cNvPr>
+          <p:cNvSpPr txBox="1"/>
+          <p:nvPr/>
+        </p:nvSpPr>
+        <p:spPr>
+          <a:xfrm>
+            <a:off x="14226167" y="12694866"/>
+            <a:ext cx="2582780" cy="584775"/>
+          </a:xfrm>
+          <a:prstGeom prst="rect">
+            <a:avLst/>
+          </a:prstGeom>
+          <a:noFill/>
+        </p:spPr>
+        <p:txBody>
+          <a:bodyPr wrap="square" rtlCol="0">
+            <a:spAutoFit/>
+          </a:bodyPr>
+          <a:lstStyle/>
+          <a:p>
+            <a:pPr algn="ctr"/>
+            <a:r>
+              <a:rPr kumimoji="1" lang="en-US" altLang="zh-CN" sz="3200" dirty="0">
+                <a:latin typeface="Arial" panose="020B0604020202020204" pitchFamily="34" charset="0"/>
+                <a:cs typeface="Arial" panose="020B0604020202020204" pitchFamily="34" charset="0"/>
+              </a:rPr>
+              <a:t>DDTI</a:t>
+            </a:r>
+          </a:p>
+        </p:txBody>
+      </p:sp>
+      <p:sp>
+        <p:nvSpPr>
+          <p:cNvPr id="21" name="文本框 20">
+            <a:extLst>
+              <a:ext uri="{FF2B5EF4-FFF2-40B4-BE49-F238E27FC236}">
+                <a16:creationId xmlns:a16="http://schemas.microsoft.com/office/drawing/2014/main" id="{5D575A2C-696C-084F-0792-C57371CB138C}"/>
+              </a:ext>
+            </a:extLst>
+          </p:cNvPr>
+          <p:cNvSpPr txBox="1"/>
+          <p:nvPr/>
+        </p:nvSpPr>
+        <p:spPr>
+          <a:xfrm>
+            <a:off x="18073391" y="12694866"/>
+            <a:ext cx="2582780" cy="584775"/>
+          </a:xfrm>
+          <a:prstGeom prst="rect">
+            <a:avLst/>
+          </a:prstGeom>
+          <a:noFill/>
+        </p:spPr>
+        <p:txBody>
+          <a:bodyPr wrap="square" rtlCol="0">
+            <a:spAutoFit/>
+          </a:bodyPr>
+          <a:lstStyle/>
+          <a:p>
+            <a:pPr algn="ctr"/>
+            <a:r>
+              <a:rPr kumimoji="1" lang="en-US" altLang="zh-CN" sz="3200" dirty="0" err="1">
+                <a:latin typeface="Arial" panose="020B0604020202020204" pitchFamily="34" charset="0"/>
+                <a:cs typeface="Arial" panose="020B0604020202020204" pitchFamily="34" charset="0"/>
+              </a:rPr>
+              <a:t>FinalData</a:t>
+            </a:r>
+            <a:endParaRPr kumimoji="1" lang="en-US" altLang="zh-CN" sz="3200" dirty="0">
+              <a:latin typeface="Arial" panose="020B0604020202020204" pitchFamily="34" charset="0"/>
+              <a:cs typeface="Arial" panose="020B0604020202020204" pitchFamily="34" charset="0"/>
+            </a:endParaRPr>
+          </a:p>
+        </p:txBody>
+      </p:sp>
+      <p:sp>
+        <p:nvSpPr>
+          <p:cNvPr id="22" name="文本框 21">
+            <a:extLst>
+              <a:ext uri="{FF2B5EF4-FFF2-40B4-BE49-F238E27FC236}">
+                <a16:creationId xmlns:a16="http://schemas.microsoft.com/office/drawing/2014/main" id="{BC30C2E3-B622-3EE2-19CF-E326939C0D3C}"/>
+              </a:ext>
+            </a:extLst>
+          </p:cNvPr>
+          <p:cNvSpPr txBox="1"/>
+          <p:nvPr/>
+        </p:nvSpPr>
+        <p:spPr>
+          <a:xfrm>
+            <a:off x="2209799" y="13201928"/>
+            <a:ext cx="19302663" cy="707886"/>
+          </a:xfrm>
+          <a:prstGeom prst="rect">
+            <a:avLst/>
+          </a:prstGeom>
+          <a:noFill/>
+        </p:spPr>
+        <p:txBody>
+          <a:bodyPr wrap="square" rtlCol="0">
+            <a:spAutoFit/>
+          </a:bodyPr>
+          <a:lstStyle/>
+          <a:p>
+            <a:pPr algn="ctr"/>
+            <a:r>
+              <a:rPr kumimoji="1" lang="en-US" altLang="zh-CN" sz="4000" dirty="0">
+                <a:latin typeface="Arial" panose="020B0604020202020204" pitchFamily="34" charset="0"/>
+                <a:cs typeface="Arial" panose="020B0604020202020204" pitchFamily="34" charset="0"/>
+              </a:rPr>
+              <a:t>Dataset</a:t>
+            </a:r>
+            <a:endParaRPr kumimoji="1" lang="zh-CN" altLang="en-US" sz="4000" dirty="0">
+              <a:latin typeface="Arial" panose="020B0604020202020204" pitchFamily="34" charset="0"/>
+              <a:cs typeface="Arial" panose="020B0604020202020204" pitchFamily="34" charset="0"/>
+            </a:endParaRPr>
+          </a:p>
+        </p:txBody>
+      </p:sp>
+      <p:sp>
+        <p:nvSpPr>
+          <p:cNvPr id="23" name="文本框 22">
+            <a:extLst>
+              <a:ext uri="{FF2B5EF4-FFF2-40B4-BE49-F238E27FC236}">
+                <a16:creationId xmlns:a16="http://schemas.microsoft.com/office/drawing/2014/main" id="{4B9BA14C-3127-0549-352F-393EA3F4C7A3}"/>
+              </a:ext>
+            </a:extLst>
+          </p:cNvPr>
+          <p:cNvSpPr txBox="1"/>
+          <p:nvPr/>
+        </p:nvSpPr>
+        <p:spPr>
+          <a:xfrm>
+            <a:off x="1325445" y="1888793"/>
+            <a:ext cx="1080000" cy="584775"/>
+          </a:xfrm>
+          <a:prstGeom prst="rect">
+            <a:avLst/>
+          </a:prstGeom>
+          <a:noFill/>
+        </p:spPr>
+        <p:txBody>
+          <a:bodyPr wrap="square" rtlCol="0">
+            <a:spAutoFit/>
+          </a:bodyPr>
+          <a:lstStyle/>
+          <a:p>
+            <a:r>
+              <a:rPr kumimoji="1" lang="en-US" altLang="zh-CN" sz="3200" dirty="0">
+                <a:latin typeface="Arial" panose="020B0604020202020204" pitchFamily="34" charset="0"/>
+                <a:cs typeface="Arial" panose="020B0604020202020204" pitchFamily="34" charset="0"/>
+              </a:rPr>
+              <a:t>10</a:t>
+            </a:r>
+            <a:r>
+              <a:rPr kumimoji="1" lang="en-US" altLang="zh-CN" sz="3200" baseline="30000" dirty="0">
+                <a:latin typeface="Arial" panose="020B0604020202020204" pitchFamily="34" charset="0"/>
+                <a:cs typeface="Arial" panose="020B0604020202020204" pitchFamily="34" charset="0"/>
+              </a:rPr>
+              <a:t>4</a:t>
+            </a:r>
+            <a:endParaRPr kumimoji="1" lang="zh-CN" altLang="en-US" sz="3200" dirty="0">
+              <a:latin typeface="Arial" panose="020B0604020202020204" pitchFamily="34" charset="0"/>
+              <a:cs typeface="Arial" panose="020B0604020202020204" pitchFamily="34" charset="0"/>
+            </a:endParaRPr>
+          </a:p>
+        </p:txBody>
+      </p:sp>
+      <p:sp>
+        <p:nvSpPr>
+          <p:cNvPr id="24" name="文本框 23">
+            <a:extLst>
+              <a:ext uri="{FF2B5EF4-FFF2-40B4-BE49-F238E27FC236}">
+                <a16:creationId xmlns:a16="http://schemas.microsoft.com/office/drawing/2014/main" id="{31FA6A10-6EC5-8301-D602-AFFABAB6D8EC}"/>
+              </a:ext>
+            </a:extLst>
+          </p:cNvPr>
+          <p:cNvSpPr txBox="1"/>
+          <p:nvPr/>
+        </p:nvSpPr>
+        <p:spPr>
+          <a:xfrm>
+            <a:off x="1325445" y="6033682"/>
+            <a:ext cx="1080000" cy="584775"/>
+          </a:xfrm>
+          <a:prstGeom prst="rect">
+            <a:avLst/>
+          </a:prstGeom>
+          <a:noFill/>
+        </p:spPr>
+        <p:txBody>
+          <a:bodyPr wrap="square" rtlCol="0">
+            <a:spAutoFit/>
+          </a:bodyPr>
+          <a:lstStyle/>
+          <a:p>
+            <a:r>
+              <a:rPr kumimoji="1" lang="en-US" altLang="zh-CN" sz="3200" dirty="0">
+                <a:latin typeface="Arial" panose="020B0604020202020204" pitchFamily="34" charset="0"/>
+                <a:cs typeface="Arial" panose="020B0604020202020204" pitchFamily="34" charset="0"/>
+              </a:rPr>
+              <a:t>10</a:t>
+            </a:r>
+            <a:r>
+              <a:rPr kumimoji="1" lang="en-US" altLang="zh-CN" sz="3200" baseline="30000" dirty="0">
+                <a:latin typeface="Arial" panose="020B0604020202020204" pitchFamily="34" charset="0"/>
+                <a:cs typeface="Arial" panose="020B0604020202020204" pitchFamily="34" charset="0"/>
+              </a:rPr>
+              <a:t>3</a:t>
+            </a:r>
+            <a:endParaRPr kumimoji="1" lang="zh-CN" altLang="en-US" sz="3200" dirty="0">
+              <a:latin typeface="Arial" panose="020B0604020202020204" pitchFamily="34" charset="0"/>
+              <a:cs typeface="Arial" panose="020B0604020202020204" pitchFamily="34" charset="0"/>
+            </a:endParaRPr>
+          </a:p>
+        </p:txBody>
+      </p:sp>
+      <p:sp>
+        <p:nvSpPr>
+          <p:cNvPr id="25" name="文本框 24">
+            <a:extLst>
+              <a:ext uri="{FF2B5EF4-FFF2-40B4-BE49-F238E27FC236}">
+                <a16:creationId xmlns:a16="http://schemas.microsoft.com/office/drawing/2014/main" id="{E78478F9-E013-9ED7-D928-1E5B2D6B185F}"/>
+              </a:ext>
+            </a:extLst>
+          </p:cNvPr>
+          <p:cNvSpPr txBox="1"/>
+          <p:nvPr/>
+        </p:nvSpPr>
+        <p:spPr>
+          <a:xfrm>
+            <a:off x="1325445" y="10256240"/>
+            <a:ext cx="1080000" cy="584775"/>
+          </a:xfrm>
+          <a:prstGeom prst="rect">
+            <a:avLst/>
+          </a:prstGeom>
+          <a:noFill/>
+        </p:spPr>
+        <p:txBody>
+          <a:bodyPr wrap="square" rtlCol="0">
+            <a:spAutoFit/>
+          </a:bodyPr>
+          <a:lstStyle/>
+          <a:p>
+            <a:r>
+              <a:rPr kumimoji="1" lang="en-US" altLang="zh-CN" sz="3200" dirty="0">
+                <a:latin typeface="Arial" panose="020B0604020202020204" pitchFamily="34" charset="0"/>
+                <a:cs typeface="Arial" panose="020B0604020202020204" pitchFamily="34" charset="0"/>
+              </a:rPr>
+              <a:t>10</a:t>
+            </a:r>
+            <a:r>
+              <a:rPr kumimoji="1" lang="en-US" altLang="zh-CN" sz="3200" baseline="30000" dirty="0">
+                <a:latin typeface="Arial" panose="020B0604020202020204" pitchFamily="34" charset="0"/>
+                <a:cs typeface="Arial" panose="020B0604020202020204" pitchFamily="34" charset="0"/>
+              </a:rPr>
+              <a:t>2</a:t>
+            </a:r>
+            <a:endParaRPr kumimoji="1" lang="zh-CN" altLang="en-US" sz="3200" dirty="0">
+              <a:latin typeface="Arial" panose="020B0604020202020204" pitchFamily="34" charset="0"/>
+              <a:cs typeface="Arial" panose="020B0604020202020204" pitchFamily="34" charset="0"/>
+            </a:endParaRPr>
+          </a:p>
+        </p:txBody>
+      </p:sp>
+      <p:sp>
+        <p:nvSpPr>
+          <p:cNvPr id="26" name="文本框 25">
+            <a:extLst>
+              <a:ext uri="{FF2B5EF4-FFF2-40B4-BE49-F238E27FC236}">
+                <a16:creationId xmlns:a16="http://schemas.microsoft.com/office/drawing/2014/main" id="{AD85CD75-0E62-CB7B-DA02-DD30A4597171}"/>
+              </a:ext>
+            </a:extLst>
+          </p:cNvPr>
+          <p:cNvSpPr txBox="1"/>
+          <p:nvPr/>
+        </p:nvSpPr>
+        <p:spPr>
+          <a:xfrm rot="16200000">
+            <a:off x="-4341332" y="6937887"/>
+            <a:ext cx="10806074" cy="707886"/>
+          </a:xfrm>
+          <a:prstGeom prst="rect">
+            <a:avLst/>
+          </a:prstGeom>
+          <a:noFill/>
+        </p:spPr>
+        <p:txBody>
+          <a:bodyPr wrap="square" rtlCol="0">
+            <a:spAutoFit/>
+          </a:bodyPr>
+          <a:lstStyle/>
+          <a:p>
+            <a:pPr algn="ctr"/>
+            <a:r>
+              <a:rPr kumimoji="1" lang="en-US" altLang="zh-CN" sz="4000" dirty="0">
+                <a:latin typeface="Arial" panose="020B0604020202020204" pitchFamily="34" charset="0"/>
+                <a:cs typeface="Arial" panose="020B0604020202020204" pitchFamily="34" charset="0"/>
+              </a:rPr>
+              <a:t>Number</a:t>
+            </a:r>
+            <a:r>
+              <a:rPr kumimoji="1" lang="zh-CN" altLang="en-US" sz="4000" dirty="0">
+                <a:latin typeface="Arial" panose="020B0604020202020204" pitchFamily="34" charset="0"/>
+                <a:cs typeface="Arial" panose="020B0604020202020204" pitchFamily="34" charset="0"/>
+              </a:rPr>
+              <a:t> </a:t>
+            </a:r>
+            <a:r>
+              <a:rPr kumimoji="1" lang="en-US" altLang="zh-CN" sz="4000" dirty="0">
+                <a:latin typeface="Arial" panose="020B0604020202020204" pitchFamily="34" charset="0"/>
+                <a:cs typeface="Arial" panose="020B0604020202020204" pitchFamily="34" charset="0"/>
+              </a:rPr>
+              <a:t>of</a:t>
+            </a:r>
+            <a:r>
+              <a:rPr kumimoji="1" lang="zh-CN" altLang="en-US" sz="4000" dirty="0">
+                <a:latin typeface="Arial" panose="020B0604020202020204" pitchFamily="34" charset="0"/>
+                <a:cs typeface="Arial" panose="020B0604020202020204" pitchFamily="34" charset="0"/>
+              </a:rPr>
+              <a:t> </a:t>
+            </a:r>
+            <a:r>
+              <a:rPr kumimoji="1" lang="en-US" altLang="zh-CN" sz="4000" dirty="0">
+                <a:latin typeface="Arial" panose="020B0604020202020204" pitchFamily="34" charset="0"/>
+                <a:cs typeface="Arial" panose="020B0604020202020204" pitchFamily="34" charset="0"/>
+              </a:rPr>
+              <a:t>Cases</a:t>
+            </a:r>
+            <a:endParaRPr kumimoji="1" lang="zh-CN" altLang="en-US" sz="4000" dirty="0">
+              <a:latin typeface="Arial" panose="020B0604020202020204" pitchFamily="34" charset="0"/>
+              <a:cs typeface="Arial" panose="020B0604020202020204" pitchFamily="34" charset="0"/>
+            </a:endParaRPr>
+          </a:p>
+        </p:txBody>
+      </p:sp>
     </p:spTree>
     <p:extLst>
       <p:ext uri="{BB962C8B-B14F-4D97-AF65-F5344CB8AC3E}">
@@ -4075,4 +7638,319 @@
     </a:ext>
   </a:extLst>
 </a:theme>
+</file>
+
+<file path=ppt/theme/theme2.xml><?xml version="1.0" encoding="utf-8"?>
+<a:theme xmlns:a="http://schemas.openxmlformats.org/drawingml/2006/main" name="Office 主题​​">
+  <a:themeElements>
+    <a:clrScheme name="Office">
+      <a:dk1>
+        <a:sysClr val="windowText" lastClr="000000"/>
+      </a:dk1>
+      <a:lt1>
+        <a:sysClr val="window" lastClr="FFFFFF"/>
+      </a:lt1>
+      <a:dk2>
+        <a:srgbClr val="0E2841"/>
+      </a:dk2>
+      <a:lt2>
+        <a:srgbClr val="E8E8E8"/>
+      </a:lt2>
+      <a:accent1>
+        <a:srgbClr val="156082"/>
+      </a:accent1>
+      <a:accent2>
+        <a:srgbClr val="E97132"/>
+      </a:accent2>
+      <a:accent3>
+        <a:srgbClr val="196B24"/>
+      </a:accent3>
+      <a:accent4>
+        <a:srgbClr val="0F9ED5"/>
+      </a:accent4>
+      <a:accent5>
+        <a:srgbClr val="A02B93"/>
+      </a:accent5>
+      <a:accent6>
+        <a:srgbClr val="4EA72E"/>
+      </a:accent6>
+      <a:hlink>
+        <a:srgbClr val="467886"/>
+      </a:hlink>
+      <a:folHlink>
+        <a:srgbClr val="96607D"/>
+      </a:folHlink>
+    </a:clrScheme>
+    <a:fontScheme name="Office">
+      <a:majorFont>
+        <a:latin typeface="等线 Light" panose="02110004020202020204"/>
+        <a:ea typeface=""/>
+        <a:cs typeface=""/>
+        <a:font script="Jpan" typeface="游ゴシック Light"/>
+        <a:font script="Hang" typeface="맑은 고딕"/>
+        <a:font script="Hans" typeface="等线 Light"/>
+        <a:font script="Hant" typeface="新細明體"/>
+        <a:font script="Arab" typeface="Times New Roman"/>
+        <a:font script="Hebr" typeface="Times New Roman"/>
+        <a:font script="Thai" typeface="Angsana New"/>
+        <a:font script="Ethi" typeface="Nyala"/>
+        <a:font script="Beng" typeface="Vrinda"/>
+        <a:font script="Gujr" typeface="Shruti"/>
+        <a:font script="Khmr" typeface="MoolBoran"/>
+        <a:font script="Knda" typeface="Tunga"/>
+        <a:font script="Guru" typeface="Raavi"/>
+        <a:font script="Cans" typeface="Euphemia"/>
+        <a:font script="Cher" typeface="Plantagenet Cherokee"/>
+        <a:font script="Yiii" typeface="Microsoft Yi Baiti"/>
+        <a:font script="Tibt" typeface="Microsoft Himalaya"/>
+        <a:font script="Thaa" typeface="MV Boli"/>
+        <a:font script="Deva" typeface="Mangal"/>
+        <a:font script="Telu" typeface="Gautami"/>
+        <a:font script="Taml" typeface="Latha"/>
+        <a:font script="Syrc" typeface="Estrangelo Edessa"/>
+        <a:font script="Orya" typeface="Kalinga"/>
+        <a:font script="Mlym" typeface="Kartika"/>
+        <a:font script="Laoo" typeface="DokChampa"/>
+        <a:font script="Sinh" typeface="Iskoola Pota"/>
+        <a:font script="Mong" typeface="Mongolian Baiti"/>
+        <a:font script="Viet" typeface="Times New Roman"/>
+        <a:font script="Uigh" typeface="Microsoft Uighur"/>
+        <a:font script="Geor" typeface="Sylfaen"/>
+        <a:font script="Armn" typeface="Arial"/>
+        <a:font script="Bugi" typeface="Leelawadee UI"/>
+        <a:font script="Bopo" typeface="Microsoft JhengHei"/>
+        <a:font script="Java" typeface="Javanese Text"/>
+        <a:font script="Lisu" typeface="Segoe UI"/>
+        <a:font script="Mymr" typeface="Myanmar Text"/>
+        <a:font script="Nkoo" typeface="Ebrima"/>
+        <a:font script="Olck" typeface="Nirmala UI"/>
+        <a:font script="Osma" typeface="Ebrima"/>
+        <a:font script="Phag" typeface="Phagspa"/>
+        <a:font script="Syrn" typeface="Estrangelo Edessa"/>
+        <a:font script="Syrj" typeface="Estrangelo Edessa"/>
+        <a:font script="Syre" typeface="Estrangelo Edessa"/>
+        <a:font script="Sora" typeface="Nirmala UI"/>
+        <a:font script="Tale" typeface="Microsoft Tai Le"/>
+        <a:font script="Talu" typeface="Microsoft New Tai Lue"/>
+        <a:font script="Tfng" typeface="Ebrima"/>
+      </a:majorFont>
+      <a:minorFont>
+        <a:latin typeface="等线" panose="02110004020202020204"/>
+        <a:ea typeface=""/>
+        <a:cs typeface=""/>
+        <a:font script="Jpan" typeface="游ゴシック"/>
+        <a:font script="Hang" typeface="맑은 고딕"/>
+        <a:font script="Hans" typeface="等线"/>
+        <a:font script="Hant" typeface="新細明體"/>
+        <a:font script="Arab" typeface="Arial"/>
+        <a:font script="Hebr" typeface="Arial"/>
+        <a:font script="Thai" typeface="Cordia New"/>
+        <a:font script="Ethi" typeface="Nyala"/>
+        <a:font script="Beng" typeface="Vrinda"/>
+        <a:font script="Gujr" typeface="Shruti"/>
+        <a:font script="Khmr" typeface="DaunPenh"/>
+        <a:font script="Knda" typeface="Tunga"/>
+        <a:font script="Guru" typeface="Raavi"/>
+        <a:font script="Cans" typeface="Euphemia"/>
+        <a:font script="Cher" typeface="Plantagenet Cherokee"/>
+        <a:font script="Yiii" typeface="Microsoft Yi Baiti"/>
+        <a:font script="Tibt" typeface="Microsoft Himalaya"/>
+        <a:font script="Thaa" typeface="MV Boli"/>
+        <a:font script="Deva" typeface="Mangal"/>
+        <a:font script="Telu" typeface="Gautami"/>
+        <a:font script="Taml" typeface="Latha"/>
+        <a:font script="Syrc" typeface="Estrangelo Edessa"/>
+        <a:font script="Orya" typeface="Kalinga"/>
+        <a:font script="Mlym" typeface="Kartika"/>
+        <a:font script="Laoo" typeface="DokChampa"/>
+        <a:font script="Sinh" typeface="Iskoola Pota"/>
+        <a:font script="Mong" typeface="Mongolian Baiti"/>
+        <a:font script="Viet" typeface="Arial"/>
+        <a:font script="Uigh" typeface="Microsoft Uighur"/>
+        <a:font script="Geor" typeface="Sylfaen"/>
+        <a:font script="Armn" typeface="Arial"/>
+        <a:font script="Bugi" typeface="Leelawadee UI"/>
+        <a:font script="Bopo" typeface="Microsoft JhengHei"/>
+        <a:font script="Java" typeface="Javanese Text"/>
+        <a:font script="Lisu" typeface="Segoe UI"/>
+        <a:font script="Mymr" typeface="Myanmar Text"/>
+        <a:font script="Nkoo" typeface="Ebrima"/>
+        <a:font script="Olck" typeface="Nirmala UI"/>
+        <a:font script="Osma" typeface="Ebrima"/>
+        <a:font script="Phag" typeface="Phagspa"/>
+        <a:font script="Syrn" typeface="Estrangelo Edessa"/>
+        <a:font script="Syrj" typeface="Estrangelo Edessa"/>
+        <a:font script="Syre" typeface="Estrangelo Edessa"/>
+        <a:font script="Sora" typeface="Nirmala UI"/>
+        <a:font script="Tale" typeface="Microsoft Tai Le"/>
+        <a:font script="Talu" typeface="Microsoft New Tai Lue"/>
+        <a:font script="Tfng" typeface="Ebrima"/>
+      </a:minorFont>
+    </a:fontScheme>
+    <a:fmtScheme name="Office">
+      <a:fillStyleLst>
+        <a:solidFill>
+          <a:schemeClr val="phClr"/>
+        </a:solidFill>
+        <a:gradFill rotWithShape="1">
+          <a:gsLst>
+            <a:gs pos="0">
+              <a:schemeClr val="phClr">
+                <a:lumMod val="110000"/>
+                <a:satMod val="105000"/>
+                <a:tint val="67000"/>
+              </a:schemeClr>
+            </a:gs>
+            <a:gs pos="50000">
+              <a:schemeClr val="phClr">
+                <a:lumMod val="105000"/>
+                <a:satMod val="103000"/>
+                <a:tint val="73000"/>
+              </a:schemeClr>
+            </a:gs>
+            <a:gs pos="100000">
+              <a:schemeClr val="phClr">
+                <a:lumMod val="105000"/>
+                <a:satMod val="109000"/>
+                <a:tint val="81000"/>
+              </a:schemeClr>
+            </a:gs>
+          </a:gsLst>
+          <a:lin ang="5400000" scaled="0"/>
+        </a:gradFill>
+        <a:gradFill rotWithShape="1">
+          <a:gsLst>
+            <a:gs pos="0">
+              <a:schemeClr val="phClr">
+                <a:satMod val="103000"/>
+                <a:lumMod val="102000"/>
+                <a:tint val="94000"/>
+              </a:schemeClr>
+            </a:gs>
+            <a:gs pos="50000">
+              <a:schemeClr val="phClr">
+                <a:satMod val="110000"/>
+                <a:lumMod val="100000"/>
+                <a:shade val="100000"/>
+              </a:schemeClr>
+            </a:gs>
+            <a:gs pos="100000">
+              <a:schemeClr val="phClr">
+                <a:lumMod val="99000"/>
+                <a:satMod val="120000"/>
+                <a:shade val="78000"/>
+              </a:schemeClr>
+            </a:gs>
+          </a:gsLst>
+          <a:lin ang="5400000" scaled="0"/>
+        </a:gradFill>
+      </a:fillStyleLst>
+      <a:lnStyleLst>
+        <a:ln w="12700" cap="flat" cmpd="sng" algn="ctr">
+          <a:solidFill>
+            <a:schemeClr val="phClr"/>
+          </a:solidFill>
+          <a:prstDash val="solid"/>
+          <a:miter lim="800000"/>
+        </a:ln>
+        <a:ln w="19050" cap="flat" cmpd="sng" algn="ctr">
+          <a:solidFill>
+            <a:schemeClr val="phClr"/>
+          </a:solidFill>
+          <a:prstDash val="solid"/>
+          <a:miter lim="800000"/>
+        </a:ln>
+        <a:ln w="25400" cap="flat" cmpd="sng" algn="ctr">
+          <a:solidFill>
+            <a:schemeClr val="phClr"/>
+          </a:solidFill>
+          <a:prstDash val="solid"/>
+          <a:miter lim="800000"/>
+        </a:ln>
+      </a:lnStyleLst>
+      <a:effectStyleLst>
+        <a:effectStyle>
+          <a:effectLst/>
+        </a:effectStyle>
+        <a:effectStyle>
+          <a:effectLst/>
+        </a:effectStyle>
+        <a:effectStyle>
+          <a:effectLst>
+            <a:outerShdw blurRad="57150" dist="19050" dir="5400000" algn="ctr" rotWithShape="0">
+              <a:srgbClr val="000000">
+                <a:alpha val="63000"/>
+              </a:srgbClr>
+            </a:outerShdw>
+          </a:effectLst>
+        </a:effectStyle>
+      </a:effectStyleLst>
+      <a:bgFillStyleLst>
+        <a:solidFill>
+          <a:schemeClr val="phClr"/>
+        </a:solidFill>
+        <a:solidFill>
+          <a:schemeClr val="phClr">
+            <a:tint val="95000"/>
+            <a:satMod val="170000"/>
+          </a:schemeClr>
+        </a:solidFill>
+        <a:gradFill rotWithShape="1">
+          <a:gsLst>
+            <a:gs pos="0">
+              <a:schemeClr val="phClr">
+                <a:tint val="93000"/>
+                <a:satMod val="150000"/>
+                <a:shade val="98000"/>
+                <a:lumMod val="102000"/>
+              </a:schemeClr>
+            </a:gs>
+            <a:gs pos="50000">
+              <a:schemeClr val="phClr">
+                <a:tint val="98000"/>
+                <a:satMod val="130000"/>
+                <a:shade val="90000"/>
+                <a:lumMod val="103000"/>
+              </a:schemeClr>
+            </a:gs>
+            <a:gs pos="100000">
+              <a:schemeClr val="phClr">
+                <a:shade val="63000"/>
+                <a:satMod val="120000"/>
+              </a:schemeClr>
+            </a:gs>
+          </a:gsLst>
+          <a:lin ang="5400000" scaled="0"/>
+        </a:gradFill>
+      </a:bgFillStyleLst>
+    </a:fmtScheme>
+  </a:themeElements>
+  <a:objectDefaults>
+    <a:lnDef>
+      <a:spPr/>
+      <a:bodyPr/>
+      <a:lstStyle/>
+      <a:style>
+        <a:lnRef idx="2">
+          <a:schemeClr val="accent1"/>
+        </a:lnRef>
+        <a:fillRef idx="0">
+          <a:schemeClr val="accent1"/>
+        </a:fillRef>
+        <a:effectRef idx="1">
+          <a:schemeClr val="accent1"/>
+        </a:effectRef>
+        <a:fontRef idx="minor">
+          <a:schemeClr val="tx1"/>
+        </a:fontRef>
+      </a:style>
+    </a:lnDef>
+  </a:objectDefaults>
+  <a:extraClrSchemeLst/>
+  <a:extLst>
+    <a:ext uri="{05A4C25C-085E-4340-85A3-A5531E510DB2}">
+      <thm15:themeFamily xmlns:thm15="http://schemas.microsoft.com/office/thememl/2012/main" name="Office Theme" id="{2E142A2C-CD16-42D6-873A-C26D2A0506FA}" vid="{1BDDFF52-6CD6-40A5-AB3C-68EB2F1E4D0A}"/>
+    </a:ext>
+  </a:extLst>
+</a:theme>
 </file>
--- a/pptx/data_statistics.pptx
+++ b/pptx/data_statistics.pptx
@@ -3424,8 +3424,8 @@
         </p:nvSpPr>
         <p:spPr>
           <a:xfrm>
-            <a:off x="1792505" y="292094"/>
-            <a:ext cx="4320000" cy="400110"/>
+            <a:off x="1733511" y="1203906"/>
+            <a:ext cx="4320000" cy="461665"/>
           </a:xfrm>
           <a:prstGeom prst="rect">
             <a:avLst/>
@@ -3440,55 +3440,55 @@
           <a:p>
             <a:pPr algn="ctr"/>
             <a:r>
-              <a:rPr kumimoji="1" lang="en-US" altLang="zh-CN" sz="2000" dirty="0">
+              <a:rPr kumimoji="1" lang="en-US" altLang="zh-CN" sz="2400" dirty="0">
                 <a:latin typeface="Arial" panose="020B0604020202020204" pitchFamily="34" charset="0"/>
                 <a:cs typeface="Arial" panose="020B0604020202020204" pitchFamily="34" charset="0"/>
               </a:rPr>
               <a:t>TN3K</a:t>
             </a:r>
             <a:r>
-              <a:rPr kumimoji="1" lang="zh-CN" altLang="en-US" sz="2000" dirty="0">
+              <a:rPr kumimoji="1" lang="zh-CN" altLang="en-US" sz="2400" dirty="0">
                 <a:latin typeface="Arial" panose="020B0604020202020204" pitchFamily="34" charset="0"/>
                 <a:cs typeface="Arial" panose="020B0604020202020204" pitchFamily="34" charset="0"/>
               </a:rPr>
               <a:t> </a:t>
             </a:r>
             <a:r>
-              <a:rPr kumimoji="1" lang="en-US" altLang="zh-CN" sz="2000" dirty="0">
+              <a:rPr kumimoji="1" lang="en-US" altLang="zh-CN" sz="2400" dirty="0">
                 <a:latin typeface="Arial" panose="020B0604020202020204" pitchFamily="34" charset="0"/>
                 <a:cs typeface="Arial" panose="020B0604020202020204" pitchFamily="34" charset="0"/>
               </a:rPr>
               <a:t>–</a:t>
             </a:r>
             <a:r>
-              <a:rPr kumimoji="1" lang="zh-CN" altLang="en-US" sz="2000" dirty="0">
+              <a:rPr kumimoji="1" lang="zh-CN" altLang="en-US" sz="2400" dirty="0">
                 <a:latin typeface="Arial" panose="020B0604020202020204" pitchFamily="34" charset="0"/>
                 <a:cs typeface="Arial" panose="020B0604020202020204" pitchFamily="34" charset="0"/>
               </a:rPr>
               <a:t> </a:t>
             </a:r>
             <a:r>
-              <a:rPr kumimoji="1" lang="en-US" altLang="zh-CN" sz="2000" dirty="0">
+              <a:rPr kumimoji="1" lang="en-US" altLang="zh-CN" sz="2400" dirty="0">
                 <a:latin typeface="Arial" panose="020B0604020202020204" pitchFamily="34" charset="0"/>
                 <a:cs typeface="Arial" panose="020B0604020202020204" pitchFamily="34" charset="0"/>
               </a:rPr>
               <a:t>Position</a:t>
             </a:r>
             <a:r>
-              <a:rPr kumimoji="1" lang="zh-CN" altLang="en-US" sz="2000" dirty="0">
+              <a:rPr kumimoji="1" lang="zh-CN" altLang="en-US" sz="2400" dirty="0">
                 <a:latin typeface="Arial" panose="020B0604020202020204" pitchFamily="34" charset="0"/>
                 <a:cs typeface="Arial" panose="020B0604020202020204" pitchFamily="34" charset="0"/>
               </a:rPr>
               <a:t> </a:t>
             </a:r>
             <a:r>
-              <a:rPr kumimoji="1" lang="en-US" altLang="zh-CN" sz="2000" dirty="0">
-                <a:latin typeface="Arial" panose="020B0604020202020204" pitchFamily="34" charset="0"/>
-                <a:cs typeface="Arial" panose="020B0604020202020204" pitchFamily="34" charset="0"/>
-              </a:rPr>
-              <a:t>(N=4633)</a:t>
-            </a:r>
-            <a:endParaRPr kumimoji="1" lang="zh-CN" altLang="en-US" sz="2000" dirty="0">
+              <a:rPr kumimoji="1" lang="en-US" altLang="zh-CN" sz="2400" dirty="0">
+                <a:latin typeface="Arial" panose="020B0604020202020204" pitchFamily="34" charset="0"/>
+                <a:cs typeface="Arial" panose="020B0604020202020204" pitchFamily="34" charset="0"/>
+              </a:rPr>
+              <a:t>(N=5347)</a:t>
+            </a:r>
+            <a:endParaRPr kumimoji="1" lang="zh-CN" altLang="en-US" sz="2400" dirty="0">
               <a:latin typeface="Arial" panose="020B0604020202020204" pitchFamily="34" charset="0"/>
               <a:cs typeface="Arial" panose="020B0604020202020204" pitchFamily="34" charset="0"/>
             </a:endParaRPr>
@@ -3509,8 +3509,8 @@
         </p:nvSpPr>
         <p:spPr>
           <a:xfrm rot="16200000">
-            <a:off x="-474267" y="2351927"/>
-            <a:ext cx="4320000" cy="400110"/>
+            <a:off x="-533261" y="3265046"/>
+            <a:ext cx="4320000" cy="461665"/>
           </a:xfrm>
           <a:prstGeom prst="rect">
             <a:avLst/>
@@ -3525,27 +3525,27 @@
           <a:p>
             <a:pPr algn="ctr"/>
             <a:r>
-              <a:rPr kumimoji="1" lang="en-US" altLang="zh-CN" sz="2000" dirty="0">
+              <a:rPr kumimoji="1" lang="en-US" altLang="zh-CN" sz="2400" dirty="0">
                 <a:latin typeface="Arial" panose="020B0604020202020204" pitchFamily="34" charset="0"/>
                 <a:cs typeface="Arial" panose="020B0604020202020204" pitchFamily="34" charset="0"/>
               </a:rPr>
               <a:t>Pos</a:t>
             </a:r>
             <a:r>
-              <a:rPr kumimoji="1" lang="zh-CN" altLang="en-US" sz="2000" dirty="0">
+              <a:rPr kumimoji="1" lang="zh-CN" altLang="en-US" sz="2400" dirty="0">
                 <a:latin typeface="Arial" panose="020B0604020202020204" pitchFamily="34" charset="0"/>
                 <a:cs typeface="Arial" panose="020B0604020202020204" pitchFamily="34" charset="0"/>
               </a:rPr>
               <a:t> </a:t>
             </a:r>
             <a:r>
-              <a:rPr kumimoji="1" lang="en-US" altLang="zh-CN" sz="2000" dirty="0">
+              <a:rPr kumimoji="1" lang="en-US" altLang="zh-CN" sz="2400" dirty="0">
                 <a:latin typeface="Arial" panose="020B0604020202020204" pitchFamily="34" charset="0"/>
                 <a:cs typeface="Arial" panose="020B0604020202020204" pitchFamily="34" charset="0"/>
               </a:rPr>
               <a:t>y</a:t>
             </a:r>
-            <a:endParaRPr kumimoji="1" lang="zh-CN" altLang="en-US" sz="2000" dirty="0">
+            <a:endParaRPr kumimoji="1" lang="zh-CN" altLang="en-US" sz="2400" dirty="0">
               <a:latin typeface="Arial" panose="020B0604020202020204" pitchFamily="34" charset="0"/>
               <a:cs typeface="Arial" panose="020B0604020202020204" pitchFamily="34" charset="0"/>
             </a:endParaRPr>
@@ -3580,7 +3580,7 @@
         </p:blipFill>
         <p:spPr>
           <a:xfrm>
-            <a:off x="1791072" y="591840"/>
+            <a:off x="1732078" y="1535736"/>
             <a:ext cx="4320000" cy="4320000"/>
           </a:xfrm>
           <a:prstGeom prst="rect">
@@ -3602,8 +3602,8 @@
         </p:nvSpPr>
         <p:spPr>
           <a:xfrm>
-            <a:off x="1792504" y="4738727"/>
-            <a:ext cx="4320000" cy="400110"/>
+            <a:off x="1733510" y="5682623"/>
+            <a:ext cx="4320000" cy="461665"/>
           </a:xfrm>
           <a:prstGeom prst="rect">
             <a:avLst/>
@@ -3618,27 +3618,27 @@
           <a:p>
             <a:pPr algn="ctr"/>
             <a:r>
-              <a:rPr kumimoji="1" lang="en-US" altLang="zh-CN" sz="2000" dirty="0">
+              <a:rPr kumimoji="1" lang="en-US" altLang="zh-CN" sz="2400" dirty="0">
                 <a:latin typeface="Arial" panose="020B0604020202020204" pitchFamily="34" charset="0"/>
                 <a:cs typeface="Arial" panose="020B0604020202020204" pitchFamily="34" charset="0"/>
               </a:rPr>
               <a:t>Pos</a:t>
             </a:r>
             <a:r>
-              <a:rPr kumimoji="1" lang="zh-CN" altLang="en-US" sz="2000" dirty="0">
+              <a:rPr kumimoji="1" lang="zh-CN" altLang="en-US" sz="2400" dirty="0">
                 <a:latin typeface="Arial" panose="020B0604020202020204" pitchFamily="34" charset="0"/>
                 <a:cs typeface="Arial" panose="020B0604020202020204" pitchFamily="34" charset="0"/>
               </a:rPr>
               <a:t> </a:t>
             </a:r>
             <a:r>
-              <a:rPr kumimoji="1" lang="en-US" altLang="zh-CN" sz="2000" dirty="0">
+              <a:rPr kumimoji="1" lang="en-US" altLang="zh-CN" sz="2400" dirty="0">
                 <a:latin typeface="Arial" panose="020B0604020202020204" pitchFamily="34" charset="0"/>
                 <a:cs typeface="Arial" panose="020B0604020202020204" pitchFamily="34" charset="0"/>
               </a:rPr>
               <a:t>x</a:t>
             </a:r>
-            <a:endParaRPr kumimoji="1" lang="zh-CN" altLang="en-US" sz="2000" dirty="0">
+            <a:endParaRPr kumimoji="1" lang="zh-CN" altLang="en-US" sz="2400" dirty="0">
               <a:latin typeface="Arial" panose="020B0604020202020204" pitchFamily="34" charset="0"/>
               <a:cs typeface="Arial" panose="020B0604020202020204" pitchFamily="34" charset="0"/>
             </a:endParaRPr>
@@ -3673,7 +3673,7 @@
         </p:blipFill>
         <p:spPr>
           <a:xfrm>
-            <a:off x="6418486" y="591527"/>
+            <a:off x="6359492" y="1535423"/>
             <a:ext cx="4796972" cy="4320000"/>
           </a:xfrm>
           <a:prstGeom prst="rect">
@@ -3695,8 +3695,8 @@
         </p:nvSpPr>
         <p:spPr>
           <a:xfrm>
-            <a:off x="6656972" y="4739040"/>
-            <a:ext cx="4320000" cy="400110"/>
+            <a:off x="6597978" y="5682936"/>
+            <a:ext cx="4320000" cy="461665"/>
           </a:xfrm>
           <a:prstGeom prst="rect">
             <a:avLst/>
@@ -3711,25 +3711,117 @@
           <a:p>
             <a:pPr algn="ctr"/>
             <a:r>
+              <a:rPr kumimoji="1" lang="en-US" altLang="zh-CN" sz="2400" dirty="0">
+                <a:latin typeface="Arial" panose="020B0604020202020204" pitchFamily="34" charset="0"/>
+                <a:cs typeface="Arial" panose="020B0604020202020204" pitchFamily="34" charset="0"/>
+              </a:rPr>
+              <a:t>Relative</a:t>
+            </a:r>
+            <a:r>
+              <a:rPr kumimoji="1" lang="zh-CN" altLang="en-US" sz="2400" dirty="0">
+                <a:latin typeface="Arial" panose="020B0604020202020204" pitchFamily="34" charset="0"/>
+                <a:cs typeface="Arial" panose="020B0604020202020204" pitchFamily="34" charset="0"/>
+              </a:rPr>
+              <a:t> </a:t>
+            </a:r>
+            <a:r>
+              <a:rPr kumimoji="1" lang="en-US" altLang="zh-CN" sz="2400" dirty="0">
+                <a:latin typeface="Arial" panose="020B0604020202020204" pitchFamily="34" charset="0"/>
+                <a:cs typeface="Arial" panose="020B0604020202020204" pitchFamily="34" charset="0"/>
+              </a:rPr>
+              <a:t>size</a:t>
+            </a:r>
+            <a:endParaRPr kumimoji="1" lang="zh-CN" altLang="en-US" sz="2400" dirty="0">
+              <a:latin typeface="Arial" panose="020B0604020202020204" pitchFamily="34" charset="0"/>
+              <a:cs typeface="Arial" panose="020B0604020202020204" pitchFamily="34" charset="0"/>
+            </a:endParaRPr>
+          </a:p>
+        </p:txBody>
+      </p:sp>
+      <p:sp>
+        <p:nvSpPr>
+          <p:cNvPr id="26" name="文本框 25">
+            <a:extLst>
+              <a:ext uri="{FF2B5EF4-FFF2-40B4-BE49-F238E27FC236}">
+                <a16:creationId xmlns:a16="http://schemas.microsoft.com/office/drawing/2014/main" id="{C33D3CA7-B6AA-3A72-257C-3689ACD2B502}"/>
+              </a:ext>
+            </a:extLst>
+          </p:cNvPr>
+          <p:cNvSpPr txBox="1"/>
+          <p:nvPr/>
+        </p:nvSpPr>
+        <p:spPr>
+          <a:xfrm>
+            <a:off x="6599278" y="1204852"/>
+            <a:ext cx="4320000" cy="461665"/>
+          </a:xfrm>
+          <a:prstGeom prst="rect">
+            <a:avLst/>
+          </a:prstGeom>
+          <a:noFill/>
+        </p:spPr>
+        <p:txBody>
+          <a:bodyPr wrap="square" rtlCol="0">
+            <a:spAutoFit/>
+          </a:bodyPr>
+          <a:lstStyle/>
+          <a:p>
+            <a:pPr algn="ctr"/>
+            <a:r>
+              <a:rPr kumimoji="1" lang="en-US" altLang="zh-CN" sz="2400" dirty="0">
+                <a:latin typeface="Arial" panose="020B0604020202020204" pitchFamily="34" charset="0"/>
+                <a:cs typeface="Arial" panose="020B0604020202020204" pitchFamily="34" charset="0"/>
+              </a:rPr>
+              <a:t>TN3K</a:t>
+            </a:r>
+            <a:r>
+              <a:rPr kumimoji="1" lang="zh-CN" altLang="en-US" sz="2400" dirty="0">
+                <a:latin typeface="Arial" panose="020B0604020202020204" pitchFamily="34" charset="0"/>
+                <a:cs typeface="Arial" panose="020B0604020202020204" pitchFamily="34" charset="0"/>
+              </a:rPr>
+              <a:t> </a:t>
+            </a:r>
+            <a:r>
+              <a:rPr kumimoji="1" lang="en-US" altLang="zh-CN" sz="2400" dirty="0">
+                <a:latin typeface="Arial" panose="020B0604020202020204" pitchFamily="34" charset="0"/>
+                <a:cs typeface="Arial" panose="020B0604020202020204" pitchFamily="34" charset="0"/>
+              </a:rPr>
+              <a:t>–</a:t>
+            </a:r>
+            <a:r>
+              <a:rPr kumimoji="1" lang="zh-CN" altLang="en-US" sz="2400" dirty="0">
+                <a:latin typeface="Arial" panose="020B0604020202020204" pitchFamily="34" charset="0"/>
+                <a:cs typeface="Arial" panose="020B0604020202020204" pitchFamily="34" charset="0"/>
+              </a:rPr>
+              <a:t> </a:t>
+            </a:r>
+            <a:r>
+              <a:rPr kumimoji="1" lang="en-US" altLang="zh-CN" sz="2400" dirty="0">
+                <a:latin typeface="Arial" panose="020B0604020202020204" pitchFamily="34" charset="0"/>
+                <a:cs typeface="Arial" panose="020B0604020202020204" pitchFamily="34" charset="0"/>
+              </a:rPr>
+              <a:t>Size</a:t>
+            </a:r>
+            <a:r>
+              <a:rPr kumimoji="1" lang="zh-CN" altLang="en-US" sz="2400" dirty="0">
+                <a:latin typeface="Arial" panose="020B0604020202020204" pitchFamily="34" charset="0"/>
+                <a:cs typeface="Arial" panose="020B0604020202020204" pitchFamily="34" charset="0"/>
+              </a:rPr>
+              <a:t> </a:t>
+            </a:r>
+            <a:r>
+              <a:rPr kumimoji="1" lang="en-US" altLang="zh-CN" sz="2400" dirty="0">
+                <a:latin typeface="Arial" panose="020B0604020202020204" pitchFamily="34" charset="0"/>
+                <a:cs typeface="Arial" panose="020B0604020202020204" pitchFamily="34" charset="0"/>
+              </a:rPr>
+              <a:t>(N=5347</a:t>
+            </a:r>
+            <a:r>
               <a:rPr kumimoji="1" lang="en-US" altLang="zh-CN" sz="2000" dirty="0">
                 <a:latin typeface="Arial" panose="020B0604020202020204" pitchFamily="34" charset="0"/>
                 <a:cs typeface="Arial" panose="020B0604020202020204" pitchFamily="34" charset="0"/>
               </a:rPr>
-              <a:t>Relative</a:t>
-            </a:r>
-            <a:r>
-              <a:rPr kumimoji="1" lang="zh-CN" altLang="en-US" sz="2000" dirty="0">
-                <a:latin typeface="Arial" panose="020B0604020202020204" pitchFamily="34" charset="0"/>
-                <a:cs typeface="Arial" panose="020B0604020202020204" pitchFamily="34" charset="0"/>
-              </a:rPr>
-              <a:t> </a:t>
-            </a:r>
-            <a:r>
-              <a:rPr kumimoji="1" lang="en-US" altLang="zh-CN" sz="2000" dirty="0">
-                <a:latin typeface="Arial" panose="020B0604020202020204" pitchFamily="34" charset="0"/>
-                <a:cs typeface="Arial" panose="020B0604020202020204" pitchFamily="34" charset="0"/>
-              </a:rPr>
-              <a:t>size</a:t>
+              <a:t>)</a:t>
             </a:r>
             <a:endParaRPr kumimoji="1" lang="zh-CN" altLang="en-US" sz="2000" dirty="0">
               <a:latin typeface="Arial" panose="020B0604020202020204" pitchFamily="34" charset="0"/>
@@ -3740,10 +3832,10 @@
       </p:sp>
       <p:sp>
         <p:nvSpPr>
-          <p:cNvPr id="26" name="文本框 25">
+          <p:cNvPr id="27" name="文本框 26">
             <a:extLst>
               <a:ext uri="{FF2B5EF4-FFF2-40B4-BE49-F238E27FC236}">
-                <a16:creationId xmlns:a16="http://schemas.microsoft.com/office/drawing/2014/main" id="{C33D3CA7-B6AA-3A72-257C-3689ACD2B502}"/>
+                <a16:creationId xmlns:a16="http://schemas.microsoft.com/office/drawing/2014/main" id="{06EAB93B-ACD9-9ACA-28E7-D5297E079B57}"/>
               </a:ext>
             </a:extLst>
           </p:cNvPr>
@@ -3751,9 +3843,9 @@
           <p:nvPr/>
         </p:nvSpPr>
         <p:spPr>
-          <a:xfrm>
-            <a:off x="6658272" y="293040"/>
-            <a:ext cx="4320000" cy="400110"/>
+          <a:xfrm rot="16200000">
+            <a:off x="4093565" y="3265359"/>
+            <a:ext cx="4320000" cy="461665"/>
           </a:xfrm>
           <a:prstGeom prst="rect">
             <a:avLst/>
@@ -3768,98 +3860,13 @@
           <a:p>
             <a:pPr algn="ctr"/>
             <a:r>
-              <a:rPr kumimoji="1" lang="en-US" altLang="zh-CN" sz="2000" dirty="0">
-                <a:latin typeface="Arial" panose="020B0604020202020204" pitchFamily="34" charset="0"/>
-                <a:cs typeface="Arial" panose="020B0604020202020204" pitchFamily="34" charset="0"/>
-              </a:rPr>
-              <a:t>TN3K</a:t>
-            </a:r>
-            <a:r>
-              <a:rPr kumimoji="1" lang="zh-CN" altLang="en-US" sz="2000" dirty="0">
-                <a:latin typeface="Arial" panose="020B0604020202020204" pitchFamily="34" charset="0"/>
-                <a:cs typeface="Arial" panose="020B0604020202020204" pitchFamily="34" charset="0"/>
-              </a:rPr>
-              <a:t> </a:t>
-            </a:r>
-            <a:r>
-              <a:rPr kumimoji="1" lang="en-US" altLang="zh-CN" sz="2000" dirty="0">
-                <a:latin typeface="Arial" panose="020B0604020202020204" pitchFamily="34" charset="0"/>
-                <a:cs typeface="Arial" panose="020B0604020202020204" pitchFamily="34" charset="0"/>
-              </a:rPr>
-              <a:t>–</a:t>
-            </a:r>
-            <a:r>
-              <a:rPr kumimoji="1" lang="zh-CN" altLang="en-US" sz="2000" dirty="0">
-                <a:latin typeface="Arial" panose="020B0604020202020204" pitchFamily="34" charset="0"/>
-                <a:cs typeface="Arial" panose="020B0604020202020204" pitchFamily="34" charset="0"/>
-              </a:rPr>
-              <a:t> </a:t>
-            </a:r>
-            <a:r>
-              <a:rPr kumimoji="1" lang="en-US" altLang="zh-CN" sz="2000" dirty="0">
-                <a:latin typeface="Arial" panose="020B0604020202020204" pitchFamily="34" charset="0"/>
-                <a:cs typeface="Arial" panose="020B0604020202020204" pitchFamily="34" charset="0"/>
-              </a:rPr>
-              <a:t>Size</a:t>
-            </a:r>
-            <a:r>
-              <a:rPr kumimoji="1" lang="zh-CN" altLang="en-US" sz="2000" dirty="0">
-                <a:latin typeface="Arial" panose="020B0604020202020204" pitchFamily="34" charset="0"/>
-                <a:cs typeface="Arial" panose="020B0604020202020204" pitchFamily="34" charset="0"/>
-              </a:rPr>
-              <a:t> </a:t>
-            </a:r>
-            <a:r>
-              <a:rPr kumimoji="1" lang="en-US" altLang="zh-CN" sz="2000" dirty="0">
-                <a:latin typeface="Arial" panose="020B0604020202020204" pitchFamily="34" charset="0"/>
-                <a:cs typeface="Arial" panose="020B0604020202020204" pitchFamily="34" charset="0"/>
-              </a:rPr>
-              <a:t>(N=4633)</a:t>
-            </a:r>
-            <a:endParaRPr kumimoji="1" lang="zh-CN" altLang="en-US" sz="2000" dirty="0">
-              <a:latin typeface="Arial" panose="020B0604020202020204" pitchFamily="34" charset="0"/>
-              <a:cs typeface="Arial" panose="020B0604020202020204" pitchFamily="34" charset="0"/>
-            </a:endParaRPr>
-          </a:p>
-        </p:txBody>
-      </p:sp>
-      <p:sp>
-        <p:nvSpPr>
-          <p:cNvPr id="27" name="文本框 26">
-            <a:extLst>
-              <a:ext uri="{FF2B5EF4-FFF2-40B4-BE49-F238E27FC236}">
-                <a16:creationId xmlns:a16="http://schemas.microsoft.com/office/drawing/2014/main" id="{06EAB93B-ACD9-9ACA-28E7-D5297E079B57}"/>
-              </a:ext>
-            </a:extLst>
-          </p:cNvPr>
-          <p:cNvSpPr txBox="1"/>
-          <p:nvPr/>
-        </p:nvSpPr>
-        <p:spPr>
-          <a:xfrm rot="16200000">
-            <a:off x="4152559" y="2352240"/>
-            <a:ext cx="4320000" cy="400110"/>
-          </a:xfrm>
-          <a:prstGeom prst="rect">
-            <a:avLst/>
-          </a:prstGeom>
-          <a:noFill/>
-        </p:spPr>
-        <p:txBody>
-          <a:bodyPr wrap="square" rtlCol="0">
-            <a:spAutoFit/>
-          </a:bodyPr>
-          <a:lstStyle/>
-          <a:p>
-            <a:pPr algn="ctr"/>
-            <a:r>
-              <a:rPr kumimoji="1" lang="en-US" altLang="zh-CN" sz="2000" dirty="0">
+              <a:rPr kumimoji="1" lang="en-US" altLang="zh-CN" sz="2400" dirty="0">
                 <a:latin typeface="Arial" panose="020B0604020202020204" pitchFamily="34" charset="0"/>
                 <a:cs typeface="Arial" panose="020B0604020202020204" pitchFamily="34" charset="0"/>
               </a:rPr>
               <a:t>Density</a:t>
             </a:r>
-            <a:endParaRPr kumimoji="1" lang="zh-CN" altLang="en-US" sz="2000" dirty="0">
+            <a:endParaRPr kumimoji="1" lang="zh-CN" altLang="en-US" sz="2400" dirty="0">
               <a:latin typeface="Arial" panose="020B0604020202020204" pitchFamily="34" charset="0"/>
               <a:cs typeface="Arial" panose="020B0604020202020204" pitchFamily="34" charset="0"/>
             </a:endParaRPr>
@@ -3894,7 +3901,7 @@
         </p:blipFill>
         <p:spPr>
           <a:xfrm>
-            <a:off x="16247685" y="591840"/>
+            <a:off x="16188691" y="1535736"/>
             <a:ext cx="4796972" cy="4320000"/>
           </a:xfrm>
           <a:prstGeom prst="rect">
@@ -3930,7 +3937,7 @@
         </p:blipFill>
         <p:spPr>
           <a:xfrm>
-            <a:off x="11689200" y="591840"/>
+            <a:off x="11630206" y="1535736"/>
             <a:ext cx="4320000" cy="4320000"/>
           </a:xfrm>
           <a:prstGeom prst="rect">
@@ -3952,8 +3959,8 @@
         </p:nvSpPr>
         <p:spPr>
           <a:xfrm>
-            <a:off x="11927686" y="4739040"/>
-            <a:ext cx="4320000" cy="400110"/>
+            <a:off x="11868692" y="5682936"/>
+            <a:ext cx="4320000" cy="461665"/>
           </a:xfrm>
           <a:prstGeom prst="rect">
             <a:avLst/>
@@ -3968,25 +3975,274 @@
           <a:p>
             <a:pPr algn="ctr"/>
             <a:r>
+              <a:rPr kumimoji="1" lang="en-US" altLang="zh-CN" sz="2400" dirty="0">
+                <a:latin typeface="Arial" panose="020B0604020202020204" pitchFamily="34" charset="0"/>
+                <a:cs typeface="Arial" panose="020B0604020202020204" pitchFamily="34" charset="0"/>
+              </a:rPr>
+              <a:t>Pos</a:t>
+            </a:r>
+            <a:r>
+              <a:rPr kumimoji="1" lang="zh-CN" altLang="en-US" sz="2400" dirty="0">
+                <a:latin typeface="Arial" panose="020B0604020202020204" pitchFamily="34" charset="0"/>
+                <a:cs typeface="Arial" panose="020B0604020202020204" pitchFamily="34" charset="0"/>
+              </a:rPr>
+              <a:t> </a:t>
+            </a:r>
+            <a:r>
+              <a:rPr kumimoji="1" lang="en-US" altLang="zh-CN" sz="2400" dirty="0">
+                <a:latin typeface="Arial" panose="020B0604020202020204" pitchFamily="34" charset="0"/>
+                <a:cs typeface="Arial" panose="020B0604020202020204" pitchFamily="34" charset="0"/>
+              </a:rPr>
+              <a:t>x</a:t>
+            </a:r>
+            <a:endParaRPr kumimoji="1" lang="zh-CN" altLang="en-US" sz="2400" dirty="0">
+              <a:latin typeface="Arial" panose="020B0604020202020204" pitchFamily="34" charset="0"/>
+              <a:cs typeface="Arial" panose="020B0604020202020204" pitchFamily="34" charset="0"/>
+            </a:endParaRPr>
+          </a:p>
+        </p:txBody>
+      </p:sp>
+      <p:sp>
+        <p:nvSpPr>
+          <p:cNvPr id="33" name="文本框 32">
+            <a:extLst>
+              <a:ext uri="{FF2B5EF4-FFF2-40B4-BE49-F238E27FC236}">
+                <a16:creationId xmlns:a16="http://schemas.microsoft.com/office/drawing/2014/main" id="{ED17A11F-6493-F2B3-F4B9-084DF90C1CDB}"/>
+              </a:ext>
+            </a:extLst>
+          </p:cNvPr>
+          <p:cNvSpPr txBox="1"/>
+          <p:nvPr/>
+        </p:nvSpPr>
+        <p:spPr>
+          <a:xfrm>
+            <a:off x="16733160" y="5682936"/>
+            <a:ext cx="4320000" cy="461665"/>
+          </a:xfrm>
+          <a:prstGeom prst="rect">
+            <a:avLst/>
+          </a:prstGeom>
+          <a:noFill/>
+        </p:spPr>
+        <p:txBody>
+          <a:bodyPr wrap="square" rtlCol="0">
+            <a:spAutoFit/>
+          </a:bodyPr>
+          <a:lstStyle/>
+          <a:p>
+            <a:pPr algn="ctr"/>
+            <a:r>
+              <a:rPr kumimoji="1" lang="en-US" altLang="zh-CN" sz="2400" dirty="0">
+                <a:latin typeface="Arial" panose="020B0604020202020204" pitchFamily="34" charset="0"/>
+                <a:cs typeface="Arial" panose="020B0604020202020204" pitchFamily="34" charset="0"/>
+              </a:rPr>
+              <a:t>Relative</a:t>
+            </a:r>
+            <a:r>
+              <a:rPr kumimoji="1" lang="zh-CN" altLang="en-US" sz="2400" dirty="0">
+                <a:latin typeface="Arial" panose="020B0604020202020204" pitchFamily="34" charset="0"/>
+                <a:cs typeface="Arial" panose="020B0604020202020204" pitchFamily="34" charset="0"/>
+              </a:rPr>
+              <a:t> </a:t>
+            </a:r>
+            <a:r>
+              <a:rPr kumimoji="1" lang="en-US" altLang="zh-CN" sz="2400" dirty="0">
+                <a:latin typeface="Arial" panose="020B0604020202020204" pitchFamily="34" charset="0"/>
+                <a:cs typeface="Arial" panose="020B0604020202020204" pitchFamily="34" charset="0"/>
+              </a:rPr>
+              <a:t>size</a:t>
+            </a:r>
+            <a:endParaRPr kumimoji="1" lang="zh-CN" altLang="en-US" sz="2400" dirty="0">
+              <a:latin typeface="Arial" panose="020B0604020202020204" pitchFamily="34" charset="0"/>
+              <a:cs typeface="Arial" panose="020B0604020202020204" pitchFamily="34" charset="0"/>
+            </a:endParaRPr>
+          </a:p>
+        </p:txBody>
+      </p:sp>
+      <p:sp>
+        <p:nvSpPr>
+          <p:cNvPr id="34" name="文本框 33">
+            <a:extLst>
+              <a:ext uri="{FF2B5EF4-FFF2-40B4-BE49-F238E27FC236}">
+                <a16:creationId xmlns:a16="http://schemas.microsoft.com/office/drawing/2014/main" id="{FE1E10C3-D6AC-2329-849D-D47D2194AC46}"/>
+              </a:ext>
+            </a:extLst>
+          </p:cNvPr>
+          <p:cNvSpPr txBox="1"/>
+          <p:nvPr/>
+        </p:nvSpPr>
+        <p:spPr>
+          <a:xfrm rot="16200000">
+            <a:off x="9346351" y="3265359"/>
+            <a:ext cx="4320000" cy="461665"/>
+          </a:xfrm>
+          <a:prstGeom prst="rect">
+            <a:avLst/>
+          </a:prstGeom>
+          <a:noFill/>
+        </p:spPr>
+        <p:txBody>
+          <a:bodyPr wrap="square" rtlCol="0">
+            <a:spAutoFit/>
+          </a:bodyPr>
+          <a:lstStyle/>
+          <a:p>
+            <a:pPr algn="ctr"/>
+            <a:r>
+              <a:rPr kumimoji="1" lang="en-US" altLang="zh-CN" sz="2400" dirty="0">
+                <a:latin typeface="Arial" panose="020B0604020202020204" pitchFamily="34" charset="0"/>
+                <a:cs typeface="Arial" panose="020B0604020202020204" pitchFamily="34" charset="0"/>
+              </a:rPr>
+              <a:t>Pos</a:t>
+            </a:r>
+            <a:r>
+              <a:rPr kumimoji="1" lang="zh-CN" altLang="en-US" sz="2400" dirty="0">
+                <a:latin typeface="Arial" panose="020B0604020202020204" pitchFamily="34" charset="0"/>
+                <a:cs typeface="Arial" panose="020B0604020202020204" pitchFamily="34" charset="0"/>
+              </a:rPr>
+              <a:t> </a:t>
+            </a:r>
+            <a:r>
+              <a:rPr kumimoji="1" lang="en-US" altLang="zh-CN" sz="2400" dirty="0">
+                <a:latin typeface="Arial" panose="020B0604020202020204" pitchFamily="34" charset="0"/>
+                <a:cs typeface="Arial" panose="020B0604020202020204" pitchFamily="34" charset="0"/>
+              </a:rPr>
+              <a:t>y</a:t>
+            </a:r>
+            <a:endParaRPr kumimoji="1" lang="zh-CN" altLang="en-US" sz="2400" dirty="0">
+              <a:latin typeface="Arial" panose="020B0604020202020204" pitchFamily="34" charset="0"/>
+              <a:cs typeface="Arial" panose="020B0604020202020204" pitchFamily="34" charset="0"/>
+            </a:endParaRPr>
+          </a:p>
+        </p:txBody>
+      </p:sp>
+      <p:sp>
+        <p:nvSpPr>
+          <p:cNvPr id="35" name="文本框 34">
+            <a:extLst>
+              <a:ext uri="{FF2B5EF4-FFF2-40B4-BE49-F238E27FC236}">
+                <a16:creationId xmlns:a16="http://schemas.microsoft.com/office/drawing/2014/main" id="{404BE88D-4B96-1695-BCBE-2DDF7F322518}"/>
+              </a:ext>
+            </a:extLst>
+          </p:cNvPr>
+          <p:cNvSpPr txBox="1"/>
+          <p:nvPr/>
+        </p:nvSpPr>
+        <p:spPr>
+          <a:xfrm rot="16200000">
+            <a:off x="13973177" y="3265359"/>
+            <a:ext cx="4320000" cy="461665"/>
+          </a:xfrm>
+          <a:prstGeom prst="rect">
+            <a:avLst/>
+          </a:prstGeom>
+          <a:noFill/>
+        </p:spPr>
+        <p:txBody>
+          <a:bodyPr wrap="square" rtlCol="0">
+            <a:spAutoFit/>
+          </a:bodyPr>
+          <a:lstStyle/>
+          <a:p>
+            <a:pPr algn="ctr"/>
+            <a:r>
+              <a:rPr kumimoji="1" lang="en-US" altLang="zh-CN" sz="2400" dirty="0">
+                <a:latin typeface="Arial" panose="020B0604020202020204" pitchFamily="34" charset="0"/>
+                <a:cs typeface="Arial" panose="020B0604020202020204" pitchFamily="34" charset="0"/>
+              </a:rPr>
+              <a:t>Density</a:t>
+            </a:r>
+            <a:endParaRPr kumimoji="1" lang="zh-CN" altLang="en-US" sz="2400" dirty="0">
+              <a:latin typeface="Arial" panose="020B0604020202020204" pitchFamily="34" charset="0"/>
+              <a:cs typeface="Arial" panose="020B0604020202020204" pitchFamily="34" charset="0"/>
+            </a:endParaRPr>
+          </a:p>
+        </p:txBody>
+      </p:sp>
+      <p:sp>
+        <p:nvSpPr>
+          <p:cNvPr id="36" name="文本框 35">
+            <a:extLst>
+              <a:ext uri="{FF2B5EF4-FFF2-40B4-BE49-F238E27FC236}">
+                <a16:creationId xmlns:a16="http://schemas.microsoft.com/office/drawing/2014/main" id="{2206714E-2A1A-1CE1-CD85-F81DA70ECEDF}"/>
+              </a:ext>
+            </a:extLst>
+          </p:cNvPr>
+          <p:cNvSpPr txBox="1"/>
+          <p:nvPr/>
+        </p:nvSpPr>
+        <p:spPr>
+          <a:xfrm>
+            <a:off x="11868691" y="1204852"/>
+            <a:ext cx="4320000" cy="461665"/>
+          </a:xfrm>
+          <a:prstGeom prst="rect">
+            <a:avLst/>
+          </a:prstGeom>
+          <a:noFill/>
+        </p:spPr>
+        <p:txBody>
+          <a:bodyPr wrap="square" rtlCol="0">
+            <a:spAutoFit/>
+          </a:bodyPr>
+          <a:lstStyle/>
+          <a:p>
+            <a:pPr algn="ctr"/>
+            <a:r>
+              <a:rPr kumimoji="1" lang="en-US" altLang="zh-CN" sz="2400" dirty="0">
+                <a:latin typeface="Arial" panose="020B0604020202020204" pitchFamily="34" charset="0"/>
+                <a:cs typeface="Arial" panose="020B0604020202020204" pitchFamily="34" charset="0"/>
+              </a:rPr>
+              <a:t>TN5K</a:t>
+            </a:r>
+            <a:r>
+              <a:rPr kumimoji="1" lang="zh-CN" altLang="en-US" sz="2400" dirty="0">
+                <a:latin typeface="Arial" panose="020B0604020202020204" pitchFamily="34" charset="0"/>
+                <a:cs typeface="Arial" panose="020B0604020202020204" pitchFamily="34" charset="0"/>
+              </a:rPr>
+              <a:t> </a:t>
+            </a:r>
+            <a:r>
+              <a:rPr kumimoji="1" lang="en-US" altLang="zh-CN" sz="2400" dirty="0">
+                <a:latin typeface="Arial" panose="020B0604020202020204" pitchFamily="34" charset="0"/>
+                <a:cs typeface="Arial" panose="020B0604020202020204" pitchFamily="34" charset="0"/>
+              </a:rPr>
+              <a:t>–</a:t>
+            </a:r>
+            <a:r>
+              <a:rPr kumimoji="1" lang="zh-CN" altLang="en-US" sz="2400" dirty="0">
+                <a:latin typeface="Arial" panose="020B0604020202020204" pitchFamily="34" charset="0"/>
+                <a:cs typeface="Arial" panose="020B0604020202020204" pitchFamily="34" charset="0"/>
+              </a:rPr>
+              <a:t> </a:t>
+            </a:r>
+            <a:r>
+              <a:rPr kumimoji="1" lang="en-US" altLang="zh-CN" sz="2400" dirty="0">
+                <a:latin typeface="Arial" panose="020B0604020202020204" pitchFamily="34" charset="0"/>
+                <a:cs typeface="Arial" panose="020B0604020202020204" pitchFamily="34" charset="0"/>
+              </a:rPr>
+              <a:t>Position</a:t>
+            </a:r>
+            <a:r>
+              <a:rPr kumimoji="1" lang="zh-CN" altLang="en-US" sz="2400" dirty="0">
+                <a:latin typeface="Arial" panose="020B0604020202020204" pitchFamily="34" charset="0"/>
+                <a:cs typeface="Arial" panose="020B0604020202020204" pitchFamily="34" charset="0"/>
+              </a:rPr>
+              <a:t> </a:t>
+            </a:r>
+            <a:r>
+              <a:rPr kumimoji="1" lang="en-US" altLang="zh-CN" sz="2400" dirty="0">
+                <a:latin typeface="Arial" panose="020B0604020202020204" pitchFamily="34" charset="0"/>
+                <a:cs typeface="Arial" panose="020B0604020202020204" pitchFamily="34" charset="0"/>
+              </a:rPr>
+              <a:t>(N=5000</a:t>
+            </a:r>
+            <a:r>
               <a:rPr kumimoji="1" lang="en-US" altLang="zh-CN" sz="2000" dirty="0">
                 <a:latin typeface="Arial" panose="020B0604020202020204" pitchFamily="34" charset="0"/>
                 <a:cs typeface="Arial" panose="020B0604020202020204" pitchFamily="34" charset="0"/>
               </a:rPr>
-              <a:t>Pos</a:t>
-            </a:r>
-            <a:r>
-              <a:rPr kumimoji="1" lang="zh-CN" altLang="en-US" sz="2000" dirty="0">
-                <a:latin typeface="Arial" panose="020B0604020202020204" pitchFamily="34" charset="0"/>
-                <a:cs typeface="Arial" panose="020B0604020202020204" pitchFamily="34" charset="0"/>
-              </a:rPr>
-              <a:t> </a:t>
-            </a:r>
-            <a:r>
-              <a:rPr kumimoji="1" lang="en-US" altLang="zh-CN" sz="2000" dirty="0">
-                <a:latin typeface="Arial" panose="020B0604020202020204" pitchFamily="34" charset="0"/>
-                <a:cs typeface="Arial" panose="020B0604020202020204" pitchFamily="34" charset="0"/>
-              </a:rPr>
-              <a:t>x</a:t>
+              <a:t>)</a:t>
             </a:r>
             <a:endParaRPr kumimoji="1" lang="zh-CN" altLang="en-US" sz="2000" dirty="0">
               <a:latin typeface="Arial" panose="020B0604020202020204" pitchFamily="34" charset="0"/>
@@ -3997,10 +4253,10 @@
       </p:sp>
       <p:sp>
         <p:nvSpPr>
-          <p:cNvPr id="33" name="文本框 32">
+          <p:cNvPr id="37" name="文本框 36">
             <a:extLst>
               <a:ext uri="{FF2B5EF4-FFF2-40B4-BE49-F238E27FC236}">
-                <a16:creationId xmlns:a16="http://schemas.microsoft.com/office/drawing/2014/main" id="{ED17A11F-6493-F2B3-F4B9-084DF90C1CDB}"/>
+                <a16:creationId xmlns:a16="http://schemas.microsoft.com/office/drawing/2014/main" id="{37AAC4B5-1E32-9F17-B1FD-C59FE675116B}"/>
               </a:ext>
             </a:extLst>
           </p:cNvPr>
@@ -4009,8 +4265,8 @@
         </p:nvSpPr>
         <p:spPr>
           <a:xfrm>
-            <a:off x="16792154" y="4739040"/>
-            <a:ext cx="4320000" cy="400110"/>
+            <a:off x="16733158" y="1204852"/>
+            <a:ext cx="4320000" cy="461665"/>
           </a:xfrm>
           <a:prstGeom prst="rect">
             <a:avLst/>
@@ -4025,25 +4281,1198 @@
           <a:p>
             <a:pPr algn="ctr"/>
             <a:r>
+              <a:rPr kumimoji="1" lang="en-US" altLang="zh-CN" sz="2400" dirty="0">
+                <a:latin typeface="Arial" panose="020B0604020202020204" pitchFamily="34" charset="0"/>
+                <a:cs typeface="Arial" panose="020B0604020202020204" pitchFamily="34" charset="0"/>
+              </a:rPr>
+              <a:t>TN5K</a:t>
+            </a:r>
+            <a:r>
+              <a:rPr kumimoji="1" lang="zh-CN" altLang="en-US" sz="2400" dirty="0">
+                <a:latin typeface="Arial" panose="020B0604020202020204" pitchFamily="34" charset="0"/>
+                <a:cs typeface="Arial" panose="020B0604020202020204" pitchFamily="34" charset="0"/>
+              </a:rPr>
+              <a:t> </a:t>
+            </a:r>
+            <a:r>
+              <a:rPr kumimoji="1" lang="en-US" altLang="zh-CN" sz="2400" dirty="0">
+                <a:latin typeface="Arial" panose="020B0604020202020204" pitchFamily="34" charset="0"/>
+                <a:cs typeface="Arial" panose="020B0604020202020204" pitchFamily="34" charset="0"/>
+              </a:rPr>
+              <a:t>–</a:t>
+            </a:r>
+            <a:r>
+              <a:rPr kumimoji="1" lang="zh-CN" altLang="en-US" sz="2400" dirty="0">
+                <a:latin typeface="Arial" panose="020B0604020202020204" pitchFamily="34" charset="0"/>
+                <a:cs typeface="Arial" panose="020B0604020202020204" pitchFamily="34" charset="0"/>
+              </a:rPr>
+              <a:t> </a:t>
+            </a:r>
+            <a:r>
+              <a:rPr kumimoji="1" lang="en-US" altLang="zh-CN" sz="2400" dirty="0">
+                <a:latin typeface="Arial" panose="020B0604020202020204" pitchFamily="34" charset="0"/>
+                <a:cs typeface="Arial" panose="020B0604020202020204" pitchFamily="34" charset="0"/>
+              </a:rPr>
+              <a:t>Size</a:t>
+            </a:r>
+            <a:r>
+              <a:rPr kumimoji="1" lang="zh-CN" altLang="en-US" sz="2400" dirty="0">
+                <a:latin typeface="Arial" panose="020B0604020202020204" pitchFamily="34" charset="0"/>
+                <a:cs typeface="Arial" panose="020B0604020202020204" pitchFamily="34" charset="0"/>
+              </a:rPr>
+              <a:t> </a:t>
+            </a:r>
+            <a:r>
+              <a:rPr kumimoji="1" lang="en-US" altLang="zh-CN" sz="2400" dirty="0">
+                <a:latin typeface="Arial" panose="020B0604020202020204" pitchFamily="34" charset="0"/>
+                <a:cs typeface="Arial" panose="020B0604020202020204" pitchFamily="34" charset="0"/>
+              </a:rPr>
+              <a:t>(N=5000)</a:t>
+            </a:r>
+            <a:endParaRPr kumimoji="1" lang="zh-CN" altLang="en-US" sz="2400" dirty="0">
+              <a:latin typeface="Arial" panose="020B0604020202020204" pitchFamily="34" charset="0"/>
+              <a:cs typeface="Arial" panose="020B0604020202020204" pitchFamily="34" charset="0"/>
+            </a:endParaRPr>
+          </a:p>
+        </p:txBody>
+      </p:sp>
+      <p:sp>
+        <p:nvSpPr>
+          <p:cNvPr id="38" name="文本框 37">
+            <a:extLst>
+              <a:ext uri="{FF2B5EF4-FFF2-40B4-BE49-F238E27FC236}">
+                <a16:creationId xmlns:a16="http://schemas.microsoft.com/office/drawing/2014/main" id="{7A8FE8D2-D0E1-6817-C44B-C8DDEA1F7B93}"/>
+              </a:ext>
+            </a:extLst>
+          </p:cNvPr>
+          <p:cNvSpPr txBox="1"/>
+          <p:nvPr/>
+        </p:nvSpPr>
+        <p:spPr>
+          <a:xfrm>
+            <a:off x="1733509" y="6121826"/>
+            <a:ext cx="4450978" cy="461665"/>
+          </a:xfrm>
+          <a:prstGeom prst="rect">
+            <a:avLst/>
+          </a:prstGeom>
+          <a:noFill/>
+        </p:spPr>
+        <p:txBody>
+          <a:bodyPr wrap="square" rtlCol="0">
+            <a:spAutoFit/>
+          </a:bodyPr>
+          <a:lstStyle/>
+          <a:p>
+            <a:pPr algn="ctr"/>
+            <a:r>
+              <a:rPr kumimoji="1" lang="en-US" altLang="zh-CN" sz="2400" dirty="0" err="1">
+                <a:latin typeface="Arial" panose="020B0604020202020204" pitchFamily="34" charset="0"/>
+                <a:cs typeface="Arial" panose="020B0604020202020204" pitchFamily="34" charset="0"/>
+              </a:rPr>
+              <a:t>ThyroidXL</a:t>
+            </a:r>
+            <a:r>
+              <a:rPr kumimoji="1" lang="en-US" altLang="zh-CN" sz="2400" dirty="0">
+                <a:latin typeface="Arial" panose="020B0604020202020204" pitchFamily="34" charset="0"/>
+                <a:cs typeface="Arial" panose="020B0604020202020204" pitchFamily="34" charset="0"/>
+              </a:rPr>
+              <a:t>–</a:t>
+            </a:r>
+            <a:r>
+              <a:rPr kumimoji="1" lang="zh-CN" altLang="en-US" sz="2400" dirty="0">
+                <a:latin typeface="Arial" panose="020B0604020202020204" pitchFamily="34" charset="0"/>
+                <a:cs typeface="Arial" panose="020B0604020202020204" pitchFamily="34" charset="0"/>
+              </a:rPr>
+              <a:t> </a:t>
+            </a:r>
+            <a:r>
+              <a:rPr kumimoji="1" lang="en-US" altLang="zh-CN" sz="2400" dirty="0">
+                <a:latin typeface="Arial" panose="020B0604020202020204" pitchFamily="34" charset="0"/>
+                <a:cs typeface="Arial" panose="020B0604020202020204" pitchFamily="34" charset="0"/>
+              </a:rPr>
+              <a:t>Position</a:t>
+            </a:r>
+            <a:r>
+              <a:rPr kumimoji="1" lang="zh-CN" altLang="en-US" sz="2400" dirty="0">
+                <a:latin typeface="Arial" panose="020B0604020202020204" pitchFamily="34" charset="0"/>
+                <a:cs typeface="Arial" panose="020B0604020202020204" pitchFamily="34" charset="0"/>
+              </a:rPr>
+              <a:t> </a:t>
+            </a:r>
+            <a:r>
+              <a:rPr kumimoji="1" lang="en-US" altLang="zh-CN" sz="2400" dirty="0">
+                <a:latin typeface="Arial" panose="020B0604020202020204" pitchFamily="34" charset="0"/>
+                <a:cs typeface="Arial" panose="020B0604020202020204" pitchFamily="34" charset="0"/>
+              </a:rPr>
+              <a:t>(N=11635)</a:t>
+            </a:r>
+            <a:endParaRPr kumimoji="1" lang="zh-CN" altLang="en-US" sz="2400" dirty="0">
+              <a:latin typeface="Arial" panose="020B0604020202020204" pitchFamily="34" charset="0"/>
+              <a:cs typeface="Arial" panose="020B0604020202020204" pitchFamily="34" charset="0"/>
+            </a:endParaRPr>
+          </a:p>
+        </p:txBody>
+      </p:sp>
+      <p:sp>
+        <p:nvSpPr>
+          <p:cNvPr id="39" name="文本框 38">
+            <a:extLst>
+              <a:ext uri="{FF2B5EF4-FFF2-40B4-BE49-F238E27FC236}">
+                <a16:creationId xmlns:a16="http://schemas.microsoft.com/office/drawing/2014/main" id="{F858EA0E-0D76-BEBF-2622-01801FA274AF}"/>
+              </a:ext>
+            </a:extLst>
+          </p:cNvPr>
+          <p:cNvSpPr txBox="1"/>
+          <p:nvPr/>
+        </p:nvSpPr>
+        <p:spPr>
+          <a:xfrm rot="16200000">
+            <a:off x="-533263" y="8182966"/>
+            <a:ext cx="4320000" cy="461665"/>
+          </a:xfrm>
+          <a:prstGeom prst="rect">
+            <a:avLst/>
+          </a:prstGeom>
+          <a:noFill/>
+        </p:spPr>
+        <p:txBody>
+          <a:bodyPr wrap="square" rtlCol="0">
+            <a:spAutoFit/>
+          </a:bodyPr>
+          <a:lstStyle/>
+          <a:p>
+            <a:pPr algn="ctr"/>
+            <a:r>
+              <a:rPr kumimoji="1" lang="en-US" altLang="zh-CN" sz="2400" dirty="0">
+                <a:latin typeface="Arial" panose="020B0604020202020204" pitchFamily="34" charset="0"/>
+                <a:cs typeface="Arial" panose="020B0604020202020204" pitchFamily="34" charset="0"/>
+              </a:rPr>
+              <a:t>Pos</a:t>
+            </a:r>
+            <a:r>
+              <a:rPr kumimoji="1" lang="zh-CN" altLang="en-US" sz="2400" dirty="0">
+                <a:latin typeface="Arial" panose="020B0604020202020204" pitchFamily="34" charset="0"/>
+                <a:cs typeface="Arial" panose="020B0604020202020204" pitchFamily="34" charset="0"/>
+              </a:rPr>
+              <a:t> </a:t>
+            </a:r>
+            <a:r>
+              <a:rPr kumimoji="1" lang="en-US" altLang="zh-CN" sz="2400" dirty="0">
+                <a:latin typeface="Arial" panose="020B0604020202020204" pitchFamily="34" charset="0"/>
+                <a:cs typeface="Arial" panose="020B0604020202020204" pitchFamily="34" charset="0"/>
+              </a:rPr>
+              <a:t>y</a:t>
+            </a:r>
+            <a:endParaRPr kumimoji="1" lang="zh-CN" altLang="en-US" sz="2400" dirty="0">
+              <a:latin typeface="Arial" panose="020B0604020202020204" pitchFamily="34" charset="0"/>
+              <a:cs typeface="Arial" panose="020B0604020202020204" pitchFamily="34" charset="0"/>
+            </a:endParaRPr>
+          </a:p>
+        </p:txBody>
+      </p:sp>
+      <p:sp>
+        <p:nvSpPr>
+          <p:cNvPr id="41" name="文本框 40">
+            <a:extLst>
+              <a:ext uri="{FF2B5EF4-FFF2-40B4-BE49-F238E27FC236}">
+                <a16:creationId xmlns:a16="http://schemas.microsoft.com/office/drawing/2014/main" id="{AAE4E19F-E5E0-D0B0-A1C3-A22D62BF0AAB}"/>
+              </a:ext>
+            </a:extLst>
+          </p:cNvPr>
+          <p:cNvSpPr txBox="1"/>
+          <p:nvPr/>
+        </p:nvSpPr>
+        <p:spPr>
+          <a:xfrm>
+            <a:off x="1733508" y="10600543"/>
+            <a:ext cx="4320000" cy="461665"/>
+          </a:xfrm>
+          <a:prstGeom prst="rect">
+            <a:avLst/>
+          </a:prstGeom>
+          <a:noFill/>
+        </p:spPr>
+        <p:txBody>
+          <a:bodyPr wrap="square" rtlCol="0">
+            <a:spAutoFit/>
+          </a:bodyPr>
+          <a:lstStyle/>
+          <a:p>
+            <a:pPr algn="ctr"/>
+            <a:r>
+              <a:rPr kumimoji="1" lang="en-US" altLang="zh-CN" sz="2400" dirty="0">
+                <a:latin typeface="Arial" panose="020B0604020202020204" pitchFamily="34" charset="0"/>
+                <a:cs typeface="Arial" panose="020B0604020202020204" pitchFamily="34" charset="0"/>
+              </a:rPr>
+              <a:t>Pos</a:t>
+            </a:r>
+            <a:r>
+              <a:rPr kumimoji="1" lang="zh-CN" altLang="en-US" sz="2400" dirty="0">
+                <a:latin typeface="Arial" panose="020B0604020202020204" pitchFamily="34" charset="0"/>
+                <a:cs typeface="Arial" panose="020B0604020202020204" pitchFamily="34" charset="0"/>
+              </a:rPr>
+              <a:t> </a:t>
+            </a:r>
+            <a:r>
+              <a:rPr kumimoji="1" lang="en-US" altLang="zh-CN" sz="2400" dirty="0">
+                <a:latin typeface="Arial" panose="020B0604020202020204" pitchFamily="34" charset="0"/>
+                <a:cs typeface="Arial" panose="020B0604020202020204" pitchFamily="34" charset="0"/>
+              </a:rPr>
+              <a:t>x</a:t>
+            </a:r>
+            <a:endParaRPr kumimoji="1" lang="zh-CN" altLang="en-US" sz="2400" dirty="0">
+              <a:latin typeface="Arial" panose="020B0604020202020204" pitchFamily="34" charset="0"/>
+              <a:cs typeface="Arial" panose="020B0604020202020204" pitchFamily="34" charset="0"/>
+            </a:endParaRPr>
+          </a:p>
+        </p:txBody>
+      </p:sp>
+      <p:sp>
+        <p:nvSpPr>
+          <p:cNvPr id="43" name="文本框 42">
+            <a:extLst>
+              <a:ext uri="{FF2B5EF4-FFF2-40B4-BE49-F238E27FC236}">
+                <a16:creationId xmlns:a16="http://schemas.microsoft.com/office/drawing/2014/main" id="{280EE2D3-ED69-4B75-9B74-FD7776BC2883}"/>
+              </a:ext>
+            </a:extLst>
+          </p:cNvPr>
+          <p:cNvSpPr txBox="1"/>
+          <p:nvPr/>
+        </p:nvSpPr>
+        <p:spPr>
+          <a:xfrm>
+            <a:off x="6597976" y="10600856"/>
+            <a:ext cx="4320000" cy="461665"/>
+          </a:xfrm>
+          <a:prstGeom prst="rect">
+            <a:avLst/>
+          </a:prstGeom>
+          <a:noFill/>
+        </p:spPr>
+        <p:txBody>
+          <a:bodyPr wrap="square" rtlCol="0">
+            <a:spAutoFit/>
+          </a:bodyPr>
+          <a:lstStyle/>
+          <a:p>
+            <a:pPr algn="ctr"/>
+            <a:r>
+              <a:rPr kumimoji="1" lang="en-US" altLang="zh-CN" sz="2400" dirty="0">
+                <a:latin typeface="Arial" panose="020B0604020202020204" pitchFamily="34" charset="0"/>
+                <a:cs typeface="Arial" panose="020B0604020202020204" pitchFamily="34" charset="0"/>
+              </a:rPr>
+              <a:t>Relative</a:t>
+            </a:r>
+            <a:r>
+              <a:rPr kumimoji="1" lang="zh-CN" altLang="en-US" sz="2400" dirty="0">
+                <a:latin typeface="Arial" panose="020B0604020202020204" pitchFamily="34" charset="0"/>
+                <a:cs typeface="Arial" panose="020B0604020202020204" pitchFamily="34" charset="0"/>
+              </a:rPr>
+              <a:t> </a:t>
+            </a:r>
+            <a:r>
+              <a:rPr kumimoji="1" lang="en-US" altLang="zh-CN" sz="2400" dirty="0">
+                <a:latin typeface="Arial" panose="020B0604020202020204" pitchFamily="34" charset="0"/>
+                <a:cs typeface="Arial" panose="020B0604020202020204" pitchFamily="34" charset="0"/>
+              </a:rPr>
+              <a:t>size</a:t>
+            </a:r>
+            <a:endParaRPr kumimoji="1" lang="zh-CN" altLang="en-US" sz="2400" dirty="0">
+              <a:latin typeface="Arial" panose="020B0604020202020204" pitchFamily="34" charset="0"/>
+              <a:cs typeface="Arial" panose="020B0604020202020204" pitchFamily="34" charset="0"/>
+            </a:endParaRPr>
+          </a:p>
+        </p:txBody>
+      </p:sp>
+      <p:sp>
+        <p:nvSpPr>
+          <p:cNvPr id="44" name="文本框 43">
+            <a:extLst>
+              <a:ext uri="{FF2B5EF4-FFF2-40B4-BE49-F238E27FC236}">
+                <a16:creationId xmlns:a16="http://schemas.microsoft.com/office/drawing/2014/main" id="{5BE37944-3F83-AC3C-5DFC-CB8F36C15C6E}"/>
+              </a:ext>
+            </a:extLst>
+          </p:cNvPr>
+          <p:cNvSpPr txBox="1"/>
+          <p:nvPr/>
+        </p:nvSpPr>
+        <p:spPr>
+          <a:xfrm>
+            <a:off x="6599276" y="6122772"/>
+            <a:ext cx="4320000" cy="461665"/>
+          </a:xfrm>
+          <a:prstGeom prst="rect">
+            <a:avLst/>
+          </a:prstGeom>
+          <a:noFill/>
+        </p:spPr>
+        <p:txBody>
+          <a:bodyPr wrap="square" rtlCol="0">
+            <a:spAutoFit/>
+          </a:bodyPr>
+          <a:lstStyle/>
+          <a:p>
+            <a:pPr algn="ctr"/>
+            <a:r>
+              <a:rPr kumimoji="1" lang="en-US" altLang="zh-CN" sz="2400" dirty="0" err="1">
+                <a:latin typeface="Arial" panose="020B0604020202020204" pitchFamily="34" charset="0"/>
+                <a:cs typeface="Arial" panose="020B0604020202020204" pitchFamily="34" charset="0"/>
+              </a:rPr>
+              <a:t>ThyroidXL</a:t>
+            </a:r>
+            <a:r>
+              <a:rPr kumimoji="1" lang="zh-CN" altLang="en-US" sz="2400" dirty="0">
+                <a:latin typeface="Arial" panose="020B0604020202020204" pitchFamily="34" charset="0"/>
+                <a:cs typeface="Arial" panose="020B0604020202020204" pitchFamily="34" charset="0"/>
+              </a:rPr>
+              <a:t> </a:t>
+            </a:r>
+            <a:r>
+              <a:rPr kumimoji="1" lang="en-US" altLang="zh-CN" sz="2400" dirty="0">
+                <a:latin typeface="Arial" panose="020B0604020202020204" pitchFamily="34" charset="0"/>
+                <a:cs typeface="Arial" panose="020B0604020202020204" pitchFamily="34" charset="0"/>
+              </a:rPr>
+              <a:t>–</a:t>
+            </a:r>
+            <a:r>
+              <a:rPr kumimoji="1" lang="zh-CN" altLang="en-US" sz="2400" dirty="0">
+                <a:latin typeface="Arial" panose="020B0604020202020204" pitchFamily="34" charset="0"/>
+                <a:cs typeface="Arial" panose="020B0604020202020204" pitchFamily="34" charset="0"/>
+              </a:rPr>
+              <a:t> </a:t>
+            </a:r>
+            <a:r>
+              <a:rPr kumimoji="1" lang="en-US" altLang="zh-CN" sz="2400" dirty="0">
+                <a:latin typeface="Arial" panose="020B0604020202020204" pitchFamily="34" charset="0"/>
+                <a:cs typeface="Arial" panose="020B0604020202020204" pitchFamily="34" charset="0"/>
+              </a:rPr>
+              <a:t>Size</a:t>
+            </a:r>
+            <a:r>
+              <a:rPr kumimoji="1" lang="zh-CN" altLang="en-US" sz="2400" dirty="0">
+                <a:latin typeface="Arial" panose="020B0604020202020204" pitchFamily="34" charset="0"/>
+                <a:cs typeface="Arial" panose="020B0604020202020204" pitchFamily="34" charset="0"/>
+              </a:rPr>
+              <a:t> </a:t>
+            </a:r>
+            <a:r>
+              <a:rPr kumimoji="1" lang="en-US" altLang="zh-CN" sz="2400" dirty="0">
+                <a:latin typeface="Arial" panose="020B0604020202020204" pitchFamily="34" charset="0"/>
+                <a:cs typeface="Arial" panose="020B0604020202020204" pitchFamily="34" charset="0"/>
+              </a:rPr>
+              <a:t>(N=11635)</a:t>
+            </a:r>
+            <a:endParaRPr kumimoji="1" lang="zh-CN" altLang="en-US" sz="2400" dirty="0">
+              <a:latin typeface="Arial" panose="020B0604020202020204" pitchFamily="34" charset="0"/>
+              <a:cs typeface="Arial" panose="020B0604020202020204" pitchFamily="34" charset="0"/>
+            </a:endParaRPr>
+          </a:p>
+        </p:txBody>
+      </p:sp>
+      <p:sp>
+        <p:nvSpPr>
+          <p:cNvPr id="45" name="文本框 44">
+            <a:extLst>
+              <a:ext uri="{FF2B5EF4-FFF2-40B4-BE49-F238E27FC236}">
+                <a16:creationId xmlns:a16="http://schemas.microsoft.com/office/drawing/2014/main" id="{B300CFFF-215A-8116-9303-9F346DB2A244}"/>
+              </a:ext>
+            </a:extLst>
+          </p:cNvPr>
+          <p:cNvSpPr txBox="1"/>
+          <p:nvPr/>
+        </p:nvSpPr>
+        <p:spPr>
+          <a:xfrm rot="16200000">
+            <a:off x="4093563" y="8183279"/>
+            <a:ext cx="4320000" cy="461665"/>
+          </a:xfrm>
+          <a:prstGeom prst="rect">
+            <a:avLst/>
+          </a:prstGeom>
+          <a:noFill/>
+        </p:spPr>
+        <p:txBody>
+          <a:bodyPr wrap="square" rtlCol="0">
+            <a:spAutoFit/>
+          </a:bodyPr>
+          <a:lstStyle/>
+          <a:p>
+            <a:pPr algn="ctr"/>
+            <a:r>
+              <a:rPr kumimoji="1" lang="en-US" altLang="zh-CN" sz="2400" dirty="0">
+                <a:latin typeface="Arial" panose="020B0604020202020204" pitchFamily="34" charset="0"/>
+                <a:cs typeface="Arial" panose="020B0604020202020204" pitchFamily="34" charset="0"/>
+              </a:rPr>
+              <a:t>Density</a:t>
+            </a:r>
+            <a:endParaRPr kumimoji="1" lang="zh-CN" altLang="en-US" sz="2400" dirty="0">
+              <a:latin typeface="Arial" panose="020B0604020202020204" pitchFamily="34" charset="0"/>
+              <a:cs typeface="Arial" panose="020B0604020202020204" pitchFamily="34" charset="0"/>
+            </a:endParaRPr>
+          </a:p>
+        </p:txBody>
+      </p:sp>
+      <p:sp>
+        <p:nvSpPr>
+          <p:cNvPr id="48" name="文本框 47">
+            <a:extLst>
+              <a:ext uri="{FF2B5EF4-FFF2-40B4-BE49-F238E27FC236}">
+                <a16:creationId xmlns:a16="http://schemas.microsoft.com/office/drawing/2014/main" id="{958EE90C-5C82-6FB2-500D-8C0612318D6B}"/>
+              </a:ext>
+            </a:extLst>
+          </p:cNvPr>
+          <p:cNvSpPr txBox="1"/>
+          <p:nvPr/>
+        </p:nvSpPr>
+        <p:spPr>
+          <a:xfrm>
+            <a:off x="11868690" y="10600856"/>
+            <a:ext cx="4320000" cy="461665"/>
+          </a:xfrm>
+          <a:prstGeom prst="rect">
+            <a:avLst/>
+          </a:prstGeom>
+          <a:noFill/>
+        </p:spPr>
+        <p:txBody>
+          <a:bodyPr wrap="square" rtlCol="0">
+            <a:spAutoFit/>
+          </a:bodyPr>
+          <a:lstStyle/>
+          <a:p>
+            <a:pPr algn="ctr"/>
+            <a:r>
+              <a:rPr kumimoji="1" lang="en-US" altLang="zh-CN" sz="2400" dirty="0">
+                <a:latin typeface="Arial" panose="020B0604020202020204" pitchFamily="34" charset="0"/>
+                <a:cs typeface="Arial" panose="020B0604020202020204" pitchFamily="34" charset="0"/>
+              </a:rPr>
+              <a:t>Pos</a:t>
+            </a:r>
+            <a:r>
+              <a:rPr kumimoji="1" lang="zh-CN" altLang="en-US" sz="2400" dirty="0">
+                <a:latin typeface="Arial" panose="020B0604020202020204" pitchFamily="34" charset="0"/>
+                <a:cs typeface="Arial" panose="020B0604020202020204" pitchFamily="34" charset="0"/>
+              </a:rPr>
+              <a:t> </a:t>
+            </a:r>
+            <a:r>
+              <a:rPr kumimoji="1" lang="en-US" altLang="zh-CN" sz="2400" dirty="0">
+                <a:latin typeface="Arial" panose="020B0604020202020204" pitchFamily="34" charset="0"/>
+                <a:cs typeface="Arial" panose="020B0604020202020204" pitchFamily="34" charset="0"/>
+              </a:rPr>
+              <a:t>x</a:t>
+            </a:r>
+            <a:endParaRPr kumimoji="1" lang="zh-CN" altLang="en-US" sz="2400" dirty="0">
+              <a:latin typeface="Arial" panose="020B0604020202020204" pitchFamily="34" charset="0"/>
+              <a:cs typeface="Arial" panose="020B0604020202020204" pitchFamily="34" charset="0"/>
+            </a:endParaRPr>
+          </a:p>
+        </p:txBody>
+      </p:sp>
+      <p:sp>
+        <p:nvSpPr>
+          <p:cNvPr id="49" name="文本框 48">
+            <a:extLst>
+              <a:ext uri="{FF2B5EF4-FFF2-40B4-BE49-F238E27FC236}">
+                <a16:creationId xmlns:a16="http://schemas.microsoft.com/office/drawing/2014/main" id="{8FFEC03E-F606-B11D-FF3F-24FAF64A055C}"/>
+              </a:ext>
+            </a:extLst>
+          </p:cNvPr>
+          <p:cNvSpPr txBox="1"/>
+          <p:nvPr/>
+        </p:nvSpPr>
+        <p:spPr>
+          <a:xfrm>
+            <a:off x="16733158" y="10600856"/>
+            <a:ext cx="4320000" cy="461665"/>
+          </a:xfrm>
+          <a:prstGeom prst="rect">
+            <a:avLst/>
+          </a:prstGeom>
+          <a:noFill/>
+        </p:spPr>
+        <p:txBody>
+          <a:bodyPr wrap="square" rtlCol="0">
+            <a:spAutoFit/>
+          </a:bodyPr>
+          <a:lstStyle/>
+          <a:p>
+            <a:pPr algn="ctr"/>
+            <a:r>
+              <a:rPr kumimoji="1" lang="en-US" altLang="zh-CN" sz="2400" dirty="0">
+                <a:latin typeface="Arial" panose="020B0604020202020204" pitchFamily="34" charset="0"/>
+                <a:cs typeface="Arial" panose="020B0604020202020204" pitchFamily="34" charset="0"/>
+              </a:rPr>
+              <a:t>Relative</a:t>
+            </a:r>
+            <a:r>
+              <a:rPr kumimoji="1" lang="zh-CN" altLang="en-US" sz="2400" dirty="0">
+                <a:latin typeface="Arial" panose="020B0604020202020204" pitchFamily="34" charset="0"/>
+                <a:cs typeface="Arial" panose="020B0604020202020204" pitchFamily="34" charset="0"/>
+              </a:rPr>
+              <a:t> </a:t>
+            </a:r>
+            <a:r>
+              <a:rPr kumimoji="1" lang="en-US" altLang="zh-CN" sz="2400" dirty="0">
+                <a:latin typeface="Arial" panose="020B0604020202020204" pitchFamily="34" charset="0"/>
+                <a:cs typeface="Arial" panose="020B0604020202020204" pitchFamily="34" charset="0"/>
+              </a:rPr>
+              <a:t>size</a:t>
+            </a:r>
+            <a:endParaRPr kumimoji="1" lang="zh-CN" altLang="en-US" sz="2400" dirty="0">
+              <a:latin typeface="Arial" panose="020B0604020202020204" pitchFamily="34" charset="0"/>
+              <a:cs typeface="Arial" panose="020B0604020202020204" pitchFamily="34" charset="0"/>
+            </a:endParaRPr>
+          </a:p>
+        </p:txBody>
+      </p:sp>
+      <p:sp>
+        <p:nvSpPr>
+          <p:cNvPr id="50" name="文本框 49">
+            <a:extLst>
+              <a:ext uri="{FF2B5EF4-FFF2-40B4-BE49-F238E27FC236}">
+                <a16:creationId xmlns:a16="http://schemas.microsoft.com/office/drawing/2014/main" id="{6803135B-339C-C40D-4EBE-8DAA2BF8F991}"/>
+              </a:ext>
+            </a:extLst>
+          </p:cNvPr>
+          <p:cNvSpPr txBox="1"/>
+          <p:nvPr/>
+        </p:nvSpPr>
+        <p:spPr>
+          <a:xfrm rot="16200000">
+            <a:off x="9346349" y="8183279"/>
+            <a:ext cx="4320000" cy="461665"/>
+          </a:xfrm>
+          <a:prstGeom prst="rect">
+            <a:avLst/>
+          </a:prstGeom>
+          <a:noFill/>
+        </p:spPr>
+        <p:txBody>
+          <a:bodyPr wrap="square" rtlCol="0">
+            <a:spAutoFit/>
+          </a:bodyPr>
+          <a:lstStyle/>
+          <a:p>
+            <a:pPr algn="ctr"/>
+            <a:r>
+              <a:rPr kumimoji="1" lang="en-US" altLang="zh-CN" sz="2400" dirty="0">
+                <a:latin typeface="Arial" panose="020B0604020202020204" pitchFamily="34" charset="0"/>
+                <a:cs typeface="Arial" panose="020B0604020202020204" pitchFamily="34" charset="0"/>
+              </a:rPr>
+              <a:t>Pos</a:t>
+            </a:r>
+            <a:r>
+              <a:rPr kumimoji="1" lang="zh-CN" altLang="en-US" sz="2400" dirty="0">
+                <a:latin typeface="Arial" panose="020B0604020202020204" pitchFamily="34" charset="0"/>
+                <a:cs typeface="Arial" panose="020B0604020202020204" pitchFamily="34" charset="0"/>
+              </a:rPr>
+              <a:t> </a:t>
+            </a:r>
+            <a:r>
+              <a:rPr kumimoji="1" lang="en-US" altLang="zh-CN" sz="2400" dirty="0">
+                <a:latin typeface="Arial" panose="020B0604020202020204" pitchFamily="34" charset="0"/>
+                <a:cs typeface="Arial" panose="020B0604020202020204" pitchFamily="34" charset="0"/>
+              </a:rPr>
+              <a:t>y</a:t>
+            </a:r>
+            <a:endParaRPr kumimoji="1" lang="zh-CN" altLang="en-US" sz="2400" dirty="0">
+              <a:latin typeface="Arial" panose="020B0604020202020204" pitchFamily="34" charset="0"/>
+              <a:cs typeface="Arial" panose="020B0604020202020204" pitchFamily="34" charset="0"/>
+            </a:endParaRPr>
+          </a:p>
+        </p:txBody>
+      </p:sp>
+      <p:sp>
+        <p:nvSpPr>
+          <p:cNvPr id="51" name="文本框 50">
+            <a:extLst>
+              <a:ext uri="{FF2B5EF4-FFF2-40B4-BE49-F238E27FC236}">
+                <a16:creationId xmlns:a16="http://schemas.microsoft.com/office/drawing/2014/main" id="{38DBEA47-2D3F-5D7F-2AE3-6762FBAD2452}"/>
+              </a:ext>
+            </a:extLst>
+          </p:cNvPr>
+          <p:cNvSpPr txBox="1"/>
+          <p:nvPr/>
+        </p:nvSpPr>
+        <p:spPr>
+          <a:xfrm rot="16200000">
+            <a:off x="13973175" y="8183279"/>
+            <a:ext cx="4320000" cy="461665"/>
+          </a:xfrm>
+          <a:prstGeom prst="rect">
+            <a:avLst/>
+          </a:prstGeom>
+          <a:noFill/>
+        </p:spPr>
+        <p:txBody>
+          <a:bodyPr wrap="square" rtlCol="0">
+            <a:spAutoFit/>
+          </a:bodyPr>
+          <a:lstStyle/>
+          <a:p>
+            <a:pPr algn="ctr"/>
+            <a:r>
+              <a:rPr kumimoji="1" lang="en-US" altLang="zh-CN" sz="2400" dirty="0">
+                <a:latin typeface="Arial" panose="020B0604020202020204" pitchFamily="34" charset="0"/>
+                <a:cs typeface="Arial" panose="020B0604020202020204" pitchFamily="34" charset="0"/>
+              </a:rPr>
+              <a:t>Density</a:t>
+            </a:r>
+            <a:endParaRPr kumimoji="1" lang="zh-CN" altLang="en-US" sz="2400" dirty="0">
+              <a:latin typeface="Arial" panose="020B0604020202020204" pitchFamily="34" charset="0"/>
+              <a:cs typeface="Arial" panose="020B0604020202020204" pitchFamily="34" charset="0"/>
+            </a:endParaRPr>
+          </a:p>
+        </p:txBody>
+      </p:sp>
+      <p:sp>
+        <p:nvSpPr>
+          <p:cNvPr id="52" name="文本框 51">
+            <a:extLst>
+              <a:ext uri="{FF2B5EF4-FFF2-40B4-BE49-F238E27FC236}">
+                <a16:creationId xmlns:a16="http://schemas.microsoft.com/office/drawing/2014/main" id="{1811A470-BB0C-7C6A-463E-6ADE1832A91D}"/>
+              </a:ext>
+            </a:extLst>
+          </p:cNvPr>
+          <p:cNvSpPr txBox="1"/>
+          <p:nvPr/>
+        </p:nvSpPr>
+        <p:spPr>
+          <a:xfrm>
+            <a:off x="11868689" y="6122772"/>
+            <a:ext cx="4320000" cy="461665"/>
+          </a:xfrm>
+          <a:prstGeom prst="rect">
+            <a:avLst/>
+          </a:prstGeom>
+          <a:noFill/>
+        </p:spPr>
+        <p:txBody>
+          <a:bodyPr wrap="square" rtlCol="0">
+            <a:spAutoFit/>
+          </a:bodyPr>
+          <a:lstStyle/>
+          <a:p>
+            <a:pPr algn="ctr"/>
+            <a:r>
+              <a:rPr kumimoji="1" lang="en-US" altLang="zh-CN" sz="2400" dirty="0">
+                <a:latin typeface="Arial" panose="020B0604020202020204" pitchFamily="34" charset="0"/>
+                <a:cs typeface="Arial" panose="020B0604020202020204" pitchFamily="34" charset="0"/>
+              </a:rPr>
+              <a:t>PKTN</a:t>
+            </a:r>
+            <a:r>
+              <a:rPr kumimoji="1" lang="zh-CN" altLang="en-US" sz="2400" dirty="0">
+                <a:latin typeface="Arial" panose="020B0604020202020204" pitchFamily="34" charset="0"/>
+                <a:cs typeface="Arial" panose="020B0604020202020204" pitchFamily="34" charset="0"/>
+              </a:rPr>
+              <a:t> </a:t>
+            </a:r>
+            <a:r>
+              <a:rPr kumimoji="1" lang="en-US" altLang="zh-CN" sz="2400" dirty="0">
+                <a:latin typeface="Arial" panose="020B0604020202020204" pitchFamily="34" charset="0"/>
+                <a:cs typeface="Arial" panose="020B0604020202020204" pitchFamily="34" charset="0"/>
+              </a:rPr>
+              <a:t>–</a:t>
+            </a:r>
+            <a:r>
+              <a:rPr kumimoji="1" lang="zh-CN" altLang="en-US" sz="2400" dirty="0">
+                <a:latin typeface="Arial" panose="020B0604020202020204" pitchFamily="34" charset="0"/>
+                <a:cs typeface="Arial" panose="020B0604020202020204" pitchFamily="34" charset="0"/>
+              </a:rPr>
+              <a:t> </a:t>
+            </a:r>
+            <a:r>
+              <a:rPr kumimoji="1" lang="en-US" altLang="zh-CN" sz="2400" dirty="0">
+                <a:latin typeface="Arial" panose="020B0604020202020204" pitchFamily="34" charset="0"/>
+                <a:cs typeface="Arial" panose="020B0604020202020204" pitchFamily="34" charset="0"/>
+              </a:rPr>
+              <a:t>Position</a:t>
+            </a:r>
+            <a:r>
+              <a:rPr kumimoji="1" lang="zh-CN" altLang="en-US" sz="2400" dirty="0">
+                <a:latin typeface="Arial" panose="020B0604020202020204" pitchFamily="34" charset="0"/>
+                <a:cs typeface="Arial" panose="020B0604020202020204" pitchFamily="34" charset="0"/>
+              </a:rPr>
+              <a:t> </a:t>
+            </a:r>
+            <a:r>
+              <a:rPr kumimoji="1" lang="en-US" altLang="zh-CN" sz="2400" dirty="0">
+                <a:latin typeface="Arial" panose="020B0604020202020204" pitchFamily="34" charset="0"/>
+                <a:cs typeface="Arial" panose="020B0604020202020204" pitchFamily="34" charset="0"/>
+              </a:rPr>
+              <a:t>(N=1003)</a:t>
+            </a:r>
+            <a:endParaRPr kumimoji="1" lang="zh-CN" altLang="en-US" sz="2400" dirty="0">
+              <a:latin typeface="Arial" panose="020B0604020202020204" pitchFamily="34" charset="0"/>
+              <a:cs typeface="Arial" panose="020B0604020202020204" pitchFamily="34" charset="0"/>
+            </a:endParaRPr>
+          </a:p>
+        </p:txBody>
+      </p:sp>
+      <p:sp>
+        <p:nvSpPr>
+          <p:cNvPr id="53" name="文本框 52">
+            <a:extLst>
+              <a:ext uri="{FF2B5EF4-FFF2-40B4-BE49-F238E27FC236}">
+                <a16:creationId xmlns:a16="http://schemas.microsoft.com/office/drawing/2014/main" id="{246C74AA-55B3-502E-50BE-CD3B76DECFDC}"/>
+              </a:ext>
+            </a:extLst>
+          </p:cNvPr>
+          <p:cNvSpPr txBox="1"/>
+          <p:nvPr/>
+        </p:nvSpPr>
+        <p:spPr>
+          <a:xfrm>
+            <a:off x="16733156" y="6122772"/>
+            <a:ext cx="4320000" cy="461665"/>
+          </a:xfrm>
+          <a:prstGeom prst="rect">
+            <a:avLst/>
+          </a:prstGeom>
+          <a:noFill/>
+        </p:spPr>
+        <p:txBody>
+          <a:bodyPr wrap="square" rtlCol="0">
+            <a:spAutoFit/>
+          </a:bodyPr>
+          <a:lstStyle/>
+          <a:p>
+            <a:pPr algn="ctr"/>
+            <a:r>
+              <a:rPr kumimoji="1" lang="en-US" altLang="zh-CN" sz="2400" dirty="0">
+                <a:latin typeface="Arial" panose="020B0604020202020204" pitchFamily="34" charset="0"/>
+                <a:cs typeface="Arial" panose="020B0604020202020204" pitchFamily="34" charset="0"/>
+              </a:rPr>
+              <a:t>PKTN</a:t>
+            </a:r>
+            <a:r>
+              <a:rPr kumimoji="1" lang="zh-CN" altLang="en-US" sz="2400" dirty="0">
+                <a:latin typeface="Arial" panose="020B0604020202020204" pitchFamily="34" charset="0"/>
+                <a:cs typeface="Arial" panose="020B0604020202020204" pitchFamily="34" charset="0"/>
+              </a:rPr>
+              <a:t> </a:t>
+            </a:r>
+            <a:r>
+              <a:rPr kumimoji="1" lang="en-US" altLang="zh-CN" sz="2400" dirty="0">
+                <a:latin typeface="Arial" panose="020B0604020202020204" pitchFamily="34" charset="0"/>
+                <a:cs typeface="Arial" panose="020B0604020202020204" pitchFamily="34" charset="0"/>
+              </a:rPr>
+              <a:t>–</a:t>
+            </a:r>
+            <a:r>
+              <a:rPr kumimoji="1" lang="zh-CN" altLang="en-US" sz="2400" dirty="0">
+                <a:latin typeface="Arial" panose="020B0604020202020204" pitchFamily="34" charset="0"/>
+                <a:cs typeface="Arial" panose="020B0604020202020204" pitchFamily="34" charset="0"/>
+              </a:rPr>
+              <a:t> </a:t>
+            </a:r>
+            <a:r>
+              <a:rPr kumimoji="1" lang="en-US" altLang="zh-CN" sz="2400" dirty="0">
+                <a:latin typeface="Arial" panose="020B0604020202020204" pitchFamily="34" charset="0"/>
+                <a:cs typeface="Arial" panose="020B0604020202020204" pitchFamily="34" charset="0"/>
+              </a:rPr>
+              <a:t>Size</a:t>
+            </a:r>
+            <a:r>
+              <a:rPr kumimoji="1" lang="zh-CN" altLang="en-US" sz="2400" dirty="0">
+                <a:latin typeface="Arial" panose="020B0604020202020204" pitchFamily="34" charset="0"/>
+                <a:cs typeface="Arial" panose="020B0604020202020204" pitchFamily="34" charset="0"/>
+              </a:rPr>
+              <a:t> </a:t>
+            </a:r>
+            <a:r>
+              <a:rPr kumimoji="1" lang="en-US" altLang="zh-CN" sz="2400" dirty="0">
+                <a:latin typeface="Arial" panose="020B0604020202020204" pitchFamily="34" charset="0"/>
+                <a:cs typeface="Arial" panose="020B0604020202020204" pitchFamily="34" charset="0"/>
+              </a:rPr>
+              <a:t>(N=1003)</a:t>
+            </a:r>
+            <a:endParaRPr kumimoji="1" lang="zh-CN" altLang="en-US" sz="2400" dirty="0">
+              <a:latin typeface="Arial" panose="020B0604020202020204" pitchFamily="34" charset="0"/>
+              <a:cs typeface="Arial" panose="020B0604020202020204" pitchFamily="34" charset="0"/>
+            </a:endParaRPr>
+          </a:p>
+        </p:txBody>
+      </p:sp>
+      <p:sp>
+        <p:nvSpPr>
+          <p:cNvPr id="70" name="文本框 69">
+            <a:extLst>
+              <a:ext uri="{FF2B5EF4-FFF2-40B4-BE49-F238E27FC236}">
+                <a16:creationId xmlns:a16="http://schemas.microsoft.com/office/drawing/2014/main" id="{9CFCD99C-0E51-7097-8F14-0BB1F5583784}"/>
+              </a:ext>
+            </a:extLst>
+          </p:cNvPr>
+          <p:cNvSpPr txBox="1"/>
+          <p:nvPr/>
+        </p:nvSpPr>
+        <p:spPr>
+          <a:xfrm>
+            <a:off x="1733509" y="11139633"/>
+            <a:ext cx="4320000" cy="461665"/>
+          </a:xfrm>
+          <a:prstGeom prst="rect">
+            <a:avLst/>
+          </a:prstGeom>
+          <a:noFill/>
+        </p:spPr>
+        <p:txBody>
+          <a:bodyPr wrap="square" rtlCol="0">
+            <a:spAutoFit/>
+          </a:bodyPr>
+          <a:lstStyle/>
+          <a:p>
+            <a:pPr algn="ctr"/>
+            <a:r>
+              <a:rPr kumimoji="1" lang="en-US" altLang="zh-CN" sz="2400" dirty="0" err="1">
+                <a:latin typeface="Arial" panose="020B0604020202020204" pitchFamily="34" charset="0"/>
+                <a:cs typeface="Arial" panose="020B0604020202020204" pitchFamily="34" charset="0"/>
+              </a:rPr>
+              <a:t>FinalData</a:t>
+            </a:r>
+            <a:r>
+              <a:rPr kumimoji="1" lang="zh-CN" altLang="en-US" sz="2400" dirty="0">
+                <a:latin typeface="Arial" panose="020B0604020202020204" pitchFamily="34" charset="0"/>
+                <a:cs typeface="Arial" panose="020B0604020202020204" pitchFamily="34" charset="0"/>
+              </a:rPr>
+              <a:t> </a:t>
+            </a:r>
+            <a:r>
+              <a:rPr kumimoji="1" lang="en-US" altLang="zh-CN" sz="2400" dirty="0">
+                <a:latin typeface="Arial" panose="020B0604020202020204" pitchFamily="34" charset="0"/>
+                <a:cs typeface="Arial" panose="020B0604020202020204" pitchFamily="34" charset="0"/>
+              </a:rPr>
+              <a:t>–</a:t>
+            </a:r>
+            <a:r>
+              <a:rPr kumimoji="1" lang="zh-CN" altLang="en-US" sz="2400" dirty="0">
+                <a:latin typeface="Arial" panose="020B0604020202020204" pitchFamily="34" charset="0"/>
+                <a:cs typeface="Arial" panose="020B0604020202020204" pitchFamily="34" charset="0"/>
+              </a:rPr>
+              <a:t> </a:t>
+            </a:r>
+            <a:r>
+              <a:rPr kumimoji="1" lang="en-US" altLang="zh-CN" sz="2400" dirty="0">
+                <a:latin typeface="Arial" panose="020B0604020202020204" pitchFamily="34" charset="0"/>
+                <a:cs typeface="Arial" panose="020B0604020202020204" pitchFamily="34" charset="0"/>
+              </a:rPr>
+              <a:t>Position</a:t>
+            </a:r>
+            <a:r>
+              <a:rPr kumimoji="1" lang="zh-CN" altLang="en-US" sz="2400" dirty="0">
+                <a:latin typeface="Arial" panose="020B0604020202020204" pitchFamily="34" charset="0"/>
+                <a:cs typeface="Arial" panose="020B0604020202020204" pitchFamily="34" charset="0"/>
+              </a:rPr>
+              <a:t> </a:t>
+            </a:r>
+            <a:r>
+              <a:rPr kumimoji="1" lang="en-US" altLang="zh-CN" sz="2400" dirty="0">
+                <a:latin typeface="Arial" panose="020B0604020202020204" pitchFamily="34" charset="0"/>
+                <a:cs typeface="Arial" panose="020B0604020202020204" pitchFamily="34" charset="0"/>
+              </a:rPr>
+              <a:t>(N=1854)</a:t>
+            </a:r>
+            <a:endParaRPr kumimoji="1" lang="zh-CN" altLang="en-US" sz="2400" dirty="0">
+              <a:latin typeface="Arial" panose="020B0604020202020204" pitchFamily="34" charset="0"/>
+              <a:cs typeface="Arial" panose="020B0604020202020204" pitchFamily="34" charset="0"/>
+            </a:endParaRPr>
+          </a:p>
+        </p:txBody>
+      </p:sp>
+      <p:sp>
+        <p:nvSpPr>
+          <p:cNvPr id="71" name="文本框 70">
+            <a:extLst>
+              <a:ext uri="{FF2B5EF4-FFF2-40B4-BE49-F238E27FC236}">
+                <a16:creationId xmlns:a16="http://schemas.microsoft.com/office/drawing/2014/main" id="{2C0F7152-AD51-BE59-D412-082CA71EFAD1}"/>
+              </a:ext>
+            </a:extLst>
+          </p:cNvPr>
+          <p:cNvSpPr txBox="1"/>
+          <p:nvPr/>
+        </p:nvSpPr>
+        <p:spPr>
+          <a:xfrm rot="16200000">
+            <a:off x="-533263" y="13200773"/>
+            <a:ext cx="4320000" cy="461665"/>
+          </a:xfrm>
+          <a:prstGeom prst="rect">
+            <a:avLst/>
+          </a:prstGeom>
+          <a:noFill/>
+        </p:spPr>
+        <p:txBody>
+          <a:bodyPr wrap="square" rtlCol="0">
+            <a:spAutoFit/>
+          </a:bodyPr>
+          <a:lstStyle/>
+          <a:p>
+            <a:pPr algn="ctr"/>
+            <a:r>
+              <a:rPr kumimoji="1" lang="en-US" altLang="zh-CN" sz="2400" dirty="0">
+                <a:latin typeface="Arial" panose="020B0604020202020204" pitchFamily="34" charset="0"/>
+                <a:cs typeface="Arial" panose="020B0604020202020204" pitchFamily="34" charset="0"/>
+              </a:rPr>
+              <a:t>Pos</a:t>
+            </a:r>
+            <a:r>
+              <a:rPr kumimoji="1" lang="zh-CN" altLang="en-US" sz="2400" dirty="0">
+                <a:latin typeface="Arial" panose="020B0604020202020204" pitchFamily="34" charset="0"/>
+                <a:cs typeface="Arial" panose="020B0604020202020204" pitchFamily="34" charset="0"/>
+              </a:rPr>
+              <a:t> </a:t>
+            </a:r>
+            <a:r>
+              <a:rPr kumimoji="1" lang="en-US" altLang="zh-CN" sz="2400" dirty="0">
+                <a:latin typeface="Arial" panose="020B0604020202020204" pitchFamily="34" charset="0"/>
+                <a:cs typeface="Arial" panose="020B0604020202020204" pitchFamily="34" charset="0"/>
+              </a:rPr>
+              <a:t>y</a:t>
+            </a:r>
+            <a:endParaRPr kumimoji="1" lang="zh-CN" altLang="en-US" sz="2400" dirty="0">
+              <a:latin typeface="Arial" panose="020B0604020202020204" pitchFamily="34" charset="0"/>
+              <a:cs typeface="Arial" panose="020B0604020202020204" pitchFamily="34" charset="0"/>
+            </a:endParaRPr>
+          </a:p>
+        </p:txBody>
+      </p:sp>
+      <p:sp>
+        <p:nvSpPr>
+          <p:cNvPr id="73" name="文本框 72">
+            <a:extLst>
+              <a:ext uri="{FF2B5EF4-FFF2-40B4-BE49-F238E27FC236}">
+                <a16:creationId xmlns:a16="http://schemas.microsoft.com/office/drawing/2014/main" id="{A5D1F77C-DD22-AB2A-69D2-5B91C98F8F6E}"/>
+              </a:ext>
+            </a:extLst>
+          </p:cNvPr>
+          <p:cNvSpPr txBox="1"/>
+          <p:nvPr/>
+        </p:nvSpPr>
+        <p:spPr>
+          <a:xfrm>
+            <a:off x="1733508" y="15618350"/>
+            <a:ext cx="4320000" cy="461665"/>
+          </a:xfrm>
+          <a:prstGeom prst="rect">
+            <a:avLst/>
+          </a:prstGeom>
+          <a:noFill/>
+        </p:spPr>
+        <p:txBody>
+          <a:bodyPr wrap="square" rtlCol="0">
+            <a:spAutoFit/>
+          </a:bodyPr>
+          <a:lstStyle/>
+          <a:p>
+            <a:pPr algn="ctr"/>
+            <a:r>
+              <a:rPr kumimoji="1" lang="en-US" altLang="zh-CN" sz="2400" dirty="0">
+                <a:latin typeface="Arial" panose="020B0604020202020204" pitchFamily="34" charset="0"/>
+                <a:cs typeface="Arial" panose="020B0604020202020204" pitchFamily="34" charset="0"/>
+              </a:rPr>
+              <a:t>Pos</a:t>
+            </a:r>
+            <a:r>
+              <a:rPr kumimoji="1" lang="zh-CN" altLang="en-US" sz="2400" dirty="0">
+                <a:latin typeface="Arial" panose="020B0604020202020204" pitchFamily="34" charset="0"/>
+                <a:cs typeface="Arial" panose="020B0604020202020204" pitchFamily="34" charset="0"/>
+              </a:rPr>
+              <a:t> </a:t>
+            </a:r>
+            <a:r>
+              <a:rPr kumimoji="1" lang="en-US" altLang="zh-CN" sz="2400" dirty="0">
+                <a:latin typeface="Arial" panose="020B0604020202020204" pitchFamily="34" charset="0"/>
+                <a:cs typeface="Arial" panose="020B0604020202020204" pitchFamily="34" charset="0"/>
+              </a:rPr>
+              <a:t>x</a:t>
+            </a:r>
+            <a:endParaRPr kumimoji="1" lang="zh-CN" altLang="en-US" sz="2400" dirty="0">
+              <a:latin typeface="Arial" panose="020B0604020202020204" pitchFamily="34" charset="0"/>
+              <a:cs typeface="Arial" panose="020B0604020202020204" pitchFamily="34" charset="0"/>
+            </a:endParaRPr>
+          </a:p>
+        </p:txBody>
+      </p:sp>
+      <p:sp>
+        <p:nvSpPr>
+          <p:cNvPr id="75" name="文本框 74">
+            <a:extLst>
+              <a:ext uri="{FF2B5EF4-FFF2-40B4-BE49-F238E27FC236}">
+                <a16:creationId xmlns:a16="http://schemas.microsoft.com/office/drawing/2014/main" id="{432F5A1A-33B5-8D11-349B-4724ECED0FE1}"/>
+              </a:ext>
+            </a:extLst>
+          </p:cNvPr>
+          <p:cNvSpPr txBox="1"/>
+          <p:nvPr/>
+        </p:nvSpPr>
+        <p:spPr>
+          <a:xfrm>
+            <a:off x="6597976" y="15618663"/>
+            <a:ext cx="4320000" cy="461665"/>
+          </a:xfrm>
+          <a:prstGeom prst="rect">
+            <a:avLst/>
+          </a:prstGeom>
+          <a:noFill/>
+        </p:spPr>
+        <p:txBody>
+          <a:bodyPr wrap="square" rtlCol="0">
+            <a:spAutoFit/>
+          </a:bodyPr>
+          <a:lstStyle/>
+          <a:p>
+            <a:pPr algn="ctr"/>
+            <a:r>
+              <a:rPr kumimoji="1" lang="en-US" altLang="zh-CN" sz="2400" dirty="0">
+                <a:latin typeface="Arial" panose="020B0604020202020204" pitchFamily="34" charset="0"/>
+                <a:cs typeface="Arial" panose="020B0604020202020204" pitchFamily="34" charset="0"/>
+              </a:rPr>
+              <a:t>Relative</a:t>
+            </a:r>
+            <a:r>
+              <a:rPr kumimoji="1" lang="zh-CN" altLang="en-US" sz="2400" dirty="0">
+                <a:latin typeface="Arial" panose="020B0604020202020204" pitchFamily="34" charset="0"/>
+                <a:cs typeface="Arial" panose="020B0604020202020204" pitchFamily="34" charset="0"/>
+              </a:rPr>
+              <a:t> </a:t>
+            </a:r>
+            <a:r>
+              <a:rPr kumimoji="1" lang="en-US" altLang="zh-CN" sz="2400" dirty="0">
+                <a:latin typeface="Arial" panose="020B0604020202020204" pitchFamily="34" charset="0"/>
+                <a:cs typeface="Arial" panose="020B0604020202020204" pitchFamily="34" charset="0"/>
+              </a:rPr>
+              <a:t>size</a:t>
+            </a:r>
+            <a:endParaRPr kumimoji="1" lang="zh-CN" altLang="en-US" sz="2400" dirty="0">
+              <a:latin typeface="Arial" panose="020B0604020202020204" pitchFamily="34" charset="0"/>
+              <a:cs typeface="Arial" panose="020B0604020202020204" pitchFamily="34" charset="0"/>
+            </a:endParaRPr>
+          </a:p>
+        </p:txBody>
+      </p:sp>
+      <p:sp>
+        <p:nvSpPr>
+          <p:cNvPr id="76" name="文本框 75">
+            <a:extLst>
+              <a:ext uri="{FF2B5EF4-FFF2-40B4-BE49-F238E27FC236}">
+                <a16:creationId xmlns:a16="http://schemas.microsoft.com/office/drawing/2014/main" id="{499215DE-AB95-4E28-CADD-AC16E2AE3E90}"/>
+              </a:ext>
+            </a:extLst>
+          </p:cNvPr>
+          <p:cNvSpPr txBox="1"/>
+          <p:nvPr/>
+        </p:nvSpPr>
+        <p:spPr>
+          <a:xfrm>
+            <a:off x="6599276" y="11140579"/>
+            <a:ext cx="4320000" cy="461665"/>
+          </a:xfrm>
+          <a:prstGeom prst="rect">
+            <a:avLst/>
+          </a:prstGeom>
+          <a:noFill/>
+        </p:spPr>
+        <p:txBody>
+          <a:bodyPr wrap="square" rtlCol="0">
+            <a:spAutoFit/>
+          </a:bodyPr>
+          <a:lstStyle/>
+          <a:p>
+            <a:pPr algn="ctr"/>
+            <a:r>
+              <a:rPr kumimoji="1" lang="en-US" altLang="zh-CN" sz="2400" dirty="0" err="1">
+                <a:latin typeface="Arial" panose="020B0604020202020204" pitchFamily="34" charset="0"/>
+                <a:cs typeface="Arial" panose="020B0604020202020204" pitchFamily="34" charset="0"/>
+              </a:rPr>
+              <a:t>FinalData</a:t>
+            </a:r>
+            <a:r>
+              <a:rPr kumimoji="1" lang="zh-CN" altLang="en-US" sz="2400" dirty="0">
+                <a:latin typeface="Arial" panose="020B0604020202020204" pitchFamily="34" charset="0"/>
+                <a:cs typeface="Arial" panose="020B0604020202020204" pitchFamily="34" charset="0"/>
+              </a:rPr>
+              <a:t> </a:t>
+            </a:r>
+            <a:r>
+              <a:rPr kumimoji="1" lang="en-US" altLang="zh-CN" sz="2400" dirty="0">
+                <a:latin typeface="Arial" panose="020B0604020202020204" pitchFamily="34" charset="0"/>
+                <a:cs typeface="Arial" panose="020B0604020202020204" pitchFamily="34" charset="0"/>
+              </a:rPr>
+              <a:t>–</a:t>
+            </a:r>
+            <a:r>
+              <a:rPr kumimoji="1" lang="zh-CN" altLang="en-US" sz="2400" dirty="0">
+                <a:latin typeface="Arial" panose="020B0604020202020204" pitchFamily="34" charset="0"/>
+                <a:cs typeface="Arial" panose="020B0604020202020204" pitchFamily="34" charset="0"/>
+              </a:rPr>
+              <a:t> </a:t>
+            </a:r>
+            <a:r>
+              <a:rPr kumimoji="1" lang="en-US" altLang="zh-CN" sz="2400" dirty="0">
+                <a:latin typeface="Arial" panose="020B0604020202020204" pitchFamily="34" charset="0"/>
+                <a:cs typeface="Arial" panose="020B0604020202020204" pitchFamily="34" charset="0"/>
+              </a:rPr>
+              <a:t>Size</a:t>
+            </a:r>
+            <a:r>
+              <a:rPr kumimoji="1" lang="zh-CN" altLang="en-US" sz="2400" dirty="0">
+                <a:latin typeface="Arial" panose="020B0604020202020204" pitchFamily="34" charset="0"/>
+                <a:cs typeface="Arial" panose="020B0604020202020204" pitchFamily="34" charset="0"/>
+              </a:rPr>
+              <a:t> </a:t>
+            </a:r>
+            <a:r>
+              <a:rPr kumimoji="1" lang="en-US" altLang="zh-CN" sz="2400" dirty="0">
+                <a:latin typeface="Arial" panose="020B0604020202020204" pitchFamily="34" charset="0"/>
+                <a:cs typeface="Arial" panose="020B0604020202020204" pitchFamily="34" charset="0"/>
+              </a:rPr>
+              <a:t>(N=1854)</a:t>
+            </a:r>
+            <a:endParaRPr kumimoji="1" lang="zh-CN" altLang="en-US" sz="2400" dirty="0">
+              <a:latin typeface="Arial" panose="020B0604020202020204" pitchFamily="34" charset="0"/>
+              <a:cs typeface="Arial" panose="020B0604020202020204" pitchFamily="34" charset="0"/>
+            </a:endParaRPr>
+          </a:p>
+        </p:txBody>
+      </p:sp>
+      <p:sp>
+        <p:nvSpPr>
+          <p:cNvPr id="77" name="文本框 76">
+            <a:extLst>
+              <a:ext uri="{FF2B5EF4-FFF2-40B4-BE49-F238E27FC236}">
+                <a16:creationId xmlns:a16="http://schemas.microsoft.com/office/drawing/2014/main" id="{55C3C259-06A3-855F-573A-B23110A82C1D}"/>
+              </a:ext>
+            </a:extLst>
+          </p:cNvPr>
+          <p:cNvSpPr txBox="1"/>
+          <p:nvPr/>
+        </p:nvSpPr>
+        <p:spPr>
+          <a:xfrm rot="16200000">
+            <a:off x="4093563" y="13231863"/>
+            <a:ext cx="4320000" cy="400110"/>
+          </a:xfrm>
+          <a:prstGeom prst="rect">
+            <a:avLst/>
+          </a:prstGeom>
+          <a:noFill/>
+        </p:spPr>
+        <p:txBody>
+          <a:bodyPr wrap="square" rtlCol="0">
+            <a:spAutoFit/>
+          </a:bodyPr>
+          <a:lstStyle/>
+          <a:p>
+            <a:pPr algn="ctr"/>
+            <a:r>
               <a:rPr kumimoji="1" lang="en-US" altLang="zh-CN" sz="2000" dirty="0">
                 <a:latin typeface="Arial" panose="020B0604020202020204" pitchFamily="34" charset="0"/>
                 <a:cs typeface="Arial" panose="020B0604020202020204" pitchFamily="34" charset="0"/>
               </a:rPr>
-              <a:t>Relative</a:t>
-            </a:r>
-            <a:r>
-              <a:rPr kumimoji="1" lang="zh-CN" altLang="en-US" sz="2000" dirty="0">
-                <a:latin typeface="Arial" panose="020B0604020202020204" pitchFamily="34" charset="0"/>
-                <a:cs typeface="Arial" panose="020B0604020202020204" pitchFamily="34" charset="0"/>
-              </a:rPr>
-              <a:t> </a:t>
-            </a:r>
-            <a:r>
-              <a:rPr kumimoji="1" lang="en-US" altLang="zh-CN" sz="2000" dirty="0">
-                <a:latin typeface="Arial" panose="020B0604020202020204" pitchFamily="34" charset="0"/>
-                <a:cs typeface="Arial" panose="020B0604020202020204" pitchFamily="34" charset="0"/>
-              </a:rPr>
-              <a:t>size</a:t>
+              <a:t>Density</a:t>
             </a:r>
             <a:endParaRPr kumimoji="1" lang="zh-CN" altLang="en-US" sz="2000" dirty="0">
               <a:latin typeface="Arial" panose="020B0604020202020204" pitchFamily="34" charset="0"/>
@@ -4054,10 +5483,10 @@
       </p:sp>
       <p:sp>
         <p:nvSpPr>
-          <p:cNvPr id="34" name="文本框 33">
+          <p:cNvPr id="80" name="文本框 79">
             <a:extLst>
               <a:ext uri="{FF2B5EF4-FFF2-40B4-BE49-F238E27FC236}">
-                <a16:creationId xmlns:a16="http://schemas.microsoft.com/office/drawing/2014/main" id="{FE1E10C3-D6AC-2329-849D-D47D2194AC46}"/>
+                <a16:creationId xmlns:a16="http://schemas.microsoft.com/office/drawing/2014/main" id="{BB8D2642-B529-0998-78B1-B2DE2CAE043E}"/>
               </a:ext>
             </a:extLst>
           </p:cNvPr>
@@ -4065,9 +5494,9 @@
           <p:nvPr/>
         </p:nvSpPr>
         <p:spPr>
-          <a:xfrm rot="16200000">
-            <a:off x="9405345" y="2352240"/>
-            <a:ext cx="4320000" cy="400110"/>
+          <a:xfrm>
+            <a:off x="11868690" y="15618663"/>
+            <a:ext cx="4320000" cy="461665"/>
           </a:xfrm>
           <a:prstGeom prst="rect">
             <a:avLst/>
@@ -4082,27 +5511,27 @@
           <a:p>
             <a:pPr algn="ctr"/>
             <a:r>
-              <a:rPr kumimoji="1" lang="en-US" altLang="zh-CN" sz="2000" dirty="0">
+              <a:rPr kumimoji="1" lang="en-US" altLang="zh-CN" sz="2400" dirty="0">
                 <a:latin typeface="Arial" panose="020B0604020202020204" pitchFamily="34" charset="0"/>
                 <a:cs typeface="Arial" panose="020B0604020202020204" pitchFamily="34" charset="0"/>
               </a:rPr>
               <a:t>Pos</a:t>
             </a:r>
             <a:r>
-              <a:rPr kumimoji="1" lang="zh-CN" altLang="en-US" sz="2000" dirty="0">
+              <a:rPr kumimoji="1" lang="zh-CN" altLang="en-US" sz="2400" dirty="0">
                 <a:latin typeface="Arial" panose="020B0604020202020204" pitchFamily="34" charset="0"/>
                 <a:cs typeface="Arial" panose="020B0604020202020204" pitchFamily="34" charset="0"/>
               </a:rPr>
               <a:t> </a:t>
             </a:r>
             <a:r>
-              <a:rPr kumimoji="1" lang="en-US" altLang="zh-CN" sz="2000" dirty="0">
-                <a:latin typeface="Arial" panose="020B0604020202020204" pitchFamily="34" charset="0"/>
-                <a:cs typeface="Arial" panose="020B0604020202020204" pitchFamily="34" charset="0"/>
-              </a:rPr>
-              <a:t>y</a:t>
-            </a:r>
-            <a:endParaRPr kumimoji="1" lang="zh-CN" altLang="en-US" sz="2000" dirty="0">
+              <a:rPr kumimoji="1" lang="en-US" altLang="zh-CN" sz="2400" dirty="0">
+                <a:latin typeface="Arial" panose="020B0604020202020204" pitchFamily="34" charset="0"/>
+                <a:cs typeface="Arial" panose="020B0604020202020204" pitchFamily="34" charset="0"/>
+              </a:rPr>
+              <a:t>x</a:t>
+            </a:r>
+            <a:endParaRPr kumimoji="1" lang="zh-CN" altLang="en-US" sz="2400" dirty="0">
               <a:latin typeface="Arial" panose="020B0604020202020204" pitchFamily="34" charset="0"/>
               <a:cs typeface="Arial" panose="020B0604020202020204" pitchFamily="34" charset="0"/>
             </a:endParaRPr>
@@ -4111,10 +5540,10 @@
       </p:sp>
       <p:sp>
         <p:nvSpPr>
-          <p:cNvPr id="35" name="文本框 34">
+          <p:cNvPr id="81" name="文本框 80">
             <a:extLst>
               <a:ext uri="{FF2B5EF4-FFF2-40B4-BE49-F238E27FC236}">
-                <a16:creationId xmlns:a16="http://schemas.microsoft.com/office/drawing/2014/main" id="{404BE88D-4B96-1695-BCBE-2DDF7F322518}"/>
+                <a16:creationId xmlns:a16="http://schemas.microsoft.com/office/drawing/2014/main" id="{5DF6079A-E140-643E-4817-F7177D939A48}"/>
               </a:ext>
             </a:extLst>
           </p:cNvPr>
@@ -4122,9 +5551,9 @@
           <p:nvPr/>
         </p:nvSpPr>
         <p:spPr>
-          <a:xfrm rot="16200000">
-            <a:off x="14032171" y="2352240"/>
-            <a:ext cx="4320000" cy="400110"/>
+          <a:xfrm>
+            <a:off x="16733158" y="15618663"/>
+            <a:ext cx="4320000" cy="461665"/>
           </a:xfrm>
           <a:prstGeom prst="rect">
             <a:avLst/>
@@ -4139,13 +5568,27 @@
           <a:p>
             <a:pPr algn="ctr"/>
             <a:r>
-              <a:rPr kumimoji="1" lang="en-US" altLang="zh-CN" sz="2000" dirty="0">
-                <a:latin typeface="Arial" panose="020B0604020202020204" pitchFamily="34" charset="0"/>
-                <a:cs typeface="Arial" panose="020B0604020202020204" pitchFamily="34" charset="0"/>
-              </a:rPr>
-              <a:t>Density</a:t>
-            </a:r>
-            <a:endParaRPr kumimoji="1" lang="zh-CN" altLang="en-US" sz="2000" dirty="0">
+              <a:rPr kumimoji="1" lang="en-US" altLang="zh-CN" sz="2400" dirty="0">
+                <a:latin typeface="Arial" panose="020B0604020202020204" pitchFamily="34" charset="0"/>
+                <a:cs typeface="Arial" panose="020B0604020202020204" pitchFamily="34" charset="0"/>
+              </a:rPr>
+              <a:t>Relative</a:t>
+            </a:r>
+            <a:r>
+              <a:rPr kumimoji="1" lang="zh-CN" altLang="en-US" sz="2400" dirty="0">
+                <a:latin typeface="Arial" panose="020B0604020202020204" pitchFamily="34" charset="0"/>
+                <a:cs typeface="Arial" panose="020B0604020202020204" pitchFamily="34" charset="0"/>
+              </a:rPr>
+              <a:t> </a:t>
+            </a:r>
+            <a:r>
+              <a:rPr kumimoji="1" lang="en-US" altLang="zh-CN" sz="2400" dirty="0">
+                <a:latin typeface="Arial" panose="020B0604020202020204" pitchFamily="34" charset="0"/>
+                <a:cs typeface="Arial" panose="020B0604020202020204" pitchFamily="34" charset="0"/>
+              </a:rPr>
+              <a:t>size</a:t>
+            </a:r>
+            <a:endParaRPr kumimoji="1" lang="zh-CN" altLang="en-US" sz="2400" dirty="0">
               <a:latin typeface="Arial" panose="020B0604020202020204" pitchFamily="34" charset="0"/>
               <a:cs typeface="Arial" panose="020B0604020202020204" pitchFamily="34" charset="0"/>
             </a:endParaRPr>
@@ -4154,10 +5597,10 @@
       </p:sp>
       <p:sp>
         <p:nvSpPr>
-          <p:cNvPr id="36" name="文本框 35">
+          <p:cNvPr id="82" name="文本框 81">
             <a:extLst>
               <a:ext uri="{FF2B5EF4-FFF2-40B4-BE49-F238E27FC236}">
-                <a16:creationId xmlns:a16="http://schemas.microsoft.com/office/drawing/2014/main" id="{2206714E-2A1A-1CE1-CD85-F81DA70ECEDF}"/>
+                <a16:creationId xmlns:a16="http://schemas.microsoft.com/office/drawing/2014/main" id="{28DB97C9-0124-4EF8-E7C6-3756FEF8C466}"/>
               </a:ext>
             </a:extLst>
           </p:cNvPr>
@@ -4165,9 +5608,9 @@
           <p:nvPr/>
         </p:nvSpPr>
         <p:spPr>
-          <a:xfrm>
-            <a:off x="11927685" y="293040"/>
-            <a:ext cx="4320000" cy="400110"/>
+          <a:xfrm rot="16200000">
+            <a:off x="9346349" y="13201086"/>
+            <a:ext cx="4320000" cy="461665"/>
           </a:xfrm>
           <a:prstGeom prst="rect">
             <a:avLst/>
@@ -4182,55 +5625,27 @@
           <a:p>
             <a:pPr algn="ctr"/>
             <a:r>
-              <a:rPr kumimoji="1" lang="en-US" altLang="zh-CN" sz="2000" dirty="0">
-                <a:latin typeface="Arial" panose="020B0604020202020204" pitchFamily="34" charset="0"/>
-                <a:cs typeface="Arial" panose="020B0604020202020204" pitchFamily="34" charset="0"/>
-              </a:rPr>
-              <a:t>TN3K</a:t>
-            </a:r>
-            <a:r>
-              <a:rPr kumimoji="1" lang="zh-CN" altLang="en-US" sz="2000" dirty="0">
+              <a:rPr kumimoji="1" lang="en-US" altLang="zh-CN" sz="2400" dirty="0">
+                <a:latin typeface="Arial" panose="020B0604020202020204" pitchFamily="34" charset="0"/>
+                <a:cs typeface="Arial" panose="020B0604020202020204" pitchFamily="34" charset="0"/>
+              </a:rPr>
+              <a:t>Pos</a:t>
+            </a:r>
+            <a:r>
+              <a:rPr kumimoji="1" lang="zh-CN" altLang="en-US" sz="2400" dirty="0">
                 <a:latin typeface="Arial" panose="020B0604020202020204" pitchFamily="34" charset="0"/>
                 <a:cs typeface="Arial" panose="020B0604020202020204" pitchFamily="34" charset="0"/>
               </a:rPr>
               <a:t> </a:t>
             </a:r>
             <a:r>
-              <a:rPr kumimoji="1" lang="en-US" altLang="zh-CN" sz="2000" dirty="0">
-                <a:latin typeface="Arial" panose="020B0604020202020204" pitchFamily="34" charset="0"/>
-                <a:cs typeface="Arial" panose="020B0604020202020204" pitchFamily="34" charset="0"/>
-              </a:rPr>
-              <a:t>–</a:t>
-            </a:r>
-            <a:r>
-              <a:rPr kumimoji="1" lang="zh-CN" altLang="en-US" sz="2000" dirty="0">
-                <a:latin typeface="Arial" panose="020B0604020202020204" pitchFamily="34" charset="0"/>
-                <a:cs typeface="Arial" panose="020B0604020202020204" pitchFamily="34" charset="0"/>
-              </a:rPr>
-              <a:t> </a:t>
-            </a:r>
-            <a:r>
-              <a:rPr kumimoji="1" lang="en-US" altLang="zh-CN" sz="2000" dirty="0">
-                <a:latin typeface="Arial" panose="020B0604020202020204" pitchFamily="34" charset="0"/>
-                <a:cs typeface="Arial" panose="020B0604020202020204" pitchFamily="34" charset="0"/>
-              </a:rPr>
-              <a:t>Position</a:t>
-            </a:r>
-            <a:r>
-              <a:rPr kumimoji="1" lang="zh-CN" altLang="en-US" sz="2000" dirty="0">
-                <a:latin typeface="Arial" panose="020B0604020202020204" pitchFamily="34" charset="0"/>
-                <a:cs typeface="Arial" panose="020B0604020202020204" pitchFamily="34" charset="0"/>
-              </a:rPr>
-              <a:t> </a:t>
-            </a:r>
-            <a:r>
-              <a:rPr kumimoji="1" lang="en-US" altLang="zh-CN" sz="2000" dirty="0">
-                <a:latin typeface="Arial" panose="020B0604020202020204" pitchFamily="34" charset="0"/>
-                <a:cs typeface="Arial" panose="020B0604020202020204" pitchFamily="34" charset="0"/>
-              </a:rPr>
-              <a:t>(N=4633)</a:t>
-            </a:r>
-            <a:endParaRPr kumimoji="1" lang="zh-CN" altLang="en-US" sz="2000" dirty="0">
+              <a:rPr kumimoji="1" lang="en-US" altLang="zh-CN" sz="2400" dirty="0">
+                <a:latin typeface="Arial" panose="020B0604020202020204" pitchFamily="34" charset="0"/>
+                <a:cs typeface="Arial" panose="020B0604020202020204" pitchFamily="34" charset="0"/>
+              </a:rPr>
+              <a:t>y</a:t>
+            </a:r>
+            <a:endParaRPr kumimoji="1" lang="zh-CN" altLang="en-US" sz="2400" dirty="0">
               <a:latin typeface="Arial" panose="020B0604020202020204" pitchFamily="34" charset="0"/>
               <a:cs typeface="Arial" panose="020B0604020202020204" pitchFamily="34" charset="0"/>
             </a:endParaRPr>
@@ -4239,10 +5654,10 @@
       </p:sp>
       <p:sp>
         <p:nvSpPr>
-          <p:cNvPr id="37" name="文本框 36">
+          <p:cNvPr id="83" name="文本框 82">
             <a:extLst>
               <a:ext uri="{FF2B5EF4-FFF2-40B4-BE49-F238E27FC236}">
-                <a16:creationId xmlns:a16="http://schemas.microsoft.com/office/drawing/2014/main" id="{37AAC4B5-1E32-9F17-B1FD-C59FE675116B}"/>
+                <a16:creationId xmlns:a16="http://schemas.microsoft.com/office/drawing/2014/main" id="{B50F4195-2619-4718-571A-9326C921A130}"/>
               </a:ext>
             </a:extLst>
           </p:cNvPr>
@@ -4250,9 +5665,9 @@
           <p:nvPr/>
         </p:nvSpPr>
         <p:spPr>
-          <a:xfrm>
-            <a:off x="16792152" y="293040"/>
-            <a:ext cx="4320000" cy="400110"/>
+          <a:xfrm rot="16200000">
+            <a:off x="13973175" y="13201086"/>
+            <a:ext cx="4320000" cy="461665"/>
           </a:xfrm>
           <a:prstGeom prst="rect">
             <a:avLst/>
@@ -4267,55 +5682,13 @@
           <a:p>
             <a:pPr algn="ctr"/>
             <a:r>
-              <a:rPr kumimoji="1" lang="en-US" altLang="zh-CN" sz="2000" dirty="0">
-                <a:latin typeface="Arial" panose="020B0604020202020204" pitchFamily="34" charset="0"/>
-                <a:cs typeface="Arial" panose="020B0604020202020204" pitchFamily="34" charset="0"/>
-              </a:rPr>
-              <a:t>TN3K</a:t>
-            </a:r>
-            <a:r>
-              <a:rPr kumimoji="1" lang="zh-CN" altLang="en-US" sz="2000" dirty="0">
-                <a:latin typeface="Arial" panose="020B0604020202020204" pitchFamily="34" charset="0"/>
-                <a:cs typeface="Arial" panose="020B0604020202020204" pitchFamily="34" charset="0"/>
-              </a:rPr>
-              <a:t> </a:t>
-            </a:r>
-            <a:r>
-              <a:rPr kumimoji="1" lang="en-US" altLang="zh-CN" sz="2000" dirty="0">
-                <a:latin typeface="Arial" panose="020B0604020202020204" pitchFamily="34" charset="0"/>
-                <a:cs typeface="Arial" panose="020B0604020202020204" pitchFamily="34" charset="0"/>
-              </a:rPr>
-              <a:t>–</a:t>
-            </a:r>
-            <a:r>
-              <a:rPr kumimoji="1" lang="zh-CN" altLang="en-US" sz="2000" dirty="0">
-                <a:latin typeface="Arial" panose="020B0604020202020204" pitchFamily="34" charset="0"/>
-                <a:cs typeface="Arial" panose="020B0604020202020204" pitchFamily="34" charset="0"/>
-              </a:rPr>
-              <a:t> </a:t>
-            </a:r>
-            <a:r>
-              <a:rPr kumimoji="1" lang="en-US" altLang="zh-CN" sz="2000" dirty="0">
-                <a:latin typeface="Arial" panose="020B0604020202020204" pitchFamily="34" charset="0"/>
-                <a:cs typeface="Arial" panose="020B0604020202020204" pitchFamily="34" charset="0"/>
-              </a:rPr>
-              <a:t>Size</a:t>
-            </a:r>
-            <a:r>
-              <a:rPr kumimoji="1" lang="zh-CN" altLang="en-US" sz="2000" dirty="0">
-                <a:latin typeface="Arial" panose="020B0604020202020204" pitchFamily="34" charset="0"/>
-                <a:cs typeface="Arial" panose="020B0604020202020204" pitchFamily="34" charset="0"/>
-              </a:rPr>
-              <a:t> </a:t>
-            </a:r>
-            <a:r>
-              <a:rPr kumimoji="1" lang="en-US" altLang="zh-CN" sz="2000" dirty="0">
-                <a:latin typeface="Arial" panose="020B0604020202020204" pitchFamily="34" charset="0"/>
-                <a:cs typeface="Arial" panose="020B0604020202020204" pitchFamily="34" charset="0"/>
-              </a:rPr>
-              <a:t>(N=4633)</a:t>
-            </a:r>
-            <a:endParaRPr kumimoji="1" lang="zh-CN" altLang="en-US" sz="2000" dirty="0">
+              <a:rPr kumimoji="1" lang="en-US" altLang="zh-CN" sz="2400" dirty="0">
+                <a:latin typeface="Arial" panose="020B0604020202020204" pitchFamily="34" charset="0"/>
+                <a:cs typeface="Arial" panose="020B0604020202020204" pitchFamily="34" charset="0"/>
+              </a:rPr>
+              <a:t>Density</a:t>
+            </a:r>
+            <a:endParaRPr kumimoji="1" lang="zh-CN" altLang="en-US" sz="2400" dirty="0">
               <a:latin typeface="Arial" panose="020B0604020202020204" pitchFamily="34" charset="0"/>
               <a:cs typeface="Arial" panose="020B0604020202020204" pitchFamily="34" charset="0"/>
             </a:endParaRPr>
@@ -4324,10 +5697,10 @@
       </p:sp>
       <p:sp>
         <p:nvSpPr>
-          <p:cNvPr id="38" name="文本框 37">
+          <p:cNvPr id="84" name="文本框 83">
             <a:extLst>
               <a:ext uri="{FF2B5EF4-FFF2-40B4-BE49-F238E27FC236}">
-                <a16:creationId xmlns:a16="http://schemas.microsoft.com/office/drawing/2014/main" id="{7A8FE8D2-D0E1-6817-C44B-C8DDEA1F7B93}"/>
+                <a16:creationId xmlns:a16="http://schemas.microsoft.com/office/drawing/2014/main" id="{2EBA0AF1-5163-3477-B539-E6D5E1D2F903}"/>
               </a:ext>
             </a:extLst>
           </p:cNvPr>
@@ -4336,8 +5709,8 @@
         </p:nvSpPr>
         <p:spPr>
           <a:xfrm>
-            <a:off x="1792503" y="5210014"/>
-            <a:ext cx="4320000" cy="400110"/>
+            <a:off x="11868689" y="11140579"/>
+            <a:ext cx="4320000" cy="461665"/>
           </a:xfrm>
           <a:prstGeom prst="rect">
             <a:avLst/>
@@ -4352,48 +5725,55 @@
           <a:p>
             <a:pPr algn="ctr"/>
             <a:r>
-              <a:rPr kumimoji="1" lang="en-US" altLang="zh-CN" sz="2000" dirty="0" err="1">
-                <a:latin typeface="Arial" panose="020B0604020202020204" pitchFamily="34" charset="0"/>
-                <a:cs typeface="Arial" panose="020B0604020202020204" pitchFamily="34" charset="0"/>
-              </a:rPr>
-              <a:t>ThyroidXL</a:t>
-            </a:r>
-            <a:r>
-              <a:rPr kumimoji="1" lang="en-US" altLang="zh-CN" sz="2000" dirty="0">
+              <a:rPr kumimoji="1" lang="en-US" altLang="zh-CN" sz="2400" dirty="0" err="1">
+                <a:latin typeface="Arial" panose="020B0604020202020204" pitchFamily="34" charset="0"/>
+                <a:cs typeface="Arial" panose="020B0604020202020204" pitchFamily="34" charset="0"/>
+              </a:rPr>
+              <a:t>Augtrain</a:t>
+            </a:r>
+            <a:r>
+              <a:rPr kumimoji="1" lang="zh-CN" altLang="en-US" sz="2400" dirty="0">
+                <a:latin typeface="Arial" panose="020B0604020202020204" pitchFamily="34" charset="0"/>
+                <a:cs typeface="Arial" panose="020B0604020202020204" pitchFamily="34" charset="0"/>
+              </a:rPr>
+              <a:t> </a:t>
+            </a:r>
+            <a:r>
+              <a:rPr kumimoji="1" lang="en-US" altLang="zh-CN" sz="2400" dirty="0">
                 <a:latin typeface="Arial" panose="020B0604020202020204" pitchFamily="34" charset="0"/>
                 <a:cs typeface="Arial" panose="020B0604020202020204" pitchFamily="34" charset="0"/>
               </a:rPr>
               <a:t>–</a:t>
             </a:r>
             <a:r>
-              <a:rPr kumimoji="1" lang="zh-CN" altLang="en-US" sz="2000" dirty="0">
+              <a:rPr kumimoji="1" lang="zh-CN" altLang="en-US" sz="2400" dirty="0">
                 <a:latin typeface="Arial" panose="020B0604020202020204" pitchFamily="34" charset="0"/>
                 <a:cs typeface="Arial" panose="020B0604020202020204" pitchFamily="34" charset="0"/>
               </a:rPr>
               <a:t> </a:t>
             </a:r>
             <a:r>
-              <a:rPr kumimoji="1" lang="en-US" altLang="zh-CN" sz="2000" dirty="0">
+              <a:rPr kumimoji="1" lang="en-US" altLang="zh-CN" sz="2400" dirty="0">
                 <a:latin typeface="Arial" panose="020B0604020202020204" pitchFamily="34" charset="0"/>
                 <a:cs typeface="Arial" panose="020B0604020202020204" pitchFamily="34" charset="0"/>
               </a:rPr>
               <a:t>Position</a:t>
             </a:r>
             <a:r>
-              <a:rPr kumimoji="1" lang="zh-CN" altLang="en-US" sz="2000" dirty="0">
+              <a:rPr kumimoji="1" lang="zh-CN" altLang="en-US" sz="2400" dirty="0">
                 <a:latin typeface="Arial" panose="020B0604020202020204" pitchFamily="34" charset="0"/>
                 <a:cs typeface="Arial" panose="020B0604020202020204" pitchFamily="34" charset="0"/>
               </a:rPr>
               <a:t> </a:t>
             </a:r>
             <a:r>
-              <a:rPr kumimoji="1" lang="en-US" altLang="zh-CN" sz="2000" dirty="0">
-                <a:latin typeface="Arial" panose="020B0604020202020204" pitchFamily="34" charset="0"/>
-                <a:cs typeface="Arial" panose="020B0604020202020204" pitchFamily="34" charset="0"/>
-              </a:rPr>
-              <a:t>(N=4633)</a:t>
-            </a:r>
-            <a:endParaRPr kumimoji="1" lang="zh-CN" altLang="en-US" sz="2000" dirty="0">
+              <a:rPr kumimoji="1" lang="en-US" altLang="zh-CN" sz="2400" dirty="0">
+                <a:latin typeface="Arial" panose="020B0604020202020204" pitchFamily="34" charset="0"/>
+                <a:cs typeface="Arial" panose="020B0604020202020204" pitchFamily="34" charset="0"/>
+              </a:rPr>
+              <a:t>(N=7288)</a:t>
+            </a:r>
+            <a:endParaRPr kumimoji="1" lang="zh-CN" altLang="en-US" sz="2400" dirty="0">
               <a:latin typeface="Arial" panose="020B0604020202020204" pitchFamily="34" charset="0"/>
               <a:cs typeface="Arial" panose="020B0604020202020204" pitchFamily="34" charset="0"/>
             </a:endParaRPr>
@@ -4402,10 +5782,10 @@
       </p:sp>
       <p:sp>
         <p:nvSpPr>
-          <p:cNvPr id="39" name="文本框 38">
+          <p:cNvPr id="85" name="文本框 84">
             <a:extLst>
               <a:ext uri="{FF2B5EF4-FFF2-40B4-BE49-F238E27FC236}">
-                <a16:creationId xmlns:a16="http://schemas.microsoft.com/office/drawing/2014/main" id="{F858EA0E-0D76-BEBF-2622-01801FA274AF}"/>
+                <a16:creationId xmlns:a16="http://schemas.microsoft.com/office/drawing/2014/main" id="{C0F41947-9407-AF6A-9422-40D2542E8083}"/>
               </a:ext>
             </a:extLst>
           </p:cNvPr>
@@ -4413,9 +5793,9 @@
           <p:nvPr/>
         </p:nvSpPr>
         <p:spPr>
-          <a:xfrm rot="16200000">
-            <a:off x="-474269" y="7269847"/>
-            <a:ext cx="4320000" cy="400110"/>
+          <a:xfrm>
+            <a:off x="16733156" y="11140579"/>
+            <a:ext cx="4320000" cy="461665"/>
           </a:xfrm>
           <a:prstGeom prst="rect">
             <a:avLst/>
@@ -4430,1421 +5810,55 @@
           <a:p>
             <a:pPr algn="ctr"/>
             <a:r>
-              <a:rPr kumimoji="1" lang="en-US" altLang="zh-CN" sz="2000" dirty="0">
-                <a:latin typeface="Arial" panose="020B0604020202020204" pitchFamily="34" charset="0"/>
-                <a:cs typeface="Arial" panose="020B0604020202020204" pitchFamily="34" charset="0"/>
-              </a:rPr>
-              <a:t>Pos</a:t>
-            </a:r>
-            <a:r>
-              <a:rPr kumimoji="1" lang="zh-CN" altLang="en-US" sz="2000" dirty="0">
+              <a:rPr kumimoji="1" lang="en-US" altLang="zh-CN" sz="2400" dirty="0" err="1">
+                <a:latin typeface="Arial" panose="020B0604020202020204" pitchFamily="34" charset="0"/>
+                <a:cs typeface="Arial" panose="020B0604020202020204" pitchFamily="34" charset="0"/>
+              </a:rPr>
+              <a:t>Augtrain</a:t>
+            </a:r>
+            <a:r>
+              <a:rPr kumimoji="1" lang="zh-CN" altLang="en-US" sz="2400" dirty="0">
                 <a:latin typeface="Arial" panose="020B0604020202020204" pitchFamily="34" charset="0"/>
                 <a:cs typeface="Arial" panose="020B0604020202020204" pitchFamily="34" charset="0"/>
               </a:rPr>
               <a:t> </a:t>
             </a:r>
             <a:r>
-              <a:rPr kumimoji="1" lang="en-US" altLang="zh-CN" sz="2000" dirty="0">
-                <a:latin typeface="Arial" panose="020B0604020202020204" pitchFamily="34" charset="0"/>
-                <a:cs typeface="Arial" panose="020B0604020202020204" pitchFamily="34" charset="0"/>
-              </a:rPr>
-              <a:t>y</a:t>
-            </a:r>
-            <a:endParaRPr kumimoji="1" lang="zh-CN" altLang="en-US" sz="2000" dirty="0">
-              <a:latin typeface="Arial" panose="020B0604020202020204" pitchFamily="34" charset="0"/>
-              <a:cs typeface="Arial" panose="020B0604020202020204" pitchFamily="34" charset="0"/>
-            </a:endParaRPr>
-          </a:p>
-        </p:txBody>
-      </p:sp>
-      <p:sp>
-        <p:nvSpPr>
-          <p:cNvPr id="41" name="文本框 40">
-            <a:extLst>
-              <a:ext uri="{FF2B5EF4-FFF2-40B4-BE49-F238E27FC236}">
-                <a16:creationId xmlns:a16="http://schemas.microsoft.com/office/drawing/2014/main" id="{AAE4E19F-E5E0-D0B0-A1C3-A22D62BF0AAB}"/>
-              </a:ext>
-            </a:extLst>
-          </p:cNvPr>
-          <p:cNvSpPr txBox="1"/>
-          <p:nvPr/>
-        </p:nvSpPr>
-        <p:spPr>
-          <a:xfrm>
-            <a:off x="1792502" y="9656647"/>
-            <a:ext cx="4320000" cy="400110"/>
-          </a:xfrm>
-          <a:prstGeom prst="rect">
-            <a:avLst/>
-          </a:prstGeom>
-          <a:noFill/>
-        </p:spPr>
-        <p:txBody>
-          <a:bodyPr wrap="square" rtlCol="0">
-            <a:spAutoFit/>
-          </a:bodyPr>
-          <a:lstStyle/>
-          <a:p>
-            <a:pPr algn="ctr"/>
-            <a:r>
-              <a:rPr kumimoji="1" lang="en-US" altLang="zh-CN" sz="2000" dirty="0">
-                <a:latin typeface="Arial" panose="020B0604020202020204" pitchFamily="34" charset="0"/>
-                <a:cs typeface="Arial" panose="020B0604020202020204" pitchFamily="34" charset="0"/>
-              </a:rPr>
-              <a:t>Pos</a:t>
-            </a:r>
-            <a:r>
-              <a:rPr kumimoji="1" lang="zh-CN" altLang="en-US" sz="2000" dirty="0">
+              <a:rPr kumimoji="1" lang="en-US" altLang="zh-CN" sz="2400" dirty="0">
+                <a:latin typeface="Arial" panose="020B0604020202020204" pitchFamily="34" charset="0"/>
+                <a:cs typeface="Arial" panose="020B0604020202020204" pitchFamily="34" charset="0"/>
+              </a:rPr>
+              <a:t>–</a:t>
+            </a:r>
+            <a:r>
+              <a:rPr kumimoji="1" lang="zh-CN" altLang="en-US" sz="2400" dirty="0">
                 <a:latin typeface="Arial" panose="020B0604020202020204" pitchFamily="34" charset="0"/>
                 <a:cs typeface="Arial" panose="020B0604020202020204" pitchFamily="34" charset="0"/>
               </a:rPr>
               <a:t> </a:t>
             </a:r>
             <a:r>
-              <a:rPr kumimoji="1" lang="en-US" altLang="zh-CN" sz="2000" dirty="0">
-                <a:latin typeface="Arial" panose="020B0604020202020204" pitchFamily="34" charset="0"/>
-                <a:cs typeface="Arial" panose="020B0604020202020204" pitchFamily="34" charset="0"/>
-              </a:rPr>
-              <a:t>x</a:t>
-            </a:r>
-            <a:endParaRPr kumimoji="1" lang="zh-CN" altLang="en-US" sz="2000" dirty="0">
-              <a:latin typeface="Arial" panose="020B0604020202020204" pitchFamily="34" charset="0"/>
-              <a:cs typeface="Arial" panose="020B0604020202020204" pitchFamily="34" charset="0"/>
-            </a:endParaRPr>
-          </a:p>
-        </p:txBody>
-      </p:sp>
-      <p:sp>
-        <p:nvSpPr>
-          <p:cNvPr id="43" name="文本框 42">
-            <a:extLst>
-              <a:ext uri="{FF2B5EF4-FFF2-40B4-BE49-F238E27FC236}">
-                <a16:creationId xmlns:a16="http://schemas.microsoft.com/office/drawing/2014/main" id="{280EE2D3-ED69-4B75-9B74-FD7776BC2883}"/>
-              </a:ext>
-            </a:extLst>
-          </p:cNvPr>
-          <p:cNvSpPr txBox="1"/>
-          <p:nvPr/>
-        </p:nvSpPr>
-        <p:spPr>
-          <a:xfrm>
-            <a:off x="6656970" y="9656960"/>
-            <a:ext cx="4320000" cy="400110"/>
-          </a:xfrm>
-          <a:prstGeom prst="rect">
-            <a:avLst/>
-          </a:prstGeom>
-          <a:noFill/>
-        </p:spPr>
-        <p:txBody>
-          <a:bodyPr wrap="square" rtlCol="0">
-            <a:spAutoFit/>
-          </a:bodyPr>
-          <a:lstStyle/>
-          <a:p>
-            <a:pPr algn="ctr"/>
-            <a:r>
-              <a:rPr kumimoji="1" lang="en-US" altLang="zh-CN" sz="2000" dirty="0">
-                <a:latin typeface="Arial" panose="020B0604020202020204" pitchFamily="34" charset="0"/>
-                <a:cs typeface="Arial" panose="020B0604020202020204" pitchFamily="34" charset="0"/>
-              </a:rPr>
-              <a:t>Relative</a:t>
-            </a:r>
-            <a:r>
-              <a:rPr kumimoji="1" lang="zh-CN" altLang="en-US" sz="2000" dirty="0">
+              <a:rPr kumimoji="1" lang="en-US" altLang="zh-CN" sz="2400" dirty="0">
+                <a:latin typeface="Arial" panose="020B0604020202020204" pitchFamily="34" charset="0"/>
+                <a:cs typeface="Arial" panose="020B0604020202020204" pitchFamily="34" charset="0"/>
+              </a:rPr>
+              <a:t>Size</a:t>
+            </a:r>
+            <a:r>
+              <a:rPr kumimoji="1" lang="zh-CN" altLang="en-US" sz="2400" dirty="0">
                 <a:latin typeface="Arial" panose="020B0604020202020204" pitchFamily="34" charset="0"/>
                 <a:cs typeface="Arial" panose="020B0604020202020204" pitchFamily="34" charset="0"/>
               </a:rPr>
               <a:t> </a:t>
             </a:r>
             <a:r>
-              <a:rPr kumimoji="1" lang="en-US" altLang="zh-CN" sz="2000" dirty="0">
-                <a:latin typeface="Arial" panose="020B0604020202020204" pitchFamily="34" charset="0"/>
-                <a:cs typeface="Arial" panose="020B0604020202020204" pitchFamily="34" charset="0"/>
-              </a:rPr>
-              <a:t>size</a:t>
-            </a:r>
-            <a:endParaRPr kumimoji="1" lang="zh-CN" altLang="en-US" sz="2000" dirty="0">
-              <a:latin typeface="Arial" panose="020B0604020202020204" pitchFamily="34" charset="0"/>
-              <a:cs typeface="Arial" panose="020B0604020202020204" pitchFamily="34" charset="0"/>
-            </a:endParaRPr>
-          </a:p>
-        </p:txBody>
-      </p:sp>
-      <p:sp>
-        <p:nvSpPr>
-          <p:cNvPr id="44" name="文本框 43">
-            <a:extLst>
-              <a:ext uri="{FF2B5EF4-FFF2-40B4-BE49-F238E27FC236}">
-                <a16:creationId xmlns:a16="http://schemas.microsoft.com/office/drawing/2014/main" id="{5BE37944-3F83-AC3C-5DFC-CB8F36C15C6E}"/>
-              </a:ext>
-            </a:extLst>
-          </p:cNvPr>
-          <p:cNvSpPr txBox="1"/>
-          <p:nvPr/>
-        </p:nvSpPr>
-        <p:spPr>
-          <a:xfrm>
-            <a:off x="6658270" y="5210960"/>
-            <a:ext cx="4320000" cy="400110"/>
-          </a:xfrm>
-          <a:prstGeom prst="rect">
-            <a:avLst/>
-          </a:prstGeom>
-          <a:noFill/>
-        </p:spPr>
-        <p:txBody>
-          <a:bodyPr wrap="square" rtlCol="0">
-            <a:spAutoFit/>
-          </a:bodyPr>
-          <a:lstStyle/>
-          <a:p>
-            <a:pPr algn="ctr"/>
-            <a:r>
-              <a:rPr kumimoji="1" lang="en-US" altLang="zh-CN" sz="2000" dirty="0" err="1">
-                <a:latin typeface="Arial" panose="020B0604020202020204" pitchFamily="34" charset="0"/>
-                <a:cs typeface="Arial" panose="020B0604020202020204" pitchFamily="34" charset="0"/>
-              </a:rPr>
-              <a:t>ThyroidXL</a:t>
-            </a:r>
-            <a:r>
-              <a:rPr kumimoji="1" lang="zh-CN" altLang="en-US" sz="2000" dirty="0">
-                <a:latin typeface="Arial" panose="020B0604020202020204" pitchFamily="34" charset="0"/>
-                <a:cs typeface="Arial" panose="020B0604020202020204" pitchFamily="34" charset="0"/>
-              </a:rPr>
-              <a:t> </a:t>
-            </a:r>
-            <a:r>
-              <a:rPr kumimoji="1" lang="en-US" altLang="zh-CN" sz="2000" dirty="0">
-                <a:latin typeface="Arial" panose="020B0604020202020204" pitchFamily="34" charset="0"/>
-                <a:cs typeface="Arial" panose="020B0604020202020204" pitchFamily="34" charset="0"/>
-              </a:rPr>
-              <a:t>–</a:t>
-            </a:r>
-            <a:r>
-              <a:rPr kumimoji="1" lang="zh-CN" altLang="en-US" sz="2000" dirty="0">
-                <a:latin typeface="Arial" panose="020B0604020202020204" pitchFamily="34" charset="0"/>
-                <a:cs typeface="Arial" panose="020B0604020202020204" pitchFamily="34" charset="0"/>
-              </a:rPr>
-              <a:t> </a:t>
-            </a:r>
-            <a:r>
-              <a:rPr kumimoji="1" lang="en-US" altLang="zh-CN" sz="2000" dirty="0">
-                <a:latin typeface="Arial" panose="020B0604020202020204" pitchFamily="34" charset="0"/>
-                <a:cs typeface="Arial" panose="020B0604020202020204" pitchFamily="34" charset="0"/>
-              </a:rPr>
-              <a:t>Size</a:t>
-            </a:r>
-            <a:r>
-              <a:rPr kumimoji="1" lang="zh-CN" altLang="en-US" sz="2000" dirty="0">
-                <a:latin typeface="Arial" panose="020B0604020202020204" pitchFamily="34" charset="0"/>
-                <a:cs typeface="Arial" panose="020B0604020202020204" pitchFamily="34" charset="0"/>
-              </a:rPr>
-              <a:t> </a:t>
-            </a:r>
-            <a:r>
-              <a:rPr kumimoji="1" lang="en-US" altLang="zh-CN" sz="2000" dirty="0">
-                <a:latin typeface="Arial" panose="020B0604020202020204" pitchFamily="34" charset="0"/>
-                <a:cs typeface="Arial" panose="020B0604020202020204" pitchFamily="34" charset="0"/>
-              </a:rPr>
-              <a:t>(N=4633)</a:t>
-            </a:r>
-            <a:endParaRPr kumimoji="1" lang="zh-CN" altLang="en-US" sz="2000" dirty="0">
-              <a:latin typeface="Arial" panose="020B0604020202020204" pitchFamily="34" charset="0"/>
-              <a:cs typeface="Arial" panose="020B0604020202020204" pitchFamily="34" charset="0"/>
-            </a:endParaRPr>
-          </a:p>
-        </p:txBody>
-      </p:sp>
-      <p:sp>
-        <p:nvSpPr>
-          <p:cNvPr id="45" name="文本框 44">
-            <a:extLst>
-              <a:ext uri="{FF2B5EF4-FFF2-40B4-BE49-F238E27FC236}">
-                <a16:creationId xmlns:a16="http://schemas.microsoft.com/office/drawing/2014/main" id="{B300CFFF-215A-8116-9303-9F346DB2A244}"/>
-              </a:ext>
-            </a:extLst>
-          </p:cNvPr>
-          <p:cNvSpPr txBox="1"/>
-          <p:nvPr/>
-        </p:nvSpPr>
-        <p:spPr>
-          <a:xfrm rot="16200000">
-            <a:off x="4152557" y="7270160"/>
-            <a:ext cx="4320000" cy="400110"/>
-          </a:xfrm>
-          <a:prstGeom prst="rect">
-            <a:avLst/>
-          </a:prstGeom>
-          <a:noFill/>
-        </p:spPr>
-        <p:txBody>
-          <a:bodyPr wrap="square" rtlCol="0">
-            <a:spAutoFit/>
-          </a:bodyPr>
-          <a:lstStyle/>
-          <a:p>
-            <a:pPr algn="ctr"/>
-            <a:r>
-              <a:rPr kumimoji="1" lang="en-US" altLang="zh-CN" sz="2000" dirty="0">
-                <a:latin typeface="Arial" panose="020B0604020202020204" pitchFamily="34" charset="0"/>
-                <a:cs typeface="Arial" panose="020B0604020202020204" pitchFamily="34" charset="0"/>
-              </a:rPr>
-              <a:t>Density</a:t>
-            </a:r>
-            <a:endParaRPr kumimoji="1" lang="zh-CN" altLang="en-US" sz="2000" dirty="0">
-              <a:latin typeface="Arial" panose="020B0604020202020204" pitchFamily="34" charset="0"/>
-              <a:cs typeface="Arial" panose="020B0604020202020204" pitchFamily="34" charset="0"/>
-            </a:endParaRPr>
-          </a:p>
-        </p:txBody>
-      </p:sp>
-      <p:sp>
-        <p:nvSpPr>
-          <p:cNvPr id="48" name="文本框 47">
-            <a:extLst>
-              <a:ext uri="{FF2B5EF4-FFF2-40B4-BE49-F238E27FC236}">
-                <a16:creationId xmlns:a16="http://schemas.microsoft.com/office/drawing/2014/main" id="{958EE90C-5C82-6FB2-500D-8C0612318D6B}"/>
-              </a:ext>
-            </a:extLst>
-          </p:cNvPr>
-          <p:cNvSpPr txBox="1"/>
-          <p:nvPr/>
-        </p:nvSpPr>
-        <p:spPr>
-          <a:xfrm>
-            <a:off x="11927684" y="9656960"/>
-            <a:ext cx="4320000" cy="400110"/>
-          </a:xfrm>
-          <a:prstGeom prst="rect">
-            <a:avLst/>
-          </a:prstGeom>
-          <a:noFill/>
-        </p:spPr>
-        <p:txBody>
-          <a:bodyPr wrap="square" rtlCol="0">
-            <a:spAutoFit/>
-          </a:bodyPr>
-          <a:lstStyle/>
-          <a:p>
-            <a:pPr algn="ctr"/>
-            <a:r>
-              <a:rPr kumimoji="1" lang="en-US" altLang="zh-CN" sz="2000" dirty="0">
-                <a:latin typeface="Arial" panose="020B0604020202020204" pitchFamily="34" charset="0"/>
-                <a:cs typeface="Arial" panose="020B0604020202020204" pitchFamily="34" charset="0"/>
-              </a:rPr>
-              <a:t>Pos</a:t>
-            </a:r>
-            <a:r>
-              <a:rPr kumimoji="1" lang="zh-CN" altLang="en-US" sz="2000" dirty="0">
-                <a:latin typeface="Arial" panose="020B0604020202020204" pitchFamily="34" charset="0"/>
-                <a:cs typeface="Arial" panose="020B0604020202020204" pitchFamily="34" charset="0"/>
-              </a:rPr>
-              <a:t> </a:t>
-            </a:r>
-            <a:r>
-              <a:rPr kumimoji="1" lang="en-US" altLang="zh-CN" sz="2000" dirty="0">
-                <a:latin typeface="Arial" panose="020B0604020202020204" pitchFamily="34" charset="0"/>
-                <a:cs typeface="Arial" panose="020B0604020202020204" pitchFamily="34" charset="0"/>
-              </a:rPr>
-              <a:t>x</a:t>
-            </a:r>
-            <a:endParaRPr kumimoji="1" lang="zh-CN" altLang="en-US" sz="2000" dirty="0">
-              <a:latin typeface="Arial" panose="020B0604020202020204" pitchFamily="34" charset="0"/>
-              <a:cs typeface="Arial" panose="020B0604020202020204" pitchFamily="34" charset="0"/>
-            </a:endParaRPr>
-          </a:p>
-        </p:txBody>
-      </p:sp>
-      <p:sp>
-        <p:nvSpPr>
-          <p:cNvPr id="49" name="文本框 48">
-            <a:extLst>
-              <a:ext uri="{FF2B5EF4-FFF2-40B4-BE49-F238E27FC236}">
-                <a16:creationId xmlns:a16="http://schemas.microsoft.com/office/drawing/2014/main" id="{8FFEC03E-F606-B11D-FF3F-24FAF64A055C}"/>
-              </a:ext>
-            </a:extLst>
-          </p:cNvPr>
-          <p:cNvSpPr txBox="1"/>
-          <p:nvPr/>
-        </p:nvSpPr>
-        <p:spPr>
-          <a:xfrm>
-            <a:off x="16792152" y="9656960"/>
-            <a:ext cx="4320000" cy="400110"/>
-          </a:xfrm>
-          <a:prstGeom prst="rect">
-            <a:avLst/>
-          </a:prstGeom>
-          <a:noFill/>
-        </p:spPr>
-        <p:txBody>
-          <a:bodyPr wrap="square" rtlCol="0">
-            <a:spAutoFit/>
-          </a:bodyPr>
-          <a:lstStyle/>
-          <a:p>
-            <a:pPr algn="ctr"/>
-            <a:r>
-              <a:rPr kumimoji="1" lang="en-US" altLang="zh-CN" sz="2000" dirty="0">
-                <a:latin typeface="Arial" panose="020B0604020202020204" pitchFamily="34" charset="0"/>
-                <a:cs typeface="Arial" panose="020B0604020202020204" pitchFamily="34" charset="0"/>
-              </a:rPr>
-              <a:t>Relative</a:t>
-            </a:r>
-            <a:r>
-              <a:rPr kumimoji="1" lang="zh-CN" altLang="en-US" sz="2000" dirty="0">
-                <a:latin typeface="Arial" panose="020B0604020202020204" pitchFamily="34" charset="0"/>
-                <a:cs typeface="Arial" panose="020B0604020202020204" pitchFamily="34" charset="0"/>
-              </a:rPr>
-              <a:t> </a:t>
-            </a:r>
-            <a:r>
-              <a:rPr kumimoji="1" lang="en-US" altLang="zh-CN" sz="2000" dirty="0">
-                <a:latin typeface="Arial" panose="020B0604020202020204" pitchFamily="34" charset="0"/>
-                <a:cs typeface="Arial" panose="020B0604020202020204" pitchFamily="34" charset="0"/>
-              </a:rPr>
-              <a:t>size</a:t>
-            </a:r>
-            <a:endParaRPr kumimoji="1" lang="zh-CN" altLang="en-US" sz="2000" dirty="0">
-              <a:latin typeface="Arial" panose="020B0604020202020204" pitchFamily="34" charset="0"/>
-              <a:cs typeface="Arial" panose="020B0604020202020204" pitchFamily="34" charset="0"/>
-            </a:endParaRPr>
-          </a:p>
-        </p:txBody>
-      </p:sp>
-      <p:sp>
-        <p:nvSpPr>
-          <p:cNvPr id="50" name="文本框 49">
-            <a:extLst>
-              <a:ext uri="{FF2B5EF4-FFF2-40B4-BE49-F238E27FC236}">
-                <a16:creationId xmlns:a16="http://schemas.microsoft.com/office/drawing/2014/main" id="{6803135B-339C-C40D-4EBE-8DAA2BF8F991}"/>
-              </a:ext>
-            </a:extLst>
-          </p:cNvPr>
-          <p:cNvSpPr txBox="1"/>
-          <p:nvPr/>
-        </p:nvSpPr>
-        <p:spPr>
-          <a:xfrm rot="16200000">
-            <a:off x="9405343" y="7270160"/>
-            <a:ext cx="4320000" cy="400110"/>
-          </a:xfrm>
-          <a:prstGeom prst="rect">
-            <a:avLst/>
-          </a:prstGeom>
-          <a:noFill/>
-        </p:spPr>
-        <p:txBody>
-          <a:bodyPr wrap="square" rtlCol="0">
-            <a:spAutoFit/>
-          </a:bodyPr>
-          <a:lstStyle/>
-          <a:p>
-            <a:pPr algn="ctr"/>
-            <a:r>
-              <a:rPr kumimoji="1" lang="en-US" altLang="zh-CN" sz="2000" dirty="0">
-                <a:latin typeface="Arial" panose="020B0604020202020204" pitchFamily="34" charset="0"/>
-                <a:cs typeface="Arial" panose="020B0604020202020204" pitchFamily="34" charset="0"/>
-              </a:rPr>
-              <a:t>Pos</a:t>
-            </a:r>
-            <a:r>
-              <a:rPr kumimoji="1" lang="zh-CN" altLang="en-US" sz="2000" dirty="0">
-                <a:latin typeface="Arial" panose="020B0604020202020204" pitchFamily="34" charset="0"/>
-                <a:cs typeface="Arial" panose="020B0604020202020204" pitchFamily="34" charset="0"/>
-              </a:rPr>
-              <a:t> </a:t>
-            </a:r>
-            <a:r>
-              <a:rPr kumimoji="1" lang="en-US" altLang="zh-CN" sz="2000" dirty="0">
-                <a:latin typeface="Arial" panose="020B0604020202020204" pitchFamily="34" charset="0"/>
-                <a:cs typeface="Arial" panose="020B0604020202020204" pitchFamily="34" charset="0"/>
-              </a:rPr>
-              <a:t>y</a:t>
-            </a:r>
-            <a:endParaRPr kumimoji="1" lang="zh-CN" altLang="en-US" sz="2000" dirty="0">
-              <a:latin typeface="Arial" panose="020B0604020202020204" pitchFamily="34" charset="0"/>
-              <a:cs typeface="Arial" panose="020B0604020202020204" pitchFamily="34" charset="0"/>
-            </a:endParaRPr>
-          </a:p>
-        </p:txBody>
-      </p:sp>
-      <p:sp>
-        <p:nvSpPr>
-          <p:cNvPr id="51" name="文本框 50">
-            <a:extLst>
-              <a:ext uri="{FF2B5EF4-FFF2-40B4-BE49-F238E27FC236}">
-                <a16:creationId xmlns:a16="http://schemas.microsoft.com/office/drawing/2014/main" id="{38DBEA47-2D3F-5D7F-2AE3-6762FBAD2452}"/>
-              </a:ext>
-            </a:extLst>
-          </p:cNvPr>
-          <p:cNvSpPr txBox="1"/>
-          <p:nvPr/>
-        </p:nvSpPr>
-        <p:spPr>
-          <a:xfrm rot="16200000">
-            <a:off x="14032169" y="7270160"/>
-            <a:ext cx="4320000" cy="400110"/>
-          </a:xfrm>
-          <a:prstGeom prst="rect">
-            <a:avLst/>
-          </a:prstGeom>
-          <a:noFill/>
-        </p:spPr>
-        <p:txBody>
-          <a:bodyPr wrap="square" rtlCol="0">
-            <a:spAutoFit/>
-          </a:bodyPr>
-          <a:lstStyle/>
-          <a:p>
-            <a:pPr algn="ctr"/>
-            <a:r>
-              <a:rPr kumimoji="1" lang="en-US" altLang="zh-CN" sz="2000" dirty="0">
-                <a:latin typeface="Arial" panose="020B0604020202020204" pitchFamily="34" charset="0"/>
-                <a:cs typeface="Arial" panose="020B0604020202020204" pitchFamily="34" charset="0"/>
-              </a:rPr>
-              <a:t>Density</a:t>
-            </a:r>
-            <a:endParaRPr kumimoji="1" lang="zh-CN" altLang="en-US" sz="2000" dirty="0">
-              <a:latin typeface="Arial" panose="020B0604020202020204" pitchFamily="34" charset="0"/>
-              <a:cs typeface="Arial" panose="020B0604020202020204" pitchFamily="34" charset="0"/>
-            </a:endParaRPr>
-          </a:p>
-        </p:txBody>
-      </p:sp>
-      <p:sp>
-        <p:nvSpPr>
-          <p:cNvPr id="52" name="文本框 51">
-            <a:extLst>
-              <a:ext uri="{FF2B5EF4-FFF2-40B4-BE49-F238E27FC236}">
-                <a16:creationId xmlns:a16="http://schemas.microsoft.com/office/drawing/2014/main" id="{1811A470-BB0C-7C6A-463E-6ADE1832A91D}"/>
-              </a:ext>
-            </a:extLst>
-          </p:cNvPr>
-          <p:cNvSpPr txBox="1"/>
-          <p:nvPr/>
-        </p:nvSpPr>
-        <p:spPr>
-          <a:xfrm>
-            <a:off x="11927683" y="5210960"/>
-            <a:ext cx="4320000" cy="400110"/>
-          </a:xfrm>
-          <a:prstGeom prst="rect">
-            <a:avLst/>
-          </a:prstGeom>
-          <a:noFill/>
-        </p:spPr>
-        <p:txBody>
-          <a:bodyPr wrap="square" rtlCol="0">
-            <a:spAutoFit/>
-          </a:bodyPr>
-          <a:lstStyle/>
-          <a:p>
-            <a:pPr algn="ctr"/>
-            <a:r>
-              <a:rPr kumimoji="1" lang="en-US" altLang="zh-CN" sz="2000" dirty="0">
-                <a:latin typeface="Arial" panose="020B0604020202020204" pitchFamily="34" charset="0"/>
-                <a:cs typeface="Arial" panose="020B0604020202020204" pitchFamily="34" charset="0"/>
-              </a:rPr>
-              <a:t>PKTN</a:t>
-            </a:r>
-            <a:r>
-              <a:rPr kumimoji="1" lang="zh-CN" altLang="en-US" sz="2000" dirty="0">
-                <a:latin typeface="Arial" panose="020B0604020202020204" pitchFamily="34" charset="0"/>
-                <a:cs typeface="Arial" panose="020B0604020202020204" pitchFamily="34" charset="0"/>
-              </a:rPr>
-              <a:t> </a:t>
-            </a:r>
-            <a:r>
-              <a:rPr kumimoji="1" lang="en-US" altLang="zh-CN" sz="2000" dirty="0">
-                <a:latin typeface="Arial" panose="020B0604020202020204" pitchFamily="34" charset="0"/>
-                <a:cs typeface="Arial" panose="020B0604020202020204" pitchFamily="34" charset="0"/>
-              </a:rPr>
-              <a:t>–</a:t>
-            </a:r>
-            <a:r>
-              <a:rPr kumimoji="1" lang="zh-CN" altLang="en-US" sz="2000" dirty="0">
-                <a:latin typeface="Arial" panose="020B0604020202020204" pitchFamily="34" charset="0"/>
-                <a:cs typeface="Arial" panose="020B0604020202020204" pitchFamily="34" charset="0"/>
-              </a:rPr>
-              <a:t> </a:t>
-            </a:r>
-            <a:r>
-              <a:rPr kumimoji="1" lang="en-US" altLang="zh-CN" sz="2000" dirty="0">
-                <a:latin typeface="Arial" panose="020B0604020202020204" pitchFamily="34" charset="0"/>
-                <a:cs typeface="Arial" panose="020B0604020202020204" pitchFamily="34" charset="0"/>
-              </a:rPr>
-              <a:t>Position</a:t>
-            </a:r>
-            <a:r>
-              <a:rPr kumimoji="1" lang="zh-CN" altLang="en-US" sz="2000" dirty="0">
-                <a:latin typeface="Arial" panose="020B0604020202020204" pitchFamily="34" charset="0"/>
-                <a:cs typeface="Arial" panose="020B0604020202020204" pitchFamily="34" charset="0"/>
-              </a:rPr>
-              <a:t> </a:t>
-            </a:r>
-            <a:r>
-              <a:rPr kumimoji="1" lang="en-US" altLang="zh-CN" sz="2000" dirty="0">
-                <a:latin typeface="Arial" panose="020B0604020202020204" pitchFamily="34" charset="0"/>
-                <a:cs typeface="Arial" panose="020B0604020202020204" pitchFamily="34" charset="0"/>
-              </a:rPr>
-              <a:t>(N=4633)</a:t>
-            </a:r>
-            <a:endParaRPr kumimoji="1" lang="zh-CN" altLang="en-US" sz="2000" dirty="0">
-              <a:latin typeface="Arial" panose="020B0604020202020204" pitchFamily="34" charset="0"/>
-              <a:cs typeface="Arial" panose="020B0604020202020204" pitchFamily="34" charset="0"/>
-            </a:endParaRPr>
-          </a:p>
-        </p:txBody>
-      </p:sp>
-      <p:sp>
-        <p:nvSpPr>
-          <p:cNvPr id="53" name="文本框 52">
-            <a:extLst>
-              <a:ext uri="{FF2B5EF4-FFF2-40B4-BE49-F238E27FC236}">
-                <a16:creationId xmlns:a16="http://schemas.microsoft.com/office/drawing/2014/main" id="{246C74AA-55B3-502E-50BE-CD3B76DECFDC}"/>
-              </a:ext>
-            </a:extLst>
-          </p:cNvPr>
-          <p:cNvSpPr txBox="1"/>
-          <p:nvPr/>
-        </p:nvSpPr>
-        <p:spPr>
-          <a:xfrm>
-            <a:off x="16792150" y="5210960"/>
-            <a:ext cx="4320000" cy="400110"/>
-          </a:xfrm>
-          <a:prstGeom prst="rect">
-            <a:avLst/>
-          </a:prstGeom>
-          <a:noFill/>
-        </p:spPr>
-        <p:txBody>
-          <a:bodyPr wrap="square" rtlCol="0">
-            <a:spAutoFit/>
-          </a:bodyPr>
-          <a:lstStyle/>
-          <a:p>
-            <a:pPr algn="ctr"/>
-            <a:r>
-              <a:rPr kumimoji="1" lang="en-US" altLang="zh-CN" sz="2000" dirty="0">
-                <a:latin typeface="Arial" panose="020B0604020202020204" pitchFamily="34" charset="0"/>
-                <a:cs typeface="Arial" panose="020B0604020202020204" pitchFamily="34" charset="0"/>
-              </a:rPr>
-              <a:t>PKTN</a:t>
-            </a:r>
-            <a:r>
-              <a:rPr kumimoji="1" lang="zh-CN" altLang="en-US" sz="2000" dirty="0">
-                <a:latin typeface="Arial" panose="020B0604020202020204" pitchFamily="34" charset="0"/>
-                <a:cs typeface="Arial" panose="020B0604020202020204" pitchFamily="34" charset="0"/>
-              </a:rPr>
-              <a:t> </a:t>
-            </a:r>
-            <a:r>
-              <a:rPr kumimoji="1" lang="en-US" altLang="zh-CN" sz="2000" dirty="0">
-                <a:latin typeface="Arial" panose="020B0604020202020204" pitchFamily="34" charset="0"/>
-                <a:cs typeface="Arial" panose="020B0604020202020204" pitchFamily="34" charset="0"/>
-              </a:rPr>
-              <a:t>–</a:t>
-            </a:r>
-            <a:r>
-              <a:rPr kumimoji="1" lang="zh-CN" altLang="en-US" sz="2000" dirty="0">
-                <a:latin typeface="Arial" panose="020B0604020202020204" pitchFamily="34" charset="0"/>
-                <a:cs typeface="Arial" panose="020B0604020202020204" pitchFamily="34" charset="0"/>
-              </a:rPr>
-              <a:t> </a:t>
-            </a:r>
-            <a:r>
-              <a:rPr kumimoji="1" lang="en-US" altLang="zh-CN" sz="2000" dirty="0">
-                <a:latin typeface="Arial" panose="020B0604020202020204" pitchFamily="34" charset="0"/>
-                <a:cs typeface="Arial" panose="020B0604020202020204" pitchFamily="34" charset="0"/>
-              </a:rPr>
-              <a:t>Size</a:t>
-            </a:r>
-            <a:r>
-              <a:rPr kumimoji="1" lang="zh-CN" altLang="en-US" sz="2000" dirty="0">
-                <a:latin typeface="Arial" panose="020B0604020202020204" pitchFamily="34" charset="0"/>
-                <a:cs typeface="Arial" panose="020B0604020202020204" pitchFamily="34" charset="0"/>
-              </a:rPr>
-              <a:t> </a:t>
-            </a:r>
-            <a:r>
-              <a:rPr kumimoji="1" lang="en-US" altLang="zh-CN" sz="2000" dirty="0">
-                <a:latin typeface="Arial" panose="020B0604020202020204" pitchFamily="34" charset="0"/>
-                <a:cs typeface="Arial" panose="020B0604020202020204" pitchFamily="34" charset="0"/>
-              </a:rPr>
-              <a:t>(N=4633)</a:t>
-            </a:r>
-            <a:endParaRPr kumimoji="1" lang="zh-CN" altLang="en-US" sz="2000" dirty="0">
-              <a:latin typeface="Arial" panose="020B0604020202020204" pitchFamily="34" charset="0"/>
-              <a:cs typeface="Arial" panose="020B0604020202020204" pitchFamily="34" charset="0"/>
-            </a:endParaRPr>
-          </a:p>
-        </p:txBody>
-      </p:sp>
-      <p:sp>
-        <p:nvSpPr>
-          <p:cNvPr id="70" name="文本框 69">
-            <a:extLst>
-              <a:ext uri="{FF2B5EF4-FFF2-40B4-BE49-F238E27FC236}">
-                <a16:creationId xmlns:a16="http://schemas.microsoft.com/office/drawing/2014/main" id="{9CFCD99C-0E51-7097-8F14-0BB1F5583784}"/>
-              </a:ext>
-            </a:extLst>
-          </p:cNvPr>
-          <p:cNvSpPr txBox="1"/>
-          <p:nvPr/>
-        </p:nvSpPr>
-        <p:spPr>
-          <a:xfrm>
-            <a:off x="1792503" y="10227821"/>
-            <a:ext cx="4320000" cy="400110"/>
-          </a:xfrm>
-          <a:prstGeom prst="rect">
-            <a:avLst/>
-          </a:prstGeom>
-          <a:noFill/>
-        </p:spPr>
-        <p:txBody>
-          <a:bodyPr wrap="square" rtlCol="0">
-            <a:spAutoFit/>
-          </a:bodyPr>
-          <a:lstStyle/>
-          <a:p>
-            <a:pPr algn="ctr"/>
-            <a:r>
-              <a:rPr kumimoji="1" lang="en-US" altLang="zh-CN" sz="2000" dirty="0" err="1">
-                <a:latin typeface="Arial" panose="020B0604020202020204" pitchFamily="34" charset="0"/>
-                <a:cs typeface="Arial" panose="020B0604020202020204" pitchFamily="34" charset="0"/>
-              </a:rPr>
-              <a:t>FinalData</a:t>
-            </a:r>
-            <a:r>
-              <a:rPr kumimoji="1" lang="zh-CN" altLang="en-US" sz="2000" dirty="0">
-                <a:latin typeface="Arial" panose="020B0604020202020204" pitchFamily="34" charset="0"/>
-                <a:cs typeface="Arial" panose="020B0604020202020204" pitchFamily="34" charset="0"/>
-              </a:rPr>
-              <a:t> </a:t>
-            </a:r>
-            <a:r>
-              <a:rPr kumimoji="1" lang="en-US" altLang="zh-CN" sz="2000" dirty="0">
-                <a:latin typeface="Arial" panose="020B0604020202020204" pitchFamily="34" charset="0"/>
-                <a:cs typeface="Arial" panose="020B0604020202020204" pitchFamily="34" charset="0"/>
-              </a:rPr>
-              <a:t>–</a:t>
-            </a:r>
-            <a:r>
-              <a:rPr kumimoji="1" lang="zh-CN" altLang="en-US" sz="2000" dirty="0">
-                <a:latin typeface="Arial" panose="020B0604020202020204" pitchFamily="34" charset="0"/>
-                <a:cs typeface="Arial" panose="020B0604020202020204" pitchFamily="34" charset="0"/>
-              </a:rPr>
-              <a:t> </a:t>
-            </a:r>
-            <a:r>
-              <a:rPr kumimoji="1" lang="en-US" altLang="zh-CN" sz="2000" dirty="0">
-                <a:latin typeface="Arial" panose="020B0604020202020204" pitchFamily="34" charset="0"/>
-                <a:cs typeface="Arial" panose="020B0604020202020204" pitchFamily="34" charset="0"/>
-              </a:rPr>
-              <a:t>Position</a:t>
-            </a:r>
-            <a:r>
-              <a:rPr kumimoji="1" lang="zh-CN" altLang="en-US" sz="2000" dirty="0">
-                <a:latin typeface="Arial" panose="020B0604020202020204" pitchFamily="34" charset="0"/>
-                <a:cs typeface="Arial" panose="020B0604020202020204" pitchFamily="34" charset="0"/>
-              </a:rPr>
-              <a:t> </a:t>
-            </a:r>
-            <a:r>
-              <a:rPr kumimoji="1" lang="en-US" altLang="zh-CN" sz="2000" dirty="0">
-                <a:latin typeface="Arial" panose="020B0604020202020204" pitchFamily="34" charset="0"/>
-                <a:cs typeface="Arial" panose="020B0604020202020204" pitchFamily="34" charset="0"/>
-              </a:rPr>
-              <a:t>(N=4633)</a:t>
-            </a:r>
-            <a:endParaRPr kumimoji="1" lang="zh-CN" altLang="en-US" sz="2000" dirty="0">
-              <a:latin typeface="Arial" panose="020B0604020202020204" pitchFamily="34" charset="0"/>
-              <a:cs typeface="Arial" panose="020B0604020202020204" pitchFamily="34" charset="0"/>
-            </a:endParaRPr>
-          </a:p>
-        </p:txBody>
-      </p:sp>
-      <p:sp>
-        <p:nvSpPr>
-          <p:cNvPr id="71" name="文本框 70">
-            <a:extLst>
-              <a:ext uri="{FF2B5EF4-FFF2-40B4-BE49-F238E27FC236}">
-                <a16:creationId xmlns:a16="http://schemas.microsoft.com/office/drawing/2014/main" id="{2C0F7152-AD51-BE59-D412-082CA71EFAD1}"/>
-              </a:ext>
-            </a:extLst>
-          </p:cNvPr>
-          <p:cNvSpPr txBox="1"/>
-          <p:nvPr/>
-        </p:nvSpPr>
-        <p:spPr>
-          <a:xfrm rot="16200000">
-            <a:off x="-474269" y="12287654"/>
-            <a:ext cx="4320000" cy="400110"/>
-          </a:xfrm>
-          <a:prstGeom prst="rect">
-            <a:avLst/>
-          </a:prstGeom>
-          <a:noFill/>
-        </p:spPr>
-        <p:txBody>
-          <a:bodyPr wrap="square" rtlCol="0">
-            <a:spAutoFit/>
-          </a:bodyPr>
-          <a:lstStyle/>
-          <a:p>
-            <a:pPr algn="ctr"/>
-            <a:r>
-              <a:rPr kumimoji="1" lang="en-US" altLang="zh-CN" sz="2000" dirty="0">
-                <a:latin typeface="Arial" panose="020B0604020202020204" pitchFamily="34" charset="0"/>
-                <a:cs typeface="Arial" panose="020B0604020202020204" pitchFamily="34" charset="0"/>
-              </a:rPr>
-              <a:t>Pos</a:t>
-            </a:r>
-            <a:r>
-              <a:rPr kumimoji="1" lang="zh-CN" altLang="en-US" sz="2000" dirty="0">
-                <a:latin typeface="Arial" panose="020B0604020202020204" pitchFamily="34" charset="0"/>
-                <a:cs typeface="Arial" panose="020B0604020202020204" pitchFamily="34" charset="0"/>
-              </a:rPr>
-              <a:t> </a:t>
-            </a:r>
-            <a:r>
-              <a:rPr kumimoji="1" lang="en-US" altLang="zh-CN" sz="2000" dirty="0">
-                <a:latin typeface="Arial" panose="020B0604020202020204" pitchFamily="34" charset="0"/>
-                <a:cs typeface="Arial" panose="020B0604020202020204" pitchFamily="34" charset="0"/>
-              </a:rPr>
-              <a:t>y</a:t>
-            </a:r>
-            <a:endParaRPr kumimoji="1" lang="zh-CN" altLang="en-US" sz="2000" dirty="0">
-              <a:latin typeface="Arial" panose="020B0604020202020204" pitchFamily="34" charset="0"/>
-              <a:cs typeface="Arial" panose="020B0604020202020204" pitchFamily="34" charset="0"/>
-            </a:endParaRPr>
-          </a:p>
-        </p:txBody>
-      </p:sp>
-      <p:sp>
-        <p:nvSpPr>
-          <p:cNvPr id="73" name="文本框 72">
-            <a:extLst>
-              <a:ext uri="{FF2B5EF4-FFF2-40B4-BE49-F238E27FC236}">
-                <a16:creationId xmlns:a16="http://schemas.microsoft.com/office/drawing/2014/main" id="{A5D1F77C-DD22-AB2A-69D2-5B91C98F8F6E}"/>
-              </a:ext>
-            </a:extLst>
-          </p:cNvPr>
-          <p:cNvSpPr txBox="1"/>
-          <p:nvPr/>
-        </p:nvSpPr>
-        <p:spPr>
-          <a:xfrm>
-            <a:off x="1792502" y="14674454"/>
-            <a:ext cx="4320000" cy="400110"/>
-          </a:xfrm>
-          <a:prstGeom prst="rect">
-            <a:avLst/>
-          </a:prstGeom>
-          <a:noFill/>
-        </p:spPr>
-        <p:txBody>
-          <a:bodyPr wrap="square" rtlCol="0">
-            <a:spAutoFit/>
-          </a:bodyPr>
-          <a:lstStyle/>
-          <a:p>
-            <a:pPr algn="ctr"/>
-            <a:r>
-              <a:rPr kumimoji="1" lang="en-US" altLang="zh-CN" sz="2000" dirty="0">
-                <a:latin typeface="Arial" panose="020B0604020202020204" pitchFamily="34" charset="0"/>
-                <a:cs typeface="Arial" panose="020B0604020202020204" pitchFamily="34" charset="0"/>
-              </a:rPr>
-              <a:t>Pos</a:t>
-            </a:r>
-            <a:r>
-              <a:rPr kumimoji="1" lang="zh-CN" altLang="en-US" sz="2000" dirty="0">
-                <a:latin typeface="Arial" panose="020B0604020202020204" pitchFamily="34" charset="0"/>
-                <a:cs typeface="Arial" panose="020B0604020202020204" pitchFamily="34" charset="0"/>
-              </a:rPr>
-              <a:t> </a:t>
-            </a:r>
-            <a:r>
-              <a:rPr kumimoji="1" lang="en-US" altLang="zh-CN" sz="2000" dirty="0">
-                <a:latin typeface="Arial" panose="020B0604020202020204" pitchFamily="34" charset="0"/>
-                <a:cs typeface="Arial" panose="020B0604020202020204" pitchFamily="34" charset="0"/>
-              </a:rPr>
-              <a:t>x</a:t>
-            </a:r>
-            <a:endParaRPr kumimoji="1" lang="zh-CN" altLang="en-US" sz="2000" dirty="0">
-              <a:latin typeface="Arial" panose="020B0604020202020204" pitchFamily="34" charset="0"/>
-              <a:cs typeface="Arial" panose="020B0604020202020204" pitchFamily="34" charset="0"/>
-            </a:endParaRPr>
-          </a:p>
-        </p:txBody>
-      </p:sp>
-      <p:sp>
-        <p:nvSpPr>
-          <p:cNvPr id="75" name="文本框 74">
-            <a:extLst>
-              <a:ext uri="{FF2B5EF4-FFF2-40B4-BE49-F238E27FC236}">
-                <a16:creationId xmlns:a16="http://schemas.microsoft.com/office/drawing/2014/main" id="{432F5A1A-33B5-8D11-349B-4724ECED0FE1}"/>
-              </a:ext>
-            </a:extLst>
-          </p:cNvPr>
-          <p:cNvSpPr txBox="1"/>
-          <p:nvPr/>
-        </p:nvSpPr>
-        <p:spPr>
-          <a:xfrm>
-            <a:off x="6656970" y="14674767"/>
-            <a:ext cx="4320000" cy="400110"/>
-          </a:xfrm>
-          <a:prstGeom prst="rect">
-            <a:avLst/>
-          </a:prstGeom>
-          <a:noFill/>
-        </p:spPr>
-        <p:txBody>
-          <a:bodyPr wrap="square" rtlCol="0">
-            <a:spAutoFit/>
-          </a:bodyPr>
-          <a:lstStyle/>
-          <a:p>
-            <a:pPr algn="ctr"/>
-            <a:r>
-              <a:rPr kumimoji="1" lang="en-US" altLang="zh-CN" sz="2000" dirty="0">
-                <a:latin typeface="Arial" panose="020B0604020202020204" pitchFamily="34" charset="0"/>
-                <a:cs typeface="Arial" panose="020B0604020202020204" pitchFamily="34" charset="0"/>
-              </a:rPr>
-              <a:t>Relative</a:t>
-            </a:r>
-            <a:r>
-              <a:rPr kumimoji="1" lang="zh-CN" altLang="en-US" sz="2000" dirty="0">
-                <a:latin typeface="Arial" panose="020B0604020202020204" pitchFamily="34" charset="0"/>
-                <a:cs typeface="Arial" panose="020B0604020202020204" pitchFamily="34" charset="0"/>
-              </a:rPr>
-              <a:t> </a:t>
-            </a:r>
-            <a:r>
-              <a:rPr kumimoji="1" lang="en-US" altLang="zh-CN" sz="2000" dirty="0">
-                <a:latin typeface="Arial" panose="020B0604020202020204" pitchFamily="34" charset="0"/>
-                <a:cs typeface="Arial" panose="020B0604020202020204" pitchFamily="34" charset="0"/>
-              </a:rPr>
-              <a:t>size</a:t>
-            </a:r>
-            <a:endParaRPr kumimoji="1" lang="zh-CN" altLang="en-US" sz="2000" dirty="0">
-              <a:latin typeface="Arial" panose="020B0604020202020204" pitchFamily="34" charset="0"/>
-              <a:cs typeface="Arial" panose="020B0604020202020204" pitchFamily="34" charset="0"/>
-            </a:endParaRPr>
-          </a:p>
-        </p:txBody>
-      </p:sp>
-      <p:sp>
-        <p:nvSpPr>
-          <p:cNvPr id="76" name="文本框 75">
-            <a:extLst>
-              <a:ext uri="{FF2B5EF4-FFF2-40B4-BE49-F238E27FC236}">
-                <a16:creationId xmlns:a16="http://schemas.microsoft.com/office/drawing/2014/main" id="{499215DE-AB95-4E28-CADD-AC16E2AE3E90}"/>
-              </a:ext>
-            </a:extLst>
-          </p:cNvPr>
-          <p:cNvSpPr txBox="1"/>
-          <p:nvPr/>
-        </p:nvSpPr>
-        <p:spPr>
-          <a:xfrm>
-            <a:off x="6658270" y="10228767"/>
-            <a:ext cx="4320000" cy="400110"/>
-          </a:xfrm>
-          <a:prstGeom prst="rect">
-            <a:avLst/>
-          </a:prstGeom>
-          <a:noFill/>
-        </p:spPr>
-        <p:txBody>
-          <a:bodyPr wrap="square" rtlCol="0">
-            <a:spAutoFit/>
-          </a:bodyPr>
-          <a:lstStyle/>
-          <a:p>
-            <a:pPr algn="ctr"/>
-            <a:r>
-              <a:rPr kumimoji="1" lang="en-US" altLang="zh-CN" sz="2000" dirty="0" err="1">
-                <a:latin typeface="Arial" panose="020B0604020202020204" pitchFamily="34" charset="0"/>
-                <a:cs typeface="Arial" panose="020B0604020202020204" pitchFamily="34" charset="0"/>
-              </a:rPr>
-              <a:t>FinalData</a:t>
-            </a:r>
-            <a:r>
-              <a:rPr kumimoji="1" lang="zh-CN" altLang="en-US" sz="2000" dirty="0">
-                <a:latin typeface="Arial" panose="020B0604020202020204" pitchFamily="34" charset="0"/>
-                <a:cs typeface="Arial" panose="020B0604020202020204" pitchFamily="34" charset="0"/>
-              </a:rPr>
-              <a:t> </a:t>
-            </a:r>
-            <a:r>
-              <a:rPr kumimoji="1" lang="en-US" altLang="zh-CN" sz="2000" dirty="0">
-                <a:latin typeface="Arial" panose="020B0604020202020204" pitchFamily="34" charset="0"/>
-                <a:cs typeface="Arial" panose="020B0604020202020204" pitchFamily="34" charset="0"/>
-              </a:rPr>
-              <a:t>–</a:t>
-            </a:r>
-            <a:r>
-              <a:rPr kumimoji="1" lang="zh-CN" altLang="en-US" sz="2000" dirty="0">
-                <a:latin typeface="Arial" panose="020B0604020202020204" pitchFamily="34" charset="0"/>
-                <a:cs typeface="Arial" panose="020B0604020202020204" pitchFamily="34" charset="0"/>
-              </a:rPr>
-              <a:t> </a:t>
-            </a:r>
-            <a:r>
-              <a:rPr kumimoji="1" lang="en-US" altLang="zh-CN" sz="2000" dirty="0">
-                <a:latin typeface="Arial" panose="020B0604020202020204" pitchFamily="34" charset="0"/>
-                <a:cs typeface="Arial" panose="020B0604020202020204" pitchFamily="34" charset="0"/>
-              </a:rPr>
-              <a:t>Size</a:t>
-            </a:r>
-            <a:r>
-              <a:rPr kumimoji="1" lang="zh-CN" altLang="en-US" sz="2000" dirty="0">
-                <a:latin typeface="Arial" panose="020B0604020202020204" pitchFamily="34" charset="0"/>
-                <a:cs typeface="Arial" panose="020B0604020202020204" pitchFamily="34" charset="0"/>
-              </a:rPr>
-              <a:t> </a:t>
-            </a:r>
-            <a:r>
-              <a:rPr kumimoji="1" lang="en-US" altLang="zh-CN" sz="2000" dirty="0">
-                <a:latin typeface="Arial" panose="020B0604020202020204" pitchFamily="34" charset="0"/>
-                <a:cs typeface="Arial" panose="020B0604020202020204" pitchFamily="34" charset="0"/>
-              </a:rPr>
-              <a:t>(N=4633)</a:t>
-            </a:r>
-            <a:endParaRPr kumimoji="1" lang="zh-CN" altLang="en-US" sz="2000" dirty="0">
-              <a:latin typeface="Arial" panose="020B0604020202020204" pitchFamily="34" charset="0"/>
-              <a:cs typeface="Arial" panose="020B0604020202020204" pitchFamily="34" charset="0"/>
-            </a:endParaRPr>
-          </a:p>
-        </p:txBody>
-      </p:sp>
-      <p:sp>
-        <p:nvSpPr>
-          <p:cNvPr id="77" name="文本框 76">
-            <a:extLst>
-              <a:ext uri="{FF2B5EF4-FFF2-40B4-BE49-F238E27FC236}">
-                <a16:creationId xmlns:a16="http://schemas.microsoft.com/office/drawing/2014/main" id="{55C3C259-06A3-855F-573A-B23110A82C1D}"/>
-              </a:ext>
-            </a:extLst>
-          </p:cNvPr>
-          <p:cNvSpPr txBox="1"/>
-          <p:nvPr/>
-        </p:nvSpPr>
-        <p:spPr>
-          <a:xfrm rot="16200000">
-            <a:off x="4152557" y="12287967"/>
-            <a:ext cx="4320000" cy="400110"/>
-          </a:xfrm>
-          <a:prstGeom prst="rect">
-            <a:avLst/>
-          </a:prstGeom>
-          <a:noFill/>
-        </p:spPr>
-        <p:txBody>
-          <a:bodyPr wrap="square" rtlCol="0">
-            <a:spAutoFit/>
-          </a:bodyPr>
-          <a:lstStyle/>
-          <a:p>
-            <a:pPr algn="ctr"/>
-            <a:r>
-              <a:rPr kumimoji="1" lang="en-US" altLang="zh-CN" sz="2000" dirty="0">
-                <a:latin typeface="Arial" panose="020B0604020202020204" pitchFamily="34" charset="0"/>
-                <a:cs typeface="Arial" panose="020B0604020202020204" pitchFamily="34" charset="0"/>
-              </a:rPr>
-              <a:t>Density</a:t>
-            </a:r>
-            <a:endParaRPr kumimoji="1" lang="zh-CN" altLang="en-US" sz="2000" dirty="0">
-              <a:latin typeface="Arial" panose="020B0604020202020204" pitchFamily="34" charset="0"/>
-              <a:cs typeface="Arial" panose="020B0604020202020204" pitchFamily="34" charset="0"/>
-            </a:endParaRPr>
-          </a:p>
-        </p:txBody>
-      </p:sp>
-      <p:sp>
-        <p:nvSpPr>
-          <p:cNvPr id="80" name="文本框 79">
-            <a:extLst>
-              <a:ext uri="{FF2B5EF4-FFF2-40B4-BE49-F238E27FC236}">
-                <a16:creationId xmlns:a16="http://schemas.microsoft.com/office/drawing/2014/main" id="{BB8D2642-B529-0998-78B1-B2DE2CAE043E}"/>
-              </a:ext>
-            </a:extLst>
-          </p:cNvPr>
-          <p:cNvSpPr txBox="1"/>
-          <p:nvPr/>
-        </p:nvSpPr>
-        <p:spPr>
-          <a:xfrm>
-            <a:off x="11927684" y="14674767"/>
-            <a:ext cx="4320000" cy="400110"/>
-          </a:xfrm>
-          <a:prstGeom prst="rect">
-            <a:avLst/>
-          </a:prstGeom>
-          <a:noFill/>
-        </p:spPr>
-        <p:txBody>
-          <a:bodyPr wrap="square" rtlCol="0">
-            <a:spAutoFit/>
-          </a:bodyPr>
-          <a:lstStyle/>
-          <a:p>
-            <a:pPr algn="ctr"/>
-            <a:r>
-              <a:rPr kumimoji="1" lang="en-US" altLang="zh-CN" sz="2000" dirty="0">
-                <a:latin typeface="Arial" panose="020B0604020202020204" pitchFamily="34" charset="0"/>
-                <a:cs typeface="Arial" panose="020B0604020202020204" pitchFamily="34" charset="0"/>
-              </a:rPr>
-              <a:t>Pos</a:t>
-            </a:r>
-            <a:r>
-              <a:rPr kumimoji="1" lang="zh-CN" altLang="en-US" sz="2000" dirty="0">
-                <a:latin typeface="Arial" panose="020B0604020202020204" pitchFamily="34" charset="0"/>
-                <a:cs typeface="Arial" panose="020B0604020202020204" pitchFamily="34" charset="0"/>
-              </a:rPr>
-              <a:t> </a:t>
-            </a:r>
-            <a:r>
-              <a:rPr kumimoji="1" lang="en-US" altLang="zh-CN" sz="2000" dirty="0">
-                <a:latin typeface="Arial" panose="020B0604020202020204" pitchFamily="34" charset="0"/>
-                <a:cs typeface="Arial" panose="020B0604020202020204" pitchFamily="34" charset="0"/>
-              </a:rPr>
-              <a:t>x</a:t>
-            </a:r>
-            <a:endParaRPr kumimoji="1" lang="zh-CN" altLang="en-US" sz="2000" dirty="0">
-              <a:latin typeface="Arial" panose="020B0604020202020204" pitchFamily="34" charset="0"/>
-              <a:cs typeface="Arial" panose="020B0604020202020204" pitchFamily="34" charset="0"/>
-            </a:endParaRPr>
-          </a:p>
-        </p:txBody>
-      </p:sp>
-      <p:sp>
-        <p:nvSpPr>
-          <p:cNvPr id="81" name="文本框 80">
-            <a:extLst>
-              <a:ext uri="{FF2B5EF4-FFF2-40B4-BE49-F238E27FC236}">
-                <a16:creationId xmlns:a16="http://schemas.microsoft.com/office/drawing/2014/main" id="{5DF6079A-E140-643E-4817-F7177D939A48}"/>
-              </a:ext>
-            </a:extLst>
-          </p:cNvPr>
-          <p:cNvSpPr txBox="1"/>
-          <p:nvPr/>
-        </p:nvSpPr>
-        <p:spPr>
-          <a:xfrm>
-            <a:off x="16792152" y="14674767"/>
-            <a:ext cx="4320000" cy="400110"/>
-          </a:xfrm>
-          <a:prstGeom prst="rect">
-            <a:avLst/>
-          </a:prstGeom>
-          <a:noFill/>
-        </p:spPr>
-        <p:txBody>
-          <a:bodyPr wrap="square" rtlCol="0">
-            <a:spAutoFit/>
-          </a:bodyPr>
-          <a:lstStyle/>
-          <a:p>
-            <a:pPr algn="ctr"/>
-            <a:r>
-              <a:rPr kumimoji="1" lang="en-US" altLang="zh-CN" sz="2000" dirty="0">
-                <a:latin typeface="Arial" panose="020B0604020202020204" pitchFamily="34" charset="0"/>
-                <a:cs typeface="Arial" panose="020B0604020202020204" pitchFamily="34" charset="0"/>
-              </a:rPr>
-              <a:t>Relative</a:t>
-            </a:r>
-            <a:r>
-              <a:rPr kumimoji="1" lang="zh-CN" altLang="en-US" sz="2000" dirty="0">
-                <a:latin typeface="Arial" panose="020B0604020202020204" pitchFamily="34" charset="0"/>
-                <a:cs typeface="Arial" panose="020B0604020202020204" pitchFamily="34" charset="0"/>
-              </a:rPr>
-              <a:t> </a:t>
-            </a:r>
-            <a:r>
-              <a:rPr kumimoji="1" lang="en-US" altLang="zh-CN" sz="2000" dirty="0">
-                <a:latin typeface="Arial" panose="020B0604020202020204" pitchFamily="34" charset="0"/>
-                <a:cs typeface="Arial" panose="020B0604020202020204" pitchFamily="34" charset="0"/>
-              </a:rPr>
-              <a:t>size</a:t>
-            </a:r>
-            <a:endParaRPr kumimoji="1" lang="zh-CN" altLang="en-US" sz="2000" dirty="0">
-              <a:latin typeface="Arial" panose="020B0604020202020204" pitchFamily="34" charset="0"/>
-              <a:cs typeface="Arial" panose="020B0604020202020204" pitchFamily="34" charset="0"/>
-            </a:endParaRPr>
-          </a:p>
-        </p:txBody>
-      </p:sp>
-      <p:sp>
-        <p:nvSpPr>
-          <p:cNvPr id="82" name="文本框 81">
-            <a:extLst>
-              <a:ext uri="{FF2B5EF4-FFF2-40B4-BE49-F238E27FC236}">
-                <a16:creationId xmlns:a16="http://schemas.microsoft.com/office/drawing/2014/main" id="{28DB97C9-0124-4EF8-E7C6-3756FEF8C466}"/>
-              </a:ext>
-            </a:extLst>
-          </p:cNvPr>
-          <p:cNvSpPr txBox="1"/>
-          <p:nvPr/>
-        </p:nvSpPr>
-        <p:spPr>
-          <a:xfrm rot="16200000">
-            <a:off x="9405343" y="12287967"/>
-            <a:ext cx="4320000" cy="400110"/>
-          </a:xfrm>
-          <a:prstGeom prst="rect">
-            <a:avLst/>
-          </a:prstGeom>
-          <a:noFill/>
-        </p:spPr>
-        <p:txBody>
-          <a:bodyPr wrap="square" rtlCol="0">
-            <a:spAutoFit/>
-          </a:bodyPr>
-          <a:lstStyle/>
-          <a:p>
-            <a:pPr algn="ctr"/>
-            <a:r>
-              <a:rPr kumimoji="1" lang="en-US" altLang="zh-CN" sz="2000" dirty="0">
-                <a:latin typeface="Arial" panose="020B0604020202020204" pitchFamily="34" charset="0"/>
-                <a:cs typeface="Arial" panose="020B0604020202020204" pitchFamily="34" charset="0"/>
-              </a:rPr>
-              <a:t>Pos</a:t>
-            </a:r>
-            <a:r>
-              <a:rPr kumimoji="1" lang="zh-CN" altLang="en-US" sz="2000" dirty="0">
-                <a:latin typeface="Arial" panose="020B0604020202020204" pitchFamily="34" charset="0"/>
-                <a:cs typeface="Arial" panose="020B0604020202020204" pitchFamily="34" charset="0"/>
-              </a:rPr>
-              <a:t> </a:t>
-            </a:r>
-            <a:r>
-              <a:rPr kumimoji="1" lang="en-US" altLang="zh-CN" sz="2000" dirty="0">
-                <a:latin typeface="Arial" panose="020B0604020202020204" pitchFamily="34" charset="0"/>
-                <a:cs typeface="Arial" panose="020B0604020202020204" pitchFamily="34" charset="0"/>
-              </a:rPr>
-              <a:t>y</a:t>
-            </a:r>
-            <a:endParaRPr kumimoji="1" lang="zh-CN" altLang="en-US" sz="2000" dirty="0">
-              <a:latin typeface="Arial" panose="020B0604020202020204" pitchFamily="34" charset="0"/>
-              <a:cs typeface="Arial" panose="020B0604020202020204" pitchFamily="34" charset="0"/>
-            </a:endParaRPr>
-          </a:p>
-        </p:txBody>
-      </p:sp>
-      <p:sp>
-        <p:nvSpPr>
-          <p:cNvPr id="83" name="文本框 82">
-            <a:extLst>
-              <a:ext uri="{FF2B5EF4-FFF2-40B4-BE49-F238E27FC236}">
-                <a16:creationId xmlns:a16="http://schemas.microsoft.com/office/drawing/2014/main" id="{B50F4195-2619-4718-571A-9326C921A130}"/>
-              </a:ext>
-            </a:extLst>
-          </p:cNvPr>
-          <p:cNvSpPr txBox="1"/>
-          <p:nvPr/>
-        </p:nvSpPr>
-        <p:spPr>
-          <a:xfrm rot="16200000">
-            <a:off x="14032169" y="12287967"/>
-            <a:ext cx="4320000" cy="400110"/>
-          </a:xfrm>
-          <a:prstGeom prst="rect">
-            <a:avLst/>
-          </a:prstGeom>
-          <a:noFill/>
-        </p:spPr>
-        <p:txBody>
-          <a:bodyPr wrap="square" rtlCol="0">
-            <a:spAutoFit/>
-          </a:bodyPr>
-          <a:lstStyle/>
-          <a:p>
-            <a:pPr algn="ctr"/>
-            <a:r>
-              <a:rPr kumimoji="1" lang="en-US" altLang="zh-CN" sz="2000" dirty="0">
-                <a:latin typeface="Arial" panose="020B0604020202020204" pitchFamily="34" charset="0"/>
-                <a:cs typeface="Arial" panose="020B0604020202020204" pitchFamily="34" charset="0"/>
-              </a:rPr>
-              <a:t>Density</a:t>
-            </a:r>
-            <a:endParaRPr kumimoji="1" lang="zh-CN" altLang="en-US" sz="2000" dirty="0">
-              <a:latin typeface="Arial" panose="020B0604020202020204" pitchFamily="34" charset="0"/>
-              <a:cs typeface="Arial" panose="020B0604020202020204" pitchFamily="34" charset="0"/>
-            </a:endParaRPr>
-          </a:p>
-        </p:txBody>
-      </p:sp>
-      <p:sp>
-        <p:nvSpPr>
-          <p:cNvPr id="84" name="文本框 83">
-            <a:extLst>
-              <a:ext uri="{FF2B5EF4-FFF2-40B4-BE49-F238E27FC236}">
-                <a16:creationId xmlns:a16="http://schemas.microsoft.com/office/drawing/2014/main" id="{2EBA0AF1-5163-3477-B539-E6D5E1D2F903}"/>
-              </a:ext>
-            </a:extLst>
-          </p:cNvPr>
-          <p:cNvSpPr txBox="1"/>
-          <p:nvPr/>
-        </p:nvSpPr>
-        <p:spPr>
-          <a:xfrm>
-            <a:off x="11927683" y="10228767"/>
-            <a:ext cx="4320000" cy="400110"/>
-          </a:xfrm>
-          <a:prstGeom prst="rect">
-            <a:avLst/>
-          </a:prstGeom>
-          <a:noFill/>
-        </p:spPr>
-        <p:txBody>
-          <a:bodyPr wrap="square" rtlCol="0">
-            <a:spAutoFit/>
-          </a:bodyPr>
-          <a:lstStyle/>
-          <a:p>
-            <a:pPr algn="ctr"/>
-            <a:r>
-              <a:rPr kumimoji="1" lang="en-US" altLang="zh-CN" sz="2000" dirty="0" err="1">
-                <a:latin typeface="Arial" panose="020B0604020202020204" pitchFamily="34" charset="0"/>
-                <a:cs typeface="Arial" panose="020B0604020202020204" pitchFamily="34" charset="0"/>
-              </a:rPr>
-              <a:t>Augtrain</a:t>
-            </a:r>
-            <a:r>
-              <a:rPr kumimoji="1" lang="zh-CN" altLang="en-US" sz="2000" dirty="0">
-                <a:latin typeface="Arial" panose="020B0604020202020204" pitchFamily="34" charset="0"/>
-                <a:cs typeface="Arial" panose="020B0604020202020204" pitchFamily="34" charset="0"/>
-              </a:rPr>
-              <a:t> </a:t>
-            </a:r>
-            <a:r>
-              <a:rPr kumimoji="1" lang="en-US" altLang="zh-CN" sz="2000" dirty="0">
-                <a:latin typeface="Arial" panose="020B0604020202020204" pitchFamily="34" charset="0"/>
-                <a:cs typeface="Arial" panose="020B0604020202020204" pitchFamily="34" charset="0"/>
-              </a:rPr>
-              <a:t>–</a:t>
-            </a:r>
-            <a:r>
-              <a:rPr kumimoji="1" lang="zh-CN" altLang="en-US" sz="2000" dirty="0">
-                <a:latin typeface="Arial" panose="020B0604020202020204" pitchFamily="34" charset="0"/>
-                <a:cs typeface="Arial" panose="020B0604020202020204" pitchFamily="34" charset="0"/>
-              </a:rPr>
-              <a:t> </a:t>
-            </a:r>
-            <a:r>
-              <a:rPr kumimoji="1" lang="en-US" altLang="zh-CN" sz="2000" dirty="0">
-                <a:latin typeface="Arial" panose="020B0604020202020204" pitchFamily="34" charset="0"/>
-                <a:cs typeface="Arial" panose="020B0604020202020204" pitchFamily="34" charset="0"/>
-              </a:rPr>
-              <a:t>Position</a:t>
-            </a:r>
-            <a:r>
-              <a:rPr kumimoji="1" lang="zh-CN" altLang="en-US" sz="2000" dirty="0">
-                <a:latin typeface="Arial" panose="020B0604020202020204" pitchFamily="34" charset="0"/>
-                <a:cs typeface="Arial" panose="020B0604020202020204" pitchFamily="34" charset="0"/>
-              </a:rPr>
-              <a:t> </a:t>
-            </a:r>
-            <a:r>
-              <a:rPr kumimoji="1" lang="en-US" altLang="zh-CN" sz="2000" dirty="0">
-                <a:latin typeface="Arial" panose="020B0604020202020204" pitchFamily="34" charset="0"/>
-                <a:cs typeface="Arial" panose="020B0604020202020204" pitchFamily="34" charset="0"/>
-              </a:rPr>
-              <a:t>(N=4633)</a:t>
-            </a:r>
-            <a:endParaRPr kumimoji="1" lang="zh-CN" altLang="en-US" sz="2000" dirty="0">
-              <a:latin typeface="Arial" panose="020B0604020202020204" pitchFamily="34" charset="0"/>
-              <a:cs typeface="Arial" panose="020B0604020202020204" pitchFamily="34" charset="0"/>
-            </a:endParaRPr>
-          </a:p>
-        </p:txBody>
-      </p:sp>
-      <p:sp>
-        <p:nvSpPr>
-          <p:cNvPr id="85" name="文本框 84">
-            <a:extLst>
-              <a:ext uri="{FF2B5EF4-FFF2-40B4-BE49-F238E27FC236}">
-                <a16:creationId xmlns:a16="http://schemas.microsoft.com/office/drawing/2014/main" id="{C0F41947-9407-AF6A-9422-40D2542E8083}"/>
-              </a:ext>
-            </a:extLst>
-          </p:cNvPr>
-          <p:cNvSpPr txBox="1"/>
-          <p:nvPr/>
-        </p:nvSpPr>
-        <p:spPr>
-          <a:xfrm>
-            <a:off x="16792150" y="10228767"/>
-            <a:ext cx="4320000" cy="400110"/>
-          </a:xfrm>
-          <a:prstGeom prst="rect">
-            <a:avLst/>
-          </a:prstGeom>
-          <a:noFill/>
-        </p:spPr>
-        <p:txBody>
-          <a:bodyPr wrap="square" rtlCol="0">
-            <a:spAutoFit/>
-          </a:bodyPr>
-          <a:lstStyle/>
-          <a:p>
-            <a:pPr algn="ctr"/>
-            <a:r>
-              <a:rPr kumimoji="1" lang="en-US" altLang="zh-CN" sz="2000" dirty="0" err="1">
-                <a:latin typeface="Arial" panose="020B0604020202020204" pitchFamily="34" charset="0"/>
-                <a:cs typeface="Arial" panose="020B0604020202020204" pitchFamily="34" charset="0"/>
-              </a:rPr>
-              <a:t>Augtrain</a:t>
-            </a:r>
-            <a:r>
-              <a:rPr kumimoji="1" lang="zh-CN" altLang="en-US" sz="2000" dirty="0">
-                <a:latin typeface="Arial" panose="020B0604020202020204" pitchFamily="34" charset="0"/>
-                <a:cs typeface="Arial" panose="020B0604020202020204" pitchFamily="34" charset="0"/>
-              </a:rPr>
-              <a:t> </a:t>
-            </a:r>
-            <a:r>
-              <a:rPr kumimoji="1" lang="en-US" altLang="zh-CN" sz="2000" dirty="0">
-                <a:latin typeface="Arial" panose="020B0604020202020204" pitchFamily="34" charset="0"/>
-                <a:cs typeface="Arial" panose="020B0604020202020204" pitchFamily="34" charset="0"/>
-              </a:rPr>
-              <a:t>–</a:t>
-            </a:r>
-            <a:r>
-              <a:rPr kumimoji="1" lang="zh-CN" altLang="en-US" sz="2000" dirty="0">
-                <a:latin typeface="Arial" panose="020B0604020202020204" pitchFamily="34" charset="0"/>
-                <a:cs typeface="Arial" panose="020B0604020202020204" pitchFamily="34" charset="0"/>
-              </a:rPr>
-              <a:t> </a:t>
-            </a:r>
-            <a:r>
-              <a:rPr kumimoji="1" lang="en-US" altLang="zh-CN" sz="2000" dirty="0">
-                <a:latin typeface="Arial" panose="020B0604020202020204" pitchFamily="34" charset="0"/>
-                <a:cs typeface="Arial" panose="020B0604020202020204" pitchFamily="34" charset="0"/>
-              </a:rPr>
-              <a:t>Size</a:t>
-            </a:r>
-            <a:r>
-              <a:rPr kumimoji="1" lang="zh-CN" altLang="en-US" sz="2000" dirty="0">
-                <a:latin typeface="Arial" panose="020B0604020202020204" pitchFamily="34" charset="0"/>
-                <a:cs typeface="Arial" panose="020B0604020202020204" pitchFamily="34" charset="0"/>
-              </a:rPr>
-              <a:t> </a:t>
-            </a:r>
-            <a:r>
-              <a:rPr kumimoji="1" lang="en-US" altLang="zh-CN" sz="2000" dirty="0">
-                <a:latin typeface="Arial" panose="020B0604020202020204" pitchFamily="34" charset="0"/>
-                <a:cs typeface="Arial" panose="020B0604020202020204" pitchFamily="34" charset="0"/>
-              </a:rPr>
-              <a:t>(N=4633)</a:t>
-            </a:r>
-            <a:endParaRPr kumimoji="1" lang="zh-CN" altLang="en-US" sz="2000" dirty="0">
+              <a:rPr kumimoji="1" lang="en-US" altLang="zh-CN" sz="2400" dirty="0">
+                <a:latin typeface="Arial" panose="020B0604020202020204" pitchFamily="34" charset="0"/>
+                <a:cs typeface="Arial" panose="020B0604020202020204" pitchFamily="34" charset="0"/>
+              </a:rPr>
+              <a:t>(N=7288)</a:t>
+            </a:r>
+            <a:endParaRPr kumimoji="1" lang="zh-CN" altLang="en-US" sz="2400" dirty="0">
               <a:latin typeface="Arial" panose="020B0604020202020204" pitchFamily="34" charset="0"/>
               <a:cs typeface="Arial" panose="020B0604020202020204" pitchFamily="34" charset="0"/>
             </a:endParaRPr>
@@ -5879,7 +5893,7 @@
         </p:blipFill>
         <p:spPr>
           <a:xfrm>
-            <a:off x="1792800" y="5508000"/>
+            <a:off x="1733806" y="6451896"/>
             <a:ext cx="4320000" cy="4320000"/>
           </a:xfrm>
           <a:prstGeom prst="rect">
@@ -5915,7 +5929,7 @@
         </p:blipFill>
         <p:spPr>
           <a:xfrm>
-            <a:off x="6418800" y="5508000"/>
+            <a:off x="6359806" y="6451896"/>
             <a:ext cx="4637444" cy="4320000"/>
           </a:xfrm>
           <a:prstGeom prst="rect">
@@ -5951,7 +5965,7 @@
         </p:blipFill>
         <p:spPr>
           <a:xfrm>
-            <a:off x="16248000" y="5508000"/>
+            <a:off x="16189006" y="6451896"/>
             <a:ext cx="4796972" cy="4320000"/>
           </a:xfrm>
           <a:prstGeom prst="rect">
@@ -5987,7 +6001,7 @@
         </p:blipFill>
         <p:spPr>
           <a:xfrm>
-            <a:off x="11690400" y="5508000"/>
+            <a:off x="11631406" y="6451896"/>
             <a:ext cx="4320000" cy="4320000"/>
           </a:xfrm>
           <a:prstGeom prst="rect">
@@ -6023,7 +6037,7 @@
         </p:blipFill>
         <p:spPr>
           <a:xfrm>
-            <a:off x="6418800" y="10526400"/>
+            <a:off x="6359806" y="11470296"/>
             <a:ext cx="4796972" cy="4320000"/>
           </a:xfrm>
           <a:prstGeom prst="rect">
@@ -6059,7 +6073,7 @@
         </p:blipFill>
         <p:spPr>
           <a:xfrm>
-            <a:off x="1792800" y="10526400"/>
+            <a:off x="1733806" y="11470296"/>
             <a:ext cx="4320000" cy="4320000"/>
           </a:xfrm>
           <a:prstGeom prst="rect">
@@ -6095,7 +6109,7 @@
         </p:blipFill>
         <p:spPr>
           <a:xfrm>
-            <a:off x="11690400" y="10526400"/>
+            <a:off x="11631406" y="11470296"/>
             <a:ext cx="4320000" cy="4320000"/>
           </a:xfrm>
           <a:prstGeom prst="rect">
@@ -6131,7 +6145,7 @@
         </p:blipFill>
         <p:spPr>
           <a:xfrm>
-            <a:off x="16248000" y="10526400"/>
+            <a:off x="16189006" y="11470296"/>
             <a:ext cx="4796972" cy="4320000"/>
           </a:xfrm>
           <a:prstGeom prst="rect">
@@ -6139,6 +6153,264 @@
           </a:prstGeom>
         </p:spPr>
       </p:pic>
+      <p:sp>
+        <p:nvSpPr>
+          <p:cNvPr id="2" name="文本框 1">
+            <a:extLst>
+              <a:ext uri="{FF2B5EF4-FFF2-40B4-BE49-F238E27FC236}">
+                <a16:creationId xmlns:a16="http://schemas.microsoft.com/office/drawing/2014/main" id="{D5191ABA-9405-5509-71C1-97E248DB4B08}"/>
+              </a:ext>
+            </a:extLst>
+          </p:cNvPr>
+          <p:cNvSpPr txBox="1"/>
+          <p:nvPr/>
+        </p:nvSpPr>
+        <p:spPr>
+          <a:xfrm>
+            <a:off x="1267200" y="993600"/>
+            <a:ext cx="720000" cy="646331"/>
+          </a:xfrm>
+          <a:prstGeom prst="rect">
+            <a:avLst/>
+          </a:prstGeom>
+          <a:noFill/>
+        </p:spPr>
+        <p:txBody>
+          <a:bodyPr wrap="square" rtlCol="0">
+            <a:spAutoFit/>
+          </a:bodyPr>
+          <a:lstStyle/>
+          <a:p>
+            <a:pPr algn="ctr"/>
+            <a:r>
+              <a:rPr kumimoji="1" lang="en-US" altLang="zh-CN" sz="3600" b="1" dirty="0">
+                <a:latin typeface="Arial" panose="020B0604020202020204" pitchFamily="34" charset="0"/>
+                <a:cs typeface="Arial" panose="020B0604020202020204" pitchFamily="34" charset="0"/>
+              </a:rPr>
+              <a:t>a</a:t>
+            </a:r>
+            <a:endParaRPr kumimoji="1" lang="zh-CN" altLang="en-US" sz="3600" b="1" dirty="0">
+              <a:latin typeface="Arial" panose="020B0604020202020204" pitchFamily="34" charset="0"/>
+              <a:cs typeface="Arial" panose="020B0604020202020204" pitchFamily="34" charset="0"/>
+            </a:endParaRPr>
+          </a:p>
+        </p:txBody>
+      </p:sp>
+      <p:sp>
+        <p:nvSpPr>
+          <p:cNvPr id="6" name="文本框 5">
+            <a:extLst>
+              <a:ext uri="{FF2B5EF4-FFF2-40B4-BE49-F238E27FC236}">
+                <a16:creationId xmlns:a16="http://schemas.microsoft.com/office/drawing/2014/main" id="{ACEF38BC-99DC-F889-F692-DEC4781B339E}"/>
+              </a:ext>
+            </a:extLst>
+          </p:cNvPr>
+          <p:cNvSpPr txBox="1"/>
+          <p:nvPr/>
+        </p:nvSpPr>
+        <p:spPr>
+          <a:xfrm>
+            <a:off x="1267200" y="5739579"/>
+            <a:ext cx="720000" cy="646331"/>
+          </a:xfrm>
+          <a:prstGeom prst="rect">
+            <a:avLst/>
+          </a:prstGeom>
+          <a:noFill/>
+        </p:spPr>
+        <p:txBody>
+          <a:bodyPr wrap="square" rtlCol="0">
+            <a:spAutoFit/>
+          </a:bodyPr>
+          <a:lstStyle/>
+          <a:p>
+            <a:pPr algn="ctr"/>
+            <a:r>
+              <a:rPr kumimoji="1" lang="en-US" altLang="zh-CN" sz="3600" b="1" dirty="0">
+                <a:latin typeface="Arial" panose="020B0604020202020204" pitchFamily="34" charset="0"/>
+                <a:cs typeface="Arial" panose="020B0604020202020204" pitchFamily="34" charset="0"/>
+              </a:rPr>
+              <a:t>c</a:t>
+            </a:r>
+            <a:endParaRPr kumimoji="1" lang="zh-CN" altLang="en-US" sz="3600" b="1" dirty="0">
+              <a:latin typeface="Arial" panose="020B0604020202020204" pitchFamily="34" charset="0"/>
+              <a:cs typeface="Arial" panose="020B0604020202020204" pitchFamily="34" charset="0"/>
+            </a:endParaRPr>
+          </a:p>
+        </p:txBody>
+      </p:sp>
+      <p:sp>
+        <p:nvSpPr>
+          <p:cNvPr id="7" name="文本框 6">
+            <a:extLst>
+              <a:ext uri="{FF2B5EF4-FFF2-40B4-BE49-F238E27FC236}">
+                <a16:creationId xmlns:a16="http://schemas.microsoft.com/office/drawing/2014/main" id="{A5762E4B-CCF8-8AE7-6D3C-FBEE22FE1454}"/>
+              </a:ext>
+            </a:extLst>
+          </p:cNvPr>
+          <p:cNvSpPr txBox="1"/>
+          <p:nvPr/>
+        </p:nvSpPr>
+        <p:spPr>
+          <a:xfrm>
+            <a:off x="1267200" y="10823371"/>
+            <a:ext cx="720000" cy="646331"/>
+          </a:xfrm>
+          <a:prstGeom prst="rect">
+            <a:avLst/>
+          </a:prstGeom>
+          <a:noFill/>
+        </p:spPr>
+        <p:txBody>
+          <a:bodyPr wrap="square" rtlCol="0">
+            <a:spAutoFit/>
+          </a:bodyPr>
+          <a:lstStyle/>
+          <a:p>
+            <a:pPr algn="ctr"/>
+            <a:r>
+              <a:rPr kumimoji="1" lang="en-US" altLang="zh-CN" sz="3600" b="1" dirty="0">
+                <a:latin typeface="Arial" panose="020B0604020202020204" pitchFamily="34" charset="0"/>
+                <a:cs typeface="Arial" panose="020B0604020202020204" pitchFamily="34" charset="0"/>
+              </a:rPr>
+              <a:t>e</a:t>
+            </a:r>
+            <a:endParaRPr kumimoji="1" lang="zh-CN" altLang="en-US" sz="3600" b="1" dirty="0">
+              <a:latin typeface="Arial" panose="020B0604020202020204" pitchFamily="34" charset="0"/>
+              <a:cs typeface="Arial" panose="020B0604020202020204" pitchFamily="34" charset="0"/>
+            </a:endParaRPr>
+          </a:p>
+        </p:txBody>
+      </p:sp>
+      <p:sp>
+        <p:nvSpPr>
+          <p:cNvPr id="9" name="文本框 8">
+            <a:extLst>
+              <a:ext uri="{FF2B5EF4-FFF2-40B4-BE49-F238E27FC236}">
+                <a16:creationId xmlns:a16="http://schemas.microsoft.com/office/drawing/2014/main" id="{3AEE3499-C518-26F6-61AF-99AC8DF688B2}"/>
+              </a:ext>
+            </a:extLst>
+          </p:cNvPr>
+          <p:cNvSpPr txBox="1"/>
+          <p:nvPr/>
+        </p:nvSpPr>
+        <p:spPr>
+          <a:xfrm>
+            <a:off x="11349478" y="993600"/>
+            <a:ext cx="720000" cy="646331"/>
+          </a:xfrm>
+          <a:prstGeom prst="rect">
+            <a:avLst/>
+          </a:prstGeom>
+          <a:noFill/>
+        </p:spPr>
+        <p:txBody>
+          <a:bodyPr wrap="square" rtlCol="0">
+            <a:spAutoFit/>
+          </a:bodyPr>
+          <a:lstStyle/>
+          <a:p>
+            <a:pPr algn="ctr"/>
+            <a:r>
+              <a:rPr kumimoji="1" lang="en-US" altLang="zh-CN" sz="3600" b="1" dirty="0">
+                <a:latin typeface="Arial" panose="020B0604020202020204" pitchFamily="34" charset="0"/>
+                <a:cs typeface="Arial" panose="020B0604020202020204" pitchFamily="34" charset="0"/>
+              </a:rPr>
+              <a:t>b</a:t>
+            </a:r>
+            <a:endParaRPr kumimoji="1" lang="zh-CN" altLang="en-US" sz="3600" b="1" dirty="0">
+              <a:latin typeface="Arial" panose="020B0604020202020204" pitchFamily="34" charset="0"/>
+              <a:cs typeface="Arial" panose="020B0604020202020204" pitchFamily="34" charset="0"/>
+            </a:endParaRPr>
+          </a:p>
+        </p:txBody>
+      </p:sp>
+      <p:sp>
+        <p:nvSpPr>
+          <p:cNvPr id="10" name="文本框 9">
+            <a:extLst>
+              <a:ext uri="{FF2B5EF4-FFF2-40B4-BE49-F238E27FC236}">
+                <a16:creationId xmlns:a16="http://schemas.microsoft.com/office/drawing/2014/main" id="{AC570154-354A-72F7-3630-CFF184453BEB}"/>
+              </a:ext>
+            </a:extLst>
+          </p:cNvPr>
+          <p:cNvSpPr txBox="1"/>
+          <p:nvPr/>
+        </p:nvSpPr>
+        <p:spPr>
+          <a:xfrm>
+            <a:off x="11349478" y="5739579"/>
+            <a:ext cx="720000" cy="646331"/>
+          </a:xfrm>
+          <a:prstGeom prst="rect">
+            <a:avLst/>
+          </a:prstGeom>
+          <a:noFill/>
+        </p:spPr>
+        <p:txBody>
+          <a:bodyPr wrap="square" rtlCol="0">
+            <a:spAutoFit/>
+          </a:bodyPr>
+          <a:lstStyle/>
+          <a:p>
+            <a:pPr algn="ctr"/>
+            <a:r>
+              <a:rPr kumimoji="1" lang="en-US" altLang="zh-CN" sz="3600" b="1" dirty="0">
+                <a:latin typeface="Arial" panose="020B0604020202020204" pitchFamily="34" charset="0"/>
+                <a:cs typeface="Arial" panose="020B0604020202020204" pitchFamily="34" charset="0"/>
+              </a:rPr>
+              <a:t>d</a:t>
+            </a:r>
+            <a:endParaRPr kumimoji="1" lang="zh-CN" altLang="en-US" sz="3600" b="1" dirty="0">
+              <a:latin typeface="Arial" panose="020B0604020202020204" pitchFamily="34" charset="0"/>
+              <a:cs typeface="Arial" panose="020B0604020202020204" pitchFamily="34" charset="0"/>
+            </a:endParaRPr>
+          </a:p>
+        </p:txBody>
+      </p:sp>
+      <p:sp>
+        <p:nvSpPr>
+          <p:cNvPr id="11" name="文本框 10">
+            <a:extLst>
+              <a:ext uri="{FF2B5EF4-FFF2-40B4-BE49-F238E27FC236}">
+                <a16:creationId xmlns:a16="http://schemas.microsoft.com/office/drawing/2014/main" id="{B4C0ABAB-E5E8-7570-98AF-83EBD11EA6FB}"/>
+              </a:ext>
+            </a:extLst>
+          </p:cNvPr>
+          <p:cNvSpPr txBox="1"/>
+          <p:nvPr/>
+        </p:nvSpPr>
+        <p:spPr>
+          <a:xfrm>
+            <a:off x="11349478" y="10823371"/>
+            <a:ext cx="720000" cy="646331"/>
+          </a:xfrm>
+          <a:prstGeom prst="rect">
+            <a:avLst/>
+          </a:prstGeom>
+          <a:noFill/>
+        </p:spPr>
+        <p:txBody>
+          <a:bodyPr wrap="square" rtlCol="0">
+            <a:spAutoFit/>
+          </a:bodyPr>
+          <a:lstStyle/>
+          <a:p>
+            <a:pPr algn="ctr"/>
+            <a:r>
+              <a:rPr kumimoji="1" lang="en-US" altLang="zh-CN" sz="3600" b="1" dirty="0">
+                <a:latin typeface="Arial" panose="020B0604020202020204" pitchFamily="34" charset="0"/>
+                <a:cs typeface="Arial" panose="020B0604020202020204" pitchFamily="34" charset="0"/>
+              </a:rPr>
+              <a:t>f</a:t>
+            </a:r>
+            <a:endParaRPr kumimoji="1" lang="zh-CN" altLang="en-US" sz="3600" b="1" dirty="0">
+              <a:latin typeface="Arial" panose="020B0604020202020204" pitchFamily="34" charset="0"/>
+              <a:cs typeface="Arial" panose="020B0604020202020204" pitchFamily="34" charset="0"/>
+            </a:endParaRPr>
+          </a:p>
+        </p:txBody>
+      </p:sp>
     </p:spTree>
     <p:extLst>
       <p:ext uri="{BB962C8B-B14F-4D97-AF65-F5344CB8AC3E}">
@@ -6583,7 +6855,7 @@
                 <a:latin typeface="Arial" panose="020B0604020202020204" pitchFamily="34" charset="0"/>
                 <a:cs typeface="Arial" panose="020B0604020202020204" pitchFamily="34" charset="0"/>
               </a:rPr>
-              <a:t>3,199</a:t>
+              <a:t>3,574</a:t>
             </a:r>
             <a:endParaRPr kumimoji="1" lang="zh-CN" altLang="en-US" sz="2800" dirty="0">
               <a:latin typeface="Arial" panose="020B0604020202020204" pitchFamily="34" charset="0"/>
@@ -6626,7 +6898,7 @@
                 <a:latin typeface="Arial" panose="020B0604020202020204" pitchFamily="34" charset="0"/>
                 <a:cs typeface="Arial" panose="020B0604020202020204" pitchFamily="34" charset="0"/>
               </a:rPr>
-              <a:t>1,301</a:t>
+              <a:t>1,426</a:t>
             </a:r>
             <a:endParaRPr kumimoji="1" lang="zh-CN" altLang="en-US" sz="2800" dirty="0">
               <a:latin typeface="Arial" panose="020B0604020202020204" pitchFamily="34" charset="0"/>

--- a/pptx/data_statistics.pptx
+++ b/pptx/data_statistics.pptx
@@ -3901,7 +3901,7 @@
         </p:blipFill>
         <p:spPr>
           <a:xfrm>
-            <a:off x="16188691" y="1535736"/>
+            <a:off x="16188691" y="1537200"/>
             <a:ext cx="4796972" cy="4320000"/>
           </a:xfrm>
           <a:prstGeom prst="rect">
@@ -3937,7 +3937,7 @@
         </p:blipFill>
         <p:spPr>
           <a:xfrm>
-            <a:off x="11630206" y="1535736"/>
+            <a:off x="11631600" y="1537200"/>
             <a:ext cx="4320000" cy="4320000"/>
           </a:xfrm>
           <a:prstGeom prst="rect">
@@ -6001,7 +6001,7 @@
         </p:blipFill>
         <p:spPr>
           <a:xfrm>
-            <a:off x="11631406" y="6451896"/>
+            <a:off x="11631600" y="6451896"/>
             <a:ext cx="4320000" cy="4320000"/>
           </a:xfrm>
           <a:prstGeom prst="rect">

--- a/pptx/data_statistics.pptx
+++ b/pptx/data_statistics.pptx
@@ -198,7 +198,7 @@
           <a:p>
             <a:fld id="{082B1127-B745-0849-B4DE-90186D8D1D7E}" type="datetimeFigureOut">
               <a:rPr kumimoji="1" lang="zh-CN" altLang="en-US" smtClean="0"/>
-              <a:t>2026/6/19</a:t>
+              <a:t>2026/6/20</a:t>
             </a:fld>
             <a:endParaRPr kumimoji="1" lang="zh-CN" altLang="en-US"/>
           </a:p>
@@ -680,7 +680,7 @@
           <a:p>
             <a:fld id="{33ECD986-F6E6-0842-93B7-4A1320D84B6C}" type="datetimeFigureOut">
               <a:rPr kumimoji="1" lang="zh-CN" altLang="en-US" smtClean="0"/>
-              <a:t>2026/6/19</a:t>
+              <a:t>2026/6/20</a:t>
             </a:fld>
             <a:endParaRPr kumimoji="1" lang="zh-CN" altLang="en-US"/>
           </a:p>
@@ -850,7 +850,7 @@
           <a:p>
             <a:fld id="{33ECD986-F6E6-0842-93B7-4A1320D84B6C}" type="datetimeFigureOut">
               <a:rPr kumimoji="1" lang="zh-CN" altLang="en-US" smtClean="0"/>
-              <a:t>2026/6/19</a:t>
+              <a:t>2026/6/20</a:t>
             </a:fld>
             <a:endParaRPr kumimoji="1" lang="zh-CN" altLang="en-US"/>
           </a:p>
@@ -1030,7 +1030,7 @@
           <a:p>
             <a:fld id="{33ECD986-F6E6-0842-93B7-4A1320D84B6C}" type="datetimeFigureOut">
               <a:rPr kumimoji="1" lang="zh-CN" altLang="en-US" smtClean="0"/>
-              <a:t>2026/6/19</a:t>
+              <a:t>2026/6/20</a:t>
             </a:fld>
             <a:endParaRPr kumimoji="1" lang="zh-CN" altLang="en-US"/>
           </a:p>
@@ -1200,7 +1200,7 @@
           <a:p>
             <a:fld id="{33ECD986-F6E6-0842-93B7-4A1320D84B6C}" type="datetimeFigureOut">
               <a:rPr kumimoji="1" lang="zh-CN" altLang="en-US" smtClean="0"/>
-              <a:t>2026/6/19</a:t>
+              <a:t>2026/6/20</a:t>
             </a:fld>
             <a:endParaRPr kumimoji="1" lang="zh-CN" altLang="en-US"/>
           </a:p>
@@ -1446,7 +1446,7 @@
           <a:p>
             <a:fld id="{33ECD986-F6E6-0842-93B7-4A1320D84B6C}" type="datetimeFigureOut">
               <a:rPr kumimoji="1" lang="zh-CN" altLang="en-US" smtClean="0"/>
-              <a:t>2026/6/19</a:t>
+              <a:t>2026/6/20</a:t>
             </a:fld>
             <a:endParaRPr kumimoji="1" lang="zh-CN" altLang="en-US"/>
           </a:p>
@@ -1678,7 +1678,7 @@
           <a:p>
             <a:fld id="{33ECD986-F6E6-0842-93B7-4A1320D84B6C}" type="datetimeFigureOut">
               <a:rPr kumimoji="1" lang="zh-CN" altLang="en-US" smtClean="0"/>
-              <a:t>2026/6/19</a:t>
+              <a:t>2026/6/20</a:t>
             </a:fld>
             <a:endParaRPr kumimoji="1" lang="zh-CN" altLang="en-US"/>
           </a:p>
@@ -2045,7 +2045,7 @@
           <a:p>
             <a:fld id="{33ECD986-F6E6-0842-93B7-4A1320D84B6C}" type="datetimeFigureOut">
               <a:rPr kumimoji="1" lang="zh-CN" altLang="en-US" smtClean="0"/>
-              <a:t>2026/6/19</a:t>
+              <a:t>2026/6/20</a:t>
             </a:fld>
             <a:endParaRPr kumimoji="1" lang="zh-CN" altLang="en-US"/>
           </a:p>
@@ -2163,7 +2163,7 @@
           <a:p>
             <a:fld id="{33ECD986-F6E6-0842-93B7-4A1320D84B6C}" type="datetimeFigureOut">
               <a:rPr kumimoji="1" lang="zh-CN" altLang="en-US" smtClean="0"/>
-              <a:t>2026/6/19</a:t>
+              <a:t>2026/6/20</a:t>
             </a:fld>
             <a:endParaRPr kumimoji="1" lang="zh-CN" altLang="en-US"/>
           </a:p>
@@ -2258,7 +2258,7 @@
           <a:p>
             <a:fld id="{33ECD986-F6E6-0842-93B7-4A1320D84B6C}" type="datetimeFigureOut">
               <a:rPr kumimoji="1" lang="zh-CN" altLang="en-US" smtClean="0"/>
-              <a:t>2026/6/19</a:t>
+              <a:t>2026/6/20</a:t>
             </a:fld>
             <a:endParaRPr kumimoji="1" lang="zh-CN" altLang="en-US"/>
           </a:p>
@@ -2535,7 +2535,7 @@
           <a:p>
             <a:fld id="{33ECD986-F6E6-0842-93B7-4A1320D84B6C}" type="datetimeFigureOut">
               <a:rPr kumimoji="1" lang="zh-CN" altLang="en-US" smtClean="0"/>
-              <a:t>2026/6/19</a:t>
+              <a:t>2026/6/20</a:t>
             </a:fld>
             <a:endParaRPr kumimoji="1" lang="zh-CN" altLang="en-US"/>
           </a:p>
@@ -2792,7 +2792,7 @@
           <a:p>
             <a:fld id="{33ECD986-F6E6-0842-93B7-4A1320D84B6C}" type="datetimeFigureOut">
               <a:rPr kumimoji="1" lang="zh-CN" altLang="en-US" smtClean="0"/>
-              <a:t>2026/6/19</a:t>
+              <a:t>2026/6/20</a:t>
             </a:fld>
             <a:endParaRPr kumimoji="1" lang="zh-CN" altLang="en-US"/>
           </a:p>
@@ -3005,7 +3005,7 @@
           <a:p>
             <a:fld id="{33ECD986-F6E6-0842-93B7-4A1320D84B6C}" type="datetimeFigureOut">
               <a:rPr kumimoji="1" lang="zh-CN" altLang="en-US" smtClean="0"/>
-              <a:t>2026/6/19</a:t>
+              <a:t>2026/6/20</a:t>
             </a:fld>
             <a:endParaRPr kumimoji="1" lang="zh-CN" altLang="en-US"/>
           </a:p>
@@ -3552,12 +3552,2475 @@
           </a:p>
         </p:txBody>
       </p:sp>
+      <p:sp>
+        <p:nvSpPr>
+          <p:cNvPr id="4" name="文本框 3">
+            <a:extLst>
+              <a:ext uri="{FF2B5EF4-FFF2-40B4-BE49-F238E27FC236}">
+                <a16:creationId xmlns:a16="http://schemas.microsoft.com/office/drawing/2014/main" id="{8FCCFA40-631D-F27E-8DF1-51A598CF3691}"/>
+              </a:ext>
+            </a:extLst>
+          </p:cNvPr>
+          <p:cNvSpPr txBox="1"/>
+          <p:nvPr/>
+        </p:nvSpPr>
+        <p:spPr>
+          <a:xfrm>
+            <a:off x="1733510" y="5682623"/>
+            <a:ext cx="4320000" cy="461665"/>
+          </a:xfrm>
+          <a:prstGeom prst="rect">
+            <a:avLst/>
+          </a:prstGeom>
+          <a:noFill/>
+        </p:spPr>
+        <p:txBody>
+          <a:bodyPr wrap="square" rtlCol="0">
+            <a:spAutoFit/>
+          </a:bodyPr>
+          <a:lstStyle/>
+          <a:p>
+            <a:pPr algn="ctr"/>
+            <a:r>
+              <a:rPr kumimoji="1" lang="en-US" altLang="zh-CN" sz="2400" dirty="0">
+                <a:latin typeface="Arial" panose="020B0604020202020204" pitchFamily="34" charset="0"/>
+                <a:cs typeface="Arial" panose="020B0604020202020204" pitchFamily="34" charset="0"/>
+              </a:rPr>
+              <a:t>Pos</a:t>
+            </a:r>
+            <a:r>
+              <a:rPr kumimoji="1" lang="zh-CN" altLang="en-US" sz="2400" dirty="0">
+                <a:latin typeface="Arial" panose="020B0604020202020204" pitchFamily="34" charset="0"/>
+                <a:cs typeface="Arial" panose="020B0604020202020204" pitchFamily="34" charset="0"/>
+              </a:rPr>
+              <a:t> </a:t>
+            </a:r>
+            <a:r>
+              <a:rPr kumimoji="1" lang="en-US" altLang="zh-CN" sz="2400" dirty="0">
+                <a:latin typeface="Arial" panose="020B0604020202020204" pitchFamily="34" charset="0"/>
+                <a:cs typeface="Arial" panose="020B0604020202020204" pitchFamily="34" charset="0"/>
+              </a:rPr>
+              <a:t>x</a:t>
+            </a:r>
+            <a:endParaRPr kumimoji="1" lang="zh-CN" altLang="en-US" sz="2400" dirty="0">
+              <a:latin typeface="Arial" panose="020B0604020202020204" pitchFamily="34" charset="0"/>
+              <a:cs typeface="Arial" panose="020B0604020202020204" pitchFamily="34" charset="0"/>
+            </a:endParaRPr>
+          </a:p>
+        </p:txBody>
+      </p:sp>
+      <p:sp>
+        <p:nvSpPr>
+          <p:cNvPr id="25" name="文本框 24">
+            <a:extLst>
+              <a:ext uri="{FF2B5EF4-FFF2-40B4-BE49-F238E27FC236}">
+                <a16:creationId xmlns:a16="http://schemas.microsoft.com/office/drawing/2014/main" id="{65350404-AB82-9C6C-74FA-C2D28F2826F0}"/>
+              </a:ext>
+            </a:extLst>
+          </p:cNvPr>
+          <p:cNvSpPr txBox="1"/>
+          <p:nvPr/>
+        </p:nvSpPr>
+        <p:spPr>
+          <a:xfrm>
+            <a:off x="6597978" y="5682936"/>
+            <a:ext cx="4320000" cy="461665"/>
+          </a:xfrm>
+          <a:prstGeom prst="rect">
+            <a:avLst/>
+          </a:prstGeom>
+          <a:noFill/>
+        </p:spPr>
+        <p:txBody>
+          <a:bodyPr wrap="square" rtlCol="0">
+            <a:spAutoFit/>
+          </a:bodyPr>
+          <a:lstStyle/>
+          <a:p>
+            <a:pPr algn="ctr"/>
+            <a:r>
+              <a:rPr kumimoji="1" lang="en-US" altLang="zh-CN" sz="2400" dirty="0">
+                <a:latin typeface="Arial" panose="020B0604020202020204" pitchFamily="34" charset="0"/>
+                <a:cs typeface="Arial" panose="020B0604020202020204" pitchFamily="34" charset="0"/>
+              </a:rPr>
+              <a:t>Relative</a:t>
+            </a:r>
+            <a:r>
+              <a:rPr kumimoji="1" lang="zh-CN" altLang="en-US" sz="2400" dirty="0">
+                <a:latin typeface="Arial" panose="020B0604020202020204" pitchFamily="34" charset="0"/>
+                <a:cs typeface="Arial" panose="020B0604020202020204" pitchFamily="34" charset="0"/>
+              </a:rPr>
+              <a:t> </a:t>
+            </a:r>
+            <a:r>
+              <a:rPr kumimoji="1" lang="en-US" altLang="zh-CN" sz="2400" dirty="0">
+                <a:latin typeface="Arial" panose="020B0604020202020204" pitchFamily="34" charset="0"/>
+                <a:cs typeface="Arial" panose="020B0604020202020204" pitchFamily="34" charset="0"/>
+              </a:rPr>
+              <a:t>size</a:t>
+            </a:r>
+            <a:endParaRPr kumimoji="1" lang="zh-CN" altLang="en-US" sz="2400" dirty="0">
+              <a:latin typeface="Arial" panose="020B0604020202020204" pitchFamily="34" charset="0"/>
+              <a:cs typeface="Arial" panose="020B0604020202020204" pitchFamily="34" charset="0"/>
+            </a:endParaRPr>
+          </a:p>
+        </p:txBody>
+      </p:sp>
+      <p:sp>
+        <p:nvSpPr>
+          <p:cNvPr id="26" name="文本框 25">
+            <a:extLst>
+              <a:ext uri="{FF2B5EF4-FFF2-40B4-BE49-F238E27FC236}">
+                <a16:creationId xmlns:a16="http://schemas.microsoft.com/office/drawing/2014/main" id="{C33D3CA7-B6AA-3A72-257C-3689ACD2B502}"/>
+              </a:ext>
+            </a:extLst>
+          </p:cNvPr>
+          <p:cNvSpPr txBox="1"/>
+          <p:nvPr/>
+        </p:nvSpPr>
+        <p:spPr>
+          <a:xfrm>
+            <a:off x="6599278" y="1204852"/>
+            <a:ext cx="4320000" cy="461665"/>
+          </a:xfrm>
+          <a:prstGeom prst="rect">
+            <a:avLst/>
+          </a:prstGeom>
+          <a:noFill/>
+        </p:spPr>
+        <p:txBody>
+          <a:bodyPr wrap="square" rtlCol="0">
+            <a:spAutoFit/>
+          </a:bodyPr>
+          <a:lstStyle/>
+          <a:p>
+            <a:pPr algn="ctr"/>
+            <a:r>
+              <a:rPr kumimoji="1" lang="en-US" altLang="zh-CN" sz="2400" dirty="0">
+                <a:latin typeface="Arial" panose="020B0604020202020204" pitchFamily="34" charset="0"/>
+                <a:cs typeface="Arial" panose="020B0604020202020204" pitchFamily="34" charset="0"/>
+              </a:rPr>
+              <a:t>TN3K</a:t>
+            </a:r>
+            <a:r>
+              <a:rPr kumimoji="1" lang="zh-CN" altLang="en-US" sz="2400" dirty="0">
+                <a:latin typeface="Arial" panose="020B0604020202020204" pitchFamily="34" charset="0"/>
+                <a:cs typeface="Arial" panose="020B0604020202020204" pitchFamily="34" charset="0"/>
+              </a:rPr>
+              <a:t> </a:t>
+            </a:r>
+            <a:r>
+              <a:rPr kumimoji="1" lang="en-US" altLang="zh-CN" sz="2400" dirty="0">
+                <a:latin typeface="Arial" panose="020B0604020202020204" pitchFamily="34" charset="0"/>
+                <a:cs typeface="Arial" panose="020B0604020202020204" pitchFamily="34" charset="0"/>
+              </a:rPr>
+              <a:t>–</a:t>
+            </a:r>
+            <a:r>
+              <a:rPr kumimoji="1" lang="zh-CN" altLang="en-US" sz="2400" dirty="0">
+                <a:latin typeface="Arial" panose="020B0604020202020204" pitchFamily="34" charset="0"/>
+                <a:cs typeface="Arial" panose="020B0604020202020204" pitchFamily="34" charset="0"/>
+              </a:rPr>
+              <a:t> </a:t>
+            </a:r>
+            <a:r>
+              <a:rPr kumimoji="1" lang="en-US" altLang="zh-CN" sz="2400" dirty="0">
+                <a:latin typeface="Arial" panose="020B0604020202020204" pitchFamily="34" charset="0"/>
+                <a:cs typeface="Arial" panose="020B0604020202020204" pitchFamily="34" charset="0"/>
+              </a:rPr>
+              <a:t>Size</a:t>
+            </a:r>
+            <a:r>
+              <a:rPr kumimoji="1" lang="zh-CN" altLang="en-US" sz="2400" dirty="0">
+                <a:latin typeface="Arial" panose="020B0604020202020204" pitchFamily="34" charset="0"/>
+                <a:cs typeface="Arial" panose="020B0604020202020204" pitchFamily="34" charset="0"/>
+              </a:rPr>
+              <a:t> </a:t>
+            </a:r>
+            <a:r>
+              <a:rPr kumimoji="1" lang="en-US" altLang="zh-CN" sz="2400" dirty="0">
+                <a:latin typeface="Arial" panose="020B0604020202020204" pitchFamily="34" charset="0"/>
+                <a:cs typeface="Arial" panose="020B0604020202020204" pitchFamily="34" charset="0"/>
+              </a:rPr>
+              <a:t>(N=5347</a:t>
+            </a:r>
+            <a:r>
+              <a:rPr kumimoji="1" lang="en-US" altLang="zh-CN" sz="2000" dirty="0">
+                <a:latin typeface="Arial" panose="020B0604020202020204" pitchFamily="34" charset="0"/>
+                <a:cs typeface="Arial" panose="020B0604020202020204" pitchFamily="34" charset="0"/>
+              </a:rPr>
+              <a:t>)</a:t>
+            </a:r>
+            <a:endParaRPr kumimoji="1" lang="zh-CN" altLang="en-US" sz="2000" dirty="0">
+              <a:latin typeface="Arial" panose="020B0604020202020204" pitchFamily="34" charset="0"/>
+              <a:cs typeface="Arial" panose="020B0604020202020204" pitchFamily="34" charset="0"/>
+            </a:endParaRPr>
+          </a:p>
+        </p:txBody>
+      </p:sp>
+      <p:sp>
+        <p:nvSpPr>
+          <p:cNvPr id="27" name="文本框 26">
+            <a:extLst>
+              <a:ext uri="{FF2B5EF4-FFF2-40B4-BE49-F238E27FC236}">
+                <a16:creationId xmlns:a16="http://schemas.microsoft.com/office/drawing/2014/main" id="{06EAB93B-ACD9-9ACA-28E7-D5297E079B57}"/>
+              </a:ext>
+            </a:extLst>
+          </p:cNvPr>
+          <p:cNvSpPr txBox="1"/>
+          <p:nvPr/>
+        </p:nvSpPr>
+        <p:spPr>
+          <a:xfrm rot="16200000">
+            <a:off x="4093565" y="3265359"/>
+            <a:ext cx="4320000" cy="461665"/>
+          </a:xfrm>
+          <a:prstGeom prst="rect">
+            <a:avLst/>
+          </a:prstGeom>
+          <a:noFill/>
+        </p:spPr>
+        <p:txBody>
+          <a:bodyPr wrap="square" rtlCol="0">
+            <a:spAutoFit/>
+          </a:bodyPr>
+          <a:lstStyle/>
+          <a:p>
+            <a:pPr algn="ctr"/>
+            <a:r>
+              <a:rPr kumimoji="1" lang="en-US" altLang="zh-CN" sz="2400" dirty="0">
+                <a:latin typeface="Arial" panose="020B0604020202020204" pitchFamily="34" charset="0"/>
+                <a:cs typeface="Arial" panose="020B0604020202020204" pitchFamily="34" charset="0"/>
+              </a:rPr>
+              <a:t>Density</a:t>
+            </a:r>
+            <a:endParaRPr kumimoji="1" lang="zh-CN" altLang="en-US" sz="2400" dirty="0">
+              <a:latin typeface="Arial" panose="020B0604020202020204" pitchFamily="34" charset="0"/>
+              <a:cs typeface="Arial" panose="020B0604020202020204" pitchFamily="34" charset="0"/>
+            </a:endParaRPr>
+          </a:p>
+        </p:txBody>
+      </p:sp>
+      <p:sp>
+        <p:nvSpPr>
+          <p:cNvPr id="32" name="文本框 31">
+            <a:extLst>
+              <a:ext uri="{FF2B5EF4-FFF2-40B4-BE49-F238E27FC236}">
+                <a16:creationId xmlns:a16="http://schemas.microsoft.com/office/drawing/2014/main" id="{C7E37F86-A5AA-6986-DD6F-BF81C4BBDA74}"/>
+              </a:ext>
+            </a:extLst>
+          </p:cNvPr>
+          <p:cNvSpPr txBox="1"/>
+          <p:nvPr/>
+        </p:nvSpPr>
+        <p:spPr>
+          <a:xfrm>
+            <a:off x="11868692" y="5682936"/>
+            <a:ext cx="4320000" cy="461665"/>
+          </a:xfrm>
+          <a:prstGeom prst="rect">
+            <a:avLst/>
+          </a:prstGeom>
+          <a:noFill/>
+        </p:spPr>
+        <p:txBody>
+          <a:bodyPr wrap="square" rtlCol="0">
+            <a:spAutoFit/>
+          </a:bodyPr>
+          <a:lstStyle/>
+          <a:p>
+            <a:pPr algn="ctr"/>
+            <a:r>
+              <a:rPr kumimoji="1" lang="en-US" altLang="zh-CN" sz="2400" dirty="0">
+                <a:latin typeface="Arial" panose="020B0604020202020204" pitchFamily="34" charset="0"/>
+                <a:cs typeface="Arial" panose="020B0604020202020204" pitchFamily="34" charset="0"/>
+              </a:rPr>
+              <a:t>Pos</a:t>
+            </a:r>
+            <a:r>
+              <a:rPr kumimoji="1" lang="zh-CN" altLang="en-US" sz="2400" dirty="0">
+                <a:latin typeface="Arial" panose="020B0604020202020204" pitchFamily="34" charset="0"/>
+                <a:cs typeface="Arial" panose="020B0604020202020204" pitchFamily="34" charset="0"/>
+              </a:rPr>
+              <a:t> </a:t>
+            </a:r>
+            <a:r>
+              <a:rPr kumimoji="1" lang="en-US" altLang="zh-CN" sz="2400" dirty="0">
+                <a:latin typeface="Arial" panose="020B0604020202020204" pitchFamily="34" charset="0"/>
+                <a:cs typeface="Arial" panose="020B0604020202020204" pitchFamily="34" charset="0"/>
+              </a:rPr>
+              <a:t>x</a:t>
+            </a:r>
+            <a:endParaRPr kumimoji="1" lang="zh-CN" altLang="en-US" sz="2400" dirty="0">
+              <a:latin typeface="Arial" panose="020B0604020202020204" pitchFamily="34" charset="0"/>
+              <a:cs typeface="Arial" panose="020B0604020202020204" pitchFamily="34" charset="0"/>
+            </a:endParaRPr>
+          </a:p>
+        </p:txBody>
+      </p:sp>
+      <p:sp>
+        <p:nvSpPr>
+          <p:cNvPr id="33" name="文本框 32">
+            <a:extLst>
+              <a:ext uri="{FF2B5EF4-FFF2-40B4-BE49-F238E27FC236}">
+                <a16:creationId xmlns:a16="http://schemas.microsoft.com/office/drawing/2014/main" id="{ED17A11F-6493-F2B3-F4B9-084DF90C1CDB}"/>
+              </a:ext>
+            </a:extLst>
+          </p:cNvPr>
+          <p:cNvSpPr txBox="1"/>
+          <p:nvPr/>
+        </p:nvSpPr>
+        <p:spPr>
+          <a:xfrm>
+            <a:off x="16733160" y="5682936"/>
+            <a:ext cx="4320000" cy="461665"/>
+          </a:xfrm>
+          <a:prstGeom prst="rect">
+            <a:avLst/>
+          </a:prstGeom>
+          <a:noFill/>
+        </p:spPr>
+        <p:txBody>
+          <a:bodyPr wrap="square" rtlCol="0">
+            <a:spAutoFit/>
+          </a:bodyPr>
+          <a:lstStyle/>
+          <a:p>
+            <a:pPr algn="ctr"/>
+            <a:r>
+              <a:rPr kumimoji="1" lang="en-US" altLang="zh-CN" sz="2400" dirty="0">
+                <a:latin typeface="Arial" panose="020B0604020202020204" pitchFamily="34" charset="0"/>
+                <a:cs typeface="Arial" panose="020B0604020202020204" pitchFamily="34" charset="0"/>
+              </a:rPr>
+              <a:t>Relative</a:t>
+            </a:r>
+            <a:r>
+              <a:rPr kumimoji="1" lang="zh-CN" altLang="en-US" sz="2400" dirty="0">
+                <a:latin typeface="Arial" panose="020B0604020202020204" pitchFamily="34" charset="0"/>
+                <a:cs typeface="Arial" panose="020B0604020202020204" pitchFamily="34" charset="0"/>
+              </a:rPr>
+              <a:t> </a:t>
+            </a:r>
+            <a:r>
+              <a:rPr kumimoji="1" lang="en-US" altLang="zh-CN" sz="2400" dirty="0">
+                <a:latin typeface="Arial" panose="020B0604020202020204" pitchFamily="34" charset="0"/>
+                <a:cs typeface="Arial" panose="020B0604020202020204" pitchFamily="34" charset="0"/>
+              </a:rPr>
+              <a:t>size</a:t>
+            </a:r>
+            <a:endParaRPr kumimoji="1" lang="zh-CN" altLang="en-US" sz="2400" dirty="0">
+              <a:latin typeface="Arial" panose="020B0604020202020204" pitchFamily="34" charset="0"/>
+              <a:cs typeface="Arial" panose="020B0604020202020204" pitchFamily="34" charset="0"/>
+            </a:endParaRPr>
+          </a:p>
+        </p:txBody>
+      </p:sp>
+      <p:sp>
+        <p:nvSpPr>
+          <p:cNvPr id="34" name="文本框 33">
+            <a:extLst>
+              <a:ext uri="{FF2B5EF4-FFF2-40B4-BE49-F238E27FC236}">
+                <a16:creationId xmlns:a16="http://schemas.microsoft.com/office/drawing/2014/main" id="{FE1E10C3-D6AC-2329-849D-D47D2194AC46}"/>
+              </a:ext>
+            </a:extLst>
+          </p:cNvPr>
+          <p:cNvSpPr txBox="1"/>
+          <p:nvPr/>
+        </p:nvSpPr>
+        <p:spPr>
+          <a:xfrm rot="16200000">
+            <a:off x="9346351" y="3265359"/>
+            <a:ext cx="4320000" cy="461665"/>
+          </a:xfrm>
+          <a:prstGeom prst="rect">
+            <a:avLst/>
+          </a:prstGeom>
+          <a:noFill/>
+        </p:spPr>
+        <p:txBody>
+          <a:bodyPr wrap="square" rtlCol="0">
+            <a:spAutoFit/>
+          </a:bodyPr>
+          <a:lstStyle/>
+          <a:p>
+            <a:pPr algn="ctr"/>
+            <a:r>
+              <a:rPr kumimoji="1" lang="en-US" altLang="zh-CN" sz="2400" dirty="0">
+                <a:latin typeface="Arial" panose="020B0604020202020204" pitchFamily="34" charset="0"/>
+                <a:cs typeface="Arial" panose="020B0604020202020204" pitchFamily="34" charset="0"/>
+              </a:rPr>
+              <a:t>Pos</a:t>
+            </a:r>
+            <a:r>
+              <a:rPr kumimoji="1" lang="zh-CN" altLang="en-US" sz="2400" dirty="0">
+                <a:latin typeface="Arial" panose="020B0604020202020204" pitchFamily="34" charset="0"/>
+                <a:cs typeface="Arial" panose="020B0604020202020204" pitchFamily="34" charset="0"/>
+              </a:rPr>
+              <a:t> </a:t>
+            </a:r>
+            <a:r>
+              <a:rPr kumimoji="1" lang="en-US" altLang="zh-CN" sz="2400" dirty="0">
+                <a:latin typeface="Arial" panose="020B0604020202020204" pitchFamily="34" charset="0"/>
+                <a:cs typeface="Arial" panose="020B0604020202020204" pitchFamily="34" charset="0"/>
+              </a:rPr>
+              <a:t>y</a:t>
+            </a:r>
+            <a:endParaRPr kumimoji="1" lang="zh-CN" altLang="en-US" sz="2400" dirty="0">
+              <a:latin typeface="Arial" panose="020B0604020202020204" pitchFamily="34" charset="0"/>
+              <a:cs typeface="Arial" panose="020B0604020202020204" pitchFamily="34" charset="0"/>
+            </a:endParaRPr>
+          </a:p>
+        </p:txBody>
+      </p:sp>
+      <p:sp>
+        <p:nvSpPr>
+          <p:cNvPr id="35" name="文本框 34">
+            <a:extLst>
+              <a:ext uri="{FF2B5EF4-FFF2-40B4-BE49-F238E27FC236}">
+                <a16:creationId xmlns:a16="http://schemas.microsoft.com/office/drawing/2014/main" id="{404BE88D-4B96-1695-BCBE-2DDF7F322518}"/>
+              </a:ext>
+            </a:extLst>
+          </p:cNvPr>
+          <p:cNvSpPr txBox="1"/>
+          <p:nvPr/>
+        </p:nvSpPr>
+        <p:spPr>
+          <a:xfrm rot="16200000">
+            <a:off x="13973177" y="3265359"/>
+            <a:ext cx="4320000" cy="461665"/>
+          </a:xfrm>
+          <a:prstGeom prst="rect">
+            <a:avLst/>
+          </a:prstGeom>
+          <a:noFill/>
+        </p:spPr>
+        <p:txBody>
+          <a:bodyPr wrap="square" rtlCol="0">
+            <a:spAutoFit/>
+          </a:bodyPr>
+          <a:lstStyle/>
+          <a:p>
+            <a:pPr algn="ctr"/>
+            <a:r>
+              <a:rPr kumimoji="1" lang="en-US" altLang="zh-CN" sz="2400" dirty="0">
+                <a:latin typeface="Arial" panose="020B0604020202020204" pitchFamily="34" charset="0"/>
+                <a:cs typeface="Arial" panose="020B0604020202020204" pitchFamily="34" charset="0"/>
+              </a:rPr>
+              <a:t>Density</a:t>
+            </a:r>
+            <a:endParaRPr kumimoji="1" lang="zh-CN" altLang="en-US" sz="2400" dirty="0">
+              <a:latin typeface="Arial" panose="020B0604020202020204" pitchFamily="34" charset="0"/>
+              <a:cs typeface="Arial" panose="020B0604020202020204" pitchFamily="34" charset="0"/>
+            </a:endParaRPr>
+          </a:p>
+        </p:txBody>
+      </p:sp>
+      <p:sp>
+        <p:nvSpPr>
+          <p:cNvPr id="36" name="文本框 35">
+            <a:extLst>
+              <a:ext uri="{FF2B5EF4-FFF2-40B4-BE49-F238E27FC236}">
+                <a16:creationId xmlns:a16="http://schemas.microsoft.com/office/drawing/2014/main" id="{2206714E-2A1A-1CE1-CD85-F81DA70ECEDF}"/>
+              </a:ext>
+            </a:extLst>
+          </p:cNvPr>
+          <p:cNvSpPr txBox="1"/>
+          <p:nvPr/>
+        </p:nvSpPr>
+        <p:spPr>
+          <a:xfrm>
+            <a:off x="11868691" y="1204852"/>
+            <a:ext cx="4320000" cy="461665"/>
+          </a:xfrm>
+          <a:prstGeom prst="rect">
+            <a:avLst/>
+          </a:prstGeom>
+          <a:noFill/>
+        </p:spPr>
+        <p:txBody>
+          <a:bodyPr wrap="square" rtlCol="0">
+            <a:spAutoFit/>
+          </a:bodyPr>
+          <a:lstStyle/>
+          <a:p>
+            <a:pPr algn="ctr"/>
+            <a:r>
+              <a:rPr kumimoji="1" lang="en-US" altLang="zh-CN" sz="2400" dirty="0">
+                <a:latin typeface="Arial" panose="020B0604020202020204" pitchFamily="34" charset="0"/>
+                <a:cs typeface="Arial" panose="020B0604020202020204" pitchFamily="34" charset="0"/>
+              </a:rPr>
+              <a:t>TN5K</a:t>
+            </a:r>
+            <a:r>
+              <a:rPr kumimoji="1" lang="zh-CN" altLang="en-US" sz="2400" dirty="0">
+                <a:latin typeface="Arial" panose="020B0604020202020204" pitchFamily="34" charset="0"/>
+                <a:cs typeface="Arial" panose="020B0604020202020204" pitchFamily="34" charset="0"/>
+              </a:rPr>
+              <a:t> </a:t>
+            </a:r>
+            <a:r>
+              <a:rPr kumimoji="1" lang="en-US" altLang="zh-CN" sz="2400" dirty="0">
+                <a:latin typeface="Arial" panose="020B0604020202020204" pitchFamily="34" charset="0"/>
+                <a:cs typeface="Arial" panose="020B0604020202020204" pitchFamily="34" charset="0"/>
+              </a:rPr>
+              <a:t>–</a:t>
+            </a:r>
+            <a:r>
+              <a:rPr kumimoji="1" lang="zh-CN" altLang="en-US" sz="2400" dirty="0">
+                <a:latin typeface="Arial" panose="020B0604020202020204" pitchFamily="34" charset="0"/>
+                <a:cs typeface="Arial" panose="020B0604020202020204" pitchFamily="34" charset="0"/>
+              </a:rPr>
+              <a:t> </a:t>
+            </a:r>
+            <a:r>
+              <a:rPr kumimoji="1" lang="en-US" altLang="zh-CN" sz="2400" dirty="0">
+                <a:latin typeface="Arial" panose="020B0604020202020204" pitchFamily="34" charset="0"/>
+                <a:cs typeface="Arial" panose="020B0604020202020204" pitchFamily="34" charset="0"/>
+              </a:rPr>
+              <a:t>Position</a:t>
+            </a:r>
+            <a:r>
+              <a:rPr kumimoji="1" lang="zh-CN" altLang="en-US" sz="2400" dirty="0">
+                <a:latin typeface="Arial" panose="020B0604020202020204" pitchFamily="34" charset="0"/>
+                <a:cs typeface="Arial" panose="020B0604020202020204" pitchFamily="34" charset="0"/>
+              </a:rPr>
+              <a:t> </a:t>
+            </a:r>
+            <a:r>
+              <a:rPr kumimoji="1" lang="en-US" altLang="zh-CN" sz="2400" dirty="0">
+                <a:latin typeface="Arial" panose="020B0604020202020204" pitchFamily="34" charset="0"/>
+                <a:cs typeface="Arial" panose="020B0604020202020204" pitchFamily="34" charset="0"/>
+              </a:rPr>
+              <a:t>(N=5000</a:t>
+            </a:r>
+            <a:r>
+              <a:rPr kumimoji="1" lang="en-US" altLang="zh-CN" sz="2000" dirty="0">
+                <a:latin typeface="Arial" panose="020B0604020202020204" pitchFamily="34" charset="0"/>
+                <a:cs typeface="Arial" panose="020B0604020202020204" pitchFamily="34" charset="0"/>
+              </a:rPr>
+              <a:t>)</a:t>
+            </a:r>
+            <a:endParaRPr kumimoji="1" lang="zh-CN" altLang="en-US" sz="2000" dirty="0">
+              <a:latin typeface="Arial" panose="020B0604020202020204" pitchFamily="34" charset="0"/>
+              <a:cs typeface="Arial" panose="020B0604020202020204" pitchFamily="34" charset="0"/>
+            </a:endParaRPr>
+          </a:p>
+        </p:txBody>
+      </p:sp>
+      <p:sp>
+        <p:nvSpPr>
+          <p:cNvPr id="37" name="文本框 36">
+            <a:extLst>
+              <a:ext uri="{FF2B5EF4-FFF2-40B4-BE49-F238E27FC236}">
+                <a16:creationId xmlns:a16="http://schemas.microsoft.com/office/drawing/2014/main" id="{37AAC4B5-1E32-9F17-B1FD-C59FE675116B}"/>
+              </a:ext>
+            </a:extLst>
+          </p:cNvPr>
+          <p:cNvSpPr txBox="1"/>
+          <p:nvPr/>
+        </p:nvSpPr>
+        <p:spPr>
+          <a:xfrm>
+            <a:off x="16733158" y="1204852"/>
+            <a:ext cx="4320000" cy="461665"/>
+          </a:xfrm>
+          <a:prstGeom prst="rect">
+            <a:avLst/>
+          </a:prstGeom>
+          <a:noFill/>
+        </p:spPr>
+        <p:txBody>
+          <a:bodyPr wrap="square" rtlCol="0">
+            <a:spAutoFit/>
+          </a:bodyPr>
+          <a:lstStyle/>
+          <a:p>
+            <a:pPr algn="ctr"/>
+            <a:r>
+              <a:rPr kumimoji="1" lang="en-US" altLang="zh-CN" sz="2400" dirty="0">
+                <a:latin typeface="Arial" panose="020B0604020202020204" pitchFamily="34" charset="0"/>
+                <a:cs typeface="Arial" panose="020B0604020202020204" pitchFamily="34" charset="0"/>
+              </a:rPr>
+              <a:t>TN5K</a:t>
+            </a:r>
+            <a:r>
+              <a:rPr kumimoji="1" lang="zh-CN" altLang="en-US" sz="2400" dirty="0">
+                <a:latin typeface="Arial" panose="020B0604020202020204" pitchFamily="34" charset="0"/>
+                <a:cs typeface="Arial" panose="020B0604020202020204" pitchFamily="34" charset="0"/>
+              </a:rPr>
+              <a:t> </a:t>
+            </a:r>
+            <a:r>
+              <a:rPr kumimoji="1" lang="en-US" altLang="zh-CN" sz="2400" dirty="0">
+                <a:latin typeface="Arial" panose="020B0604020202020204" pitchFamily="34" charset="0"/>
+                <a:cs typeface="Arial" panose="020B0604020202020204" pitchFamily="34" charset="0"/>
+              </a:rPr>
+              <a:t>–</a:t>
+            </a:r>
+            <a:r>
+              <a:rPr kumimoji="1" lang="zh-CN" altLang="en-US" sz="2400" dirty="0">
+                <a:latin typeface="Arial" panose="020B0604020202020204" pitchFamily="34" charset="0"/>
+                <a:cs typeface="Arial" panose="020B0604020202020204" pitchFamily="34" charset="0"/>
+              </a:rPr>
+              <a:t> </a:t>
+            </a:r>
+            <a:r>
+              <a:rPr kumimoji="1" lang="en-US" altLang="zh-CN" sz="2400" dirty="0">
+                <a:latin typeface="Arial" panose="020B0604020202020204" pitchFamily="34" charset="0"/>
+                <a:cs typeface="Arial" panose="020B0604020202020204" pitchFamily="34" charset="0"/>
+              </a:rPr>
+              <a:t>Size</a:t>
+            </a:r>
+            <a:r>
+              <a:rPr kumimoji="1" lang="zh-CN" altLang="en-US" sz="2400" dirty="0">
+                <a:latin typeface="Arial" panose="020B0604020202020204" pitchFamily="34" charset="0"/>
+                <a:cs typeface="Arial" panose="020B0604020202020204" pitchFamily="34" charset="0"/>
+              </a:rPr>
+              <a:t> </a:t>
+            </a:r>
+            <a:r>
+              <a:rPr kumimoji="1" lang="en-US" altLang="zh-CN" sz="2400" dirty="0">
+                <a:latin typeface="Arial" panose="020B0604020202020204" pitchFamily="34" charset="0"/>
+                <a:cs typeface="Arial" panose="020B0604020202020204" pitchFamily="34" charset="0"/>
+              </a:rPr>
+              <a:t>(N=5000)</a:t>
+            </a:r>
+            <a:endParaRPr kumimoji="1" lang="zh-CN" altLang="en-US" sz="2400" dirty="0">
+              <a:latin typeface="Arial" panose="020B0604020202020204" pitchFamily="34" charset="0"/>
+              <a:cs typeface="Arial" panose="020B0604020202020204" pitchFamily="34" charset="0"/>
+            </a:endParaRPr>
+          </a:p>
+        </p:txBody>
+      </p:sp>
+      <p:sp>
+        <p:nvSpPr>
+          <p:cNvPr id="38" name="文本框 37">
+            <a:extLst>
+              <a:ext uri="{FF2B5EF4-FFF2-40B4-BE49-F238E27FC236}">
+                <a16:creationId xmlns:a16="http://schemas.microsoft.com/office/drawing/2014/main" id="{7A8FE8D2-D0E1-6817-C44B-C8DDEA1F7B93}"/>
+              </a:ext>
+            </a:extLst>
+          </p:cNvPr>
+          <p:cNvSpPr txBox="1"/>
+          <p:nvPr/>
+        </p:nvSpPr>
+        <p:spPr>
+          <a:xfrm>
+            <a:off x="1733509" y="6121826"/>
+            <a:ext cx="4450978" cy="461665"/>
+          </a:xfrm>
+          <a:prstGeom prst="rect">
+            <a:avLst/>
+          </a:prstGeom>
+          <a:noFill/>
+        </p:spPr>
+        <p:txBody>
+          <a:bodyPr wrap="square" rtlCol="0">
+            <a:spAutoFit/>
+          </a:bodyPr>
+          <a:lstStyle/>
+          <a:p>
+            <a:pPr algn="ctr"/>
+            <a:r>
+              <a:rPr kumimoji="1" lang="en-US" altLang="zh-CN" sz="2400" dirty="0" err="1">
+                <a:latin typeface="Arial" panose="020B0604020202020204" pitchFamily="34" charset="0"/>
+                <a:cs typeface="Arial" panose="020B0604020202020204" pitchFamily="34" charset="0"/>
+              </a:rPr>
+              <a:t>ThyroidXL</a:t>
+            </a:r>
+            <a:r>
+              <a:rPr kumimoji="1" lang="en-US" altLang="zh-CN" sz="2400" dirty="0">
+                <a:latin typeface="Arial" panose="020B0604020202020204" pitchFamily="34" charset="0"/>
+                <a:cs typeface="Arial" panose="020B0604020202020204" pitchFamily="34" charset="0"/>
+              </a:rPr>
+              <a:t>–</a:t>
+            </a:r>
+            <a:r>
+              <a:rPr kumimoji="1" lang="zh-CN" altLang="en-US" sz="2400" dirty="0">
+                <a:latin typeface="Arial" panose="020B0604020202020204" pitchFamily="34" charset="0"/>
+                <a:cs typeface="Arial" panose="020B0604020202020204" pitchFamily="34" charset="0"/>
+              </a:rPr>
+              <a:t> </a:t>
+            </a:r>
+            <a:r>
+              <a:rPr kumimoji="1" lang="en-US" altLang="zh-CN" sz="2400" dirty="0">
+                <a:latin typeface="Arial" panose="020B0604020202020204" pitchFamily="34" charset="0"/>
+                <a:cs typeface="Arial" panose="020B0604020202020204" pitchFamily="34" charset="0"/>
+              </a:rPr>
+              <a:t>Position</a:t>
+            </a:r>
+            <a:r>
+              <a:rPr kumimoji="1" lang="zh-CN" altLang="en-US" sz="2400" dirty="0">
+                <a:latin typeface="Arial" panose="020B0604020202020204" pitchFamily="34" charset="0"/>
+                <a:cs typeface="Arial" panose="020B0604020202020204" pitchFamily="34" charset="0"/>
+              </a:rPr>
+              <a:t> </a:t>
+            </a:r>
+            <a:r>
+              <a:rPr kumimoji="1" lang="en-US" altLang="zh-CN" sz="2400" dirty="0">
+                <a:latin typeface="Arial" panose="020B0604020202020204" pitchFamily="34" charset="0"/>
+                <a:cs typeface="Arial" panose="020B0604020202020204" pitchFamily="34" charset="0"/>
+              </a:rPr>
+              <a:t>(N=11635)</a:t>
+            </a:r>
+            <a:endParaRPr kumimoji="1" lang="zh-CN" altLang="en-US" sz="2400" dirty="0">
+              <a:latin typeface="Arial" panose="020B0604020202020204" pitchFamily="34" charset="0"/>
+              <a:cs typeface="Arial" panose="020B0604020202020204" pitchFamily="34" charset="0"/>
+            </a:endParaRPr>
+          </a:p>
+        </p:txBody>
+      </p:sp>
+      <p:sp>
+        <p:nvSpPr>
+          <p:cNvPr id="39" name="文本框 38">
+            <a:extLst>
+              <a:ext uri="{FF2B5EF4-FFF2-40B4-BE49-F238E27FC236}">
+                <a16:creationId xmlns:a16="http://schemas.microsoft.com/office/drawing/2014/main" id="{F858EA0E-0D76-BEBF-2622-01801FA274AF}"/>
+              </a:ext>
+            </a:extLst>
+          </p:cNvPr>
+          <p:cNvSpPr txBox="1"/>
+          <p:nvPr/>
+        </p:nvSpPr>
+        <p:spPr>
+          <a:xfrm rot="16200000">
+            <a:off x="-533263" y="8182966"/>
+            <a:ext cx="4320000" cy="461665"/>
+          </a:xfrm>
+          <a:prstGeom prst="rect">
+            <a:avLst/>
+          </a:prstGeom>
+          <a:noFill/>
+        </p:spPr>
+        <p:txBody>
+          <a:bodyPr wrap="square" rtlCol="0">
+            <a:spAutoFit/>
+          </a:bodyPr>
+          <a:lstStyle/>
+          <a:p>
+            <a:pPr algn="ctr"/>
+            <a:r>
+              <a:rPr kumimoji="1" lang="en-US" altLang="zh-CN" sz="2400" dirty="0">
+                <a:latin typeface="Arial" panose="020B0604020202020204" pitchFamily="34" charset="0"/>
+                <a:cs typeface="Arial" panose="020B0604020202020204" pitchFamily="34" charset="0"/>
+              </a:rPr>
+              <a:t>Pos</a:t>
+            </a:r>
+            <a:r>
+              <a:rPr kumimoji="1" lang="zh-CN" altLang="en-US" sz="2400" dirty="0">
+                <a:latin typeface="Arial" panose="020B0604020202020204" pitchFamily="34" charset="0"/>
+                <a:cs typeface="Arial" panose="020B0604020202020204" pitchFamily="34" charset="0"/>
+              </a:rPr>
+              <a:t> </a:t>
+            </a:r>
+            <a:r>
+              <a:rPr kumimoji="1" lang="en-US" altLang="zh-CN" sz="2400" dirty="0">
+                <a:latin typeface="Arial" panose="020B0604020202020204" pitchFamily="34" charset="0"/>
+                <a:cs typeface="Arial" panose="020B0604020202020204" pitchFamily="34" charset="0"/>
+              </a:rPr>
+              <a:t>y</a:t>
+            </a:r>
+            <a:endParaRPr kumimoji="1" lang="zh-CN" altLang="en-US" sz="2400" dirty="0">
+              <a:latin typeface="Arial" panose="020B0604020202020204" pitchFamily="34" charset="0"/>
+              <a:cs typeface="Arial" panose="020B0604020202020204" pitchFamily="34" charset="0"/>
+            </a:endParaRPr>
+          </a:p>
+        </p:txBody>
+      </p:sp>
+      <p:sp>
+        <p:nvSpPr>
+          <p:cNvPr id="41" name="文本框 40">
+            <a:extLst>
+              <a:ext uri="{FF2B5EF4-FFF2-40B4-BE49-F238E27FC236}">
+                <a16:creationId xmlns:a16="http://schemas.microsoft.com/office/drawing/2014/main" id="{AAE4E19F-E5E0-D0B0-A1C3-A22D62BF0AAB}"/>
+              </a:ext>
+            </a:extLst>
+          </p:cNvPr>
+          <p:cNvSpPr txBox="1"/>
+          <p:nvPr/>
+        </p:nvSpPr>
+        <p:spPr>
+          <a:xfrm>
+            <a:off x="1733508" y="10600543"/>
+            <a:ext cx="4320000" cy="461665"/>
+          </a:xfrm>
+          <a:prstGeom prst="rect">
+            <a:avLst/>
+          </a:prstGeom>
+          <a:noFill/>
+        </p:spPr>
+        <p:txBody>
+          <a:bodyPr wrap="square" rtlCol="0">
+            <a:spAutoFit/>
+          </a:bodyPr>
+          <a:lstStyle/>
+          <a:p>
+            <a:pPr algn="ctr"/>
+            <a:r>
+              <a:rPr kumimoji="1" lang="en-US" altLang="zh-CN" sz="2400" dirty="0">
+                <a:latin typeface="Arial" panose="020B0604020202020204" pitchFamily="34" charset="0"/>
+                <a:cs typeface="Arial" panose="020B0604020202020204" pitchFamily="34" charset="0"/>
+              </a:rPr>
+              <a:t>Pos</a:t>
+            </a:r>
+            <a:r>
+              <a:rPr kumimoji="1" lang="zh-CN" altLang="en-US" sz="2400" dirty="0">
+                <a:latin typeface="Arial" panose="020B0604020202020204" pitchFamily="34" charset="0"/>
+                <a:cs typeface="Arial" panose="020B0604020202020204" pitchFamily="34" charset="0"/>
+              </a:rPr>
+              <a:t> </a:t>
+            </a:r>
+            <a:r>
+              <a:rPr kumimoji="1" lang="en-US" altLang="zh-CN" sz="2400" dirty="0">
+                <a:latin typeface="Arial" panose="020B0604020202020204" pitchFamily="34" charset="0"/>
+                <a:cs typeface="Arial" panose="020B0604020202020204" pitchFamily="34" charset="0"/>
+              </a:rPr>
+              <a:t>x</a:t>
+            </a:r>
+            <a:endParaRPr kumimoji="1" lang="zh-CN" altLang="en-US" sz="2400" dirty="0">
+              <a:latin typeface="Arial" panose="020B0604020202020204" pitchFamily="34" charset="0"/>
+              <a:cs typeface="Arial" panose="020B0604020202020204" pitchFamily="34" charset="0"/>
+            </a:endParaRPr>
+          </a:p>
+        </p:txBody>
+      </p:sp>
+      <p:sp>
+        <p:nvSpPr>
+          <p:cNvPr id="43" name="文本框 42">
+            <a:extLst>
+              <a:ext uri="{FF2B5EF4-FFF2-40B4-BE49-F238E27FC236}">
+                <a16:creationId xmlns:a16="http://schemas.microsoft.com/office/drawing/2014/main" id="{280EE2D3-ED69-4B75-9B74-FD7776BC2883}"/>
+              </a:ext>
+            </a:extLst>
+          </p:cNvPr>
+          <p:cNvSpPr txBox="1"/>
+          <p:nvPr/>
+        </p:nvSpPr>
+        <p:spPr>
+          <a:xfrm>
+            <a:off x="6597976" y="10600856"/>
+            <a:ext cx="4320000" cy="461665"/>
+          </a:xfrm>
+          <a:prstGeom prst="rect">
+            <a:avLst/>
+          </a:prstGeom>
+          <a:noFill/>
+        </p:spPr>
+        <p:txBody>
+          <a:bodyPr wrap="square" rtlCol="0">
+            <a:spAutoFit/>
+          </a:bodyPr>
+          <a:lstStyle/>
+          <a:p>
+            <a:pPr algn="ctr"/>
+            <a:r>
+              <a:rPr kumimoji="1" lang="en-US" altLang="zh-CN" sz="2400" dirty="0">
+                <a:latin typeface="Arial" panose="020B0604020202020204" pitchFamily="34" charset="0"/>
+                <a:cs typeface="Arial" panose="020B0604020202020204" pitchFamily="34" charset="0"/>
+              </a:rPr>
+              <a:t>Relative</a:t>
+            </a:r>
+            <a:r>
+              <a:rPr kumimoji="1" lang="zh-CN" altLang="en-US" sz="2400" dirty="0">
+                <a:latin typeface="Arial" panose="020B0604020202020204" pitchFamily="34" charset="0"/>
+                <a:cs typeface="Arial" panose="020B0604020202020204" pitchFamily="34" charset="0"/>
+              </a:rPr>
+              <a:t> </a:t>
+            </a:r>
+            <a:r>
+              <a:rPr kumimoji="1" lang="en-US" altLang="zh-CN" sz="2400" dirty="0">
+                <a:latin typeface="Arial" panose="020B0604020202020204" pitchFamily="34" charset="0"/>
+                <a:cs typeface="Arial" panose="020B0604020202020204" pitchFamily="34" charset="0"/>
+              </a:rPr>
+              <a:t>size</a:t>
+            </a:r>
+            <a:endParaRPr kumimoji="1" lang="zh-CN" altLang="en-US" sz="2400" dirty="0">
+              <a:latin typeface="Arial" panose="020B0604020202020204" pitchFamily="34" charset="0"/>
+              <a:cs typeface="Arial" panose="020B0604020202020204" pitchFamily="34" charset="0"/>
+            </a:endParaRPr>
+          </a:p>
+        </p:txBody>
+      </p:sp>
+      <p:sp>
+        <p:nvSpPr>
+          <p:cNvPr id="44" name="文本框 43">
+            <a:extLst>
+              <a:ext uri="{FF2B5EF4-FFF2-40B4-BE49-F238E27FC236}">
+                <a16:creationId xmlns:a16="http://schemas.microsoft.com/office/drawing/2014/main" id="{5BE37944-3F83-AC3C-5DFC-CB8F36C15C6E}"/>
+              </a:ext>
+            </a:extLst>
+          </p:cNvPr>
+          <p:cNvSpPr txBox="1"/>
+          <p:nvPr/>
+        </p:nvSpPr>
+        <p:spPr>
+          <a:xfrm>
+            <a:off x="6599276" y="6122772"/>
+            <a:ext cx="4320000" cy="461665"/>
+          </a:xfrm>
+          <a:prstGeom prst="rect">
+            <a:avLst/>
+          </a:prstGeom>
+          <a:noFill/>
+        </p:spPr>
+        <p:txBody>
+          <a:bodyPr wrap="square" rtlCol="0">
+            <a:spAutoFit/>
+          </a:bodyPr>
+          <a:lstStyle/>
+          <a:p>
+            <a:pPr algn="ctr"/>
+            <a:r>
+              <a:rPr kumimoji="1" lang="en-US" altLang="zh-CN" sz="2400" dirty="0" err="1">
+                <a:latin typeface="Arial" panose="020B0604020202020204" pitchFamily="34" charset="0"/>
+                <a:cs typeface="Arial" panose="020B0604020202020204" pitchFamily="34" charset="0"/>
+              </a:rPr>
+              <a:t>ThyroidXL</a:t>
+            </a:r>
+            <a:r>
+              <a:rPr kumimoji="1" lang="zh-CN" altLang="en-US" sz="2400" dirty="0">
+                <a:latin typeface="Arial" panose="020B0604020202020204" pitchFamily="34" charset="0"/>
+                <a:cs typeface="Arial" panose="020B0604020202020204" pitchFamily="34" charset="0"/>
+              </a:rPr>
+              <a:t> </a:t>
+            </a:r>
+            <a:r>
+              <a:rPr kumimoji="1" lang="en-US" altLang="zh-CN" sz="2400" dirty="0">
+                <a:latin typeface="Arial" panose="020B0604020202020204" pitchFamily="34" charset="0"/>
+                <a:cs typeface="Arial" panose="020B0604020202020204" pitchFamily="34" charset="0"/>
+              </a:rPr>
+              <a:t>–</a:t>
+            </a:r>
+            <a:r>
+              <a:rPr kumimoji="1" lang="zh-CN" altLang="en-US" sz="2400" dirty="0">
+                <a:latin typeface="Arial" panose="020B0604020202020204" pitchFamily="34" charset="0"/>
+                <a:cs typeface="Arial" panose="020B0604020202020204" pitchFamily="34" charset="0"/>
+              </a:rPr>
+              <a:t> </a:t>
+            </a:r>
+            <a:r>
+              <a:rPr kumimoji="1" lang="en-US" altLang="zh-CN" sz="2400" dirty="0">
+                <a:latin typeface="Arial" panose="020B0604020202020204" pitchFamily="34" charset="0"/>
+                <a:cs typeface="Arial" panose="020B0604020202020204" pitchFamily="34" charset="0"/>
+              </a:rPr>
+              <a:t>Size</a:t>
+            </a:r>
+            <a:r>
+              <a:rPr kumimoji="1" lang="zh-CN" altLang="en-US" sz="2400" dirty="0">
+                <a:latin typeface="Arial" panose="020B0604020202020204" pitchFamily="34" charset="0"/>
+                <a:cs typeface="Arial" panose="020B0604020202020204" pitchFamily="34" charset="0"/>
+              </a:rPr>
+              <a:t> </a:t>
+            </a:r>
+            <a:r>
+              <a:rPr kumimoji="1" lang="en-US" altLang="zh-CN" sz="2400" dirty="0">
+                <a:latin typeface="Arial" panose="020B0604020202020204" pitchFamily="34" charset="0"/>
+                <a:cs typeface="Arial" panose="020B0604020202020204" pitchFamily="34" charset="0"/>
+              </a:rPr>
+              <a:t>(N=11635)</a:t>
+            </a:r>
+            <a:endParaRPr kumimoji="1" lang="zh-CN" altLang="en-US" sz="2400" dirty="0">
+              <a:latin typeface="Arial" panose="020B0604020202020204" pitchFamily="34" charset="0"/>
+              <a:cs typeface="Arial" panose="020B0604020202020204" pitchFamily="34" charset="0"/>
+            </a:endParaRPr>
+          </a:p>
+        </p:txBody>
+      </p:sp>
+      <p:sp>
+        <p:nvSpPr>
+          <p:cNvPr id="45" name="文本框 44">
+            <a:extLst>
+              <a:ext uri="{FF2B5EF4-FFF2-40B4-BE49-F238E27FC236}">
+                <a16:creationId xmlns:a16="http://schemas.microsoft.com/office/drawing/2014/main" id="{B300CFFF-215A-8116-9303-9F346DB2A244}"/>
+              </a:ext>
+            </a:extLst>
+          </p:cNvPr>
+          <p:cNvSpPr txBox="1"/>
+          <p:nvPr/>
+        </p:nvSpPr>
+        <p:spPr>
+          <a:xfrm rot="16200000">
+            <a:off x="4093563" y="8183279"/>
+            <a:ext cx="4320000" cy="461665"/>
+          </a:xfrm>
+          <a:prstGeom prst="rect">
+            <a:avLst/>
+          </a:prstGeom>
+          <a:noFill/>
+        </p:spPr>
+        <p:txBody>
+          <a:bodyPr wrap="square" rtlCol="0">
+            <a:spAutoFit/>
+          </a:bodyPr>
+          <a:lstStyle/>
+          <a:p>
+            <a:pPr algn="ctr"/>
+            <a:r>
+              <a:rPr kumimoji="1" lang="en-US" altLang="zh-CN" sz="2400" dirty="0">
+                <a:latin typeface="Arial" panose="020B0604020202020204" pitchFamily="34" charset="0"/>
+                <a:cs typeface="Arial" panose="020B0604020202020204" pitchFamily="34" charset="0"/>
+              </a:rPr>
+              <a:t>Density</a:t>
+            </a:r>
+            <a:endParaRPr kumimoji="1" lang="zh-CN" altLang="en-US" sz="2400" dirty="0">
+              <a:latin typeface="Arial" panose="020B0604020202020204" pitchFamily="34" charset="0"/>
+              <a:cs typeface="Arial" panose="020B0604020202020204" pitchFamily="34" charset="0"/>
+            </a:endParaRPr>
+          </a:p>
+        </p:txBody>
+      </p:sp>
+      <p:sp>
+        <p:nvSpPr>
+          <p:cNvPr id="48" name="文本框 47">
+            <a:extLst>
+              <a:ext uri="{FF2B5EF4-FFF2-40B4-BE49-F238E27FC236}">
+                <a16:creationId xmlns:a16="http://schemas.microsoft.com/office/drawing/2014/main" id="{958EE90C-5C82-6FB2-500D-8C0612318D6B}"/>
+              </a:ext>
+            </a:extLst>
+          </p:cNvPr>
+          <p:cNvSpPr txBox="1"/>
+          <p:nvPr/>
+        </p:nvSpPr>
+        <p:spPr>
+          <a:xfrm>
+            <a:off x="11868690" y="10600856"/>
+            <a:ext cx="4320000" cy="461665"/>
+          </a:xfrm>
+          <a:prstGeom prst="rect">
+            <a:avLst/>
+          </a:prstGeom>
+          <a:noFill/>
+        </p:spPr>
+        <p:txBody>
+          <a:bodyPr wrap="square" rtlCol="0">
+            <a:spAutoFit/>
+          </a:bodyPr>
+          <a:lstStyle/>
+          <a:p>
+            <a:pPr algn="ctr"/>
+            <a:r>
+              <a:rPr kumimoji="1" lang="en-US" altLang="zh-CN" sz="2400" dirty="0">
+                <a:latin typeface="Arial" panose="020B0604020202020204" pitchFamily="34" charset="0"/>
+                <a:cs typeface="Arial" panose="020B0604020202020204" pitchFamily="34" charset="0"/>
+              </a:rPr>
+              <a:t>Pos</a:t>
+            </a:r>
+            <a:r>
+              <a:rPr kumimoji="1" lang="zh-CN" altLang="en-US" sz="2400" dirty="0">
+                <a:latin typeface="Arial" panose="020B0604020202020204" pitchFamily="34" charset="0"/>
+                <a:cs typeface="Arial" panose="020B0604020202020204" pitchFamily="34" charset="0"/>
+              </a:rPr>
+              <a:t> </a:t>
+            </a:r>
+            <a:r>
+              <a:rPr kumimoji="1" lang="en-US" altLang="zh-CN" sz="2400" dirty="0">
+                <a:latin typeface="Arial" panose="020B0604020202020204" pitchFamily="34" charset="0"/>
+                <a:cs typeface="Arial" panose="020B0604020202020204" pitchFamily="34" charset="0"/>
+              </a:rPr>
+              <a:t>x</a:t>
+            </a:r>
+            <a:endParaRPr kumimoji="1" lang="zh-CN" altLang="en-US" sz="2400" dirty="0">
+              <a:latin typeface="Arial" panose="020B0604020202020204" pitchFamily="34" charset="0"/>
+              <a:cs typeface="Arial" panose="020B0604020202020204" pitchFamily="34" charset="0"/>
+            </a:endParaRPr>
+          </a:p>
+        </p:txBody>
+      </p:sp>
+      <p:sp>
+        <p:nvSpPr>
+          <p:cNvPr id="49" name="文本框 48">
+            <a:extLst>
+              <a:ext uri="{FF2B5EF4-FFF2-40B4-BE49-F238E27FC236}">
+                <a16:creationId xmlns:a16="http://schemas.microsoft.com/office/drawing/2014/main" id="{8FFEC03E-F606-B11D-FF3F-24FAF64A055C}"/>
+              </a:ext>
+            </a:extLst>
+          </p:cNvPr>
+          <p:cNvSpPr txBox="1"/>
+          <p:nvPr/>
+        </p:nvSpPr>
+        <p:spPr>
+          <a:xfrm>
+            <a:off x="16733158" y="10600856"/>
+            <a:ext cx="4320000" cy="461665"/>
+          </a:xfrm>
+          <a:prstGeom prst="rect">
+            <a:avLst/>
+          </a:prstGeom>
+          <a:noFill/>
+        </p:spPr>
+        <p:txBody>
+          <a:bodyPr wrap="square" rtlCol="0">
+            <a:spAutoFit/>
+          </a:bodyPr>
+          <a:lstStyle/>
+          <a:p>
+            <a:pPr algn="ctr"/>
+            <a:r>
+              <a:rPr kumimoji="1" lang="en-US" altLang="zh-CN" sz="2400" dirty="0">
+                <a:latin typeface="Arial" panose="020B0604020202020204" pitchFamily="34" charset="0"/>
+                <a:cs typeface="Arial" panose="020B0604020202020204" pitchFamily="34" charset="0"/>
+              </a:rPr>
+              <a:t>Relative</a:t>
+            </a:r>
+            <a:r>
+              <a:rPr kumimoji="1" lang="zh-CN" altLang="en-US" sz="2400" dirty="0">
+                <a:latin typeface="Arial" panose="020B0604020202020204" pitchFamily="34" charset="0"/>
+                <a:cs typeface="Arial" panose="020B0604020202020204" pitchFamily="34" charset="0"/>
+              </a:rPr>
+              <a:t> </a:t>
+            </a:r>
+            <a:r>
+              <a:rPr kumimoji="1" lang="en-US" altLang="zh-CN" sz="2400" dirty="0">
+                <a:latin typeface="Arial" panose="020B0604020202020204" pitchFamily="34" charset="0"/>
+                <a:cs typeface="Arial" panose="020B0604020202020204" pitchFamily="34" charset="0"/>
+              </a:rPr>
+              <a:t>size</a:t>
+            </a:r>
+            <a:endParaRPr kumimoji="1" lang="zh-CN" altLang="en-US" sz="2400" dirty="0">
+              <a:latin typeface="Arial" panose="020B0604020202020204" pitchFamily="34" charset="0"/>
+              <a:cs typeface="Arial" panose="020B0604020202020204" pitchFamily="34" charset="0"/>
+            </a:endParaRPr>
+          </a:p>
+        </p:txBody>
+      </p:sp>
+      <p:sp>
+        <p:nvSpPr>
+          <p:cNvPr id="50" name="文本框 49">
+            <a:extLst>
+              <a:ext uri="{FF2B5EF4-FFF2-40B4-BE49-F238E27FC236}">
+                <a16:creationId xmlns:a16="http://schemas.microsoft.com/office/drawing/2014/main" id="{6803135B-339C-C40D-4EBE-8DAA2BF8F991}"/>
+              </a:ext>
+            </a:extLst>
+          </p:cNvPr>
+          <p:cNvSpPr txBox="1"/>
+          <p:nvPr/>
+        </p:nvSpPr>
+        <p:spPr>
+          <a:xfrm rot="16200000">
+            <a:off x="9346349" y="8183279"/>
+            <a:ext cx="4320000" cy="461665"/>
+          </a:xfrm>
+          <a:prstGeom prst="rect">
+            <a:avLst/>
+          </a:prstGeom>
+          <a:noFill/>
+        </p:spPr>
+        <p:txBody>
+          <a:bodyPr wrap="square" rtlCol="0">
+            <a:spAutoFit/>
+          </a:bodyPr>
+          <a:lstStyle/>
+          <a:p>
+            <a:pPr algn="ctr"/>
+            <a:r>
+              <a:rPr kumimoji="1" lang="en-US" altLang="zh-CN" sz="2400" dirty="0">
+                <a:latin typeface="Arial" panose="020B0604020202020204" pitchFamily="34" charset="0"/>
+                <a:cs typeface="Arial" panose="020B0604020202020204" pitchFamily="34" charset="0"/>
+              </a:rPr>
+              <a:t>Pos</a:t>
+            </a:r>
+            <a:r>
+              <a:rPr kumimoji="1" lang="zh-CN" altLang="en-US" sz="2400" dirty="0">
+                <a:latin typeface="Arial" panose="020B0604020202020204" pitchFamily="34" charset="0"/>
+                <a:cs typeface="Arial" panose="020B0604020202020204" pitchFamily="34" charset="0"/>
+              </a:rPr>
+              <a:t> </a:t>
+            </a:r>
+            <a:r>
+              <a:rPr kumimoji="1" lang="en-US" altLang="zh-CN" sz="2400" dirty="0">
+                <a:latin typeface="Arial" panose="020B0604020202020204" pitchFamily="34" charset="0"/>
+                <a:cs typeface="Arial" panose="020B0604020202020204" pitchFamily="34" charset="0"/>
+              </a:rPr>
+              <a:t>y</a:t>
+            </a:r>
+            <a:endParaRPr kumimoji="1" lang="zh-CN" altLang="en-US" sz="2400" dirty="0">
+              <a:latin typeface="Arial" panose="020B0604020202020204" pitchFamily="34" charset="0"/>
+              <a:cs typeface="Arial" panose="020B0604020202020204" pitchFamily="34" charset="0"/>
+            </a:endParaRPr>
+          </a:p>
+        </p:txBody>
+      </p:sp>
+      <p:sp>
+        <p:nvSpPr>
+          <p:cNvPr id="51" name="文本框 50">
+            <a:extLst>
+              <a:ext uri="{FF2B5EF4-FFF2-40B4-BE49-F238E27FC236}">
+                <a16:creationId xmlns:a16="http://schemas.microsoft.com/office/drawing/2014/main" id="{38DBEA47-2D3F-5D7F-2AE3-6762FBAD2452}"/>
+              </a:ext>
+            </a:extLst>
+          </p:cNvPr>
+          <p:cNvSpPr txBox="1"/>
+          <p:nvPr/>
+        </p:nvSpPr>
+        <p:spPr>
+          <a:xfrm rot="16200000">
+            <a:off x="13973175" y="8183279"/>
+            <a:ext cx="4320000" cy="461665"/>
+          </a:xfrm>
+          <a:prstGeom prst="rect">
+            <a:avLst/>
+          </a:prstGeom>
+          <a:noFill/>
+        </p:spPr>
+        <p:txBody>
+          <a:bodyPr wrap="square" rtlCol="0">
+            <a:spAutoFit/>
+          </a:bodyPr>
+          <a:lstStyle/>
+          <a:p>
+            <a:pPr algn="ctr"/>
+            <a:r>
+              <a:rPr kumimoji="1" lang="en-US" altLang="zh-CN" sz="2400" dirty="0">
+                <a:latin typeface="Arial" panose="020B0604020202020204" pitchFamily="34" charset="0"/>
+                <a:cs typeface="Arial" panose="020B0604020202020204" pitchFamily="34" charset="0"/>
+              </a:rPr>
+              <a:t>Density</a:t>
+            </a:r>
+            <a:endParaRPr kumimoji="1" lang="zh-CN" altLang="en-US" sz="2400" dirty="0">
+              <a:latin typeface="Arial" panose="020B0604020202020204" pitchFamily="34" charset="0"/>
+              <a:cs typeface="Arial" panose="020B0604020202020204" pitchFamily="34" charset="0"/>
+            </a:endParaRPr>
+          </a:p>
+        </p:txBody>
+      </p:sp>
+      <p:sp>
+        <p:nvSpPr>
+          <p:cNvPr id="52" name="文本框 51">
+            <a:extLst>
+              <a:ext uri="{FF2B5EF4-FFF2-40B4-BE49-F238E27FC236}">
+                <a16:creationId xmlns:a16="http://schemas.microsoft.com/office/drawing/2014/main" id="{1811A470-BB0C-7C6A-463E-6ADE1832A91D}"/>
+              </a:ext>
+            </a:extLst>
+          </p:cNvPr>
+          <p:cNvSpPr txBox="1"/>
+          <p:nvPr/>
+        </p:nvSpPr>
+        <p:spPr>
+          <a:xfrm>
+            <a:off x="11868689" y="6122772"/>
+            <a:ext cx="4320000" cy="461665"/>
+          </a:xfrm>
+          <a:prstGeom prst="rect">
+            <a:avLst/>
+          </a:prstGeom>
+          <a:noFill/>
+        </p:spPr>
+        <p:txBody>
+          <a:bodyPr wrap="square" rtlCol="0">
+            <a:spAutoFit/>
+          </a:bodyPr>
+          <a:lstStyle/>
+          <a:p>
+            <a:pPr algn="ctr"/>
+            <a:r>
+              <a:rPr kumimoji="1" lang="en-US" altLang="zh-CN" sz="2400" dirty="0">
+                <a:latin typeface="Arial" panose="020B0604020202020204" pitchFamily="34" charset="0"/>
+                <a:cs typeface="Arial" panose="020B0604020202020204" pitchFamily="34" charset="0"/>
+              </a:rPr>
+              <a:t>PKTN</a:t>
+            </a:r>
+            <a:r>
+              <a:rPr kumimoji="1" lang="zh-CN" altLang="en-US" sz="2400" dirty="0">
+                <a:latin typeface="Arial" panose="020B0604020202020204" pitchFamily="34" charset="0"/>
+                <a:cs typeface="Arial" panose="020B0604020202020204" pitchFamily="34" charset="0"/>
+              </a:rPr>
+              <a:t> </a:t>
+            </a:r>
+            <a:r>
+              <a:rPr kumimoji="1" lang="en-US" altLang="zh-CN" sz="2400" dirty="0">
+                <a:latin typeface="Arial" panose="020B0604020202020204" pitchFamily="34" charset="0"/>
+                <a:cs typeface="Arial" panose="020B0604020202020204" pitchFamily="34" charset="0"/>
+              </a:rPr>
+              <a:t>–</a:t>
+            </a:r>
+            <a:r>
+              <a:rPr kumimoji="1" lang="zh-CN" altLang="en-US" sz="2400" dirty="0">
+                <a:latin typeface="Arial" panose="020B0604020202020204" pitchFamily="34" charset="0"/>
+                <a:cs typeface="Arial" panose="020B0604020202020204" pitchFamily="34" charset="0"/>
+              </a:rPr>
+              <a:t> </a:t>
+            </a:r>
+            <a:r>
+              <a:rPr kumimoji="1" lang="en-US" altLang="zh-CN" sz="2400" dirty="0">
+                <a:latin typeface="Arial" panose="020B0604020202020204" pitchFamily="34" charset="0"/>
+                <a:cs typeface="Arial" panose="020B0604020202020204" pitchFamily="34" charset="0"/>
+              </a:rPr>
+              <a:t>Position</a:t>
+            </a:r>
+            <a:r>
+              <a:rPr kumimoji="1" lang="zh-CN" altLang="en-US" sz="2400" dirty="0">
+                <a:latin typeface="Arial" panose="020B0604020202020204" pitchFamily="34" charset="0"/>
+                <a:cs typeface="Arial" panose="020B0604020202020204" pitchFamily="34" charset="0"/>
+              </a:rPr>
+              <a:t> </a:t>
+            </a:r>
+            <a:r>
+              <a:rPr kumimoji="1" lang="en-US" altLang="zh-CN" sz="2400" dirty="0">
+                <a:latin typeface="Arial" panose="020B0604020202020204" pitchFamily="34" charset="0"/>
+                <a:cs typeface="Arial" panose="020B0604020202020204" pitchFamily="34" charset="0"/>
+              </a:rPr>
+              <a:t>(N=1003)</a:t>
+            </a:r>
+            <a:endParaRPr kumimoji="1" lang="zh-CN" altLang="en-US" sz="2400" dirty="0">
+              <a:latin typeface="Arial" panose="020B0604020202020204" pitchFamily="34" charset="0"/>
+              <a:cs typeface="Arial" panose="020B0604020202020204" pitchFamily="34" charset="0"/>
+            </a:endParaRPr>
+          </a:p>
+        </p:txBody>
+      </p:sp>
+      <p:sp>
+        <p:nvSpPr>
+          <p:cNvPr id="53" name="文本框 52">
+            <a:extLst>
+              <a:ext uri="{FF2B5EF4-FFF2-40B4-BE49-F238E27FC236}">
+                <a16:creationId xmlns:a16="http://schemas.microsoft.com/office/drawing/2014/main" id="{246C74AA-55B3-502E-50BE-CD3B76DECFDC}"/>
+              </a:ext>
+            </a:extLst>
+          </p:cNvPr>
+          <p:cNvSpPr txBox="1"/>
+          <p:nvPr/>
+        </p:nvSpPr>
+        <p:spPr>
+          <a:xfrm>
+            <a:off x="16733156" y="6122772"/>
+            <a:ext cx="4320000" cy="461665"/>
+          </a:xfrm>
+          <a:prstGeom prst="rect">
+            <a:avLst/>
+          </a:prstGeom>
+          <a:noFill/>
+        </p:spPr>
+        <p:txBody>
+          <a:bodyPr wrap="square" rtlCol="0">
+            <a:spAutoFit/>
+          </a:bodyPr>
+          <a:lstStyle/>
+          <a:p>
+            <a:pPr algn="ctr"/>
+            <a:r>
+              <a:rPr kumimoji="1" lang="en-US" altLang="zh-CN" sz="2400" dirty="0">
+                <a:latin typeface="Arial" panose="020B0604020202020204" pitchFamily="34" charset="0"/>
+                <a:cs typeface="Arial" panose="020B0604020202020204" pitchFamily="34" charset="0"/>
+              </a:rPr>
+              <a:t>PKTN</a:t>
+            </a:r>
+            <a:r>
+              <a:rPr kumimoji="1" lang="zh-CN" altLang="en-US" sz="2400" dirty="0">
+                <a:latin typeface="Arial" panose="020B0604020202020204" pitchFamily="34" charset="0"/>
+                <a:cs typeface="Arial" panose="020B0604020202020204" pitchFamily="34" charset="0"/>
+              </a:rPr>
+              <a:t> </a:t>
+            </a:r>
+            <a:r>
+              <a:rPr kumimoji="1" lang="en-US" altLang="zh-CN" sz="2400" dirty="0">
+                <a:latin typeface="Arial" panose="020B0604020202020204" pitchFamily="34" charset="0"/>
+                <a:cs typeface="Arial" panose="020B0604020202020204" pitchFamily="34" charset="0"/>
+              </a:rPr>
+              <a:t>–</a:t>
+            </a:r>
+            <a:r>
+              <a:rPr kumimoji="1" lang="zh-CN" altLang="en-US" sz="2400" dirty="0">
+                <a:latin typeface="Arial" panose="020B0604020202020204" pitchFamily="34" charset="0"/>
+                <a:cs typeface="Arial" panose="020B0604020202020204" pitchFamily="34" charset="0"/>
+              </a:rPr>
+              <a:t> </a:t>
+            </a:r>
+            <a:r>
+              <a:rPr kumimoji="1" lang="en-US" altLang="zh-CN" sz="2400" dirty="0">
+                <a:latin typeface="Arial" panose="020B0604020202020204" pitchFamily="34" charset="0"/>
+                <a:cs typeface="Arial" panose="020B0604020202020204" pitchFamily="34" charset="0"/>
+              </a:rPr>
+              <a:t>Size</a:t>
+            </a:r>
+            <a:r>
+              <a:rPr kumimoji="1" lang="zh-CN" altLang="en-US" sz="2400" dirty="0">
+                <a:latin typeface="Arial" panose="020B0604020202020204" pitchFamily="34" charset="0"/>
+                <a:cs typeface="Arial" panose="020B0604020202020204" pitchFamily="34" charset="0"/>
+              </a:rPr>
+              <a:t> </a:t>
+            </a:r>
+            <a:r>
+              <a:rPr kumimoji="1" lang="en-US" altLang="zh-CN" sz="2400" dirty="0">
+                <a:latin typeface="Arial" panose="020B0604020202020204" pitchFamily="34" charset="0"/>
+                <a:cs typeface="Arial" panose="020B0604020202020204" pitchFamily="34" charset="0"/>
+              </a:rPr>
+              <a:t>(N=1003)</a:t>
+            </a:r>
+            <a:endParaRPr kumimoji="1" lang="zh-CN" altLang="en-US" sz="2400" dirty="0">
+              <a:latin typeface="Arial" panose="020B0604020202020204" pitchFamily="34" charset="0"/>
+              <a:cs typeface="Arial" panose="020B0604020202020204" pitchFamily="34" charset="0"/>
+            </a:endParaRPr>
+          </a:p>
+        </p:txBody>
+      </p:sp>
+      <p:sp>
+        <p:nvSpPr>
+          <p:cNvPr id="70" name="文本框 69">
+            <a:extLst>
+              <a:ext uri="{FF2B5EF4-FFF2-40B4-BE49-F238E27FC236}">
+                <a16:creationId xmlns:a16="http://schemas.microsoft.com/office/drawing/2014/main" id="{9CFCD99C-0E51-7097-8F14-0BB1F5583784}"/>
+              </a:ext>
+            </a:extLst>
+          </p:cNvPr>
+          <p:cNvSpPr txBox="1"/>
+          <p:nvPr/>
+        </p:nvSpPr>
+        <p:spPr>
+          <a:xfrm>
+            <a:off x="1733509" y="11139633"/>
+            <a:ext cx="4320000" cy="461665"/>
+          </a:xfrm>
+          <a:prstGeom prst="rect">
+            <a:avLst/>
+          </a:prstGeom>
+          <a:noFill/>
+        </p:spPr>
+        <p:txBody>
+          <a:bodyPr wrap="square" rtlCol="0">
+            <a:spAutoFit/>
+          </a:bodyPr>
+          <a:lstStyle/>
+          <a:p>
+            <a:pPr algn="ctr"/>
+            <a:r>
+              <a:rPr kumimoji="1" lang="en-US" altLang="zh-CN" sz="2400" dirty="0" err="1">
+                <a:latin typeface="Arial" panose="020B0604020202020204" pitchFamily="34" charset="0"/>
+                <a:cs typeface="Arial" panose="020B0604020202020204" pitchFamily="34" charset="0"/>
+              </a:rPr>
+              <a:t>FinalData</a:t>
+            </a:r>
+            <a:r>
+              <a:rPr kumimoji="1" lang="zh-CN" altLang="en-US" sz="2400" dirty="0">
+                <a:latin typeface="Arial" panose="020B0604020202020204" pitchFamily="34" charset="0"/>
+                <a:cs typeface="Arial" panose="020B0604020202020204" pitchFamily="34" charset="0"/>
+              </a:rPr>
+              <a:t> </a:t>
+            </a:r>
+            <a:r>
+              <a:rPr kumimoji="1" lang="en-US" altLang="zh-CN" sz="2400" dirty="0">
+                <a:latin typeface="Arial" panose="020B0604020202020204" pitchFamily="34" charset="0"/>
+                <a:cs typeface="Arial" panose="020B0604020202020204" pitchFamily="34" charset="0"/>
+              </a:rPr>
+              <a:t>–</a:t>
+            </a:r>
+            <a:r>
+              <a:rPr kumimoji="1" lang="zh-CN" altLang="en-US" sz="2400" dirty="0">
+                <a:latin typeface="Arial" panose="020B0604020202020204" pitchFamily="34" charset="0"/>
+                <a:cs typeface="Arial" panose="020B0604020202020204" pitchFamily="34" charset="0"/>
+              </a:rPr>
+              <a:t> </a:t>
+            </a:r>
+            <a:r>
+              <a:rPr kumimoji="1" lang="en-US" altLang="zh-CN" sz="2400" dirty="0">
+                <a:latin typeface="Arial" panose="020B0604020202020204" pitchFamily="34" charset="0"/>
+                <a:cs typeface="Arial" panose="020B0604020202020204" pitchFamily="34" charset="0"/>
+              </a:rPr>
+              <a:t>Position</a:t>
+            </a:r>
+            <a:r>
+              <a:rPr kumimoji="1" lang="zh-CN" altLang="en-US" sz="2400" dirty="0">
+                <a:latin typeface="Arial" panose="020B0604020202020204" pitchFamily="34" charset="0"/>
+                <a:cs typeface="Arial" panose="020B0604020202020204" pitchFamily="34" charset="0"/>
+              </a:rPr>
+              <a:t> </a:t>
+            </a:r>
+            <a:r>
+              <a:rPr kumimoji="1" lang="en-US" altLang="zh-CN" sz="2400" dirty="0">
+                <a:latin typeface="Arial" panose="020B0604020202020204" pitchFamily="34" charset="0"/>
+                <a:cs typeface="Arial" panose="020B0604020202020204" pitchFamily="34" charset="0"/>
+              </a:rPr>
+              <a:t>(N=1854)</a:t>
+            </a:r>
+            <a:endParaRPr kumimoji="1" lang="zh-CN" altLang="en-US" sz="2400" dirty="0">
+              <a:latin typeface="Arial" panose="020B0604020202020204" pitchFamily="34" charset="0"/>
+              <a:cs typeface="Arial" panose="020B0604020202020204" pitchFamily="34" charset="0"/>
+            </a:endParaRPr>
+          </a:p>
+        </p:txBody>
+      </p:sp>
+      <p:sp>
+        <p:nvSpPr>
+          <p:cNvPr id="71" name="文本框 70">
+            <a:extLst>
+              <a:ext uri="{FF2B5EF4-FFF2-40B4-BE49-F238E27FC236}">
+                <a16:creationId xmlns:a16="http://schemas.microsoft.com/office/drawing/2014/main" id="{2C0F7152-AD51-BE59-D412-082CA71EFAD1}"/>
+              </a:ext>
+            </a:extLst>
+          </p:cNvPr>
+          <p:cNvSpPr txBox="1"/>
+          <p:nvPr/>
+        </p:nvSpPr>
+        <p:spPr>
+          <a:xfrm rot="16200000">
+            <a:off x="-533263" y="13200773"/>
+            <a:ext cx="4320000" cy="461665"/>
+          </a:xfrm>
+          <a:prstGeom prst="rect">
+            <a:avLst/>
+          </a:prstGeom>
+          <a:noFill/>
+        </p:spPr>
+        <p:txBody>
+          <a:bodyPr wrap="square" rtlCol="0">
+            <a:spAutoFit/>
+          </a:bodyPr>
+          <a:lstStyle/>
+          <a:p>
+            <a:pPr algn="ctr"/>
+            <a:r>
+              <a:rPr kumimoji="1" lang="en-US" altLang="zh-CN" sz="2400" dirty="0">
+                <a:latin typeface="Arial" panose="020B0604020202020204" pitchFamily="34" charset="0"/>
+                <a:cs typeface="Arial" panose="020B0604020202020204" pitchFamily="34" charset="0"/>
+              </a:rPr>
+              <a:t>Pos</a:t>
+            </a:r>
+            <a:r>
+              <a:rPr kumimoji="1" lang="zh-CN" altLang="en-US" sz="2400" dirty="0">
+                <a:latin typeface="Arial" panose="020B0604020202020204" pitchFamily="34" charset="0"/>
+                <a:cs typeface="Arial" panose="020B0604020202020204" pitchFamily="34" charset="0"/>
+              </a:rPr>
+              <a:t> </a:t>
+            </a:r>
+            <a:r>
+              <a:rPr kumimoji="1" lang="en-US" altLang="zh-CN" sz="2400" dirty="0">
+                <a:latin typeface="Arial" panose="020B0604020202020204" pitchFamily="34" charset="0"/>
+                <a:cs typeface="Arial" panose="020B0604020202020204" pitchFamily="34" charset="0"/>
+              </a:rPr>
+              <a:t>y</a:t>
+            </a:r>
+            <a:endParaRPr kumimoji="1" lang="zh-CN" altLang="en-US" sz="2400" dirty="0">
+              <a:latin typeface="Arial" panose="020B0604020202020204" pitchFamily="34" charset="0"/>
+              <a:cs typeface="Arial" panose="020B0604020202020204" pitchFamily="34" charset="0"/>
+            </a:endParaRPr>
+          </a:p>
+        </p:txBody>
+      </p:sp>
+      <p:sp>
+        <p:nvSpPr>
+          <p:cNvPr id="73" name="文本框 72">
+            <a:extLst>
+              <a:ext uri="{FF2B5EF4-FFF2-40B4-BE49-F238E27FC236}">
+                <a16:creationId xmlns:a16="http://schemas.microsoft.com/office/drawing/2014/main" id="{A5D1F77C-DD22-AB2A-69D2-5B91C98F8F6E}"/>
+              </a:ext>
+            </a:extLst>
+          </p:cNvPr>
+          <p:cNvSpPr txBox="1"/>
+          <p:nvPr/>
+        </p:nvSpPr>
+        <p:spPr>
+          <a:xfrm>
+            <a:off x="1733508" y="15618350"/>
+            <a:ext cx="4320000" cy="461665"/>
+          </a:xfrm>
+          <a:prstGeom prst="rect">
+            <a:avLst/>
+          </a:prstGeom>
+          <a:noFill/>
+        </p:spPr>
+        <p:txBody>
+          <a:bodyPr wrap="square" rtlCol="0">
+            <a:spAutoFit/>
+          </a:bodyPr>
+          <a:lstStyle/>
+          <a:p>
+            <a:pPr algn="ctr"/>
+            <a:r>
+              <a:rPr kumimoji="1" lang="en-US" altLang="zh-CN" sz="2400" dirty="0">
+                <a:latin typeface="Arial" panose="020B0604020202020204" pitchFamily="34" charset="0"/>
+                <a:cs typeface="Arial" panose="020B0604020202020204" pitchFamily="34" charset="0"/>
+              </a:rPr>
+              <a:t>Pos</a:t>
+            </a:r>
+            <a:r>
+              <a:rPr kumimoji="1" lang="zh-CN" altLang="en-US" sz="2400" dirty="0">
+                <a:latin typeface="Arial" panose="020B0604020202020204" pitchFamily="34" charset="0"/>
+                <a:cs typeface="Arial" panose="020B0604020202020204" pitchFamily="34" charset="0"/>
+              </a:rPr>
+              <a:t> </a:t>
+            </a:r>
+            <a:r>
+              <a:rPr kumimoji="1" lang="en-US" altLang="zh-CN" sz="2400" dirty="0">
+                <a:latin typeface="Arial" panose="020B0604020202020204" pitchFamily="34" charset="0"/>
+                <a:cs typeface="Arial" panose="020B0604020202020204" pitchFamily="34" charset="0"/>
+              </a:rPr>
+              <a:t>x</a:t>
+            </a:r>
+            <a:endParaRPr kumimoji="1" lang="zh-CN" altLang="en-US" sz="2400" dirty="0">
+              <a:latin typeface="Arial" panose="020B0604020202020204" pitchFamily="34" charset="0"/>
+              <a:cs typeface="Arial" panose="020B0604020202020204" pitchFamily="34" charset="0"/>
+            </a:endParaRPr>
+          </a:p>
+        </p:txBody>
+      </p:sp>
+      <p:sp>
+        <p:nvSpPr>
+          <p:cNvPr id="75" name="文本框 74">
+            <a:extLst>
+              <a:ext uri="{FF2B5EF4-FFF2-40B4-BE49-F238E27FC236}">
+                <a16:creationId xmlns:a16="http://schemas.microsoft.com/office/drawing/2014/main" id="{432F5A1A-33B5-8D11-349B-4724ECED0FE1}"/>
+              </a:ext>
+            </a:extLst>
+          </p:cNvPr>
+          <p:cNvSpPr txBox="1"/>
+          <p:nvPr/>
+        </p:nvSpPr>
+        <p:spPr>
+          <a:xfrm>
+            <a:off x="6597976" y="15618663"/>
+            <a:ext cx="4320000" cy="461665"/>
+          </a:xfrm>
+          <a:prstGeom prst="rect">
+            <a:avLst/>
+          </a:prstGeom>
+          <a:noFill/>
+        </p:spPr>
+        <p:txBody>
+          <a:bodyPr wrap="square" rtlCol="0">
+            <a:spAutoFit/>
+          </a:bodyPr>
+          <a:lstStyle/>
+          <a:p>
+            <a:pPr algn="ctr"/>
+            <a:r>
+              <a:rPr kumimoji="1" lang="en-US" altLang="zh-CN" sz="2400" dirty="0">
+                <a:latin typeface="Arial" panose="020B0604020202020204" pitchFamily="34" charset="0"/>
+                <a:cs typeface="Arial" panose="020B0604020202020204" pitchFamily="34" charset="0"/>
+              </a:rPr>
+              <a:t>Relative</a:t>
+            </a:r>
+            <a:r>
+              <a:rPr kumimoji="1" lang="zh-CN" altLang="en-US" sz="2400" dirty="0">
+                <a:latin typeface="Arial" panose="020B0604020202020204" pitchFamily="34" charset="0"/>
+                <a:cs typeface="Arial" panose="020B0604020202020204" pitchFamily="34" charset="0"/>
+              </a:rPr>
+              <a:t> </a:t>
+            </a:r>
+            <a:r>
+              <a:rPr kumimoji="1" lang="en-US" altLang="zh-CN" sz="2400" dirty="0">
+                <a:latin typeface="Arial" panose="020B0604020202020204" pitchFamily="34" charset="0"/>
+                <a:cs typeface="Arial" panose="020B0604020202020204" pitchFamily="34" charset="0"/>
+              </a:rPr>
+              <a:t>size</a:t>
+            </a:r>
+            <a:endParaRPr kumimoji="1" lang="zh-CN" altLang="en-US" sz="2400" dirty="0">
+              <a:latin typeface="Arial" panose="020B0604020202020204" pitchFamily="34" charset="0"/>
+              <a:cs typeface="Arial" panose="020B0604020202020204" pitchFamily="34" charset="0"/>
+            </a:endParaRPr>
+          </a:p>
+        </p:txBody>
+      </p:sp>
+      <p:sp>
+        <p:nvSpPr>
+          <p:cNvPr id="76" name="文本框 75">
+            <a:extLst>
+              <a:ext uri="{FF2B5EF4-FFF2-40B4-BE49-F238E27FC236}">
+                <a16:creationId xmlns:a16="http://schemas.microsoft.com/office/drawing/2014/main" id="{499215DE-AB95-4E28-CADD-AC16E2AE3E90}"/>
+              </a:ext>
+            </a:extLst>
+          </p:cNvPr>
+          <p:cNvSpPr txBox="1"/>
+          <p:nvPr/>
+        </p:nvSpPr>
+        <p:spPr>
+          <a:xfrm>
+            <a:off x="6599276" y="11140579"/>
+            <a:ext cx="4320000" cy="461665"/>
+          </a:xfrm>
+          <a:prstGeom prst="rect">
+            <a:avLst/>
+          </a:prstGeom>
+          <a:noFill/>
+        </p:spPr>
+        <p:txBody>
+          <a:bodyPr wrap="square" rtlCol="0">
+            <a:spAutoFit/>
+          </a:bodyPr>
+          <a:lstStyle/>
+          <a:p>
+            <a:pPr algn="ctr"/>
+            <a:r>
+              <a:rPr kumimoji="1" lang="en-US" altLang="zh-CN" sz="2400" dirty="0" err="1">
+                <a:latin typeface="Arial" panose="020B0604020202020204" pitchFamily="34" charset="0"/>
+                <a:cs typeface="Arial" panose="020B0604020202020204" pitchFamily="34" charset="0"/>
+              </a:rPr>
+              <a:t>FinalData</a:t>
+            </a:r>
+            <a:r>
+              <a:rPr kumimoji="1" lang="zh-CN" altLang="en-US" sz="2400" dirty="0">
+                <a:latin typeface="Arial" panose="020B0604020202020204" pitchFamily="34" charset="0"/>
+                <a:cs typeface="Arial" panose="020B0604020202020204" pitchFamily="34" charset="0"/>
+              </a:rPr>
+              <a:t> </a:t>
+            </a:r>
+            <a:r>
+              <a:rPr kumimoji="1" lang="en-US" altLang="zh-CN" sz="2400" dirty="0">
+                <a:latin typeface="Arial" panose="020B0604020202020204" pitchFamily="34" charset="0"/>
+                <a:cs typeface="Arial" panose="020B0604020202020204" pitchFamily="34" charset="0"/>
+              </a:rPr>
+              <a:t>–</a:t>
+            </a:r>
+            <a:r>
+              <a:rPr kumimoji="1" lang="zh-CN" altLang="en-US" sz="2400" dirty="0">
+                <a:latin typeface="Arial" panose="020B0604020202020204" pitchFamily="34" charset="0"/>
+                <a:cs typeface="Arial" panose="020B0604020202020204" pitchFamily="34" charset="0"/>
+              </a:rPr>
+              <a:t> </a:t>
+            </a:r>
+            <a:r>
+              <a:rPr kumimoji="1" lang="en-US" altLang="zh-CN" sz="2400" dirty="0">
+                <a:latin typeface="Arial" panose="020B0604020202020204" pitchFamily="34" charset="0"/>
+                <a:cs typeface="Arial" panose="020B0604020202020204" pitchFamily="34" charset="0"/>
+              </a:rPr>
+              <a:t>Size</a:t>
+            </a:r>
+            <a:r>
+              <a:rPr kumimoji="1" lang="zh-CN" altLang="en-US" sz="2400" dirty="0">
+                <a:latin typeface="Arial" panose="020B0604020202020204" pitchFamily="34" charset="0"/>
+                <a:cs typeface="Arial" panose="020B0604020202020204" pitchFamily="34" charset="0"/>
+              </a:rPr>
+              <a:t> </a:t>
+            </a:r>
+            <a:r>
+              <a:rPr kumimoji="1" lang="en-US" altLang="zh-CN" sz="2400" dirty="0">
+                <a:latin typeface="Arial" panose="020B0604020202020204" pitchFamily="34" charset="0"/>
+                <a:cs typeface="Arial" panose="020B0604020202020204" pitchFamily="34" charset="0"/>
+              </a:rPr>
+              <a:t>(N=1854)</a:t>
+            </a:r>
+            <a:endParaRPr kumimoji="1" lang="zh-CN" altLang="en-US" sz="2400" dirty="0">
+              <a:latin typeface="Arial" panose="020B0604020202020204" pitchFamily="34" charset="0"/>
+              <a:cs typeface="Arial" panose="020B0604020202020204" pitchFamily="34" charset="0"/>
+            </a:endParaRPr>
+          </a:p>
+        </p:txBody>
+      </p:sp>
+      <p:sp>
+        <p:nvSpPr>
+          <p:cNvPr id="77" name="文本框 76">
+            <a:extLst>
+              <a:ext uri="{FF2B5EF4-FFF2-40B4-BE49-F238E27FC236}">
+                <a16:creationId xmlns:a16="http://schemas.microsoft.com/office/drawing/2014/main" id="{55C3C259-06A3-855F-573A-B23110A82C1D}"/>
+              </a:ext>
+            </a:extLst>
+          </p:cNvPr>
+          <p:cNvSpPr txBox="1"/>
+          <p:nvPr/>
+        </p:nvSpPr>
+        <p:spPr>
+          <a:xfrm rot="16200000">
+            <a:off x="4093563" y="13231863"/>
+            <a:ext cx="4320000" cy="400110"/>
+          </a:xfrm>
+          <a:prstGeom prst="rect">
+            <a:avLst/>
+          </a:prstGeom>
+          <a:noFill/>
+        </p:spPr>
+        <p:txBody>
+          <a:bodyPr wrap="square" rtlCol="0">
+            <a:spAutoFit/>
+          </a:bodyPr>
+          <a:lstStyle/>
+          <a:p>
+            <a:pPr algn="ctr"/>
+            <a:r>
+              <a:rPr kumimoji="1" lang="en-US" altLang="zh-CN" sz="2000" dirty="0">
+                <a:latin typeface="Arial" panose="020B0604020202020204" pitchFamily="34" charset="0"/>
+                <a:cs typeface="Arial" panose="020B0604020202020204" pitchFamily="34" charset="0"/>
+              </a:rPr>
+              <a:t>Density</a:t>
+            </a:r>
+            <a:endParaRPr kumimoji="1" lang="zh-CN" altLang="en-US" sz="2000" dirty="0">
+              <a:latin typeface="Arial" panose="020B0604020202020204" pitchFamily="34" charset="0"/>
+              <a:cs typeface="Arial" panose="020B0604020202020204" pitchFamily="34" charset="0"/>
+            </a:endParaRPr>
+          </a:p>
+        </p:txBody>
+      </p:sp>
+      <p:sp>
+        <p:nvSpPr>
+          <p:cNvPr id="80" name="文本框 79">
+            <a:extLst>
+              <a:ext uri="{FF2B5EF4-FFF2-40B4-BE49-F238E27FC236}">
+                <a16:creationId xmlns:a16="http://schemas.microsoft.com/office/drawing/2014/main" id="{BB8D2642-B529-0998-78B1-B2DE2CAE043E}"/>
+              </a:ext>
+            </a:extLst>
+          </p:cNvPr>
+          <p:cNvSpPr txBox="1"/>
+          <p:nvPr/>
+        </p:nvSpPr>
+        <p:spPr>
+          <a:xfrm>
+            <a:off x="11868690" y="15618663"/>
+            <a:ext cx="4320000" cy="461665"/>
+          </a:xfrm>
+          <a:prstGeom prst="rect">
+            <a:avLst/>
+          </a:prstGeom>
+          <a:noFill/>
+        </p:spPr>
+        <p:txBody>
+          <a:bodyPr wrap="square" rtlCol="0">
+            <a:spAutoFit/>
+          </a:bodyPr>
+          <a:lstStyle/>
+          <a:p>
+            <a:pPr algn="ctr"/>
+            <a:r>
+              <a:rPr kumimoji="1" lang="en-US" altLang="zh-CN" sz="2400" dirty="0">
+                <a:latin typeface="Arial" panose="020B0604020202020204" pitchFamily="34" charset="0"/>
+                <a:cs typeface="Arial" panose="020B0604020202020204" pitchFamily="34" charset="0"/>
+              </a:rPr>
+              <a:t>Pos</a:t>
+            </a:r>
+            <a:r>
+              <a:rPr kumimoji="1" lang="zh-CN" altLang="en-US" sz="2400" dirty="0">
+                <a:latin typeface="Arial" panose="020B0604020202020204" pitchFamily="34" charset="0"/>
+                <a:cs typeface="Arial" panose="020B0604020202020204" pitchFamily="34" charset="0"/>
+              </a:rPr>
+              <a:t> </a:t>
+            </a:r>
+            <a:r>
+              <a:rPr kumimoji="1" lang="en-US" altLang="zh-CN" sz="2400" dirty="0">
+                <a:latin typeface="Arial" panose="020B0604020202020204" pitchFamily="34" charset="0"/>
+                <a:cs typeface="Arial" panose="020B0604020202020204" pitchFamily="34" charset="0"/>
+              </a:rPr>
+              <a:t>x</a:t>
+            </a:r>
+            <a:endParaRPr kumimoji="1" lang="zh-CN" altLang="en-US" sz="2400" dirty="0">
+              <a:latin typeface="Arial" panose="020B0604020202020204" pitchFamily="34" charset="0"/>
+              <a:cs typeface="Arial" panose="020B0604020202020204" pitchFamily="34" charset="0"/>
+            </a:endParaRPr>
+          </a:p>
+        </p:txBody>
+      </p:sp>
+      <p:sp>
+        <p:nvSpPr>
+          <p:cNvPr id="81" name="文本框 80">
+            <a:extLst>
+              <a:ext uri="{FF2B5EF4-FFF2-40B4-BE49-F238E27FC236}">
+                <a16:creationId xmlns:a16="http://schemas.microsoft.com/office/drawing/2014/main" id="{5DF6079A-E140-643E-4817-F7177D939A48}"/>
+              </a:ext>
+            </a:extLst>
+          </p:cNvPr>
+          <p:cNvSpPr txBox="1"/>
+          <p:nvPr/>
+        </p:nvSpPr>
+        <p:spPr>
+          <a:xfrm>
+            <a:off x="16733158" y="15618663"/>
+            <a:ext cx="4320000" cy="461665"/>
+          </a:xfrm>
+          <a:prstGeom prst="rect">
+            <a:avLst/>
+          </a:prstGeom>
+          <a:noFill/>
+        </p:spPr>
+        <p:txBody>
+          <a:bodyPr wrap="square" rtlCol="0">
+            <a:spAutoFit/>
+          </a:bodyPr>
+          <a:lstStyle/>
+          <a:p>
+            <a:pPr algn="ctr"/>
+            <a:r>
+              <a:rPr kumimoji="1" lang="en-US" altLang="zh-CN" sz="2400" dirty="0">
+                <a:latin typeface="Arial" panose="020B0604020202020204" pitchFamily="34" charset="0"/>
+                <a:cs typeface="Arial" panose="020B0604020202020204" pitchFamily="34" charset="0"/>
+              </a:rPr>
+              <a:t>Relative</a:t>
+            </a:r>
+            <a:r>
+              <a:rPr kumimoji="1" lang="zh-CN" altLang="en-US" sz="2400" dirty="0">
+                <a:latin typeface="Arial" panose="020B0604020202020204" pitchFamily="34" charset="0"/>
+                <a:cs typeface="Arial" panose="020B0604020202020204" pitchFamily="34" charset="0"/>
+              </a:rPr>
+              <a:t> </a:t>
+            </a:r>
+            <a:r>
+              <a:rPr kumimoji="1" lang="en-US" altLang="zh-CN" sz="2400" dirty="0">
+                <a:latin typeface="Arial" panose="020B0604020202020204" pitchFamily="34" charset="0"/>
+                <a:cs typeface="Arial" panose="020B0604020202020204" pitchFamily="34" charset="0"/>
+              </a:rPr>
+              <a:t>size</a:t>
+            </a:r>
+            <a:endParaRPr kumimoji="1" lang="zh-CN" altLang="en-US" sz="2400" dirty="0">
+              <a:latin typeface="Arial" panose="020B0604020202020204" pitchFamily="34" charset="0"/>
+              <a:cs typeface="Arial" panose="020B0604020202020204" pitchFamily="34" charset="0"/>
+            </a:endParaRPr>
+          </a:p>
+        </p:txBody>
+      </p:sp>
+      <p:sp>
+        <p:nvSpPr>
+          <p:cNvPr id="82" name="文本框 81">
+            <a:extLst>
+              <a:ext uri="{FF2B5EF4-FFF2-40B4-BE49-F238E27FC236}">
+                <a16:creationId xmlns:a16="http://schemas.microsoft.com/office/drawing/2014/main" id="{28DB97C9-0124-4EF8-E7C6-3756FEF8C466}"/>
+              </a:ext>
+            </a:extLst>
+          </p:cNvPr>
+          <p:cNvSpPr txBox="1"/>
+          <p:nvPr/>
+        </p:nvSpPr>
+        <p:spPr>
+          <a:xfrm rot="16200000">
+            <a:off x="9346349" y="13201086"/>
+            <a:ext cx="4320000" cy="461665"/>
+          </a:xfrm>
+          <a:prstGeom prst="rect">
+            <a:avLst/>
+          </a:prstGeom>
+          <a:noFill/>
+        </p:spPr>
+        <p:txBody>
+          <a:bodyPr wrap="square" rtlCol="0">
+            <a:spAutoFit/>
+          </a:bodyPr>
+          <a:lstStyle/>
+          <a:p>
+            <a:pPr algn="ctr"/>
+            <a:r>
+              <a:rPr kumimoji="1" lang="en-US" altLang="zh-CN" sz="2400" dirty="0">
+                <a:latin typeface="Arial" panose="020B0604020202020204" pitchFamily="34" charset="0"/>
+                <a:cs typeface="Arial" panose="020B0604020202020204" pitchFamily="34" charset="0"/>
+              </a:rPr>
+              <a:t>Pos</a:t>
+            </a:r>
+            <a:r>
+              <a:rPr kumimoji="1" lang="zh-CN" altLang="en-US" sz="2400" dirty="0">
+                <a:latin typeface="Arial" panose="020B0604020202020204" pitchFamily="34" charset="0"/>
+                <a:cs typeface="Arial" panose="020B0604020202020204" pitchFamily="34" charset="0"/>
+              </a:rPr>
+              <a:t> </a:t>
+            </a:r>
+            <a:r>
+              <a:rPr kumimoji="1" lang="en-US" altLang="zh-CN" sz="2400" dirty="0">
+                <a:latin typeface="Arial" panose="020B0604020202020204" pitchFamily="34" charset="0"/>
+                <a:cs typeface="Arial" panose="020B0604020202020204" pitchFamily="34" charset="0"/>
+              </a:rPr>
+              <a:t>y</a:t>
+            </a:r>
+            <a:endParaRPr kumimoji="1" lang="zh-CN" altLang="en-US" sz="2400" dirty="0">
+              <a:latin typeface="Arial" panose="020B0604020202020204" pitchFamily="34" charset="0"/>
+              <a:cs typeface="Arial" panose="020B0604020202020204" pitchFamily="34" charset="0"/>
+            </a:endParaRPr>
+          </a:p>
+        </p:txBody>
+      </p:sp>
+      <p:sp>
+        <p:nvSpPr>
+          <p:cNvPr id="83" name="文本框 82">
+            <a:extLst>
+              <a:ext uri="{FF2B5EF4-FFF2-40B4-BE49-F238E27FC236}">
+                <a16:creationId xmlns:a16="http://schemas.microsoft.com/office/drawing/2014/main" id="{B50F4195-2619-4718-571A-9326C921A130}"/>
+              </a:ext>
+            </a:extLst>
+          </p:cNvPr>
+          <p:cNvSpPr txBox="1"/>
+          <p:nvPr/>
+        </p:nvSpPr>
+        <p:spPr>
+          <a:xfrm rot="16200000">
+            <a:off x="13973175" y="13201086"/>
+            <a:ext cx="4320000" cy="461665"/>
+          </a:xfrm>
+          <a:prstGeom prst="rect">
+            <a:avLst/>
+          </a:prstGeom>
+          <a:noFill/>
+        </p:spPr>
+        <p:txBody>
+          <a:bodyPr wrap="square" rtlCol="0">
+            <a:spAutoFit/>
+          </a:bodyPr>
+          <a:lstStyle/>
+          <a:p>
+            <a:pPr algn="ctr"/>
+            <a:r>
+              <a:rPr kumimoji="1" lang="en-US" altLang="zh-CN" sz="2400" dirty="0">
+                <a:latin typeface="Arial" panose="020B0604020202020204" pitchFamily="34" charset="0"/>
+                <a:cs typeface="Arial" panose="020B0604020202020204" pitchFamily="34" charset="0"/>
+              </a:rPr>
+              <a:t>Density</a:t>
+            </a:r>
+            <a:endParaRPr kumimoji="1" lang="zh-CN" altLang="en-US" sz="2400" dirty="0">
+              <a:latin typeface="Arial" panose="020B0604020202020204" pitchFamily="34" charset="0"/>
+              <a:cs typeface="Arial" panose="020B0604020202020204" pitchFamily="34" charset="0"/>
+            </a:endParaRPr>
+          </a:p>
+        </p:txBody>
+      </p:sp>
+      <p:sp>
+        <p:nvSpPr>
+          <p:cNvPr id="84" name="文本框 83">
+            <a:extLst>
+              <a:ext uri="{FF2B5EF4-FFF2-40B4-BE49-F238E27FC236}">
+                <a16:creationId xmlns:a16="http://schemas.microsoft.com/office/drawing/2014/main" id="{2EBA0AF1-5163-3477-B539-E6D5E1D2F903}"/>
+              </a:ext>
+            </a:extLst>
+          </p:cNvPr>
+          <p:cNvSpPr txBox="1"/>
+          <p:nvPr/>
+        </p:nvSpPr>
+        <p:spPr>
+          <a:xfrm>
+            <a:off x="11868689" y="11140579"/>
+            <a:ext cx="4320000" cy="461665"/>
+          </a:xfrm>
+          <a:prstGeom prst="rect">
+            <a:avLst/>
+          </a:prstGeom>
+          <a:noFill/>
+        </p:spPr>
+        <p:txBody>
+          <a:bodyPr wrap="square" rtlCol="0">
+            <a:spAutoFit/>
+          </a:bodyPr>
+          <a:lstStyle/>
+          <a:p>
+            <a:pPr algn="ctr"/>
+            <a:r>
+              <a:rPr kumimoji="1" lang="en-US" altLang="zh-CN" sz="2400" dirty="0" err="1">
+                <a:latin typeface="Arial" panose="020B0604020202020204" pitchFamily="34" charset="0"/>
+                <a:cs typeface="Arial" panose="020B0604020202020204" pitchFamily="34" charset="0"/>
+              </a:rPr>
+              <a:t>Augtrain</a:t>
+            </a:r>
+            <a:r>
+              <a:rPr kumimoji="1" lang="zh-CN" altLang="en-US" sz="2400" dirty="0">
+                <a:latin typeface="Arial" panose="020B0604020202020204" pitchFamily="34" charset="0"/>
+                <a:cs typeface="Arial" panose="020B0604020202020204" pitchFamily="34" charset="0"/>
+              </a:rPr>
+              <a:t> </a:t>
+            </a:r>
+            <a:r>
+              <a:rPr kumimoji="1" lang="en-US" altLang="zh-CN" sz="2400" dirty="0">
+                <a:latin typeface="Arial" panose="020B0604020202020204" pitchFamily="34" charset="0"/>
+                <a:cs typeface="Arial" panose="020B0604020202020204" pitchFamily="34" charset="0"/>
+              </a:rPr>
+              <a:t>–</a:t>
+            </a:r>
+            <a:r>
+              <a:rPr kumimoji="1" lang="zh-CN" altLang="en-US" sz="2400" dirty="0">
+                <a:latin typeface="Arial" panose="020B0604020202020204" pitchFamily="34" charset="0"/>
+                <a:cs typeface="Arial" panose="020B0604020202020204" pitchFamily="34" charset="0"/>
+              </a:rPr>
+              <a:t> </a:t>
+            </a:r>
+            <a:r>
+              <a:rPr kumimoji="1" lang="en-US" altLang="zh-CN" sz="2400" dirty="0">
+                <a:latin typeface="Arial" panose="020B0604020202020204" pitchFamily="34" charset="0"/>
+                <a:cs typeface="Arial" panose="020B0604020202020204" pitchFamily="34" charset="0"/>
+              </a:rPr>
+              <a:t>Position</a:t>
+            </a:r>
+            <a:r>
+              <a:rPr kumimoji="1" lang="zh-CN" altLang="en-US" sz="2400" dirty="0">
+                <a:latin typeface="Arial" panose="020B0604020202020204" pitchFamily="34" charset="0"/>
+                <a:cs typeface="Arial" panose="020B0604020202020204" pitchFamily="34" charset="0"/>
+              </a:rPr>
+              <a:t> </a:t>
+            </a:r>
+            <a:r>
+              <a:rPr kumimoji="1" lang="en-US" altLang="zh-CN" sz="2400" dirty="0">
+                <a:latin typeface="Arial" panose="020B0604020202020204" pitchFamily="34" charset="0"/>
+                <a:cs typeface="Arial" panose="020B0604020202020204" pitchFamily="34" charset="0"/>
+              </a:rPr>
+              <a:t>(N=7288)</a:t>
+            </a:r>
+            <a:endParaRPr kumimoji="1" lang="zh-CN" altLang="en-US" sz="2400" dirty="0">
+              <a:latin typeface="Arial" panose="020B0604020202020204" pitchFamily="34" charset="0"/>
+              <a:cs typeface="Arial" panose="020B0604020202020204" pitchFamily="34" charset="0"/>
+            </a:endParaRPr>
+          </a:p>
+        </p:txBody>
+      </p:sp>
+      <p:sp>
+        <p:nvSpPr>
+          <p:cNvPr id="85" name="文本框 84">
+            <a:extLst>
+              <a:ext uri="{FF2B5EF4-FFF2-40B4-BE49-F238E27FC236}">
+                <a16:creationId xmlns:a16="http://schemas.microsoft.com/office/drawing/2014/main" id="{C0F41947-9407-AF6A-9422-40D2542E8083}"/>
+              </a:ext>
+            </a:extLst>
+          </p:cNvPr>
+          <p:cNvSpPr txBox="1"/>
+          <p:nvPr/>
+        </p:nvSpPr>
+        <p:spPr>
+          <a:xfrm>
+            <a:off x="16733156" y="11140579"/>
+            <a:ext cx="4320000" cy="461665"/>
+          </a:xfrm>
+          <a:prstGeom prst="rect">
+            <a:avLst/>
+          </a:prstGeom>
+          <a:noFill/>
+        </p:spPr>
+        <p:txBody>
+          <a:bodyPr wrap="square" rtlCol="0">
+            <a:spAutoFit/>
+          </a:bodyPr>
+          <a:lstStyle/>
+          <a:p>
+            <a:pPr algn="ctr"/>
+            <a:r>
+              <a:rPr kumimoji="1" lang="en-US" altLang="zh-CN" sz="2400" dirty="0" err="1">
+                <a:latin typeface="Arial" panose="020B0604020202020204" pitchFamily="34" charset="0"/>
+                <a:cs typeface="Arial" panose="020B0604020202020204" pitchFamily="34" charset="0"/>
+              </a:rPr>
+              <a:t>Augtrain</a:t>
+            </a:r>
+            <a:r>
+              <a:rPr kumimoji="1" lang="zh-CN" altLang="en-US" sz="2400" dirty="0">
+                <a:latin typeface="Arial" panose="020B0604020202020204" pitchFamily="34" charset="0"/>
+                <a:cs typeface="Arial" panose="020B0604020202020204" pitchFamily="34" charset="0"/>
+              </a:rPr>
+              <a:t> </a:t>
+            </a:r>
+            <a:r>
+              <a:rPr kumimoji="1" lang="en-US" altLang="zh-CN" sz="2400" dirty="0">
+                <a:latin typeface="Arial" panose="020B0604020202020204" pitchFamily="34" charset="0"/>
+                <a:cs typeface="Arial" panose="020B0604020202020204" pitchFamily="34" charset="0"/>
+              </a:rPr>
+              <a:t>–</a:t>
+            </a:r>
+            <a:r>
+              <a:rPr kumimoji="1" lang="zh-CN" altLang="en-US" sz="2400" dirty="0">
+                <a:latin typeface="Arial" panose="020B0604020202020204" pitchFamily="34" charset="0"/>
+                <a:cs typeface="Arial" panose="020B0604020202020204" pitchFamily="34" charset="0"/>
+              </a:rPr>
+              <a:t> </a:t>
+            </a:r>
+            <a:r>
+              <a:rPr kumimoji="1" lang="en-US" altLang="zh-CN" sz="2400" dirty="0">
+                <a:latin typeface="Arial" panose="020B0604020202020204" pitchFamily="34" charset="0"/>
+                <a:cs typeface="Arial" panose="020B0604020202020204" pitchFamily="34" charset="0"/>
+              </a:rPr>
+              <a:t>Size</a:t>
+            </a:r>
+            <a:r>
+              <a:rPr kumimoji="1" lang="zh-CN" altLang="en-US" sz="2400" dirty="0">
+                <a:latin typeface="Arial" panose="020B0604020202020204" pitchFamily="34" charset="0"/>
+                <a:cs typeface="Arial" panose="020B0604020202020204" pitchFamily="34" charset="0"/>
+              </a:rPr>
+              <a:t> </a:t>
+            </a:r>
+            <a:r>
+              <a:rPr kumimoji="1" lang="en-US" altLang="zh-CN" sz="2400" dirty="0">
+                <a:latin typeface="Arial" panose="020B0604020202020204" pitchFamily="34" charset="0"/>
+                <a:cs typeface="Arial" panose="020B0604020202020204" pitchFamily="34" charset="0"/>
+              </a:rPr>
+              <a:t>(N=7288)</a:t>
+            </a:r>
+            <a:endParaRPr kumimoji="1" lang="zh-CN" altLang="en-US" sz="2400" dirty="0">
+              <a:latin typeface="Arial" panose="020B0604020202020204" pitchFamily="34" charset="0"/>
+              <a:cs typeface="Arial" panose="020B0604020202020204" pitchFamily="34" charset="0"/>
+            </a:endParaRPr>
+          </a:p>
+        </p:txBody>
+      </p:sp>
+      <p:sp>
+        <p:nvSpPr>
+          <p:cNvPr id="2" name="文本框 1">
+            <a:extLst>
+              <a:ext uri="{FF2B5EF4-FFF2-40B4-BE49-F238E27FC236}">
+                <a16:creationId xmlns:a16="http://schemas.microsoft.com/office/drawing/2014/main" id="{D5191ABA-9405-5509-71C1-97E248DB4B08}"/>
+              </a:ext>
+            </a:extLst>
+          </p:cNvPr>
+          <p:cNvSpPr txBox="1"/>
+          <p:nvPr/>
+        </p:nvSpPr>
+        <p:spPr>
+          <a:xfrm>
+            <a:off x="1267200" y="993600"/>
+            <a:ext cx="720000" cy="646331"/>
+          </a:xfrm>
+          <a:prstGeom prst="rect">
+            <a:avLst/>
+          </a:prstGeom>
+          <a:noFill/>
+        </p:spPr>
+        <p:txBody>
+          <a:bodyPr wrap="square" rtlCol="0">
+            <a:spAutoFit/>
+          </a:bodyPr>
+          <a:lstStyle/>
+          <a:p>
+            <a:pPr algn="ctr"/>
+            <a:r>
+              <a:rPr kumimoji="1" lang="en-US" altLang="zh-CN" sz="3600" b="1" dirty="0">
+                <a:latin typeface="Arial" panose="020B0604020202020204" pitchFamily="34" charset="0"/>
+                <a:cs typeface="Arial" panose="020B0604020202020204" pitchFamily="34" charset="0"/>
+              </a:rPr>
+              <a:t>a</a:t>
+            </a:r>
+            <a:endParaRPr kumimoji="1" lang="zh-CN" altLang="en-US" sz="3600" b="1" dirty="0">
+              <a:latin typeface="Arial" panose="020B0604020202020204" pitchFamily="34" charset="0"/>
+              <a:cs typeface="Arial" panose="020B0604020202020204" pitchFamily="34" charset="0"/>
+            </a:endParaRPr>
+          </a:p>
+        </p:txBody>
+      </p:sp>
+      <p:sp>
+        <p:nvSpPr>
+          <p:cNvPr id="6" name="文本框 5">
+            <a:extLst>
+              <a:ext uri="{FF2B5EF4-FFF2-40B4-BE49-F238E27FC236}">
+                <a16:creationId xmlns:a16="http://schemas.microsoft.com/office/drawing/2014/main" id="{ACEF38BC-99DC-F889-F692-DEC4781B339E}"/>
+              </a:ext>
+            </a:extLst>
+          </p:cNvPr>
+          <p:cNvSpPr txBox="1"/>
+          <p:nvPr/>
+        </p:nvSpPr>
+        <p:spPr>
+          <a:xfrm>
+            <a:off x="1267200" y="5739579"/>
+            <a:ext cx="720000" cy="646331"/>
+          </a:xfrm>
+          <a:prstGeom prst="rect">
+            <a:avLst/>
+          </a:prstGeom>
+          <a:noFill/>
+        </p:spPr>
+        <p:txBody>
+          <a:bodyPr wrap="square" rtlCol="0">
+            <a:spAutoFit/>
+          </a:bodyPr>
+          <a:lstStyle/>
+          <a:p>
+            <a:pPr algn="ctr"/>
+            <a:r>
+              <a:rPr kumimoji="1" lang="en-US" altLang="zh-CN" sz="3600" b="1" dirty="0">
+                <a:latin typeface="Arial" panose="020B0604020202020204" pitchFamily="34" charset="0"/>
+                <a:cs typeface="Arial" panose="020B0604020202020204" pitchFamily="34" charset="0"/>
+              </a:rPr>
+              <a:t>c</a:t>
+            </a:r>
+            <a:endParaRPr kumimoji="1" lang="zh-CN" altLang="en-US" sz="3600" b="1" dirty="0">
+              <a:latin typeface="Arial" panose="020B0604020202020204" pitchFamily="34" charset="0"/>
+              <a:cs typeface="Arial" panose="020B0604020202020204" pitchFamily="34" charset="0"/>
+            </a:endParaRPr>
+          </a:p>
+        </p:txBody>
+      </p:sp>
+      <p:sp>
+        <p:nvSpPr>
+          <p:cNvPr id="7" name="文本框 6">
+            <a:extLst>
+              <a:ext uri="{FF2B5EF4-FFF2-40B4-BE49-F238E27FC236}">
+                <a16:creationId xmlns:a16="http://schemas.microsoft.com/office/drawing/2014/main" id="{A5762E4B-CCF8-8AE7-6D3C-FBEE22FE1454}"/>
+              </a:ext>
+            </a:extLst>
+          </p:cNvPr>
+          <p:cNvSpPr txBox="1"/>
+          <p:nvPr/>
+        </p:nvSpPr>
+        <p:spPr>
+          <a:xfrm>
+            <a:off x="1267200" y="10823371"/>
+            <a:ext cx="720000" cy="646331"/>
+          </a:xfrm>
+          <a:prstGeom prst="rect">
+            <a:avLst/>
+          </a:prstGeom>
+          <a:noFill/>
+        </p:spPr>
+        <p:txBody>
+          <a:bodyPr wrap="square" rtlCol="0">
+            <a:spAutoFit/>
+          </a:bodyPr>
+          <a:lstStyle/>
+          <a:p>
+            <a:pPr algn="ctr"/>
+            <a:r>
+              <a:rPr kumimoji="1" lang="en-US" altLang="zh-CN" sz="3600" b="1" dirty="0">
+                <a:latin typeface="Arial" panose="020B0604020202020204" pitchFamily="34" charset="0"/>
+                <a:cs typeface="Arial" panose="020B0604020202020204" pitchFamily="34" charset="0"/>
+              </a:rPr>
+              <a:t>e</a:t>
+            </a:r>
+            <a:endParaRPr kumimoji="1" lang="zh-CN" altLang="en-US" sz="3600" b="1" dirty="0">
+              <a:latin typeface="Arial" panose="020B0604020202020204" pitchFamily="34" charset="0"/>
+              <a:cs typeface="Arial" panose="020B0604020202020204" pitchFamily="34" charset="0"/>
+            </a:endParaRPr>
+          </a:p>
+        </p:txBody>
+      </p:sp>
+      <p:sp>
+        <p:nvSpPr>
+          <p:cNvPr id="9" name="文本框 8">
+            <a:extLst>
+              <a:ext uri="{FF2B5EF4-FFF2-40B4-BE49-F238E27FC236}">
+                <a16:creationId xmlns:a16="http://schemas.microsoft.com/office/drawing/2014/main" id="{3AEE3499-C518-26F6-61AF-99AC8DF688B2}"/>
+              </a:ext>
+            </a:extLst>
+          </p:cNvPr>
+          <p:cNvSpPr txBox="1"/>
+          <p:nvPr/>
+        </p:nvSpPr>
+        <p:spPr>
+          <a:xfrm>
+            <a:off x="11349478" y="993600"/>
+            <a:ext cx="720000" cy="646331"/>
+          </a:xfrm>
+          <a:prstGeom prst="rect">
+            <a:avLst/>
+          </a:prstGeom>
+          <a:noFill/>
+        </p:spPr>
+        <p:txBody>
+          <a:bodyPr wrap="square" rtlCol="0">
+            <a:spAutoFit/>
+          </a:bodyPr>
+          <a:lstStyle/>
+          <a:p>
+            <a:pPr algn="ctr"/>
+            <a:r>
+              <a:rPr kumimoji="1" lang="en-US" altLang="zh-CN" sz="3600" b="1" dirty="0">
+                <a:latin typeface="Arial" panose="020B0604020202020204" pitchFamily="34" charset="0"/>
+                <a:cs typeface="Arial" panose="020B0604020202020204" pitchFamily="34" charset="0"/>
+              </a:rPr>
+              <a:t>b</a:t>
+            </a:r>
+            <a:endParaRPr kumimoji="1" lang="zh-CN" altLang="en-US" sz="3600" b="1" dirty="0">
+              <a:latin typeface="Arial" panose="020B0604020202020204" pitchFamily="34" charset="0"/>
+              <a:cs typeface="Arial" panose="020B0604020202020204" pitchFamily="34" charset="0"/>
+            </a:endParaRPr>
+          </a:p>
+        </p:txBody>
+      </p:sp>
+      <p:sp>
+        <p:nvSpPr>
+          <p:cNvPr id="10" name="文本框 9">
+            <a:extLst>
+              <a:ext uri="{FF2B5EF4-FFF2-40B4-BE49-F238E27FC236}">
+                <a16:creationId xmlns:a16="http://schemas.microsoft.com/office/drawing/2014/main" id="{AC570154-354A-72F7-3630-CFF184453BEB}"/>
+              </a:ext>
+            </a:extLst>
+          </p:cNvPr>
+          <p:cNvSpPr txBox="1"/>
+          <p:nvPr/>
+        </p:nvSpPr>
+        <p:spPr>
+          <a:xfrm>
+            <a:off x="11349478" y="5739579"/>
+            <a:ext cx="720000" cy="646331"/>
+          </a:xfrm>
+          <a:prstGeom prst="rect">
+            <a:avLst/>
+          </a:prstGeom>
+          <a:noFill/>
+        </p:spPr>
+        <p:txBody>
+          <a:bodyPr wrap="square" rtlCol="0">
+            <a:spAutoFit/>
+          </a:bodyPr>
+          <a:lstStyle/>
+          <a:p>
+            <a:pPr algn="ctr"/>
+            <a:r>
+              <a:rPr kumimoji="1" lang="en-US" altLang="zh-CN" sz="3600" b="1" dirty="0">
+                <a:latin typeface="Arial" panose="020B0604020202020204" pitchFamily="34" charset="0"/>
+                <a:cs typeface="Arial" panose="020B0604020202020204" pitchFamily="34" charset="0"/>
+              </a:rPr>
+              <a:t>d</a:t>
+            </a:r>
+            <a:endParaRPr kumimoji="1" lang="zh-CN" altLang="en-US" sz="3600" b="1" dirty="0">
+              <a:latin typeface="Arial" panose="020B0604020202020204" pitchFamily="34" charset="0"/>
+              <a:cs typeface="Arial" panose="020B0604020202020204" pitchFamily="34" charset="0"/>
+            </a:endParaRPr>
+          </a:p>
+        </p:txBody>
+      </p:sp>
+      <p:sp>
+        <p:nvSpPr>
+          <p:cNvPr id="11" name="文本框 10">
+            <a:extLst>
+              <a:ext uri="{FF2B5EF4-FFF2-40B4-BE49-F238E27FC236}">
+                <a16:creationId xmlns:a16="http://schemas.microsoft.com/office/drawing/2014/main" id="{B4C0ABAB-E5E8-7570-98AF-83EBD11EA6FB}"/>
+              </a:ext>
+            </a:extLst>
+          </p:cNvPr>
+          <p:cNvSpPr txBox="1"/>
+          <p:nvPr/>
+        </p:nvSpPr>
+        <p:spPr>
+          <a:xfrm>
+            <a:off x="11349478" y="10823371"/>
+            <a:ext cx="720000" cy="646331"/>
+          </a:xfrm>
+          <a:prstGeom prst="rect">
+            <a:avLst/>
+          </a:prstGeom>
+          <a:noFill/>
+        </p:spPr>
+        <p:txBody>
+          <a:bodyPr wrap="square" rtlCol="0">
+            <a:spAutoFit/>
+          </a:bodyPr>
+          <a:lstStyle/>
+          <a:p>
+            <a:pPr algn="ctr"/>
+            <a:r>
+              <a:rPr kumimoji="1" lang="en-US" altLang="zh-CN" sz="3600" b="1" dirty="0">
+                <a:latin typeface="Arial" panose="020B0604020202020204" pitchFamily="34" charset="0"/>
+                <a:cs typeface="Arial" panose="020B0604020202020204" pitchFamily="34" charset="0"/>
+              </a:rPr>
+              <a:t>f</a:t>
+            </a:r>
+            <a:endParaRPr kumimoji="1" lang="zh-CN" altLang="en-US" sz="3600" b="1" dirty="0">
+              <a:latin typeface="Arial" panose="020B0604020202020204" pitchFamily="34" charset="0"/>
+              <a:cs typeface="Arial" panose="020B0604020202020204" pitchFamily="34" charset="0"/>
+            </a:endParaRPr>
+          </a:p>
+        </p:txBody>
+      </p:sp>
       <p:pic>
         <p:nvPicPr>
-          <p:cNvPr id="3" name="图形 2">
+          <p:cNvPr id="17" name="图形 16">
             <a:extLst>
               <a:ext uri="{FF2B5EF4-FFF2-40B4-BE49-F238E27FC236}">
-                <a16:creationId xmlns:a16="http://schemas.microsoft.com/office/drawing/2014/main" id="{87F963BA-29A9-E78F-06F1-86774CC9CD50}"/>
+                <a16:creationId xmlns:a16="http://schemas.microsoft.com/office/drawing/2014/main" id="{D1CEFEB3-A529-CBE5-9A2B-D08E05228910}"/>
+              </a:ext>
+            </a:extLst>
+          </p:cNvPr>
+          <p:cNvPicPr>
+            <a:picLocks noChangeAspect="1"/>
+          </p:cNvPicPr>
+          <p:nvPr/>
+        </p:nvPicPr>
+        <p:blipFill>
+          <a:blip>
+            <a:extLst>
+              <a:ext uri="{96DAC541-7B7A-43D3-8B79-37D633B846F1}">
+                <asvg:svgBlip xmlns:asvg="http://schemas.microsoft.com/office/drawing/2016/SVG/main" r:embed="rId3"/>
+              </a:ext>
+            </a:extLst>
+          </a:blip>
+          <a:stretch>
+            <a:fillRect/>
+          </a:stretch>
+        </p:blipFill>
+        <p:spPr>
+          <a:xfrm>
+            <a:off x="6361200" y="1537200"/>
+            <a:ext cx="4796972" cy="4320000"/>
+          </a:xfrm>
+          <a:prstGeom prst="rect">
+            <a:avLst/>
+          </a:prstGeom>
+        </p:spPr>
+      </p:pic>
+      <p:pic>
+        <p:nvPicPr>
+          <p:cNvPr id="19" name="图形 18">
+            <a:extLst>
+              <a:ext uri="{FF2B5EF4-FFF2-40B4-BE49-F238E27FC236}">
+                <a16:creationId xmlns:a16="http://schemas.microsoft.com/office/drawing/2014/main" id="{26D79222-ACC2-3CE7-74E4-54D16834D711}"/>
               </a:ext>
             </a:extLst>
           </p:cNvPr>
@@ -3570,7 +6033,7 @@
           <a:blip>
             <a:extLst>
               <a:ext uri="{96DAC541-7B7A-43D3-8B79-37D633B846F1}">
-                <asvg:svgBlip xmlns:asvg="http://schemas.microsoft.com/office/drawing/2016/SVG/main" r:embed="rId3"/>
+                <asvg:svgBlip xmlns:asvg="http://schemas.microsoft.com/office/drawing/2016/SVG/main" r:embed="rId4"/>
               </a:ext>
             </a:extLst>
           </a:blip>
@@ -3580,7 +6043,7 @@
         </p:blipFill>
         <p:spPr>
           <a:xfrm>
-            <a:off x="1732078" y="1535736"/>
+            <a:off x="1731600" y="1537200"/>
             <a:ext cx="4320000" cy="4320000"/>
           </a:xfrm>
           <a:prstGeom prst="rect">
@@ -3588,69 +6051,12 @@
           </a:prstGeom>
         </p:spPr>
       </p:pic>
-      <p:sp>
-        <p:nvSpPr>
-          <p:cNvPr id="4" name="文本框 3">
-            <a:extLst>
-              <a:ext uri="{FF2B5EF4-FFF2-40B4-BE49-F238E27FC236}">
-                <a16:creationId xmlns:a16="http://schemas.microsoft.com/office/drawing/2014/main" id="{8FCCFA40-631D-F27E-8DF1-51A598CF3691}"/>
-              </a:ext>
-            </a:extLst>
-          </p:cNvPr>
-          <p:cNvSpPr txBox="1"/>
-          <p:nvPr/>
-        </p:nvSpPr>
-        <p:spPr>
-          <a:xfrm>
-            <a:off x="1733510" y="5682623"/>
-            <a:ext cx="4320000" cy="461665"/>
-          </a:xfrm>
-          <a:prstGeom prst="rect">
-            <a:avLst/>
-          </a:prstGeom>
-          <a:noFill/>
-        </p:spPr>
-        <p:txBody>
-          <a:bodyPr wrap="square" rtlCol="0">
-            <a:spAutoFit/>
-          </a:bodyPr>
-          <a:lstStyle/>
-          <a:p>
-            <a:pPr algn="ctr"/>
-            <a:r>
-              <a:rPr kumimoji="1" lang="en-US" altLang="zh-CN" sz="2400" dirty="0">
-                <a:latin typeface="Arial" panose="020B0604020202020204" pitchFamily="34" charset="0"/>
-                <a:cs typeface="Arial" panose="020B0604020202020204" pitchFamily="34" charset="0"/>
-              </a:rPr>
-              <a:t>Pos</a:t>
-            </a:r>
-            <a:r>
-              <a:rPr kumimoji="1" lang="zh-CN" altLang="en-US" sz="2400" dirty="0">
-                <a:latin typeface="Arial" panose="020B0604020202020204" pitchFamily="34" charset="0"/>
-                <a:cs typeface="Arial" panose="020B0604020202020204" pitchFamily="34" charset="0"/>
-              </a:rPr>
-              <a:t> </a:t>
-            </a:r>
-            <a:r>
-              <a:rPr kumimoji="1" lang="en-US" altLang="zh-CN" sz="2400" dirty="0">
-                <a:latin typeface="Arial" panose="020B0604020202020204" pitchFamily="34" charset="0"/>
-                <a:cs typeface="Arial" panose="020B0604020202020204" pitchFamily="34" charset="0"/>
-              </a:rPr>
-              <a:t>x</a:t>
-            </a:r>
-            <a:endParaRPr kumimoji="1" lang="zh-CN" altLang="en-US" sz="2400" dirty="0">
-              <a:latin typeface="Arial" panose="020B0604020202020204" pitchFamily="34" charset="0"/>
-              <a:cs typeface="Arial" panose="020B0604020202020204" pitchFamily="34" charset="0"/>
-            </a:endParaRPr>
-          </a:p>
-        </p:txBody>
-      </p:sp>
       <p:pic>
         <p:nvPicPr>
-          <p:cNvPr id="15" name="图形 14">
+          <p:cNvPr id="21" name="图形 20">
             <a:extLst>
               <a:ext uri="{FF2B5EF4-FFF2-40B4-BE49-F238E27FC236}">
-                <a16:creationId xmlns:a16="http://schemas.microsoft.com/office/drawing/2014/main" id="{394C0F7B-F2FA-1A02-A034-E2077011D66A}"/>
+                <a16:creationId xmlns:a16="http://schemas.microsoft.com/office/drawing/2014/main" id="{ADDD4CD6-3899-D7D8-6C74-19E6E4247730}"/>
               </a:ext>
             </a:extLst>
           </p:cNvPr>
@@ -3663,7 +6069,7 @@
           <a:blip>
             <a:extLst>
               <a:ext uri="{96DAC541-7B7A-43D3-8B79-37D633B846F1}">
-                <asvg:svgBlip xmlns:asvg="http://schemas.microsoft.com/office/drawing/2016/SVG/main" r:embed="rId4"/>
+                <asvg:svgBlip xmlns:asvg="http://schemas.microsoft.com/office/drawing/2016/SVG/main" r:embed="rId5"/>
               </a:ext>
             </a:extLst>
           </a:blip>
@@ -3673,7 +6079,7 @@
         </p:blipFill>
         <p:spPr>
           <a:xfrm>
-            <a:off x="6359492" y="1535423"/>
+            <a:off x="16189200" y="1537200"/>
             <a:ext cx="4796972" cy="4320000"/>
           </a:xfrm>
           <a:prstGeom prst="rect">
@@ -3681,204 +6087,48 @@
           </a:prstGeom>
         </p:spPr>
       </p:pic>
-      <p:sp>
-        <p:nvSpPr>
-          <p:cNvPr id="25" name="文本框 24">
-            <a:extLst>
-              <a:ext uri="{FF2B5EF4-FFF2-40B4-BE49-F238E27FC236}">
-                <a16:creationId xmlns:a16="http://schemas.microsoft.com/office/drawing/2014/main" id="{65350404-AB82-9C6C-74FA-C2D28F2826F0}"/>
-              </a:ext>
-            </a:extLst>
-          </p:cNvPr>
-          <p:cNvSpPr txBox="1"/>
-          <p:nvPr/>
-        </p:nvSpPr>
-        <p:spPr>
-          <a:xfrm>
-            <a:off x="6597978" y="5682936"/>
-            <a:ext cx="4320000" cy="461665"/>
-          </a:xfrm>
-          <a:prstGeom prst="rect">
-            <a:avLst/>
-          </a:prstGeom>
-          <a:noFill/>
-        </p:spPr>
-        <p:txBody>
-          <a:bodyPr wrap="square" rtlCol="0">
-            <a:spAutoFit/>
-          </a:bodyPr>
-          <a:lstStyle/>
-          <a:p>
-            <a:pPr algn="ctr"/>
-            <a:r>
-              <a:rPr kumimoji="1" lang="en-US" altLang="zh-CN" sz="2400" dirty="0">
-                <a:latin typeface="Arial" panose="020B0604020202020204" pitchFamily="34" charset="0"/>
-                <a:cs typeface="Arial" panose="020B0604020202020204" pitchFamily="34" charset="0"/>
-              </a:rPr>
-              <a:t>Relative</a:t>
-            </a:r>
-            <a:r>
-              <a:rPr kumimoji="1" lang="zh-CN" altLang="en-US" sz="2400" dirty="0">
-                <a:latin typeface="Arial" panose="020B0604020202020204" pitchFamily="34" charset="0"/>
-                <a:cs typeface="Arial" panose="020B0604020202020204" pitchFamily="34" charset="0"/>
-              </a:rPr>
-              <a:t> </a:t>
-            </a:r>
-            <a:r>
-              <a:rPr kumimoji="1" lang="en-US" altLang="zh-CN" sz="2400" dirty="0">
-                <a:latin typeface="Arial" panose="020B0604020202020204" pitchFamily="34" charset="0"/>
-                <a:cs typeface="Arial" panose="020B0604020202020204" pitchFamily="34" charset="0"/>
-              </a:rPr>
-              <a:t>size</a:t>
-            </a:r>
-            <a:endParaRPr kumimoji="1" lang="zh-CN" altLang="en-US" sz="2400" dirty="0">
-              <a:latin typeface="Arial" panose="020B0604020202020204" pitchFamily="34" charset="0"/>
-              <a:cs typeface="Arial" panose="020B0604020202020204" pitchFamily="34" charset="0"/>
-            </a:endParaRPr>
-          </a:p>
-        </p:txBody>
-      </p:sp>
-      <p:sp>
-        <p:nvSpPr>
-          <p:cNvPr id="26" name="文本框 25">
-            <a:extLst>
-              <a:ext uri="{FF2B5EF4-FFF2-40B4-BE49-F238E27FC236}">
-                <a16:creationId xmlns:a16="http://schemas.microsoft.com/office/drawing/2014/main" id="{C33D3CA7-B6AA-3A72-257C-3689ACD2B502}"/>
-              </a:ext>
-            </a:extLst>
-          </p:cNvPr>
-          <p:cNvSpPr txBox="1"/>
-          <p:nvPr/>
-        </p:nvSpPr>
-        <p:spPr>
-          <a:xfrm>
-            <a:off x="6599278" y="1204852"/>
-            <a:ext cx="4320000" cy="461665"/>
-          </a:xfrm>
-          <a:prstGeom prst="rect">
-            <a:avLst/>
-          </a:prstGeom>
-          <a:noFill/>
-        </p:spPr>
-        <p:txBody>
-          <a:bodyPr wrap="square" rtlCol="0">
-            <a:spAutoFit/>
-          </a:bodyPr>
-          <a:lstStyle/>
-          <a:p>
-            <a:pPr algn="ctr"/>
-            <a:r>
-              <a:rPr kumimoji="1" lang="en-US" altLang="zh-CN" sz="2400" dirty="0">
-                <a:latin typeface="Arial" panose="020B0604020202020204" pitchFamily="34" charset="0"/>
-                <a:cs typeface="Arial" panose="020B0604020202020204" pitchFamily="34" charset="0"/>
-              </a:rPr>
-              <a:t>TN3K</a:t>
-            </a:r>
-            <a:r>
-              <a:rPr kumimoji="1" lang="zh-CN" altLang="en-US" sz="2400" dirty="0">
-                <a:latin typeface="Arial" panose="020B0604020202020204" pitchFamily="34" charset="0"/>
-                <a:cs typeface="Arial" panose="020B0604020202020204" pitchFamily="34" charset="0"/>
-              </a:rPr>
-              <a:t> </a:t>
-            </a:r>
-            <a:r>
-              <a:rPr kumimoji="1" lang="en-US" altLang="zh-CN" sz="2400" dirty="0">
-                <a:latin typeface="Arial" panose="020B0604020202020204" pitchFamily="34" charset="0"/>
-                <a:cs typeface="Arial" panose="020B0604020202020204" pitchFamily="34" charset="0"/>
-              </a:rPr>
-              <a:t>–</a:t>
-            </a:r>
-            <a:r>
-              <a:rPr kumimoji="1" lang="zh-CN" altLang="en-US" sz="2400" dirty="0">
-                <a:latin typeface="Arial" panose="020B0604020202020204" pitchFamily="34" charset="0"/>
-                <a:cs typeface="Arial" panose="020B0604020202020204" pitchFamily="34" charset="0"/>
-              </a:rPr>
-              <a:t> </a:t>
-            </a:r>
-            <a:r>
-              <a:rPr kumimoji="1" lang="en-US" altLang="zh-CN" sz="2400" dirty="0">
-                <a:latin typeface="Arial" panose="020B0604020202020204" pitchFamily="34" charset="0"/>
-                <a:cs typeface="Arial" panose="020B0604020202020204" pitchFamily="34" charset="0"/>
-              </a:rPr>
-              <a:t>Size</a:t>
-            </a:r>
-            <a:r>
-              <a:rPr kumimoji="1" lang="zh-CN" altLang="en-US" sz="2400" dirty="0">
-                <a:latin typeface="Arial" panose="020B0604020202020204" pitchFamily="34" charset="0"/>
-                <a:cs typeface="Arial" panose="020B0604020202020204" pitchFamily="34" charset="0"/>
-              </a:rPr>
-              <a:t> </a:t>
-            </a:r>
-            <a:r>
-              <a:rPr kumimoji="1" lang="en-US" altLang="zh-CN" sz="2400" dirty="0">
-                <a:latin typeface="Arial" panose="020B0604020202020204" pitchFamily="34" charset="0"/>
-                <a:cs typeface="Arial" panose="020B0604020202020204" pitchFamily="34" charset="0"/>
-              </a:rPr>
-              <a:t>(N=5347</a:t>
-            </a:r>
-            <a:r>
-              <a:rPr kumimoji="1" lang="en-US" altLang="zh-CN" sz="2000" dirty="0">
-                <a:latin typeface="Arial" panose="020B0604020202020204" pitchFamily="34" charset="0"/>
-                <a:cs typeface="Arial" panose="020B0604020202020204" pitchFamily="34" charset="0"/>
-              </a:rPr>
-              <a:t>)</a:t>
-            </a:r>
-            <a:endParaRPr kumimoji="1" lang="zh-CN" altLang="en-US" sz="2000" dirty="0">
-              <a:latin typeface="Arial" panose="020B0604020202020204" pitchFamily="34" charset="0"/>
-              <a:cs typeface="Arial" panose="020B0604020202020204" pitchFamily="34" charset="0"/>
-            </a:endParaRPr>
-          </a:p>
-        </p:txBody>
-      </p:sp>
-      <p:sp>
-        <p:nvSpPr>
-          <p:cNvPr id="27" name="文本框 26">
-            <a:extLst>
-              <a:ext uri="{FF2B5EF4-FFF2-40B4-BE49-F238E27FC236}">
-                <a16:creationId xmlns:a16="http://schemas.microsoft.com/office/drawing/2014/main" id="{06EAB93B-ACD9-9ACA-28E7-D5297E079B57}"/>
-              </a:ext>
-            </a:extLst>
-          </p:cNvPr>
-          <p:cNvSpPr txBox="1"/>
-          <p:nvPr/>
-        </p:nvSpPr>
-        <p:spPr>
-          <a:xfrm rot="16200000">
-            <a:off x="4093565" y="3265359"/>
-            <a:ext cx="4320000" cy="461665"/>
-          </a:xfrm>
-          <a:prstGeom prst="rect">
-            <a:avLst/>
-          </a:prstGeom>
-          <a:noFill/>
-        </p:spPr>
-        <p:txBody>
-          <a:bodyPr wrap="square" rtlCol="0">
-            <a:spAutoFit/>
-          </a:bodyPr>
-          <a:lstStyle/>
-          <a:p>
-            <a:pPr algn="ctr"/>
-            <a:r>
-              <a:rPr kumimoji="1" lang="en-US" altLang="zh-CN" sz="2400" dirty="0">
-                <a:latin typeface="Arial" panose="020B0604020202020204" pitchFamily="34" charset="0"/>
-                <a:cs typeface="Arial" panose="020B0604020202020204" pitchFamily="34" charset="0"/>
-              </a:rPr>
-              <a:t>Density</a:t>
-            </a:r>
-            <a:endParaRPr kumimoji="1" lang="zh-CN" altLang="en-US" sz="2400" dirty="0">
-              <a:latin typeface="Arial" panose="020B0604020202020204" pitchFamily="34" charset="0"/>
-              <a:cs typeface="Arial" panose="020B0604020202020204" pitchFamily="34" charset="0"/>
-            </a:endParaRPr>
-          </a:p>
-        </p:txBody>
-      </p:sp>
       <p:pic>
         <p:nvPicPr>
-          <p:cNvPr id="29" name="图形 28">
+          <p:cNvPr id="23" name="图形 22">
             <a:extLst>
               <a:ext uri="{FF2B5EF4-FFF2-40B4-BE49-F238E27FC236}">
-                <a16:creationId xmlns:a16="http://schemas.microsoft.com/office/drawing/2014/main" id="{28FC69DE-1118-3BCF-B9E0-EC3CAD5F69F7}"/>
+                <a16:creationId xmlns:a16="http://schemas.microsoft.com/office/drawing/2014/main" id="{54FCE508-B583-E06F-6676-C97E22D799EC}"/>
+              </a:ext>
+            </a:extLst>
+          </p:cNvPr>
+          <p:cNvPicPr>
+            <a:picLocks/>
+          </p:cNvPicPr>
+          <p:nvPr/>
+        </p:nvPicPr>
+        <p:blipFill>
+          <a:blip>
+            <a:extLst>
+              <a:ext uri="{96DAC541-7B7A-43D3-8B79-37D633B846F1}">
+                <asvg:svgBlip xmlns:asvg="http://schemas.microsoft.com/office/drawing/2016/SVG/main" r:embed="rId6"/>
+              </a:ext>
+            </a:extLst>
+          </a:blip>
+          <a:stretch>
+            <a:fillRect/>
+          </a:stretch>
+        </p:blipFill>
+        <p:spPr>
+          <a:xfrm>
+            <a:off x="11631600" y="1537200"/>
+            <a:ext cx="4320000" cy="4320000"/>
+          </a:xfrm>
+          <a:prstGeom prst="rect">
+            <a:avLst/>
+          </a:prstGeom>
+        </p:spPr>
+      </p:pic>
+      <p:pic>
+        <p:nvPicPr>
+          <p:cNvPr id="40" name="图形 39">
+            <a:extLst>
+              <a:ext uri="{FF2B5EF4-FFF2-40B4-BE49-F238E27FC236}">
+                <a16:creationId xmlns:a16="http://schemas.microsoft.com/office/drawing/2014/main" id="{0176541B-ABC7-8609-9CEA-A9C7986AA74F}"/>
               </a:ext>
             </a:extLst>
           </p:cNvPr>
@@ -3891,7 +6141,7 @@
           <a:blip>
             <a:extLst>
               <a:ext uri="{96DAC541-7B7A-43D3-8B79-37D633B846F1}">
-                <asvg:svgBlip xmlns:asvg="http://schemas.microsoft.com/office/drawing/2016/SVG/main" r:embed="rId5"/>
+                <asvg:svgBlip xmlns:asvg="http://schemas.microsoft.com/office/drawing/2016/SVG/main" r:embed="rId7"/>
               </a:ext>
             </a:extLst>
           </a:blip>
@@ -3901,8 +6151,8 @@
         </p:blipFill>
         <p:spPr>
           <a:xfrm>
-            <a:off x="16188691" y="1537200"/>
-            <a:ext cx="4796972" cy="4320000"/>
+            <a:off x="6361200" y="6451200"/>
+            <a:ext cx="4637444" cy="4320000"/>
           </a:xfrm>
           <a:prstGeom prst="rect">
             <a:avLst/>
@@ -3911,10 +6161,10 @@
       </p:pic>
       <p:pic>
         <p:nvPicPr>
-          <p:cNvPr id="31" name="图形 30">
+          <p:cNvPr id="46" name="图形 45">
             <a:extLst>
               <a:ext uri="{FF2B5EF4-FFF2-40B4-BE49-F238E27FC236}">
-                <a16:creationId xmlns:a16="http://schemas.microsoft.com/office/drawing/2014/main" id="{6F7C5664-B9D4-F5DD-5BAB-217A31A74D17}"/>
+                <a16:creationId xmlns:a16="http://schemas.microsoft.com/office/drawing/2014/main" id="{949DC6B1-88D6-38D0-9B15-89ECBAC1FDE7}"/>
               </a:ext>
             </a:extLst>
           </p:cNvPr>
@@ -3927,7 +6177,7 @@
           <a:blip>
             <a:extLst>
               <a:ext uri="{96DAC541-7B7A-43D3-8B79-37D633B846F1}">
-                <asvg:svgBlip xmlns:asvg="http://schemas.microsoft.com/office/drawing/2016/SVG/main" r:embed="rId6"/>
+                <asvg:svgBlip xmlns:asvg="http://schemas.microsoft.com/office/drawing/2016/SVG/main" r:embed="rId8"/>
               </a:ext>
             </a:extLst>
           </a:blip>
@@ -3937,7 +6187,7 @@
         </p:blipFill>
         <p:spPr>
           <a:xfrm>
-            <a:off x="11631600" y="1537200"/>
+            <a:off x="1735200" y="6451200"/>
             <a:ext cx="4320000" cy="4320000"/>
           </a:xfrm>
           <a:prstGeom prst="rect">
@@ -3945,1932 +6195,48 @@
           </a:prstGeom>
         </p:spPr>
       </p:pic>
-      <p:sp>
-        <p:nvSpPr>
-          <p:cNvPr id="32" name="文本框 31">
-            <a:extLst>
-              <a:ext uri="{FF2B5EF4-FFF2-40B4-BE49-F238E27FC236}">
-                <a16:creationId xmlns:a16="http://schemas.microsoft.com/office/drawing/2014/main" id="{C7E37F86-A5AA-6986-DD6F-BF81C4BBDA74}"/>
-              </a:ext>
-            </a:extLst>
-          </p:cNvPr>
-          <p:cNvSpPr txBox="1"/>
-          <p:nvPr/>
-        </p:nvSpPr>
-        <p:spPr>
-          <a:xfrm>
-            <a:off x="11868692" y="5682936"/>
-            <a:ext cx="4320000" cy="461665"/>
-          </a:xfrm>
-          <a:prstGeom prst="rect">
-            <a:avLst/>
-          </a:prstGeom>
-          <a:noFill/>
-        </p:spPr>
-        <p:txBody>
-          <a:bodyPr wrap="square" rtlCol="0">
-            <a:spAutoFit/>
-          </a:bodyPr>
-          <a:lstStyle/>
-          <a:p>
-            <a:pPr algn="ctr"/>
-            <a:r>
-              <a:rPr kumimoji="1" lang="en-US" altLang="zh-CN" sz="2400" dirty="0">
-                <a:latin typeface="Arial" panose="020B0604020202020204" pitchFamily="34" charset="0"/>
-                <a:cs typeface="Arial" panose="020B0604020202020204" pitchFamily="34" charset="0"/>
-              </a:rPr>
-              <a:t>Pos</a:t>
-            </a:r>
-            <a:r>
-              <a:rPr kumimoji="1" lang="zh-CN" altLang="en-US" sz="2400" dirty="0">
-                <a:latin typeface="Arial" panose="020B0604020202020204" pitchFamily="34" charset="0"/>
-                <a:cs typeface="Arial" panose="020B0604020202020204" pitchFamily="34" charset="0"/>
-              </a:rPr>
-              <a:t> </a:t>
-            </a:r>
-            <a:r>
-              <a:rPr kumimoji="1" lang="en-US" altLang="zh-CN" sz="2400" dirty="0">
-                <a:latin typeface="Arial" panose="020B0604020202020204" pitchFamily="34" charset="0"/>
-                <a:cs typeface="Arial" panose="020B0604020202020204" pitchFamily="34" charset="0"/>
-              </a:rPr>
-              <a:t>x</a:t>
-            </a:r>
-            <a:endParaRPr kumimoji="1" lang="zh-CN" altLang="en-US" sz="2400" dirty="0">
-              <a:latin typeface="Arial" panose="020B0604020202020204" pitchFamily="34" charset="0"/>
-              <a:cs typeface="Arial" panose="020B0604020202020204" pitchFamily="34" charset="0"/>
-            </a:endParaRPr>
-          </a:p>
-        </p:txBody>
-      </p:sp>
-      <p:sp>
-        <p:nvSpPr>
-          <p:cNvPr id="33" name="文本框 32">
-            <a:extLst>
-              <a:ext uri="{FF2B5EF4-FFF2-40B4-BE49-F238E27FC236}">
-                <a16:creationId xmlns:a16="http://schemas.microsoft.com/office/drawing/2014/main" id="{ED17A11F-6493-F2B3-F4B9-084DF90C1CDB}"/>
-              </a:ext>
-            </a:extLst>
-          </p:cNvPr>
-          <p:cNvSpPr txBox="1"/>
-          <p:nvPr/>
-        </p:nvSpPr>
-        <p:spPr>
-          <a:xfrm>
-            <a:off x="16733160" y="5682936"/>
-            <a:ext cx="4320000" cy="461665"/>
-          </a:xfrm>
-          <a:prstGeom prst="rect">
-            <a:avLst/>
-          </a:prstGeom>
-          <a:noFill/>
-        </p:spPr>
-        <p:txBody>
-          <a:bodyPr wrap="square" rtlCol="0">
-            <a:spAutoFit/>
-          </a:bodyPr>
-          <a:lstStyle/>
-          <a:p>
-            <a:pPr algn="ctr"/>
-            <a:r>
-              <a:rPr kumimoji="1" lang="en-US" altLang="zh-CN" sz="2400" dirty="0">
-                <a:latin typeface="Arial" panose="020B0604020202020204" pitchFamily="34" charset="0"/>
-                <a:cs typeface="Arial" panose="020B0604020202020204" pitchFamily="34" charset="0"/>
-              </a:rPr>
-              <a:t>Relative</a:t>
-            </a:r>
-            <a:r>
-              <a:rPr kumimoji="1" lang="zh-CN" altLang="en-US" sz="2400" dirty="0">
-                <a:latin typeface="Arial" panose="020B0604020202020204" pitchFamily="34" charset="0"/>
-                <a:cs typeface="Arial" panose="020B0604020202020204" pitchFamily="34" charset="0"/>
-              </a:rPr>
-              <a:t> </a:t>
-            </a:r>
-            <a:r>
-              <a:rPr kumimoji="1" lang="en-US" altLang="zh-CN" sz="2400" dirty="0">
-                <a:latin typeface="Arial" panose="020B0604020202020204" pitchFamily="34" charset="0"/>
-                <a:cs typeface="Arial" panose="020B0604020202020204" pitchFamily="34" charset="0"/>
-              </a:rPr>
-              <a:t>size</a:t>
-            </a:r>
-            <a:endParaRPr kumimoji="1" lang="zh-CN" altLang="en-US" sz="2400" dirty="0">
-              <a:latin typeface="Arial" panose="020B0604020202020204" pitchFamily="34" charset="0"/>
-              <a:cs typeface="Arial" panose="020B0604020202020204" pitchFamily="34" charset="0"/>
-            </a:endParaRPr>
-          </a:p>
-        </p:txBody>
-      </p:sp>
-      <p:sp>
-        <p:nvSpPr>
-          <p:cNvPr id="34" name="文本框 33">
-            <a:extLst>
-              <a:ext uri="{FF2B5EF4-FFF2-40B4-BE49-F238E27FC236}">
-                <a16:creationId xmlns:a16="http://schemas.microsoft.com/office/drawing/2014/main" id="{FE1E10C3-D6AC-2329-849D-D47D2194AC46}"/>
-              </a:ext>
-            </a:extLst>
-          </p:cNvPr>
-          <p:cNvSpPr txBox="1"/>
-          <p:nvPr/>
-        </p:nvSpPr>
-        <p:spPr>
-          <a:xfrm rot="16200000">
-            <a:off x="9346351" y="3265359"/>
-            <a:ext cx="4320000" cy="461665"/>
-          </a:xfrm>
-          <a:prstGeom prst="rect">
-            <a:avLst/>
-          </a:prstGeom>
-          <a:noFill/>
-        </p:spPr>
-        <p:txBody>
-          <a:bodyPr wrap="square" rtlCol="0">
-            <a:spAutoFit/>
-          </a:bodyPr>
-          <a:lstStyle/>
-          <a:p>
-            <a:pPr algn="ctr"/>
-            <a:r>
-              <a:rPr kumimoji="1" lang="en-US" altLang="zh-CN" sz="2400" dirty="0">
-                <a:latin typeface="Arial" panose="020B0604020202020204" pitchFamily="34" charset="0"/>
-                <a:cs typeface="Arial" panose="020B0604020202020204" pitchFamily="34" charset="0"/>
-              </a:rPr>
-              <a:t>Pos</a:t>
-            </a:r>
-            <a:r>
-              <a:rPr kumimoji="1" lang="zh-CN" altLang="en-US" sz="2400" dirty="0">
-                <a:latin typeface="Arial" panose="020B0604020202020204" pitchFamily="34" charset="0"/>
-                <a:cs typeface="Arial" panose="020B0604020202020204" pitchFamily="34" charset="0"/>
-              </a:rPr>
-              <a:t> </a:t>
-            </a:r>
-            <a:r>
-              <a:rPr kumimoji="1" lang="en-US" altLang="zh-CN" sz="2400" dirty="0">
-                <a:latin typeface="Arial" panose="020B0604020202020204" pitchFamily="34" charset="0"/>
-                <a:cs typeface="Arial" panose="020B0604020202020204" pitchFamily="34" charset="0"/>
-              </a:rPr>
-              <a:t>y</a:t>
-            </a:r>
-            <a:endParaRPr kumimoji="1" lang="zh-CN" altLang="en-US" sz="2400" dirty="0">
-              <a:latin typeface="Arial" panose="020B0604020202020204" pitchFamily="34" charset="0"/>
-              <a:cs typeface="Arial" panose="020B0604020202020204" pitchFamily="34" charset="0"/>
-            </a:endParaRPr>
-          </a:p>
-        </p:txBody>
-      </p:sp>
-      <p:sp>
-        <p:nvSpPr>
-          <p:cNvPr id="35" name="文本框 34">
-            <a:extLst>
-              <a:ext uri="{FF2B5EF4-FFF2-40B4-BE49-F238E27FC236}">
-                <a16:creationId xmlns:a16="http://schemas.microsoft.com/office/drawing/2014/main" id="{404BE88D-4B96-1695-BCBE-2DDF7F322518}"/>
-              </a:ext>
-            </a:extLst>
-          </p:cNvPr>
-          <p:cNvSpPr txBox="1"/>
-          <p:nvPr/>
-        </p:nvSpPr>
-        <p:spPr>
-          <a:xfrm rot="16200000">
-            <a:off x="13973177" y="3265359"/>
-            <a:ext cx="4320000" cy="461665"/>
-          </a:xfrm>
-          <a:prstGeom prst="rect">
-            <a:avLst/>
-          </a:prstGeom>
-          <a:noFill/>
-        </p:spPr>
-        <p:txBody>
-          <a:bodyPr wrap="square" rtlCol="0">
-            <a:spAutoFit/>
-          </a:bodyPr>
-          <a:lstStyle/>
-          <a:p>
-            <a:pPr algn="ctr"/>
-            <a:r>
-              <a:rPr kumimoji="1" lang="en-US" altLang="zh-CN" sz="2400" dirty="0">
-                <a:latin typeface="Arial" panose="020B0604020202020204" pitchFamily="34" charset="0"/>
-                <a:cs typeface="Arial" panose="020B0604020202020204" pitchFamily="34" charset="0"/>
-              </a:rPr>
-              <a:t>Density</a:t>
-            </a:r>
-            <a:endParaRPr kumimoji="1" lang="zh-CN" altLang="en-US" sz="2400" dirty="0">
-              <a:latin typeface="Arial" panose="020B0604020202020204" pitchFamily="34" charset="0"/>
-              <a:cs typeface="Arial" panose="020B0604020202020204" pitchFamily="34" charset="0"/>
-            </a:endParaRPr>
-          </a:p>
-        </p:txBody>
-      </p:sp>
-      <p:sp>
-        <p:nvSpPr>
-          <p:cNvPr id="36" name="文本框 35">
-            <a:extLst>
-              <a:ext uri="{FF2B5EF4-FFF2-40B4-BE49-F238E27FC236}">
-                <a16:creationId xmlns:a16="http://schemas.microsoft.com/office/drawing/2014/main" id="{2206714E-2A1A-1CE1-CD85-F81DA70ECEDF}"/>
-              </a:ext>
-            </a:extLst>
-          </p:cNvPr>
-          <p:cNvSpPr txBox="1"/>
-          <p:nvPr/>
-        </p:nvSpPr>
-        <p:spPr>
-          <a:xfrm>
-            <a:off x="11868691" y="1204852"/>
-            <a:ext cx="4320000" cy="461665"/>
-          </a:xfrm>
-          <a:prstGeom prst="rect">
-            <a:avLst/>
-          </a:prstGeom>
-          <a:noFill/>
-        </p:spPr>
-        <p:txBody>
-          <a:bodyPr wrap="square" rtlCol="0">
-            <a:spAutoFit/>
-          </a:bodyPr>
-          <a:lstStyle/>
-          <a:p>
-            <a:pPr algn="ctr"/>
-            <a:r>
-              <a:rPr kumimoji="1" lang="en-US" altLang="zh-CN" sz="2400" dirty="0">
-                <a:latin typeface="Arial" panose="020B0604020202020204" pitchFamily="34" charset="0"/>
-                <a:cs typeface="Arial" panose="020B0604020202020204" pitchFamily="34" charset="0"/>
-              </a:rPr>
-              <a:t>TN5K</a:t>
-            </a:r>
-            <a:r>
-              <a:rPr kumimoji="1" lang="zh-CN" altLang="en-US" sz="2400" dirty="0">
-                <a:latin typeface="Arial" panose="020B0604020202020204" pitchFamily="34" charset="0"/>
-                <a:cs typeface="Arial" panose="020B0604020202020204" pitchFamily="34" charset="0"/>
-              </a:rPr>
-              <a:t> </a:t>
-            </a:r>
-            <a:r>
-              <a:rPr kumimoji="1" lang="en-US" altLang="zh-CN" sz="2400" dirty="0">
-                <a:latin typeface="Arial" panose="020B0604020202020204" pitchFamily="34" charset="0"/>
-                <a:cs typeface="Arial" panose="020B0604020202020204" pitchFamily="34" charset="0"/>
-              </a:rPr>
-              <a:t>–</a:t>
-            </a:r>
-            <a:r>
-              <a:rPr kumimoji="1" lang="zh-CN" altLang="en-US" sz="2400" dirty="0">
-                <a:latin typeface="Arial" panose="020B0604020202020204" pitchFamily="34" charset="0"/>
-                <a:cs typeface="Arial" panose="020B0604020202020204" pitchFamily="34" charset="0"/>
-              </a:rPr>
-              <a:t> </a:t>
-            </a:r>
-            <a:r>
-              <a:rPr kumimoji="1" lang="en-US" altLang="zh-CN" sz="2400" dirty="0">
-                <a:latin typeface="Arial" panose="020B0604020202020204" pitchFamily="34" charset="0"/>
-                <a:cs typeface="Arial" panose="020B0604020202020204" pitchFamily="34" charset="0"/>
-              </a:rPr>
-              <a:t>Position</a:t>
-            </a:r>
-            <a:r>
-              <a:rPr kumimoji="1" lang="zh-CN" altLang="en-US" sz="2400" dirty="0">
-                <a:latin typeface="Arial" panose="020B0604020202020204" pitchFamily="34" charset="0"/>
-                <a:cs typeface="Arial" panose="020B0604020202020204" pitchFamily="34" charset="0"/>
-              </a:rPr>
-              <a:t> </a:t>
-            </a:r>
-            <a:r>
-              <a:rPr kumimoji="1" lang="en-US" altLang="zh-CN" sz="2400" dirty="0">
-                <a:latin typeface="Arial" panose="020B0604020202020204" pitchFamily="34" charset="0"/>
-                <a:cs typeface="Arial" panose="020B0604020202020204" pitchFamily="34" charset="0"/>
-              </a:rPr>
-              <a:t>(N=5000</a:t>
-            </a:r>
-            <a:r>
-              <a:rPr kumimoji="1" lang="en-US" altLang="zh-CN" sz="2000" dirty="0">
-                <a:latin typeface="Arial" panose="020B0604020202020204" pitchFamily="34" charset="0"/>
-                <a:cs typeface="Arial" panose="020B0604020202020204" pitchFamily="34" charset="0"/>
-              </a:rPr>
-              <a:t>)</a:t>
-            </a:r>
-            <a:endParaRPr kumimoji="1" lang="zh-CN" altLang="en-US" sz="2000" dirty="0">
-              <a:latin typeface="Arial" panose="020B0604020202020204" pitchFamily="34" charset="0"/>
-              <a:cs typeface="Arial" panose="020B0604020202020204" pitchFamily="34" charset="0"/>
-            </a:endParaRPr>
-          </a:p>
-        </p:txBody>
-      </p:sp>
-      <p:sp>
-        <p:nvSpPr>
-          <p:cNvPr id="37" name="文本框 36">
-            <a:extLst>
-              <a:ext uri="{FF2B5EF4-FFF2-40B4-BE49-F238E27FC236}">
-                <a16:creationId xmlns:a16="http://schemas.microsoft.com/office/drawing/2014/main" id="{37AAC4B5-1E32-9F17-B1FD-C59FE675116B}"/>
-              </a:ext>
-            </a:extLst>
-          </p:cNvPr>
-          <p:cNvSpPr txBox="1"/>
-          <p:nvPr/>
-        </p:nvSpPr>
-        <p:spPr>
-          <a:xfrm>
-            <a:off x="16733158" y="1204852"/>
-            <a:ext cx="4320000" cy="461665"/>
-          </a:xfrm>
-          <a:prstGeom prst="rect">
-            <a:avLst/>
-          </a:prstGeom>
-          <a:noFill/>
-        </p:spPr>
-        <p:txBody>
-          <a:bodyPr wrap="square" rtlCol="0">
-            <a:spAutoFit/>
-          </a:bodyPr>
-          <a:lstStyle/>
-          <a:p>
-            <a:pPr algn="ctr"/>
-            <a:r>
-              <a:rPr kumimoji="1" lang="en-US" altLang="zh-CN" sz="2400" dirty="0">
-                <a:latin typeface="Arial" panose="020B0604020202020204" pitchFamily="34" charset="0"/>
-                <a:cs typeface="Arial" panose="020B0604020202020204" pitchFamily="34" charset="0"/>
-              </a:rPr>
-              <a:t>TN5K</a:t>
-            </a:r>
-            <a:r>
-              <a:rPr kumimoji="1" lang="zh-CN" altLang="en-US" sz="2400" dirty="0">
-                <a:latin typeface="Arial" panose="020B0604020202020204" pitchFamily="34" charset="0"/>
-                <a:cs typeface="Arial" panose="020B0604020202020204" pitchFamily="34" charset="0"/>
-              </a:rPr>
-              <a:t> </a:t>
-            </a:r>
-            <a:r>
-              <a:rPr kumimoji="1" lang="en-US" altLang="zh-CN" sz="2400" dirty="0">
-                <a:latin typeface="Arial" panose="020B0604020202020204" pitchFamily="34" charset="0"/>
-                <a:cs typeface="Arial" panose="020B0604020202020204" pitchFamily="34" charset="0"/>
-              </a:rPr>
-              <a:t>–</a:t>
-            </a:r>
-            <a:r>
-              <a:rPr kumimoji="1" lang="zh-CN" altLang="en-US" sz="2400" dirty="0">
-                <a:latin typeface="Arial" panose="020B0604020202020204" pitchFamily="34" charset="0"/>
-                <a:cs typeface="Arial" panose="020B0604020202020204" pitchFamily="34" charset="0"/>
-              </a:rPr>
-              <a:t> </a:t>
-            </a:r>
-            <a:r>
-              <a:rPr kumimoji="1" lang="en-US" altLang="zh-CN" sz="2400" dirty="0">
-                <a:latin typeface="Arial" panose="020B0604020202020204" pitchFamily="34" charset="0"/>
-                <a:cs typeface="Arial" panose="020B0604020202020204" pitchFamily="34" charset="0"/>
-              </a:rPr>
-              <a:t>Size</a:t>
-            </a:r>
-            <a:r>
-              <a:rPr kumimoji="1" lang="zh-CN" altLang="en-US" sz="2400" dirty="0">
-                <a:latin typeface="Arial" panose="020B0604020202020204" pitchFamily="34" charset="0"/>
-                <a:cs typeface="Arial" panose="020B0604020202020204" pitchFamily="34" charset="0"/>
-              </a:rPr>
-              <a:t> </a:t>
-            </a:r>
-            <a:r>
-              <a:rPr kumimoji="1" lang="en-US" altLang="zh-CN" sz="2400" dirty="0">
-                <a:latin typeface="Arial" panose="020B0604020202020204" pitchFamily="34" charset="0"/>
-                <a:cs typeface="Arial" panose="020B0604020202020204" pitchFamily="34" charset="0"/>
-              </a:rPr>
-              <a:t>(N=5000)</a:t>
-            </a:r>
-            <a:endParaRPr kumimoji="1" lang="zh-CN" altLang="en-US" sz="2400" dirty="0">
-              <a:latin typeface="Arial" panose="020B0604020202020204" pitchFamily="34" charset="0"/>
-              <a:cs typeface="Arial" panose="020B0604020202020204" pitchFamily="34" charset="0"/>
-            </a:endParaRPr>
-          </a:p>
-        </p:txBody>
-      </p:sp>
-      <p:sp>
-        <p:nvSpPr>
-          <p:cNvPr id="38" name="文本框 37">
-            <a:extLst>
-              <a:ext uri="{FF2B5EF4-FFF2-40B4-BE49-F238E27FC236}">
-                <a16:creationId xmlns:a16="http://schemas.microsoft.com/office/drawing/2014/main" id="{7A8FE8D2-D0E1-6817-C44B-C8DDEA1F7B93}"/>
-              </a:ext>
-            </a:extLst>
-          </p:cNvPr>
-          <p:cNvSpPr txBox="1"/>
-          <p:nvPr/>
-        </p:nvSpPr>
-        <p:spPr>
-          <a:xfrm>
-            <a:off x="1733509" y="6121826"/>
-            <a:ext cx="4450978" cy="461665"/>
-          </a:xfrm>
-          <a:prstGeom prst="rect">
-            <a:avLst/>
-          </a:prstGeom>
-          <a:noFill/>
-        </p:spPr>
-        <p:txBody>
-          <a:bodyPr wrap="square" rtlCol="0">
-            <a:spAutoFit/>
-          </a:bodyPr>
-          <a:lstStyle/>
-          <a:p>
-            <a:pPr algn="ctr"/>
-            <a:r>
-              <a:rPr kumimoji="1" lang="en-US" altLang="zh-CN" sz="2400" dirty="0" err="1">
-                <a:latin typeface="Arial" panose="020B0604020202020204" pitchFamily="34" charset="0"/>
-                <a:cs typeface="Arial" panose="020B0604020202020204" pitchFamily="34" charset="0"/>
-              </a:rPr>
-              <a:t>ThyroidXL</a:t>
-            </a:r>
-            <a:r>
-              <a:rPr kumimoji="1" lang="en-US" altLang="zh-CN" sz="2400" dirty="0">
-                <a:latin typeface="Arial" panose="020B0604020202020204" pitchFamily="34" charset="0"/>
-                <a:cs typeface="Arial" panose="020B0604020202020204" pitchFamily="34" charset="0"/>
-              </a:rPr>
-              <a:t>–</a:t>
-            </a:r>
-            <a:r>
-              <a:rPr kumimoji="1" lang="zh-CN" altLang="en-US" sz="2400" dirty="0">
-                <a:latin typeface="Arial" panose="020B0604020202020204" pitchFamily="34" charset="0"/>
-                <a:cs typeface="Arial" panose="020B0604020202020204" pitchFamily="34" charset="0"/>
-              </a:rPr>
-              <a:t> </a:t>
-            </a:r>
-            <a:r>
-              <a:rPr kumimoji="1" lang="en-US" altLang="zh-CN" sz="2400" dirty="0">
-                <a:latin typeface="Arial" panose="020B0604020202020204" pitchFamily="34" charset="0"/>
-                <a:cs typeface="Arial" panose="020B0604020202020204" pitchFamily="34" charset="0"/>
-              </a:rPr>
-              <a:t>Position</a:t>
-            </a:r>
-            <a:r>
-              <a:rPr kumimoji="1" lang="zh-CN" altLang="en-US" sz="2400" dirty="0">
-                <a:latin typeface="Arial" panose="020B0604020202020204" pitchFamily="34" charset="0"/>
-                <a:cs typeface="Arial" panose="020B0604020202020204" pitchFamily="34" charset="0"/>
-              </a:rPr>
-              <a:t> </a:t>
-            </a:r>
-            <a:r>
-              <a:rPr kumimoji="1" lang="en-US" altLang="zh-CN" sz="2400" dirty="0">
-                <a:latin typeface="Arial" panose="020B0604020202020204" pitchFamily="34" charset="0"/>
-                <a:cs typeface="Arial" panose="020B0604020202020204" pitchFamily="34" charset="0"/>
-              </a:rPr>
-              <a:t>(N=11635)</a:t>
-            </a:r>
-            <a:endParaRPr kumimoji="1" lang="zh-CN" altLang="en-US" sz="2400" dirty="0">
-              <a:latin typeface="Arial" panose="020B0604020202020204" pitchFamily="34" charset="0"/>
-              <a:cs typeface="Arial" panose="020B0604020202020204" pitchFamily="34" charset="0"/>
-            </a:endParaRPr>
-          </a:p>
-        </p:txBody>
-      </p:sp>
-      <p:sp>
-        <p:nvSpPr>
-          <p:cNvPr id="39" name="文本框 38">
-            <a:extLst>
-              <a:ext uri="{FF2B5EF4-FFF2-40B4-BE49-F238E27FC236}">
-                <a16:creationId xmlns:a16="http://schemas.microsoft.com/office/drawing/2014/main" id="{F858EA0E-0D76-BEBF-2622-01801FA274AF}"/>
-              </a:ext>
-            </a:extLst>
-          </p:cNvPr>
-          <p:cNvSpPr txBox="1"/>
-          <p:nvPr/>
-        </p:nvSpPr>
-        <p:spPr>
-          <a:xfrm rot="16200000">
-            <a:off x="-533263" y="8182966"/>
-            <a:ext cx="4320000" cy="461665"/>
-          </a:xfrm>
-          <a:prstGeom prst="rect">
-            <a:avLst/>
-          </a:prstGeom>
-          <a:noFill/>
-        </p:spPr>
-        <p:txBody>
-          <a:bodyPr wrap="square" rtlCol="0">
-            <a:spAutoFit/>
-          </a:bodyPr>
-          <a:lstStyle/>
-          <a:p>
-            <a:pPr algn="ctr"/>
-            <a:r>
-              <a:rPr kumimoji="1" lang="en-US" altLang="zh-CN" sz="2400" dirty="0">
-                <a:latin typeface="Arial" panose="020B0604020202020204" pitchFamily="34" charset="0"/>
-                <a:cs typeface="Arial" panose="020B0604020202020204" pitchFamily="34" charset="0"/>
-              </a:rPr>
-              <a:t>Pos</a:t>
-            </a:r>
-            <a:r>
-              <a:rPr kumimoji="1" lang="zh-CN" altLang="en-US" sz="2400" dirty="0">
-                <a:latin typeface="Arial" panose="020B0604020202020204" pitchFamily="34" charset="0"/>
-                <a:cs typeface="Arial" panose="020B0604020202020204" pitchFamily="34" charset="0"/>
-              </a:rPr>
-              <a:t> </a:t>
-            </a:r>
-            <a:r>
-              <a:rPr kumimoji="1" lang="en-US" altLang="zh-CN" sz="2400" dirty="0">
-                <a:latin typeface="Arial" panose="020B0604020202020204" pitchFamily="34" charset="0"/>
-                <a:cs typeface="Arial" panose="020B0604020202020204" pitchFamily="34" charset="0"/>
-              </a:rPr>
-              <a:t>y</a:t>
-            </a:r>
-            <a:endParaRPr kumimoji="1" lang="zh-CN" altLang="en-US" sz="2400" dirty="0">
-              <a:latin typeface="Arial" panose="020B0604020202020204" pitchFamily="34" charset="0"/>
-              <a:cs typeface="Arial" panose="020B0604020202020204" pitchFamily="34" charset="0"/>
-            </a:endParaRPr>
-          </a:p>
-        </p:txBody>
-      </p:sp>
-      <p:sp>
-        <p:nvSpPr>
-          <p:cNvPr id="41" name="文本框 40">
-            <a:extLst>
-              <a:ext uri="{FF2B5EF4-FFF2-40B4-BE49-F238E27FC236}">
-                <a16:creationId xmlns:a16="http://schemas.microsoft.com/office/drawing/2014/main" id="{AAE4E19F-E5E0-D0B0-A1C3-A22D62BF0AAB}"/>
-              </a:ext>
-            </a:extLst>
-          </p:cNvPr>
-          <p:cNvSpPr txBox="1"/>
-          <p:nvPr/>
-        </p:nvSpPr>
-        <p:spPr>
-          <a:xfrm>
-            <a:off x="1733508" y="10600543"/>
-            <a:ext cx="4320000" cy="461665"/>
-          </a:xfrm>
-          <a:prstGeom prst="rect">
-            <a:avLst/>
-          </a:prstGeom>
-          <a:noFill/>
-        </p:spPr>
-        <p:txBody>
-          <a:bodyPr wrap="square" rtlCol="0">
-            <a:spAutoFit/>
-          </a:bodyPr>
-          <a:lstStyle/>
-          <a:p>
-            <a:pPr algn="ctr"/>
-            <a:r>
-              <a:rPr kumimoji="1" lang="en-US" altLang="zh-CN" sz="2400" dirty="0">
-                <a:latin typeface="Arial" panose="020B0604020202020204" pitchFamily="34" charset="0"/>
-                <a:cs typeface="Arial" panose="020B0604020202020204" pitchFamily="34" charset="0"/>
-              </a:rPr>
-              <a:t>Pos</a:t>
-            </a:r>
-            <a:r>
-              <a:rPr kumimoji="1" lang="zh-CN" altLang="en-US" sz="2400" dirty="0">
-                <a:latin typeface="Arial" panose="020B0604020202020204" pitchFamily="34" charset="0"/>
-                <a:cs typeface="Arial" panose="020B0604020202020204" pitchFamily="34" charset="0"/>
-              </a:rPr>
-              <a:t> </a:t>
-            </a:r>
-            <a:r>
-              <a:rPr kumimoji="1" lang="en-US" altLang="zh-CN" sz="2400" dirty="0">
-                <a:latin typeface="Arial" panose="020B0604020202020204" pitchFamily="34" charset="0"/>
-                <a:cs typeface="Arial" panose="020B0604020202020204" pitchFamily="34" charset="0"/>
-              </a:rPr>
-              <a:t>x</a:t>
-            </a:r>
-            <a:endParaRPr kumimoji="1" lang="zh-CN" altLang="en-US" sz="2400" dirty="0">
-              <a:latin typeface="Arial" panose="020B0604020202020204" pitchFamily="34" charset="0"/>
-              <a:cs typeface="Arial" panose="020B0604020202020204" pitchFamily="34" charset="0"/>
-            </a:endParaRPr>
-          </a:p>
-        </p:txBody>
-      </p:sp>
-      <p:sp>
-        <p:nvSpPr>
-          <p:cNvPr id="43" name="文本框 42">
-            <a:extLst>
-              <a:ext uri="{FF2B5EF4-FFF2-40B4-BE49-F238E27FC236}">
-                <a16:creationId xmlns:a16="http://schemas.microsoft.com/office/drawing/2014/main" id="{280EE2D3-ED69-4B75-9B74-FD7776BC2883}"/>
-              </a:ext>
-            </a:extLst>
-          </p:cNvPr>
-          <p:cNvSpPr txBox="1"/>
-          <p:nvPr/>
-        </p:nvSpPr>
-        <p:spPr>
-          <a:xfrm>
-            <a:off x="6597976" y="10600856"/>
-            <a:ext cx="4320000" cy="461665"/>
-          </a:xfrm>
-          <a:prstGeom prst="rect">
-            <a:avLst/>
-          </a:prstGeom>
-          <a:noFill/>
-        </p:spPr>
-        <p:txBody>
-          <a:bodyPr wrap="square" rtlCol="0">
-            <a:spAutoFit/>
-          </a:bodyPr>
-          <a:lstStyle/>
-          <a:p>
-            <a:pPr algn="ctr"/>
-            <a:r>
-              <a:rPr kumimoji="1" lang="en-US" altLang="zh-CN" sz="2400" dirty="0">
-                <a:latin typeface="Arial" panose="020B0604020202020204" pitchFamily="34" charset="0"/>
-                <a:cs typeface="Arial" panose="020B0604020202020204" pitchFamily="34" charset="0"/>
-              </a:rPr>
-              <a:t>Relative</a:t>
-            </a:r>
-            <a:r>
-              <a:rPr kumimoji="1" lang="zh-CN" altLang="en-US" sz="2400" dirty="0">
-                <a:latin typeface="Arial" panose="020B0604020202020204" pitchFamily="34" charset="0"/>
-                <a:cs typeface="Arial" panose="020B0604020202020204" pitchFamily="34" charset="0"/>
-              </a:rPr>
-              <a:t> </a:t>
-            </a:r>
-            <a:r>
-              <a:rPr kumimoji="1" lang="en-US" altLang="zh-CN" sz="2400" dirty="0">
-                <a:latin typeface="Arial" panose="020B0604020202020204" pitchFamily="34" charset="0"/>
-                <a:cs typeface="Arial" panose="020B0604020202020204" pitchFamily="34" charset="0"/>
-              </a:rPr>
-              <a:t>size</a:t>
-            </a:r>
-            <a:endParaRPr kumimoji="1" lang="zh-CN" altLang="en-US" sz="2400" dirty="0">
-              <a:latin typeface="Arial" panose="020B0604020202020204" pitchFamily="34" charset="0"/>
-              <a:cs typeface="Arial" panose="020B0604020202020204" pitchFamily="34" charset="0"/>
-            </a:endParaRPr>
-          </a:p>
-        </p:txBody>
-      </p:sp>
-      <p:sp>
-        <p:nvSpPr>
-          <p:cNvPr id="44" name="文本框 43">
-            <a:extLst>
-              <a:ext uri="{FF2B5EF4-FFF2-40B4-BE49-F238E27FC236}">
-                <a16:creationId xmlns:a16="http://schemas.microsoft.com/office/drawing/2014/main" id="{5BE37944-3F83-AC3C-5DFC-CB8F36C15C6E}"/>
-              </a:ext>
-            </a:extLst>
-          </p:cNvPr>
-          <p:cNvSpPr txBox="1"/>
-          <p:nvPr/>
-        </p:nvSpPr>
-        <p:spPr>
-          <a:xfrm>
-            <a:off x="6599276" y="6122772"/>
-            <a:ext cx="4320000" cy="461665"/>
-          </a:xfrm>
-          <a:prstGeom prst="rect">
-            <a:avLst/>
-          </a:prstGeom>
-          <a:noFill/>
-        </p:spPr>
-        <p:txBody>
-          <a:bodyPr wrap="square" rtlCol="0">
-            <a:spAutoFit/>
-          </a:bodyPr>
-          <a:lstStyle/>
-          <a:p>
-            <a:pPr algn="ctr"/>
-            <a:r>
-              <a:rPr kumimoji="1" lang="en-US" altLang="zh-CN" sz="2400" dirty="0" err="1">
-                <a:latin typeface="Arial" panose="020B0604020202020204" pitchFamily="34" charset="0"/>
-                <a:cs typeface="Arial" panose="020B0604020202020204" pitchFamily="34" charset="0"/>
-              </a:rPr>
-              <a:t>ThyroidXL</a:t>
-            </a:r>
-            <a:r>
-              <a:rPr kumimoji="1" lang="zh-CN" altLang="en-US" sz="2400" dirty="0">
-                <a:latin typeface="Arial" panose="020B0604020202020204" pitchFamily="34" charset="0"/>
-                <a:cs typeface="Arial" panose="020B0604020202020204" pitchFamily="34" charset="0"/>
-              </a:rPr>
-              <a:t> </a:t>
-            </a:r>
-            <a:r>
-              <a:rPr kumimoji="1" lang="en-US" altLang="zh-CN" sz="2400" dirty="0">
-                <a:latin typeface="Arial" panose="020B0604020202020204" pitchFamily="34" charset="0"/>
-                <a:cs typeface="Arial" panose="020B0604020202020204" pitchFamily="34" charset="0"/>
-              </a:rPr>
-              <a:t>–</a:t>
-            </a:r>
-            <a:r>
-              <a:rPr kumimoji="1" lang="zh-CN" altLang="en-US" sz="2400" dirty="0">
-                <a:latin typeface="Arial" panose="020B0604020202020204" pitchFamily="34" charset="0"/>
-                <a:cs typeface="Arial" panose="020B0604020202020204" pitchFamily="34" charset="0"/>
-              </a:rPr>
-              <a:t> </a:t>
-            </a:r>
-            <a:r>
-              <a:rPr kumimoji="1" lang="en-US" altLang="zh-CN" sz="2400" dirty="0">
-                <a:latin typeface="Arial" panose="020B0604020202020204" pitchFamily="34" charset="0"/>
-                <a:cs typeface="Arial" panose="020B0604020202020204" pitchFamily="34" charset="0"/>
-              </a:rPr>
-              <a:t>Size</a:t>
-            </a:r>
-            <a:r>
-              <a:rPr kumimoji="1" lang="zh-CN" altLang="en-US" sz="2400" dirty="0">
-                <a:latin typeface="Arial" panose="020B0604020202020204" pitchFamily="34" charset="0"/>
-                <a:cs typeface="Arial" panose="020B0604020202020204" pitchFamily="34" charset="0"/>
-              </a:rPr>
-              <a:t> </a:t>
-            </a:r>
-            <a:r>
-              <a:rPr kumimoji="1" lang="en-US" altLang="zh-CN" sz="2400" dirty="0">
-                <a:latin typeface="Arial" panose="020B0604020202020204" pitchFamily="34" charset="0"/>
-                <a:cs typeface="Arial" panose="020B0604020202020204" pitchFamily="34" charset="0"/>
-              </a:rPr>
-              <a:t>(N=11635)</a:t>
-            </a:r>
-            <a:endParaRPr kumimoji="1" lang="zh-CN" altLang="en-US" sz="2400" dirty="0">
-              <a:latin typeface="Arial" panose="020B0604020202020204" pitchFamily="34" charset="0"/>
-              <a:cs typeface="Arial" panose="020B0604020202020204" pitchFamily="34" charset="0"/>
-            </a:endParaRPr>
-          </a:p>
-        </p:txBody>
-      </p:sp>
-      <p:sp>
-        <p:nvSpPr>
-          <p:cNvPr id="45" name="文本框 44">
-            <a:extLst>
-              <a:ext uri="{FF2B5EF4-FFF2-40B4-BE49-F238E27FC236}">
-                <a16:creationId xmlns:a16="http://schemas.microsoft.com/office/drawing/2014/main" id="{B300CFFF-215A-8116-9303-9F346DB2A244}"/>
-              </a:ext>
-            </a:extLst>
-          </p:cNvPr>
-          <p:cNvSpPr txBox="1"/>
-          <p:nvPr/>
-        </p:nvSpPr>
-        <p:spPr>
-          <a:xfrm rot="16200000">
-            <a:off x="4093563" y="8183279"/>
-            <a:ext cx="4320000" cy="461665"/>
-          </a:xfrm>
-          <a:prstGeom prst="rect">
-            <a:avLst/>
-          </a:prstGeom>
-          <a:noFill/>
-        </p:spPr>
-        <p:txBody>
-          <a:bodyPr wrap="square" rtlCol="0">
-            <a:spAutoFit/>
-          </a:bodyPr>
-          <a:lstStyle/>
-          <a:p>
-            <a:pPr algn="ctr"/>
-            <a:r>
-              <a:rPr kumimoji="1" lang="en-US" altLang="zh-CN" sz="2400" dirty="0">
-                <a:latin typeface="Arial" panose="020B0604020202020204" pitchFamily="34" charset="0"/>
-                <a:cs typeface="Arial" panose="020B0604020202020204" pitchFamily="34" charset="0"/>
-              </a:rPr>
-              <a:t>Density</a:t>
-            </a:r>
-            <a:endParaRPr kumimoji="1" lang="zh-CN" altLang="en-US" sz="2400" dirty="0">
-              <a:latin typeface="Arial" panose="020B0604020202020204" pitchFamily="34" charset="0"/>
-              <a:cs typeface="Arial" panose="020B0604020202020204" pitchFamily="34" charset="0"/>
-            </a:endParaRPr>
-          </a:p>
-        </p:txBody>
-      </p:sp>
-      <p:sp>
-        <p:nvSpPr>
-          <p:cNvPr id="48" name="文本框 47">
-            <a:extLst>
-              <a:ext uri="{FF2B5EF4-FFF2-40B4-BE49-F238E27FC236}">
-                <a16:creationId xmlns:a16="http://schemas.microsoft.com/office/drawing/2014/main" id="{958EE90C-5C82-6FB2-500D-8C0612318D6B}"/>
-              </a:ext>
-            </a:extLst>
-          </p:cNvPr>
-          <p:cNvSpPr txBox="1"/>
-          <p:nvPr/>
-        </p:nvSpPr>
-        <p:spPr>
-          <a:xfrm>
-            <a:off x="11868690" y="10600856"/>
-            <a:ext cx="4320000" cy="461665"/>
-          </a:xfrm>
-          <a:prstGeom prst="rect">
-            <a:avLst/>
-          </a:prstGeom>
-          <a:noFill/>
-        </p:spPr>
-        <p:txBody>
-          <a:bodyPr wrap="square" rtlCol="0">
-            <a:spAutoFit/>
-          </a:bodyPr>
-          <a:lstStyle/>
-          <a:p>
-            <a:pPr algn="ctr"/>
-            <a:r>
-              <a:rPr kumimoji="1" lang="en-US" altLang="zh-CN" sz="2400" dirty="0">
-                <a:latin typeface="Arial" panose="020B0604020202020204" pitchFamily="34" charset="0"/>
-                <a:cs typeface="Arial" panose="020B0604020202020204" pitchFamily="34" charset="0"/>
-              </a:rPr>
-              <a:t>Pos</a:t>
-            </a:r>
-            <a:r>
-              <a:rPr kumimoji="1" lang="zh-CN" altLang="en-US" sz="2400" dirty="0">
-                <a:latin typeface="Arial" panose="020B0604020202020204" pitchFamily="34" charset="0"/>
-                <a:cs typeface="Arial" panose="020B0604020202020204" pitchFamily="34" charset="0"/>
-              </a:rPr>
-              <a:t> </a:t>
-            </a:r>
-            <a:r>
-              <a:rPr kumimoji="1" lang="en-US" altLang="zh-CN" sz="2400" dirty="0">
-                <a:latin typeface="Arial" panose="020B0604020202020204" pitchFamily="34" charset="0"/>
-                <a:cs typeface="Arial" panose="020B0604020202020204" pitchFamily="34" charset="0"/>
-              </a:rPr>
-              <a:t>x</a:t>
-            </a:r>
-            <a:endParaRPr kumimoji="1" lang="zh-CN" altLang="en-US" sz="2400" dirty="0">
-              <a:latin typeface="Arial" panose="020B0604020202020204" pitchFamily="34" charset="0"/>
-              <a:cs typeface="Arial" panose="020B0604020202020204" pitchFamily="34" charset="0"/>
-            </a:endParaRPr>
-          </a:p>
-        </p:txBody>
-      </p:sp>
-      <p:sp>
-        <p:nvSpPr>
-          <p:cNvPr id="49" name="文本框 48">
-            <a:extLst>
-              <a:ext uri="{FF2B5EF4-FFF2-40B4-BE49-F238E27FC236}">
-                <a16:creationId xmlns:a16="http://schemas.microsoft.com/office/drawing/2014/main" id="{8FFEC03E-F606-B11D-FF3F-24FAF64A055C}"/>
-              </a:ext>
-            </a:extLst>
-          </p:cNvPr>
-          <p:cNvSpPr txBox="1"/>
-          <p:nvPr/>
-        </p:nvSpPr>
-        <p:spPr>
-          <a:xfrm>
-            <a:off x="16733158" y="10600856"/>
-            <a:ext cx="4320000" cy="461665"/>
-          </a:xfrm>
-          <a:prstGeom prst="rect">
-            <a:avLst/>
-          </a:prstGeom>
-          <a:noFill/>
-        </p:spPr>
-        <p:txBody>
-          <a:bodyPr wrap="square" rtlCol="0">
-            <a:spAutoFit/>
-          </a:bodyPr>
-          <a:lstStyle/>
-          <a:p>
-            <a:pPr algn="ctr"/>
-            <a:r>
-              <a:rPr kumimoji="1" lang="en-US" altLang="zh-CN" sz="2400" dirty="0">
-                <a:latin typeface="Arial" panose="020B0604020202020204" pitchFamily="34" charset="0"/>
-                <a:cs typeface="Arial" panose="020B0604020202020204" pitchFamily="34" charset="0"/>
-              </a:rPr>
-              <a:t>Relative</a:t>
-            </a:r>
-            <a:r>
-              <a:rPr kumimoji="1" lang="zh-CN" altLang="en-US" sz="2400" dirty="0">
-                <a:latin typeface="Arial" panose="020B0604020202020204" pitchFamily="34" charset="0"/>
-                <a:cs typeface="Arial" panose="020B0604020202020204" pitchFamily="34" charset="0"/>
-              </a:rPr>
-              <a:t> </a:t>
-            </a:r>
-            <a:r>
-              <a:rPr kumimoji="1" lang="en-US" altLang="zh-CN" sz="2400" dirty="0">
-                <a:latin typeface="Arial" panose="020B0604020202020204" pitchFamily="34" charset="0"/>
-                <a:cs typeface="Arial" panose="020B0604020202020204" pitchFamily="34" charset="0"/>
-              </a:rPr>
-              <a:t>size</a:t>
-            </a:r>
-            <a:endParaRPr kumimoji="1" lang="zh-CN" altLang="en-US" sz="2400" dirty="0">
-              <a:latin typeface="Arial" panose="020B0604020202020204" pitchFamily="34" charset="0"/>
-              <a:cs typeface="Arial" panose="020B0604020202020204" pitchFamily="34" charset="0"/>
-            </a:endParaRPr>
-          </a:p>
-        </p:txBody>
-      </p:sp>
-      <p:sp>
-        <p:nvSpPr>
-          <p:cNvPr id="50" name="文本框 49">
-            <a:extLst>
-              <a:ext uri="{FF2B5EF4-FFF2-40B4-BE49-F238E27FC236}">
-                <a16:creationId xmlns:a16="http://schemas.microsoft.com/office/drawing/2014/main" id="{6803135B-339C-C40D-4EBE-8DAA2BF8F991}"/>
-              </a:ext>
-            </a:extLst>
-          </p:cNvPr>
-          <p:cNvSpPr txBox="1"/>
-          <p:nvPr/>
-        </p:nvSpPr>
-        <p:spPr>
-          <a:xfrm rot="16200000">
-            <a:off x="9346349" y="8183279"/>
-            <a:ext cx="4320000" cy="461665"/>
-          </a:xfrm>
-          <a:prstGeom prst="rect">
-            <a:avLst/>
-          </a:prstGeom>
-          <a:noFill/>
-        </p:spPr>
-        <p:txBody>
-          <a:bodyPr wrap="square" rtlCol="0">
-            <a:spAutoFit/>
-          </a:bodyPr>
-          <a:lstStyle/>
-          <a:p>
-            <a:pPr algn="ctr"/>
-            <a:r>
-              <a:rPr kumimoji="1" lang="en-US" altLang="zh-CN" sz="2400" dirty="0">
-                <a:latin typeface="Arial" panose="020B0604020202020204" pitchFamily="34" charset="0"/>
-                <a:cs typeface="Arial" panose="020B0604020202020204" pitchFamily="34" charset="0"/>
-              </a:rPr>
-              <a:t>Pos</a:t>
-            </a:r>
-            <a:r>
-              <a:rPr kumimoji="1" lang="zh-CN" altLang="en-US" sz="2400" dirty="0">
-                <a:latin typeface="Arial" panose="020B0604020202020204" pitchFamily="34" charset="0"/>
-                <a:cs typeface="Arial" panose="020B0604020202020204" pitchFamily="34" charset="0"/>
-              </a:rPr>
-              <a:t> </a:t>
-            </a:r>
-            <a:r>
-              <a:rPr kumimoji="1" lang="en-US" altLang="zh-CN" sz="2400" dirty="0">
-                <a:latin typeface="Arial" panose="020B0604020202020204" pitchFamily="34" charset="0"/>
-                <a:cs typeface="Arial" panose="020B0604020202020204" pitchFamily="34" charset="0"/>
-              </a:rPr>
-              <a:t>y</a:t>
-            </a:r>
-            <a:endParaRPr kumimoji="1" lang="zh-CN" altLang="en-US" sz="2400" dirty="0">
-              <a:latin typeface="Arial" panose="020B0604020202020204" pitchFamily="34" charset="0"/>
-              <a:cs typeface="Arial" panose="020B0604020202020204" pitchFamily="34" charset="0"/>
-            </a:endParaRPr>
-          </a:p>
-        </p:txBody>
-      </p:sp>
-      <p:sp>
-        <p:nvSpPr>
-          <p:cNvPr id="51" name="文本框 50">
-            <a:extLst>
-              <a:ext uri="{FF2B5EF4-FFF2-40B4-BE49-F238E27FC236}">
-                <a16:creationId xmlns:a16="http://schemas.microsoft.com/office/drawing/2014/main" id="{38DBEA47-2D3F-5D7F-2AE3-6762FBAD2452}"/>
-              </a:ext>
-            </a:extLst>
-          </p:cNvPr>
-          <p:cNvSpPr txBox="1"/>
-          <p:nvPr/>
-        </p:nvSpPr>
-        <p:spPr>
-          <a:xfrm rot="16200000">
-            <a:off x="13973175" y="8183279"/>
-            <a:ext cx="4320000" cy="461665"/>
-          </a:xfrm>
-          <a:prstGeom prst="rect">
-            <a:avLst/>
-          </a:prstGeom>
-          <a:noFill/>
-        </p:spPr>
-        <p:txBody>
-          <a:bodyPr wrap="square" rtlCol="0">
-            <a:spAutoFit/>
-          </a:bodyPr>
-          <a:lstStyle/>
-          <a:p>
-            <a:pPr algn="ctr"/>
-            <a:r>
-              <a:rPr kumimoji="1" lang="en-US" altLang="zh-CN" sz="2400" dirty="0">
-                <a:latin typeface="Arial" panose="020B0604020202020204" pitchFamily="34" charset="0"/>
-                <a:cs typeface="Arial" panose="020B0604020202020204" pitchFamily="34" charset="0"/>
-              </a:rPr>
-              <a:t>Density</a:t>
-            </a:r>
-            <a:endParaRPr kumimoji="1" lang="zh-CN" altLang="en-US" sz="2400" dirty="0">
-              <a:latin typeface="Arial" panose="020B0604020202020204" pitchFamily="34" charset="0"/>
-              <a:cs typeface="Arial" panose="020B0604020202020204" pitchFamily="34" charset="0"/>
-            </a:endParaRPr>
-          </a:p>
-        </p:txBody>
-      </p:sp>
-      <p:sp>
-        <p:nvSpPr>
-          <p:cNvPr id="52" name="文本框 51">
-            <a:extLst>
-              <a:ext uri="{FF2B5EF4-FFF2-40B4-BE49-F238E27FC236}">
-                <a16:creationId xmlns:a16="http://schemas.microsoft.com/office/drawing/2014/main" id="{1811A470-BB0C-7C6A-463E-6ADE1832A91D}"/>
-              </a:ext>
-            </a:extLst>
-          </p:cNvPr>
-          <p:cNvSpPr txBox="1"/>
-          <p:nvPr/>
-        </p:nvSpPr>
-        <p:spPr>
-          <a:xfrm>
-            <a:off x="11868689" y="6122772"/>
-            <a:ext cx="4320000" cy="461665"/>
-          </a:xfrm>
-          <a:prstGeom prst="rect">
-            <a:avLst/>
-          </a:prstGeom>
-          <a:noFill/>
-        </p:spPr>
-        <p:txBody>
-          <a:bodyPr wrap="square" rtlCol="0">
-            <a:spAutoFit/>
-          </a:bodyPr>
-          <a:lstStyle/>
-          <a:p>
-            <a:pPr algn="ctr"/>
-            <a:r>
-              <a:rPr kumimoji="1" lang="en-US" altLang="zh-CN" sz="2400" dirty="0">
-                <a:latin typeface="Arial" panose="020B0604020202020204" pitchFamily="34" charset="0"/>
-                <a:cs typeface="Arial" panose="020B0604020202020204" pitchFamily="34" charset="0"/>
-              </a:rPr>
-              <a:t>PKTN</a:t>
-            </a:r>
-            <a:r>
-              <a:rPr kumimoji="1" lang="zh-CN" altLang="en-US" sz="2400" dirty="0">
-                <a:latin typeface="Arial" panose="020B0604020202020204" pitchFamily="34" charset="0"/>
-                <a:cs typeface="Arial" panose="020B0604020202020204" pitchFamily="34" charset="0"/>
-              </a:rPr>
-              <a:t> </a:t>
-            </a:r>
-            <a:r>
-              <a:rPr kumimoji="1" lang="en-US" altLang="zh-CN" sz="2400" dirty="0">
-                <a:latin typeface="Arial" panose="020B0604020202020204" pitchFamily="34" charset="0"/>
-                <a:cs typeface="Arial" panose="020B0604020202020204" pitchFamily="34" charset="0"/>
-              </a:rPr>
-              <a:t>–</a:t>
-            </a:r>
-            <a:r>
-              <a:rPr kumimoji="1" lang="zh-CN" altLang="en-US" sz="2400" dirty="0">
-                <a:latin typeface="Arial" panose="020B0604020202020204" pitchFamily="34" charset="0"/>
-                <a:cs typeface="Arial" panose="020B0604020202020204" pitchFamily="34" charset="0"/>
-              </a:rPr>
-              <a:t> </a:t>
-            </a:r>
-            <a:r>
-              <a:rPr kumimoji="1" lang="en-US" altLang="zh-CN" sz="2400" dirty="0">
-                <a:latin typeface="Arial" panose="020B0604020202020204" pitchFamily="34" charset="0"/>
-                <a:cs typeface="Arial" panose="020B0604020202020204" pitchFamily="34" charset="0"/>
-              </a:rPr>
-              <a:t>Position</a:t>
-            </a:r>
-            <a:r>
-              <a:rPr kumimoji="1" lang="zh-CN" altLang="en-US" sz="2400" dirty="0">
-                <a:latin typeface="Arial" panose="020B0604020202020204" pitchFamily="34" charset="0"/>
-                <a:cs typeface="Arial" panose="020B0604020202020204" pitchFamily="34" charset="0"/>
-              </a:rPr>
-              <a:t> </a:t>
-            </a:r>
-            <a:r>
-              <a:rPr kumimoji="1" lang="en-US" altLang="zh-CN" sz="2400" dirty="0">
-                <a:latin typeface="Arial" panose="020B0604020202020204" pitchFamily="34" charset="0"/>
-                <a:cs typeface="Arial" panose="020B0604020202020204" pitchFamily="34" charset="0"/>
-              </a:rPr>
-              <a:t>(N=1003)</a:t>
-            </a:r>
-            <a:endParaRPr kumimoji="1" lang="zh-CN" altLang="en-US" sz="2400" dirty="0">
-              <a:latin typeface="Arial" panose="020B0604020202020204" pitchFamily="34" charset="0"/>
-              <a:cs typeface="Arial" panose="020B0604020202020204" pitchFamily="34" charset="0"/>
-            </a:endParaRPr>
-          </a:p>
-        </p:txBody>
-      </p:sp>
-      <p:sp>
-        <p:nvSpPr>
-          <p:cNvPr id="53" name="文本框 52">
-            <a:extLst>
-              <a:ext uri="{FF2B5EF4-FFF2-40B4-BE49-F238E27FC236}">
-                <a16:creationId xmlns:a16="http://schemas.microsoft.com/office/drawing/2014/main" id="{246C74AA-55B3-502E-50BE-CD3B76DECFDC}"/>
-              </a:ext>
-            </a:extLst>
-          </p:cNvPr>
-          <p:cNvSpPr txBox="1"/>
-          <p:nvPr/>
-        </p:nvSpPr>
-        <p:spPr>
-          <a:xfrm>
-            <a:off x="16733156" y="6122772"/>
-            <a:ext cx="4320000" cy="461665"/>
-          </a:xfrm>
-          <a:prstGeom prst="rect">
-            <a:avLst/>
-          </a:prstGeom>
-          <a:noFill/>
-        </p:spPr>
-        <p:txBody>
-          <a:bodyPr wrap="square" rtlCol="0">
-            <a:spAutoFit/>
-          </a:bodyPr>
-          <a:lstStyle/>
-          <a:p>
-            <a:pPr algn="ctr"/>
-            <a:r>
-              <a:rPr kumimoji="1" lang="en-US" altLang="zh-CN" sz="2400" dirty="0">
-                <a:latin typeface="Arial" panose="020B0604020202020204" pitchFamily="34" charset="0"/>
-                <a:cs typeface="Arial" panose="020B0604020202020204" pitchFamily="34" charset="0"/>
-              </a:rPr>
-              <a:t>PKTN</a:t>
-            </a:r>
-            <a:r>
-              <a:rPr kumimoji="1" lang="zh-CN" altLang="en-US" sz="2400" dirty="0">
-                <a:latin typeface="Arial" panose="020B0604020202020204" pitchFamily="34" charset="0"/>
-                <a:cs typeface="Arial" panose="020B0604020202020204" pitchFamily="34" charset="0"/>
-              </a:rPr>
-              <a:t> </a:t>
-            </a:r>
-            <a:r>
-              <a:rPr kumimoji="1" lang="en-US" altLang="zh-CN" sz="2400" dirty="0">
-                <a:latin typeface="Arial" panose="020B0604020202020204" pitchFamily="34" charset="0"/>
-                <a:cs typeface="Arial" panose="020B0604020202020204" pitchFamily="34" charset="0"/>
-              </a:rPr>
-              <a:t>–</a:t>
-            </a:r>
-            <a:r>
-              <a:rPr kumimoji="1" lang="zh-CN" altLang="en-US" sz="2400" dirty="0">
-                <a:latin typeface="Arial" panose="020B0604020202020204" pitchFamily="34" charset="0"/>
-                <a:cs typeface="Arial" panose="020B0604020202020204" pitchFamily="34" charset="0"/>
-              </a:rPr>
-              <a:t> </a:t>
-            </a:r>
-            <a:r>
-              <a:rPr kumimoji="1" lang="en-US" altLang="zh-CN" sz="2400" dirty="0">
-                <a:latin typeface="Arial" panose="020B0604020202020204" pitchFamily="34" charset="0"/>
-                <a:cs typeface="Arial" panose="020B0604020202020204" pitchFamily="34" charset="0"/>
-              </a:rPr>
-              <a:t>Size</a:t>
-            </a:r>
-            <a:r>
-              <a:rPr kumimoji="1" lang="zh-CN" altLang="en-US" sz="2400" dirty="0">
-                <a:latin typeface="Arial" panose="020B0604020202020204" pitchFamily="34" charset="0"/>
-                <a:cs typeface="Arial" panose="020B0604020202020204" pitchFamily="34" charset="0"/>
-              </a:rPr>
-              <a:t> </a:t>
-            </a:r>
-            <a:r>
-              <a:rPr kumimoji="1" lang="en-US" altLang="zh-CN" sz="2400" dirty="0">
-                <a:latin typeface="Arial" panose="020B0604020202020204" pitchFamily="34" charset="0"/>
-                <a:cs typeface="Arial" panose="020B0604020202020204" pitchFamily="34" charset="0"/>
-              </a:rPr>
-              <a:t>(N=1003)</a:t>
-            </a:r>
-            <a:endParaRPr kumimoji="1" lang="zh-CN" altLang="en-US" sz="2400" dirty="0">
-              <a:latin typeface="Arial" panose="020B0604020202020204" pitchFamily="34" charset="0"/>
-              <a:cs typeface="Arial" panose="020B0604020202020204" pitchFamily="34" charset="0"/>
-            </a:endParaRPr>
-          </a:p>
-        </p:txBody>
-      </p:sp>
-      <p:sp>
-        <p:nvSpPr>
-          <p:cNvPr id="70" name="文本框 69">
-            <a:extLst>
-              <a:ext uri="{FF2B5EF4-FFF2-40B4-BE49-F238E27FC236}">
-                <a16:creationId xmlns:a16="http://schemas.microsoft.com/office/drawing/2014/main" id="{9CFCD99C-0E51-7097-8F14-0BB1F5583784}"/>
-              </a:ext>
-            </a:extLst>
-          </p:cNvPr>
-          <p:cNvSpPr txBox="1"/>
-          <p:nvPr/>
-        </p:nvSpPr>
-        <p:spPr>
-          <a:xfrm>
-            <a:off x="1733509" y="11139633"/>
-            <a:ext cx="4320000" cy="461665"/>
-          </a:xfrm>
-          <a:prstGeom prst="rect">
-            <a:avLst/>
-          </a:prstGeom>
-          <a:noFill/>
-        </p:spPr>
-        <p:txBody>
-          <a:bodyPr wrap="square" rtlCol="0">
-            <a:spAutoFit/>
-          </a:bodyPr>
-          <a:lstStyle/>
-          <a:p>
-            <a:pPr algn="ctr"/>
-            <a:r>
-              <a:rPr kumimoji="1" lang="en-US" altLang="zh-CN" sz="2400" dirty="0" err="1">
-                <a:latin typeface="Arial" panose="020B0604020202020204" pitchFamily="34" charset="0"/>
-                <a:cs typeface="Arial" panose="020B0604020202020204" pitchFamily="34" charset="0"/>
-              </a:rPr>
-              <a:t>FinalData</a:t>
-            </a:r>
-            <a:r>
-              <a:rPr kumimoji="1" lang="zh-CN" altLang="en-US" sz="2400" dirty="0">
-                <a:latin typeface="Arial" panose="020B0604020202020204" pitchFamily="34" charset="0"/>
-                <a:cs typeface="Arial" panose="020B0604020202020204" pitchFamily="34" charset="0"/>
-              </a:rPr>
-              <a:t> </a:t>
-            </a:r>
-            <a:r>
-              <a:rPr kumimoji="1" lang="en-US" altLang="zh-CN" sz="2400" dirty="0">
-                <a:latin typeface="Arial" panose="020B0604020202020204" pitchFamily="34" charset="0"/>
-                <a:cs typeface="Arial" panose="020B0604020202020204" pitchFamily="34" charset="0"/>
-              </a:rPr>
-              <a:t>–</a:t>
-            </a:r>
-            <a:r>
-              <a:rPr kumimoji="1" lang="zh-CN" altLang="en-US" sz="2400" dirty="0">
-                <a:latin typeface="Arial" panose="020B0604020202020204" pitchFamily="34" charset="0"/>
-                <a:cs typeface="Arial" panose="020B0604020202020204" pitchFamily="34" charset="0"/>
-              </a:rPr>
-              <a:t> </a:t>
-            </a:r>
-            <a:r>
-              <a:rPr kumimoji="1" lang="en-US" altLang="zh-CN" sz="2400" dirty="0">
-                <a:latin typeface="Arial" panose="020B0604020202020204" pitchFamily="34" charset="0"/>
-                <a:cs typeface="Arial" panose="020B0604020202020204" pitchFamily="34" charset="0"/>
-              </a:rPr>
-              <a:t>Position</a:t>
-            </a:r>
-            <a:r>
-              <a:rPr kumimoji="1" lang="zh-CN" altLang="en-US" sz="2400" dirty="0">
-                <a:latin typeface="Arial" panose="020B0604020202020204" pitchFamily="34" charset="0"/>
-                <a:cs typeface="Arial" panose="020B0604020202020204" pitchFamily="34" charset="0"/>
-              </a:rPr>
-              <a:t> </a:t>
-            </a:r>
-            <a:r>
-              <a:rPr kumimoji="1" lang="en-US" altLang="zh-CN" sz="2400" dirty="0">
-                <a:latin typeface="Arial" panose="020B0604020202020204" pitchFamily="34" charset="0"/>
-                <a:cs typeface="Arial" panose="020B0604020202020204" pitchFamily="34" charset="0"/>
-              </a:rPr>
-              <a:t>(N=1854)</a:t>
-            </a:r>
-            <a:endParaRPr kumimoji="1" lang="zh-CN" altLang="en-US" sz="2400" dirty="0">
-              <a:latin typeface="Arial" panose="020B0604020202020204" pitchFamily="34" charset="0"/>
-              <a:cs typeface="Arial" panose="020B0604020202020204" pitchFamily="34" charset="0"/>
-            </a:endParaRPr>
-          </a:p>
-        </p:txBody>
-      </p:sp>
-      <p:sp>
-        <p:nvSpPr>
-          <p:cNvPr id="71" name="文本框 70">
-            <a:extLst>
-              <a:ext uri="{FF2B5EF4-FFF2-40B4-BE49-F238E27FC236}">
-                <a16:creationId xmlns:a16="http://schemas.microsoft.com/office/drawing/2014/main" id="{2C0F7152-AD51-BE59-D412-082CA71EFAD1}"/>
-              </a:ext>
-            </a:extLst>
-          </p:cNvPr>
-          <p:cNvSpPr txBox="1"/>
-          <p:nvPr/>
-        </p:nvSpPr>
-        <p:spPr>
-          <a:xfrm rot="16200000">
-            <a:off x="-533263" y="13200773"/>
-            <a:ext cx="4320000" cy="461665"/>
-          </a:xfrm>
-          <a:prstGeom prst="rect">
-            <a:avLst/>
-          </a:prstGeom>
-          <a:noFill/>
-        </p:spPr>
-        <p:txBody>
-          <a:bodyPr wrap="square" rtlCol="0">
-            <a:spAutoFit/>
-          </a:bodyPr>
-          <a:lstStyle/>
-          <a:p>
-            <a:pPr algn="ctr"/>
-            <a:r>
-              <a:rPr kumimoji="1" lang="en-US" altLang="zh-CN" sz="2400" dirty="0">
-                <a:latin typeface="Arial" panose="020B0604020202020204" pitchFamily="34" charset="0"/>
-                <a:cs typeface="Arial" panose="020B0604020202020204" pitchFamily="34" charset="0"/>
-              </a:rPr>
-              <a:t>Pos</a:t>
-            </a:r>
-            <a:r>
-              <a:rPr kumimoji="1" lang="zh-CN" altLang="en-US" sz="2400" dirty="0">
-                <a:latin typeface="Arial" panose="020B0604020202020204" pitchFamily="34" charset="0"/>
-                <a:cs typeface="Arial" panose="020B0604020202020204" pitchFamily="34" charset="0"/>
-              </a:rPr>
-              <a:t> </a:t>
-            </a:r>
-            <a:r>
-              <a:rPr kumimoji="1" lang="en-US" altLang="zh-CN" sz="2400" dirty="0">
-                <a:latin typeface="Arial" panose="020B0604020202020204" pitchFamily="34" charset="0"/>
-                <a:cs typeface="Arial" panose="020B0604020202020204" pitchFamily="34" charset="0"/>
-              </a:rPr>
-              <a:t>y</a:t>
-            </a:r>
-            <a:endParaRPr kumimoji="1" lang="zh-CN" altLang="en-US" sz="2400" dirty="0">
-              <a:latin typeface="Arial" panose="020B0604020202020204" pitchFamily="34" charset="0"/>
-              <a:cs typeface="Arial" panose="020B0604020202020204" pitchFamily="34" charset="0"/>
-            </a:endParaRPr>
-          </a:p>
-        </p:txBody>
-      </p:sp>
-      <p:sp>
-        <p:nvSpPr>
-          <p:cNvPr id="73" name="文本框 72">
-            <a:extLst>
-              <a:ext uri="{FF2B5EF4-FFF2-40B4-BE49-F238E27FC236}">
-                <a16:creationId xmlns:a16="http://schemas.microsoft.com/office/drawing/2014/main" id="{A5D1F77C-DD22-AB2A-69D2-5B91C98F8F6E}"/>
-              </a:ext>
-            </a:extLst>
-          </p:cNvPr>
-          <p:cNvSpPr txBox="1"/>
-          <p:nvPr/>
-        </p:nvSpPr>
-        <p:spPr>
-          <a:xfrm>
-            <a:off x="1733508" y="15618350"/>
-            <a:ext cx="4320000" cy="461665"/>
-          </a:xfrm>
-          <a:prstGeom prst="rect">
-            <a:avLst/>
-          </a:prstGeom>
-          <a:noFill/>
-        </p:spPr>
-        <p:txBody>
-          <a:bodyPr wrap="square" rtlCol="0">
-            <a:spAutoFit/>
-          </a:bodyPr>
-          <a:lstStyle/>
-          <a:p>
-            <a:pPr algn="ctr"/>
-            <a:r>
-              <a:rPr kumimoji="1" lang="en-US" altLang="zh-CN" sz="2400" dirty="0">
-                <a:latin typeface="Arial" panose="020B0604020202020204" pitchFamily="34" charset="0"/>
-                <a:cs typeface="Arial" panose="020B0604020202020204" pitchFamily="34" charset="0"/>
-              </a:rPr>
-              <a:t>Pos</a:t>
-            </a:r>
-            <a:r>
-              <a:rPr kumimoji="1" lang="zh-CN" altLang="en-US" sz="2400" dirty="0">
-                <a:latin typeface="Arial" panose="020B0604020202020204" pitchFamily="34" charset="0"/>
-                <a:cs typeface="Arial" panose="020B0604020202020204" pitchFamily="34" charset="0"/>
-              </a:rPr>
-              <a:t> </a:t>
-            </a:r>
-            <a:r>
-              <a:rPr kumimoji="1" lang="en-US" altLang="zh-CN" sz="2400" dirty="0">
-                <a:latin typeface="Arial" panose="020B0604020202020204" pitchFamily="34" charset="0"/>
-                <a:cs typeface="Arial" panose="020B0604020202020204" pitchFamily="34" charset="0"/>
-              </a:rPr>
-              <a:t>x</a:t>
-            </a:r>
-            <a:endParaRPr kumimoji="1" lang="zh-CN" altLang="en-US" sz="2400" dirty="0">
-              <a:latin typeface="Arial" panose="020B0604020202020204" pitchFamily="34" charset="0"/>
-              <a:cs typeface="Arial" panose="020B0604020202020204" pitchFamily="34" charset="0"/>
-            </a:endParaRPr>
-          </a:p>
-        </p:txBody>
-      </p:sp>
-      <p:sp>
-        <p:nvSpPr>
-          <p:cNvPr id="75" name="文本框 74">
-            <a:extLst>
-              <a:ext uri="{FF2B5EF4-FFF2-40B4-BE49-F238E27FC236}">
-                <a16:creationId xmlns:a16="http://schemas.microsoft.com/office/drawing/2014/main" id="{432F5A1A-33B5-8D11-349B-4724ECED0FE1}"/>
-              </a:ext>
-            </a:extLst>
-          </p:cNvPr>
-          <p:cNvSpPr txBox="1"/>
-          <p:nvPr/>
-        </p:nvSpPr>
-        <p:spPr>
-          <a:xfrm>
-            <a:off x="6597976" y="15618663"/>
-            <a:ext cx="4320000" cy="461665"/>
-          </a:xfrm>
-          <a:prstGeom prst="rect">
-            <a:avLst/>
-          </a:prstGeom>
-          <a:noFill/>
-        </p:spPr>
-        <p:txBody>
-          <a:bodyPr wrap="square" rtlCol="0">
-            <a:spAutoFit/>
-          </a:bodyPr>
-          <a:lstStyle/>
-          <a:p>
-            <a:pPr algn="ctr"/>
-            <a:r>
-              <a:rPr kumimoji="1" lang="en-US" altLang="zh-CN" sz="2400" dirty="0">
-                <a:latin typeface="Arial" panose="020B0604020202020204" pitchFamily="34" charset="0"/>
-                <a:cs typeface="Arial" panose="020B0604020202020204" pitchFamily="34" charset="0"/>
-              </a:rPr>
-              <a:t>Relative</a:t>
-            </a:r>
-            <a:r>
-              <a:rPr kumimoji="1" lang="zh-CN" altLang="en-US" sz="2400" dirty="0">
-                <a:latin typeface="Arial" panose="020B0604020202020204" pitchFamily="34" charset="0"/>
-                <a:cs typeface="Arial" panose="020B0604020202020204" pitchFamily="34" charset="0"/>
-              </a:rPr>
-              <a:t> </a:t>
-            </a:r>
-            <a:r>
-              <a:rPr kumimoji="1" lang="en-US" altLang="zh-CN" sz="2400" dirty="0">
-                <a:latin typeface="Arial" panose="020B0604020202020204" pitchFamily="34" charset="0"/>
-                <a:cs typeface="Arial" panose="020B0604020202020204" pitchFamily="34" charset="0"/>
-              </a:rPr>
-              <a:t>size</a:t>
-            </a:r>
-            <a:endParaRPr kumimoji="1" lang="zh-CN" altLang="en-US" sz="2400" dirty="0">
-              <a:latin typeface="Arial" panose="020B0604020202020204" pitchFamily="34" charset="0"/>
-              <a:cs typeface="Arial" panose="020B0604020202020204" pitchFamily="34" charset="0"/>
-            </a:endParaRPr>
-          </a:p>
-        </p:txBody>
-      </p:sp>
-      <p:sp>
-        <p:nvSpPr>
-          <p:cNvPr id="76" name="文本框 75">
-            <a:extLst>
-              <a:ext uri="{FF2B5EF4-FFF2-40B4-BE49-F238E27FC236}">
-                <a16:creationId xmlns:a16="http://schemas.microsoft.com/office/drawing/2014/main" id="{499215DE-AB95-4E28-CADD-AC16E2AE3E90}"/>
-              </a:ext>
-            </a:extLst>
-          </p:cNvPr>
-          <p:cNvSpPr txBox="1"/>
-          <p:nvPr/>
-        </p:nvSpPr>
-        <p:spPr>
-          <a:xfrm>
-            <a:off x="6599276" y="11140579"/>
-            <a:ext cx="4320000" cy="461665"/>
-          </a:xfrm>
-          <a:prstGeom prst="rect">
-            <a:avLst/>
-          </a:prstGeom>
-          <a:noFill/>
-        </p:spPr>
-        <p:txBody>
-          <a:bodyPr wrap="square" rtlCol="0">
-            <a:spAutoFit/>
-          </a:bodyPr>
-          <a:lstStyle/>
-          <a:p>
-            <a:pPr algn="ctr"/>
-            <a:r>
-              <a:rPr kumimoji="1" lang="en-US" altLang="zh-CN" sz="2400" dirty="0" err="1">
-                <a:latin typeface="Arial" panose="020B0604020202020204" pitchFamily="34" charset="0"/>
-                <a:cs typeface="Arial" panose="020B0604020202020204" pitchFamily="34" charset="0"/>
-              </a:rPr>
-              <a:t>FinalData</a:t>
-            </a:r>
-            <a:r>
-              <a:rPr kumimoji="1" lang="zh-CN" altLang="en-US" sz="2400" dirty="0">
-                <a:latin typeface="Arial" panose="020B0604020202020204" pitchFamily="34" charset="0"/>
-                <a:cs typeface="Arial" panose="020B0604020202020204" pitchFamily="34" charset="0"/>
-              </a:rPr>
-              <a:t> </a:t>
-            </a:r>
-            <a:r>
-              <a:rPr kumimoji="1" lang="en-US" altLang="zh-CN" sz="2400" dirty="0">
-                <a:latin typeface="Arial" panose="020B0604020202020204" pitchFamily="34" charset="0"/>
-                <a:cs typeface="Arial" panose="020B0604020202020204" pitchFamily="34" charset="0"/>
-              </a:rPr>
-              <a:t>–</a:t>
-            </a:r>
-            <a:r>
-              <a:rPr kumimoji="1" lang="zh-CN" altLang="en-US" sz="2400" dirty="0">
-                <a:latin typeface="Arial" panose="020B0604020202020204" pitchFamily="34" charset="0"/>
-                <a:cs typeface="Arial" panose="020B0604020202020204" pitchFamily="34" charset="0"/>
-              </a:rPr>
-              <a:t> </a:t>
-            </a:r>
-            <a:r>
-              <a:rPr kumimoji="1" lang="en-US" altLang="zh-CN" sz="2400" dirty="0">
-                <a:latin typeface="Arial" panose="020B0604020202020204" pitchFamily="34" charset="0"/>
-                <a:cs typeface="Arial" panose="020B0604020202020204" pitchFamily="34" charset="0"/>
-              </a:rPr>
-              <a:t>Size</a:t>
-            </a:r>
-            <a:r>
-              <a:rPr kumimoji="1" lang="zh-CN" altLang="en-US" sz="2400" dirty="0">
-                <a:latin typeface="Arial" panose="020B0604020202020204" pitchFamily="34" charset="0"/>
-                <a:cs typeface="Arial" panose="020B0604020202020204" pitchFamily="34" charset="0"/>
-              </a:rPr>
-              <a:t> </a:t>
-            </a:r>
-            <a:r>
-              <a:rPr kumimoji="1" lang="en-US" altLang="zh-CN" sz="2400" dirty="0">
-                <a:latin typeface="Arial" panose="020B0604020202020204" pitchFamily="34" charset="0"/>
-                <a:cs typeface="Arial" panose="020B0604020202020204" pitchFamily="34" charset="0"/>
-              </a:rPr>
-              <a:t>(N=1854)</a:t>
-            </a:r>
-            <a:endParaRPr kumimoji="1" lang="zh-CN" altLang="en-US" sz="2400" dirty="0">
-              <a:latin typeface="Arial" panose="020B0604020202020204" pitchFamily="34" charset="0"/>
-              <a:cs typeface="Arial" panose="020B0604020202020204" pitchFamily="34" charset="0"/>
-            </a:endParaRPr>
-          </a:p>
-        </p:txBody>
-      </p:sp>
-      <p:sp>
-        <p:nvSpPr>
-          <p:cNvPr id="77" name="文本框 76">
-            <a:extLst>
-              <a:ext uri="{FF2B5EF4-FFF2-40B4-BE49-F238E27FC236}">
-                <a16:creationId xmlns:a16="http://schemas.microsoft.com/office/drawing/2014/main" id="{55C3C259-06A3-855F-573A-B23110A82C1D}"/>
-              </a:ext>
-            </a:extLst>
-          </p:cNvPr>
-          <p:cNvSpPr txBox="1"/>
-          <p:nvPr/>
-        </p:nvSpPr>
-        <p:spPr>
-          <a:xfrm rot="16200000">
-            <a:off x="4093563" y="13231863"/>
-            <a:ext cx="4320000" cy="400110"/>
-          </a:xfrm>
-          <a:prstGeom prst="rect">
-            <a:avLst/>
-          </a:prstGeom>
-          <a:noFill/>
-        </p:spPr>
-        <p:txBody>
-          <a:bodyPr wrap="square" rtlCol="0">
-            <a:spAutoFit/>
-          </a:bodyPr>
-          <a:lstStyle/>
-          <a:p>
-            <a:pPr algn="ctr"/>
-            <a:r>
-              <a:rPr kumimoji="1" lang="en-US" altLang="zh-CN" sz="2000" dirty="0">
-                <a:latin typeface="Arial" panose="020B0604020202020204" pitchFamily="34" charset="0"/>
-                <a:cs typeface="Arial" panose="020B0604020202020204" pitchFamily="34" charset="0"/>
-              </a:rPr>
-              <a:t>Density</a:t>
-            </a:r>
-            <a:endParaRPr kumimoji="1" lang="zh-CN" altLang="en-US" sz="2000" dirty="0">
-              <a:latin typeface="Arial" panose="020B0604020202020204" pitchFamily="34" charset="0"/>
-              <a:cs typeface="Arial" panose="020B0604020202020204" pitchFamily="34" charset="0"/>
-            </a:endParaRPr>
-          </a:p>
-        </p:txBody>
-      </p:sp>
-      <p:sp>
-        <p:nvSpPr>
-          <p:cNvPr id="80" name="文本框 79">
-            <a:extLst>
-              <a:ext uri="{FF2B5EF4-FFF2-40B4-BE49-F238E27FC236}">
-                <a16:creationId xmlns:a16="http://schemas.microsoft.com/office/drawing/2014/main" id="{BB8D2642-B529-0998-78B1-B2DE2CAE043E}"/>
-              </a:ext>
-            </a:extLst>
-          </p:cNvPr>
-          <p:cNvSpPr txBox="1"/>
-          <p:nvPr/>
-        </p:nvSpPr>
-        <p:spPr>
-          <a:xfrm>
-            <a:off x="11868690" y="15618663"/>
-            <a:ext cx="4320000" cy="461665"/>
-          </a:xfrm>
-          <a:prstGeom prst="rect">
-            <a:avLst/>
-          </a:prstGeom>
-          <a:noFill/>
-        </p:spPr>
-        <p:txBody>
-          <a:bodyPr wrap="square" rtlCol="0">
-            <a:spAutoFit/>
-          </a:bodyPr>
-          <a:lstStyle/>
-          <a:p>
-            <a:pPr algn="ctr"/>
-            <a:r>
-              <a:rPr kumimoji="1" lang="en-US" altLang="zh-CN" sz="2400" dirty="0">
-                <a:latin typeface="Arial" panose="020B0604020202020204" pitchFamily="34" charset="0"/>
-                <a:cs typeface="Arial" panose="020B0604020202020204" pitchFamily="34" charset="0"/>
-              </a:rPr>
-              <a:t>Pos</a:t>
-            </a:r>
-            <a:r>
-              <a:rPr kumimoji="1" lang="zh-CN" altLang="en-US" sz="2400" dirty="0">
-                <a:latin typeface="Arial" panose="020B0604020202020204" pitchFamily="34" charset="0"/>
-                <a:cs typeface="Arial" panose="020B0604020202020204" pitchFamily="34" charset="0"/>
-              </a:rPr>
-              <a:t> </a:t>
-            </a:r>
-            <a:r>
-              <a:rPr kumimoji="1" lang="en-US" altLang="zh-CN" sz="2400" dirty="0">
-                <a:latin typeface="Arial" panose="020B0604020202020204" pitchFamily="34" charset="0"/>
-                <a:cs typeface="Arial" panose="020B0604020202020204" pitchFamily="34" charset="0"/>
-              </a:rPr>
-              <a:t>x</a:t>
-            </a:r>
-            <a:endParaRPr kumimoji="1" lang="zh-CN" altLang="en-US" sz="2400" dirty="0">
-              <a:latin typeface="Arial" panose="020B0604020202020204" pitchFamily="34" charset="0"/>
-              <a:cs typeface="Arial" panose="020B0604020202020204" pitchFamily="34" charset="0"/>
-            </a:endParaRPr>
-          </a:p>
-        </p:txBody>
-      </p:sp>
-      <p:sp>
-        <p:nvSpPr>
-          <p:cNvPr id="81" name="文本框 80">
-            <a:extLst>
-              <a:ext uri="{FF2B5EF4-FFF2-40B4-BE49-F238E27FC236}">
-                <a16:creationId xmlns:a16="http://schemas.microsoft.com/office/drawing/2014/main" id="{5DF6079A-E140-643E-4817-F7177D939A48}"/>
-              </a:ext>
-            </a:extLst>
-          </p:cNvPr>
-          <p:cNvSpPr txBox="1"/>
-          <p:nvPr/>
-        </p:nvSpPr>
-        <p:spPr>
-          <a:xfrm>
-            <a:off x="16733158" y="15618663"/>
-            <a:ext cx="4320000" cy="461665"/>
-          </a:xfrm>
-          <a:prstGeom prst="rect">
-            <a:avLst/>
-          </a:prstGeom>
-          <a:noFill/>
-        </p:spPr>
-        <p:txBody>
-          <a:bodyPr wrap="square" rtlCol="0">
-            <a:spAutoFit/>
-          </a:bodyPr>
-          <a:lstStyle/>
-          <a:p>
-            <a:pPr algn="ctr"/>
-            <a:r>
-              <a:rPr kumimoji="1" lang="en-US" altLang="zh-CN" sz="2400" dirty="0">
-                <a:latin typeface="Arial" panose="020B0604020202020204" pitchFamily="34" charset="0"/>
-                <a:cs typeface="Arial" panose="020B0604020202020204" pitchFamily="34" charset="0"/>
-              </a:rPr>
-              <a:t>Relative</a:t>
-            </a:r>
-            <a:r>
-              <a:rPr kumimoji="1" lang="zh-CN" altLang="en-US" sz="2400" dirty="0">
-                <a:latin typeface="Arial" panose="020B0604020202020204" pitchFamily="34" charset="0"/>
-                <a:cs typeface="Arial" panose="020B0604020202020204" pitchFamily="34" charset="0"/>
-              </a:rPr>
-              <a:t> </a:t>
-            </a:r>
-            <a:r>
-              <a:rPr kumimoji="1" lang="en-US" altLang="zh-CN" sz="2400" dirty="0">
-                <a:latin typeface="Arial" panose="020B0604020202020204" pitchFamily="34" charset="0"/>
-                <a:cs typeface="Arial" panose="020B0604020202020204" pitchFamily="34" charset="0"/>
-              </a:rPr>
-              <a:t>size</a:t>
-            </a:r>
-            <a:endParaRPr kumimoji="1" lang="zh-CN" altLang="en-US" sz="2400" dirty="0">
-              <a:latin typeface="Arial" panose="020B0604020202020204" pitchFamily="34" charset="0"/>
-              <a:cs typeface="Arial" panose="020B0604020202020204" pitchFamily="34" charset="0"/>
-            </a:endParaRPr>
-          </a:p>
-        </p:txBody>
-      </p:sp>
-      <p:sp>
-        <p:nvSpPr>
-          <p:cNvPr id="82" name="文本框 81">
-            <a:extLst>
-              <a:ext uri="{FF2B5EF4-FFF2-40B4-BE49-F238E27FC236}">
-                <a16:creationId xmlns:a16="http://schemas.microsoft.com/office/drawing/2014/main" id="{28DB97C9-0124-4EF8-E7C6-3756FEF8C466}"/>
-              </a:ext>
-            </a:extLst>
-          </p:cNvPr>
-          <p:cNvSpPr txBox="1"/>
-          <p:nvPr/>
-        </p:nvSpPr>
-        <p:spPr>
-          <a:xfrm rot="16200000">
-            <a:off x="9346349" y="13201086"/>
-            <a:ext cx="4320000" cy="461665"/>
-          </a:xfrm>
-          <a:prstGeom prst="rect">
-            <a:avLst/>
-          </a:prstGeom>
-          <a:noFill/>
-        </p:spPr>
-        <p:txBody>
-          <a:bodyPr wrap="square" rtlCol="0">
-            <a:spAutoFit/>
-          </a:bodyPr>
-          <a:lstStyle/>
-          <a:p>
-            <a:pPr algn="ctr"/>
-            <a:r>
-              <a:rPr kumimoji="1" lang="en-US" altLang="zh-CN" sz="2400" dirty="0">
-                <a:latin typeface="Arial" panose="020B0604020202020204" pitchFamily="34" charset="0"/>
-                <a:cs typeface="Arial" panose="020B0604020202020204" pitchFamily="34" charset="0"/>
-              </a:rPr>
-              <a:t>Pos</a:t>
-            </a:r>
-            <a:r>
-              <a:rPr kumimoji="1" lang="zh-CN" altLang="en-US" sz="2400" dirty="0">
-                <a:latin typeface="Arial" panose="020B0604020202020204" pitchFamily="34" charset="0"/>
-                <a:cs typeface="Arial" panose="020B0604020202020204" pitchFamily="34" charset="0"/>
-              </a:rPr>
-              <a:t> </a:t>
-            </a:r>
-            <a:r>
-              <a:rPr kumimoji="1" lang="en-US" altLang="zh-CN" sz="2400" dirty="0">
-                <a:latin typeface="Arial" panose="020B0604020202020204" pitchFamily="34" charset="0"/>
-                <a:cs typeface="Arial" panose="020B0604020202020204" pitchFamily="34" charset="0"/>
-              </a:rPr>
-              <a:t>y</a:t>
-            </a:r>
-            <a:endParaRPr kumimoji="1" lang="zh-CN" altLang="en-US" sz="2400" dirty="0">
-              <a:latin typeface="Arial" panose="020B0604020202020204" pitchFamily="34" charset="0"/>
-              <a:cs typeface="Arial" panose="020B0604020202020204" pitchFamily="34" charset="0"/>
-            </a:endParaRPr>
-          </a:p>
-        </p:txBody>
-      </p:sp>
-      <p:sp>
-        <p:nvSpPr>
-          <p:cNvPr id="83" name="文本框 82">
-            <a:extLst>
-              <a:ext uri="{FF2B5EF4-FFF2-40B4-BE49-F238E27FC236}">
-                <a16:creationId xmlns:a16="http://schemas.microsoft.com/office/drawing/2014/main" id="{B50F4195-2619-4718-571A-9326C921A130}"/>
-              </a:ext>
-            </a:extLst>
-          </p:cNvPr>
-          <p:cNvSpPr txBox="1"/>
-          <p:nvPr/>
-        </p:nvSpPr>
-        <p:spPr>
-          <a:xfrm rot="16200000">
-            <a:off x="13973175" y="13201086"/>
-            <a:ext cx="4320000" cy="461665"/>
-          </a:xfrm>
-          <a:prstGeom prst="rect">
-            <a:avLst/>
-          </a:prstGeom>
-          <a:noFill/>
-        </p:spPr>
-        <p:txBody>
-          <a:bodyPr wrap="square" rtlCol="0">
-            <a:spAutoFit/>
-          </a:bodyPr>
-          <a:lstStyle/>
-          <a:p>
-            <a:pPr algn="ctr"/>
-            <a:r>
-              <a:rPr kumimoji="1" lang="en-US" altLang="zh-CN" sz="2400" dirty="0">
-                <a:latin typeface="Arial" panose="020B0604020202020204" pitchFamily="34" charset="0"/>
-                <a:cs typeface="Arial" panose="020B0604020202020204" pitchFamily="34" charset="0"/>
-              </a:rPr>
-              <a:t>Density</a:t>
-            </a:r>
-            <a:endParaRPr kumimoji="1" lang="zh-CN" altLang="en-US" sz="2400" dirty="0">
-              <a:latin typeface="Arial" panose="020B0604020202020204" pitchFamily="34" charset="0"/>
-              <a:cs typeface="Arial" panose="020B0604020202020204" pitchFamily="34" charset="0"/>
-            </a:endParaRPr>
-          </a:p>
-        </p:txBody>
-      </p:sp>
-      <p:sp>
-        <p:nvSpPr>
-          <p:cNvPr id="84" name="文本框 83">
-            <a:extLst>
-              <a:ext uri="{FF2B5EF4-FFF2-40B4-BE49-F238E27FC236}">
-                <a16:creationId xmlns:a16="http://schemas.microsoft.com/office/drawing/2014/main" id="{2EBA0AF1-5163-3477-B539-E6D5E1D2F903}"/>
-              </a:ext>
-            </a:extLst>
-          </p:cNvPr>
-          <p:cNvSpPr txBox="1"/>
-          <p:nvPr/>
-        </p:nvSpPr>
-        <p:spPr>
-          <a:xfrm>
-            <a:off x="11868689" y="11140579"/>
-            <a:ext cx="4320000" cy="461665"/>
-          </a:xfrm>
-          <a:prstGeom prst="rect">
-            <a:avLst/>
-          </a:prstGeom>
-          <a:noFill/>
-        </p:spPr>
-        <p:txBody>
-          <a:bodyPr wrap="square" rtlCol="0">
-            <a:spAutoFit/>
-          </a:bodyPr>
-          <a:lstStyle/>
-          <a:p>
-            <a:pPr algn="ctr"/>
-            <a:r>
-              <a:rPr kumimoji="1" lang="en-US" altLang="zh-CN" sz="2400" dirty="0" err="1">
-                <a:latin typeface="Arial" panose="020B0604020202020204" pitchFamily="34" charset="0"/>
-                <a:cs typeface="Arial" panose="020B0604020202020204" pitchFamily="34" charset="0"/>
-              </a:rPr>
-              <a:t>Augtrain</a:t>
-            </a:r>
-            <a:r>
-              <a:rPr kumimoji="1" lang="zh-CN" altLang="en-US" sz="2400" dirty="0">
-                <a:latin typeface="Arial" panose="020B0604020202020204" pitchFamily="34" charset="0"/>
-                <a:cs typeface="Arial" panose="020B0604020202020204" pitchFamily="34" charset="0"/>
-              </a:rPr>
-              <a:t> </a:t>
-            </a:r>
-            <a:r>
-              <a:rPr kumimoji="1" lang="en-US" altLang="zh-CN" sz="2400" dirty="0">
-                <a:latin typeface="Arial" panose="020B0604020202020204" pitchFamily="34" charset="0"/>
-                <a:cs typeface="Arial" panose="020B0604020202020204" pitchFamily="34" charset="0"/>
-              </a:rPr>
-              <a:t>–</a:t>
-            </a:r>
-            <a:r>
-              <a:rPr kumimoji="1" lang="zh-CN" altLang="en-US" sz="2400" dirty="0">
-                <a:latin typeface="Arial" panose="020B0604020202020204" pitchFamily="34" charset="0"/>
-                <a:cs typeface="Arial" panose="020B0604020202020204" pitchFamily="34" charset="0"/>
-              </a:rPr>
-              <a:t> </a:t>
-            </a:r>
-            <a:r>
-              <a:rPr kumimoji="1" lang="en-US" altLang="zh-CN" sz="2400" dirty="0">
-                <a:latin typeface="Arial" panose="020B0604020202020204" pitchFamily="34" charset="0"/>
-                <a:cs typeface="Arial" panose="020B0604020202020204" pitchFamily="34" charset="0"/>
-              </a:rPr>
-              <a:t>Position</a:t>
-            </a:r>
-            <a:r>
-              <a:rPr kumimoji="1" lang="zh-CN" altLang="en-US" sz="2400" dirty="0">
-                <a:latin typeface="Arial" panose="020B0604020202020204" pitchFamily="34" charset="0"/>
-                <a:cs typeface="Arial" panose="020B0604020202020204" pitchFamily="34" charset="0"/>
-              </a:rPr>
-              <a:t> </a:t>
-            </a:r>
-            <a:r>
-              <a:rPr kumimoji="1" lang="en-US" altLang="zh-CN" sz="2400" dirty="0">
-                <a:latin typeface="Arial" panose="020B0604020202020204" pitchFamily="34" charset="0"/>
-                <a:cs typeface="Arial" panose="020B0604020202020204" pitchFamily="34" charset="0"/>
-              </a:rPr>
-              <a:t>(N=7288)</a:t>
-            </a:r>
-            <a:endParaRPr kumimoji="1" lang="zh-CN" altLang="en-US" sz="2400" dirty="0">
-              <a:latin typeface="Arial" panose="020B0604020202020204" pitchFamily="34" charset="0"/>
-              <a:cs typeface="Arial" panose="020B0604020202020204" pitchFamily="34" charset="0"/>
-            </a:endParaRPr>
-          </a:p>
-        </p:txBody>
-      </p:sp>
-      <p:sp>
-        <p:nvSpPr>
-          <p:cNvPr id="85" name="文本框 84">
-            <a:extLst>
-              <a:ext uri="{FF2B5EF4-FFF2-40B4-BE49-F238E27FC236}">
-                <a16:creationId xmlns:a16="http://schemas.microsoft.com/office/drawing/2014/main" id="{C0F41947-9407-AF6A-9422-40D2542E8083}"/>
-              </a:ext>
-            </a:extLst>
-          </p:cNvPr>
-          <p:cNvSpPr txBox="1"/>
-          <p:nvPr/>
-        </p:nvSpPr>
-        <p:spPr>
-          <a:xfrm>
-            <a:off x="16733156" y="11140579"/>
-            <a:ext cx="4320000" cy="461665"/>
-          </a:xfrm>
-          <a:prstGeom prst="rect">
-            <a:avLst/>
-          </a:prstGeom>
-          <a:noFill/>
-        </p:spPr>
-        <p:txBody>
-          <a:bodyPr wrap="square" rtlCol="0">
-            <a:spAutoFit/>
-          </a:bodyPr>
-          <a:lstStyle/>
-          <a:p>
-            <a:pPr algn="ctr"/>
-            <a:r>
-              <a:rPr kumimoji="1" lang="en-US" altLang="zh-CN" sz="2400" dirty="0" err="1">
-                <a:latin typeface="Arial" panose="020B0604020202020204" pitchFamily="34" charset="0"/>
-                <a:cs typeface="Arial" panose="020B0604020202020204" pitchFamily="34" charset="0"/>
-              </a:rPr>
-              <a:t>Augtrain</a:t>
-            </a:r>
-            <a:r>
-              <a:rPr kumimoji="1" lang="zh-CN" altLang="en-US" sz="2400" dirty="0">
-                <a:latin typeface="Arial" panose="020B0604020202020204" pitchFamily="34" charset="0"/>
-                <a:cs typeface="Arial" panose="020B0604020202020204" pitchFamily="34" charset="0"/>
-              </a:rPr>
-              <a:t> </a:t>
-            </a:r>
-            <a:r>
-              <a:rPr kumimoji="1" lang="en-US" altLang="zh-CN" sz="2400" dirty="0">
-                <a:latin typeface="Arial" panose="020B0604020202020204" pitchFamily="34" charset="0"/>
-                <a:cs typeface="Arial" panose="020B0604020202020204" pitchFamily="34" charset="0"/>
-              </a:rPr>
-              <a:t>–</a:t>
-            </a:r>
-            <a:r>
-              <a:rPr kumimoji="1" lang="zh-CN" altLang="en-US" sz="2400" dirty="0">
-                <a:latin typeface="Arial" panose="020B0604020202020204" pitchFamily="34" charset="0"/>
-                <a:cs typeface="Arial" panose="020B0604020202020204" pitchFamily="34" charset="0"/>
-              </a:rPr>
-              <a:t> </a:t>
-            </a:r>
-            <a:r>
-              <a:rPr kumimoji="1" lang="en-US" altLang="zh-CN" sz="2400" dirty="0">
-                <a:latin typeface="Arial" panose="020B0604020202020204" pitchFamily="34" charset="0"/>
-                <a:cs typeface="Arial" panose="020B0604020202020204" pitchFamily="34" charset="0"/>
-              </a:rPr>
-              <a:t>Size</a:t>
-            </a:r>
-            <a:r>
-              <a:rPr kumimoji="1" lang="zh-CN" altLang="en-US" sz="2400" dirty="0">
-                <a:latin typeface="Arial" panose="020B0604020202020204" pitchFamily="34" charset="0"/>
-                <a:cs typeface="Arial" panose="020B0604020202020204" pitchFamily="34" charset="0"/>
-              </a:rPr>
-              <a:t> </a:t>
-            </a:r>
-            <a:r>
-              <a:rPr kumimoji="1" lang="en-US" altLang="zh-CN" sz="2400" dirty="0">
-                <a:latin typeface="Arial" panose="020B0604020202020204" pitchFamily="34" charset="0"/>
-                <a:cs typeface="Arial" panose="020B0604020202020204" pitchFamily="34" charset="0"/>
-              </a:rPr>
-              <a:t>(N=7288)</a:t>
-            </a:r>
-            <a:endParaRPr kumimoji="1" lang="zh-CN" altLang="en-US" sz="2400" dirty="0">
-              <a:latin typeface="Arial" panose="020B0604020202020204" pitchFamily="34" charset="0"/>
-              <a:cs typeface="Arial" panose="020B0604020202020204" pitchFamily="34" charset="0"/>
-            </a:endParaRPr>
-          </a:p>
-        </p:txBody>
-      </p:sp>
       <p:pic>
         <p:nvPicPr>
-          <p:cNvPr id="87" name="图形 86">
+          <p:cNvPr id="54" name="图形 53">
             <a:extLst>
               <a:ext uri="{FF2B5EF4-FFF2-40B4-BE49-F238E27FC236}">
-                <a16:creationId xmlns:a16="http://schemas.microsoft.com/office/drawing/2014/main" id="{2CC1C2FA-7907-6F52-4931-872980F7B35B}"/>
+                <a16:creationId xmlns:a16="http://schemas.microsoft.com/office/drawing/2014/main" id="{D85B98F9-2DB7-8B1F-CF8A-B4FF55E6E907}"/>
+              </a:ext>
+            </a:extLst>
+          </p:cNvPr>
+          <p:cNvPicPr>
+            <a:picLocks noChangeAspect="1"/>
+          </p:cNvPicPr>
+          <p:nvPr/>
+        </p:nvPicPr>
+        <p:blipFill>
+          <a:blip>
+            <a:extLst>
+              <a:ext uri="{96DAC541-7B7A-43D3-8B79-37D633B846F1}">
+                <asvg:svgBlip xmlns:asvg="http://schemas.microsoft.com/office/drawing/2016/SVG/main" r:embed="rId9"/>
+              </a:ext>
+            </a:extLst>
+          </a:blip>
+          <a:stretch>
+            <a:fillRect/>
+          </a:stretch>
+        </p:blipFill>
+        <p:spPr>
+          <a:xfrm>
+            <a:off x="16189200" y="6451200"/>
+            <a:ext cx="4796972" cy="4320000"/>
+          </a:xfrm>
+          <a:prstGeom prst="rect">
+            <a:avLst/>
+          </a:prstGeom>
+        </p:spPr>
+      </p:pic>
+      <p:pic>
+        <p:nvPicPr>
+          <p:cNvPr id="56" name="图形 55">
+            <a:extLst>
+              <a:ext uri="{FF2B5EF4-FFF2-40B4-BE49-F238E27FC236}">
+                <a16:creationId xmlns:a16="http://schemas.microsoft.com/office/drawing/2014/main" id="{2364BB41-63CD-8CDD-6157-4FB236B877D9}"/>
               </a:ext>
             </a:extLst>
           </p:cNvPr>
@@ -5883,7 +6249,7 @@
           <a:blip>
             <a:extLst>
               <a:ext uri="{96DAC541-7B7A-43D3-8B79-37D633B846F1}">
-                <asvg:svgBlip xmlns:asvg="http://schemas.microsoft.com/office/drawing/2016/SVG/main" r:embed="rId7"/>
+                <asvg:svgBlip xmlns:asvg="http://schemas.microsoft.com/office/drawing/2016/SVG/main" r:embed="rId10"/>
               </a:ext>
             </a:extLst>
           </a:blip>
@@ -5893,7 +6259,7 @@
         </p:blipFill>
         <p:spPr>
           <a:xfrm>
-            <a:off x="1733806" y="6451896"/>
+            <a:off x="11631600" y="6451200"/>
             <a:ext cx="4320000" cy="4320000"/>
           </a:xfrm>
           <a:prstGeom prst="rect">
@@ -5903,10 +6269,10 @@
       </p:pic>
       <p:pic>
         <p:nvPicPr>
-          <p:cNvPr id="89" name="图形 88">
+          <p:cNvPr id="58" name="图形 57">
             <a:extLst>
               <a:ext uri="{FF2B5EF4-FFF2-40B4-BE49-F238E27FC236}">
-                <a16:creationId xmlns:a16="http://schemas.microsoft.com/office/drawing/2014/main" id="{945F590A-C05F-532C-BCC5-4A285F92C3EF}"/>
+                <a16:creationId xmlns:a16="http://schemas.microsoft.com/office/drawing/2014/main" id="{0CC7427F-2000-B5E5-5C3C-8FD98795F0F5}"/>
               </a:ext>
             </a:extLst>
           </p:cNvPr>
@@ -5919,7 +6285,7 @@
           <a:blip>
             <a:extLst>
               <a:ext uri="{96DAC541-7B7A-43D3-8B79-37D633B846F1}">
-                <asvg:svgBlip xmlns:asvg="http://schemas.microsoft.com/office/drawing/2016/SVG/main" r:embed="rId8"/>
+                <asvg:svgBlip xmlns:asvg="http://schemas.microsoft.com/office/drawing/2016/SVG/main" r:embed="rId11"/>
               </a:ext>
             </a:extLst>
           </a:blip>
@@ -5929,8 +6295,8 @@
         </p:blipFill>
         <p:spPr>
           <a:xfrm>
-            <a:off x="6359806" y="6451896"/>
-            <a:ext cx="4637444" cy="4320000"/>
+            <a:off x="6361200" y="11469600"/>
+            <a:ext cx="4796972" cy="4320000"/>
           </a:xfrm>
           <a:prstGeom prst="rect">
             <a:avLst/>
@@ -5939,10 +6305,46 @@
       </p:pic>
       <p:pic>
         <p:nvPicPr>
-          <p:cNvPr id="91" name="图形 90">
+          <p:cNvPr id="60" name="图形 59">
             <a:extLst>
               <a:ext uri="{FF2B5EF4-FFF2-40B4-BE49-F238E27FC236}">
-                <a16:creationId xmlns:a16="http://schemas.microsoft.com/office/drawing/2014/main" id="{2845996C-5DA1-168E-2C53-E3AB47FFD12B}"/>
+                <a16:creationId xmlns:a16="http://schemas.microsoft.com/office/drawing/2014/main" id="{407C7279-10D8-5AE5-EB9C-F34C05DA2B09}"/>
+              </a:ext>
+            </a:extLst>
+          </p:cNvPr>
+          <p:cNvPicPr>
+            <a:picLocks/>
+          </p:cNvPicPr>
+          <p:nvPr/>
+        </p:nvPicPr>
+        <p:blipFill>
+          <a:blip>
+            <a:extLst>
+              <a:ext uri="{96DAC541-7B7A-43D3-8B79-37D633B846F1}">
+                <asvg:svgBlip xmlns:asvg="http://schemas.microsoft.com/office/drawing/2016/SVG/main" r:embed="rId12"/>
+              </a:ext>
+            </a:extLst>
+          </a:blip>
+          <a:stretch>
+            <a:fillRect/>
+          </a:stretch>
+        </p:blipFill>
+        <p:spPr>
+          <a:xfrm>
+            <a:off x="1735200" y="11469600"/>
+            <a:ext cx="4320000" cy="4320000"/>
+          </a:xfrm>
+          <a:prstGeom prst="rect">
+            <a:avLst/>
+          </a:prstGeom>
+        </p:spPr>
+      </p:pic>
+      <p:pic>
+        <p:nvPicPr>
+          <p:cNvPr id="62" name="图形 61">
+            <a:extLst>
+              <a:ext uri="{FF2B5EF4-FFF2-40B4-BE49-F238E27FC236}">
+                <a16:creationId xmlns:a16="http://schemas.microsoft.com/office/drawing/2014/main" id="{E8FE656A-00C5-C35F-CC9C-C409B8AD8153}"/>
               </a:ext>
             </a:extLst>
           </p:cNvPr>
@@ -5955,7 +6357,7 @@
           <a:blip>
             <a:extLst>
               <a:ext uri="{96DAC541-7B7A-43D3-8B79-37D633B846F1}">
-                <asvg:svgBlip xmlns:asvg="http://schemas.microsoft.com/office/drawing/2016/SVG/main" r:embed="rId9"/>
+                <asvg:svgBlip xmlns:asvg="http://schemas.microsoft.com/office/drawing/2016/SVG/main" r:embed="rId13"/>
               </a:ext>
             </a:extLst>
           </a:blip>
@@ -5965,7 +6367,7 @@
         </p:blipFill>
         <p:spPr>
           <a:xfrm>
-            <a:off x="16189006" y="6451896"/>
+            <a:off x="16189200" y="11469600"/>
             <a:ext cx="4796972" cy="4320000"/>
           </a:xfrm>
           <a:prstGeom prst="rect">
@@ -5975,10 +6377,10 @@
       </p:pic>
       <p:pic>
         <p:nvPicPr>
-          <p:cNvPr id="93" name="图形 92">
+          <p:cNvPr id="64" name="图形 63">
             <a:extLst>
               <a:ext uri="{FF2B5EF4-FFF2-40B4-BE49-F238E27FC236}">
-                <a16:creationId xmlns:a16="http://schemas.microsoft.com/office/drawing/2014/main" id="{0E1870EC-7C40-51A2-1FC4-DFECFD877F72}"/>
+                <a16:creationId xmlns:a16="http://schemas.microsoft.com/office/drawing/2014/main" id="{FEF2C0DD-FAF5-7FCC-835F-6F70490B2583}"/>
               </a:ext>
             </a:extLst>
           </p:cNvPr>
@@ -5991,7 +6393,7 @@
           <a:blip>
             <a:extLst>
               <a:ext uri="{96DAC541-7B7A-43D3-8B79-37D633B846F1}">
-                <asvg:svgBlip xmlns:asvg="http://schemas.microsoft.com/office/drawing/2016/SVG/main" r:embed="rId10"/>
+                <asvg:svgBlip xmlns:asvg="http://schemas.microsoft.com/office/drawing/2016/SVG/main" r:embed="rId14"/>
               </a:ext>
             </a:extLst>
           </a:blip>
@@ -6001,7 +6403,7 @@
         </p:blipFill>
         <p:spPr>
           <a:xfrm>
-            <a:off x="11631600" y="6451896"/>
+            <a:off x="11631600" y="11469600"/>
             <a:ext cx="4320000" cy="4320000"/>
           </a:xfrm>
           <a:prstGeom prst="rect">
@@ -6009,408 +6411,6 @@
           </a:prstGeom>
         </p:spPr>
       </p:pic>
-      <p:pic>
-        <p:nvPicPr>
-          <p:cNvPr id="95" name="图形 94">
-            <a:extLst>
-              <a:ext uri="{FF2B5EF4-FFF2-40B4-BE49-F238E27FC236}">
-                <a16:creationId xmlns:a16="http://schemas.microsoft.com/office/drawing/2014/main" id="{7C0A8AEE-DE8F-D914-518E-BA67F31B53D7}"/>
-              </a:ext>
-            </a:extLst>
-          </p:cNvPr>
-          <p:cNvPicPr>
-            <a:picLocks noChangeAspect="1"/>
-          </p:cNvPicPr>
-          <p:nvPr/>
-        </p:nvPicPr>
-        <p:blipFill>
-          <a:blip>
-            <a:extLst>
-              <a:ext uri="{96DAC541-7B7A-43D3-8B79-37D633B846F1}">
-                <asvg:svgBlip xmlns:asvg="http://schemas.microsoft.com/office/drawing/2016/SVG/main" r:embed="rId11"/>
-              </a:ext>
-            </a:extLst>
-          </a:blip>
-          <a:stretch>
-            <a:fillRect/>
-          </a:stretch>
-        </p:blipFill>
-        <p:spPr>
-          <a:xfrm>
-            <a:off x="6359806" y="11470296"/>
-            <a:ext cx="4796972" cy="4320000"/>
-          </a:xfrm>
-          <a:prstGeom prst="rect">
-            <a:avLst/>
-          </a:prstGeom>
-        </p:spPr>
-      </p:pic>
-      <p:pic>
-        <p:nvPicPr>
-          <p:cNvPr id="97" name="图形 96">
-            <a:extLst>
-              <a:ext uri="{FF2B5EF4-FFF2-40B4-BE49-F238E27FC236}">
-                <a16:creationId xmlns:a16="http://schemas.microsoft.com/office/drawing/2014/main" id="{FBA23BD5-E9D7-D795-9CFF-2E56F7FB0207}"/>
-              </a:ext>
-            </a:extLst>
-          </p:cNvPr>
-          <p:cNvPicPr>
-            <a:picLocks/>
-          </p:cNvPicPr>
-          <p:nvPr/>
-        </p:nvPicPr>
-        <p:blipFill>
-          <a:blip>
-            <a:extLst>
-              <a:ext uri="{96DAC541-7B7A-43D3-8B79-37D633B846F1}">
-                <asvg:svgBlip xmlns:asvg="http://schemas.microsoft.com/office/drawing/2016/SVG/main" r:embed="rId12"/>
-              </a:ext>
-            </a:extLst>
-          </a:blip>
-          <a:stretch>
-            <a:fillRect/>
-          </a:stretch>
-        </p:blipFill>
-        <p:spPr>
-          <a:xfrm>
-            <a:off x="1733806" y="11470296"/>
-            <a:ext cx="4320000" cy="4320000"/>
-          </a:xfrm>
-          <a:prstGeom prst="rect">
-            <a:avLst/>
-          </a:prstGeom>
-        </p:spPr>
-      </p:pic>
-      <p:pic>
-        <p:nvPicPr>
-          <p:cNvPr id="99" name="图形 98">
-            <a:extLst>
-              <a:ext uri="{FF2B5EF4-FFF2-40B4-BE49-F238E27FC236}">
-                <a16:creationId xmlns:a16="http://schemas.microsoft.com/office/drawing/2014/main" id="{0584D1E6-24A1-EEBA-39BB-E559833BF8C6}"/>
-              </a:ext>
-            </a:extLst>
-          </p:cNvPr>
-          <p:cNvPicPr>
-            <a:picLocks/>
-          </p:cNvPicPr>
-          <p:nvPr/>
-        </p:nvPicPr>
-        <p:blipFill>
-          <a:blip>
-            <a:extLst>
-              <a:ext uri="{96DAC541-7B7A-43D3-8B79-37D633B846F1}">
-                <asvg:svgBlip xmlns:asvg="http://schemas.microsoft.com/office/drawing/2016/SVG/main" r:embed="rId13"/>
-              </a:ext>
-            </a:extLst>
-          </a:blip>
-          <a:stretch>
-            <a:fillRect/>
-          </a:stretch>
-        </p:blipFill>
-        <p:spPr>
-          <a:xfrm>
-            <a:off x="11631406" y="11470296"/>
-            <a:ext cx="4320000" cy="4320000"/>
-          </a:xfrm>
-          <a:prstGeom prst="rect">
-            <a:avLst/>
-          </a:prstGeom>
-        </p:spPr>
-      </p:pic>
-      <p:pic>
-        <p:nvPicPr>
-          <p:cNvPr id="101" name="图形 100">
-            <a:extLst>
-              <a:ext uri="{FF2B5EF4-FFF2-40B4-BE49-F238E27FC236}">
-                <a16:creationId xmlns:a16="http://schemas.microsoft.com/office/drawing/2014/main" id="{EB458EE7-55F7-9AAA-FD4A-E9376DDAD0A5}"/>
-              </a:ext>
-            </a:extLst>
-          </p:cNvPr>
-          <p:cNvPicPr>
-            <a:picLocks noChangeAspect="1"/>
-          </p:cNvPicPr>
-          <p:nvPr/>
-        </p:nvPicPr>
-        <p:blipFill>
-          <a:blip>
-            <a:extLst>
-              <a:ext uri="{96DAC541-7B7A-43D3-8B79-37D633B846F1}">
-                <asvg:svgBlip xmlns:asvg="http://schemas.microsoft.com/office/drawing/2016/SVG/main" r:embed="rId14"/>
-              </a:ext>
-            </a:extLst>
-          </a:blip>
-          <a:stretch>
-            <a:fillRect/>
-          </a:stretch>
-        </p:blipFill>
-        <p:spPr>
-          <a:xfrm>
-            <a:off x="16189006" y="11470296"/>
-            <a:ext cx="4796972" cy="4320000"/>
-          </a:xfrm>
-          <a:prstGeom prst="rect">
-            <a:avLst/>
-          </a:prstGeom>
-        </p:spPr>
-      </p:pic>
-      <p:sp>
-        <p:nvSpPr>
-          <p:cNvPr id="2" name="文本框 1">
-            <a:extLst>
-              <a:ext uri="{FF2B5EF4-FFF2-40B4-BE49-F238E27FC236}">
-                <a16:creationId xmlns:a16="http://schemas.microsoft.com/office/drawing/2014/main" id="{D5191ABA-9405-5509-71C1-97E248DB4B08}"/>
-              </a:ext>
-            </a:extLst>
-          </p:cNvPr>
-          <p:cNvSpPr txBox="1"/>
-          <p:nvPr/>
-        </p:nvSpPr>
-        <p:spPr>
-          <a:xfrm>
-            <a:off x="1267200" y="993600"/>
-            <a:ext cx="720000" cy="646331"/>
-          </a:xfrm>
-          <a:prstGeom prst="rect">
-            <a:avLst/>
-          </a:prstGeom>
-          <a:noFill/>
-        </p:spPr>
-        <p:txBody>
-          <a:bodyPr wrap="square" rtlCol="0">
-            <a:spAutoFit/>
-          </a:bodyPr>
-          <a:lstStyle/>
-          <a:p>
-            <a:pPr algn="ctr"/>
-            <a:r>
-              <a:rPr kumimoji="1" lang="en-US" altLang="zh-CN" sz="3600" b="1" dirty="0">
-                <a:latin typeface="Arial" panose="020B0604020202020204" pitchFamily="34" charset="0"/>
-                <a:cs typeface="Arial" panose="020B0604020202020204" pitchFamily="34" charset="0"/>
-              </a:rPr>
-              <a:t>a</a:t>
-            </a:r>
-            <a:endParaRPr kumimoji="1" lang="zh-CN" altLang="en-US" sz="3600" b="1" dirty="0">
-              <a:latin typeface="Arial" panose="020B0604020202020204" pitchFamily="34" charset="0"/>
-              <a:cs typeface="Arial" panose="020B0604020202020204" pitchFamily="34" charset="0"/>
-            </a:endParaRPr>
-          </a:p>
-        </p:txBody>
-      </p:sp>
-      <p:sp>
-        <p:nvSpPr>
-          <p:cNvPr id="6" name="文本框 5">
-            <a:extLst>
-              <a:ext uri="{FF2B5EF4-FFF2-40B4-BE49-F238E27FC236}">
-                <a16:creationId xmlns:a16="http://schemas.microsoft.com/office/drawing/2014/main" id="{ACEF38BC-99DC-F889-F692-DEC4781B339E}"/>
-              </a:ext>
-            </a:extLst>
-          </p:cNvPr>
-          <p:cNvSpPr txBox="1"/>
-          <p:nvPr/>
-        </p:nvSpPr>
-        <p:spPr>
-          <a:xfrm>
-            <a:off x="1267200" y="5739579"/>
-            <a:ext cx="720000" cy="646331"/>
-          </a:xfrm>
-          <a:prstGeom prst="rect">
-            <a:avLst/>
-          </a:prstGeom>
-          <a:noFill/>
-        </p:spPr>
-        <p:txBody>
-          <a:bodyPr wrap="square" rtlCol="0">
-            <a:spAutoFit/>
-          </a:bodyPr>
-          <a:lstStyle/>
-          <a:p>
-            <a:pPr algn="ctr"/>
-            <a:r>
-              <a:rPr kumimoji="1" lang="en-US" altLang="zh-CN" sz="3600" b="1" dirty="0">
-                <a:latin typeface="Arial" panose="020B0604020202020204" pitchFamily="34" charset="0"/>
-                <a:cs typeface="Arial" panose="020B0604020202020204" pitchFamily="34" charset="0"/>
-              </a:rPr>
-              <a:t>c</a:t>
-            </a:r>
-            <a:endParaRPr kumimoji="1" lang="zh-CN" altLang="en-US" sz="3600" b="1" dirty="0">
-              <a:latin typeface="Arial" panose="020B0604020202020204" pitchFamily="34" charset="0"/>
-              <a:cs typeface="Arial" panose="020B0604020202020204" pitchFamily="34" charset="0"/>
-            </a:endParaRPr>
-          </a:p>
-        </p:txBody>
-      </p:sp>
-      <p:sp>
-        <p:nvSpPr>
-          <p:cNvPr id="7" name="文本框 6">
-            <a:extLst>
-              <a:ext uri="{FF2B5EF4-FFF2-40B4-BE49-F238E27FC236}">
-                <a16:creationId xmlns:a16="http://schemas.microsoft.com/office/drawing/2014/main" id="{A5762E4B-CCF8-8AE7-6D3C-FBEE22FE1454}"/>
-              </a:ext>
-            </a:extLst>
-          </p:cNvPr>
-          <p:cNvSpPr txBox="1"/>
-          <p:nvPr/>
-        </p:nvSpPr>
-        <p:spPr>
-          <a:xfrm>
-            <a:off x="1267200" y="10823371"/>
-            <a:ext cx="720000" cy="646331"/>
-          </a:xfrm>
-          <a:prstGeom prst="rect">
-            <a:avLst/>
-          </a:prstGeom>
-          <a:noFill/>
-        </p:spPr>
-        <p:txBody>
-          <a:bodyPr wrap="square" rtlCol="0">
-            <a:spAutoFit/>
-          </a:bodyPr>
-          <a:lstStyle/>
-          <a:p>
-            <a:pPr algn="ctr"/>
-            <a:r>
-              <a:rPr kumimoji="1" lang="en-US" altLang="zh-CN" sz="3600" b="1" dirty="0">
-                <a:latin typeface="Arial" panose="020B0604020202020204" pitchFamily="34" charset="0"/>
-                <a:cs typeface="Arial" panose="020B0604020202020204" pitchFamily="34" charset="0"/>
-              </a:rPr>
-              <a:t>e</a:t>
-            </a:r>
-            <a:endParaRPr kumimoji="1" lang="zh-CN" altLang="en-US" sz="3600" b="1" dirty="0">
-              <a:latin typeface="Arial" panose="020B0604020202020204" pitchFamily="34" charset="0"/>
-              <a:cs typeface="Arial" panose="020B0604020202020204" pitchFamily="34" charset="0"/>
-            </a:endParaRPr>
-          </a:p>
-        </p:txBody>
-      </p:sp>
-      <p:sp>
-        <p:nvSpPr>
-          <p:cNvPr id="9" name="文本框 8">
-            <a:extLst>
-              <a:ext uri="{FF2B5EF4-FFF2-40B4-BE49-F238E27FC236}">
-                <a16:creationId xmlns:a16="http://schemas.microsoft.com/office/drawing/2014/main" id="{3AEE3499-C518-26F6-61AF-99AC8DF688B2}"/>
-              </a:ext>
-            </a:extLst>
-          </p:cNvPr>
-          <p:cNvSpPr txBox="1"/>
-          <p:nvPr/>
-        </p:nvSpPr>
-        <p:spPr>
-          <a:xfrm>
-            <a:off x="11349478" y="993600"/>
-            <a:ext cx="720000" cy="646331"/>
-          </a:xfrm>
-          <a:prstGeom prst="rect">
-            <a:avLst/>
-          </a:prstGeom>
-          <a:noFill/>
-        </p:spPr>
-        <p:txBody>
-          <a:bodyPr wrap="square" rtlCol="0">
-            <a:spAutoFit/>
-          </a:bodyPr>
-          <a:lstStyle/>
-          <a:p>
-            <a:pPr algn="ctr"/>
-            <a:r>
-              <a:rPr kumimoji="1" lang="en-US" altLang="zh-CN" sz="3600" b="1" dirty="0">
-                <a:latin typeface="Arial" panose="020B0604020202020204" pitchFamily="34" charset="0"/>
-                <a:cs typeface="Arial" panose="020B0604020202020204" pitchFamily="34" charset="0"/>
-              </a:rPr>
-              <a:t>b</a:t>
-            </a:r>
-            <a:endParaRPr kumimoji="1" lang="zh-CN" altLang="en-US" sz="3600" b="1" dirty="0">
-              <a:latin typeface="Arial" panose="020B0604020202020204" pitchFamily="34" charset="0"/>
-              <a:cs typeface="Arial" panose="020B0604020202020204" pitchFamily="34" charset="0"/>
-            </a:endParaRPr>
-          </a:p>
-        </p:txBody>
-      </p:sp>
-      <p:sp>
-        <p:nvSpPr>
-          <p:cNvPr id="10" name="文本框 9">
-            <a:extLst>
-              <a:ext uri="{FF2B5EF4-FFF2-40B4-BE49-F238E27FC236}">
-                <a16:creationId xmlns:a16="http://schemas.microsoft.com/office/drawing/2014/main" id="{AC570154-354A-72F7-3630-CFF184453BEB}"/>
-              </a:ext>
-            </a:extLst>
-          </p:cNvPr>
-          <p:cNvSpPr txBox="1"/>
-          <p:nvPr/>
-        </p:nvSpPr>
-        <p:spPr>
-          <a:xfrm>
-            <a:off x="11349478" y="5739579"/>
-            <a:ext cx="720000" cy="646331"/>
-          </a:xfrm>
-          <a:prstGeom prst="rect">
-            <a:avLst/>
-          </a:prstGeom>
-          <a:noFill/>
-        </p:spPr>
-        <p:txBody>
-          <a:bodyPr wrap="square" rtlCol="0">
-            <a:spAutoFit/>
-          </a:bodyPr>
-          <a:lstStyle/>
-          <a:p>
-            <a:pPr algn="ctr"/>
-            <a:r>
-              <a:rPr kumimoji="1" lang="en-US" altLang="zh-CN" sz="3600" b="1" dirty="0">
-                <a:latin typeface="Arial" panose="020B0604020202020204" pitchFamily="34" charset="0"/>
-                <a:cs typeface="Arial" panose="020B0604020202020204" pitchFamily="34" charset="0"/>
-              </a:rPr>
-              <a:t>d</a:t>
-            </a:r>
-            <a:endParaRPr kumimoji="1" lang="zh-CN" altLang="en-US" sz="3600" b="1" dirty="0">
-              <a:latin typeface="Arial" panose="020B0604020202020204" pitchFamily="34" charset="0"/>
-              <a:cs typeface="Arial" panose="020B0604020202020204" pitchFamily="34" charset="0"/>
-            </a:endParaRPr>
-          </a:p>
-        </p:txBody>
-      </p:sp>
-      <p:sp>
-        <p:nvSpPr>
-          <p:cNvPr id="11" name="文本框 10">
-            <a:extLst>
-              <a:ext uri="{FF2B5EF4-FFF2-40B4-BE49-F238E27FC236}">
-                <a16:creationId xmlns:a16="http://schemas.microsoft.com/office/drawing/2014/main" id="{B4C0ABAB-E5E8-7570-98AF-83EBD11EA6FB}"/>
-              </a:ext>
-            </a:extLst>
-          </p:cNvPr>
-          <p:cNvSpPr txBox="1"/>
-          <p:nvPr/>
-        </p:nvSpPr>
-        <p:spPr>
-          <a:xfrm>
-            <a:off x="11349478" y="10823371"/>
-            <a:ext cx="720000" cy="646331"/>
-          </a:xfrm>
-          <a:prstGeom prst="rect">
-            <a:avLst/>
-          </a:prstGeom>
-          <a:noFill/>
-        </p:spPr>
-        <p:txBody>
-          <a:bodyPr wrap="square" rtlCol="0">
-            <a:spAutoFit/>
-          </a:bodyPr>
-          <a:lstStyle/>
-          <a:p>
-            <a:pPr algn="ctr"/>
-            <a:r>
-              <a:rPr kumimoji="1" lang="en-US" altLang="zh-CN" sz="3600" b="1" dirty="0">
-                <a:latin typeface="Arial" panose="020B0604020202020204" pitchFamily="34" charset="0"/>
-                <a:cs typeface="Arial" panose="020B0604020202020204" pitchFamily="34" charset="0"/>
-              </a:rPr>
-              <a:t>f</a:t>
-            </a:r>
-            <a:endParaRPr kumimoji="1" lang="zh-CN" altLang="en-US" sz="3600" b="1" dirty="0">
-              <a:latin typeface="Arial" panose="020B0604020202020204" pitchFamily="34" charset="0"/>
-              <a:cs typeface="Arial" panose="020B0604020202020204" pitchFamily="34" charset="0"/>
-            </a:endParaRPr>
-          </a:p>
-        </p:txBody>
-      </p:sp>
     </p:spTree>
     <p:extLst>
       <p:ext uri="{BB962C8B-B14F-4D97-AF65-F5344CB8AC3E}">

--- a/pptx/data_statistics.pptx
+++ b/pptx/data_statistics.pptx
@@ -198,7 +198,7 @@
           <a:p>
             <a:fld id="{082B1127-B745-0849-B4DE-90186D8D1D7E}" type="datetimeFigureOut">
               <a:rPr kumimoji="1" lang="zh-CN" altLang="en-US" smtClean="0"/>
-              <a:t>2026/6/20</a:t>
+              <a:t>2026/6/21</a:t>
             </a:fld>
             <a:endParaRPr kumimoji="1" lang="zh-CN" altLang="en-US"/>
           </a:p>
@@ -680,7 +680,7 @@
           <a:p>
             <a:fld id="{33ECD986-F6E6-0842-93B7-4A1320D84B6C}" type="datetimeFigureOut">
               <a:rPr kumimoji="1" lang="zh-CN" altLang="en-US" smtClean="0"/>
-              <a:t>2026/6/20</a:t>
+              <a:t>2026/6/21</a:t>
             </a:fld>
             <a:endParaRPr kumimoji="1" lang="zh-CN" altLang="en-US"/>
           </a:p>
@@ -850,7 +850,7 @@
           <a:p>
             <a:fld id="{33ECD986-F6E6-0842-93B7-4A1320D84B6C}" type="datetimeFigureOut">
               <a:rPr kumimoji="1" lang="zh-CN" altLang="en-US" smtClean="0"/>
-              <a:t>2026/6/20</a:t>
+              <a:t>2026/6/21</a:t>
             </a:fld>
             <a:endParaRPr kumimoji="1" lang="zh-CN" altLang="en-US"/>
           </a:p>
@@ -1030,7 +1030,7 @@
           <a:p>
             <a:fld id="{33ECD986-F6E6-0842-93B7-4A1320D84B6C}" type="datetimeFigureOut">
               <a:rPr kumimoji="1" lang="zh-CN" altLang="en-US" smtClean="0"/>
-              <a:t>2026/6/20</a:t>
+              <a:t>2026/6/21</a:t>
             </a:fld>
             <a:endParaRPr kumimoji="1" lang="zh-CN" altLang="en-US"/>
           </a:p>
@@ -1200,7 +1200,7 @@
           <a:p>
             <a:fld id="{33ECD986-F6E6-0842-93B7-4A1320D84B6C}" type="datetimeFigureOut">
               <a:rPr kumimoji="1" lang="zh-CN" altLang="en-US" smtClean="0"/>
-              <a:t>2026/6/20</a:t>
+              <a:t>2026/6/21</a:t>
             </a:fld>
             <a:endParaRPr kumimoji="1" lang="zh-CN" altLang="en-US"/>
           </a:p>
@@ -1446,7 +1446,7 @@
           <a:p>
             <a:fld id="{33ECD986-F6E6-0842-93B7-4A1320D84B6C}" type="datetimeFigureOut">
               <a:rPr kumimoji="1" lang="zh-CN" altLang="en-US" smtClean="0"/>
-              <a:t>2026/6/20</a:t>
+              <a:t>2026/6/21</a:t>
             </a:fld>
             <a:endParaRPr kumimoji="1" lang="zh-CN" altLang="en-US"/>
           </a:p>
@@ -1678,7 +1678,7 @@
           <a:p>
             <a:fld id="{33ECD986-F6E6-0842-93B7-4A1320D84B6C}" type="datetimeFigureOut">
               <a:rPr kumimoji="1" lang="zh-CN" altLang="en-US" smtClean="0"/>
-              <a:t>2026/6/20</a:t>
+              <a:t>2026/6/21</a:t>
             </a:fld>
             <a:endParaRPr kumimoji="1" lang="zh-CN" altLang="en-US"/>
           </a:p>
@@ -2045,7 +2045,7 @@
           <a:p>
             <a:fld id="{33ECD986-F6E6-0842-93B7-4A1320D84B6C}" type="datetimeFigureOut">
               <a:rPr kumimoji="1" lang="zh-CN" altLang="en-US" smtClean="0"/>
-              <a:t>2026/6/20</a:t>
+              <a:t>2026/6/21</a:t>
             </a:fld>
             <a:endParaRPr kumimoji="1" lang="zh-CN" altLang="en-US"/>
           </a:p>
@@ -2163,7 +2163,7 @@
           <a:p>
             <a:fld id="{33ECD986-F6E6-0842-93B7-4A1320D84B6C}" type="datetimeFigureOut">
               <a:rPr kumimoji="1" lang="zh-CN" altLang="en-US" smtClean="0"/>
-              <a:t>2026/6/20</a:t>
+              <a:t>2026/6/21</a:t>
             </a:fld>
             <a:endParaRPr kumimoji="1" lang="zh-CN" altLang="en-US"/>
           </a:p>
@@ -2258,7 +2258,7 @@
           <a:p>
             <a:fld id="{33ECD986-F6E6-0842-93B7-4A1320D84B6C}" type="datetimeFigureOut">
               <a:rPr kumimoji="1" lang="zh-CN" altLang="en-US" smtClean="0"/>
-              <a:t>2026/6/20</a:t>
+              <a:t>2026/6/21</a:t>
             </a:fld>
             <a:endParaRPr kumimoji="1" lang="zh-CN" altLang="en-US"/>
           </a:p>
@@ -2535,7 +2535,7 @@
           <a:p>
             <a:fld id="{33ECD986-F6E6-0842-93B7-4A1320D84B6C}" type="datetimeFigureOut">
               <a:rPr kumimoji="1" lang="zh-CN" altLang="en-US" smtClean="0"/>
-              <a:t>2026/6/20</a:t>
+              <a:t>2026/6/21</a:t>
             </a:fld>
             <a:endParaRPr kumimoji="1" lang="zh-CN" altLang="en-US"/>
           </a:p>
@@ -2792,7 +2792,7 @@
           <a:p>
             <a:fld id="{33ECD986-F6E6-0842-93B7-4A1320D84B6C}" type="datetimeFigureOut">
               <a:rPr kumimoji="1" lang="zh-CN" altLang="en-US" smtClean="0"/>
-              <a:t>2026/6/20</a:t>
+              <a:t>2026/6/21</a:t>
             </a:fld>
             <a:endParaRPr kumimoji="1" lang="zh-CN" altLang="en-US"/>
           </a:p>
@@ -3005,7 +3005,7 @@
           <a:p>
             <a:fld id="{33ECD986-F6E6-0842-93B7-4A1320D84B6C}" type="datetimeFigureOut">
               <a:rPr kumimoji="1" lang="zh-CN" altLang="en-US" smtClean="0"/>
-              <a:t>2026/6/20</a:t>
+              <a:t>2026/6/21</a:t>
             </a:fld>
             <a:endParaRPr kumimoji="1" lang="zh-CN" altLang="en-US"/>
           </a:p>
@@ -6987,133 +6987,6 @@
               <a:t>2,709</a:t>
             </a:r>
             <a:endParaRPr kumimoji="1" lang="zh-CN" altLang="en-US" sz="2800" dirty="0">
-              <a:latin typeface="Arial" panose="020B0604020202020204" pitchFamily="34" charset="0"/>
-              <a:cs typeface="Arial" panose="020B0604020202020204" pitchFamily="34" charset="0"/>
-            </a:endParaRPr>
-          </a:p>
-        </p:txBody>
-      </p:sp>
-      <p:sp>
-        <p:nvSpPr>
-          <p:cNvPr id="16" name="文本框 15">
-            <a:extLst>
-              <a:ext uri="{FF2B5EF4-FFF2-40B4-BE49-F238E27FC236}">
-                <a16:creationId xmlns:a16="http://schemas.microsoft.com/office/drawing/2014/main" id="{94601E97-FB28-6D8B-E3EE-9D3B8A6CD04D}"/>
-              </a:ext>
-            </a:extLst>
-          </p:cNvPr>
-          <p:cNvSpPr txBox="1"/>
-          <p:nvPr/>
-        </p:nvSpPr>
-        <p:spPr>
-          <a:xfrm>
-            <a:off x="2209800" y="1392366"/>
-            <a:ext cx="19302663" cy="707886"/>
-          </a:xfrm>
-          <a:prstGeom prst="rect">
-            <a:avLst/>
-          </a:prstGeom>
-          <a:noFill/>
-        </p:spPr>
-        <p:txBody>
-          <a:bodyPr wrap="square" rtlCol="0">
-            <a:spAutoFit/>
-          </a:bodyPr>
-          <a:lstStyle/>
-          <a:p>
-            <a:pPr algn="ctr"/>
-            <a:r>
-              <a:rPr kumimoji="1" lang="en-US" altLang="zh-CN" sz="4000" dirty="0">
-                <a:latin typeface="Arial" panose="020B0604020202020204" pitchFamily="34" charset="0"/>
-                <a:cs typeface="Arial" panose="020B0604020202020204" pitchFamily="34" charset="0"/>
-              </a:rPr>
-              <a:t>Benign</a:t>
-            </a:r>
-            <a:r>
-              <a:rPr kumimoji="1" lang="zh-CN" altLang="en-US" sz="4000" dirty="0">
-                <a:latin typeface="Arial" panose="020B0604020202020204" pitchFamily="34" charset="0"/>
-                <a:cs typeface="Arial" panose="020B0604020202020204" pitchFamily="34" charset="0"/>
-              </a:rPr>
-              <a:t> </a:t>
-            </a:r>
-            <a:r>
-              <a:rPr kumimoji="1" lang="en-US" altLang="zh-CN" sz="4000" dirty="0">
-                <a:latin typeface="Arial" panose="020B0604020202020204" pitchFamily="34" charset="0"/>
-                <a:cs typeface="Arial" panose="020B0604020202020204" pitchFamily="34" charset="0"/>
-              </a:rPr>
-              <a:t>vs</a:t>
-            </a:r>
-            <a:r>
-              <a:rPr kumimoji="1" lang="zh-CN" altLang="en-US" sz="4000" dirty="0">
-                <a:latin typeface="Arial" panose="020B0604020202020204" pitchFamily="34" charset="0"/>
-                <a:cs typeface="Arial" panose="020B0604020202020204" pitchFamily="34" charset="0"/>
-              </a:rPr>
-              <a:t> </a:t>
-            </a:r>
-            <a:r>
-              <a:rPr kumimoji="1" lang="en-US" altLang="zh-CN" sz="4000" dirty="0">
-                <a:latin typeface="Arial" panose="020B0604020202020204" pitchFamily="34" charset="0"/>
-                <a:cs typeface="Arial" panose="020B0604020202020204" pitchFamily="34" charset="0"/>
-              </a:rPr>
-              <a:t>Malignant</a:t>
-            </a:r>
-            <a:r>
-              <a:rPr kumimoji="1" lang="zh-CN" altLang="en-US" sz="4000" dirty="0">
-                <a:latin typeface="Arial" panose="020B0604020202020204" pitchFamily="34" charset="0"/>
-                <a:cs typeface="Arial" panose="020B0604020202020204" pitchFamily="34" charset="0"/>
-              </a:rPr>
-              <a:t> </a:t>
-            </a:r>
-            <a:r>
-              <a:rPr kumimoji="1" lang="en-US" altLang="zh-CN" sz="4000" dirty="0">
-                <a:latin typeface="Arial" panose="020B0604020202020204" pitchFamily="34" charset="0"/>
-                <a:cs typeface="Arial" panose="020B0604020202020204" pitchFamily="34" charset="0"/>
-              </a:rPr>
-              <a:t>Case</a:t>
-            </a:r>
-            <a:r>
-              <a:rPr kumimoji="1" lang="zh-CN" altLang="en-US" sz="4000" dirty="0">
-                <a:latin typeface="Arial" panose="020B0604020202020204" pitchFamily="34" charset="0"/>
-                <a:cs typeface="Arial" panose="020B0604020202020204" pitchFamily="34" charset="0"/>
-              </a:rPr>
-              <a:t> </a:t>
-            </a:r>
-            <a:r>
-              <a:rPr kumimoji="1" lang="en-US" altLang="zh-CN" sz="4000" dirty="0">
-                <a:latin typeface="Arial" panose="020B0604020202020204" pitchFamily="34" charset="0"/>
-                <a:cs typeface="Arial" panose="020B0604020202020204" pitchFamily="34" charset="0"/>
-              </a:rPr>
-              <a:t>Counts</a:t>
-            </a:r>
-            <a:r>
-              <a:rPr kumimoji="1" lang="zh-CN" altLang="en-US" sz="4000" dirty="0">
-                <a:latin typeface="Arial" panose="020B0604020202020204" pitchFamily="34" charset="0"/>
-                <a:cs typeface="Arial" panose="020B0604020202020204" pitchFamily="34" charset="0"/>
-              </a:rPr>
-              <a:t> </a:t>
-            </a:r>
-            <a:r>
-              <a:rPr kumimoji="1" lang="en-US" altLang="zh-CN" sz="4000" dirty="0">
-                <a:latin typeface="Arial" panose="020B0604020202020204" pitchFamily="34" charset="0"/>
-                <a:cs typeface="Arial" panose="020B0604020202020204" pitchFamily="34" charset="0"/>
-              </a:rPr>
-              <a:t>by</a:t>
-            </a:r>
-            <a:r>
-              <a:rPr kumimoji="1" lang="zh-CN" altLang="en-US" sz="4000" dirty="0">
-                <a:latin typeface="Arial" panose="020B0604020202020204" pitchFamily="34" charset="0"/>
-                <a:cs typeface="Arial" panose="020B0604020202020204" pitchFamily="34" charset="0"/>
-              </a:rPr>
-              <a:t> </a:t>
-            </a:r>
-            <a:r>
-              <a:rPr kumimoji="1" lang="en-US" altLang="zh-CN" sz="4000" dirty="0">
-                <a:latin typeface="Arial" panose="020B0604020202020204" pitchFamily="34" charset="0"/>
-                <a:cs typeface="Arial" panose="020B0604020202020204" pitchFamily="34" charset="0"/>
-              </a:rPr>
-              <a:t>Dataset</a:t>
-            </a:r>
-            <a:endParaRPr kumimoji="1" lang="zh-CN" altLang="en-US" sz="4000" dirty="0">
               <a:latin typeface="Arial" panose="020B0604020202020204" pitchFamily="34" charset="0"/>
               <a:cs typeface="Arial" panose="020B0604020202020204" pitchFamily="34" charset="0"/>
             </a:endParaRPr>

--- a/pptx/data_statistics.pptx
+++ b/pptx/data_statistics.pptx
@@ -198,7 +198,7 @@
           <a:p>
             <a:fld id="{082B1127-B745-0849-B4DE-90186D8D1D7E}" type="datetimeFigureOut">
               <a:rPr kumimoji="1" lang="zh-CN" altLang="en-US" smtClean="0"/>
-              <a:t>2026/6/21</a:t>
+              <a:t>2026/6/24</a:t>
             </a:fld>
             <a:endParaRPr kumimoji="1" lang="zh-CN" altLang="en-US"/>
           </a:p>
@@ -680,7 +680,7 @@
           <a:p>
             <a:fld id="{33ECD986-F6E6-0842-93B7-4A1320D84B6C}" type="datetimeFigureOut">
               <a:rPr kumimoji="1" lang="zh-CN" altLang="en-US" smtClean="0"/>
-              <a:t>2026/6/21</a:t>
+              <a:t>2026/6/24</a:t>
             </a:fld>
             <a:endParaRPr kumimoji="1" lang="zh-CN" altLang="en-US"/>
           </a:p>
@@ -850,7 +850,7 @@
           <a:p>
             <a:fld id="{33ECD986-F6E6-0842-93B7-4A1320D84B6C}" type="datetimeFigureOut">
               <a:rPr kumimoji="1" lang="zh-CN" altLang="en-US" smtClean="0"/>
-              <a:t>2026/6/21</a:t>
+              <a:t>2026/6/24</a:t>
             </a:fld>
             <a:endParaRPr kumimoji="1" lang="zh-CN" altLang="en-US"/>
           </a:p>
@@ -1030,7 +1030,7 @@
           <a:p>
             <a:fld id="{33ECD986-F6E6-0842-93B7-4A1320D84B6C}" type="datetimeFigureOut">
               <a:rPr kumimoji="1" lang="zh-CN" altLang="en-US" smtClean="0"/>
-              <a:t>2026/6/21</a:t>
+              <a:t>2026/6/24</a:t>
             </a:fld>
             <a:endParaRPr kumimoji="1" lang="zh-CN" altLang="en-US"/>
           </a:p>
@@ -1200,7 +1200,7 @@
           <a:p>
             <a:fld id="{33ECD986-F6E6-0842-93B7-4A1320D84B6C}" type="datetimeFigureOut">
               <a:rPr kumimoji="1" lang="zh-CN" altLang="en-US" smtClean="0"/>
-              <a:t>2026/6/21</a:t>
+              <a:t>2026/6/24</a:t>
             </a:fld>
             <a:endParaRPr kumimoji="1" lang="zh-CN" altLang="en-US"/>
           </a:p>
@@ -1446,7 +1446,7 @@
           <a:p>
             <a:fld id="{33ECD986-F6E6-0842-93B7-4A1320D84B6C}" type="datetimeFigureOut">
               <a:rPr kumimoji="1" lang="zh-CN" altLang="en-US" smtClean="0"/>
-              <a:t>2026/6/21</a:t>
+              <a:t>2026/6/24</a:t>
             </a:fld>
             <a:endParaRPr kumimoji="1" lang="zh-CN" altLang="en-US"/>
           </a:p>
@@ -1678,7 +1678,7 @@
           <a:p>
             <a:fld id="{33ECD986-F6E6-0842-93B7-4A1320D84B6C}" type="datetimeFigureOut">
               <a:rPr kumimoji="1" lang="zh-CN" altLang="en-US" smtClean="0"/>
-              <a:t>2026/6/21</a:t>
+              <a:t>2026/6/24</a:t>
             </a:fld>
             <a:endParaRPr kumimoji="1" lang="zh-CN" altLang="en-US"/>
           </a:p>
@@ -2045,7 +2045,7 @@
           <a:p>
             <a:fld id="{33ECD986-F6E6-0842-93B7-4A1320D84B6C}" type="datetimeFigureOut">
               <a:rPr kumimoji="1" lang="zh-CN" altLang="en-US" smtClean="0"/>
-              <a:t>2026/6/21</a:t>
+              <a:t>2026/6/24</a:t>
             </a:fld>
             <a:endParaRPr kumimoji="1" lang="zh-CN" altLang="en-US"/>
           </a:p>
@@ -2163,7 +2163,7 @@
           <a:p>
             <a:fld id="{33ECD986-F6E6-0842-93B7-4A1320D84B6C}" type="datetimeFigureOut">
               <a:rPr kumimoji="1" lang="zh-CN" altLang="en-US" smtClean="0"/>
-              <a:t>2026/6/21</a:t>
+              <a:t>2026/6/24</a:t>
             </a:fld>
             <a:endParaRPr kumimoji="1" lang="zh-CN" altLang="en-US"/>
           </a:p>
@@ -2258,7 +2258,7 @@
           <a:p>
             <a:fld id="{33ECD986-F6E6-0842-93B7-4A1320D84B6C}" type="datetimeFigureOut">
               <a:rPr kumimoji="1" lang="zh-CN" altLang="en-US" smtClean="0"/>
-              <a:t>2026/6/21</a:t>
+              <a:t>2026/6/24</a:t>
             </a:fld>
             <a:endParaRPr kumimoji="1" lang="zh-CN" altLang="en-US"/>
           </a:p>
@@ -2535,7 +2535,7 @@
           <a:p>
             <a:fld id="{33ECD986-F6E6-0842-93B7-4A1320D84B6C}" type="datetimeFigureOut">
               <a:rPr kumimoji="1" lang="zh-CN" altLang="en-US" smtClean="0"/>
-              <a:t>2026/6/21</a:t>
+              <a:t>2026/6/24</a:t>
             </a:fld>
             <a:endParaRPr kumimoji="1" lang="zh-CN" altLang="en-US"/>
           </a:p>
@@ -2792,7 +2792,7 @@
           <a:p>
             <a:fld id="{33ECD986-F6E6-0842-93B7-4A1320D84B6C}" type="datetimeFigureOut">
               <a:rPr kumimoji="1" lang="zh-CN" altLang="en-US" smtClean="0"/>
-              <a:t>2026/6/21</a:t>
+              <a:t>2026/6/24</a:t>
             </a:fld>
             <a:endParaRPr kumimoji="1" lang="zh-CN" altLang="en-US"/>
           </a:p>
@@ -3005,7 +3005,7 @@
           <a:p>
             <a:fld id="{33ECD986-F6E6-0842-93B7-4A1320D84B6C}" type="datetimeFigureOut">
               <a:rPr kumimoji="1" lang="zh-CN" altLang="en-US" smtClean="0"/>
-              <a:t>2026/6/21</a:t>
+              <a:t>2026/6/24</a:t>
             </a:fld>
             <a:endParaRPr kumimoji="1" lang="zh-CN" altLang="en-US"/>
           </a:p>
@@ -4967,8 +4967,8 @@
         </p:nvSpPr>
         <p:spPr>
           <a:xfrm>
-            <a:off x="1733509" y="11139633"/>
-            <a:ext cx="4320000" cy="461665"/>
+            <a:off x="1733508" y="11139633"/>
+            <a:ext cx="4449629" cy="461665"/>
           </a:xfrm>
           <a:prstGeom prst="rect">
             <a:avLst/>
@@ -4983,11 +4983,11 @@
           <a:p>
             <a:pPr algn="ctr"/>
             <a:r>
-              <a:rPr kumimoji="1" lang="en-US" altLang="zh-CN" sz="2400" dirty="0" err="1">
-                <a:latin typeface="Arial" panose="020B0604020202020204" pitchFamily="34" charset="0"/>
-                <a:cs typeface="Arial" panose="020B0604020202020204" pitchFamily="34" charset="0"/>
-              </a:rPr>
-              <a:t>FinalData</a:t>
+              <a:rPr kumimoji="1" lang="en-US" altLang="zh-CN" sz="2400" dirty="0">
+                <a:latin typeface="Arial" panose="020B0604020202020204" pitchFamily="34" charset="0"/>
+                <a:cs typeface="Arial" panose="020B0604020202020204" pitchFamily="34" charset="0"/>
+              </a:rPr>
+              <a:t>Zhujiang2K</a:t>
             </a:r>
             <a:r>
               <a:rPr kumimoji="1" lang="zh-CN" altLang="en-US" sz="2400" dirty="0">
@@ -5239,11 +5239,11 @@
           <a:p>
             <a:pPr algn="ctr"/>
             <a:r>
-              <a:rPr kumimoji="1" lang="en-US" altLang="zh-CN" sz="2400" dirty="0" err="1">
-                <a:latin typeface="Arial" panose="020B0604020202020204" pitchFamily="34" charset="0"/>
-                <a:cs typeface="Arial" panose="020B0604020202020204" pitchFamily="34" charset="0"/>
-              </a:rPr>
-              <a:t>FinalData</a:t>
+              <a:rPr kumimoji="1" lang="en-US" altLang="zh-CN" sz="2400" dirty="0">
+                <a:latin typeface="Arial" panose="020B0604020202020204" pitchFamily="34" charset="0"/>
+                <a:cs typeface="Arial" panose="020B0604020202020204" pitchFamily="34" charset="0"/>
+              </a:rPr>
+              <a:t>Zhujiang2K</a:t>
             </a:r>
             <a:r>
               <a:rPr kumimoji="1" lang="zh-CN" altLang="en-US" sz="2400" dirty="0">
@@ -5565,8 +5565,8 @@
         </p:nvSpPr>
         <p:spPr>
           <a:xfrm>
-            <a:off x="11868689" y="11140579"/>
-            <a:ext cx="4320000" cy="461665"/>
+            <a:off x="11737948" y="11140579"/>
+            <a:ext cx="4700787" cy="461665"/>
           </a:xfrm>
           <a:prstGeom prst="rect">
             <a:avLst/>
@@ -5581,11 +5581,11 @@
           <a:p>
             <a:pPr algn="ctr"/>
             <a:r>
-              <a:rPr kumimoji="1" lang="en-US" altLang="zh-CN" sz="2400" dirty="0" err="1">
-                <a:latin typeface="Arial" panose="020B0604020202020204" pitchFamily="34" charset="0"/>
-                <a:cs typeface="Arial" panose="020B0604020202020204" pitchFamily="34" charset="0"/>
-              </a:rPr>
-              <a:t>Augtrain</a:t>
+              <a:rPr kumimoji="1" lang="en-US" altLang="zh-CN" sz="2400" dirty="0">
+                <a:latin typeface="Arial" panose="020B0604020202020204" pitchFamily="34" charset="0"/>
+                <a:cs typeface="Arial" panose="020B0604020202020204" pitchFamily="34" charset="0"/>
+              </a:rPr>
+              <a:t>Shanghai7K</a:t>
             </a:r>
             <a:r>
               <a:rPr kumimoji="1" lang="zh-CN" altLang="en-US" sz="2400" dirty="0">
@@ -5666,11 +5666,11 @@
           <a:p>
             <a:pPr algn="ctr"/>
             <a:r>
-              <a:rPr kumimoji="1" lang="en-US" altLang="zh-CN" sz="2400" dirty="0" err="1">
-                <a:latin typeface="Arial" panose="020B0604020202020204" pitchFamily="34" charset="0"/>
-                <a:cs typeface="Arial" panose="020B0604020202020204" pitchFamily="34" charset="0"/>
-              </a:rPr>
-              <a:t>Augtrain</a:t>
+              <a:rPr kumimoji="1" lang="en-US" altLang="zh-CN" sz="2400" dirty="0">
+                <a:latin typeface="Arial" panose="020B0604020202020204" pitchFamily="34" charset="0"/>
+                <a:cs typeface="Arial" panose="020B0604020202020204" pitchFamily="34" charset="0"/>
+              </a:rPr>
+              <a:t>Shanghai7K</a:t>
             </a:r>
             <a:r>
               <a:rPr kumimoji="1" lang="zh-CN" altLang="en-US" sz="2400" dirty="0">
@@ -7183,16 +7183,12 @@
           <a:p>
             <a:pPr algn="ctr"/>
             <a:r>
-              <a:rPr kumimoji="1" lang="en-US" altLang="zh-CN" sz="3200" dirty="0" err="1">
-                <a:latin typeface="Arial" panose="020B0604020202020204" pitchFamily="34" charset="0"/>
-                <a:cs typeface="Arial" panose="020B0604020202020204" pitchFamily="34" charset="0"/>
-              </a:rPr>
-              <a:t>FinalData</a:t>
-            </a:r>
-            <a:endParaRPr kumimoji="1" lang="en-US" altLang="zh-CN" sz="3200" dirty="0">
-              <a:latin typeface="Arial" panose="020B0604020202020204" pitchFamily="34" charset="0"/>
-              <a:cs typeface="Arial" panose="020B0604020202020204" pitchFamily="34" charset="0"/>
-            </a:endParaRPr>
+              <a:rPr kumimoji="1" lang="en-US" altLang="zh-CN" sz="3200" dirty="0">
+                <a:latin typeface="Arial" panose="020B0604020202020204" pitchFamily="34" charset="0"/>
+                <a:cs typeface="Arial" panose="020B0604020202020204" pitchFamily="34" charset="0"/>
+              </a:rPr>
+              <a:t>Zhujiang2K</a:t>
+            </a:r>
           </a:p>
         </p:txBody>
       </p:sp>

--- a/pptx/data_statistics.pptx
+++ b/pptx/data_statistics.pptx
@@ -198,7 +198,7 @@
           <a:p>
             <a:fld id="{082B1127-B745-0849-B4DE-90186D8D1D7E}" type="datetimeFigureOut">
               <a:rPr kumimoji="1" lang="zh-CN" altLang="en-US" smtClean="0"/>
-              <a:t>2026/6/24</a:t>
+              <a:t>2026/7/5</a:t>
             </a:fld>
             <a:endParaRPr kumimoji="1" lang="zh-CN" altLang="en-US"/>
           </a:p>
@@ -680,7 +680,7 @@
           <a:p>
             <a:fld id="{33ECD986-F6E6-0842-93B7-4A1320D84B6C}" type="datetimeFigureOut">
               <a:rPr kumimoji="1" lang="zh-CN" altLang="en-US" smtClean="0"/>
-              <a:t>2026/6/24</a:t>
+              <a:t>2026/7/5</a:t>
             </a:fld>
             <a:endParaRPr kumimoji="1" lang="zh-CN" altLang="en-US"/>
           </a:p>
@@ -850,7 +850,7 @@
           <a:p>
             <a:fld id="{33ECD986-F6E6-0842-93B7-4A1320D84B6C}" type="datetimeFigureOut">
               <a:rPr kumimoji="1" lang="zh-CN" altLang="en-US" smtClean="0"/>
-              <a:t>2026/6/24</a:t>
+              <a:t>2026/7/5</a:t>
             </a:fld>
             <a:endParaRPr kumimoji="1" lang="zh-CN" altLang="en-US"/>
           </a:p>
@@ -1030,7 +1030,7 @@
           <a:p>
             <a:fld id="{33ECD986-F6E6-0842-93B7-4A1320D84B6C}" type="datetimeFigureOut">
               <a:rPr kumimoji="1" lang="zh-CN" altLang="en-US" smtClean="0"/>
-              <a:t>2026/6/24</a:t>
+              <a:t>2026/7/5</a:t>
             </a:fld>
             <a:endParaRPr kumimoji="1" lang="zh-CN" altLang="en-US"/>
           </a:p>
@@ -1200,7 +1200,7 @@
           <a:p>
             <a:fld id="{33ECD986-F6E6-0842-93B7-4A1320D84B6C}" type="datetimeFigureOut">
               <a:rPr kumimoji="1" lang="zh-CN" altLang="en-US" smtClean="0"/>
-              <a:t>2026/6/24</a:t>
+              <a:t>2026/7/5</a:t>
             </a:fld>
             <a:endParaRPr kumimoji="1" lang="zh-CN" altLang="en-US"/>
           </a:p>
@@ -1446,7 +1446,7 @@
           <a:p>
             <a:fld id="{33ECD986-F6E6-0842-93B7-4A1320D84B6C}" type="datetimeFigureOut">
               <a:rPr kumimoji="1" lang="zh-CN" altLang="en-US" smtClean="0"/>
-              <a:t>2026/6/24</a:t>
+              <a:t>2026/7/5</a:t>
             </a:fld>
             <a:endParaRPr kumimoji="1" lang="zh-CN" altLang="en-US"/>
           </a:p>
@@ -1678,7 +1678,7 @@
           <a:p>
             <a:fld id="{33ECD986-F6E6-0842-93B7-4A1320D84B6C}" type="datetimeFigureOut">
               <a:rPr kumimoji="1" lang="zh-CN" altLang="en-US" smtClean="0"/>
-              <a:t>2026/6/24</a:t>
+              <a:t>2026/7/5</a:t>
             </a:fld>
             <a:endParaRPr kumimoji="1" lang="zh-CN" altLang="en-US"/>
           </a:p>
@@ -2045,7 +2045,7 @@
           <a:p>
             <a:fld id="{33ECD986-F6E6-0842-93B7-4A1320D84B6C}" type="datetimeFigureOut">
               <a:rPr kumimoji="1" lang="zh-CN" altLang="en-US" smtClean="0"/>
-              <a:t>2026/6/24</a:t>
+              <a:t>2026/7/5</a:t>
             </a:fld>
             <a:endParaRPr kumimoji="1" lang="zh-CN" altLang="en-US"/>
           </a:p>
@@ -2163,7 +2163,7 @@
           <a:p>
             <a:fld id="{33ECD986-F6E6-0842-93B7-4A1320D84B6C}" type="datetimeFigureOut">
               <a:rPr kumimoji="1" lang="zh-CN" altLang="en-US" smtClean="0"/>
-              <a:t>2026/6/24</a:t>
+              <a:t>2026/7/5</a:t>
             </a:fld>
             <a:endParaRPr kumimoji="1" lang="zh-CN" altLang="en-US"/>
           </a:p>
@@ -2258,7 +2258,7 @@
           <a:p>
             <a:fld id="{33ECD986-F6E6-0842-93B7-4A1320D84B6C}" type="datetimeFigureOut">
               <a:rPr kumimoji="1" lang="zh-CN" altLang="en-US" smtClean="0"/>
-              <a:t>2026/6/24</a:t>
+              <a:t>2026/7/5</a:t>
             </a:fld>
             <a:endParaRPr kumimoji="1" lang="zh-CN" altLang="en-US"/>
           </a:p>
@@ -2535,7 +2535,7 @@
           <a:p>
             <a:fld id="{33ECD986-F6E6-0842-93B7-4A1320D84B6C}" type="datetimeFigureOut">
               <a:rPr kumimoji="1" lang="zh-CN" altLang="en-US" smtClean="0"/>
-              <a:t>2026/6/24</a:t>
+              <a:t>2026/7/5</a:t>
             </a:fld>
             <a:endParaRPr kumimoji="1" lang="zh-CN" altLang="en-US"/>
           </a:p>
@@ -2792,7 +2792,7 @@
           <a:p>
             <a:fld id="{33ECD986-F6E6-0842-93B7-4A1320D84B6C}" type="datetimeFigureOut">
               <a:rPr kumimoji="1" lang="zh-CN" altLang="en-US" smtClean="0"/>
-              <a:t>2026/6/24</a:t>
+              <a:t>2026/7/5</a:t>
             </a:fld>
             <a:endParaRPr kumimoji="1" lang="zh-CN" altLang="en-US"/>
           </a:p>
@@ -3005,7 +3005,7 @@
           <a:p>
             <a:fld id="{33ECD986-F6E6-0842-93B7-4A1320D84B6C}" type="datetimeFigureOut">
               <a:rPr kumimoji="1" lang="zh-CN" altLang="en-US" smtClean="0"/>
-              <a:t>2026/6/24</a:t>
+              <a:t>2026/7/5</a:t>
             </a:fld>
             <a:endParaRPr kumimoji="1" lang="zh-CN" altLang="en-US"/>
           </a:p>
@@ -4987,7 +4987,7 @@
                 <a:latin typeface="Arial" panose="020B0604020202020204" pitchFamily="34" charset="0"/>
                 <a:cs typeface="Arial" panose="020B0604020202020204" pitchFamily="34" charset="0"/>
               </a:rPr>
-              <a:t>Zhujiang2K</a:t>
+              <a:t>ZJH-2K</a:t>
             </a:r>
             <a:r>
               <a:rPr kumimoji="1" lang="zh-CN" altLang="en-US" sz="2400" dirty="0">
@@ -5243,7 +5243,7 @@
                 <a:latin typeface="Arial" panose="020B0604020202020204" pitchFamily="34" charset="0"/>
                 <a:cs typeface="Arial" panose="020B0604020202020204" pitchFamily="34" charset="0"/>
               </a:rPr>
-              <a:t>Zhujiang2K</a:t>
+              <a:t>ZJH-2K</a:t>
             </a:r>
             <a:r>
               <a:rPr kumimoji="1" lang="zh-CN" altLang="en-US" sz="2400" dirty="0">
@@ -5585,21 +5585,7 @@
                 <a:latin typeface="Arial" panose="020B0604020202020204" pitchFamily="34" charset="0"/>
                 <a:cs typeface="Arial" panose="020B0604020202020204" pitchFamily="34" charset="0"/>
               </a:rPr>
-              <a:t>Shanghai7K</a:t>
-            </a:r>
-            <a:r>
-              <a:rPr kumimoji="1" lang="zh-CN" altLang="en-US" sz="2400" dirty="0">
-                <a:latin typeface="Arial" panose="020B0604020202020204" pitchFamily="34" charset="0"/>
-                <a:cs typeface="Arial" panose="020B0604020202020204" pitchFamily="34" charset="0"/>
-              </a:rPr>
-              <a:t> </a:t>
-            </a:r>
-            <a:r>
-              <a:rPr kumimoji="1" lang="en-US" altLang="zh-CN" sz="2400" dirty="0">
-                <a:latin typeface="Arial" panose="020B0604020202020204" pitchFamily="34" charset="0"/>
-                <a:cs typeface="Arial" panose="020B0604020202020204" pitchFamily="34" charset="0"/>
-              </a:rPr>
-              <a:t>–</a:t>
+              <a:t>SHH-7K–</a:t>
             </a:r>
             <a:r>
               <a:rPr kumimoji="1" lang="zh-CN" altLang="en-US" sz="2400" dirty="0">
@@ -5666,14 +5652,14 @@
           <a:p>
             <a:pPr algn="ctr"/>
             <a:r>
-              <a:rPr kumimoji="1" lang="en-US" altLang="zh-CN" sz="2400" dirty="0">
-                <a:latin typeface="Arial" panose="020B0604020202020204" pitchFamily="34" charset="0"/>
-                <a:cs typeface="Arial" panose="020B0604020202020204" pitchFamily="34" charset="0"/>
-              </a:rPr>
-              <a:t>Shanghai7K</a:t>
-            </a:r>
-            <a:r>
-              <a:rPr kumimoji="1" lang="zh-CN" altLang="en-US" sz="2400" dirty="0">
+              <a:rPr kumimoji="1" lang="en-US" altLang="zh-CN" sz="2400">
+                <a:latin typeface="Arial" panose="020B0604020202020204" pitchFamily="34" charset="0"/>
+                <a:cs typeface="Arial" panose="020B0604020202020204" pitchFamily="34" charset="0"/>
+              </a:rPr>
+              <a:t>SHH-7K</a:t>
+            </a:r>
+            <a:r>
+              <a:rPr kumimoji="1" lang="zh-CN" altLang="en-US" sz="2400">
                 <a:latin typeface="Arial" panose="020B0604020202020204" pitchFamily="34" charset="0"/>
                 <a:cs typeface="Arial" panose="020B0604020202020204" pitchFamily="34" charset="0"/>
               </a:rPr>
@@ -7187,7 +7173,7 @@
                 <a:latin typeface="Arial" panose="020B0604020202020204" pitchFamily="34" charset="0"/>
                 <a:cs typeface="Arial" panose="020B0604020202020204" pitchFamily="34" charset="0"/>
               </a:rPr>
-              <a:t>Zhujiang2K</a:t>
+              <a:t>ZJH-2K</a:t>
             </a:r>
           </a:p>
         </p:txBody>

--- a/pptx/data_statistics.pptx
+++ b/pptx/data_statistics.pptx
@@ -5,11 +5,12 @@
     <p:sldMasterId id="2147483660" r:id="rId1"/>
   </p:sldMasterIdLst>
   <p:notesMasterIdLst>
-    <p:notesMasterId r:id="rId4"/>
+    <p:notesMasterId r:id="rId5"/>
   </p:notesMasterIdLst>
   <p:sldIdLst>
     <p:sldId id="256" r:id="rId2"/>
     <p:sldId id="257" r:id="rId3"/>
+    <p:sldId id="258" r:id="rId4"/>
   </p:sldIdLst>
   <p:sldSz cx="23760113" cy="18000663"/>
   <p:notesSz cx="6858000" cy="9144000"/>
@@ -198,7 +199,7 @@
           <a:p>
             <a:fld id="{082B1127-B745-0849-B4DE-90186D8D1D7E}" type="datetimeFigureOut">
               <a:rPr kumimoji="1" lang="zh-CN" altLang="en-US" smtClean="0"/>
-              <a:t>2026/7/5</a:t>
+              <a:t>2026/7/12</a:t>
             </a:fld>
             <a:endParaRPr kumimoji="1" lang="zh-CN" altLang="en-US"/>
           </a:p>
@@ -680,7 +681,7 @@
           <a:p>
             <a:fld id="{33ECD986-F6E6-0842-93B7-4A1320D84B6C}" type="datetimeFigureOut">
               <a:rPr kumimoji="1" lang="zh-CN" altLang="en-US" smtClean="0"/>
-              <a:t>2026/7/5</a:t>
+              <a:t>2026/7/12</a:t>
             </a:fld>
             <a:endParaRPr kumimoji="1" lang="zh-CN" altLang="en-US"/>
           </a:p>
@@ -850,7 +851,7 @@
           <a:p>
             <a:fld id="{33ECD986-F6E6-0842-93B7-4A1320D84B6C}" type="datetimeFigureOut">
               <a:rPr kumimoji="1" lang="zh-CN" altLang="en-US" smtClean="0"/>
-              <a:t>2026/7/5</a:t>
+              <a:t>2026/7/12</a:t>
             </a:fld>
             <a:endParaRPr kumimoji="1" lang="zh-CN" altLang="en-US"/>
           </a:p>
@@ -1030,7 +1031,7 @@
           <a:p>
             <a:fld id="{33ECD986-F6E6-0842-93B7-4A1320D84B6C}" type="datetimeFigureOut">
               <a:rPr kumimoji="1" lang="zh-CN" altLang="en-US" smtClean="0"/>
-              <a:t>2026/7/5</a:t>
+              <a:t>2026/7/12</a:t>
             </a:fld>
             <a:endParaRPr kumimoji="1" lang="zh-CN" altLang="en-US"/>
           </a:p>
@@ -1200,7 +1201,7 @@
           <a:p>
             <a:fld id="{33ECD986-F6E6-0842-93B7-4A1320D84B6C}" type="datetimeFigureOut">
               <a:rPr kumimoji="1" lang="zh-CN" altLang="en-US" smtClean="0"/>
-              <a:t>2026/7/5</a:t>
+              <a:t>2026/7/12</a:t>
             </a:fld>
             <a:endParaRPr kumimoji="1" lang="zh-CN" altLang="en-US"/>
           </a:p>
@@ -1446,7 +1447,7 @@
           <a:p>
             <a:fld id="{33ECD986-F6E6-0842-93B7-4A1320D84B6C}" type="datetimeFigureOut">
               <a:rPr kumimoji="1" lang="zh-CN" altLang="en-US" smtClean="0"/>
-              <a:t>2026/7/5</a:t>
+              <a:t>2026/7/12</a:t>
             </a:fld>
             <a:endParaRPr kumimoji="1" lang="zh-CN" altLang="en-US"/>
           </a:p>
@@ -1678,7 +1679,7 @@
           <a:p>
             <a:fld id="{33ECD986-F6E6-0842-93B7-4A1320D84B6C}" type="datetimeFigureOut">
               <a:rPr kumimoji="1" lang="zh-CN" altLang="en-US" smtClean="0"/>
-              <a:t>2026/7/5</a:t>
+              <a:t>2026/7/12</a:t>
             </a:fld>
             <a:endParaRPr kumimoji="1" lang="zh-CN" altLang="en-US"/>
           </a:p>
@@ -2045,7 +2046,7 @@
           <a:p>
             <a:fld id="{33ECD986-F6E6-0842-93B7-4A1320D84B6C}" type="datetimeFigureOut">
               <a:rPr kumimoji="1" lang="zh-CN" altLang="en-US" smtClean="0"/>
-              <a:t>2026/7/5</a:t>
+              <a:t>2026/7/12</a:t>
             </a:fld>
             <a:endParaRPr kumimoji="1" lang="zh-CN" altLang="en-US"/>
           </a:p>
@@ -2163,7 +2164,7 @@
           <a:p>
             <a:fld id="{33ECD986-F6E6-0842-93B7-4A1320D84B6C}" type="datetimeFigureOut">
               <a:rPr kumimoji="1" lang="zh-CN" altLang="en-US" smtClean="0"/>
-              <a:t>2026/7/5</a:t>
+              <a:t>2026/7/12</a:t>
             </a:fld>
             <a:endParaRPr kumimoji="1" lang="zh-CN" altLang="en-US"/>
           </a:p>
@@ -2258,7 +2259,7 @@
           <a:p>
             <a:fld id="{33ECD986-F6E6-0842-93B7-4A1320D84B6C}" type="datetimeFigureOut">
               <a:rPr kumimoji="1" lang="zh-CN" altLang="en-US" smtClean="0"/>
-              <a:t>2026/7/5</a:t>
+              <a:t>2026/7/12</a:t>
             </a:fld>
             <a:endParaRPr kumimoji="1" lang="zh-CN" altLang="en-US"/>
           </a:p>
@@ -2535,7 +2536,7 @@
           <a:p>
             <a:fld id="{33ECD986-F6E6-0842-93B7-4A1320D84B6C}" type="datetimeFigureOut">
               <a:rPr kumimoji="1" lang="zh-CN" altLang="en-US" smtClean="0"/>
-              <a:t>2026/7/5</a:t>
+              <a:t>2026/7/12</a:t>
             </a:fld>
             <a:endParaRPr kumimoji="1" lang="zh-CN" altLang="en-US"/>
           </a:p>
@@ -2792,7 +2793,7 @@
           <a:p>
             <a:fld id="{33ECD986-F6E6-0842-93B7-4A1320D84B6C}" type="datetimeFigureOut">
               <a:rPr kumimoji="1" lang="zh-CN" altLang="en-US" smtClean="0"/>
-              <a:t>2026/7/5</a:t>
+              <a:t>2026/7/12</a:t>
             </a:fld>
             <a:endParaRPr kumimoji="1" lang="zh-CN" altLang="en-US"/>
           </a:p>
@@ -3005,7 +3006,7 @@
           <a:p>
             <a:fld id="{33ECD986-F6E6-0842-93B7-4A1320D84B6C}" type="datetimeFigureOut">
               <a:rPr kumimoji="1" lang="zh-CN" altLang="en-US" smtClean="0"/>
-              <a:t>2026/7/5</a:t>
+              <a:t>2026/7/12</a:t>
             </a:fld>
             <a:endParaRPr kumimoji="1" lang="zh-CN" altLang="en-US"/>
           </a:p>
@@ -4987,7 +4988,7 @@
                 <a:latin typeface="Arial" panose="020B0604020202020204" pitchFamily="34" charset="0"/>
                 <a:cs typeface="Arial" panose="020B0604020202020204" pitchFamily="34" charset="0"/>
               </a:rPr>
-              <a:t>ZJH-2K</a:t>
+              <a:t>ZJH-8K</a:t>
             </a:r>
             <a:r>
               <a:rPr kumimoji="1" lang="zh-CN" altLang="en-US" sz="2400" dirty="0">
@@ -5029,7 +5030,7 @@
                 <a:latin typeface="Arial" panose="020B0604020202020204" pitchFamily="34" charset="0"/>
                 <a:cs typeface="Arial" panose="020B0604020202020204" pitchFamily="34" charset="0"/>
               </a:rPr>
-              <a:t>(N=1854)</a:t>
+              <a:t>(N=8083)</a:t>
             </a:r>
             <a:endParaRPr kumimoji="1" lang="zh-CN" altLang="en-US" sz="2400" dirty="0">
               <a:latin typeface="Arial" panose="020B0604020202020204" pitchFamily="34" charset="0"/>
@@ -5239,11 +5240,25 @@
           <a:p>
             <a:pPr algn="ctr"/>
             <a:r>
+              <a:rPr kumimoji="1" lang="en-US" altLang="zh-CN" sz="2400">
+                <a:latin typeface="Arial" panose="020B0604020202020204" pitchFamily="34" charset="0"/>
+                <a:cs typeface="Arial" panose="020B0604020202020204" pitchFamily="34" charset="0"/>
+              </a:rPr>
+              <a:t>ZJH-8K</a:t>
+            </a:r>
+            <a:r>
+              <a:rPr kumimoji="1" lang="zh-CN" altLang="en-US" sz="2400" dirty="0">
+                <a:latin typeface="Arial" panose="020B0604020202020204" pitchFamily="34" charset="0"/>
+                <a:cs typeface="Arial" panose="020B0604020202020204" pitchFamily="34" charset="0"/>
+              </a:rPr>
+              <a:t> </a:t>
+            </a:r>
+            <a:r>
               <a:rPr kumimoji="1" lang="en-US" altLang="zh-CN" sz="2400" dirty="0">
                 <a:latin typeface="Arial" panose="020B0604020202020204" pitchFamily="34" charset="0"/>
                 <a:cs typeface="Arial" panose="020B0604020202020204" pitchFamily="34" charset="0"/>
               </a:rPr>
-              <a:t>ZJH-2K</a:t>
+              <a:t>–</a:t>
             </a:r>
             <a:r>
               <a:rPr kumimoji="1" lang="zh-CN" altLang="en-US" sz="2400" dirty="0">
@@ -5257,7 +5272,7 @@
                 <a:latin typeface="Arial" panose="020B0604020202020204" pitchFamily="34" charset="0"/>
                 <a:cs typeface="Arial" panose="020B0604020202020204" pitchFamily="34" charset="0"/>
               </a:rPr>
-              <a:t>–</a:t>
+              <a:t>Size</a:t>
             </a:r>
             <a:r>
               <a:rPr kumimoji="1" lang="zh-CN" altLang="en-US" sz="2400" dirty="0">
@@ -5271,21 +5286,7 @@
                 <a:latin typeface="Arial" panose="020B0604020202020204" pitchFamily="34" charset="0"/>
                 <a:cs typeface="Arial" panose="020B0604020202020204" pitchFamily="34" charset="0"/>
               </a:rPr>
-              <a:t>Size</a:t>
-            </a:r>
-            <a:r>
-              <a:rPr kumimoji="1" lang="zh-CN" altLang="en-US" sz="2400" dirty="0">
-                <a:latin typeface="Arial" panose="020B0604020202020204" pitchFamily="34" charset="0"/>
-                <a:cs typeface="Arial" panose="020B0604020202020204" pitchFamily="34" charset="0"/>
-              </a:rPr>
-              <a:t> </a:t>
-            </a:r>
-            <a:r>
-              <a:rPr kumimoji="1" lang="en-US" altLang="zh-CN" sz="2400" dirty="0">
-                <a:latin typeface="Arial" panose="020B0604020202020204" pitchFamily="34" charset="0"/>
-                <a:cs typeface="Arial" panose="020B0604020202020204" pitchFamily="34" charset="0"/>
-              </a:rPr>
-              <a:t>(N=1854)</a:t>
+              <a:t>(N=8083)</a:t>
             </a:r>
             <a:endParaRPr kumimoji="1" lang="zh-CN" altLang="en-US" sz="2400" dirty="0">
               <a:latin typeface="Arial" panose="020B0604020202020204" pitchFamily="34" charset="0"/>
@@ -6462,7 +6463,7 @@
         <p:spPr>
           <a:xfrm>
             <a:off x="835789" y="1425388"/>
-            <a:ext cx="20894029" cy="12442509"/>
+            <a:ext cx="20892503" cy="12441600"/>
           </a:xfrm>
           <a:prstGeom prst="rect">
             <a:avLst/>
@@ -6579,11 +6580,11 @@
           <a:p>
             <a:pPr algn="ctr"/>
             <a:r>
-              <a:rPr kumimoji="1" lang="en-US" altLang="zh-CN" sz="2800" dirty="0">
-                <a:latin typeface="Arial" panose="020B0604020202020204" pitchFamily="34" charset="0"/>
-                <a:cs typeface="Arial" panose="020B0604020202020204" pitchFamily="34" charset="0"/>
-              </a:rPr>
-              <a:t>1,248</a:t>
+              <a:rPr kumimoji="1" lang="en-US" altLang="zh-CN" sz="2800">
+                <a:latin typeface="Arial" panose="020B0604020202020204" pitchFamily="34" charset="0"/>
+                <a:cs typeface="Arial" panose="020B0604020202020204" pitchFamily="34" charset="0"/>
+              </a:rPr>
+              <a:t>1,428</a:t>
             </a:r>
             <a:endParaRPr kumimoji="1" lang="zh-CN" altLang="en-US" sz="2800" dirty="0">
               <a:latin typeface="Arial" panose="020B0604020202020204" pitchFamily="34" charset="0"/>
@@ -7430,7 +7431,7 @@
                 <a:latin typeface="Arial" panose="020B0604020202020204" pitchFamily="34" charset="0"/>
                 <a:cs typeface="Arial" panose="020B0604020202020204" pitchFamily="34" charset="0"/>
               </a:rPr>
-              <a:t>Cases</a:t>
+              <a:t>Images</a:t>
             </a:r>
             <a:endParaRPr kumimoji="1" lang="zh-CN" altLang="en-US" sz="4000" dirty="0">
               <a:latin typeface="Arial" panose="020B0604020202020204" pitchFamily="34" charset="0"/>
@@ -7443,6 +7444,1052 @@
     <p:extLst>
       <p:ext uri="{BB962C8B-B14F-4D97-AF65-F5344CB8AC3E}">
         <p14:creationId xmlns:p14="http://schemas.microsoft.com/office/powerpoint/2010/main" val="48238024"/>
+      </p:ext>
+    </p:extLst>
+  </p:cSld>
+  <p:clrMapOvr>
+    <a:masterClrMapping/>
+  </p:clrMapOvr>
+</p:sld>
+</file>
+
+<file path=ppt/slides/slide3.xml><?xml version="1.0" encoding="utf-8"?>
+<p:sld xmlns:a="http://schemas.openxmlformats.org/drawingml/2006/main" xmlns:r="http://schemas.openxmlformats.org/officeDocument/2006/relationships" xmlns:p="http://schemas.openxmlformats.org/presentationml/2006/main">
+  <p:cSld>
+    <p:spTree>
+      <p:nvGrpSpPr>
+        <p:cNvPr id="1" name="">
+          <a:extLst>
+            <a:ext uri="{FF2B5EF4-FFF2-40B4-BE49-F238E27FC236}">
+              <a16:creationId xmlns:a16="http://schemas.microsoft.com/office/drawing/2014/main" id="{BC957056-BE18-D765-D863-6A4544447598}"/>
+            </a:ext>
+          </a:extLst>
+        </p:cNvPr>
+        <p:cNvGrpSpPr/>
+        <p:nvPr/>
+      </p:nvGrpSpPr>
+      <p:grpSpPr>
+        <a:xfrm>
+          <a:off x="0" y="0"/>
+          <a:ext cx="0" cy="0"/>
+          <a:chOff x="0" y="0"/>
+          <a:chExt cx="0" cy="0"/>
+        </a:xfrm>
+      </p:grpSpPr>
+      <p:pic>
+        <p:nvPicPr>
+          <p:cNvPr id="16" name="图形 15">
+            <a:extLst>
+              <a:ext uri="{FF2B5EF4-FFF2-40B4-BE49-F238E27FC236}">
+                <a16:creationId xmlns:a16="http://schemas.microsoft.com/office/drawing/2014/main" id="{F3013C86-6325-798C-B7FA-9C92E675161A}"/>
+              </a:ext>
+            </a:extLst>
+          </p:cNvPr>
+          <p:cNvPicPr>
+            <a:picLocks noChangeAspect="1"/>
+          </p:cNvPicPr>
+          <p:nvPr/>
+        </p:nvPicPr>
+        <p:blipFill>
+          <a:blip>
+            <a:extLst>
+              <a:ext uri="{96DAC541-7B7A-43D3-8B79-37D633B846F1}">
+                <asvg:svgBlip xmlns:asvg="http://schemas.microsoft.com/office/drawing/2016/SVG/main" r:embed="rId2"/>
+              </a:ext>
+            </a:extLst>
+          </a:blip>
+          <a:stretch>
+            <a:fillRect/>
+          </a:stretch>
+        </p:blipFill>
+        <p:spPr>
+          <a:xfrm>
+            <a:off x="837316" y="1497520"/>
+            <a:ext cx="20892502" cy="12441600"/>
+          </a:xfrm>
+          <a:prstGeom prst="rect">
+            <a:avLst/>
+          </a:prstGeom>
+        </p:spPr>
+      </p:pic>
+      <p:sp>
+        <p:nvSpPr>
+          <p:cNvPr id="4" name="文本框 3">
+            <a:extLst>
+              <a:ext uri="{FF2B5EF4-FFF2-40B4-BE49-F238E27FC236}">
+                <a16:creationId xmlns:a16="http://schemas.microsoft.com/office/drawing/2014/main" id="{084A0024-F7A9-2EC8-6513-B0A985434798}"/>
+              </a:ext>
+            </a:extLst>
+          </p:cNvPr>
+          <p:cNvSpPr txBox="1"/>
+          <p:nvPr/>
+        </p:nvSpPr>
+        <p:spPr>
+          <a:xfrm>
+            <a:off x="19547149" y="2356530"/>
+            <a:ext cx="2182669" cy="523220"/>
+          </a:xfrm>
+          <a:prstGeom prst="rect">
+            <a:avLst/>
+          </a:prstGeom>
+          <a:noFill/>
+        </p:spPr>
+        <p:txBody>
+          <a:bodyPr wrap="square" rtlCol="0">
+            <a:spAutoFit/>
+          </a:bodyPr>
+          <a:lstStyle/>
+          <a:p>
+            <a:r>
+              <a:rPr kumimoji="1" lang="en-US" altLang="zh-CN" sz="2800" dirty="0">
+                <a:latin typeface="Arial" panose="020B0604020202020204" pitchFamily="34" charset="0"/>
+                <a:cs typeface="Arial" panose="020B0604020202020204" pitchFamily="34" charset="0"/>
+              </a:rPr>
+              <a:t>Benign</a:t>
+            </a:r>
+            <a:endParaRPr kumimoji="1" lang="zh-CN" altLang="en-US" sz="2800" dirty="0">
+              <a:latin typeface="Arial" panose="020B0604020202020204" pitchFamily="34" charset="0"/>
+              <a:cs typeface="Arial" panose="020B0604020202020204" pitchFamily="34" charset="0"/>
+            </a:endParaRPr>
+          </a:p>
+        </p:txBody>
+      </p:sp>
+      <p:sp>
+        <p:nvSpPr>
+          <p:cNvPr id="5" name="文本框 4">
+            <a:extLst>
+              <a:ext uri="{FF2B5EF4-FFF2-40B4-BE49-F238E27FC236}">
+                <a16:creationId xmlns:a16="http://schemas.microsoft.com/office/drawing/2014/main" id="{9088B3C5-9DA3-1C53-3ED3-7058C6ECE6A5}"/>
+              </a:ext>
+            </a:extLst>
+          </p:cNvPr>
+          <p:cNvSpPr txBox="1"/>
+          <p:nvPr/>
+        </p:nvSpPr>
+        <p:spPr>
+          <a:xfrm>
+            <a:off x="19547149" y="2868645"/>
+            <a:ext cx="2182669" cy="523220"/>
+          </a:xfrm>
+          <a:prstGeom prst="rect">
+            <a:avLst/>
+          </a:prstGeom>
+          <a:noFill/>
+        </p:spPr>
+        <p:txBody>
+          <a:bodyPr wrap="square" rtlCol="0">
+            <a:spAutoFit/>
+          </a:bodyPr>
+          <a:lstStyle/>
+          <a:p>
+            <a:r>
+              <a:rPr kumimoji="1" lang="en-US" altLang="zh-CN" sz="2800" dirty="0">
+                <a:latin typeface="Arial" panose="020B0604020202020204" pitchFamily="34" charset="0"/>
+                <a:cs typeface="Arial" panose="020B0604020202020204" pitchFamily="34" charset="0"/>
+              </a:rPr>
+              <a:t>Malignant</a:t>
+            </a:r>
+          </a:p>
+        </p:txBody>
+      </p:sp>
+      <p:sp>
+        <p:nvSpPr>
+          <p:cNvPr id="6" name="文本框 5">
+            <a:extLst>
+              <a:ext uri="{FF2B5EF4-FFF2-40B4-BE49-F238E27FC236}">
+                <a16:creationId xmlns:a16="http://schemas.microsoft.com/office/drawing/2014/main" id="{F646F14F-403D-3B17-6E47-7C6AAA20A511}"/>
+              </a:ext>
+            </a:extLst>
+          </p:cNvPr>
+          <p:cNvSpPr txBox="1"/>
+          <p:nvPr/>
+        </p:nvSpPr>
+        <p:spPr>
+          <a:xfrm>
+            <a:off x="19272399" y="3202186"/>
+            <a:ext cx="1283369" cy="523220"/>
+          </a:xfrm>
+          <a:prstGeom prst="rect">
+            <a:avLst/>
+          </a:prstGeom>
+          <a:noFill/>
+        </p:spPr>
+        <p:txBody>
+          <a:bodyPr wrap="square" rtlCol="0">
+            <a:spAutoFit/>
+          </a:bodyPr>
+          <a:lstStyle/>
+          <a:p>
+            <a:pPr algn="ctr"/>
+            <a:r>
+              <a:rPr kumimoji="1" lang="en-US" altLang="zh-CN" sz="2800" dirty="0">
+                <a:latin typeface="Arial" panose="020B0604020202020204" pitchFamily="34" charset="0"/>
+                <a:cs typeface="Arial" panose="020B0604020202020204" pitchFamily="34" charset="0"/>
+              </a:rPr>
+              <a:t>4,792</a:t>
+            </a:r>
+            <a:endParaRPr kumimoji="1" lang="zh-CN" altLang="en-US" sz="2800" dirty="0">
+              <a:latin typeface="Arial" panose="020B0604020202020204" pitchFamily="34" charset="0"/>
+              <a:cs typeface="Arial" panose="020B0604020202020204" pitchFamily="34" charset="0"/>
+            </a:endParaRPr>
+          </a:p>
+        </p:txBody>
+      </p:sp>
+      <p:sp>
+        <p:nvSpPr>
+          <p:cNvPr id="7" name="文本框 6">
+            <a:extLst>
+              <a:ext uri="{FF2B5EF4-FFF2-40B4-BE49-F238E27FC236}">
+                <a16:creationId xmlns:a16="http://schemas.microsoft.com/office/drawing/2014/main" id="{B889D92B-A71C-F091-1D20-8C681690E240}"/>
+              </a:ext>
+            </a:extLst>
+          </p:cNvPr>
+          <p:cNvSpPr txBox="1"/>
+          <p:nvPr/>
+        </p:nvSpPr>
+        <p:spPr>
+          <a:xfrm>
+            <a:off x="18047367" y="3838624"/>
+            <a:ext cx="1283369" cy="523220"/>
+          </a:xfrm>
+          <a:prstGeom prst="rect">
+            <a:avLst/>
+          </a:prstGeom>
+          <a:noFill/>
+        </p:spPr>
+        <p:txBody>
+          <a:bodyPr wrap="square" rtlCol="0">
+            <a:spAutoFit/>
+          </a:bodyPr>
+          <a:lstStyle/>
+          <a:p>
+            <a:pPr algn="ctr"/>
+            <a:r>
+              <a:rPr kumimoji="1" lang="en-US" altLang="zh-CN" sz="2800" dirty="0">
+                <a:latin typeface="Arial" panose="020B0604020202020204" pitchFamily="34" charset="0"/>
+                <a:cs typeface="Arial" panose="020B0604020202020204" pitchFamily="34" charset="0"/>
+              </a:rPr>
+              <a:t>3,288</a:t>
+            </a:r>
+            <a:endParaRPr kumimoji="1" lang="zh-CN" altLang="en-US" sz="2800" dirty="0">
+              <a:latin typeface="Arial" panose="020B0604020202020204" pitchFamily="34" charset="0"/>
+              <a:cs typeface="Arial" panose="020B0604020202020204" pitchFamily="34" charset="0"/>
+            </a:endParaRPr>
+          </a:p>
+        </p:txBody>
+      </p:sp>
+      <p:sp>
+        <p:nvSpPr>
+          <p:cNvPr id="8" name="文本框 7">
+            <a:extLst>
+              <a:ext uri="{FF2B5EF4-FFF2-40B4-BE49-F238E27FC236}">
+                <a16:creationId xmlns:a16="http://schemas.microsoft.com/office/drawing/2014/main" id="{A7AF3846-D460-CD42-7AE4-E950B8DB1F23}"/>
+              </a:ext>
+            </a:extLst>
+          </p:cNvPr>
+          <p:cNvSpPr txBox="1"/>
+          <p:nvPr/>
+        </p:nvSpPr>
+        <p:spPr>
+          <a:xfrm>
+            <a:off x="14285493" y="8020546"/>
+            <a:ext cx="1283369" cy="523220"/>
+          </a:xfrm>
+          <a:prstGeom prst="rect">
+            <a:avLst/>
+          </a:prstGeom>
+          <a:noFill/>
+        </p:spPr>
+        <p:txBody>
+          <a:bodyPr wrap="square" rtlCol="0">
+            <a:spAutoFit/>
+          </a:bodyPr>
+          <a:lstStyle/>
+          <a:p>
+            <a:pPr algn="ctr"/>
+            <a:r>
+              <a:rPr kumimoji="1" lang="en-US" altLang="zh-CN" sz="2800" dirty="0">
+                <a:latin typeface="Arial" panose="020B0604020202020204" pitchFamily="34" charset="0"/>
+                <a:cs typeface="Arial" panose="020B0604020202020204" pitchFamily="34" charset="0"/>
+              </a:rPr>
+              <a:t>304</a:t>
+            </a:r>
+            <a:endParaRPr kumimoji="1" lang="zh-CN" altLang="en-US" sz="2800" dirty="0">
+              <a:latin typeface="Arial" panose="020B0604020202020204" pitchFamily="34" charset="0"/>
+              <a:cs typeface="Arial" panose="020B0604020202020204" pitchFamily="34" charset="0"/>
+            </a:endParaRPr>
+          </a:p>
+        </p:txBody>
+      </p:sp>
+      <p:sp>
+        <p:nvSpPr>
+          <p:cNvPr id="9" name="文本框 8">
+            <a:extLst>
+              <a:ext uri="{FF2B5EF4-FFF2-40B4-BE49-F238E27FC236}">
+                <a16:creationId xmlns:a16="http://schemas.microsoft.com/office/drawing/2014/main" id="{7DEB9D76-2011-8E62-9A98-6C1153CE5E0B}"/>
+              </a:ext>
+            </a:extLst>
+          </p:cNvPr>
+          <p:cNvSpPr txBox="1"/>
+          <p:nvPr/>
+        </p:nvSpPr>
+        <p:spPr>
+          <a:xfrm>
+            <a:off x="15568862" y="11493661"/>
+            <a:ext cx="1283369" cy="523220"/>
+          </a:xfrm>
+          <a:prstGeom prst="rect">
+            <a:avLst/>
+          </a:prstGeom>
+          <a:noFill/>
+        </p:spPr>
+        <p:txBody>
+          <a:bodyPr wrap="square" rtlCol="0">
+            <a:spAutoFit/>
+          </a:bodyPr>
+          <a:lstStyle/>
+          <a:p>
+            <a:pPr algn="ctr"/>
+            <a:r>
+              <a:rPr kumimoji="1" lang="en-US" altLang="zh-CN" sz="2800" dirty="0">
+                <a:latin typeface="Arial" panose="020B0604020202020204" pitchFamily="34" charset="0"/>
+                <a:cs typeface="Arial" panose="020B0604020202020204" pitchFamily="34" charset="0"/>
+              </a:rPr>
+              <a:t>45</a:t>
+            </a:r>
+            <a:endParaRPr kumimoji="1" lang="zh-CN" altLang="en-US" sz="2800" dirty="0">
+              <a:latin typeface="Arial" panose="020B0604020202020204" pitchFamily="34" charset="0"/>
+              <a:cs typeface="Arial" panose="020B0604020202020204" pitchFamily="34" charset="0"/>
+            </a:endParaRPr>
+          </a:p>
+        </p:txBody>
+      </p:sp>
+      <p:sp>
+        <p:nvSpPr>
+          <p:cNvPr id="10" name="文本框 9">
+            <a:extLst>
+              <a:ext uri="{FF2B5EF4-FFF2-40B4-BE49-F238E27FC236}">
+                <a16:creationId xmlns:a16="http://schemas.microsoft.com/office/drawing/2014/main" id="{53544DB2-D2A4-B926-A58F-ABC133DC3CDC}"/>
+              </a:ext>
+            </a:extLst>
+          </p:cNvPr>
+          <p:cNvSpPr txBox="1"/>
+          <p:nvPr/>
+        </p:nvSpPr>
+        <p:spPr>
+          <a:xfrm>
+            <a:off x="11880056" y="3609546"/>
+            <a:ext cx="1283369" cy="523220"/>
+          </a:xfrm>
+          <a:prstGeom prst="rect">
+            <a:avLst/>
+          </a:prstGeom>
+          <a:noFill/>
+        </p:spPr>
+        <p:txBody>
+          <a:bodyPr wrap="square" rtlCol="0">
+            <a:spAutoFit/>
+          </a:bodyPr>
+          <a:lstStyle/>
+          <a:p>
+            <a:pPr algn="ctr"/>
+            <a:r>
+              <a:rPr kumimoji="1" lang="en-US" altLang="zh-CN" sz="2800" dirty="0">
+                <a:latin typeface="Arial" panose="020B0604020202020204" pitchFamily="34" charset="0"/>
+                <a:cs typeface="Arial" panose="020B0604020202020204" pitchFamily="34" charset="0"/>
+              </a:rPr>
+              <a:t>3,459</a:t>
+            </a:r>
+            <a:endParaRPr kumimoji="1" lang="zh-CN" altLang="en-US" sz="2800" dirty="0">
+              <a:latin typeface="Arial" panose="020B0604020202020204" pitchFamily="34" charset="0"/>
+              <a:cs typeface="Arial" panose="020B0604020202020204" pitchFamily="34" charset="0"/>
+            </a:endParaRPr>
+          </a:p>
+        </p:txBody>
+      </p:sp>
+      <p:sp>
+        <p:nvSpPr>
+          <p:cNvPr id="11" name="文本框 10">
+            <a:extLst>
+              <a:ext uri="{FF2B5EF4-FFF2-40B4-BE49-F238E27FC236}">
+                <a16:creationId xmlns:a16="http://schemas.microsoft.com/office/drawing/2014/main" id="{1871F6D8-B8EE-0571-EBE8-A6407B40557A}"/>
+              </a:ext>
+            </a:extLst>
+          </p:cNvPr>
+          <p:cNvSpPr txBox="1"/>
+          <p:nvPr/>
+        </p:nvSpPr>
+        <p:spPr>
+          <a:xfrm>
+            <a:off x="10580645" y="2191172"/>
+            <a:ext cx="1283369" cy="523220"/>
+          </a:xfrm>
+          <a:prstGeom prst="rect">
+            <a:avLst/>
+          </a:prstGeom>
+          <a:noFill/>
+        </p:spPr>
+        <p:txBody>
+          <a:bodyPr wrap="square" rtlCol="0">
+            <a:spAutoFit/>
+          </a:bodyPr>
+          <a:lstStyle/>
+          <a:p>
+            <a:pPr algn="ctr"/>
+            <a:r>
+              <a:rPr kumimoji="1" lang="en-US" altLang="zh-CN" sz="2800" dirty="0">
+                <a:latin typeface="Arial" panose="020B0604020202020204" pitchFamily="34" charset="0"/>
+                <a:cs typeface="Arial" panose="020B0604020202020204" pitchFamily="34" charset="0"/>
+              </a:rPr>
+              <a:t>8,172</a:t>
+            </a:r>
+            <a:endParaRPr kumimoji="1" lang="zh-CN" altLang="en-US" sz="2800" dirty="0">
+              <a:latin typeface="Arial" panose="020B0604020202020204" pitchFamily="34" charset="0"/>
+              <a:cs typeface="Arial" panose="020B0604020202020204" pitchFamily="34" charset="0"/>
+            </a:endParaRPr>
+          </a:p>
+        </p:txBody>
+      </p:sp>
+      <p:sp>
+        <p:nvSpPr>
+          <p:cNvPr id="12" name="文本框 11">
+            <a:extLst>
+              <a:ext uri="{FF2B5EF4-FFF2-40B4-BE49-F238E27FC236}">
+                <a16:creationId xmlns:a16="http://schemas.microsoft.com/office/drawing/2014/main" id="{33F55D1F-5E97-A2BC-BBE1-230BA3873CFC}"/>
+              </a:ext>
+            </a:extLst>
+          </p:cNvPr>
+          <p:cNvSpPr txBox="1"/>
+          <p:nvPr/>
+        </p:nvSpPr>
+        <p:spPr>
+          <a:xfrm>
+            <a:off x="8166308" y="3693875"/>
+            <a:ext cx="1283369" cy="523220"/>
+          </a:xfrm>
+          <a:prstGeom prst="rect">
+            <a:avLst/>
+          </a:prstGeom>
+          <a:noFill/>
+        </p:spPr>
+        <p:txBody>
+          <a:bodyPr wrap="square" rtlCol="0">
+            <a:spAutoFit/>
+          </a:bodyPr>
+          <a:lstStyle/>
+          <a:p>
+            <a:pPr algn="ctr"/>
+            <a:r>
+              <a:rPr kumimoji="1" lang="en-US" altLang="zh-CN" sz="2800" dirty="0">
+                <a:latin typeface="Arial" panose="020B0604020202020204" pitchFamily="34" charset="0"/>
+                <a:cs typeface="Arial" panose="020B0604020202020204" pitchFamily="34" charset="0"/>
+              </a:rPr>
+              <a:t>3,574</a:t>
+            </a:r>
+            <a:endParaRPr kumimoji="1" lang="zh-CN" altLang="en-US" sz="2800" dirty="0">
+              <a:latin typeface="Arial" panose="020B0604020202020204" pitchFamily="34" charset="0"/>
+              <a:cs typeface="Arial" panose="020B0604020202020204" pitchFamily="34" charset="0"/>
+            </a:endParaRPr>
+          </a:p>
+        </p:txBody>
+      </p:sp>
+      <p:sp>
+        <p:nvSpPr>
+          <p:cNvPr id="13" name="文本框 12">
+            <a:extLst>
+              <a:ext uri="{FF2B5EF4-FFF2-40B4-BE49-F238E27FC236}">
+                <a16:creationId xmlns:a16="http://schemas.microsoft.com/office/drawing/2014/main" id="{BD6F0CC9-0A4B-1103-8340-23F6A755F256}"/>
+              </a:ext>
+            </a:extLst>
+          </p:cNvPr>
+          <p:cNvSpPr txBox="1"/>
+          <p:nvPr/>
+        </p:nvSpPr>
+        <p:spPr>
+          <a:xfrm>
+            <a:off x="6850855" y="5306660"/>
+            <a:ext cx="1283369" cy="523220"/>
+          </a:xfrm>
+          <a:prstGeom prst="rect">
+            <a:avLst/>
+          </a:prstGeom>
+          <a:noFill/>
+        </p:spPr>
+        <p:txBody>
+          <a:bodyPr wrap="square" rtlCol="0">
+            <a:spAutoFit/>
+          </a:bodyPr>
+          <a:lstStyle/>
+          <a:p>
+            <a:pPr algn="ctr"/>
+            <a:r>
+              <a:rPr kumimoji="1" lang="en-US" altLang="zh-CN" sz="2800" dirty="0">
+                <a:latin typeface="Arial" panose="020B0604020202020204" pitchFamily="34" charset="0"/>
+                <a:cs typeface="Arial" panose="020B0604020202020204" pitchFamily="34" charset="0"/>
+              </a:rPr>
+              <a:t>1,426</a:t>
+            </a:r>
+            <a:endParaRPr kumimoji="1" lang="zh-CN" altLang="en-US" sz="2800" dirty="0">
+              <a:latin typeface="Arial" panose="020B0604020202020204" pitchFamily="34" charset="0"/>
+              <a:cs typeface="Arial" panose="020B0604020202020204" pitchFamily="34" charset="0"/>
+            </a:endParaRPr>
+          </a:p>
+        </p:txBody>
+      </p:sp>
+      <p:sp>
+        <p:nvSpPr>
+          <p:cNvPr id="14" name="文本框 13">
+            <a:extLst>
+              <a:ext uri="{FF2B5EF4-FFF2-40B4-BE49-F238E27FC236}">
+                <a16:creationId xmlns:a16="http://schemas.microsoft.com/office/drawing/2014/main" id="{AED2E20B-FADF-687E-11D2-E6FB2E6BF19C}"/>
+              </a:ext>
+            </a:extLst>
+          </p:cNvPr>
+          <p:cNvSpPr txBox="1"/>
+          <p:nvPr/>
+        </p:nvSpPr>
+        <p:spPr>
+          <a:xfrm>
+            <a:off x="4432869" y="4132766"/>
+            <a:ext cx="1283369" cy="523220"/>
+          </a:xfrm>
+          <a:prstGeom prst="rect">
+            <a:avLst/>
+          </a:prstGeom>
+          <a:noFill/>
+        </p:spPr>
+        <p:txBody>
+          <a:bodyPr wrap="square" rtlCol="0">
+            <a:spAutoFit/>
+          </a:bodyPr>
+          <a:lstStyle/>
+          <a:p>
+            <a:pPr algn="ctr"/>
+            <a:r>
+              <a:rPr kumimoji="1" lang="en-US" altLang="zh-CN" sz="2800" dirty="0">
+                <a:latin typeface="Arial" panose="020B0604020202020204" pitchFamily="34" charset="0"/>
+                <a:cs typeface="Arial" panose="020B0604020202020204" pitchFamily="34" charset="0"/>
+              </a:rPr>
+              <a:t>2,638</a:t>
+            </a:r>
+            <a:endParaRPr kumimoji="1" lang="zh-CN" altLang="en-US" sz="2800" dirty="0">
+              <a:latin typeface="Arial" panose="020B0604020202020204" pitchFamily="34" charset="0"/>
+              <a:cs typeface="Arial" panose="020B0604020202020204" pitchFamily="34" charset="0"/>
+            </a:endParaRPr>
+          </a:p>
+        </p:txBody>
+      </p:sp>
+      <p:sp>
+        <p:nvSpPr>
+          <p:cNvPr id="15" name="文本框 14">
+            <a:extLst>
+              <a:ext uri="{FF2B5EF4-FFF2-40B4-BE49-F238E27FC236}">
+                <a16:creationId xmlns:a16="http://schemas.microsoft.com/office/drawing/2014/main" id="{A7977C2A-78C7-6C95-C6D3-32E44BEE7FB8}"/>
+              </a:ext>
+            </a:extLst>
+          </p:cNvPr>
+          <p:cNvSpPr txBox="1"/>
+          <p:nvPr/>
+        </p:nvSpPr>
+        <p:spPr>
+          <a:xfrm>
+            <a:off x="3133458" y="4081555"/>
+            <a:ext cx="1283369" cy="523220"/>
+          </a:xfrm>
+          <a:prstGeom prst="rect">
+            <a:avLst/>
+          </a:prstGeom>
+          <a:noFill/>
+        </p:spPr>
+        <p:txBody>
+          <a:bodyPr wrap="square" rtlCol="0">
+            <a:spAutoFit/>
+          </a:bodyPr>
+          <a:lstStyle/>
+          <a:p>
+            <a:pPr algn="ctr"/>
+            <a:r>
+              <a:rPr kumimoji="1" lang="en-US" altLang="zh-CN" sz="2800" dirty="0">
+                <a:latin typeface="Arial" panose="020B0604020202020204" pitchFamily="34" charset="0"/>
+                <a:cs typeface="Arial" panose="020B0604020202020204" pitchFamily="34" charset="0"/>
+              </a:rPr>
+              <a:t>2,709</a:t>
+            </a:r>
+            <a:endParaRPr kumimoji="1" lang="zh-CN" altLang="en-US" sz="2800" dirty="0">
+              <a:latin typeface="Arial" panose="020B0604020202020204" pitchFamily="34" charset="0"/>
+              <a:cs typeface="Arial" panose="020B0604020202020204" pitchFamily="34" charset="0"/>
+            </a:endParaRPr>
+          </a:p>
+        </p:txBody>
+      </p:sp>
+      <p:sp>
+        <p:nvSpPr>
+          <p:cNvPr id="17" name="文本框 16">
+            <a:extLst>
+              <a:ext uri="{FF2B5EF4-FFF2-40B4-BE49-F238E27FC236}">
+                <a16:creationId xmlns:a16="http://schemas.microsoft.com/office/drawing/2014/main" id="{F6E3CCDE-D93D-BE92-E190-7D173DF7EB57}"/>
+              </a:ext>
+            </a:extLst>
+          </p:cNvPr>
+          <p:cNvSpPr txBox="1"/>
+          <p:nvPr/>
+        </p:nvSpPr>
+        <p:spPr>
+          <a:xfrm>
+            <a:off x="3133458" y="12694868"/>
+            <a:ext cx="2582780" cy="584775"/>
+          </a:xfrm>
+          <a:prstGeom prst="rect">
+            <a:avLst/>
+          </a:prstGeom>
+          <a:noFill/>
+        </p:spPr>
+        <p:txBody>
+          <a:bodyPr wrap="square" rtlCol="0">
+            <a:spAutoFit/>
+          </a:bodyPr>
+          <a:lstStyle/>
+          <a:p>
+            <a:pPr algn="ctr"/>
+            <a:r>
+              <a:rPr kumimoji="1" lang="en-US" altLang="zh-CN" sz="3200" dirty="0">
+                <a:latin typeface="Arial" panose="020B0604020202020204" pitchFamily="34" charset="0"/>
+                <a:cs typeface="Arial" panose="020B0604020202020204" pitchFamily="34" charset="0"/>
+              </a:rPr>
+              <a:t>TN3K</a:t>
+            </a:r>
+          </a:p>
+        </p:txBody>
+      </p:sp>
+      <p:sp>
+        <p:nvSpPr>
+          <p:cNvPr id="18" name="文本框 17">
+            <a:extLst>
+              <a:ext uri="{FF2B5EF4-FFF2-40B4-BE49-F238E27FC236}">
+                <a16:creationId xmlns:a16="http://schemas.microsoft.com/office/drawing/2014/main" id="{A99E716E-AB1A-9A50-7879-8CE85C53C01D}"/>
+              </a:ext>
+            </a:extLst>
+          </p:cNvPr>
+          <p:cNvSpPr txBox="1"/>
+          <p:nvPr/>
+        </p:nvSpPr>
+        <p:spPr>
+          <a:xfrm>
+            <a:off x="6722517" y="12694868"/>
+            <a:ext cx="2582780" cy="584775"/>
+          </a:xfrm>
+          <a:prstGeom prst="rect">
+            <a:avLst/>
+          </a:prstGeom>
+          <a:noFill/>
+        </p:spPr>
+        <p:txBody>
+          <a:bodyPr wrap="square" rtlCol="0">
+            <a:spAutoFit/>
+          </a:bodyPr>
+          <a:lstStyle/>
+          <a:p>
+            <a:pPr algn="ctr"/>
+            <a:r>
+              <a:rPr kumimoji="1" lang="en-US" altLang="zh-CN" sz="3200" dirty="0">
+                <a:latin typeface="Arial" panose="020B0604020202020204" pitchFamily="34" charset="0"/>
+                <a:cs typeface="Arial" panose="020B0604020202020204" pitchFamily="34" charset="0"/>
+              </a:rPr>
+              <a:t>TN5K</a:t>
+            </a:r>
+          </a:p>
+        </p:txBody>
+      </p:sp>
+      <p:sp>
+        <p:nvSpPr>
+          <p:cNvPr id="19" name="文本框 18">
+            <a:extLst>
+              <a:ext uri="{FF2B5EF4-FFF2-40B4-BE49-F238E27FC236}">
+                <a16:creationId xmlns:a16="http://schemas.microsoft.com/office/drawing/2014/main" id="{40F39F00-D1D3-09A3-D05C-2490DBAEB584}"/>
+              </a:ext>
+            </a:extLst>
+          </p:cNvPr>
+          <p:cNvSpPr txBox="1"/>
+          <p:nvPr/>
+        </p:nvSpPr>
+        <p:spPr>
+          <a:xfrm>
+            <a:off x="10569741" y="12694867"/>
+            <a:ext cx="2582780" cy="584775"/>
+          </a:xfrm>
+          <a:prstGeom prst="rect">
+            <a:avLst/>
+          </a:prstGeom>
+          <a:noFill/>
+        </p:spPr>
+        <p:txBody>
+          <a:bodyPr wrap="square" rtlCol="0">
+            <a:spAutoFit/>
+          </a:bodyPr>
+          <a:lstStyle/>
+          <a:p>
+            <a:pPr algn="ctr"/>
+            <a:r>
+              <a:rPr kumimoji="1" lang="en-US" altLang="zh-CN" sz="3200" dirty="0" err="1">
+                <a:latin typeface="Arial" panose="020B0604020202020204" pitchFamily="34" charset="0"/>
+                <a:cs typeface="Arial" panose="020B0604020202020204" pitchFamily="34" charset="0"/>
+              </a:rPr>
+              <a:t>ThyroidXL</a:t>
+            </a:r>
+            <a:endParaRPr kumimoji="1" lang="en-US" altLang="zh-CN" sz="3200" dirty="0">
+              <a:latin typeface="Arial" panose="020B0604020202020204" pitchFamily="34" charset="0"/>
+              <a:cs typeface="Arial" panose="020B0604020202020204" pitchFamily="34" charset="0"/>
+            </a:endParaRPr>
+          </a:p>
+        </p:txBody>
+      </p:sp>
+      <p:sp>
+        <p:nvSpPr>
+          <p:cNvPr id="20" name="文本框 19">
+            <a:extLst>
+              <a:ext uri="{FF2B5EF4-FFF2-40B4-BE49-F238E27FC236}">
+                <a16:creationId xmlns:a16="http://schemas.microsoft.com/office/drawing/2014/main" id="{450955E7-FB48-BDD9-0BAC-EE2A28B1D557}"/>
+              </a:ext>
+            </a:extLst>
+          </p:cNvPr>
+          <p:cNvSpPr txBox="1"/>
+          <p:nvPr/>
+        </p:nvSpPr>
+        <p:spPr>
+          <a:xfrm>
+            <a:off x="14226167" y="12694866"/>
+            <a:ext cx="2582780" cy="584775"/>
+          </a:xfrm>
+          <a:prstGeom prst="rect">
+            <a:avLst/>
+          </a:prstGeom>
+          <a:noFill/>
+        </p:spPr>
+        <p:txBody>
+          <a:bodyPr wrap="square" rtlCol="0">
+            <a:spAutoFit/>
+          </a:bodyPr>
+          <a:lstStyle/>
+          <a:p>
+            <a:pPr algn="ctr"/>
+            <a:r>
+              <a:rPr kumimoji="1" lang="en-US" altLang="zh-CN" sz="3200" dirty="0">
+                <a:latin typeface="Arial" panose="020B0604020202020204" pitchFamily="34" charset="0"/>
+                <a:cs typeface="Arial" panose="020B0604020202020204" pitchFamily="34" charset="0"/>
+              </a:rPr>
+              <a:t>DDTI</a:t>
+            </a:r>
+          </a:p>
+        </p:txBody>
+      </p:sp>
+      <p:sp>
+        <p:nvSpPr>
+          <p:cNvPr id="21" name="文本框 20">
+            <a:extLst>
+              <a:ext uri="{FF2B5EF4-FFF2-40B4-BE49-F238E27FC236}">
+                <a16:creationId xmlns:a16="http://schemas.microsoft.com/office/drawing/2014/main" id="{2FB7CD0B-DE9A-F576-1669-EFD5126840A2}"/>
+              </a:ext>
+            </a:extLst>
+          </p:cNvPr>
+          <p:cNvSpPr txBox="1"/>
+          <p:nvPr/>
+        </p:nvSpPr>
+        <p:spPr>
+          <a:xfrm>
+            <a:off x="18073391" y="12694866"/>
+            <a:ext cx="2582780" cy="584775"/>
+          </a:xfrm>
+          <a:prstGeom prst="rect">
+            <a:avLst/>
+          </a:prstGeom>
+          <a:noFill/>
+        </p:spPr>
+        <p:txBody>
+          <a:bodyPr wrap="square" rtlCol="0">
+            <a:spAutoFit/>
+          </a:bodyPr>
+          <a:lstStyle/>
+          <a:p>
+            <a:pPr algn="ctr"/>
+            <a:r>
+              <a:rPr kumimoji="1" lang="en-US" altLang="zh-CN" sz="3200">
+                <a:latin typeface="Arial" panose="020B0604020202020204" pitchFamily="34" charset="0"/>
+                <a:cs typeface="Arial" panose="020B0604020202020204" pitchFamily="34" charset="0"/>
+              </a:rPr>
+              <a:t>ZJH-8K</a:t>
+            </a:r>
+            <a:endParaRPr kumimoji="1" lang="en-US" altLang="zh-CN" sz="3200" dirty="0">
+              <a:latin typeface="Arial" panose="020B0604020202020204" pitchFamily="34" charset="0"/>
+              <a:cs typeface="Arial" panose="020B0604020202020204" pitchFamily="34" charset="0"/>
+            </a:endParaRPr>
+          </a:p>
+        </p:txBody>
+      </p:sp>
+      <p:sp>
+        <p:nvSpPr>
+          <p:cNvPr id="22" name="文本框 21">
+            <a:extLst>
+              <a:ext uri="{FF2B5EF4-FFF2-40B4-BE49-F238E27FC236}">
+                <a16:creationId xmlns:a16="http://schemas.microsoft.com/office/drawing/2014/main" id="{237BBA2E-D2E0-9A1B-E16F-149F249BAA31}"/>
+              </a:ext>
+            </a:extLst>
+          </p:cNvPr>
+          <p:cNvSpPr txBox="1"/>
+          <p:nvPr/>
+        </p:nvSpPr>
+        <p:spPr>
+          <a:xfrm>
+            <a:off x="2209799" y="13201928"/>
+            <a:ext cx="19302663" cy="707886"/>
+          </a:xfrm>
+          <a:prstGeom prst="rect">
+            <a:avLst/>
+          </a:prstGeom>
+          <a:noFill/>
+        </p:spPr>
+        <p:txBody>
+          <a:bodyPr wrap="square" rtlCol="0">
+            <a:spAutoFit/>
+          </a:bodyPr>
+          <a:lstStyle/>
+          <a:p>
+            <a:pPr algn="ctr"/>
+            <a:r>
+              <a:rPr kumimoji="1" lang="en-US" altLang="zh-CN" sz="4000" dirty="0">
+                <a:latin typeface="Arial" panose="020B0604020202020204" pitchFamily="34" charset="0"/>
+                <a:cs typeface="Arial" panose="020B0604020202020204" pitchFamily="34" charset="0"/>
+              </a:rPr>
+              <a:t>Dataset</a:t>
+            </a:r>
+            <a:endParaRPr kumimoji="1" lang="zh-CN" altLang="en-US" sz="4000" dirty="0">
+              <a:latin typeface="Arial" panose="020B0604020202020204" pitchFamily="34" charset="0"/>
+              <a:cs typeface="Arial" panose="020B0604020202020204" pitchFamily="34" charset="0"/>
+            </a:endParaRPr>
+          </a:p>
+        </p:txBody>
+      </p:sp>
+      <p:sp>
+        <p:nvSpPr>
+          <p:cNvPr id="23" name="文本框 22">
+            <a:extLst>
+              <a:ext uri="{FF2B5EF4-FFF2-40B4-BE49-F238E27FC236}">
+                <a16:creationId xmlns:a16="http://schemas.microsoft.com/office/drawing/2014/main" id="{5C1E4CF8-0440-D3C6-50CB-9DF1898CD559}"/>
+              </a:ext>
+            </a:extLst>
+          </p:cNvPr>
+          <p:cNvSpPr txBox="1"/>
+          <p:nvPr/>
+        </p:nvSpPr>
+        <p:spPr>
+          <a:xfrm>
+            <a:off x="1325445" y="1888793"/>
+            <a:ext cx="1080000" cy="584775"/>
+          </a:xfrm>
+          <a:prstGeom prst="rect">
+            <a:avLst/>
+          </a:prstGeom>
+          <a:noFill/>
+        </p:spPr>
+        <p:txBody>
+          <a:bodyPr wrap="square" rtlCol="0">
+            <a:spAutoFit/>
+          </a:bodyPr>
+          <a:lstStyle/>
+          <a:p>
+            <a:r>
+              <a:rPr kumimoji="1" lang="en-US" altLang="zh-CN" sz="3200" dirty="0">
+                <a:latin typeface="Arial" panose="020B0604020202020204" pitchFamily="34" charset="0"/>
+                <a:cs typeface="Arial" panose="020B0604020202020204" pitchFamily="34" charset="0"/>
+              </a:rPr>
+              <a:t>10</a:t>
+            </a:r>
+            <a:r>
+              <a:rPr kumimoji="1" lang="en-US" altLang="zh-CN" sz="3200" baseline="30000" dirty="0">
+                <a:latin typeface="Arial" panose="020B0604020202020204" pitchFamily="34" charset="0"/>
+                <a:cs typeface="Arial" panose="020B0604020202020204" pitchFamily="34" charset="0"/>
+              </a:rPr>
+              <a:t>4</a:t>
+            </a:r>
+            <a:endParaRPr kumimoji="1" lang="zh-CN" altLang="en-US" sz="3200" dirty="0">
+              <a:latin typeface="Arial" panose="020B0604020202020204" pitchFamily="34" charset="0"/>
+              <a:cs typeface="Arial" panose="020B0604020202020204" pitchFamily="34" charset="0"/>
+            </a:endParaRPr>
+          </a:p>
+        </p:txBody>
+      </p:sp>
+      <p:sp>
+        <p:nvSpPr>
+          <p:cNvPr id="24" name="文本框 23">
+            <a:extLst>
+              <a:ext uri="{FF2B5EF4-FFF2-40B4-BE49-F238E27FC236}">
+                <a16:creationId xmlns:a16="http://schemas.microsoft.com/office/drawing/2014/main" id="{6E743D34-819F-184D-F7BB-44BE1315DE04}"/>
+              </a:ext>
+            </a:extLst>
+          </p:cNvPr>
+          <p:cNvSpPr txBox="1"/>
+          <p:nvPr/>
+        </p:nvSpPr>
+        <p:spPr>
+          <a:xfrm>
+            <a:off x="1325445" y="6033682"/>
+            <a:ext cx="1080000" cy="584775"/>
+          </a:xfrm>
+          <a:prstGeom prst="rect">
+            <a:avLst/>
+          </a:prstGeom>
+          <a:noFill/>
+        </p:spPr>
+        <p:txBody>
+          <a:bodyPr wrap="square" rtlCol="0">
+            <a:spAutoFit/>
+          </a:bodyPr>
+          <a:lstStyle/>
+          <a:p>
+            <a:r>
+              <a:rPr kumimoji="1" lang="en-US" altLang="zh-CN" sz="3200" dirty="0">
+                <a:latin typeface="Arial" panose="020B0604020202020204" pitchFamily="34" charset="0"/>
+                <a:cs typeface="Arial" panose="020B0604020202020204" pitchFamily="34" charset="0"/>
+              </a:rPr>
+              <a:t>10</a:t>
+            </a:r>
+            <a:r>
+              <a:rPr kumimoji="1" lang="en-US" altLang="zh-CN" sz="3200" baseline="30000" dirty="0">
+                <a:latin typeface="Arial" panose="020B0604020202020204" pitchFamily="34" charset="0"/>
+                <a:cs typeface="Arial" panose="020B0604020202020204" pitchFamily="34" charset="0"/>
+              </a:rPr>
+              <a:t>3</a:t>
+            </a:r>
+            <a:endParaRPr kumimoji="1" lang="zh-CN" altLang="en-US" sz="3200" dirty="0">
+              <a:latin typeface="Arial" panose="020B0604020202020204" pitchFamily="34" charset="0"/>
+              <a:cs typeface="Arial" panose="020B0604020202020204" pitchFamily="34" charset="0"/>
+            </a:endParaRPr>
+          </a:p>
+        </p:txBody>
+      </p:sp>
+      <p:sp>
+        <p:nvSpPr>
+          <p:cNvPr id="25" name="文本框 24">
+            <a:extLst>
+              <a:ext uri="{FF2B5EF4-FFF2-40B4-BE49-F238E27FC236}">
+                <a16:creationId xmlns:a16="http://schemas.microsoft.com/office/drawing/2014/main" id="{EF13E5E3-AFBB-380B-E23E-CF18F0E9215F}"/>
+              </a:ext>
+            </a:extLst>
+          </p:cNvPr>
+          <p:cNvSpPr txBox="1"/>
+          <p:nvPr/>
+        </p:nvSpPr>
+        <p:spPr>
+          <a:xfrm>
+            <a:off x="1325445" y="10256240"/>
+            <a:ext cx="1080000" cy="584775"/>
+          </a:xfrm>
+          <a:prstGeom prst="rect">
+            <a:avLst/>
+          </a:prstGeom>
+          <a:noFill/>
+        </p:spPr>
+        <p:txBody>
+          <a:bodyPr wrap="square" rtlCol="0">
+            <a:spAutoFit/>
+          </a:bodyPr>
+          <a:lstStyle/>
+          <a:p>
+            <a:r>
+              <a:rPr kumimoji="1" lang="en-US" altLang="zh-CN" sz="3200" dirty="0">
+                <a:latin typeface="Arial" panose="020B0604020202020204" pitchFamily="34" charset="0"/>
+                <a:cs typeface="Arial" panose="020B0604020202020204" pitchFamily="34" charset="0"/>
+              </a:rPr>
+              <a:t>10</a:t>
+            </a:r>
+            <a:r>
+              <a:rPr kumimoji="1" lang="en-US" altLang="zh-CN" sz="3200" baseline="30000" dirty="0">
+                <a:latin typeface="Arial" panose="020B0604020202020204" pitchFamily="34" charset="0"/>
+                <a:cs typeface="Arial" panose="020B0604020202020204" pitchFamily="34" charset="0"/>
+              </a:rPr>
+              <a:t>2</a:t>
+            </a:r>
+            <a:endParaRPr kumimoji="1" lang="zh-CN" altLang="en-US" sz="3200" dirty="0">
+              <a:latin typeface="Arial" panose="020B0604020202020204" pitchFamily="34" charset="0"/>
+              <a:cs typeface="Arial" panose="020B0604020202020204" pitchFamily="34" charset="0"/>
+            </a:endParaRPr>
+          </a:p>
+        </p:txBody>
+      </p:sp>
+      <p:sp>
+        <p:nvSpPr>
+          <p:cNvPr id="26" name="文本框 25">
+            <a:extLst>
+              <a:ext uri="{FF2B5EF4-FFF2-40B4-BE49-F238E27FC236}">
+                <a16:creationId xmlns:a16="http://schemas.microsoft.com/office/drawing/2014/main" id="{5D41EB83-4807-3564-8059-325833973A87}"/>
+              </a:ext>
+            </a:extLst>
+          </p:cNvPr>
+          <p:cNvSpPr txBox="1"/>
+          <p:nvPr/>
+        </p:nvSpPr>
+        <p:spPr>
+          <a:xfrm rot="16200000">
+            <a:off x="-4341332" y="6937887"/>
+            <a:ext cx="10806074" cy="707886"/>
+          </a:xfrm>
+          <a:prstGeom prst="rect">
+            <a:avLst/>
+          </a:prstGeom>
+          <a:noFill/>
+        </p:spPr>
+        <p:txBody>
+          <a:bodyPr wrap="square" rtlCol="0">
+            <a:spAutoFit/>
+          </a:bodyPr>
+          <a:lstStyle/>
+          <a:p>
+            <a:pPr algn="ctr"/>
+            <a:r>
+              <a:rPr kumimoji="1" lang="en-US" altLang="zh-CN" sz="4000" dirty="0">
+                <a:latin typeface="Arial" panose="020B0604020202020204" pitchFamily="34" charset="0"/>
+                <a:cs typeface="Arial" panose="020B0604020202020204" pitchFamily="34" charset="0"/>
+              </a:rPr>
+              <a:t>Number</a:t>
+            </a:r>
+            <a:r>
+              <a:rPr kumimoji="1" lang="zh-CN" altLang="en-US" sz="4000" dirty="0">
+                <a:latin typeface="Arial" panose="020B0604020202020204" pitchFamily="34" charset="0"/>
+                <a:cs typeface="Arial" panose="020B0604020202020204" pitchFamily="34" charset="0"/>
+              </a:rPr>
+              <a:t> </a:t>
+            </a:r>
+            <a:r>
+              <a:rPr kumimoji="1" lang="en-US" altLang="zh-CN" sz="4000" dirty="0">
+                <a:latin typeface="Arial" panose="020B0604020202020204" pitchFamily="34" charset="0"/>
+                <a:cs typeface="Arial" panose="020B0604020202020204" pitchFamily="34" charset="0"/>
+              </a:rPr>
+              <a:t>of</a:t>
+            </a:r>
+            <a:r>
+              <a:rPr kumimoji="1" lang="zh-CN" altLang="en-US" sz="4000" dirty="0">
+                <a:latin typeface="Arial" panose="020B0604020202020204" pitchFamily="34" charset="0"/>
+                <a:cs typeface="Arial" panose="020B0604020202020204" pitchFamily="34" charset="0"/>
+              </a:rPr>
+              <a:t> </a:t>
+            </a:r>
+            <a:r>
+              <a:rPr kumimoji="1" lang="en-US" altLang="zh-CN" sz="4000" dirty="0">
+                <a:latin typeface="Arial" panose="020B0604020202020204" pitchFamily="34" charset="0"/>
+                <a:cs typeface="Arial" panose="020B0604020202020204" pitchFamily="34" charset="0"/>
+              </a:rPr>
+              <a:t>Images</a:t>
+            </a:r>
+            <a:endParaRPr kumimoji="1" lang="zh-CN" altLang="en-US" sz="4000" dirty="0">
+              <a:latin typeface="Arial" panose="020B0604020202020204" pitchFamily="34" charset="0"/>
+              <a:cs typeface="Arial" panose="020B0604020202020204" pitchFamily="34" charset="0"/>
+            </a:endParaRPr>
+          </a:p>
+        </p:txBody>
+      </p:sp>
+    </p:spTree>
+    <p:extLst>
+      <p:ext uri="{BB962C8B-B14F-4D97-AF65-F5344CB8AC3E}">
+        <p14:creationId xmlns:p14="http://schemas.microsoft.com/office/powerpoint/2010/main" val="1971907758"/>
       </p:ext>
     </p:extLst>
   </p:cSld>
